--- a/output/6.pptx
+++ b/output/6.pptx
@@ -3174,8 +3174,8 @@
         </p:nvCxnSpPr>
         <p:spPr>
           <a:xfrm flipV="1">
-            <a:off x="4572000.0" y="2251710.0"/>
-            <a:ext cx="91440.0" cy="91440.0"/>
+            <a:off x="4572000.0" y="2312974.8"/>
+            <a:ext cx="93726.0" cy="258775.2000000002"/>
           </a:xfrm>
           <a:prstGeom prst="line">
             <a:avLst/>
@@ -3209,8 +3209,8 @@
         </p:nvCxnSpPr>
         <p:spPr>
           <a:xfrm flipV="1">
-            <a:off x="4663440.0" y="2160270.0"/>
-            <a:ext cx="91440.0" cy="91440.0"/>
+            <a:off x="4665726.0" y="2204618.4"/>
+            <a:ext cx="94183.20000000019" cy="108356.3999999999"/>
           </a:xfrm>
           <a:prstGeom prst="line">
             <a:avLst/>
@@ -3244,8 +3244,8 @@
         </p:nvCxnSpPr>
         <p:spPr>
           <a:xfrm flipV="1">
-            <a:off x="4754880.0" y="2068830.0"/>
-            <a:ext cx="91440.0" cy="91440.0"/>
+            <a:off x="4759909.2" y="2123236.8"/>
+            <a:ext cx="93726.0" cy="81381.6000000001"/>
           </a:xfrm>
           <a:prstGeom prst="line">
             <a:avLst/>
@@ -3279,8 +3279,8 @@
         </p:nvCxnSpPr>
         <p:spPr>
           <a:xfrm flipV="1">
-            <a:off x="4846320.0" y="2000250.0"/>
-            <a:ext cx="91440.0" cy="68580.0"/>
+            <a:off x="4853635.2" y="2053285.2000000002"/>
+            <a:ext cx="93726.0" cy="69951.59999999963"/>
           </a:xfrm>
           <a:prstGeom prst="line">
             <a:avLst/>
@@ -3314,8 +3314,8 @@
         </p:nvCxnSpPr>
         <p:spPr>
           <a:xfrm flipV="1">
-            <a:off x="4937760.0" y="1931670.0"/>
-            <a:ext cx="91440.0" cy="68580.0"/>
+            <a:off x="4947361.2" y="1992020.4"/>
+            <a:ext cx="93726.0" cy="61264.80000000028"/>
           </a:xfrm>
           <a:prstGeom prst="line">
             <a:avLst/>
@@ -3349,8 +3349,8 @@
         </p:nvCxnSpPr>
         <p:spPr>
           <a:xfrm flipV="1">
-            <a:off x="5029200.0" y="1863090.0"/>
-            <a:ext cx="91440.0" cy="68580.0"/>
+            <a:off x="5041087.2" y="1936699.2"/>
+            <a:ext cx="94183.20000000019" cy="55321.19999999995"/>
           </a:xfrm>
           <a:prstGeom prst="line">
             <a:avLst/>
@@ -3384,8 +3384,8 @@
         </p:nvCxnSpPr>
         <p:spPr>
           <a:xfrm flipV="1">
-            <a:off x="5120640.0" y="1794510.0"/>
-            <a:ext cx="91440.0" cy="68580.0"/>
+            <a:off x="5135270.4" y="1886864.4"/>
+            <a:ext cx="93726.0" cy="49834.80000000005"/>
           </a:xfrm>
           <a:prstGeom prst="line">
             <a:avLst/>
@@ -3419,8 +3419,8 @@
         </p:nvCxnSpPr>
         <p:spPr>
           <a:xfrm flipV="1">
-            <a:off x="5212080.0" y="1748790.0"/>
-            <a:ext cx="91440.0" cy="45720.0"/>
+            <a:off x="5228996.4" y="1840687.2"/>
+            <a:ext cx="93726.0" cy="46177.19999999995"/>
           </a:xfrm>
           <a:prstGeom prst="line">
             <a:avLst/>
@@ -3454,8 +3454,8 @@
         </p:nvCxnSpPr>
         <p:spPr>
           <a:xfrm flipV="1">
-            <a:off x="5303520.0" y="1703070.0"/>
-            <a:ext cx="91440.0" cy="45720.0"/>
+            <a:off x="5322722.4" y="1797710.4"/>
+            <a:ext cx="93726.0" cy="42976.80000000005"/>
           </a:xfrm>
           <a:prstGeom prst="line">
             <a:avLst/>
@@ -3489,8 +3489,8 @@
         </p:nvCxnSpPr>
         <p:spPr>
           <a:xfrm flipV="1">
-            <a:off x="5394960.0" y="1657350.0"/>
-            <a:ext cx="91440.0" cy="45720.0"/>
+            <a:off x="5416448.4" y="1757019.6"/>
+            <a:ext cx="94183.19999999925" cy="40690.799999999814"/>
           </a:xfrm>
           <a:prstGeom prst="line">
             <a:avLst/>
@@ -3524,8 +3524,8 @@
         </p:nvCxnSpPr>
         <p:spPr>
           <a:xfrm flipV="1">
-            <a:off x="5486400.0" y="1611630.0"/>
-            <a:ext cx="91440.0" cy="45720.0"/>
+            <a:off x="5510631.6" y="1719072.0"/>
+            <a:ext cx="93726.0" cy="37947.60000000009"/>
           </a:xfrm>
           <a:prstGeom prst="line">
             <a:avLst/>
@@ -3559,8 +3559,8 @@
         </p:nvCxnSpPr>
         <p:spPr>
           <a:xfrm flipV="1">
-            <a:off x="5577840.0" y="1565910.0"/>
-            <a:ext cx="91440.0" cy="45720.0"/>
+            <a:off x="5604357.6" y="1682496.0"/>
+            <a:ext cx="93726.0" cy="36576.0"/>
           </a:xfrm>
           <a:prstGeom prst="line">
             <a:avLst/>
@@ -3594,8 +3594,8 @@
         </p:nvCxnSpPr>
         <p:spPr>
           <a:xfrm flipV="1">
-            <a:off x="5669280.0" y="1520190.0"/>
-            <a:ext cx="91440.0" cy="45720.0"/>
+            <a:off x="5698083.6" y="1648206.0"/>
+            <a:ext cx="93726.0" cy="34290.0"/>
           </a:xfrm>
           <a:prstGeom prst="line">
             <a:avLst/>
@@ -3629,8 +3629,8 @@
         </p:nvCxnSpPr>
         <p:spPr>
           <a:xfrm flipV="1">
-            <a:off x="5760720.0" y="1474470.0"/>
-            <a:ext cx="91440.0" cy="45720.0"/>
+            <a:off x="5791809.6" y="1615287.6"/>
+            <a:ext cx="94183.20000000019" cy="32918.39999999991"/>
           </a:xfrm>
           <a:prstGeom prst="line">
             <a:avLst/>
@@ -3664,8 +3664,8 @@
         </p:nvCxnSpPr>
         <p:spPr>
           <a:xfrm flipV="1">
-            <a:off x="5852160.0" y="1451610.0"/>
-            <a:ext cx="45720.0" cy="22860.0"/>
+            <a:off x="5885992.8" y="1584198.0"/>
+            <a:ext cx="93726.0" cy="31089.600000000093"/>
           </a:xfrm>
           <a:prstGeom prst="line">
             <a:avLst/>
@@ -3699,8 +3699,8 @@
         </p:nvCxnSpPr>
         <p:spPr>
           <a:xfrm flipV="1">
-            <a:off x="5989320.0" y="1383030.0"/>
-            <a:ext cx="45720.0" cy="22860.0"/>
+            <a:off x="5979718.8" y="1554022.8"/>
+            <a:ext cx="93726.0" cy="30175.199999999953"/>
           </a:xfrm>
           <a:prstGeom prst="line">
             <a:avLst/>
@@ -3734,8 +3734,8 @@
         </p:nvCxnSpPr>
         <p:spPr>
           <a:xfrm flipV="1">
-            <a:off x="6035040.0" y="1360170.0"/>
-            <a:ext cx="91440.0" cy="22860.0"/>
+            <a:off x="6073444.8" y="1525219.2"/>
+            <a:ext cx="93726.0" cy="28803.600000000093"/>
           </a:xfrm>
           <a:prstGeom prst="line">
             <a:avLst/>
@@ -3769,8 +3769,8 @@
         </p:nvCxnSpPr>
         <p:spPr>
           <a:xfrm flipV="1">
-            <a:off x="6126480.0" y="1314450.0"/>
-            <a:ext cx="91440.0" cy="45720.0"/>
+            <a:off x="6167170.8" y="1497330.0"/>
+            <a:ext cx="94183.20000000019" cy="27889.199999999953"/>
           </a:xfrm>
           <a:prstGeom prst="line">
             <a:avLst/>
@@ -3804,8 +3804,8 @@
         </p:nvCxnSpPr>
         <p:spPr>
           <a:xfrm flipV="1">
-            <a:off x="6217920.0" y="1268730.0"/>
-            <a:ext cx="91440.0" cy="45720.0"/>
+            <a:off x="6261354.0" y="1470812.4000000001"/>
+            <a:ext cx="93726.0" cy="26517.59999999986"/>
           </a:xfrm>
           <a:prstGeom prst="line">
             <a:avLst/>
@@ -3839,8 +3839,8 @@
         </p:nvCxnSpPr>
         <p:spPr>
           <a:xfrm flipV="1">
-            <a:off x="6309360.0" y="1245870.0"/>
-            <a:ext cx="91440.0" cy="22860.0"/>
+            <a:off x="6355080.0" y="1410004.8"/>
+            <a:ext cx="91440.0" cy="60807.60000000009"/>
           </a:xfrm>
           <a:prstGeom prst="line">
             <a:avLst/>
@@ -3874,8 +3874,8 @@
         </p:nvCxnSpPr>
         <p:spPr>
           <a:xfrm flipV="1">
-            <a:off x="6400800.0" y="1200150.0"/>
-            <a:ext cx="91440.0" cy="45720.0"/>
+            <a:off x="6446520.0" y="1388059.2"/>
+            <a:ext cx="71780.40000000037" cy="21945.600000000093"/>
           </a:xfrm>
           <a:prstGeom prst="line">
             <a:avLst/>
@@ -3909,8 +3909,8 @@
         </p:nvCxnSpPr>
         <p:spPr>
           <a:xfrm flipV="1">
-            <a:off x="6492240.0" y="1177290.0"/>
-            <a:ext cx="91440.0" cy="22860.0"/>
+            <a:off x="6518300.4" y="1366113.6"/>
+            <a:ext cx="71780.39999999944" cy="21945.59999999986"/>
           </a:xfrm>
           <a:prstGeom prst="line">
             <a:avLst/>
@@ -3944,8 +3944,8 @@
         </p:nvCxnSpPr>
         <p:spPr>
           <a:xfrm flipV="1">
-            <a:off x="6583680.0" y="1154430.0"/>
-            <a:ext cx="91440.0" cy="22860.0"/>
+            <a:off x="6590080.8" y="1344625.2"/>
+            <a:ext cx="71780.40000000037" cy="21488.40000000014"/>
           </a:xfrm>
           <a:prstGeom prst="line">
             <a:avLst/>
@@ -3979,8 +3979,8 @@
         </p:nvCxnSpPr>
         <p:spPr>
           <a:xfrm flipV="1">
-            <a:off x="6675120.0" y="1131570.0"/>
-            <a:ext cx="91440.0" cy="22860.0"/>
+            <a:off x="6661861.2" y="1323594.0"/>
+            <a:ext cx="72237.59999999963" cy="21031.199999999953"/>
           </a:xfrm>
           <a:prstGeom prst="line">
             <a:avLst/>
@@ -4014,8 +4014,8 @@
         </p:nvCxnSpPr>
         <p:spPr>
           <a:xfrm flipV="1">
-            <a:off x="6766560.0" y="1108710.0"/>
-            <a:ext cx="91440.0" cy="22860.0"/>
+            <a:off x="6734098.8" y="1302562.8"/>
+            <a:ext cx="71780.40000000037" cy="21031.199999999953"/>
           </a:xfrm>
           <a:prstGeom prst="line">
             <a:avLst/>
@@ -4041,15 +4041,330 @@
           </a:fontRef>
         </p:style>
       </p:cxnSp>
-      <p:sp>
-        <p:nvSpPr>
-          <p:cNvPr id="29" name="Oval 28"/>
+      <p:cxnSp>
+        <p:nvCxnSpPr>
+          <p:cNvPr id="29" name="Connector 28"/>
+          <p:cNvCxnSpPr/>
+          <p:nvPr/>
+        </p:nvCxnSpPr>
+        <p:spPr>
+          <a:xfrm flipV="1">
+            <a:off x="6805879.2" y="1281988.7999999998"/>
+            <a:ext cx="71780.39999999944" cy="20574.000000000233"/>
+          </a:xfrm>
+          <a:prstGeom prst="line">
+            <a:avLst/>
+          </a:prstGeom>
+          <a:ln w="25400">
+            <a:solidFill>
+              <a:srgbClr val="00C8FF"/>
+            </a:solidFill>
+          </a:ln>
+        </p:spPr>
+        <p:style>
+          <a:lnRef idx="2">
+            <a:schemeClr val="accent1"/>
+          </a:lnRef>
+          <a:fillRef idx="0">
+            <a:schemeClr val="accent1"/>
+          </a:fillRef>
+          <a:effectRef idx="1">
+            <a:schemeClr val="accent1"/>
+          </a:effectRef>
+          <a:fontRef idx="minor">
+            <a:schemeClr val="tx1"/>
+          </a:fontRef>
+        </p:style>
+      </p:cxnSp>
+      <p:cxnSp>
+        <p:nvCxnSpPr>
+          <p:cNvPr id="30" name="Connector 29"/>
+          <p:cNvCxnSpPr/>
+          <p:nvPr/>
+        </p:nvCxnSpPr>
+        <p:spPr>
+          <a:xfrm flipV="1">
+            <a:off x="6877659.6" y="1261414.8"/>
+            <a:ext cx="71780.40000000037" cy="20573.999999999767"/>
+          </a:xfrm>
+          <a:prstGeom prst="line">
+            <a:avLst/>
+          </a:prstGeom>
+          <a:ln w="25400">
+            <a:solidFill>
+              <a:srgbClr val="00C8FF"/>
+            </a:solidFill>
+          </a:ln>
+        </p:spPr>
+        <p:style>
+          <a:lnRef idx="2">
+            <a:schemeClr val="accent1"/>
+          </a:lnRef>
+          <a:fillRef idx="0">
+            <a:schemeClr val="accent1"/>
+          </a:fillRef>
+          <a:effectRef idx="1">
+            <a:schemeClr val="accent1"/>
+          </a:effectRef>
+          <a:fontRef idx="minor">
+            <a:schemeClr val="tx1"/>
+          </a:fontRef>
+        </p:style>
+      </p:cxnSp>
+      <p:cxnSp>
+        <p:nvCxnSpPr>
+          <p:cNvPr id="31" name="Connector 30"/>
+          <p:cNvCxnSpPr/>
+          <p:nvPr/>
+        </p:nvCxnSpPr>
+        <p:spPr>
+          <a:xfrm flipV="1">
+            <a:off x="6949440.0" y="1241298.0"/>
+            <a:ext cx="71780.40000000037" cy="20116.800000000047"/>
+          </a:xfrm>
+          <a:prstGeom prst="line">
+            <a:avLst/>
+          </a:prstGeom>
+          <a:ln w="25400">
+            <a:solidFill>
+              <a:srgbClr val="00C8FF"/>
+            </a:solidFill>
+          </a:ln>
+        </p:spPr>
+        <p:style>
+          <a:lnRef idx="2">
+            <a:schemeClr val="accent1"/>
+          </a:lnRef>
+          <a:fillRef idx="0">
+            <a:schemeClr val="accent1"/>
+          </a:fillRef>
+          <a:effectRef idx="1">
+            <a:schemeClr val="accent1"/>
+          </a:effectRef>
+          <a:fontRef idx="minor">
+            <a:schemeClr val="tx1"/>
+          </a:fontRef>
+        </p:style>
+      </p:cxnSp>
+      <p:cxnSp>
+        <p:nvCxnSpPr>
+          <p:cNvPr id="32" name="Connector 31"/>
+          <p:cNvCxnSpPr/>
+          <p:nvPr/>
+        </p:nvCxnSpPr>
+        <p:spPr>
+          <a:xfrm flipV="1">
+            <a:off x="7021220.4" y="1221181.2"/>
+            <a:ext cx="71780.40000000037" cy="20116.800000000047"/>
+          </a:xfrm>
+          <a:prstGeom prst="line">
+            <a:avLst/>
+          </a:prstGeom>
+          <a:ln w="25400">
+            <a:solidFill>
+              <a:srgbClr val="00C8FF"/>
+            </a:solidFill>
+          </a:ln>
+        </p:spPr>
+        <p:style>
+          <a:lnRef idx="2">
+            <a:schemeClr val="accent1"/>
+          </a:lnRef>
+          <a:fillRef idx="0">
+            <a:schemeClr val="accent1"/>
+          </a:fillRef>
+          <a:effectRef idx="1">
+            <a:schemeClr val="accent1"/>
+          </a:effectRef>
+          <a:fontRef idx="minor">
+            <a:schemeClr val="tx1"/>
+          </a:fontRef>
+        </p:style>
+      </p:cxnSp>
+      <p:cxnSp>
+        <p:nvCxnSpPr>
+          <p:cNvPr id="33" name="Connector 32"/>
+          <p:cNvCxnSpPr/>
+          <p:nvPr/>
+        </p:nvCxnSpPr>
+        <p:spPr>
+          <a:xfrm flipV="1">
+            <a:off x="7093000.800000001" y="1201064.4"/>
+            <a:ext cx="71780.39999999944" cy="20116.800000000047"/>
+          </a:xfrm>
+          <a:prstGeom prst="line">
+            <a:avLst/>
+          </a:prstGeom>
+          <a:ln w="25400">
+            <a:solidFill>
+              <a:srgbClr val="00C8FF"/>
+            </a:solidFill>
+          </a:ln>
+        </p:spPr>
+        <p:style>
+          <a:lnRef idx="2">
+            <a:schemeClr val="accent1"/>
+          </a:lnRef>
+          <a:fillRef idx="0">
+            <a:schemeClr val="accent1"/>
+          </a:fillRef>
+          <a:effectRef idx="1">
+            <a:schemeClr val="accent1"/>
+          </a:effectRef>
+          <a:fontRef idx="minor">
+            <a:schemeClr val="tx1"/>
+          </a:fontRef>
+        </p:style>
+      </p:cxnSp>
+      <p:cxnSp>
+        <p:nvCxnSpPr>
+          <p:cNvPr id="34" name="Connector 33"/>
+          <p:cNvCxnSpPr/>
+          <p:nvPr/>
+        </p:nvCxnSpPr>
+        <p:spPr>
+          <a:xfrm flipV="1">
+            <a:off x="7164781.2" y="1181404.8"/>
+            <a:ext cx="72237.59999999963" cy="19659.59999999986"/>
+          </a:xfrm>
+          <a:prstGeom prst="line">
+            <a:avLst/>
+          </a:prstGeom>
+          <a:ln w="25400">
+            <a:solidFill>
+              <a:srgbClr val="00C8FF"/>
+            </a:solidFill>
+          </a:ln>
+        </p:spPr>
+        <p:style>
+          <a:lnRef idx="2">
+            <a:schemeClr val="accent1"/>
+          </a:lnRef>
+          <a:fillRef idx="0">
+            <a:schemeClr val="accent1"/>
+          </a:fillRef>
+          <a:effectRef idx="1">
+            <a:schemeClr val="accent1"/>
+          </a:effectRef>
+          <a:fontRef idx="minor">
+            <a:schemeClr val="tx1"/>
+          </a:fontRef>
+        </p:style>
+      </p:cxnSp>
+      <p:cxnSp>
+        <p:nvCxnSpPr>
+          <p:cNvPr id="35" name="Connector 34"/>
+          <p:cNvCxnSpPr/>
+          <p:nvPr/>
+        </p:nvCxnSpPr>
+        <p:spPr>
+          <a:xfrm flipV="1">
+            <a:off x="7237018.8" y="1162202.4"/>
+            <a:ext cx="71780.39999999944" cy="19202.40000000014"/>
+          </a:xfrm>
+          <a:prstGeom prst="line">
+            <a:avLst/>
+          </a:prstGeom>
+          <a:ln w="25400">
+            <a:solidFill>
+              <a:srgbClr val="00C8FF"/>
+            </a:solidFill>
+          </a:ln>
+        </p:spPr>
+        <p:style>
+          <a:lnRef idx="2">
+            <a:schemeClr val="accent1"/>
+          </a:lnRef>
+          <a:fillRef idx="0">
+            <a:schemeClr val="accent1"/>
+          </a:fillRef>
+          <a:effectRef idx="1">
+            <a:schemeClr val="accent1"/>
+          </a:effectRef>
+          <a:fontRef idx="minor">
+            <a:schemeClr val="tx1"/>
+          </a:fontRef>
+        </p:style>
+      </p:cxnSp>
+      <p:cxnSp>
+        <p:nvCxnSpPr>
+          <p:cNvPr id="36" name="Connector 35"/>
+          <p:cNvCxnSpPr/>
+          <p:nvPr/>
+        </p:nvCxnSpPr>
+        <p:spPr>
+          <a:xfrm flipV="1">
+            <a:off x="7308799.199999999" y="1143000.0"/>
+            <a:ext cx="71780.40000000037" cy="19202.399999999907"/>
+          </a:xfrm>
+          <a:prstGeom prst="line">
+            <a:avLst/>
+          </a:prstGeom>
+          <a:ln w="25400">
+            <a:solidFill>
+              <a:srgbClr val="00C8FF"/>
+            </a:solidFill>
+          </a:ln>
+        </p:spPr>
+        <p:style>
+          <a:lnRef idx="2">
+            <a:schemeClr val="accent1"/>
+          </a:lnRef>
+          <a:fillRef idx="0">
+            <a:schemeClr val="accent1"/>
+          </a:fillRef>
+          <a:effectRef idx="1">
+            <a:schemeClr val="accent1"/>
+          </a:effectRef>
+          <a:fontRef idx="minor">
+            <a:schemeClr val="tx1"/>
+          </a:fontRef>
+        </p:style>
+      </p:cxnSp>
+      <p:cxnSp>
+        <p:nvCxnSpPr>
+          <p:cNvPr id="37" name="Connector 36"/>
+          <p:cNvCxnSpPr/>
+          <p:nvPr/>
+        </p:nvCxnSpPr>
+        <p:spPr>
+          <a:xfrm flipV="1">
+            <a:off x="7380579.6" y="1123797.6"/>
+            <a:ext cx="71780.40000000037" cy="19202.399999999907"/>
+          </a:xfrm>
+          <a:prstGeom prst="line">
+            <a:avLst/>
+          </a:prstGeom>
+          <a:ln w="25400">
+            <a:solidFill>
+              <a:srgbClr val="00C8FF"/>
+            </a:solidFill>
+          </a:ln>
+        </p:spPr>
+        <p:style>
+          <a:lnRef idx="2">
+            <a:schemeClr val="accent1"/>
+          </a:lnRef>
+          <a:fillRef idx="0">
+            <a:schemeClr val="accent1"/>
+          </a:fillRef>
+          <a:effectRef idx="1">
+            <a:schemeClr val="accent1"/>
+          </a:effectRef>
+          <a:fontRef idx="minor">
+            <a:schemeClr val="tx1"/>
+          </a:fontRef>
+        </p:style>
+      </p:cxnSp>
+      <p:sp>
+        <p:nvSpPr>
+          <p:cNvPr id="38" name="Oval 37"/>
           <p:cNvSpPr/>
           <p:nvPr/>
         </p:nvSpPr>
         <p:spPr>
           <a:xfrm>
-            <a:off x="5905500" y="1390650"/>
+            <a:off x="6362700" y="1390650"/>
             <a:ext cx="76200" cy="76200"/>
           </a:xfrm>
           <a:prstGeom prst="ellipse">
@@ -4086,13 +4401,13 @@
       </p:sp>
       <p:sp>
         <p:nvSpPr>
-          <p:cNvPr id="30" name="Oval 29"/>
+          <p:cNvPr id="39" name="Oval 38"/>
           <p:cNvSpPr/>
           <p:nvPr/>
         </p:nvSpPr>
         <p:spPr>
           <a:xfrm>
-            <a:off x="5905500" y="1619250"/>
+            <a:off x="6362700" y="1619250"/>
             <a:ext cx="76200" cy="76200"/>
           </a:xfrm>
           <a:prstGeom prst="ellipse">
@@ -4131,13 +4446,13 @@
       </p:sp>
       <p:sp>
         <p:nvSpPr>
-          <p:cNvPr id="31" name="TextBox 30"/>
+          <p:cNvPr id="40" name="TextBox 39"/>
           <p:cNvSpPr txBox="1"/>
           <p:nvPr/>
         </p:nvSpPr>
         <p:spPr>
           <a:xfrm>
-            <a:off x="6172200" y="834390"/>
+            <a:off x="6766560" y="1108710"/>
             <a:ext cx="635000" cy="254000"/>
           </a:xfrm>
           <a:prstGeom prst="rect">
@@ -4160,43 +4475,7 @@
               </a:defRPr>
             </a:pPr>
             <a:r>
-              <a:t>y=f(x)</a:t>
-            </a:r>
-          </a:p>
-        </p:txBody>
-      </p:sp>
-      <p:sp>
-        <p:nvSpPr>
-          <p:cNvPr id="32" name="TextBox 31"/>
-          <p:cNvSpPr txBox="1"/>
-          <p:nvPr/>
-        </p:nvSpPr>
-        <p:spPr>
-          <a:xfrm>
-            <a:off x="5943600" y="2663190"/>
-            <a:ext cx="635000" cy="254000"/>
-          </a:xfrm>
-          <a:prstGeom prst="rect">
-            <a:avLst/>
-          </a:prstGeom>
-          <a:noFill/>
-        </p:spPr>
-        <p:txBody>
-          <a:bodyPr wrap="none">
-            <a:spAutoFit/>
-          </a:bodyPr>
-          <a:lstStyle/>
-          <a:p>
-            <a:pPr>
-              <a:defRPr sz="1200">
-                <a:solidFill>
-                  <a:srgbClr val="FFFFFF"/>
-                </a:solidFill>
-                <a:latin typeface="Inter"/>
-              </a:defRPr>
-            </a:pPr>
-            <a:r>
-              <a:t>a</a:t>
+              <a:t>$y=f(x)$</a:t>
             </a:r>
           </a:p>
         </p:txBody>

--- a/output/6.pptx
+++ b/output/6.pptx
@@ -3174,8 +3174,8 @@
         </p:nvCxnSpPr>
         <p:spPr>
           <a:xfrm flipV="1">
-            <a:off x="4572000.0" y="2312974.8"/>
-            <a:ext cx="93726.0" cy="258775.2000000002"/>
+            <a:off x="4572000.0" y="2255367.6"/>
+            <a:ext cx="45720.0" cy="53949.60000000009"/>
           </a:xfrm>
           <a:prstGeom prst="line">
             <a:avLst/>
@@ -3209,8 +3209,8 @@
         </p:nvCxnSpPr>
         <p:spPr>
           <a:xfrm flipV="1">
-            <a:off x="4665726.0" y="2204618.4"/>
-            <a:ext cx="94183.20000000019" cy="108356.3999999999"/>
+            <a:off x="4617720.0" y="2207361.6"/>
+            <a:ext cx="45720.0" cy="48006.0"/>
           </a:xfrm>
           <a:prstGeom prst="line">
             <a:avLst/>
@@ -3244,8 +3244,8 @@
         </p:nvCxnSpPr>
         <p:spPr>
           <a:xfrm flipV="1">
-            <a:off x="4759909.2" y="2123236.8"/>
-            <a:ext cx="93726.0" cy="81381.6000000001"/>
+            <a:off x="4663440.0" y="2163470.4"/>
+            <a:ext cx="45720.0" cy="43891.200000000186"/>
           </a:xfrm>
           <a:prstGeom prst="line">
             <a:avLst/>
@@ -3279,8 +3279,8 @@
         </p:nvCxnSpPr>
         <p:spPr>
           <a:xfrm flipV="1">
-            <a:off x="4853635.2" y="2053285.2000000002"/>
-            <a:ext cx="93726.0" cy="69951.59999999963"/>
+            <a:off x="4709160.0" y="2122322.4"/>
+            <a:ext cx="45720.0" cy="41148.0"/>
           </a:xfrm>
           <a:prstGeom prst="line">
             <a:avLst/>
@@ -3314,8 +3314,8 @@
         </p:nvCxnSpPr>
         <p:spPr>
           <a:xfrm flipV="1">
-            <a:off x="4947361.2" y="1992020.4"/>
-            <a:ext cx="93726.0" cy="61264.80000000028"/>
+            <a:off x="4754880.0" y="2083917.6"/>
+            <a:ext cx="45720.0" cy="38404.799999999814"/>
           </a:xfrm>
           <a:prstGeom prst="line">
             <a:avLst/>
@@ -3349,8 +3349,8 @@
         </p:nvCxnSpPr>
         <p:spPr>
           <a:xfrm flipV="1">
-            <a:off x="5041087.2" y="1936699.2"/>
-            <a:ext cx="94183.20000000019" cy="55321.19999999995"/>
+            <a:off x="4800600.0" y="2047341.6"/>
+            <a:ext cx="45720.0" cy="36576.0"/>
           </a:xfrm>
           <a:prstGeom prst="line">
             <a:avLst/>
@@ -3384,8 +3384,8 @@
         </p:nvCxnSpPr>
         <p:spPr>
           <a:xfrm flipV="1">
-            <a:off x="5135270.4" y="1886864.4"/>
-            <a:ext cx="93726.0" cy="49834.80000000005"/>
+            <a:off x="4846320.0" y="2012137.2"/>
+            <a:ext cx="45720.0" cy="35204.40000000014"/>
           </a:xfrm>
           <a:prstGeom prst="line">
             <a:avLst/>
@@ -3419,8 +3419,8 @@
         </p:nvCxnSpPr>
         <p:spPr>
           <a:xfrm flipV="1">
-            <a:off x="5228996.4" y="1840687.2"/>
-            <a:ext cx="93726.0" cy="46177.19999999995"/>
+            <a:off x="4892040.0" y="1978304.4"/>
+            <a:ext cx="45720.0" cy="33832.80000000005"/>
           </a:xfrm>
           <a:prstGeom prst="line">
             <a:avLst/>
@@ -3454,8 +3454,8 @@
         </p:nvCxnSpPr>
         <p:spPr>
           <a:xfrm flipV="1">
-            <a:off x="5322722.4" y="1797710.4"/>
-            <a:ext cx="93726.0" cy="42976.80000000005"/>
+            <a:off x="4937760.0" y="1945843.2"/>
+            <a:ext cx="45720.0" cy="32461.199999999953"/>
           </a:xfrm>
           <a:prstGeom prst="line">
             <a:avLst/>
@@ -3489,8 +3489,8 @@
         </p:nvCxnSpPr>
         <p:spPr>
           <a:xfrm flipV="1">
-            <a:off x="5416448.4" y="1757019.6"/>
-            <a:ext cx="94183.19999999925" cy="40690.799999999814"/>
+            <a:off x="4983480.0" y="1914753.6"/>
+            <a:ext cx="45720.0" cy="31089.59999999986"/>
           </a:xfrm>
           <a:prstGeom prst="line">
             <a:avLst/>
@@ -3524,8 +3524,8 @@
         </p:nvCxnSpPr>
         <p:spPr>
           <a:xfrm flipV="1">
-            <a:off x="5510631.6" y="1719072.0"/>
-            <a:ext cx="93726.0" cy="37947.60000000009"/>
+            <a:off x="5029200.0" y="1884578.4"/>
+            <a:ext cx="45720.0" cy="30175.200000000186"/>
           </a:xfrm>
           <a:prstGeom prst="line">
             <a:avLst/>
@@ -3559,8 +3559,8 @@
         </p:nvCxnSpPr>
         <p:spPr>
           <a:xfrm flipV="1">
-            <a:off x="5604357.6" y="1682496.0"/>
-            <a:ext cx="93726.0" cy="36576.0"/>
+            <a:off x="5074920.0" y="1854860.4"/>
+            <a:ext cx="45720.0" cy="29718.0"/>
           </a:xfrm>
           <a:prstGeom prst="line">
             <a:avLst/>
@@ -3594,8 +3594,8 @@
         </p:nvCxnSpPr>
         <p:spPr>
           <a:xfrm flipV="1">
-            <a:off x="5698083.6" y="1648206.0"/>
-            <a:ext cx="93726.0" cy="34290.0"/>
+            <a:off x="5120640.0" y="1826056.8"/>
+            <a:ext cx="45720.0" cy="28803.59999999986"/>
           </a:xfrm>
           <a:prstGeom prst="line">
             <a:avLst/>
@@ -3629,8 +3629,8 @@
         </p:nvCxnSpPr>
         <p:spPr>
           <a:xfrm flipV="1">
-            <a:off x="5791809.6" y="1615287.6"/>
-            <a:ext cx="94183.20000000019" cy="32918.39999999991"/>
+            <a:off x="5166360.0" y="1797710.4"/>
+            <a:ext cx="45720.0" cy="28346.40000000014"/>
           </a:xfrm>
           <a:prstGeom prst="line">
             <a:avLst/>
@@ -3664,8 +3664,8 @@
         </p:nvCxnSpPr>
         <p:spPr>
           <a:xfrm flipV="1">
-            <a:off x="5885992.8" y="1584198.0"/>
-            <a:ext cx="93726.0" cy="31089.600000000093"/>
+            <a:off x="5212080.0" y="1770278.4"/>
+            <a:ext cx="45720.0" cy="27432.0"/>
           </a:xfrm>
           <a:prstGeom prst="line">
             <a:avLst/>
@@ -3699,8 +3699,8 @@
         </p:nvCxnSpPr>
         <p:spPr>
           <a:xfrm flipV="1">
-            <a:off x="5979718.8" y="1554022.8"/>
-            <a:ext cx="93726.0" cy="30175.199999999953"/>
+            <a:off x="5257800.0" y="1743303.6"/>
+            <a:ext cx="45720.0" cy="26974.799999999814"/>
           </a:xfrm>
           <a:prstGeom prst="line">
             <a:avLst/>
@@ -3734,8 +3734,8 @@
         </p:nvCxnSpPr>
         <p:spPr>
           <a:xfrm flipV="1">
-            <a:off x="6073444.8" y="1525219.2"/>
-            <a:ext cx="93726.0" cy="28803.600000000093"/>
+            <a:off x="5303520.0" y="1716786.0"/>
+            <a:ext cx="45720.0" cy="26517.600000000093"/>
           </a:xfrm>
           <a:prstGeom prst="line">
             <a:avLst/>
@@ -3769,8 +3769,8 @@
         </p:nvCxnSpPr>
         <p:spPr>
           <a:xfrm flipV="1">
-            <a:off x="6167170.8" y="1497330.0"/>
-            <a:ext cx="94183.20000000019" cy="27889.199999999953"/>
+            <a:off x="5349240.0" y="1690725.6"/>
+            <a:ext cx="45720.0" cy="26060.399999999907"/>
           </a:xfrm>
           <a:prstGeom prst="line">
             <a:avLst/>
@@ -3804,8 +3804,8 @@
         </p:nvCxnSpPr>
         <p:spPr>
           <a:xfrm flipV="1">
-            <a:off x="6261354.0" y="1470812.4000000001"/>
-            <a:ext cx="93726.0" cy="26517.59999999986"/>
+            <a:off x="5394960.0" y="1665122.4"/>
+            <a:ext cx="45720.0" cy="25603.200000000186"/>
           </a:xfrm>
           <a:prstGeom prst="line">
             <a:avLst/>
@@ -3839,8 +3839,8 @@
         </p:nvCxnSpPr>
         <p:spPr>
           <a:xfrm flipV="1">
-            <a:off x="6355080.0" y="1410004.8"/>
-            <a:ext cx="91440.0" cy="60807.60000000009"/>
+            <a:off x="5440680.0" y="1639976.4000000001"/>
+            <a:ext cx="45720.0" cy="25145.999999999767"/>
           </a:xfrm>
           <a:prstGeom prst="line">
             <a:avLst/>
@@ -3874,8 +3874,8 @@
         </p:nvCxnSpPr>
         <p:spPr>
           <a:xfrm flipV="1">
-            <a:off x="6446520.0" y="1388059.2"/>
-            <a:ext cx="71780.40000000037" cy="21945.600000000093"/>
+            <a:off x="5486400.0" y="1615287.6"/>
+            <a:ext cx="45720.0" cy="24688.800000000047"/>
           </a:xfrm>
           <a:prstGeom prst="line">
             <a:avLst/>
@@ -3909,8 +3909,8 @@
         </p:nvCxnSpPr>
         <p:spPr>
           <a:xfrm flipV="1">
-            <a:off x="6518300.4" y="1366113.6"/>
-            <a:ext cx="71780.39999999944" cy="21945.59999999986"/>
+            <a:off x="5532120.0" y="1590598.8"/>
+            <a:ext cx="45720.0" cy="24688.800000000047"/>
           </a:xfrm>
           <a:prstGeom prst="line">
             <a:avLst/>
@@ -3944,8 +3944,8 @@
         </p:nvCxnSpPr>
         <p:spPr>
           <a:xfrm flipV="1">
-            <a:off x="6590080.8" y="1344625.2"/>
-            <a:ext cx="71780.40000000037" cy="21488.40000000014"/>
+            <a:off x="5577840.0" y="1566367.2000000002"/>
+            <a:ext cx="45720.0" cy="24231.59999999986"/>
           </a:xfrm>
           <a:prstGeom prst="line">
             <a:avLst/>
@@ -3979,8 +3979,8 @@
         </p:nvCxnSpPr>
         <p:spPr>
           <a:xfrm flipV="1">
-            <a:off x="6661861.2" y="1323594.0"/>
-            <a:ext cx="72237.59999999963" cy="21031.199999999953"/>
+            <a:off x="5623560.0" y="1542592.8"/>
+            <a:ext cx="45720.0" cy="23774.40000000014"/>
           </a:xfrm>
           <a:prstGeom prst="line">
             <a:avLst/>
@@ -4014,8 +4014,8 @@
         </p:nvCxnSpPr>
         <p:spPr>
           <a:xfrm flipV="1">
-            <a:off x="6734098.8" y="1302562.8"/>
-            <a:ext cx="71780.40000000037" cy="21031.199999999953"/>
+            <a:off x="5669280.0" y="1518818.4000000001"/>
+            <a:ext cx="45720.0" cy="23774.399999999907"/>
           </a:xfrm>
           <a:prstGeom prst="line">
             <a:avLst/>
@@ -4049,8 +4049,8 @@
         </p:nvCxnSpPr>
         <p:spPr>
           <a:xfrm flipV="1">
-            <a:off x="6805879.2" y="1281988.7999999998"/>
-            <a:ext cx="71780.39999999944" cy="20574.000000000233"/>
+            <a:off x="5715000.0" y="1495501.2"/>
+            <a:ext cx="45720.0" cy="23317.200000000186"/>
           </a:xfrm>
           <a:prstGeom prst="line">
             <a:avLst/>
@@ -4084,8 +4084,8 @@
         </p:nvCxnSpPr>
         <p:spPr>
           <a:xfrm flipV="1">
-            <a:off x="6877659.6" y="1261414.8"/>
-            <a:ext cx="71780.40000000037" cy="20573.999999999767"/>
+            <a:off x="5760720.0" y="1472184.0"/>
+            <a:ext cx="45720.0" cy="23317.199999999953"/>
           </a:xfrm>
           <a:prstGeom prst="line">
             <a:avLst/>
@@ -4119,8 +4119,8 @@
         </p:nvCxnSpPr>
         <p:spPr>
           <a:xfrm flipV="1">
-            <a:off x="6949440.0" y="1241298.0"/>
-            <a:ext cx="71780.40000000037" cy="20116.800000000047"/>
+            <a:off x="5806440.0" y="1449324.0"/>
+            <a:ext cx="45720.0" cy="22860.0"/>
           </a:xfrm>
           <a:prstGeom prst="line">
             <a:avLst/>
@@ -4154,8 +4154,8 @@
         </p:nvCxnSpPr>
         <p:spPr>
           <a:xfrm flipV="1">
-            <a:off x="7021220.4" y="1221181.2"/>
-            <a:ext cx="71780.40000000037" cy="20116.800000000047"/>
+            <a:off x="5852160.0" y="1426921.2"/>
+            <a:ext cx="45720.0" cy="22402.800000000047"/>
           </a:xfrm>
           <a:prstGeom prst="line">
             <a:avLst/>
@@ -4189,8 +4189,8 @@
         </p:nvCxnSpPr>
         <p:spPr>
           <a:xfrm flipV="1">
-            <a:off x="7093000.800000001" y="1201064.4"/>
-            <a:ext cx="71780.39999999944" cy="20116.800000000047"/>
+            <a:off x="5989320.0" y="1360170.0"/>
+            <a:ext cx="45720.0" cy="22402.800000000047"/>
           </a:xfrm>
           <a:prstGeom prst="line">
             <a:avLst/>
@@ -4224,8 +4224,8 @@
         </p:nvCxnSpPr>
         <p:spPr>
           <a:xfrm flipV="1">
-            <a:off x="7164781.2" y="1181404.8"/>
-            <a:ext cx="72237.59999999963" cy="19659.59999999986"/>
+            <a:off x="6035040.0" y="1338224.4"/>
+            <a:ext cx="45720.0" cy="21945.600000000093"/>
           </a:xfrm>
           <a:prstGeom prst="line">
             <a:avLst/>
@@ -4259,8 +4259,8 @@
         </p:nvCxnSpPr>
         <p:spPr>
           <a:xfrm flipV="1">
-            <a:off x="7237018.8" y="1162202.4"/>
-            <a:ext cx="71780.39999999944" cy="19202.40000000014"/>
+            <a:off x="6080760.0" y="1316278.8"/>
+            <a:ext cx="45720.0" cy="21945.59999999986"/>
           </a:xfrm>
           <a:prstGeom prst="line">
             <a:avLst/>
@@ -4294,8 +4294,8 @@
         </p:nvCxnSpPr>
         <p:spPr>
           <a:xfrm flipV="1">
-            <a:off x="7308799.199999999" y="1143000.0"/>
-            <a:ext cx="71780.40000000037" cy="19202.399999999907"/>
+            <a:off x="6126480.0" y="1294790.4"/>
+            <a:ext cx="45720.0" cy="21488.40000000014"/>
           </a:xfrm>
           <a:prstGeom prst="line">
             <a:avLst/>
@@ -4329,8 +4329,8 @@
         </p:nvCxnSpPr>
         <p:spPr>
           <a:xfrm flipV="1">
-            <a:off x="7380579.6" y="1123797.6"/>
-            <a:ext cx="71780.40000000037" cy="19202.399999999907"/>
+            <a:off x="6172200.0" y="1273302.0"/>
+            <a:ext cx="45720.0" cy="21488.399999999907"/>
           </a:xfrm>
           <a:prstGeom prst="line">
             <a:avLst/>
@@ -4356,15 +4356,330 @@
           </a:fontRef>
         </p:style>
       </p:cxnSp>
-      <p:sp>
-        <p:nvSpPr>
-          <p:cNvPr id="38" name="Oval 37"/>
+      <p:cxnSp>
+        <p:nvCxnSpPr>
+          <p:cNvPr id="38" name="Connector 37"/>
+          <p:cNvCxnSpPr/>
+          <p:nvPr/>
+        </p:nvCxnSpPr>
+        <p:spPr>
+          <a:xfrm flipV="1">
+            <a:off x="6217920.0" y="1252270.8"/>
+            <a:ext cx="45720.0" cy="21031.199999999953"/>
+          </a:xfrm>
+          <a:prstGeom prst="line">
+            <a:avLst/>
+          </a:prstGeom>
+          <a:ln w="25400">
+            <a:solidFill>
+              <a:srgbClr val="00C8FF"/>
+            </a:solidFill>
+          </a:ln>
+        </p:spPr>
+        <p:style>
+          <a:lnRef idx="2">
+            <a:schemeClr val="accent1"/>
+          </a:lnRef>
+          <a:fillRef idx="0">
+            <a:schemeClr val="accent1"/>
+          </a:fillRef>
+          <a:effectRef idx="1">
+            <a:schemeClr val="accent1"/>
+          </a:effectRef>
+          <a:fontRef idx="minor">
+            <a:schemeClr val="tx1"/>
+          </a:fontRef>
+        </p:style>
+      </p:cxnSp>
+      <p:cxnSp>
+        <p:nvCxnSpPr>
+          <p:cNvPr id="39" name="Connector 38"/>
+          <p:cNvCxnSpPr/>
+          <p:nvPr/>
+        </p:nvCxnSpPr>
+        <p:spPr>
+          <a:xfrm flipV="1">
+            <a:off x="6263640.0" y="1231239.6"/>
+            <a:ext cx="45720.0" cy="21031.199999999953"/>
+          </a:xfrm>
+          <a:prstGeom prst="line">
+            <a:avLst/>
+          </a:prstGeom>
+          <a:ln w="25400">
+            <a:solidFill>
+              <a:srgbClr val="00C8FF"/>
+            </a:solidFill>
+          </a:ln>
+        </p:spPr>
+        <p:style>
+          <a:lnRef idx="2">
+            <a:schemeClr val="accent1"/>
+          </a:lnRef>
+          <a:fillRef idx="0">
+            <a:schemeClr val="accent1"/>
+          </a:fillRef>
+          <a:effectRef idx="1">
+            <a:schemeClr val="accent1"/>
+          </a:effectRef>
+          <a:fontRef idx="minor">
+            <a:schemeClr val="tx1"/>
+          </a:fontRef>
+        </p:style>
+      </p:cxnSp>
+      <p:cxnSp>
+        <p:nvCxnSpPr>
+          <p:cNvPr id="40" name="Connector 39"/>
+          <p:cNvCxnSpPr/>
+          <p:nvPr/>
+        </p:nvCxnSpPr>
+        <p:spPr>
+          <a:xfrm flipV="1">
+            <a:off x="6309360.0" y="1210208.4"/>
+            <a:ext cx="45720.0" cy="21031.200000000186"/>
+          </a:xfrm>
+          <a:prstGeom prst="line">
+            <a:avLst/>
+          </a:prstGeom>
+          <a:ln w="25400">
+            <a:solidFill>
+              <a:srgbClr val="00C8FF"/>
+            </a:solidFill>
+          </a:ln>
+        </p:spPr>
+        <p:style>
+          <a:lnRef idx="2">
+            <a:schemeClr val="accent1"/>
+          </a:lnRef>
+          <a:fillRef idx="0">
+            <a:schemeClr val="accent1"/>
+          </a:fillRef>
+          <a:effectRef idx="1">
+            <a:schemeClr val="accent1"/>
+          </a:effectRef>
+          <a:fontRef idx="minor">
+            <a:schemeClr val="tx1"/>
+          </a:fontRef>
+        </p:style>
+      </p:cxnSp>
+      <p:cxnSp>
+        <p:nvCxnSpPr>
+          <p:cNvPr id="41" name="Connector 40"/>
+          <p:cNvCxnSpPr/>
+          <p:nvPr/>
+        </p:nvCxnSpPr>
+        <p:spPr>
+          <a:xfrm flipV="1">
+            <a:off x="6355080.0" y="1189634.4"/>
+            <a:ext cx="45720.0" cy="20574.0"/>
+          </a:xfrm>
+          <a:prstGeom prst="line">
+            <a:avLst/>
+          </a:prstGeom>
+          <a:ln w="25400">
+            <a:solidFill>
+              <a:srgbClr val="00C8FF"/>
+            </a:solidFill>
+          </a:ln>
+        </p:spPr>
+        <p:style>
+          <a:lnRef idx="2">
+            <a:schemeClr val="accent1"/>
+          </a:lnRef>
+          <a:fillRef idx="0">
+            <a:schemeClr val="accent1"/>
+          </a:fillRef>
+          <a:effectRef idx="1">
+            <a:schemeClr val="accent1"/>
+          </a:effectRef>
+          <a:fontRef idx="minor">
+            <a:schemeClr val="tx1"/>
+          </a:fontRef>
+        </p:style>
+      </p:cxnSp>
+      <p:cxnSp>
+        <p:nvCxnSpPr>
+          <p:cNvPr id="42" name="Connector 41"/>
+          <p:cNvCxnSpPr/>
+          <p:nvPr/>
+        </p:nvCxnSpPr>
+        <p:spPr>
+          <a:xfrm flipV="1">
+            <a:off x="6400800.0" y="1169060.4"/>
+            <a:ext cx="45720.0" cy="20574.0"/>
+          </a:xfrm>
+          <a:prstGeom prst="line">
+            <a:avLst/>
+          </a:prstGeom>
+          <a:ln w="25400">
+            <a:solidFill>
+              <a:srgbClr val="00C8FF"/>
+            </a:solidFill>
+          </a:ln>
+        </p:spPr>
+        <p:style>
+          <a:lnRef idx="2">
+            <a:schemeClr val="accent1"/>
+          </a:lnRef>
+          <a:fillRef idx="0">
+            <a:schemeClr val="accent1"/>
+          </a:fillRef>
+          <a:effectRef idx="1">
+            <a:schemeClr val="accent1"/>
+          </a:effectRef>
+          <a:fontRef idx="minor">
+            <a:schemeClr val="tx1"/>
+          </a:fontRef>
+        </p:style>
+      </p:cxnSp>
+      <p:cxnSp>
+        <p:nvCxnSpPr>
+          <p:cNvPr id="43" name="Connector 42"/>
+          <p:cNvCxnSpPr/>
+          <p:nvPr/>
+        </p:nvCxnSpPr>
+        <p:spPr>
+          <a:xfrm flipV="1">
+            <a:off x="6446520.0" y="1148943.5999999999"/>
+            <a:ext cx="45720.0" cy="20116.800000000047"/>
+          </a:xfrm>
+          <a:prstGeom prst="line">
+            <a:avLst/>
+          </a:prstGeom>
+          <a:ln w="25400">
+            <a:solidFill>
+              <a:srgbClr val="00C8FF"/>
+            </a:solidFill>
+          </a:ln>
+        </p:spPr>
+        <p:style>
+          <a:lnRef idx="2">
+            <a:schemeClr val="accent1"/>
+          </a:lnRef>
+          <a:fillRef idx="0">
+            <a:schemeClr val="accent1"/>
+          </a:fillRef>
+          <a:effectRef idx="1">
+            <a:schemeClr val="accent1"/>
+          </a:effectRef>
+          <a:fontRef idx="minor">
+            <a:schemeClr val="tx1"/>
+          </a:fontRef>
+        </p:style>
+      </p:cxnSp>
+      <p:cxnSp>
+        <p:nvCxnSpPr>
+          <p:cNvPr id="44" name="Connector 43"/>
+          <p:cNvCxnSpPr/>
+          <p:nvPr/>
+        </p:nvCxnSpPr>
+        <p:spPr>
+          <a:xfrm flipV="1">
+            <a:off x="6492240.0" y="1128826.8"/>
+            <a:ext cx="45720.0" cy="20116.799999999814"/>
+          </a:xfrm>
+          <a:prstGeom prst="line">
+            <a:avLst/>
+          </a:prstGeom>
+          <a:ln w="25400">
+            <a:solidFill>
+              <a:srgbClr val="00C8FF"/>
+            </a:solidFill>
+          </a:ln>
+        </p:spPr>
+        <p:style>
+          <a:lnRef idx="2">
+            <a:schemeClr val="accent1"/>
+          </a:lnRef>
+          <a:fillRef idx="0">
+            <a:schemeClr val="accent1"/>
+          </a:fillRef>
+          <a:effectRef idx="1">
+            <a:schemeClr val="accent1"/>
+          </a:effectRef>
+          <a:fontRef idx="minor">
+            <a:schemeClr val="tx1"/>
+          </a:fontRef>
+        </p:style>
+      </p:cxnSp>
+      <p:cxnSp>
+        <p:nvCxnSpPr>
+          <p:cNvPr id="45" name="Connector 44"/>
+          <p:cNvCxnSpPr/>
+          <p:nvPr/>
+        </p:nvCxnSpPr>
+        <p:spPr>
+          <a:xfrm flipV="1">
+            <a:off x="6537960.0" y="1108710.0"/>
+            <a:ext cx="45720.0" cy="20116.800000000047"/>
+          </a:xfrm>
+          <a:prstGeom prst="line">
+            <a:avLst/>
+          </a:prstGeom>
+          <a:ln w="25400">
+            <a:solidFill>
+              <a:srgbClr val="00C8FF"/>
+            </a:solidFill>
+          </a:ln>
+        </p:spPr>
+        <p:style>
+          <a:lnRef idx="2">
+            <a:schemeClr val="accent1"/>
+          </a:lnRef>
+          <a:fillRef idx="0">
+            <a:schemeClr val="accent1"/>
+          </a:fillRef>
+          <a:effectRef idx="1">
+            <a:schemeClr val="accent1"/>
+          </a:effectRef>
+          <a:fontRef idx="minor">
+            <a:schemeClr val="tx1"/>
+          </a:fontRef>
+        </p:style>
+      </p:cxnSp>
+      <p:cxnSp>
+        <p:nvCxnSpPr>
+          <p:cNvPr id="46" name="Connector 45"/>
+          <p:cNvCxnSpPr/>
+          <p:nvPr/>
+        </p:nvCxnSpPr>
+        <p:spPr>
+          <a:xfrm flipV="1">
+            <a:off x="6583680.0" y="1089050.4000000001"/>
+            <a:ext cx="45720.0" cy="19659.59999999986"/>
+          </a:xfrm>
+          <a:prstGeom prst="line">
+            <a:avLst/>
+          </a:prstGeom>
+          <a:ln w="25400">
+            <a:solidFill>
+              <a:srgbClr val="00C8FF"/>
+            </a:solidFill>
+          </a:ln>
+        </p:spPr>
+        <p:style>
+          <a:lnRef idx="2">
+            <a:schemeClr val="accent1"/>
+          </a:lnRef>
+          <a:fillRef idx="0">
+            <a:schemeClr val="accent1"/>
+          </a:fillRef>
+          <a:effectRef idx="1">
+            <a:schemeClr val="accent1"/>
+          </a:effectRef>
+          <a:fontRef idx="minor">
+            <a:schemeClr val="tx1"/>
+          </a:fontRef>
+        </p:style>
+      </p:cxnSp>
+      <p:sp>
+        <p:nvSpPr>
+          <p:cNvPr id="47" name="Oval 46"/>
           <p:cNvSpPr/>
           <p:nvPr/>
         </p:nvSpPr>
         <p:spPr>
           <a:xfrm>
-            <a:off x="6362700" y="1390650"/>
+            <a:off x="5905500" y="1299210"/>
             <a:ext cx="76200" cy="76200"/>
           </a:xfrm>
           <a:prstGeom prst="ellipse">
@@ -4401,13 +4716,13 @@
       </p:sp>
       <p:sp>
         <p:nvSpPr>
-          <p:cNvPr id="39" name="Oval 38"/>
+          <p:cNvPr id="48" name="Oval 47"/>
           <p:cNvSpPr/>
           <p:nvPr/>
         </p:nvSpPr>
         <p:spPr>
           <a:xfrm>
-            <a:off x="6362700" y="1619250"/>
+            <a:off x="5905500" y="1619250"/>
             <a:ext cx="76200" cy="76200"/>
           </a:xfrm>
           <a:prstGeom prst="ellipse">
@@ -4446,13 +4761,13 @@
       </p:sp>
       <p:sp>
         <p:nvSpPr>
-          <p:cNvPr id="40" name="TextBox 39"/>
+          <p:cNvPr id="49" name="TextBox 48"/>
           <p:cNvSpPr txBox="1"/>
           <p:nvPr/>
         </p:nvSpPr>
         <p:spPr>
           <a:xfrm>
-            <a:off x="6766560" y="1108710"/>
+            <a:off x="6309360" y="1108710"/>
             <a:ext cx="635000" cy="254000"/>
           </a:xfrm>
           <a:prstGeom prst="rect">

--- a/output/6.pptx
+++ b/output/6.pptx
@@ -3104,8 +3104,8 @@
         </p:nvCxnSpPr>
         <p:spPr>
           <a:xfrm>
-            <a:off x="2286000.0" y="2571750.0"/>
-            <a:ext cx="4572000.0" cy="0.0"/>
+            <a:off x="4572000.0" y="2571750.0"/>
+            <a:ext cx="2286000.0" cy="0.0"/>
           </a:xfrm>
           <a:prstGeom prst="line">
             <a:avLst/>
@@ -3139,8 +3139,8 @@
         </p:nvCxnSpPr>
         <p:spPr>
           <a:xfrm flipV="1">
-            <a:off x="4572000.0" y="285750.0"/>
-            <a:ext cx="0.0" cy="4572000.0"/>
+            <a:off x="4572000.0" y="514350.0"/>
+            <a:ext cx="0.0" cy="2057400.0"/>
           </a:xfrm>
           <a:prstGeom prst="line">
             <a:avLst/>
@@ -3166,24 +3166,1274 @@
           </a:fontRef>
         </p:style>
       </p:cxnSp>
+      <p:sp>
+        <p:nvSpPr>
+          <p:cNvPr id="4" name="Freeform 3"/>
+          <p:cNvSpPr/>
+          <p:nvPr/>
+        </p:nvSpPr>
+        <p:spPr>
+          <a:xfrm>
+            <a:off x="4572000" y="626364"/>
+            <a:ext cx="2034540" cy="1716786"/>
+          </a:xfrm>
+          <a:custGeom>
+            <a:avLst/>
+            <a:gdLst/>
+            <a:ahLst/>
+            <a:cxnLst/>
+            <a:rect l="l" t="t" r="r" b="b"/>
+            <a:pathLst>
+              <a:path w="2034540" h="1716786">
+                <a:moveTo>
+                  <a:pt x="0" y="1716786"/>
+                </a:moveTo>
+                <a:lnTo>
+                  <a:pt x="6728" y="1648683"/>
+                </a:lnTo>
+                <a:close/>
+                <a:lnTo>
+                  <a:pt x="13456" y="1596019"/>
+                </a:lnTo>
+                <a:close/>
+                <a:lnTo>
+                  <a:pt x="20184" y="1556038"/>
+                </a:lnTo>
+                <a:close/>
+                <a:lnTo>
+                  <a:pt x="26912" y="1525985"/>
+                </a:lnTo>
+                <a:close/>
+                <a:lnTo>
+                  <a:pt x="33640" y="1503103"/>
+                </a:lnTo>
+                <a:close/>
+                <a:lnTo>
+                  <a:pt x="40368" y="1484638"/>
+                </a:lnTo>
+                <a:close/>
+                <a:lnTo>
+                  <a:pt x="47096" y="1467838"/>
+                </a:lnTo>
+                <a:close/>
+                <a:lnTo>
+                  <a:pt x="53824" y="1450900"/>
+                </a:lnTo>
+                <a:close/>
+                <a:lnTo>
+                  <a:pt x="60552" y="1434105"/>
+                </a:lnTo>
+                <a:close/>
+                <a:lnTo>
+                  <a:pt x="67280" y="1418014"/>
+                </a:lnTo>
+                <a:close/>
+                <a:lnTo>
+                  <a:pt x="74008" y="1403110"/>
+                </a:lnTo>
+                <a:close/>
+                <a:lnTo>
+                  <a:pt x="80736" y="1389315"/>
+                </a:lnTo>
+                <a:close/>
+                <a:lnTo>
+                  <a:pt x="87464" y="1376306"/>
+                </a:lnTo>
+                <a:close/>
+                <a:lnTo>
+                  <a:pt x="94192" y="1363763"/>
+                </a:lnTo>
+                <a:close/>
+                <a:lnTo>
+                  <a:pt x="100920" y="1351518"/>
+                </a:lnTo>
+                <a:close/>
+                <a:lnTo>
+                  <a:pt x="107648" y="1339596"/>
+                </a:lnTo>
+                <a:close/>
+                <a:lnTo>
+                  <a:pt x="114376" y="1328037"/>
+                </a:lnTo>
+                <a:close/>
+                <a:lnTo>
+                  <a:pt x="121104" y="1316865"/>
+                </a:lnTo>
+                <a:close/>
+                <a:lnTo>
+                  <a:pt x="127833" y="1306053"/>
+                </a:lnTo>
+                <a:close/>
+                <a:lnTo>
+                  <a:pt x="134561" y="1295564"/>
+                </a:lnTo>
+                <a:close/>
+                <a:lnTo>
+                  <a:pt x="141289" y="1285360"/>
+                </a:lnTo>
+                <a:close/>
+                <a:lnTo>
+                  <a:pt x="148017" y="1275410"/>
+                </a:lnTo>
+                <a:close/>
+                <a:lnTo>
+                  <a:pt x="154745" y="1265690"/>
+                </a:lnTo>
+                <a:close/>
+                <a:lnTo>
+                  <a:pt x="161473" y="1256177"/>
+                </a:lnTo>
+                <a:close/>
+                <a:lnTo>
+                  <a:pt x="168201" y="1246851"/>
+                </a:lnTo>
+                <a:close/>
+                <a:lnTo>
+                  <a:pt x="174929" y="1237706"/>
+                </a:lnTo>
+                <a:close/>
+                <a:lnTo>
+                  <a:pt x="181657" y="1228737"/>
+                </a:lnTo>
+                <a:close/>
+                <a:lnTo>
+                  <a:pt x="188385" y="1219937"/>
+                </a:lnTo>
+                <a:close/>
+                <a:lnTo>
+                  <a:pt x="195113" y="1211286"/>
+                </a:lnTo>
+                <a:close/>
+                <a:lnTo>
+                  <a:pt x="201841" y="1202759"/>
+                </a:lnTo>
+                <a:close/>
+                <a:lnTo>
+                  <a:pt x="208569" y="1194332"/>
+                </a:lnTo>
+                <a:close/>
+                <a:lnTo>
+                  <a:pt x="215297" y="1186006"/>
+                </a:lnTo>
+                <a:close/>
+                <a:lnTo>
+                  <a:pt x="222025" y="1177815"/>
+                </a:lnTo>
+                <a:close/>
+                <a:lnTo>
+                  <a:pt x="228753" y="1169795"/>
+                </a:lnTo>
+                <a:close/>
+                <a:lnTo>
+                  <a:pt x="235481" y="1161965"/>
+                </a:lnTo>
+                <a:close/>
+                <a:lnTo>
+                  <a:pt x="242209" y="1154293"/>
+                </a:lnTo>
+                <a:close/>
+                <a:lnTo>
+                  <a:pt x="248937" y="1146731"/>
+                </a:lnTo>
+                <a:close/>
+                <a:lnTo>
+                  <a:pt x="255665" y="1139235"/>
+                </a:lnTo>
+                <a:close/>
+                <a:lnTo>
+                  <a:pt x="262393" y="1131792"/>
+                </a:lnTo>
+                <a:close/>
+                <a:lnTo>
+                  <a:pt x="269121" y="1124416"/>
+                </a:lnTo>
+                <a:close/>
+                <a:lnTo>
+                  <a:pt x="275849" y="1117117"/>
+                </a:lnTo>
+                <a:close/>
+                <a:lnTo>
+                  <a:pt x="282577" y="1109905"/>
+                </a:lnTo>
+                <a:close/>
+                <a:lnTo>
+                  <a:pt x="289305" y="1102777"/>
+                </a:lnTo>
+                <a:close/>
+                <a:lnTo>
+                  <a:pt x="296033" y="1095730"/>
+                </a:lnTo>
+                <a:close/>
+                <a:lnTo>
+                  <a:pt x="302761" y="1088762"/>
+                </a:lnTo>
+                <a:close/>
+                <a:lnTo>
+                  <a:pt x="309489" y="1081870"/>
+                </a:lnTo>
+                <a:close/>
+                <a:lnTo>
+                  <a:pt x="316217" y="1075057"/>
+                </a:lnTo>
+                <a:close/>
+                <a:lnTo>
+                  <a:pt x="322945" y="1068320"/>
+                </a:lnTo>
+                <a:close/>
+                <a:lnTo>
+                  <a:pt x="329673" y="1061662"/>
+                </a:lnTo>
+                <a:close/>
+                <a:lnTo>
+                  <a:pt x="336401" y="1055087"/>
+                </a:lnTo>
+                <a:close/>
+                <a:lnTo>
+                  <a:pt x="343129" y="1048597"/>
+                </a:lnTo>
+                <a:close/>
+                <a:lnTo>
+                  <a:pt x="349857" y="1042193"/>
+                </a:lnTo>
+                <a:close/>
+                <a:lnTo>
+                  <a:pt x="356585" y="1035864"/>
+                </a:lnTo>
+                <a:close/>
+                <a:lnTo>
+                  <a:pt x="363313" y="1029596"/>
+                </a:lnTo>
+                <a:close/>
+                <a:lnTo>
+                  <a:pt x="370041" y="1023373"/>
+                </a:lnTo>
+                <a:close/>
+                <a:lnTo>
+                  <a:pt x="376769" y="1017181"/>
+                </a:lnTo>
+                <a:close/>
+                <a:lnTo>
+                  <a:pt x="383498" y="1011003"/>
+                </a:lnTo>
+                <a:close/>
+                <a:lnTo>
+                  <a:pt x="390226" y="1004821"/>
+                </a:lnTo>
+                <a:close/>
+                <a:lnTo>
+                  <a:pt x="396954" y="998671"/>
+                </a:lnTo>
+                <a:close/>
+                <a:lnTo>
+                  <a:pt x="403682" y="992694"/>
+                </a:lnTo>
+                <a:close/>
+                <a:lnTo>
+                  <a:pt x="410410" y="987040"/>
+                </a:lnTo>
+                <a:close/>
+                <a:lnTo>
+                  <a:pt x="417138" y="981782"/>
+                </a:lnTo>
+                <a:close/>
+                <a:lnTo>
+                  <a:pt x="423866" y="976467"/>
+                </a:lnTo>
+                <a:close/>
+                <a:lnTo>
+                  <a:pt x="430594" y="970435"/>
+                </a:lnTo>
+                <a:close/>
+                <a:lnTo>
+                  <a:pt x="437322" y="963053"/>
+                </a:lnTo>
+                <a:close/>
+                <a:lnTo>
+                  <a:pt x="444050" y="954592"/>
+                </a:lnTo>
+                <a:close/>
+                <a:lnTo>
+                  <a:pt x="450778" y="946368"/>
+                </a:lnTo>
+                <a:close/>
+                <a:lnTo>
+                  <a:pt x="457506" y="939757"/>
+                </a:lnTo>
+                <a:close/>
+                <a:lnTo>
+                  <a:pt x="464234" y="935605"/>
+                </a:lnTo>
+                <a:close/>
+                <a:lnTo>
+                  <a:pt x="470962" y="932900"/>
+                </a:lnTo>
+                <a:close/>
+                <a:lnTo>
+                  <a:pt x="477690" y="930228"/>
+                </a:lnTo>
+                <a:close/>
+                <a:lnTo>
+                  <a:pt x="484418" y="926271"/>
+                </a:lnTo>
+                <a:close/>
+                <a:lnTo>
+                  <a:pt x="491146" y="920913"/>
+                </a:lnTo>
+                <a:close/>
+                <a:lnTo>
+                  <a:pt x="497874" y="914856"/>
+                </a:lnTo>
+                <a:close/>
+                <a:lnTo>
+                  <a:pt x="504602" y="908813"/>
+                </a:lnTo>
+                <a:close/>
+                <a:lnTo>
+                  <a:pt x="511330" y="903213"/>
+                </a:lnTo>
+                <a:close/>
+                <a:lnTo>
+                  <a:pt x="518058" y="897926"/>
+                </a:lnTo>
+                <a:close/>
+                <a:lnTo>
+                  <a:pt x="524786" y="892761"/>
+                </a:lnTo>
+                <a:close/>
+                <a:lnTo>
+                  <a:pt x="531514" y="887552"/>
+                </a:lnTo>
+                <a:close/>
+                <a:lnTo>
+                  <a:pt x="538242" y="882288"/>
+                </a:lnTo>
+                <a:close/>
+                <a:lnTo>
+                  <a:pt x="544970" y="877021"/>
+                </a:lnTo>
+                <a:close/>
+                <a:lnTo>
+                  <a:pt x="551698" y="871803"/>
+                </a:lnTo>
+                <a:close/>
+                <a:lnTo>
+                  <a:pt x="558426" y="866654"/>
+                </a:lnTo>
+                <a:close/>
+                <a:lnTo>
+                  <a:pt x="565154" y="861560"/>
+                </a:lnTo>
+                <a:close/>
+                <a:lnTo>
+                  <a:pt x="571882" y="856506"/>
+                </a:lnTo>
+                <a:close/>
+                <a:lnTo>
+                  <a:pt x="578610" y="851482"/>
+                </a:lnTo>
+                <a:close/>
+                <a:lnTo>
+                  <a:pt x="585338" y="846493"/>
+                </a:lnTo>
+                <a:close/>
+                <a:lnTo>
+                  <a:pt x="592066" y="841550"/>
+                </a:lnTo>
+                <a:close/>
+                <a:lnTo>
+                  <a:pt x="598794" y="836660"/>
+                </a:lnTo>
+                <a:close/>
+                <a:lnTo>
+                  <a:pt x="605522" y="831813"/>
+                </a:lnTo>
+                <a:close/>
+                <a:lnTo>
+                  <a:pt x="612250" y="826985"/>
+                </a:lnTo>
+                <a:close/>
+                <a:lnTo>
+                  <a:pt x="618978" y="822153"/>
+                </a:lnTo>
+                <a:close/>
+                <a:lnTo>
+                  <a:pt x="625706" y="817305"/>
+                </a:lnTo>
+                <a:close/>
+                <a:lnTo>
+                  <a:pt x="632435" y="812454"/>
+                </a:lnTo>
+                <a:close/>
+                <a:lnTo>
+                  <a:pt x="639163" y="807616"/>
+                </a:lnTo>
+                <a:close/>
+                <a:lnTo>
+                  <a:pt x="645891" y="802808"/>
+                </a:lnTo>
+                <a:close/>
+                <a:lnTo>
+                  <a:pt x="652619" y="798057"/>
+                </a:lnTo>
+                <a:close/>
+                <a:lnTo>
+                  <a:pt x="659347" y="793397"/>
+                </a:lnTo>
+                <a:close/>
+                <a:lnTo>
+                  <a:pt x="666075" y="788857"/>
+                </a:lnTo>
+                <a:close/>
+                <a:lnTo>
+                  <a:pt x="672803" y="784420"/>
+                </a:lnTo>
+                <a:close/>
+                <a:lnTo>
+                  <a:pt x="679531" y="780013"/>
+                </a:lnTo>
+                <a:close/>
+                <a:lnTo>
+                  <a:pt x="686259" y="775562"/>
+                </a:lnTo>
+                <a:close/>
+                <a:lnTo>
+                  <a:pt x="692987" y="771019"/>
+                </a:lnTo>
+                <a:close/>
+                <a:lnTo>
+                  <a:pt x="699715" y="766423"/>
+                </a:lnTo>
+                <a:close/>
+                <a:lnTo>
+                  <a:pt x="706443" y="761828"/>
+                </a:lnTo>
+                <a:close/>
+                <a:lnTo>
+                  <a:pt x="713171" y="757287"/>
+                </a:lnTo>
+                <a:close/>
+                <a:lnTo>
+                  <a:pt x="719899" y="752816"/>
+                </a:lnTo>
+                <a:close/>
+                <a:lnTo>
+                  <a:pt x="726627" y="748408"/>
+                </a:lnTo>
+                <a:close/>
+                <a:lnTo>
+                  <a:pt x="733355" y="744053"/>
+                </a:lnTo>
+                <a:close/>
+                <a:lnTo>
+                  <a:pt x="740083" y="739740"/>
+                </a:lnTo>
+                <a:close/>
+                <a:lnTo>
+                  <a:pt x="746811" y="735445"/>
+                </a:lnTo>
+                <a:close/>
+                <a:lnTo>
+                  <a:pt x="753539" y="731145"/>
+                </a:lnTo>
+                <a:close/>
+                <a:lnTo>
+                  <a:pt x="760267" y="726822"/>
+                </a:lnTo>
+                <a:close/>
+                <a:lnTo>
+                  <a:pt x="766995" y="722497"/>
+                </a:lnTo>
+                <a:close/>
+                <a:lnTo>
+                  <a:pt x="773723" y="718199"/>
+                </a:lnTo>
+                <a:close/>
+                <a:lnTo>
+                  <a:pt x="780451" y="713961"/>
+                </a:lnTo>
+                <a:close/>
+                <a:lnTo>
+                  <a:pt x="787179" y="709783"/>
+                </a:lnTo>
+                <a:close/>
+                <a:lnTo>
+                  <a:pt x="793907" y="705630"/>
+                </a:lnTo>
+                <a:close/>
+                <a:lnTo>
+                  <a:pt x="800635" y="701470"/>
+                </a:lnTo>
+                <a:close/>
+                <a:lnTo>
+                  <a:pt x="807363" y="697282"/>
+                </a:lnTo>
+                <a:close/>
+                <a:lnTo>
+                  <a:pt x="814091" y="693093"/>
+                </a:lnTo>
+                <a:close/>
+                <a:lnTo>
+                  <a:pt x="820819" y="688938"/>
+                </a:lnTo>
+                <a:close/>
+                <a:lnTo>
+                  <a:pt x="827547" y="684849"/>
+                </a:lnTo>
+                <a:close/>
+                <a:lnTo>
+                  <a:pt x="834275" y="680814"/>
+                </a:lnTo>
+                <a:close/>
+                <a:lnTo>
+                  <a:pt x="841003" y="676798"/>
+                </a:lnTo>
+                <a:close/>
+                <a:lnTo>
+                  <a:pt x="847731" y="672763"/>
+                </a:lnTo>
+                <a:close/>
+                <a:lnTo>
+                  <a:pt x="854459" y="668699"/>
+                </a:lnTo>
+                <a:close/>
+                <a:lnTo>
+                  <a:pt x="861187" y="664646"/>
+                </a:lnTo>
+                <a:close/>
+                <a:lnTo>
+                  <a:pt x="867915" y="660646"/>
+                </a:lnTo>
+                <a:close/>
+                <a:lnTo>
+                  <a:pt x="874643" y="656731"/>
+                </a:lnTo>
+                <a:close/>
+                <a:lnTo>
+                  <a:pt x="881372" y="652858"/>
+                </a:lnTo>
+                <a:close/>
+                <a:lnTo>
+                  <a:pt x="888100" y="648961"/>
+                </a:lnTo>
+                <a:close/>
+                <a:lnTo>
+                  <a:pt x="894828" y="644977"/>
+                </a:lnTo>
+                <a:close/>
+                <a:lnTo>
+                  <a:pt x="901556" y="640912"/>
+                </a:lnTo>
+                <a:close/>
+                <a:lnTo>
+                  <a:pt x="908284" y="636847"/>
+                </a:lnTo>
+                <a:close/>
+                <a:lnTo>
+                  <a:pt x="915012" y="632866"/>
+                </a:lnTo>
+                <a:close/>
+                <a:lnTo>
+                  <a:pt x="921740" y="629020"/>
+                </a:lnTo>
+                <a:close/>
+                <a:lnTo>
+                  <a:pt x="928468" y="625271"/>
+                </a:lnTo>
+                <a:close/>
+                <a:lnTo>
+                  <a:pt x="935196" y="621560"/>
+                </a:lnTo>
+                <a:close/>
+                <a:lnTo>
+                  <a:pt x="941924" y="617833"/>
+                </a:lnTo>
+                <a:close/>
+                <a:lnTo>
+                  <a:pt x="948652" y="614074"/>
+                </a:lnTo>
+                <a:close/>
+                <a:lnTo>
+                  <a:pt x="955380" y="610292"/>
+                </a:lnTo>
+                <a:close/>
+                <a:lnTo>
+                  <a:pt x="962108" y="606496"/>
+                </a:lnTo>
+                <a:close/>
+                <a:lnTo>
+                  <a:pt x="968836" y="602700"/>
+                </a:lnTo>
+                <a:close/>
+                <a:lnTo>
+                  <a:pt x="975564" y="598925"/>
+                </a:lnTo>
+                <a:close/>
+                <a:lnTo>
+                  <a:pt x="982292" y="595195"/>
+                </a:lnTo>
+                <a:close/>
+                <a:lnTo>
+                  <a:pt x="989020" y="591527"/>
+                </a:lnTo>
+                <a:close/>
+                <a:lnTo>
+                  <a:pt x="995748" y="587901"/>
+                </a:lnTo>
+                <a:close/>
+                <a:lnTo>
+                  <a:pt x="1002476" y="584286"/>
+                </a:lnTo>
+                <a:close/>
+                <a:lnTo>
+                  <a:pt x="1009204" y="580652"/>
+                </a:lnTo>
+                <a:close/>
+                <a:lnTo>
+                  <a:pt x="1015932" y="577000"/>
+                </a:lnTo>
+                <a:close/>
+                <a:lnTo>
+                  <a:pt x="1022660" y="573360"/>
+                </a:lnTo>
+                <a:close/>
+                <a:lnTo>
+                  <a:pt x="1029388" y="569763"/>
+                </a:lnTo>
+                <a:close/>
+                <a:lnTo>
+                  <a:pt x="1036116" y="566229"/>
+                </a:lnTo>
+                <a:close/>
+                <a:lnTo>
+                  <a:pt x="1042844" y="562739"/>
+                </a:lnTo>
+                <a:close/>
+                <a:lnTo>
+                  <a:pt x="1049572" y="559267"/>
+                </a:lnTo>
+                <a:close/>
+                <a:lnTo>
+                  <a:pt x="1056300" y="555790"/>
+                </a:lnTo>
+                <a:close/>
+                <a:lnTo>
+                  <a:pt x="1063028" y="552298"/>
+                </a:lnTo>
+                <a:close/>
+                <a:lnTo>
+                  <a:pt x="1069756" y="548792"/>
+                </a:lnTo>
+                <a:close/>
+                <a:lnTo>
+                  <a:pt x="1076484" y="545273"/>
+                </a:lnTo>
+                <a:close/>
+                <a:lnTo>
+                  <a:pt x="1083212" y="541750"/>
+                </a:lnTo>
+                <a:close/>
+                <a:lnTo>
+                  <a:pt x="1089940" y="538244"/>
+                </a:lnTo>
+                <a:close/>
+                <a:lnTo>
+                  <a:pt x="1096668" y="534779"/>
+                </a:lnTo>
+                <a:close/>
+                <a:lnTo>
+                  <a:pt x="1103396" y="531372"/>
+                </a:lnTo>
+                <a:close/>
+                <a:lnTo>
+                  <a:pt x="1110124" y="528009"/>
+                </a:lnTo>
+                <a:close/>
+                <a:lnTo>
+                  <a:pt x="1116852" y="524669"/>
+                </a:lnTo>
+                <a:close/>
+                <a:lnTo>
+                  <a:pt x="1123580" y="521326"/>
+                </a:lnTo>
+                <a:close/>
+                <a:lnTo>
+                  <a:pt x="1130309" y="517971"/>
+                </a:lnTo>
+                <a:close/>
+                <a:lnTo>
+                  <a:pt x="1137037" y="514603"/>
+                </a:lnTo>
+                <a:close/>
+                <a:lnTo>
+                  <a:pt x="1143765" y="511222"/>
+                </a:lnTo>
+                <a:close/>
+                <a:lnTo>
+                  <a:pt x="1150493" y="507833"/>
+                </a:lnTo>
+                <a:close/>
+                <a:lnTo>
+                  <a:pt x="1157221" y="504456"/>
+                </a:lnTo>
+                <a:close/>
+                <a:lnTo>
+                  <a:pt x="1163949" y="501116"/>
+                </a:lnTo>
+                <a:close/>
+                <a:lnTo>
+                  <a:pt x="1170677" y="497832"/>
+                </a:lnTo>
+                <a:close/>
+                <a:lnTo>
+                  <a:pt x="1177405" y="494597"/>
+                </a:lnTo>
+                <a:close/>
+                <a:lnTo>
+                  <a:pt x="1184133" y="491388"/>
+                </a:lnTo>
+                <a:close/>
+                <a:lnTo>
+                  <a:pt x="1190861" y="488183"/>
+                </a:lnTo>
+                <a:close/>
+                <a:lnTo>
+                  <a:pt x="1197588" y="484967"/>
+                </a:lnTo>
+                <a:close/>
+                <a:lnTo>
+                  <a:pt x="1204316" y="481736"/>
+                </a:lnTo>
+                <a:close/>
+                <a:lnTo>
+                  <a:pt x="1211045" y="478490"/>
+                </a:lnTo>
+                <a:close/>
+                <a:lnTo>
+                  <a:pt x="1217775" y="475231"/>
+                </a:lnTo>
+                <a:close/>
+                <a:lnTo>
+                  <a:pt x="1224504" y="471982"/>
+                </a:lnTo>
+                <a:close/>
+                <a:lnTo>
+                  <a:pt x="1231231" y="468770"/>
+                </a:lnTo>
+                <a:close/>
+                <a:lnTo>
+                  <a:pt x="1237953" y="465622"/>
+                </a:lnTo>
+                <a:close/>
+                <a:lnTo>
+                  <a:pt x="1244674" y="462530"/>
+                </a:lnTo>
+                <a:close/>
+                <a:lnTo>
+                  <a:pt x="1251401" y="459454"/>
+                </a:lnTo>
+                <a:close/>
+                <a:lnTo>
+                  <a:pt x="1258144" y="456352"/>
+                </a:lnTo>
+                <a:close/>
+                <a:lnTo>
+                  <a:pt x="1264901" y="453210"/>
+                </a:lnTo>
+                <a:close/>
+                <a:lnTo>
+                  <a:pt x="1271644" y="450081"/>
+                </a:lnTo>
+                <a:close/>
+                <a:lnTo>
+                  <a:pt x="1278344" y="447035"/>
+                </a:lnTo>
+                <a:close/>
+                <a:lnTo>
+                  <a:pt x="1284979" y="444119"/>
+                </a:lnTo>
+                <a:close/>
+                <a:lnTo>
+                  <a:pt x="1291615" y="441204"/>
+                </a:lnTo>
+                <a:close/>
+                <a:lnTo>
+                  <a:pt x="1298368" y="438061"/>
+                </a:lnTo>
+                <a:close/>
+                <a:lnTo>
+                  <a:pt x="1305352" y="434467"/>
+                </a:lnTo>
+                <a:close/>
+                <a:lnTo>
+                  <a:pt x="1312478" y="430622"/>
+                </a:lnTo>
+                <a:close/>
+                <a:lnTo>
+                  <a:pt x="1319338" y="427390"/>
+                </a:lnTo>
+                <a:close/>
+                <a:lnTo>
+                  <a:pt x="1325497" y="425690"/>
+                </a:lnTo>
+                <a:close/>
+                <a:lnTo>
+                  <a:pt x="1330797" y="425845"/>
+                </a:lnTo>
+                <a:close/>
+                <a:lnTo>
+                  <a:pt x="1336445" y="425233"/>
+                </a:lnTo>
+                <a:close/>
+                <a:lnTo>
+                  <a:pt x="1344063" y="420332"/>
+                </a:lnTo>
+                <a:close/>
+                <a:lnTo>
+                  <a:pt x="1355167" y="407847"/>
+                </a:lnTo>
+                <a:close/>
+                <a:lnTo>
+                  <a:pt x="1369182" y="388986"/>
+                </a:lnTo>
+                <a:close/>
+                <a:lnTo>
+                  <a:pt x="1383619" y="369076"/>
+                </a:lnTo>
+                <a:close/>
+                <a:lnTo>
+                  <a:pt x="1395919" y="353591"/>
+                </a:lnTo>
+                <a:close/>
+                <a:lnTo>
+                  <a:pt x="1404542" y="345844"/>
+                </a:lnTo>
+                <a:close/>
+                <a:lnTo>
+                  <a:pt x="1410659" y="343365"/>
+                </a:lnTo>
+                <a:close/>
+                <a:lnTo>
+                  <a:pt x="1415895" y="342730"/>
+                </a:lnTo>
+                <a:close/>
+                <a:lnTo>
+                  <a:pt x="1421734" y="340808"/>
+                </a:lnTo>
+                <a:close/>
+                <a:lnTo>
+                  <a:pt x="1428411" y="337123"/>
+                </a:lnTo>
+                <a:close/>
+                <a:lnTo>
+                  <a:pt x="1435497" y="332610"/>
+                </a:lnTo>
+                <a:close/>
+                <a:lnTo>
+                  <a:pt x="1442561" y="328207"/>
+                </a:lnTo>
+                <a:close/>
+                <a:lnTo>
+                  <a:pt x="1449378" y="324389"/>
+                </a:lnTo>
+                <a:close/>
+                <a:lnTo>
+                  <a:pt x="1456040" y="320917"/>
+                </a:lnTo>
+                <a:close/>
+                <a:lnTo>
+                  <a:pt x="1462663" y="317496"/>
+                </a:lnTo>
+                <a:close/>
+                <a:lnTo>
+                  <a:pt x="1469341" y="313884"/>
+                </a:lnTo>
+                <a:close/>
+                <a:lnTo>
+                  <a:pt x="1476074" y="310101"/>
+                </a:lnTo>
+                <a:close/>
+                <a:lnTo>
+                  <a:pt x="1482830" y="306246"/>
+                </a:lnTo>
+                <a:close/>
+                <a:lnTo>
+                  <a:pt x="1489579" y="302411"/>
+                </a:lnTo>
+                <a:close/>
+                <a:lnTo>
+                  <a:pt x="1496310" y="298630"/>
+                </a:lnTo>
+                <a:close/>
+                <a:lnTo>
+                  <a:pt x="1503032" y="294882"/>
+                </a:lnTo>
+                <a:close/>
+                <a:lnTo>
+                  <a:pt x="1509753" y="291141"/>
+                </a:lnTo>
+                <a:close/>
+                <a:lnTo>
+                  <a:pt x="1516479" y="287389"/>
+                </a:lnTo>
+                <a:close/>
+                <a:lnTo>
+                  <a:pt x="1523207" y="283623"/>
+                </a:lnTo>
+                <a:close/>
+                <a:lnTo>
+                  <a:pt x="1529938" y="279840"/>
+                </a:lnTo>
+                <a:close/>
+                <a:lnTo>
+                  <a:pt x="1536667" y="276042"/>
+                </a:lnTo>
+                <a:close/>
+                <a:lnTo>
+                  <a:pt x="1543395" y="272249"/>
+                </a:lnTo>
+                <a:close/>
+                <a:lnTo>
+                  <a:pt x="1550122" y="268491"/>
+                </a:lnTo>
+                <a:close/>
+                <a:lnTo>
+                  <a:pt x="1556850" y="264799"/>
+                </a:lnTo>
+                <a:close/>
+                <a:lnTo>
+                  <a:pt x="1563578" y="261171"/>
+                </a:lnTo>
+                <a:close/>
+                <a:lnTo>
+                  <a:pt x="1570306" y="257559"/>
+                </a:lnTo>
+                <a:close/>
+                <a:lnTo>
+                  <a:pt x="1577034" y="253913"/>
+                </a:lnTo>
+                <a:close/>
+                <a:lnTo>
+                  <a:pt x="1583762" y="250194"/>
+                </a:lnTo>
+                <a:close/>
+                <a:lnTo>
+                  <a:pt x="1590490" y="246419"/>
+                </a:lnTo>
+                <a:close/>
+                <a:lnTo>
+                  <a:pt x="1597218" y="242624"/>
+                </a:lnTo>
+                <a:close/>
+                <a:lnTo>
+                  <a:pt x="1603946" y="238841"/>
+                </a:lnTo>
+                <a:close/>
+                <a:lnTo>
+                  <a:pt x="1610674" y="235078"/>
+                </a:lnTo>
+                <a:close/>
+                <a:lnTo>
+                  <a:pt x="1617402" y="231317"/>
+                </a:lnTo>
+                <a:close/>
+                <a:lnTo>
+                  <a:pt x="1624130" y="227540"/>
+                </a:lnTo>
+                <a:close/>
+                <a:lnTo>
+                  <a:pt x="1630858" y="223745"/>
+                </a:lnTo>
+                <a:close/>
+                <a:lnTo>
+                  <a:pt x="1637586" y="219961"/>
+                </a:lnTo>
+                <a:close/>
+                <a:lnTo>
+                  <a:pt x="1644314" y="216223"/>
+                </a:lnTo>
+                <a:close/>
+                <a:lnTo>
+                  <a:pt x="1651042" y="212559"/>
+                </a:lnTo>
+                <a:close/>
+                <a:lnTo>
+                  <a:pt x="1657771" y="208944"/>
+                </a:lnTo>
+                <a:close/>
+                <a:lnTo>
+                  <a:pt x="1664499" y="205325"/>
+                </a:lnTo>
+                <a:close/>
+                <a:lnTo>
+                  <a:pt x="1671227" y="201652"/>
+                </a:lnTo>
+                <a:close/>
+                <a:lnTo>
+                  <a:pt x="1677955" y="197906"/>
+                </a:lnTo>
+                <a:close/>
+                <a:lnTo>
+                  <a:pt x="1684683" y="194118"/>
+                </a:lnTo>
+                <a:close/>
+                <a:lnTo>
+                  <a:pt x="1691411" y="190324"/>
+                </a:lnTo>
+                <a:close/>
+                <a:lnTo>
+                  <a:pt x="1698139" y="186551"/>
+                </a:lnTo>
+                <a:close/>
+                <a:lnTo>
+                  <a:pt x="1704867" y="182790"/>
+                </a:lnTo>
+                <a:close/>
+                <a:lnTo>
+                  <a:pt x="1711595" y="179025"/>
+                </a:lnTo>
+                <a:close/>
+                <a:lnTo>
+                  <a:pt x="1718323" y="175240"/>
+                </a:lnTo>
+                <a:close/>
+                <a:lnTo>
+                  <a:pt x="1725051" y="171445"/>
+                </a:lnTo>
+                <a:close/>
+                <a:lnTo>
+                  <a:pt x="1731779" y="167675"/>
+                </a:lnTo>
+                <a:close/>
+                <a:lnTo>
+                  <a:pt x="1738507" y="163965"/>
+                </a:lnTo>
+                <a:close/>
+                <a:lnTo>
+                  <a:pt x="1745235" y="160328"/>
+                </a:lnTo>
+                <a:close/>
+                <a:lnTo>
+                  <a:pt x="1751963" y="156717"/>
+                </a:lnTo>
+                <a:close/>
+                <a:lnTo>
+                  <a:pt x="1758691" y="153083"/>
+                </a:lnTo>
+                <a:close/>
+                <a:lnTo>
+                  <a:pt x="1765419" y="149377"/>
+                </a:lnTo>
+                <a:close/>
+                <a:lnTo>
+                  <a:pt x="1772147" y="145610"/>
+                </a:lnTo>
+                <a:close/>
+                <a:lnTo>
+                  <a:pt x="1778875" y="141816"/>
+                </a:lnTo>
+                <a:close/>
+                <a:lnTo>
+                  <a:pt x="1785603" y="138029"/>
+                </a:lnTo>
+                <a:close/>
+                <a:lnTo>
+                  <a:pt x="1792331" y="134263"/>
+                </a:lnTo>
+                <a:close/>
+                <a:lnTo>
+                  <a:pt x="1799059" y="130503"/>
+                </a:lnTo>
+                <a:close/>
+                <a:lnTo>
+                  <a:pt x="1805787" y="126730"/>
+                </a:lnTo>
+                <a:close/>
+                <a:lnTo>
+                  <a:pt x="1812515" y="122937"/>
+                </a:lnTo>
+                <a:close/>
+                <a:lnTo>
+                  <a:pt x="1819243" y="119148"/>
+                </a:lnTo>
+                <a:close/>
+                <a:lnTo>
+                  <a:pt x="1825971" y="115399"/>
+                </a:lnTo>
+                <a:close/>
+                <a:lnTo>
+                  <a:pt x="1832699" y="111721"/>
+                </a:lnTo>
+                <a:close/>
+                <a:lnTo>
+                  <a:pt x="1839427" y="108101"/>
+                </a:lnTo>
+                <a:close/>
+                <a:lnTo>
+                  <a:pt x="1846155" y="104487"/>
+                </a:lnTo>
+                <a:close/>
+                <a:lnTo>
+                  <a:pt x="1852883" y="100827"/>
+                </a:lnTo>
+                <a:close/>
+                <a:lnTo>
+                  <a:pt x="1859611" y="97092"/>
+                </a:lnTo>
+                <a:close/>
+                <a:lnTo>
+                  <a:pt x="1866339" y="93310"/>
+                </a:lnTo>
+                <a:close/>
+                <a:lnTo>
+                  <a:pt x="1873067" y="89515"/>
+                </a:lnTo>
+                <a:close/>
+                <a:lnTo>
+                  <a:pt x="1879795" y="85737"/>
+                </a:lnTo>
+                <a:close/>
+                <a:lnTo>
+                  <a:pt x="1886523" y="81976"/>
+                </a:lnTo>
+                <a:close/>
+                <a:lnTo>
+                  <a:pt x="1893251" y="78213"/>
+                </a:lnTo>
+                <a:close/>
+                <a:lnTo>
+                  <a:pt x="1899979" y="74431"/>
+                </a:lnTo>
+                <a:close/>
+                <a:lnTo>
+                  <a:pt x="1906707" y="70636"/>
+                </a:lnTo>
+                <a:close/>
+                <a:lnTo>
+                  <a:pt x="1913436" y="66859"/>
+                </a:lnTo>
+                <a:close/>
+                <a:lnTo>
+                  <a:pt x="1920164" y="63135"/>
+                </a:lnTo>
+                <a:close/>
+                <a:lnTo>
+                  <a:pt x="1926892" y="59487"/>
+                </a:lnTo>
+                <a:close/>
+                <a:lnTo>
+                  <a:pt x="1933620" y="55875"/>
+                </a:lnTo>
+                <a:close/>
+                <a:lnTo>
+                  <a:pt x="1940348" y="52249"/>
+                </a:lnTo>
+                <a:close/>
+                <a:lnTo>
+                  <a:pt x="1947076" y="48559"/>
+                </a:lnTo>
+                <a:close/>
+                <a:lnTo>
+                  <a:pt x="1953804" y="44801"/>
+                </a:lnTo>
+                <a:close/>
+                <a:lnTo>
+                  <a:pt x="1960532" y="41009"/>
+                </a:lnTo>
+                <a:close/>
+                <a:lnTo>
+                  <a:pt x="1967260" y="37216"/>
+                </a:lnTo>
+                <a:close/>
+                <a:lnTo>
+                  <a:pt x="1973988" y="33443"/>
+                </a:lnTo>
+                <a:close/>
+                <a:lnTo>
+                  <a:pt x="1980716" y="29681"/>
+                </a:lnTo>
+                <a:close/>
+                <a:lnTo>
+                  <a:pt x="1987444" y="25917"/>
+                </a:lnTo>
+                <a:close/>
+                <a:lnTo>
+                  <a:pt x="1994172" y="22142"/>
+                </a:lnTo>
+                <a:close/>
+                <a:lnTo>
+                  <a:pt x="2000900" y="18364"/>
+                </a:lnTo>
+                <a:close/>
+                <a:lnTo>
+                  <a:pt x="2007628" y="14599"/>
+                </a:lnTo>
+                <a:close/>
+                <a:lnTo>
+                  <a:pt x="2014356" y="10863"/>
+                </a:lnTo>
+                <a:close/>
+                <a:lnTo>
+                  <a:pt x="2021084" y="7174"/>
+                </a:lnTo>
+                <a:close/>
+                <a:lnTo>
+                  <a:pt x="2027812" y="3547"/>
+                </a:lnTo>
+                <a:close/>
+                <a:lnTo>
+                  <a:pt x="2034540" y="0"/>
+                </a:lnTo>
+                <a:close/>
+              </a:path>
+            </a:pathLst>
+          </a:custGeom>
+          <a:ln w="31750">
+            <a:solidFill>
+              <a:srgbClr val="00E5FF"/>
+            </a:solidFill>
+          </a:ln>
+        </p:spPr>
+        <p:style>
+          <a:lnRef idx="1">
+            <a:schemeClr val="accent1"/>
+          </a:lnRef>
+          <a:fillRef idx="3">
+            <a:schemeClr val="accent1"/>
+          </a:fillRef>
+          <a:effectRef idx="2">
+            <a:schemeClr val="accent1"/>
+          </a:effectRef>
+          <a:fontRef idx="minor">
+            <a:schemeClr val="lt1"/>
+          </a:fontRef>
+        </p:style>
+        <p:txBody>
+          <a:bodyPr rtlCol="0" anchor="ctr"/>
+          <a:lstStyle/>
+          <a:p>
+            <a:pPr algn="ctr"/>
+          </a:p>
+        </p:txBody>
+      </p:sp>
       <p:cxnSp>
         <p:nvCxnSpPr>
-          <p:cNvPr id="4" name="Connector 3"/>
+          <p:cNvPr id="5" name="Connector 4"/>
           <p:cNvCxnSpPr/>
           <p:nvPr/>
         </p:nvCxnSpPr>
         <p:spPr>
           <a:xfrm flipV="1">
-            <a:off x="4572000.0" y="2255367.6"/>
-            <a:ext cx="45720.0" cy="53949.60000000009"/>
+            <a:off x="5943600.0" y="997153.2"/>
+            <a:ext cx="0.0" cy="1574596.8"/>
           </a:xfrm>
           <a:prstGeom prst="line">
             <a:avLst/>
           </a:prstGeom>
-          <a:ln w="25400">
+          <a:ln w="12700">
             <a:solidFill>
-              <a:srgbClr val="00C8FF"/>
+              <a:srgbClr val="787878"/>
             </a:solidFill>
+            <a:prstDash val="sysDash"/>
           </a:ln>
         </p:spPr>
         <p:style>
@@ -3201,1492 +4451,24 @@
           </a:fontRef>
         </p:style>
       </p:cxnSp>
-      <p:cxnSp>
-        <p:nvCxnSpPr>
-          <p:cNvPr id="5" name="Connector 4"/>
-          <p:cNvCxnSpPr/>
-          <p:nvPr/>
-        </p:nvCxnSpPr>
-        <p:spPr>
-          <a:xfrm flipV="1">
-            <a:off x="4617720.0" y="2207361.6"/>
-            <a:ext cx="45720.0" cy="48006.0"/>
-          </a:xfrm>
-          <a:prstGeom prst="line">
-            <a:avLst/>
-          </a:prstGeom>
-          <a:ln w="25400">
-            <a:solidFill>
-              <a:srgbClr val="00C8FF"/>
-            </a:solidFill>
-          </a:ln>
-        </p:spPr>
-        <p:style>
-          <a:lnRef idx="2">
-            <a:schemeClr val="accent1"/>
-          </a:lnRef>
-          <a:fillRef idx="0">
-            <a:schemeClr val="accent1"/>
-          </a:fillRef>
-          <a:effectRef idx="1">
-            <a:schemeClr val="accent1"/>
-          </a:effectRef>
-          <a:fontRef idx="minor">
-            <a:schemeClr val="tx1"/>
-          </a:fontRef>
-        </p:style>
-      </p:cxnSp>
-      <p:cxnSp>
-        <p:nvCxnSpPr>
-          <p:cNvPr id="6" name="Connector 5"/>
-          <p:cNvCxnSpPr/>
-          <p:nvPr/>
-        </p:nvCxnSpPr>
-        <p:spPr>
-          <a:xfrm flipV="1">
-            <a:off x="4663440.0" y="2163470.4"/>
-            <a:ext cx="45720.0" cy="43891.200000000186"/>
-          </a:xfrm>
-          <a:prstGeom prst="line">
-            <a:avLst/>
-          </a:prstGeom>
-          <a:ln w="25400">
-            <a:solidFill>
-              <a:srgbClr val="00C8FF"/>
-            </a:solidFill>
-          </a:ln>
-        </p:spPr>
-        <p:style>
-          <a:lnRef idx="2">
-            <a:schemeClr val="accent1"/>
-          </a:lnRef>
-          <a:fillRef idx="0">
-            <a:schemeClr val="accent1"/>
-          </a:fillRef>
-          <a:effectRef idx="1">
-            <a:schemeClr val="accent1"/>
-          </a:effectRef>
-          <a:fontRef idx="minor">
-            <a:schemeClr val="tx1"/>
-          </a:fontRef>
-        </p:style>
-      </p:cxnSp>
-      <p:cxnSp>
-        <p:nvCxnSpPr>
-          <p:cNvPr id="7" name="Connector 6"/>
-          <p:cNvCxnSpPr/>
-          <p:nvPr/>
-        </p:nvCxnSpPr>
-        <p:spPr>
-          <a:xfrm flipV="1">
-            <a:off x="4709160.0" y="2122322.4"/>
-            <a:ext cx="45720.0" cy="41148.0"/>
-          </a:xfrm>
-          <a:prstGeom prst="line">
-            <a:avLst/>
-          </a:prstGeom>
-          <a:ln w="25400">
-            <a:solidFill>
-              <a:srgbClr val="00C8FF"/>
-            </a:solidFill>
-          </a:ln>
-        </p:spPr>
-        <p:style>
-          <a:lnRef idx="2">
-            <a:schemeClr val="accent1"/>
-          </a:lnRef>
-          <a:fillRef idx="0">
-            <a:schemeClr val="accent1"/>
-          </a:fillRef>
-          <a:effectRef idx="1">
-            <a:schemeClr val="accent1"/>
-          </a:effectRef>
-          <a:fontRef idx="minor">
-            <a:schemeClr val="tx1"/>
-          </a:fontRef>
-        </p:style>
-      </p:cxnSp>
-      <p:cxnSp>
-        <p:nvCxnSpPr>
-          <p:cNvPr id="8" name="Connector 7"/>
-          <p:cNvCxnSpPr/>
-          <p:nvPr/>
-        </p:nvCxnSpPr>
-        <p:spPr>
-          <a:xfrm flipV="1">
-            <a:off x="4754880.0" y="2083917.6"/>
-            <a:ext cx="45720.0" cy="38404.799999999814"/>
-          </a:xfrm>
-          <a:prstGeom prst="line">
-            <a:avLst/>
-          </a:prstGeom>
-          <a:ln w="25400">
-            <a:solidFill>
-              <a:srgbClr val="00C8FF"/>
-            </a:solidFill>
-          </a:ln>
-        </p:spPr>
-        <p:style>
-          <a:lnRef idx="2">
-            <a:schemeClr val="accent1"/>
-          </a:lnRef>
-          <a:fillRef idx="0">
-            <a:schemeClr val="accent1"/>
-          </a:fillRef>
-          <a:effectRef idx="1">
-            <a:schemeClr val="accent1"/>
-          </a:effectRef>
-          <a:fontRef idx="minor">
-            <a:schemeClr val="tx1"/>
-          </a:fontRef>
-        </p:style>
-      </p:cxnSp>
-      <p:cxnSp>
-        <p:nvCxnSpPr>
-          <p:cNvPr id="9" name="Connector 8"/>
-          <p:cNvCxnSpPr/>
-          <p:nvPr/>
-        </p:nvCxnSpPr>
-        <p:spPr>
-          <a:xfrm flipV="1">
-            <a:off x="4800600.0" y="2047341.6"/>
-            <a:ext cx="45720.0" cy="36576.0"/>
-          </a:xfrm>
-          <a:prstGeom prst="line">
-            <a:avLst/>
-          </a:prstGeom>
-          <a:ln w="25400">
-            <a:solidFill>
-              <a:srgbClr val="00C8FF"/>
-            </a:solidFill>
-          </a:ln>
-        </p:spPr>
-        <p:style>
-          <a:lnRef idx="2">
-            <a:schemeClr val="accent1"/>
-          </a:lnRef>
-          <a:fillRef idx="0">
-            <a:schemeClr val="accent1"/>
-          </a:fillRef>
-          <a:effectRef idx="1">
-            <a:schemeClr val="accent1"/>
-          </a:effectRef>
-          <a:fontRef idx="minor">
-            <a:schemeClr val="tx1"/>
-          </a:fontRef>
-        </p:style>
-      </p:cxnSp>
-      <p:cxnSp>
-        <p:nvCxnSpPr>
-          <p:cNvPr id="10" name="Connector 9"/>
-          <p:cNvCxnSpPr/>
-          <p:nvPr/>
-        </p:nvCxnSpPr>
-        <p:spPr>
-          <a:xfrm flipV="1">
-            <a:off x="4846320.0" y="2012137.2"/>
-            <a:ext cx="45720.0" cy="35204.40000000014"/>
-          </a:xfrm>
-          <a:prstGeom prst="line">
-            <a:avLst/>
-          </a:prstGeom>
-          <a:ln w="25400">
-            <a:solidFill>
-              <a:srgbClr val="00C8FF"/>
-            </a:solidFill>
-          </a:ln>
-        </p:spPr>
-        <p:style>
-          <a:lnRef idx="2">
-            <a:schemeClr val="accent1"/>
-          </a:lnRef>
-          <a:fillRef idx="0">
-            <a:schemeClr val="accent1"/>
-          </a:fillRef>
-          <a:effectRef idx="1">
-            <a:schemeClr val="accent1"/>
-          </a:effectRef>
-          <a:fontRef idx="minor">
-            <a:schemeClr val="tx1"/>
-          </a:fontRef>
-        </p:style>
-      </p:cxnSp>
-      <p:cxnSp>
-        <p:nvCxnSpPr>
-          <p:cNvPr id="11" name="Connector 10"/>
-          <p:cNvCxnSpPr/>
-          <p:nvPr/>
-        </p:nvCxnSpPr>
-        <p:spPr>
-          <a:xfrm flipV="1">
-            <a:off x="4892040.0" y="1978304.4"/>
-            <a:ext cx="45720.0" cy="33832.80000000005"/>
-          </a:xfrm>
-          <a:prstGeom prst="line">
-            <a:avLst/>
-          </a:prstGeom>
-          <a:ln w="25400">
-            <a:solidFill>
-              <a:srgbClr val="00C8FF"/>
-            </a:solidFill>
-          </a:ln>
-        </p:spPr>
-        <p:style>
-          <a:lnRef idx="2">
-            <a:schemeClr val="accent1"/>
-          </a:lnRef>
-          <a:fillRef idx="0">
-            <a:schemeClr val="accent1"/>
-          </a:fillRef>
-          <a:effectRef idx="1">
-            <a:schemeClr val="accent1"/>
-          </a:effectRef>
-          <a:fontRef idx="minor">
-            <a:schemeClr val="tx1"/>
-          </a:fontRef>
-        </p:style>
-      </p:cxnSp>
-      <p:cxnSp>
-        <p:nvCxnSpPr>
-          <p:cNvPr id="12" name="Connector 11"/>
-          <p:cNvCxnSpPr/>
-          <p:nvPr/>
-        </p:nvCxnSpPr>
-        <p:spPr>
-          <a:xfrm flipV="1">
-            <a:off x="4937760.0" y="1945843.2"/>
-            <a:ext cx="45720.0" cy="32461.199999999953"/>
-          </a:xfrm>
-          <a:prstGeom prst="line">
-            <a:avLst/>
-          </a:prstGeom>
-          <a:ln w="25400">
-            <a:solidFill>
-              <a:srgbClr val="00C8FF"/>
-            </a:solidFill>
-          </a:ln>
-        </p:spPr>
-        <p:style>
-          <a:lnRef idx="2">
-            <a:schemeClr val="accent1"/>
-          </a:lnRef>
-          <a:fillRef idx="0">
-            <a:schemeClr val="accent1"/>
-          </a:fillRef>
-          <a:effectRef idx="1">
-            <a:schemeClr val="accent1"/>
-          </a:effectRef>
-          <a:fontRef idx="minor">
-            <a:schemeClr val="tx1"/>
-          </a:fontRef>
-        </p:style>
-      </p:cxnSp>
-      <p:cxnSp>
-        <p:nvCxnSpPr>
-          <p:cNvPr id="13" name="Connector 12"/>
-          <p:cNvCxnSpPr/>
-          <p:nvPr/>
-        </p:nvCxnSpPr>
-        <p:spPr>
-          <a:xfrm flipV="1">
-            <a:off x="4983480.0" y="1914753.6"/>
-            <a:ext cx="45720.0" cy="31089.59999999986"/>
-          </a:xfrm>
-          <a:prstGeom prst="line">
-            <a:avLst/>
-          </a:prstGeom>
-          <a:ln w="25400">
-            <a:solidFill>
-              <a:srgbClr val="00C8FF"/>
-            </a:solidFill>
-          </a:ln>
-        </p:spPr>
-        <p:style>
-          <a:lnRef idx="2">
-            <a:schemeClr val="accent1"/>
-          </a:lnRef>
-          <a:fillRef idx="0">
-            <a:schemeClr val="accent1"/>
-          </a:fillRef>
-          <a:effectRef idx="1">
-            <a:schemeClr val="accent1"/>
-          </a:effectRef>
-          <a:fontRef idx="minor">
-            <a:schemeClr val="tx1"/>
-          </a:fontRef>
-        </p:style>
-      </p:cxnSp>
-      <p:cxnSp>
-        <p:nvCxnSpPr>
-          <p:cNvPr id="14" name="Connector 13"/>
-          <p:cNvCxnSpPr/>
-          <p:nvPr/>
-        </p:nvCxnSpPr>
-        <p:spPr>
-          <a:xfrm flipV="1">
-            <a:off x="5029200.0" y="1884578.4"/>
-            <a:ext cx="45720.0" cy="30175.200000000186"/>
-          </a:xfrm>
-          <a:prstGeom prst="line">
-            <a:avLst/>
-          </a:prstGeom>
-          <a:ln w="25400">
-            <a:solidFill>
-              <a:srgbClr val="00C8FF"/>
-            </a:solidFill>
-          </a:ln>
-        </p:spPr>
-        <p:style>
-          <a:lnRef idx="2">
-            <a:schemeClr val="accent1"/>
-          </a:lnRef>
-          <a:fillRef idx="0">
-            <a:schemeClr val="accent1"/>
-          </a:fillRef>
-          <a:effectRef idx="1">
-            <a:schemeClr val="accent1"/>
-          </a:effectRef>
-          <a:fontRef idx="minor">
-            <a:schemeClr val="tx1"/>
-          </a:fontRef>
-        </p:style>
-      </p:cxnSp>
-      <p:cxnSp>
-        <p:nvCxnSpPr>
-          <p:cNvPr id="15" name="Connector 14"/>
-          <p:cNvCxnSpPr/>
-          <p:nvPr/>
-        </p:nvCxnSpPr>
-        <p:spPr>
-          <a:xfrm flipV="1">
-            <a:off x="5074920.0" y="1854860.4"/>
-            <a:ext cx="45720.0" cy="29718.0"/>
-          </a:xfrm>
-          <a:prstGeom prst="line">
-            <a:avLst/>
-          </a:prstGeom>
-          <a:ln w="25400">
-            <a:solidFill>
-              <a:srgbClr val="00C8FF"/>
-            </a:solidFill>
-          </a:ln>
-        </p:spPr>
-        <p:style>
-          <a:lnRef idx="2">
-            <a:schemeClr val="accent1"/>
-          </a:lnRef>
-          <a:fillRef idx="0">
-            <a:schemeClr val="accent1"/>
-          </a:fillRef>
-          <a:effectRef idx="1">
-            <a:schemeClr val="accent1"/>
-          </a:effectRef>
-          <a:fontRef idx="minor">
-            <a:schemeClr val="tx1"/>
-          </a:fontRef>
-        </p:style>
-      </p:cxnSp>
-      <p:cxnSp>
-        <p:nvCxnSpPr>
-          <p:cNvPr id="16" name="Connector 15"/>
-          <p:cNvCxnSpPr/>
-          <p:nvPr/>
-        </p:nvCxnSpPr>
-        <p:spPr>
-          <a:xfrm flipV="1">
-            <a:off x="5120640.0" y="1826056.8"/>
-            <a:ext cx="45720.0" cy="28803.59999999986"/>
-          </a:xfrm>
-          <a:prstGeom prst="line">
-            <a:avLst/>
-          </a:prstGeom>
-          <a:ln w="25400">
-            <a:solidFill>
-              <a:srgbClr val="00C8FF"/>
-            </a:solidFill>
-          </a:ln>
-        </p:spPr>
-        <p:style>
-          <a:lnRef idx="2">
-            <a:schemeClr val="accent1"/>
-          </a:lnRef>
-          <a:fillRef idx="0">
-            <a:schemeClr val="accent1"/>
-          </a:fillRef>
-          <a:effectRef idx="1">
-            <a:schemeClr val="accent1"/>
-          </a:effectRef>
-          <a:fontRef idx="minor">
-            <a:schemeClr val="tx1"/>
-          </a:fontRef>
-        </p:style>
-      </p:cxnSp>
-      <p:cxnSp>
-        <p:nvCxnSpPr>
-          <p:cNvPr id="17" name="Connector 16"/>
-          <p:cNvCxnSpPr/>
-          <p:nvPr/>
-        </p:nvCxnSpPr>
-        <p:spPr>
-          <a:xfrm flipV="1">
-            <a:off x="5166360.0" y="1797710.4"/>
-            <a:ext cx="45720.0" cy="28346.40000000014"/>
-          </a:xfrm>
-          <a:prstGeom prst="line">
-            <a:avLst/>
-          </a:prstGeom>
-          <a:ln w="25400">
-            <a:solidFill>
-              <a:srgbClr val="00C8FF"/>
-            </a:solidFill>
-          </a:ln>
-        </p:spPr>
-        <p:style>
-          <a:lnRef idx="2">
-            <a:schemeClr val="accent1"/>
-          </a:lnRef>
-          <a:fillRef idx="0">
-            <a:schemeClr val="accent1"/>
-          </a:fillRef>
-          <a:effectRef idx="1">
-            <a:schemeClr val="accent1"/>
-          </a:effectRef>
-          <a:fontRef idx="minor">
-            <a:schemeClr val="tx1"/>
-          </a:fontRef>
-        </p:style>
-      </p:cxnSp>
-      <p:cxnSp>
-        <p:nvCxnSpPr>
-          <p:cNvPr id="18" name="Connector 17"/>
-          <p:cNvCxnSpPr/>
-          <p:nvPr/>
-        </p:nvCxnSpPr>
-        <p:spPr>
-          <a:xfrm flipV="1">
-            <a:off x="5212080.0" y="1770278.4"/>
-            <a:ext cx="45720.0" cy="27432.0"/>
-          </a:xfrm>
-          <a:prstGeom prst="line">
-            <a:avLst/>
-          </a:prstGeom>
-          <a:ln w="25400">
-            <a:solidFill>
-              <a:srgbClr val="00C8FF"/>
-            </a:solidFill>
-          </a:ln>
-        </p:spPr>
-        <p:style>
-          <a:lnRef idx="2">
-            <a:schemeClr val="accent1"/>
-          </a:lnRef>
-          <a:fillRef idx="0">
-            <a:schemeClr val="accent1"/>
-          </a:fillRef>
-          <a:effectRef idx="1">
-            <a:schemeClr val="accent1"/>
-          </a:effectRef>
-          <a:fontRef idx="minor">
-            <a:schemeClr val="tx1"/>
-          </a:fontRef>
-        </p:style>
-      </p:cxnSp>
-      <p:cxnSp>
-        <p:nvCxnSpPr>
-          <p:cNvPr id="19" name="Connector 18"/>
-          <p:cNvCxnSpPr/>
-          <p:nvPr/>
-        </p:nvCxnSpPr>
-        <p:spPr>
-          <a:xfrm flipV="1">
-            <a:off x="5257800.0" y="1743303.6"/>
-            <a:ext cx="45720.0" cy="26974.799999999814"/>
-          </a:xfrm>
-          <a:prstGeom prst="line">
-            <a:avLst/>
-          </a:prstGeom>
-          <a:ln w="25400">
-            <a:solidFill>
-              <a:srgbClr val="00C8FF"/>
-            </a:solidFill>
-          </a:ln>
-        </p:spPr>
-        <p:style>
-          <a:lnRef idx="2">
-            <a:schemeClr val="accent1"/>
-          </a:lnRef>
-          <a:fillRef idx="0">
-            <a:schemeClr val="accent1"/>
-          </a:fillRef>
-          <a:effectRef idx="1">
-            <a:schemeClr val="accent1"/>
-          </a:effectRef>
-          <a:fontRef idx="minor">
-            <a:schemeClr val="tx1"/>
-          </a:fontRef>
-        </p:style>
-      </p:cxnSp>
-      <p:cxnSp>
-        <p:nvCxnSpPr>
-          <p:cNvPr id="20" name="Connector 19"/>
-          <p:cNvCxnSpPr/>
-          <p:nvPr/>
-        </p:nvCxnSpPr>
-        <p:spPr>
-          <a:xfrm flipV="1">
-            <a:off x="5303520.0" y="1716786.0"/>
-            <a:ext cx="45720.0" cy="26517.600000000093"/>
-          </a:xfrm>
-          <a:prstGeom prst="line">
-            <a:avLst/>
-          </a:prstGeom>
-          <a:ln w="25400">
-            <a:solidFill>
-              <a:srgbClr val="00C8FF"/>
-            </a:solidFill>
-          </a:ln>
-        </p:spPr>
-        <p:style>
-          <a:lnRef idx="2">
-            <a:schemeClr val="accent1"/>
-          </a:lnRef>
-          <a:fillRef idx="0">
-            <a:schemeClr val="accent1"/>
-          </a:fillRef>
-          <a:effectRef idx="1">
-            <a:schemeClr val="accent1"/>
-          </a:effectRef>
-          <a:fontRef idx="minor">
-            <a:schemeClr val="tx1"/>
-          </a:fontRef>
-        </p:style>
-      </p:cxnSp>
-      <p:cxnSp>
-        <p:nvCxnSpPr>
-          <p:cNvPr id="21" name="Connector 20"/>
-          <p:cNvCxnSpPr/>
-          <p:nvPr/>
-        </p:nvCxnSpPr>
-        <p:spPr>
-          <a:xfrm flipV="1">
-            <a:off x="5349240.0" y="1690725.6"/>
-            <a:ext cx="45720.0" cy="26060.399999999907"/>
-          </a:xfrm>
-          <a:prstGeom prst="line">
-            <a:avLst/>
-          </a:prstGeom>
-          <a:ln w="25400">
-            <a:solidFill>
-              <a:srgbClr val="00C8FF"/>
-            </a:solidFill>
-          </a:ln>
-        </p:spPr>
-        <p:style>
-          <a:lnRef idx="2">
-            <a:schemeClr val="accent1"/>
-          </a:lnRef>
-          <a:fillRef idx="0">
-            <a:schemeClr val="accent1"/>
-          </a:fillRef>
-          <a:effectRef idx="1">
-            <a:schemeClr val="accent1"/>
-          </a:effectRef>
-          <a:fontRef idx="minor">
-            <a:schemeClr val="tx1"/>
-          </a:fontRef>
-        </p:style>
-      </p:cxnSp>
-      <p:cxnSp>
-        <p:nvCxnSpPr>
-          <p:cNvPr id="22" name="Connector 21"/>
-          <p:cNvCxnSpPr/>
-          <p:nvPr/>
-        </p:nvCxnSpPr>
-        <p:spPr>
-          <a:xfrm flipV="1">
-            <a:off x="5394960.0" y="1665122.4"/>
-            <a:ext cx="45720.0" cy="25603.200000000186"/>
-          </a:xfrm>
-          <a:prstGeom prst="line">
-            <a:avLst/>
-          </a:prstGeom>
-          <a:ln w="25400">
-            <a:solidFill>
-              <a:srgbClr val="00C8FF"/>
-            </a:solidFill>
-          </a:ln>
-        </p:spPr>
-        <p:style>
-          <a:lnRef idx="2">
-            <a:schemeClr val="accent1"/>
-          </a:lnRef>
-          <a:fillRef idx="0">
-            <a:schemeClr val="accent1"/>
-          </a:fillRef>
-          <a:effectRef idx="1">
-            <a:schemeClr val="accent1"/>
-          </a:effectRef>
-          <a:fontRef idx="minor">
-            <a:schemeClr val="tx1"/>
-          </a:fontRef>
-        </p:style>
-      </p:cxnSp>
-      <p:cxnSp>
-        <p:nvCxnSpPr>
-          <p:cNvPr id="23" name="Connector 22"/>
-          <p:cNvCxnSpPr/>
-          <p:nvPr/>
-        </p:nvCxnSpPr>
-        <p:spPr>
-          <a:xfrm flipV="1">
-            <a:off x="5440680.0" y="1639976.4000000001"/>
-            <a:ext cx="45720.0" cy="25145.999999999767"/>
-          </a:xfrm>
-          <a:prstGeom prst="line">
-            <a:avLst/>
-          </a:prstGeom>
-          <a:ln w="25400">
-            <a:solidFill>
-              <a:srgbClr val="00C8FF"/>
-            </a:solidFill>
-          </a:ln>
-        </p:spPr>
-        <p:style>
-          <a:lnRef idx="2">
-            <a:schemeClr val="accent1"/>
-          </a:lnRef>
-          <a:fillRef idx="0">
-            <a:schemeClr val="accent1"/>
-          </a:fillRef>
-          <a:effectRef idx="1">
-            <a:schemeClr val="accent1"/>
-          </a:effectRef>
-          <a:fontRef idx="minor">
-            <a:schemeClr val="tx1"/>
-          </a:fontRef>
-        </p:style>
-      </p:cxnSp>
-      <p:cxnSp>
-        <p:nvCxnSpPr>
-          <p:cNvPr id="24" name="Connector 23"/>
-          <p:cNvCxnSpPr/>
-          <p:nvPr/>
-        </p:nvCxnSpPr>
-        <p:spPr>
-          <a:xfrm flipV="1">
-            <a:off x="5486400.0" y="1615287.6"/>
-            <a:ext cx="45720.0" cy="24688.800000000047"/>
-          </a:xfrm>
-          <a:prstGeom prst="line">
-            <a:avLst/>
-          </a:prstGeom>
-          <a:ln w="25400">
-            <a:solidFill>
-              <a:srgbClr val="00C8FF"/>
-            </a:solidFill>
-          </a:ln>
-        </p:spPr>
-        <p:style>
-          <a:lnRef idx="2">
-            <a:schemeClr val="accent1"/>
-          </a:lnRef>
-          <a:fillRef idx="0">
-            <a:schemeClr val="accent1"/>
-          </a:fillRef>
-          <a:effectRef idx="1">
-            <a:schemeClr val="accent1"/>
-          </a:effectRef>
-          <a:fontRef idx="minor">
-            <a:schemeClr val="tx1"/>
-          </a:fontRef>
-        </p:style>
-      </p:cxnSp>
-      <p:cxnSp>
-        <p:nvCxnSpPr>
-          <p:cNvPr id="25" name="Connector 24"/>
-          <p:cNvCxnSpPr/>
-          <p:nvPr/>
-        </p:nvCxnSpPr>
-        <p:spPr>
-          <a:xfrm flipV="1">
-            <a:off x="5532120.0" y="1590598.8"/>
-            <a:ext cx="45720.0" cy="24688.800000000047"/>
-          </a:xfrm>
-          <a:prstGeom prst="line">
-            <a:avLst/>
-          </a:prstGeom>
-          <a:ln w="25400">
-            <a:solidFill>
-              <a:srgbClr val="00C8FF"/>
-            </a:solidFill>
-          </a:ln>
-        </p:spPr>
-        <p:style>
-          <a:lnRef idx="2">
-            <a:schemeClr val="accent1"/>
-          </a:lnRef>
-          <a:fillRef idx="0">
-            <a:schemeClr val="accent1"/>
-          </a:fillRef>
-          <a:effectRef idx="1">
-            <a:schemeClr val="accent1"/>
-          </a:effectRef>
-          <a:fontRef idx="minor">
-            <a:schemeClr val="tx1"/>
-          </a:fontRef>
-        </p:style>
-      </p:cxnSp>
-      <p:cxnSp>
-        <p:nvCxnSpPr>
-          <p:cNvPr id="26" name="Connector 25"/>
-          <p:cNvCxnSpPr/>
-          <p:nvPr/>
-        </p:nvCxnSpPr>
-        <p:spPr>
-          <a:xfrm flipV="1">
-            <a:off x="5577840.0" y="1566367.2000000002"/>
-            <a:ext cx="45720.0" cy="24231.59999999986"/>
-          </a:xfrm>
-          <a:prstGeom prst="line">
-            <a:avLst/>
-          </a:prstGeom>
-          <a:ln w="25400">
-            <a:solidFill>
-              <a:srgbClr val="00C8FF"/>
-            </a:solidFill>
-          </a:ln>
-        </p:spPr>
-        <p:style>
-          <a:lnRef idx="2">
-            <a:schemeClr val="accent1"/>
-          </a:lnRef>
-          <a:fillRef idx="0">
-            <a:schemeClr val="accent1"/>
-          </a:fillRef>
-          <a:effectRef idx="1">
-            <a:schemeClr val="accent1"/>
-          </a:effectRef>
-          <a:fontRef idx="minor">
-            <a:schemeClr val="tx1"/>
-          </a:fontRef>
-        </p:style>
-      </p:cxnSp>
-      <p:cxnSp>
-        <p:nvCxnSpPr>
-          <p:cNvPr id="27" name="Connector 26"/>
-          <p:cNvCxnSpPr/>
-          <p:nvPr/>
-        </p:nvCxnSpPr>
-        <p:spPr>
-          <a:xfrm flipV="1">
-            <a:off x="5623560.0" y="1542592.8"/>
-            <a:ext cx="45720.0" cy="23774.40000000014"/>
-          </a:xfrm>
-          <a:prstGeom prst="line">
-            <a:avLst/>
-          </a:prstGeom>
-          <a:ln w="25400">
-            <a:solidFill>
-              <a:srgbClr val="00C8FF"/>
-            </a:solidFill>
-          </a:ln>
-        </p:spPr>
-        <p:style>
-          <a:lnRef idx="2">
-            <a:schemeClr val="accent1"/>
-          </a:lnRef>
-          <a:fillRef idx="0">
-            <a:schemeClr val="accent1"/>
-          </a:fillRef>
-          <a:effectRef idx="1">
-            <a:schemeClr val="accent1"/>
-          </a:effectRef>
-          <a:fontRef idx="minor">
-            <a:schemeClr val="tx1"/>
-          </a:fontRef>
-        </p:style>
-      </p:cxnSp>
-      <p:cxnSp>
-        <p:nvCxnSpPr>
-          <p:cNvPr id="28" name="Connector 27"/>
-          <p:cNvCxnSpPr/>
-          <p:nvPr/>
-        </p:nvCxnSpPr>
-        <p:spPr>
-          <a:xfrm flipV="1">
-            <a:off x="5669280.0" y="1518818.4000000001"/>
-            <a:ext cx="45720.0" cy="23774.399999999907"/>
-          </a:xfrm>
-          <a:prstGeom prst="line">
-            <a:avLst/>
-          </a:prstGeom>
-          <a:ln w="25400">
-            <a:solidFill>
-              <a:srgbClr val="00C8FF"/>
-            </a:solidFill>
-          </a:ln>
-        </p:spPr>
-        <p:style>
-          <a:lnRef idx="2">
-            <a:schemeClr val="accent1"/>
-          </a:lnRef>
-          <a:fillRef idx="0">
-            <a:schemeClr val="accent1"/>
-          </a:fillRef>
-          <a:effectRef idx="1">
-            <a:schemeClr val="accent1"/>
-          </a:effectRef>
-          <a:fontRef idx="minor">
-            <a:schemeClr val="tx1"/>
-          </a:fontRef>
-        </p:style>
-      </p:cxnSp>
-      <p:cxnSp>
-        <p:nvCxnSpPr>
-          <p:cNvPr id="29" name="Connector 28"/>
-          <p:cNvCxnSpPr/>
-          <p:nvPr/>
-        </p:nvCxnSpPr>
-        <p:spPr>
-          <a:xfrm flipV="1">
-            <a:off x="5715000.0" y="1495501.2"/>
-            <a:ext cx="45720.0" cy="23317.200000000186"/>
-          </a:xfrm>
-          <a:prstGeom prst="line">
-            <a:avLst/>
-          </a:prstGeom>
-          <a:ln w="25400">
-            <a:solidFill>
-              <a:srgbClr val="00C8FF"/>
-            </a:solidFill>
-          </a:ln>
-        </p:spPr>
-        <p:style>
-          <a:lnRef idx="2">
-            <a:schemeClr val="accent1"/>
-          </a:lnRef>
-          <a:fillRef idx="0">
-            <a:schemeClr val="accent1"/>
-          </a:fillRef>
-          <a:effectRef idx="1">
-            <a:schemeClr val="accent1"/>
-          </a:effectRef>
-          <a:fontRef idx="minor">
-            <a:schemeClr val="tx1"/>
-          </a:fontRef>
-        </p:style>
-      </p:cxnSp>
-      <p:cxnSp>
-        <p:nvCxnSpPr>
-          <p:cNvPr id="30" name="Connector 29"/>
-          <p:cNvCxnSpPr/>
-          <p:nvPr/>
-        </p:nvCxnSpPr>
-        <p:spPr>
-          <a:xfrm flipV="1">
-            <a:off x="5760720.0" y="1472184.0"/>
-            <a:ext cx="45720.0" cy="23317.199999999953"/>
-          </a:xfrm>
-          <a:prstGeom prst="line">
-            <a:avLst/>
-          </a:prstGeom>
-          <a:ln w="25400">
-            <a:solidFill>
-              <a:srgbClr val="00C8FF"/>
-            </a:solidFill>
-          </a:ln>
-        </p:spPr>
-        <p:style>
-          <a:lnRef idx="2">
-            <a:schemeClr val="accent1"/>
-          </a:lnRef>
-          <a:fillRef idx="0">
-            <a:schemeClr val="accent1"/>
-          </a:fillRef>
-          <a:effectRef idx="1">
-            <a:schemeClr val="accent1"/>
-          </a:effectRef>
-          <a:fontRef idx="minor">
-            <a:schemeClr val="tx1"/>
-          </a:fontRef>
-        </p:style>
-      </p:cxnSp>
-      <p:cxnSp>
-        <p:nvCxnSpPr>
-          <p:cNvPr id="31" name="Connector 30"/>
-          <p:cNvCxnSpPr/>
-          <p:nvPr/>
-        </p:nvCxnSpPr>
-        <p:spPr>
-          <a:xfrm flipV="1">
-            <a:off x="5806440.0" y="1449324.0"/>
-            <a:ext cx="45720.0" cy="22860.0"/>
-          </a:xfrm>
-          <a:prstGeom prst="line">
-            <a:avLst/>
-          </a:prstGeom>
-          <a:ln w="25400">
-            <a:solidFill>
-              <a:srgbClr val="00C8FF"/>
-            </a:solidFill>
-          </a:ln>
-        </p:spPr>
-        <p:style>
-          <a:lnRef idx="2">
-            <a:schemeClr val="accent1"/>
-          </a:lnRef>
-          <a:fillRef idx="0">
-            <a:schemeClr val="accent1"/>
-          </a:fillRef>
-          <a:effectRef idx="1">
-            <a:schemeClr val="accent1"/>
-          </a:effectRef>
-          <a:fontRef idx="minor">
-            <a:schemeClr val="tx1"/>
-          </a:fontRef>
-        </p:style>
-      </p:cxnSp>
-      <p:cxnSp>
-        <p:nvCxnSpPr>
-          <p:cNvPr id="32" name="Connector 31"/>
-          <p:cNvCxnSpPr/>
-          <p:nvPr/>
-        </p:nvCxnSpPr>
-        <p:spPr>
-          <a:xfrm flipV="1">
-            <a:off x="5852160.0" y="1426921.2"/>
-            <a:ext cx="45720.0" cy="22402.800000000047"/>
-          </a:xfrm>
-          <a:prstGeom prst="line">
-            <a:avLst/>
-          </a:prstGeom>
-          <a:ln w="25400">
-            <a:solidFill>
-              <a:srgbClr val="00C8FF"/>
-            </a:solidFill>
-          </a:ln>
-        </p:spPr>
-        <p:style>
-          <a:lnRef idx="2">
-            <a:schemeClr val="accent1"/>
-          </a:lnRef>
-          <a:fillRef idx="0">
-            <a:schemeClr val="accent1"/>
-          </a:fillRef>
-          <a:effectRef idx="1">
-            <a:schemeClr val="accent1"/>
-          </a:effectRef>
-          <a:fontRef idx="minor">
-            <a:schemeClr val="tx1"/>
-          </a:fontRef>
-        </p:style>
-      </p:cxnSp>
-      <p:cxnSp>
-        <p:nvCxnSpPr>
-          <p:cNvPr id="33" name="Connector 32"/>
-          <p:cNvCxnSpPr/>
-          <p:nvPr/>
-        </p:nvCxnSpPr>
-        <p:spPr>
-          <a:xfrm flipV="1">
-            <a:off x="5989320.0" y="1360170.0"/>
-            <a:ext cx="45720.0" cy="22402.800000000047"/>
-          </a:xfrm>
-          <a:prstGeom prst="line">
-            <a:avLst/>
-          </a:prstGeom>
-          <a:ln w="25400">
-            <a:solidFill>
-              <a:srgbClr val="00C8FF"/>
-            </a:solidFill>
-          </a:ln>
-        </p:spPr>
-        <p:style>
-          <a:lnRef idx="2">
-            <a:schemeClr val="accent1"/>
-          </a:lnRef>
-          <a:fillRef idx="0">
-            <a:schemeClr val="accent1"/>
-          </a:fillRef>
-          <a:effectRef idx="1">
-            <a:schemeClr val="accent1"/>
-          </a:effectRef>
-          <a:fontRef idx="minor">
-            <a:schemeClr val="tx1"/>
-          </a:fontRef>
-        </p:style>
-      </p:cxnSp>
-      <p:cxnSp>
-        <p:nvCxnSpPr>
-          <p:cNvPr id="34" name="Connector 33"/>
-          <p:cNvCxnSpPr/>
-          <p:nvPr/>
-        </p:nvCxnSpPr>
-        <p:spPr>
-          <a:xfrm flipV="1">
-            <a:off x="6035040.0" y="1338224.4"/>
-            <a:ext cx="45720.0" cy="21945.600000000093"/>
-          </a:xfrm>
-          <a:prstGeom prst="line">
-            <a:avLst/>
-          </a:prstGeom>
-          <a:ln w="25400">
-            <a:solidFill>
-              <a:srgbClr val="00C8FF"/>
-            </a:solidFill>
-          </a:ln>
-        </p:spPr>
-        <p:style>
-          <a:lnRef idx="2">
-            <a:schemeClr val="accent1"/>
-          </a:lnRef>
-          <a:fillRef idx="0">
-            <a:schemeClr val="accent1"/>
-          </a:fillRef>
-          <a:effectRef idx="1">
-            <a:schemeClr val="accent1"/>
-          </a:effectRef>
-          <a:fontRef idx="minor">
-            <a:schemeClr val="tx1"/>
-          </a:fontRef>
-        </p:style>
-      </p:cxnSp>
-      <p:cxnSp>
-        <p:nvCxnSpPr>
-          <p:cNvPr id="35" name="Connector 34"/>
-          <p:cNvCxnSpPr/>
-          <p:nvPr/>
-        </p:nvCxnSpPr>
-        <p:spPr>
-          <a:xfrm flipV="1">
-            <a:off x="6080760.0" y="1316278.8"/>
-            <a:ext cx="45720.0" cy="21945.59999999986"/>
-          </a:xfrm>
-          <a:prstGeom prst="line">
-            <a:avLst/>
-          </a:prstGeom>
-          <a:ln w="25400">
-            <a:solidFill>
-              <a:srgbClr val="00C8FF"/>
-            </a:solidFill>
-          </a:ln>
-        </p:spPr>
-        <p:style>
-          <a:lnRef idx="2">
-            <a:schemeClr val="accent1"/>
-          </a:lnRef>
-          <a:fillRef idx="0">
-            <a:schemeClr val="accent1"/>
-          </a:fillRef>
-          <a:effectRef idx="1">
-            <a:schemeClr val="accent1"/>
-          </a:effectRef>
-          <a:fontRef idx="minor">
-            <a:schemeClr val="tx1"/>
-          </a:fontRef>
-        </p:style>
-      </p:cxnSp>
-      <p:cxnSp>
-        <p:nvCxnSpPr>
-          <p:cNvPr id="36" name="Connector 35"/>
-          <p:cNvCxnSpPr/>
-          <p:nvPr/>
-        </p:nvCxnSpPr>
-        <p:spPr>
-          <a:xfrm flipV="1">
-            <a:off x="6126480.0" y="1294790.4"/>
-            <a:ext cx="45720.0" cy="21488.40000000014"/>
-          </a:xfrm>
-          <a:prstGeom prst="line">
-            <a:avLst/>
-          </a:prstGeom>
-          <a:ln w="25400">
-            <a:solidFill>
-              <a:srgbClr val="00C8FF"/>
-            </a:solidFill>
-          </a:ln>
-        </p:spPr>
-        <p:style>
-          <a:lnRef idx="2">
-            <a:schemeClr val="accent1"/>
-          </a:lnRef>
-          <a:fillRef idx="0">
-            <a:schemeClr val="accent1"/>
-          </a:fillRef>
-          <a:effectRef idx="1">
-            <a:schemeClr val="accent1"/>
-          </a:effectRef>
-          <a:fontRef idx="minor">
-            <a:schemeClr val="tx1"/>
-          </a:fontRef>
-        </p:style>
-      </p:cxnSp>
-      <p:cxnSp>
-        <p:nvCxnSpPr>
-          <p:cNvPr id="37" name="Connector 36"/>
-          <p:cNvCxnSpPr/>
-          <p:nvPr/>
-        </p:nvCxnSpPr>
-        <p:spPr>
-          <a:xfrm flipV="1">
-            <a:off x="6172200.0" y="1273302.0"/>
-            <a:ext cx="45720.0" cy="21488.399999999907"/>
-          </a:xfrm>
-          <a:prstGeom prst="line">
-            <a:avLst/>
-          </a:prstGeom>
-          <a:ln w="25400">
-            <a:solidFill>
-              <a:srgbClr val="00C8FF"/>
-            </a:solidFill>
-          </a:ln>
-        </p:spPr>
-        <p:style>
-          <a:lnRef idx="2">
-            <a:schemeClr val="accent1"/>
-          </a:lnRef>
-          <a:fillRef idx="0">
-            <a:schemeClr val="accent1"/>
-          </a:fillRef>
-          <a:effectRef idx="1">
-            <a:schemeClr val="accent1"/>
-          </a:effectRef>
-          <a:fontRef idx="minor">
-            <a:schemeClr val="tx1"/>
-          </a:fontRef>
-        </p:style>
-      </p:cxnSp>
-      <p:cxnSp>
-        <p:nvCxnSpPr>
-          <p:cNvPr id="38" name="Connector 37"/>
-          <p:cNvCxnSpPr/>
-          <p:nvPr/>
-        </p:nvCxnSpPr>
-        <p:spPr>
-          <a:xfrm flipV="1">
-            <a:off x="6217920.0" y="1252270.8"/>
-            <a:ext cx="45720.0" cy="21031.199999999953"/>
-          </a:xfrm>
-          <a:prstGeom prst="line">
-            <a:avLst/>
-          </a:prstGeom>
-          <a:ln w="25400">
-            <a:solidFill>
-              <a:srgbClr val="00C8FF"/>
-            </a:solidFill>
-          </a:ln>
-        </p:spPr>
-        <p:style>
-          <a:lnRef idx="2">
-            <a:schemeClr val="accent1"/>
-          </a:lnRef>
-          <a:fillRef idx="0">
-            <a:schemeClr val="accent1"/>
-          </a:fillRef>
-          <a:effectRef idx="1">
-            <a:schemeClr val="accent1"/>
-          </a:effectRef>
-          <a:fontRef idx="minor">
-            <a:schemeClr val="tx1"/>
-          </a:fontRef>
-        </p:style>
-      </p:cxnSp>
-      <p:cxnSp>
-        <p:nvCxnSpPr>
-          <p:cNvPr id="39" name="Connector 38"/>
-          <p:cNvCxnSpPr/>
-          <p:nvPr/>
-        </p:nvCxnSpPr>
-        <p:spPr>
-          <a:xfrm flipV="1">
-            <a:off x="6263640.0" y="1231239.6"/>
-            <a:ext cx="45720.0" cy="21031.199999999953"/>
-          </a:xfrm>
-          <a:prstGeom prst="line">
-            <a:avLst/>
-          </a:prstGeom>
-          <a:ln w="25400">
-            <a:solidFill>
-              <a:srgbClr val="00C8FF"/>
-            </a:solidFill>
-          </a:ln>
-        </p:spPr>
-        <p:style>
-          <a:lnRef idx="2">
-            <a:schemeClr val="accent1"/>
-          </a:lnRef>
-          <a:fillRef idx="0">
-            <a:schemeClr val="accent1"/>
-          </a:fillRef>
-          <a:effectRef idx="1">
-            <a:schemeClr val="accent1"/>
-          </a:effectRef>
-          <a:fontRef idx="minor">
-            <a:schemeClr val="tx1"/>
-          </a:fontRef>
-        </p:style>
-      </p:cxnSp>
-      <p:cxnSp>
-        <p:nvCxnSpPr>
-          <p:cNvPr id="40" name="Connector 39"/>
-          <p:cNvCxnSpPr/>
-          <p:nvPr/>
-        </p:nvCxnSpPr>
-        <p:spPr>
-          <a:xfrm flipV="1">
-            <a:off x="6309360.0" y="1210208.4"/>
-            <a:ext cx="45720.0" cy="21031.200000000186"/>
-          </a:xfrm>
-          <a:prstGeom prst="line">
-            <a:avLst/>
-          </a:prstGeom>
-          <a:ln w="25400">
-            <a:solidFill>
-              <a:srgbClr val="00C8FF"/>
-            </a:solidFill>
-          </a:ln>
-        </p:spPr>
-        <p:style>
-          <a:lnRef idx="2">
-            <a:schemeClr val="accent1"/>
-          </a:lnRef>
-          <a:fillRef idx="0">
-            <a:schemeClr val="accent1"/>
-          </a:fillRef>
-          <a:effectRef idx="1">
-            <a:schemeClr val="accent1"/>
-          </a:effectRef>
-          <a:fontRef idx="minor">
-            <a:schemeClr val="tx1"/>
-          </a:fontRef>
-        </p:style>
-      </p:cxnSp>
-      <p:cxnSp>
-        <p:nvCxnSpPr>
-          <p:cNvPr id="41" name="Connector 40"/>
-          <p:cNvCxnSpPr/>
-          <p:nvPr/>
-        </p:nvCxnSpPr>
-        <p:spPr>
-          <a:xfrm flipV="1">
-            <a:off x="6355080.0" y="1189634.4"/>
-            <a:ext cx="45720.0" cy="20574.0"/>
-          </a:xfrm>
-          <a:prstGeom prst="line">
-            <a:avLst/>
-          </a:prstGeom>
-          <a:ln w="25400">
-            <a:solidFill>
-              <a:srgbClr val="00C8FF"/>
-            </a:solidFill>
-          </a:ln>
-        </p:spPr>
-        <p:style>
-          <a:lnRef idx="2">
-            <a:schemeClr val="accent1"/>
-          </a:lnRef>
-          <a:fillRef idx="0">
-            <a:schemeClr val="accent1"/>
-          </a:fillRef>
-          <a:effectRef idx="1">
-            <a:schemeClr val="accent1"/>
-          </a:effectRef>
-          <a:fontRef idx="minor">
-            <a:schemeClr val="tx1"/>
-          </a:fontRef>
-        </p:style>
-      </p:cxnSp>
-      <p:cxnSp>
-        <p:nvCxnSpPr>
-          <p:cNvPr id="42" name="Connector 41"/>
-          <p:cNvCxnSpPr/>
-          <p:nvPr/>
-        </p:nvCxnSpPr>
-        <p:spPr>
-          <a:xfrm flipV="1">
-            <a:off x="6400800.0" y="1169060.4"/>
-            <a:ext cx="45720.0" cy="20574.0"/>
-          </a:xfrm>
-          <a:prstGeom prst="line">
-            <a:avLst/>
-          </a:prstGeom>
-          <a:ln w="25400">
-            <a:solidFill>
-              <a:srgbClr val="00C8FF"/>
-            </a:solidFill>
-          </a:ln>
-        </p:spPr>
-        <p:style>
-          <a:lnRef idx="2">
-            <a:schemeClr val="accent1"/>
-          </a:lnRef>
-          <a:fillRef idx="0">
-            <a:schemeClr val="accent1"/>
-          </a:fillRef>
-          <a:effectRef idx="1">
-            <a:schemeClr val="accent1"/>
-          </a:effectRef>
-          <a:fontRef idx="minor">
-            <a:schemeClr val="tx1"/>
-          </a:fontRef>
-        </p:style>
-      </p:cxnSp>
-      <p:cxnSp>
-        <p:nvCxnSpPr>
-          <p:cNvPr id="43" name="Connector 42"/>
-          <p:cNvCxnSpPr/>
-          <p:nvPr/>
-        </p:nvCxnSpPr>
-        <p:spPr>
-          <a:xfrm flipV="1">
-            <a:off x="6446520.0" y="1148943.5999999999"/>
-            <a:ext cx="45720.0" cy="20116.800000000047"/>
-          </a:xfrm>
-          <a:prstGeom prst="line">
-            <a:avLst/>
-          </a:prstGeom>
-          <a:ln w="25400">
-            <a:solidFill>
-              <a:srgbClr val="00C8FF"/>
-            </a:solidFill>
-          </a:ln>
-        </p:spPr>
-        <p:style>
-          <a:lnRef idx="2">
-            <a:schemeClr val="accent1"/>
-          </a:lnRef>
-          <a:fillRef idx="0">
-            <a:schemeClr val="accent1"/>
-          </a:fillRef>
-          <a:effectRef idx="1">
-            <a:schemeClr val="accent1"/>
-          </a:effectRef>
-          <a:fontRef idx="minor">
-            <a:schemeClr val="tx1"/>
-          </a:fontRef>
-        </p:style>
-      </p:cxnSp>
-      <p:cxnSp>
-        <p:nvCxnSpPr>
-          <p:cNvPr id="44" name="Connector 43"/>
-          <p:cNvCxnSpPr/>
-          <p:nvPr/>
-        </p:nvCxnSpPr>
-        <p:spPr>
-          <a:xfrm flipV="1">
-            <a:off x="6492240.0" y="1128826.8"/>
-            <a:ext cx="45720.0" cy="20116.799999999814"/>
-          </a:xfrm>
-          <a:prstGeom prst="line">
-            <a:avLst/>
-          </a:prstGeom>
-          <a:ln w="25400">
-            <a:solidFill>
-              <a:srgbClr val="00C8FF"/>
-            </a:solidFill>
-          </a:ln>
-        </p:spPr>
-        <p:style>
-          <a:lnRef idx="2">
-            <a:schemeClr val="accent1"/>
-          </a:lnRef>
-          <a:fillRef idx="0">
-            <a:schemeClr val="accent1"/>
-          </a:fillRef>
-          <a:effectRef idx="1">
-            <a:schemeClr val="accent1"/>
-          </a:effectRef>
-          <a:fontRef idx="minor">
-            <a:schemeClr val="tx1"/>
-          </a:fontRef>
-        </p:style>
-      </p:cxnSp>
-      <p:cxnSp>
-        <p:nvCxnSpPr>
-          <p:cNvPr id="45" name="Connector 44"/>
-          <p:cNvCxnSpPr/>
-          <p:nvPr/>
-        </p:nvCxnSpPr>
-        <p:spPr>
-          <a:xfrm flipV="1">
-            <a:off x="6537960.0" y="1108710.0"/>
-            <a:ext cx="45720.0" cy="20116.800000000047"/>
-          </a:xfrm>
-          <a:prstGeom prst="line">
-            <a:avLst/>
-          </a:prstGeom>
-          <a:ln w="25400">
-            <a:solidFill>
-              <a:srgbClr val="00C8FF"/>
-            </a:solidFill>
-          </a:ln>
-        </p:spPr>
-        <p:style>
-          <a:lnRef idx="2">
-            <a:schemeClr val="accent1"/>
-          </a:lnRef>
-          <a:fillRef idx="0">
-            <a:schemeClr val="accent1"/>
-          </a:fillRef>
-          <a:effectRef idx="1">
-            <a:schemeClr val="accent1"/>
-          </a:effectRef>
-          <a:fontRef idx="minor">
-            <a:schemeClr val="tx1"/>
-          </a:fontRef>
-        </p:style>
-      </p:cxnSp>
-      <p:cxnSp>
-        <p:nvCxnSpPr>
-          <p:cNvPr id="46" name="Connector 45"/>
-          <p:cNvCxnSpPr/>
-          <p:nvPr/>
-        </p:nvCxnSpPr>
-        <p:spPr>
-          <a:xfrm flipV="1">
-            <a:off x="6583680.0" y="1089050.4000000001"/>
-            <a:ext cx="45720.0" cy="19659.59999999986"/>
-          </a:xfrm>
-          <a:prstGeom prst="line">
-            <a:avLst/>
-          </a:prstGeom>
-          <a:ln w="25400">
-            <a:solidFill>
-              <a:srgbClr val="00C8FF"/>
-            </a:solidFill>
-          </a:ln>
-        </p:spPr>
-        <p:style>
-          <a:lnRef idx="2">
-            <a:schemeClr val="accent1"/>
-          </a:lnRef>
-          <a:fillRef idx="0">
-            <a:schemeClr val="accent1"/>
-          </a:fillRef>
-          <a:effectRef idx="1">
-            <a:schemeClr val="accent1"/>
-          </a:effectRef>
-          <a:fontRef idx="minor">
-            <a:schemeClr val="tx1"/>
-          </a:fontRef>
-        </p:style>
-      </p:cxnSp>
-      <p:sp>
-        <p:nvSpPr>
-          <p:cNvPr id="47" name="Oval 46"/>
+      <p:sp>
+        <p:nvSpPr>
+          <p:cNvPr id="6" name="Oval 5"/>
           <p:cNvSpPr/>
           <p:nvPr/>
         </p:nvSpPr>
         <p:spPr>
           <a:xfrm>
-            <a:off x="5905500" y="1299210"/>
-            <a:ext cx="76200" cy="76200"/>
+            <a:off x="5892800" y="946353"/>
+            <a:ext cx="101600" cy="101600"/>
           </a:xfrm>
           <a:prstGeom prst="ellipse">
             <a:avLst/>
           </a:prstGeom>
-          <a:noFill/>
-          <a:ln>
+          <a:solidFill>
+            <a:srgbClr val="0A0A0A"/>
+          </a:solidFill>
+          <a:ln w="12700">
             <a:solidFill>
               <a:srgbClr val="FFFFFF"/>
             </a:solidFill>
@@ -4716,14 +4498,14 @@
       </p:sp>
       <p:sp>
         <p:nvSpPr>
-          <p:cNvPr id="48" name="Oval 47"/>
+          <p:cNvPr id="7" name="Oval 6"/>
           <p:cNvSpPr/>
           <p:nvPr/>
         </p:nvSpPr>
         <p:spPr>
           <a:xfrm>
-            <a:off x="5905500" y="1619250"/>
-            <a:ext cx="76200" cy="76200"/>
+            <a:off x="5892800" y="1377950"/>
+            <a:ext cx="101600" cy="101600"/>
           </a:xfrm>
           <a:prstGeom prst="ellipse">
             <a:avLst/>
@@ -4731,7 +4513,7 @@
           <a:solidFill>
             <a:srgbClr val="FFFFFF"/>
           </a:solidFill>
-          <a:ln>
+          <a:ln w="12700">
             <a:solidFill>
               <a:srgbClr val="FFFFFF"/>
             </a:solidFill>
@@ -4761,14 +4543,912 @@
       </p:sp>
       <p:sp>
         <p:nvSpPr>
-          <p:cNvPr id="49" name="TextBox 48"/>
+          <p:cNvPr id="8" name="Freeform 7"/>
+          <p:cNvSpPr/>
+          <p:nvPr/>
+        </p:nvSpPr>
+        <p:spPr>
+          <a:xfrm>
+            <a:off x="5577840" y="1041959"/>
+            <a:ext cx="342900" cy="166878"/>
+          </a:xfrm>
+          <a:custGeom>
+            <a:avLst/>
+            <a:gdLst/>
+            <a:ahLst/>
+            <a:cxnLst/>
+            <a:rect l="l" t="t" r="r" b="b"/>
+            <a:pathLst>
+              <a:path w="342900" h="166878">
+                <a:moveTo>
+                  <a:pt x="0" y="166878"/>
+                </a:moveTo>
+                <a:lnTo>
+                  <a:pt x="3464" y="164957"/>
+                </a:lnTo>
+                <a:close/>
+                <a:lnTo>
+                  <a:pt x="6927" y="163057"/>
+                </a:lnTo>
+                <a:close/>
+                <a:lnTo>
+                  <a:pt x="10391" y="161176"/>
+                </a:lnTo>
+                <a:close/>
+                <a:lnTo>
+                  <a:pt x="13855" y="159312"/>
+                </a:lnTo>
+                <a:close/>
+                <a:lnTo>
+                  <a:pt x="17318" y="157464"/>
+                </a:lnTo>
+                <a:close/>
+                <a:lnTo>
+                  <a:pt x="20782" y="155629"/>
+                </a:lnTo>
+                <a:close/>
+                <a:lnTo>
+                  <a:pt x="24245" y="153805"/>
+                </a:lnTo>
+                <a:close/>
+                <a:lnTo>
+                  <a:pt x="27709" y="151991"/>
+                </a:lnTo>
+                <a:close/>
+                <a:lnTo>
+                  <a:pt x="31173" y="150186"/>
+                </a:lnTo>
+                <a:close/>
+                <a:lnTo>
+                  <a:pt x="34636" y="148386"/>
+                </a:lnTo>
+                <a:close/>
+                <a:lnTo>
+                  <a:pt x="38100" y="146590"/>
+                </a:lnTo>
+                <a:close/>
+                <a:lnTo>
+                  <a:pt x="41564" y="144797"/>
+                </a:lnTo>
+                <a:close/>
+                <a:lnTo>
+                  <a:pt x="45027" y="143005"/>
+                </a:lnTo>
+                <a:close/>
+                <a:lnTo>
+                  <a:pt x="48491" y="141211"/>
+                </a:lnTo>
+                <a:close/>
+                <a:lnTo>
+                  <a:pt x="51955" y="139416"/>
+                </a:lnTo>
+                <a:close/>
+                <a:lnTo>
+                  <a:pt x="55418" y="137618"/>
+                </a:lnTo>
+                <a:close/>
+                <a:lnTo>
+                  <a:pt x="58882" y="135817"/>
+                </a:lnTo>
+                <a:close/>
+                <a:lnTo>
+                  <a:pt x="62345" y="134014"/>
+                </a:lnTo>
+                <a:close/>
+                <a:lnTo>
+                  <a:pt x="65809" y="132207"/>
+                </a:lnTo>
+                <a:close/>
+                <a:lnTo>
+                  <a:pt x="69273" y="130397"/>
+                </a:lnTo>
+                <a:close/>
+                <a:lnTo>
+                  <a:pt x="72736" y="128583"/>
+                </a:lnTo>
+                <a:close/>
+                <a:lnTo>
+                  <a:pt x="76200" y="126769"/>
+                </a:lnTo>
+                <a:close/>
+                <a:lnTo>
+                  <a:pt x="79664" y="124959"/>
+                </a:lnTo>
+                <a:close/>
+                <a:lnTo>
+                  <a:pt x="83127" y="123155"/>
+                </a:lnTo>
+                <a:close/>
+                <a:lnTo>
+                  <a:pt x="86591" y="121361"/>
+                </a:lnTo>
+                <a:close/>
+                <a:lnTo>
+                  <a:pt x="90055" y="119580"/>
+                </a:lnTo>
+                <a:close/>
+                <a:lnTo>
+                  <a:pt x="93518" y="117815"/>
+                </a:lnTo>
+                <a:close/>
+                <a:lnTo>
+                  <a:pt x="96982" y="116065"/>
+                </a:lnTo>
+                <a:close/>
+                <a:lnTo>
+                  <a:pt x="100445" y="114329"/>
+                </a:lnTo>
+                <a:close/>
+                <a:lnTo>
+                  <a:pt x="103909" y="112601"/>
+                </a:lnTo>
+                <a:close/>
+                <a:lnTo>
+                  <a:pt x="107373" y="110879"/>
+                </a:lnTo>
+                <a:close/>
+                <a:lnTo>
+                  <a:pt x="110836" y="109161"/>
+                </a:lnTo>
+                <a:close/>
+                <a:lnTo>
+                  <a:pt x="114300" y="107442"/>
+                </a:lnTo>
+                <a:close/>
+                <a:lnTo>
+                  <a:pt x="117764" y="105720"/>
+                </a:lnTo>
+                <a:close/>
+                <a:lnTo>
+                  <a:pt x="121227" y="103994"/>
+                </a:lnTo>
+                <a:close/>
+                <a:lnTo>
+                  <a:pt x="124691" y="102265"/>
+                </a:lnTo>
+                <a:close/>
+                <a:lnTo>
+                  <a:pt x="128155" y="100533"/>
+                </a:lnTo>
+                <a:close/>
+                <a:lnTo>
+                  <a:pt x="131618" y="98797"/>
+                </a:lnTo>
+                <a:close/>
+                <a:lnTo>
+                  <a:pt x="135082" y="97057"/>
+                </a:lnTo>
+                <a:close/>
+                <a:lnTo>
+                  <a:pt x="138545" y="95314"/>
+                </a:lnTo>
+                <a:close/>
+                <a:lnTo>
+                  <a:pt x="142009" y="93569"/>
+                </a:lnTo>
+                <a:close/>
+                <a:lnTo>
+                  <a:pt x="145473" y="91825"/>
+                </a:lnTo>
+                <a:close/>
+                <a:lnTo>
+                  <a:pt x="148936" y="90085"/>
+                </a:lnTo>
+                <a:close/>
+                <a:lnTo>
+                  <a:pt x="152400" y="88352"/>
+                </a:lnTo>
+                <a:close/>
+                <a:lnTo>
+                  <a:pt x="155864" y="86630"/>
+                </a:lnTo>
+                <a:close/>
+                <a:lnTo>
+                  <a:pt x="159327" y="84922"/>
+                </a:lnTo>
+                <a:close/>
+                <a:lnTo>
+                  <a:pt x="162791" y="83229"/>
+                </a:lnTo>
+                <a:close/>
+                <a:lnTo>
+                  <a:pt x="166255" y="81552"/>
+                </a:lnTo>
+                <a:close/>
+                <a:lnTo>
+                  <a:pt x="169718" y="79887"/>
+                </a:lnTo>
+                <a:close/>
+                <a:lnTo>
+                  <a:pt x="173182" y="78230"/>
+                </a:lnTo>
+                <a:close/>
+                <a:lnTo>
+                  <a:pt x="176645" y="76578"/>
+                </a:lnTo>
+                <a:close/>
+                <a:lnTo>
+                  <a:pt x="180109" y="74929"/>
+                </a:lnTo>
+                <a:close/>
+                <a:lnTo>
+                  <a:pt x="183573" y="73279"/>
+                </a:lnTo>
+                <a:close/>
+                <a:lnTo>
+                  <a:pt x="187036" y="71625"/>
+                </a:lnTo>
+                <a:close/>
+                <a:lnTo>
+                  <a:pt x="190500" y="69968"/>
+                </a:lnTo>
+                <a:close/>
+                <a:lnTo>
+                  <a:pt x="193964" y="68308"/>
+                </a:lnTo>
+                <a:close/>
+                <a:lnTo>
+                  <a:pt x="197427" y="66644"/>
+                </a:lnTo>
+                <a:close/>
+                <a:lnTo>
+                  <a:pt x="200891" y="64977"/>
+                </a:lnTo>
+                <a:close/>
+                <a:lnTo>
+                  <a:pt x="204355" y="63306"/>
+                </a:lnTo>
+                <a:close/>
+                <a:lnTo>
+                  <a:pt x="207818" y="61631"/>
+                </a:lnTo>
+                <a:close/>
+                <a:lnTo>
+                  <a:pt x="211282" y="59955"/>
+                </a:lnTo>
+                <a:close/>
+                <a:lnTo>
+                  <a:pt x="214745" y="58281"/>
+                </a:lnTo>
+                <a:close/>
+                <a:lnTo>
+                  <a:pt x="218209" y="56611"/>
+                </a:lnTo>
+                <a:close/>
+                <a:lnTo>
+                  <a:pt x="221673" y="54950"/>
+                </a:lnTo>
+                <a:close/>
+                <a:lnTo>
+                  <a:pt x="225136" y="53299"/>
+                </a:lnTo>
+                <a:close/>
+                <a:lnTo>
+                  <a:pt x="228600" y="51663"/>
+                </a:lnTo>
+                <a:close/>
+                <a:lnTo>
+                  <a:pt x="232064" y="50044"/>
+                </a:lnTo>
+                <a:close/>
+                <a:lnTo>
+                  <a:pt x="235527" y="48438"/>
+                </a:lnTo>
+                <a:close/>
+                <a:lnTo>
+                  <a:pt x="238991" y="46844"/>
+                </a:lnTo>
+                <a:close/>
+                <a:lnTo>
+                  <a:pt x="242455" y="45258"/>
+                </a:lnTo>
+                <a:close/>
+                <a:lnTo>
+                  <a:pt x="245918" y="43676"/>
+                </a:lnTo>
+                <a:close/>
+                <a:lnTo>
+                  <a:pt x="249382" y="42096"/>
+                </a:lnTo>
+                <a:close/>
+                <a:lnTo>
+                  <a:pt x="252845" y="40515"/>
+                </a:lnTo>
+                <a:close/>
+                <a:lnTo>
+                  <a:pt x="256309" y="38930"/>
+                </a:lnTo>
+                <a:close/>
+                <a:lnTo>
+                  <a:pt x="259773" y="37341"/>
+                </a:lnTo>
+                <a:close/>
+                <a:lnTo>
+                  <a:pt x="263236" y="35749"/>
+                </a:lnTo>
+                <a:close/>
+                <a:lnTo>
+                  <a:pt x="266700" y="34154"/>
+                </a:lnTo>
+                <a:close/>
+                <a:lnTo>
+                  <a:pt x="270164" y="32555"/>
+                </a:lnTo>
+                <a:close/>
+                <a:lnTo>
+                  <a:pt x="273627" y="30953"/>
+                </a:lnTo>
+                <a:close/>
+                <a:lnTo>
+                  <a:pt x="277091" y="29348"/>
+                </a:lnTo>
+                <a:close/>
+                <a:lnTo>
+                  <a:pt x="280555" y="27742"/>
+                </a:lnTo>
+                <a:close/>
+                <a:lnTo>
+                  <a:pt x="284018" y="26138"/>
+                </a:lnTo>
+                <a:close/>
+                <a:lnTo>
+                  <a:pt x="287482" y="24540"/>
+                </a:lnTo>
+                <a:close/>
+                <a:lnTo>
+                  <a:pt x="290945" y="22949"/>
+                </a:lnTo>
+                <a:close/>
+                <a:lnTo>
+                  <a:pt x="294409" y="21370"/>
+                </a:lnTo>
+                <a:close/>
+                <a:lnTo>
+                  <a:pt x="297873" y="19805"/>
+                </a:lnTo>
+                <a:close/>
+                <a:lnTo>
+                  <a:pt x="301336" y="18255"/>
+                </a:lnTo>
+                <a:close/>
+                <a:lnTo>
+                  <a:pt x="304800" y="16719"/>
+                </a:lnTo>
+                <a:close/>
+                <a:lnTo>
+                  <a:pt x="308264" y="15194"/>
+                </a:lnTo>
+                <a:close/>
+                <a:lnTo>
+                  <a:pt x="311727" y="13678"/>
+                </a:lnTo>
+                <a:close/>
+                <a:lnTo>
+                  <a:pt x="315191" y="12167"/>
+                </a:lnTo>
+                <a:close/>
+                <a:lnTo>
+                  <a:pt x="318655" y="10661"/>
+                </a:lnTo>
+                <a:close/>
+                <a:lnTo>
+                  <a:pt x="322118" y="9155"/>
+                </a:lnTo>
+                <a:close/>
+                <a:lnTo>
+                  <a:pt x="325582" y="7647"/>
+                </a:lnTo>
+                <a:close/>
+                <a:lnTo>
+                  <a:pt x="329045" y="6136"/>
+                </a:lnTo>
+                <a:close/>
+                <a:lnTo>
+                  <a:pt x="332509" y="4618"/>
+                </a:lnTo>
+                <a:close/>
+                <a:lnTo>
+                  <a:pt x="335973" y="3091"/>
+                </a:lnTo>
+                <a:close/>
+                <a:lnTo>
+                  <a:pt x="339436" y="1552"/>
+                </a:lnTo>
+                <a:close/>
+                <a:lnTo>
+                  <a:pt x="342900" y="0"/>
+                </a:lnTo>
+                <a:close/>
+              </a:path>
+            </a:pathLst>
+          </a:custGeom>
+          <a:ln w="19050">
+            <a:solidFill>
+              <a:srgbClr val="B4B4B4"/>
+            </a:solidFill>
+          </a:ln>
+        </p:spPr>
+        <p:style>
+          <a:lnRef idx="1">
+            <a:schemeClr val="accent1"/>
+          </a:lnRef>
+          <a:fillRef idx="3">
+            <a:schemeClr val="accent1"/>
+          </a:fillRef>
+          <a:effectRef idx="2">
+            <a:schemeClr val="accent1"/>
+          </a:effectRef>
+          <a:fontRef idx="minor">
+            <a:schemeClr val="lt1"/>
+          </a:fontRef>
+        </p:style>
+        <p:txBody>
+          <a:bodyPr rtlCol="0" anchor="ctr"/>
+          <a:lstStyle/>
+          <a:p>
+            <a:pPr algn="ctr"/>
+          </a:p>
+        </p:txBody>
+      </p:sp>
+      <p:sp>
+        <p:nvSpPr>
+          <p:cNvPr id="9" name="Freeform 8"/>
+          <p:cNvSpPr/>
+          <p:nvPr/>
+        </p:nvSpPr>
+        <p:spPr>
+          <a:xfrm>
+            <a:off x="5989320" y="664312"/>
+            <a:ext cx="548640" cy="304495"/>
+          </a:xfrm>
+          <a:custGeom>
+            <a:avLst/>
+            <a:gdLst/>
+            <a:ahLst/>
+            <a:cxnLst/>
+            <a:rect l="l" t="t" r="r" b="b"/>
+            <a:pathLst>
+              <a:path w="548640" h="304495">
+                <a:moveTo>
+                  <a:pt x="548640" y="0"/>
+                </a:moveTo>
+                <a:lnTo>
+                  <a:pt x="543098" y="3217"/>
+                </a:lnTo>
+                <a:close/>
+                <a:lnTo>
+                  <a:pt x="537556" y="6348"/>
+                </a:lnTo>
+                <a:close/>
+                <a:lnTo>
+                  <a:pt x="532015" y="9411"/>
+                </a:lnTo>
+                <a:close/>
+                <a:lnTo>
+                  <a:pt x="526473" y="12427"/>
+                </a:lnTo>
+                <a:close/>
+                <a:lnTo>
+                  <a:pt x="520931" y="15413"/>
+                </a:lnTo>
+                <a:close/>
+                <a:lnTo>
+                  <a:pt x="515389" y="18389"/>
+                </a:lnTo>
+                <a:close/>
+                <a:lnTo>
+                  <a:pt x="509847" y="21374"/>
+                </a:lnTo>
+                <a:close/>
+                <a:lnTo>
+                  <a:pt x="504305" y="24386"/>
+                </a:lnTo>
+                <a:close/>
+                <a:lnTo>
+                  <a:pt x="498764" y="27443"/>
+                </a:lnTo>
+                <a:close/>
+                <a:lnTo>
+                  <a:pt x="493222" y="30538"/>
+                </a:lnTo>
+                <a:close/>
+                <a:lnTo>
+                  <a:pt x="487680" y="33655"/>
+                </a:lnTo>
+                <a:close/>
+                <a:lnTo>
+                  <a:pt x="482138" y="36778"/>
+                </a:lnTo>
+                <a:close/>
+                <a:lnTo>
+                  <a:pt x="476596" y="39891"/>
+                </a:lnTo>
+                <a:close/>
+                <a:lnTo>
+                  <a:pt x="471055" y="42991"/>
+                </a:lnTo>
+                <a:close/>
+                <a:lnTo>
+                  <a:pt x="465513" y="46089"/>
+                </a:lnTo>
+                <a:close/>
+                <a:lnTo>
+                  <a:pt x="459971" y="49192"/>
+                </a:lnTo>
+                <a:close/>
+                <a:lnTo>
+                  <a:pt x="454429" y="52310"/>
+                </a:lnTo>
+                <a:close/>
+                <a:lnTo>
+                  <a:pt x="448887" y="55437"/>
+                </a:lnTo>
+                <a:close/>
+                <a:lnTo>
+                  <a:pt x="443345" y="58554"/>
+                </a:lnTo>
+                <a:close/>
+                <a:lnTo>
+                  <a:pt x="437804" y="61643"/>
+                </a:lnTo>
+                <a:close/>
+                <a:lnTo>
+                  <a:pt x="432262" y="64684"/>
+                </a:lnTo>
+                <a:close/>
+                <a:lnTo>
+                  <a:pt x="426720" y="67678"/>
+                </a:lnTo>
+                <a:close/>
+                <a:lnTo>
+                  <a:pt x="421178" y="70651"/>
+                </a:lnTo>
+                <a:close/>
+                <a:lnTo>
+                  <a:pt x="415636" y="73634"/>
+                </a:lnTo>
+                <a:close/>
+                <a:lnTo>
+                  <a:pt x="410095" y="76655"/>
+                </a:lnTo>
+                <a:close/>
+                <a:lnTo>
+                  <a:pt x="404553" y="79728"/>
+                </a:lnTo>
+                <a:close/>
+                <a:lnTo>
+                  <a:pt x="399011" y="82838"/>
+                </a:lnTo>
+                <a:close/>
+                <a:lnTo>
+                  <a:pt x="393469" y="85963"/>
+                </a:lnTo>
+                <a:close/>
+                <a:lnTo>
+                  <a:pt x="387927" y="89086"/>
+                </a:lnTo>
+                <a:close/>
+                <a:lnTo>
+                  <a:pt x="382385" y="92193"/>
+                </a:lnTo>
+                <a:close/>
+                <a:lnTo>
+                  <a:pt x="376844" y="95291"/>
+                </a:lnTo>
+                <a:close/>
+                <a:lnTo>
+                  <a:pt x="371302" y="98389"/>
+                </a:lnTo>
+                <a:close/>
+                <a:lnTo>
+                  <a:pt x="365760" y="101498"/>
+                </a:lnTo>
+                <a:close/>
+                <a:lnTo>
+                  <a:pt x="360218" y="104622"/>
+                </a:lnTo>
+                <a:close/>
+                <a:lnTo>
+                  <a:pt x="354676" y="107747"/>
+                </a:lnTo>
+                <a:close/>
+                <a:lnTo>
+                  <a:pt x="349135" y="110853"/>
+                </a:lnTo>
+                <a:close/>
+                <a:lnTo>
+                  <a:pt x="343593" y="113920"/>
+                </a:lnTo>
+                <a:close/>
+                <a:lnTo>
+                  <a:pt x="338051" y="116935"/>
+                </a:lnTo>
+                <a:close/>
+                <a:lnTo>
+                  <a:pt x="332509" y="119915"/>
+                </a:lnTo>
+                <a:close/>
+                <a:lnTo>
+                  <a:pt x="326967" y="122889"/>
+                </a:lnTo>
+                <a:close/>
+                <a:lnTo>
+                  <a:pt x="321425" y="125887"/>
+                </a:lnTo>
+                <a:close/>
+                <a:lnTo>
+                  <a:pt x="315884" y="128935"/>
+                </a:lnTo>
+                <a:close/>
+                <a:lnTo>
+                  <a:pt x="310342" y="132029"/>
+                </a:lnTo>
+                <a:close/>
+                <a:lnTo>
+                  <a:pt x="304800" y="135149"/>
+                </a:lnTo>
+                <a:close/>
+                <a:lnTo>
+                  <a:pt x="299258" y="138275"/>
+                </a:lnTo>
+                <a:close/>
+                <a:lnTo>
+                  <a:pt x="293716" y="141390"/>
+                </a:lnTo>
+                <a:close/>
+                <a:lnTo>
+                  <a:pt x="288175" y="144492"/>
+                </a:lnTo>
+                <a:close/>
+                <a:lnTo>
+                  <a:pt x="282633" y="147588"/>
+                </a:lnTo>
+                <a:close/>
+                <a:lnTo>
+                  <a:pt x="277091" y="150691"/>
+                </a:lnTo>
+                <a:close/>
+                <a:lnTo>
+                  <a:pt x="271549" y="153808"/>
+                </a:lnTo>
+                <a:close/>
+                <a:lnTo>
+                  <a:pt x="266007" y="156935"/>
+                </a:lnTo>
+                <a:close/>
+                <a:lnTo>
+                  <a:pt x="260465" y="160052"/>
+                </a:lnTo>
+                <a:close/>
+                <a:lnTo>
+                  <a:pt x="254924" y="163141"/>
+                </a:lnTo>
+                <a:close/>
+                <a:lnTo>
+                  <a:pt x="249382" y="166183"/>
+                </a:lnTo>
+                <a:close/>
+                <a:lnTo>
+                  <a:pt x="243840" y="169176"/>
+                </a:lnTo>
+                <a:close/>
+                <a:lnTo>
+                  <a:pt x="238298" y="172150"/>
+                </a:lnTo>
+                <a:close/>
+                <a:lnTo>
+                  <a:pt x="232756" y="175133"/>
+                </a:lnTo>
+                <a:close/>
+                <a:lnTo>
+                  <a:pt x="227215" y="178154"/>
+                </a:lnTo>
+                <a:close/>
+                <a:lnTo>
+                  <a:pt x="221673" y="181227"/>
+                </a:lnTo>
+                <a:close/>
+                <a:lnTo>
+                  <a:pt x="216131" y="184336"/>
+                </a:lnTo>
+                <a:close/>
+                <a:lnTo>
+                  <a:pt x="210589" y="187462"/>
+                </a:lnTo>
+                <a:close/>
+                <a:lnTo>
+                  <a:pt x="205047" y="190584"/>
+                </a:lnTo>
+                <a:close/>
+                <a:lnTo>
+                  <a:pt x="199505" y="193691"/>
+                </a:lnTo>
+                <a:close/>
+                <a:lnTo>
+                  <a:pt x="193964" y="196789"/>
+                </a:lnTo>
+                <a:close/>
+                <a:lnTo>
+                  <a:pt x="188422" y="199888"/>
+                </a:lnTo>
+                <a:close/>
+                <a:lnTo>
+                  <a:pt x="182880" y="202996"/>
+                </a:lnTo>
+                <a:close/>
+                <a:lnTo>
+                  <a:pt x="177338" y="206120"/>
+                </a:lnTo>
+                <a:close/>
+                <a:lnTo>
+                  <a:pt x="171796" y="209245"/>
+                </a:lnTo>
+                <a:close/>
+                <a:lnTo>
+                  <a:pt x="166255" y="212351"/>
+                </a:lnTo>
+                <a:close/>
+                <a:lnTo>
+                  <a:pt x="160713" y="215418"/>
+                </a:lnTo>
+                <a:close/>
+                <a:lnTo>
+                  <a:pt x="155171" y="218433"/>
+                </a:lnTo>
+                <a:close/>
+                <a:lnTo>
+                  <a:pt x="149629" y="221414"/>
+                </a:lnTo>
+                <a:close/>
+                <a:lnTo>
+                  <a:pt x="144087" y="224389"/>
+                </a:lnTo>
+                <a:close/>
+                <a:lnTo>
+                  <a:pt x="138545" y="227386"/>
+                </a:lnTo>
+                <a:close/>
+                <a:lnTo>
+                  <a:pt x="133004" y="230432"/>
+                </a:lnTo>
+                <a:close/>
+                <a:lnTo>
+                  <a:pt x="127462" y="233524"/>
+                </a:lnTo>
+                <a:close/>
+                <a:lnTo>
+                  <a:pt x="121920" y="236643"/>
+                </a:lnTo>
+                <a:close/>
+                <a:lnTo>
+                  <a:pt x="116378" y="239772"/>
+                </a:lnTo>
+                <a:close/>
+                <a:lnTo>
+                  <a:pt x="110836" y="242893"/>
+                </a:lnTo>
+                <a:close/>
+                <a:lnTo>
+                  <a:pt x="105295" y="246003"/>
+                </a:lnTo>
+                <a:close/>
+                <a:lnTo>
+                  <a:pt x="99753" y="249103"/>
+                </a:lnTo>
+                <a:close/>
+                <a:lnTo>
+                  <a:pt x="94211" y="252199"/>
+                </a:lnTo>
+                <a:close/>
+                <a:lnTo>
+                  <a:pt x="88669" y="255293"/>
+                </a:lnTo>
+                <a:close/>
+                <a:lnTo>
+                  <a:pt x="83127" y="258389"/>
+                </a:lnTo>
+                <a:close/>
+                <a:lnTo>
+                  <a:pt x="77585" y="261490"/>
+                </a:lnTo>
+                <a:close/>
+                <a:lnTo>
+                  <a:pt x="72044" y="264599"/>
+                </a:lnTo>
+                <a:close/>
+                <a:lnTo>
+                  <a:pt x="66502" y="267718"/>
+                </a:lnTo>
+                <a:close/>
+                <a:lnTo>
+                  <a:pt x="60960" y="270844"/>
+                </a:lnTo>
+                <a:close/>
+                <a:lnTo>
+                  <a:pt x="55418" y="273960"/>
+                </a:lnTo>
+                <a:close/>
+                <a:lnTo>
+                  <a:pt x="49876" y="277054"/>
+                </a:lnTo>
+                <a:close/>
+                <a:lnTo>
+                  <a:pt x="44335" y="280108"/>
+                </a:lnTo>
+                <a:close/>
+                <a:lnTo>
+                  <a:pt x="38793" y="283119"/>
+                </a:lnTo>
+                <a:close/>
+                <a:lnTo>
+                  <a:pt x="33251" y="286104"/>
+                </a:lnTo>
+                <a:close/>
+                <a:lnTo>
+                  <a:pt x="27709" y="289081"/>
+                </a:lnTo>
+                <a:close/>
+                <a:lnTo>
+                  <a:pt x="22167" y="292068"/>
+                </a:lnTo>
+                <a:close/>
+                <a:lnTo>
+                  <a:pt x="16625" y="295084"/>
+                </a:lnTo>
+                <a:close/>
+                <a:lnTo>
+                  <a:pt x="11084" y="298148"/>
+                </a:lnTo>
+                <a:close/>
+                <a:lnTo>
+                  <a:pt x="5542" y="301279"/>
+                </a:lnTo>
+                <a:close/>
+                <a:lnTo>
+                  <a:pt x="0" y="304495"/>
+                </a:lnTo>
+                <a:close/>
+              </a:path>
+            </a:pathLst>
+          </a:custGeom>
+          <a:ln w="19050">
+            <a:solidFill>
+              <a:srgbClr val="B4B4B4"/>
+            </a:solidFill>
+          </a:ln>
+        </p:spPr>
+        <p:style>
+          <a:lnRef idx="1">
+            <a:schemeClr val="accent1"/>
+          </a:lnRef>
+          <a:fillRef idx="3">
+            <a:schemeClr val="accent1"/>
+          </a:fillRef>
+          <a:effectRef idx="2">
+            <a:schemeClr val="accent1"/>
+          </a:effectRef>
+          <a:fontRef idx="minor">
+            <a:schemeClr val="lt1"/>
+          </a:fontRef>
+        </p:style>
+        <p:txBody>
+          <a:bodyPr rtlCol="0" anchor="ctr"/>
+          <a:lstStyle/>
+          <a:p>
+            <a:pPr algn="ctr"/>
+          </a:p>
+        </p:txBody>
+      </p:sp>
+      <p:sp>
+        <p:nvSpPr>
+          <p:cNvPr id="10" name="TextBox 9"/>
           <p:cNvSpPr txBox="1"/>
           <p:nvPr/>
         </p:nvSpPr>
         <p:spPr>
           <a:xfrm>
-            <a:off x="6309360" y="1108710"/>
-            <a:ext cx="635000" cy="254000"/>
+            <a:off x="5689600" y="2391410"/>
+            <a:ext cx="1524000" cy="508000"/>
           </a:xfrm>
           <a:prstGeom prst="rect">
             <a:avLst/>
@@ -4782,7 +5462,7 @@
           <a:lstStyle/>
           <a:p>
             <a:pPr>
-              <a:defRPr sz="1200">
+              <a:defRPr sz="1400" b="1">
                 <a:solidFill>
                   <a:srgbClr val="FFFFFF"/>
                 </a:solidFill>
@@ -4790,7 +5470,7 @@
               </a:defRPr>
             </a:pPr>
             <a:r>
-              <a:t>$y=f(x)$</a:t>
+              <a:t>a</a:t>
             </a:r>
           </a:p>
         </p:txBody>

--- a/output/6.pptx
+++ b/output/6.pptx
@@ -3084,7 +3084,7 @@
     <p:bg>
       <p:bgPr>
         <a:solidFill>
-          <a:srgbClr val="1E1E23"/>
+          <a:srgbClr val="000000"/>
         </a:solidFill>
         <a:effectLst/>
       </p:bgPr>
@@ -3104,7 +3104,7 @@
         </p:nvCxnSpPr>
         <p:spPr>
           <a:xfrm>
-            <a:off x="4572000.0" y="2571750.0"/>
+            <a:off x="4343400.0" y="2571750.0"/>
             <a:ext cx="2286000.0" cy="0.0"/>
           </a:xfrm>
           <a:prstGeom prst="line">
@@ -3139,8 +3139,8 @@
         </p:nvCxnSpPr>
         <p:spPr>
           <a:xfrm flipV="1">
-            <a:off x="4572000.0" y="514350.0"/>
-            <a:ext cx="0.0" cy="2057400.0"/>
+            <a:off x="4572000.0" y="1200150.0"/>
+            <a:ext cx="0.0" cy="1600200.0"/>
           </a:xfrm>
           <a:prstGeom prst="line">
             <a:avLst/>
@@ -3174,8 +3174,8 @@
         </p:nvSpPr>
         <p:spPr>
           <a:xfrm>
-            <a:off x="4572000" y="626364"/>
-            <a:ext cx="2034540" cy="1716786"/>
+            <a:off x="4572000" y="2143354"/>
+            <a:ext cx="1133490" cy="199796"/>
           </a:xfrm>
           <a:custGeom>
             <a:avLst/>
@@ -3184,1204 +3184,1204 @@
             <a:cxnLst/>
             <a:rect l="l" t="t" r="r" b="b"/>
             <a:pathLst>
-              <a:path w="2034540" h="1716786">
+              <a:path w="1133490" h="199796">
                 <a:moveTo>
-                  <a:pt x="0" y="1716786"/>
+                  <a:pt x="0" y="199796"/>
                 </a:moveTo>
                 <a:lnTo>
-                  <a:pt x="6728" y="1648683"/>
-                </a:lnTo>
-                <a:close/>
-                <a:lnTo>
-                  <a:pt x="13456" y="1596019"/>
-                </a:lnTo>
-                <a:close/>
-                <a:lnTo>
-                  <a:pt x="20184" y="1556038"/>
-                </a:lnTo>
-                <a:close/>
-                <a:lnTo>
-                  <a:pt x="26912" y="1525985"/>
-                </a:lnTo>
-                <a:close/>
-                <a:lnTo>
-                  <a:pt x="33640" y="1503103"/>
-                </a:lnTo>
-                <a:close/>
-                <a:lnTo>
-                  <a:pt x="40368" y="1484638"/>
-                </a:lnTo>
-                <a:close/>
-                <a:lnTo>
-                  <a:pt x="47096" y="1467838"/>
-                </a:lnTo>
-                <a:close/>
-                <a:lnTo>
-                  <a:pt x="53824" y="1450900"/>
-                </a:lnTo>
-                <a:close/>
-                <a:lnTo>
-                  <a:pt x="60552" y="1434105"/>
-                </a:lnTo>
-                <a:close/>
-                <a:lnTo>
-                  <a:pt x="67280" y="1418014"/>
-                </a:lnTo>
-                <a:close/>
-                <a:lnTo>
-                  <a:pt x="74008" y="1403110"/>
-                </a:lnTo>
-                <a:close/>
-                <a:lnTo>
-                  <a:pt x="80736" y="1389315"/>
-                </a:lnTo>
-                <a:close/>
-                <a:lnTo>
-                  <a:pt x="87464" y="1376306"/>
-                </a:lnTo>
-                <a:close/>
-                <a:lnTo>
-                  <a:pt x="94192" y="1363763"/>
-                </a:lnTo>
-                <a:close/>
-                <a:lnTo>
-                  <a:pt x="100920" y="1351518"/>
-                </a:lnTo>
-                <a:close/>
-                <a:lnTo>
-                  <a:pt x="107648" y="1339596"/>
-                </a:lnTo>
-                <a:close/>
-                <a:lnTo>
-                  <a:pt x="114376" y="1328037"/>
-                </a:lnTo>
-                <a:close/>
-                <a:lnTo>
-                  <a:pt x="121104" y="1316865"/>
-                </a:lnTo>
-                <a:close/>
-                <a:lnTo>
-                  <a:pt x="127833" y="1306053"/>
-                </a:lnTo>
-                <a:close/>
-                <a:lnTo>
-                  <a:pt x="134561" y="1295564"/>
-                </a:lnTo>
-                <a:close/>
-                <a:lnTo>
-                  <a:pt x="141289" y="1285360"/>
-                </a:lnTo>
-                <a:close/>
-                <a:lnTo>
-                  <a:pt x="148017" y="1275410"/>
-                </a:lnTo>
-                <a:close/>
-                <a:lnTo>
-                  <a:pt x="154745" y="1265690"/>
-                </a:lnTo>
-                <a:close/>
-                <a:lnTo>
-                  <a:pt x="161473" y="1256177"/>
-                </a:lnTo>
-                <a:close/>
-                <a:lnTo>
-                  <a:pt x="168201" y="1246851"/>
-                </a:lnTo>
-                <a:close/>
-                <a:lnTo>
-                  <a:pt x="174929" y="1237706"/>
-                </a:lnTo>
-                <a:close/>
-                <a:lnTo>
-                  <a:pt x="181657" y="1228737"/>
-                </a:lnTo>
-                <a:close/>
-                <a:lnTo>
-                  <a:pt x="188385" y="1219937"/>
-                </a:lnTo>
-                <a:close/>
-                <a:lnTo>
-                  <a:pt x="195113" y="1211286"/>
-                </a:lnTo>
-                <a:close/>
-                <a:lnTo>
-                  <a:pt x="201841" y="1202759"/>
-                </a:lnTo>
-                <a:close/>
-                <a:lnTo>
-                  <a:pt x="208569" y="1194332"/>
-                </a:lnTo>
-                <a:close/>
-                <a:lnTo>
-                  <a:pt x="215297" y="1186006"/>
-                </a:lnTo>
-                <a:close/>
-                <a:lnTo>
-                  <a:pt x="222025" y="1177815"/>
-                </a:lnTo>
-                <a:close/>
-                <a:lnTo>
-                  <a:pt x="228753" y="1169795"/>
-                </a:lnTo>
-                <a:close/>
-                <a:lnTo>
-                  <a:pt x="235481" y="1161965"/>
-                </a:lnTo>
-                <a:close/>
-                <a:lnTo>
-                  <a:pt x="242209" y="1154293"/>
-                </a:lnTo>
-                <a:close/>
-                <a:lnTo>
-                  <a:pt x="248937" y="1146731"/>
-                </a:lnTo>
-                <a:close/>
-                <a:lnTo>
-                  <a:pt x="255665" y="1139235"/>
-                </a:lnTo>
-                <a:close/>
-                <a:lnTo>
-                  <a:pt x="262393" y="1131792"/>
-                </a:lnTo>
-                <a:close/>
-                <a:lnTo>
-                  <a:pt x="269121" y="1124416"/>
-                </a:lnTo>
-                <a:close/>
-                <a:lnTo>
-                  <a:pt x="275849" y="1117117"/>
-                </a:lnTo>
-                <a:close/>
-                <a:lnTo>
-                  <a:pt x="282577" y="1109905"/>
-                </a:lnTo>
-                <a:close/>
-                <a:lnTo>
-                  <a:pt x="289305" y="1102777"/>
-                </a:lnTo>
-                <a:close/>
-                <a:lnTo>
-                  <a:pt x="296033" y="1095730"/>
-                </a:lnTo>
-                <a:close/>
-                <a:lnTo>
-                  <a:pt x="302761" y="1088762"/>
-                </a:lnTo>
-                <a:close/>
-                <a:lnTo>
-                  <a:pt x="309489" y="1081870"/>
-                </a:lnTo>
-                <a:close/>
-                <a:lnTo>
-                  <a:pt x="316217" y="1075057"/>
-                </a:lnTo>
-                <a:close/>
-                <a:lnTo>
-                  <a:pt x="322945" y="1068320"/>
-                </a:lnTo>
-                <a:close/>
-                <a:lnTo>
-                  <a:pt x="329673" y="1061662"/>
-                </a:lnTo>
-                <a:close/>
-                <a:lnTo>
-                  <a:pt x="336401" y="1055087"/>
-                </a:lnTo>
-                <a:close/>
-                <a:lnTo>
-                  <a:pt x="343129" y="1048597"/>
-                </a:lnTo>
-                <a:close/>
-                <a:lnTo>
-                  <a:pt x="349857" y="1042193"/>
-                </a:lnTo>
-                <a:close/>
-                <a:lnTo>
-                  <a:pt x="356585" y="1035864"/>
-                </a:lnTo>
-                <a:close/>
-                <a:lnTo>
-                  <a:pt x="363313" y="1029596"/>
-                </a:lnTo>
-                <a:close/>
-                <a:lnTo>
-                  <a:pt x="370041" y="1023373"/>
-                </a:lnTo>
-                <a:close/>
-                <a:lnTo>
-                  <a:pt x="376769" y="1017181"/>
-                </a:lnTo>
-                <a:close/>
-                <a:lnTo>
-                  <a:pt x="383498" y="1011003"/>
-                </a:lnTo>
-                <a:close/>
-                <a:lnTo>
-                  <a:pt x="390226" y="1004821"/>
-                </a:lnTo>
-                <a:close/>
-                <a:lnTo>
-                  <a:pt x="396954" y="998671"/>
-                </a:lnTo>
-                <a:close/>
-                <a:lnTo>
-                  <a:pt x="403682" y="992694"/>
-                </a:lnTo>
-                <a:close/>
-                <a:lnTo>
-                  <a:pt x="410410" y="987040"/>
-                </a:lnTo>
-                <a:close/>
-                <a:lnTo>
-                  <a:pt x="417138" y="981782"/>
-                </a:lnTo>
-                <a:close/>
-                <a:lnTo>
-                  <a:pt x="423866" y="976467"/>
-                </a:lnTo>
-                <a:close/>
-                <a:lnTo>
-                  <a:pt x="430594" y="970435"/>
-                </a:lnTo>
-                <a:close/>
-                <a:lnTo>
-                  <a:pt x="437322" y="963053"/>
-                </a:lnTo>
-                <a:close/>
-                <a:lnTo>
-                  <a:pt x="444050" y="954592"/>
-                </a:lnTo>
-                <a:close/>
-                <a:lnTo>
-                  <a:pt x="450778" y="946368"/>
-                </a:lnTo>
-                <a:close/>
-                <a:lnTo>
-                  <a:pt x="457506" y="939757"/>
-                </a:lnTo>
-                <a:close/>
-                <a:lnTo>
-                  <a:pt x="464234" y="935605"/>
-                </a:lnTo>
-                <a:close/>
-                <a:lnTo>
-                  <a:pt x="470962" y="932900"/>
-                </a:lnTo>
-                <a:close/>
-                <a:lnTo>
-                  <a:pt x="477690" y="930228"/>
-                </a:lnTo>
-                <a:close/>
-                <a:lnTo>
-                  <a:pt x="484418" y="926271"/>
-                </a:lnTo>
-                <a:close/>
-                <a:lnTo>
-                  <a:pt x="491146" y="920913"/>
-                </a:lnTo>
-                <a:close/>
-                <a:lnTo>
-                  <a:pt x="497874" y="914856"/>
-                </a:lnTo>
-                <a:close/>
-                <a:lnTo>
-                  <a:pt x="504602" y="908813"/>
-                </a:lnTo>
-                <a:close/>
-                <a:lnTo>
-                  <a:pt x="511330" y="903213"/>
-                </a:lnTo>
-                <a:close/>
-                <a:lnTo>
-                  <a:pt x="518058" y="897926"/>
-                </a:lnTo>
-                <a:close/>
-                <a:lnTo>
-                  <a:pt x="524786" y="892761"/>
-                </a:lnTo>
-                <a:close/>
-                <a:lnTo>
-                  <a:pt x="531514" y="887552"/>
-                </a:lnTo>
-                <a:close/>
-                <a:lnTo>
-                  <a:pt x="538242" y="882288"/>
-                </a:lnTo>
-                <a:close/>
-                <a:lnTo>
-                  <a:pt x="544970" y="877021"/>
-                </a:lnTo>
-                <a:close/>
-                <a:lnTo>
-                  <a:pt x="551698" y="871803"/>
-                </a:lnTo>
-                <a:close/>
-                <a:lnTo>
-                  <a:pt x="558426" y="866654"/>
-                </a:lnTo>
-                <a:close/>
-                <a:lnTo>
-                  <a:pt x="565154" y="861560"/>
-                </a:lnTo>
-                <a:close/>
-                <a:lnTo>
-                  <a:pt x="571882" y="856506"/>
-                </a:lnTo>
-                <a:close/>
-                <a:lnTo>
-                  <a:pt x="578610" y="851482"/>
-                </a:lnTo>
-                <a:close/>
-                <a:lnTo>
-                  <a:pt x="585338" y="846493"/>
-                </a:lnTo>
-                <a:close/>
-                <a:lnTo>
-                  <a:pt x="592066" y="841550"/>
-                </a:lnTo>
-                <a:close/>
-                <a:lnTo>
-                  <a:pt x="598794" y="836660"/>
-                </a:lnTo>
-                <a:close/>
-                <a:lnTo>
-                  <a:pt x="605522" y="831813"/>
-                </a:lnTo>
-                <a:close/>
-                <a:lnTo>
-                  <a:pt x="612250" y="826985"/>
-                </a:lnTo>
-                <a:close/>
-                <a:lnTo>
-                  <a:pt x="618978" y="822153"/>
-                </a:lnTo>
-                <a:close/>
-                <a:lnTo>
-                  <a:pt x="625706" y="817305"/>
-                </a:lnTo>
-                <a:close/>
-                <a:lnTo>
-                  <a:pt x="632435" y="812454"/>
-                </a:lnTo>
-                <a:close/>
-                <a:lnTo>
-                  <a:pt x="639163" y="807616"/>
-                </a:lnTo>
-                <a:close/>
-                <a:lnTo>
-                  <a:pt x="645891" y="802808"/>
-                </a:lnTo>
-                <a:close/>
-                <a:lnTo>
-                  <a:pt x="652619" y="798057"/>
-                </a:lnTo>
-                <a:close/>
-                <a:lnTo>
-                  <a:pt x="659347" y="793397"/>
-                </a:lnTo>
-                <a:close/>
-                <a:lnTo>
-                  <a:pt x="666075" y="788857"/>
-                </a:lnTo>
-                <a:close/>
-                <a:lnTo>
-                  <a:pt x="672803" y="784420"/>
-                </a:lnTo>
-                <a:close/>
-                <a:lnTo>
-                  <a:pt x="679531" y="780013"/>
-                </a:lnTo>
-                <a:close/>
-                <a:lnTo>
-                  <a:pt x="686259" y="775562"/>
-                </a:lnTo>
-                <a:close/>
-                <a:lnTo>
-                  <a:pt x="692987" y="771019"/>
-                </a:lnTo>
-                <a:close/>
-                <a:lnTo>
-                  <a:pt x="699715" y="766423"/>
-                </a:lnTo>
-                <a:close/>
-                <a:lnTo>
-                  <a:pt x="706443" y="761828"/>
-                </a:lnTo>
-                <a:close/>
-                <a:lnTo>
-                  <a:pt x="713171" y="757287"/>
-                </a:lnTo>
-                <a:close/>
-                <a:lnTo>
-                  <a:pt x="719899" y="752816"/>
-                </a:lnTo>
-                <a:close/>
-                <a:lnTo>
-                  <a:pt x="726627" y="748408"/>
-                </a:lnTo>
-                <a:close/>
-                <a:lnTo>
-                  <a:pt x="733355" y="744053"/>
-                </a:lnTo>
-                <a:close/>
-                <a:lnTo>
-                  <a:pt x="740083" y="739740"/>
-                </a:lnTo>
-                <a:close/>
-                <a:lnTo>
-                  <a:pt x="746811" y="735445"/>
-                </a:lnTo>
-                <a:close/>
-                <a:lnTo>
-                  <a:pt x="753539" y="731145"/>
-                </a:lnTo>
-                <a:close/>
-                <a:lnTo>
-                  <a:pt x="760267" y="726822"/>
-                </a:lnTo>
-                <a:close/>
-                <a:lnTo>
-                  <a:pt x="766995" y="722497"/>
-                </a:lnTo>
-                <a:close/>
-                <a:lnTo>
-                  <a:pt x="773723" y="718199"/>
-                </a:lnTo>
-                <a:close/>
-                <a:lnTo>
-                  <a:pt x="780451" y="713961"/>
-                </a:lnTo>
-                <a:close/>
-                <a:lnTo>
-                  <a:pt x="787179" y="709783"/>
-                </a:lnTo>
-                <a:close/>
-                <a:lnTo>
-                  <a:pt x="793907" y="705630"/>
-                </a:lnTo>
-                <a:close/>
-                <a:lnTo>
-                  <a:pt x="800635" y="701470"/>
-                </a:lnTo>
-                <a:close/>
-                <a:lnTo>
-                  <a:pt x="807363" y="697282"/>
-                </a:lnTo>
-                <a:close/>
-                <a:lnTo>
-                  <a:pt x="814091" y="693093"/>
-                </a:lnTo>
-                <a:close/>
-                <a:lnTo>
-                  <a:pt x="820819" y="688938"/>
-                </a:lnTo>
-                <a:close/>
-                <a:lnTo>
-                  <a:pt x="827547" y="684849"/>
-                </a:lnTo>
-                <a:close/>
-                <a:lnTo>
-                  <a:pt x="834275" y="680814"/>
-                </a:lnTo>
-                <a:close/>
-                <a:lnTo>
-                  <a:pt x="841003" y="676798"/>
-                </a:lnTo>
-                <a:close/>
-                <a:lnTo>
-                  <a:pt x="847731" y="672763"/>
-                </a:lnTo>
-                <a:close/>
-                <a:lnTo>
-                  <a:pt x="854459" y="668699"/>
-                </a:lnTo>
-                <a:close/>
-                <a:lnTo>
-                  <a:pt x="861187" y="664646"/>
-                </a:lnTo>
-                <a:close/>
-                <a:lnTo>
-                  <a:pt x="867915" y="660646"/>
-                </a:lnTo>
-                <a:close/>
-                <a:lnTo>
-                  <a:pt x="874643" y="656731"/>
-                </a:lnTo>
-                <a:close/>
-                <a:lnTo>
-                  <a:pt x="881372" y="652858"/>
-                </a:lnTo>
-                <a:close/>
-                <a:lnTo>
-                  <a:pt x="888100" y="648961"/>
-                </a:lnTo>
-                <a:close/>
-                <a:lnTo>
-                  <a:pt x="894828" y="644977"/>
-                </a:lnTo>
-                <a:close/>
-                <a:lnTo>
-                  <a:pt x="901556" y="640912"/>
-                </a:lnTo>
-                <a:close/>
-                <a:lnTo>
-                  <a:pt x="908284" y="636847"/>
-                </a:lnTo>
-                <a:close/>
-                <a:lnTo>
-                  <a:pt x="915012" y="632866"/>
-                </a:lnTo>
-                <a:close/>
-                <a:lnTo>
-                  <a:pt x="921740" y="629020"/>
-                </a:lnTo>
-                <a:close/>
-                <a:lnTo>
-                  <a:pt x="928468" y="625271"/>
-                </a:lnTo>
-                <a:close/>
-                <a:lnTo>
-                  <a:pt x="935196" y="621560"/>
-                </a:lnTo>
-                <a:close/>
-                <a:lnTo>
-                  <a:pt x="941924" y="617833"/>
-                </a:lnTo>
-                <a:close/>
-                <a:lnTo>
-                  <a:pt x="948652" y="614074"/>
-                </a:lnTo>
-                <a:close/>
-                <a:lnTo>
-                  <a:pt x="955380" y="610292"/>
-                </a:lnTo>
-                <a:close/>
-                <a:lnTo>
-                  <a:pt x="962108" y="606496"/>
-                </a:lnTo>
-                <a:close/>
-                <a:lnTo>
-                  <a:pt x="968836" y="602700"/>
-                </a:lnTo>
-                <a:close/>
-                <a:lnTo>
-                  <a:pt x="975564" y="598925"/>
-                </a:lnTo>
-                <a:close/>
-                <a:lnTo>
-                  <a:pt x="982292" y="595195"/>
-                </a:lnTo>
-                <a:close/>
-                <a:lnTo>
-                  <a:pt x="989020" y="591527"/>
-                </a:lnTo>
-                <a:close/>
-                <a:lnTo>
-                  <a:pt x="995748" y="587901"/>
-                </a:lnTo>
-                <a:close/>
-                <a:lnTo>
-                  <a:pt x="1002476" y="584286"/>
-                </a:lnTo>
-                <a:close/>
-                <a:lnTo>
-                  <a:pt x="1009204" y="580652"/>
-                </a:lnTo>
-                <a:close/>
-                <a:lnTo>
-                  <a:pt x="1015932" y="577000"/>
-                </a:lnTo>
-                <a:close/>
-                <a:lnTo>
-                  <a:pt x="1022660" y="573360"/>
-                </a:lnTo>
-                <a:close/>
-                <a:lnTo>
-                  <a:pt x="1029388" y="569763"/>
-                </a:lnTo>
-                <a:close/>
-                <a:lnTo>
-                  <a:pt x="1036116" y="566229"/>
-                </a:lnTo>
-                <a:close/>
-                <a:lnTo>
-                  <a:pt x="1042844" y="562739"/>
-                </a:lnTo>
-                <a:close/>
-                <a:lnTo>
-                  <a:pt x="1049572" y="559267"/>
-                </a:lnTo>
-                <a:close/>
-                <a:lnTo>
-                  <a:pt x="1056300" y="555790"/>
-                </a:lnTo>
-                <a:close/>
-                <a:lnTo>
-                  <a:pt x="1063028" y="552298"/>
-                </a:lnTo>
-                <a:close/>
-                <a:lnTo>
-                  <a:pt x="1069756" y="548792"/>
-                </a:lnTo>
-                <a:close/>
-                <a:lnTo>
-                  <a:pt x="1076484" y="545273"/>
-                </a:lnTo>
-                <a:close/>
-                <a:lnTo>
-                  <a:pt x="1083212" y="541750"/>
-                </a:lnTo>
-                <a:close/>
-                <a:lnTo>
-                  <a:pt x="1089940" y="538244"/>
-                </a:lnTo>
-                <a:close/>
-                <a:lnTo>
-                  <a:pt x="1096668" y="534779"/>
-                </a:lnTo>
-                <a:close/>
-                <a:lnTo>
-                  <a:pt x="1103396" y="531372"/>
-                </a:lnTo>
-                <a:close/>
-                <a:lnTo>
-                  <a:pt x="1110124" y="528009"/>
-                </a:lnTo>
-                <a:close/>
-                <a:lnTo>
-                  <a:pt x="1116852" y="524669"/>
-                </a:lnTo>
-                <a:close/>
-                <a:lnTo>
-                  <a:pt x="1123580" y="521326"/>
-                </a:lnTo>
-                <a:close/>
-                <a:lnTo>
-                  <a:pt x="1130309" y="517971"/>
-                </a:lnTo>
-                <a:close/>
-                <a:lnTo>
-                  <a:pt x="1137037" y="514603"/>
-                </a:lnTo>
-                <a:close/>
-                <a:lnTo>
-                  <a:pt x="1143765" y="511222"/>
-                </a:lnTo>
-                <a:close/>
-                <a:lnTo>
-                  <a:pt x="1150493" y="507833"/>
-                </a:lnTo>
-                <a:close/>
-                <a:lnTo>
-                  <a:pt x="1157221" y="504456"/>
-                </a:lnTo>
-                <a:close/>
-                <a:lnTo>
-                  <a:pt x="1163949" y="501116"/>
-                </a:lnTo>
-                <a:close/>
-                <a:lnTo>
-                  <a:pt x="1170677" y="497832"/>
-                </a:lnTo>
-                <a:close/>
-                <a:lnTo>
-                  <a:pt x="1177405" y="494597"/>
-                </a:lnTo>
-                <a:close/>
-                <a:lnTo>
-                  <a:pt x="1184133" y="491388"/>
-                </a:lnTo>
-                <a:close/>
-                <a:lnTo>
-                  <a:pt x="1190861" y="488183"/>
-                </a:lnTo>
-                <a:close/>
-                <a:lnTo>
-                  <a:pt x="1197588" y="484967"/>
-                </a:lnTo>
-                <a:close/>
-                <a:lnTo>
-                  <a:pt x="1204316" y="481736"/>
-                </a:lnTo>
-                <a:close/>
-                <a:lnTo>
-                  <a:pt x="1211045" y="478490"/>
-                </a:lnTo>
-                <a:close/>
-                <a:lnTo>
-                  <a:pt x="1217775" y="475231"/>
-                </a:lnTo>
-                <a:close/>
-                <a:lnTo>
-                  <a:pt x="1224504" y="471982"/>
-                </a:lnTo>
-                <a:close/>
-                <a:lnTo>
-                  <a:pt x="1231231" y="468770"/>
-                </a:lnTo>
-                <a:close/>
-                <a:lnTo>
-                  <a:pt x="1237953" y="465622"/>
-                </a:lnTo>
-                <a:close/>
-                <a:lnTo>
-                  <a:pt x="1244674" y="462530"/>
-                </a:lnTo>
-                <a:close/>
-                <a:lnTo>
-                  <a:pt x="1251401" y="459454"/>
-                </a:lnTo>
-                <a:close/>
-                <a:lnTo>
-                  <a:pt x="1258144" y="456352"/>
-                </a:lnTo>
-                <a:close/>
-                <a:lnTo>
-                  <a:pt x="1264901" y="453210"/>
-                </a:lnTo>
-                <a:close/>
-                <a:lnTo>
-                  <a:pt x="1271644" y="450081"/>
-                </a:lnTo>
-                <a:close/>
-                <a:lnTo>
-                  <a:pt x="1278344" y="447035"/>
-                </a:lnTo>
-                <a:close/>
-                <a:lnTo>
-                  <a:pt x="1284979" y="444119"/>
-                </a:lnTo>
-                <a:close/>
-                <a:lnTo>
-                  <a:pt x="1291615" y="441204"/>
-                </a:lnTo>
-                <a:close/>
-                <a:lnTo>
-                  <a:pt x="1298368" y="438061"/>
-                </a:lnTo>
-                <a:close/>
-                <a:lnTo>
-                  <a:pt x="1305352" y="434467"/>
-                </a:lnTo>
-                <a:close/>
-                <a:lnTo>
-                  <a:pt x="1312478" y="430622"/>
-                </a:lnTo>
-                <a:close/>
-                <a:lnTo>
-                  <a:pt x="1319338" y="427390"/>
-                </a:lnTo>
-                <a:close/>
-                <a:lnTo>
-                  <a:pt x="1325497" y="425690"/>
-                </a:lnTo>
-                <a:close/>
-                <a:lnTo>
-                  <a:pt x="1330797" y="425845"/>
-                </a:lnTo>
-                <a:close/>
-                <a:lnTo>
-                  <a:pt x="1336445" y="425233"/>
-                </a:lnTo>
-                <a:close/>
-                <a:lnTo>
-                  <a:pt x="1344063" y="420332"/>
-                </a:lnTo>
-                <a:close/>
-                <a:lnTo>
-                  <a:pt x="1355167" y="407847"/>
-                </a:lnTo>
-                <a:close/>
-                <a:lnTo>
-                  <a:pt x="1369182" y="388986"/>
-                </a:lnTo>
-                <a:close/>
-                <a:lnTo>
-                  <a:pt x="1383619" y="369076"/>
-                </a:lnTo>
-                <a:close/>
-                <a:lnTo>
-                  <a:pt x="1395919" y="353591"/>
-                </a:lnTo>
-                <a:close/>
-                <a:lnTo>
-                  <a:pt x="1404542" y="345844"/>
-                </a:lnTo>
-                <a:close/>
-                <a:lnTo>
-                  <a:pt x="1410659" y="343365"/>
-                </a:lnTo>
-                <a:close/>
-                <a:lnTo>
-                  <a:pt x="1415895" y="342730"/>
-                </a:lnTo>
-                <a:close/>
-                <a:lnTo>
-                  <a:pt x="1421734" y="340808"/>
-                </a:lnTo>
-                <a:close/>
-                <a:lnTo>
-                  <a:pt x="1428411" y="337123"/>
-                </a:lnTo>
-                <a:close/>
-                <a:lnTo>
-                  <a:pt x="1435497" y="332610"/>
-                </a:lnTo>
-                <a:close/>
-                <a:lnTo>
-                  <a:pt x="1442561" y="328207"/>
-                </a:lnTo>
-                <a:close/>
-                <a:lnTo>
-                  <a:pt x="1449378" y="324389"/>
-                </a:lnTo>
-                <a:close/>
-                <a:lnTo>
-                  <a:pt x="1456040" y="320917"/>
-                </a:lnTo>
-                <a:close/>
-                <a:lnTo>
-                  <a:pt x="1462663" y="317496"/>
-                </a:lnTo>
-                <a:close/>
-                <a:lnTo>
-                  <a:pt x="1469341" y="313884"/>
-                </a:lnTo>
-                <a:close/>
-                <a:lnTo>
-                  <a:pt x="1476074" y="310101"/>
-                </a:lnTo>
-                <a:close/>
-                <a:lnTo>
-                  <a:pt x="1482830" y="306246"/>
-                </a:lnTo>
-                <a:close/>
-                <a:lnTo>
-                  <a:pt x="1489579" y="302411"/>
-                </a:lnTo>
-                <a:close/>
-                <a:lnTo>
-                  <a:pt x="1496310" y="298630"/>
-                </a:lnTo>
-                <a:close/>
-                <a:lnTo>
-                  <a:pt x="1503032" y="294882"/>
-                </a:lnTo>
-                <a:close/>
-                <a:lnTo>
-                  <a:pt x="1509753" y="291141"/>
-                </a:lnTo>
-                <a:close/>
-                <a:lnTo>
-                  <a:pt x="1516479" y="287389"/>
-                </a:lnTo>
-                <a:close/>
-                <a:lnTo>
-                  <a:pt x="1523207" y="283623"/>
-                </a:lnTo>
-                <a:close/>
-                <a:lnTo>
-                  <a:pt x="1529938" y="279840"/>
-                </a:lnTo>
-                <a:close/>
-                <a:lnTo>
-                  <a:pt x="1536667" y="276042"/>
-                </a:lnTo>
-                <a:close/>
-                <a:lnTo>
-                  <a:pt x="1543395" y="272249"/>
-                </a:lnTo>
-                <a:close/>
-                <a:lnTo>
-                  <a:pt x="1550122" y="268491"/>
-                </a:lnTo>
-                <a:close/>
-                <a:lnTo>
-                  <a:pt x="1556850" y="264799"/>
-                </a:lnTo>
-                <a:close/>
-                <a:lnTo>
-                  <a:pt x="1563578" y="261171"/>
-                </a:lnTo>
-                <a:close/>
-                <a:lnTo>
-                  <a:pt x="1570306" y="257559"/>
-                </a:lnTo>
-                <a:close/>
-                <a:lnTo>
-                  <a:pt x="1577034" y="253913"/>
-                </a:lnTo>
-                <a:close/>
-                <a:lnTo>
-                  <a:pt x="1583762" y="250194"/>
-                </a:lnTo>
-                <a:close/>
-                <a:lnTo>
-                  <a:pt x="1590490" y="246419"/>
-                </a:lnTo>
-                <a:close/>
-                <a:lnTo>
-                  <a:pt x="1597218" y="242624"/>
-                </a:lnTo>
-                <a:close/>
-                <a:lnTo>
-                  <a:pt x="1603946" y="238841"/>
-                </a:lnTo>
-                <a:close/>
-                <a:lnTo>
-                  <a:pt x="1610674" y="235078"/>
-                </a:lnTo>
-                <a:close/>
-                <a:lnTo>
-                  <a:pt x="1617402" y="231317"/>
-                </a:lnTo>
-                <a:close/>
-                <a:lnTo>
-                  <a:pt x="1624130" y="227540"/>
-                </a:lnTo>
-                <a:close/>
-                <a:lnTo>
-                  <a:pt x="1630858" y="223745"/>
-                </a:lnTo>
-                <a:close/>
-                <a:lnTo>
-                  <a:pt x="1637586" y="219961"/>
-                </a:lnTo>
-                <a:close/>
-                <a:lnTo>
-                  <a:pt x="1644314" y="216223"/>
-                </a:lnTo>
-                <a:close/>
-                <a:lnTo>
-                  <a:pt x="1651042" y="212559"/>
-                </a:lnTo>
-                <a:close/>
-                <a:lnTo>
-                  <a:pt x="1657771" y="208944"/>
-                </a:lnTo>
-                <a:close/>
-                <a:lnTo>
-                  <a:pt x="1664499" y="205325"/>
-                </a:lnTo>
-                <a:close/>
-                <a:lnTo>
-                  <a:pt x="1671227" y="201652"/>
-                </a:lnTo>
-                <a:close/>
-                <a:lnTo>
-                  <a:pt x="1677955" y="197906"/>
-                </a:lnTo>
-                <a:close/>
-                <a:lnTo>
-                  <a:pt x="1684683" y="194118"/>
-                </a:lnTo>
-                <a:close/>
-                <a:lnTo>
-                  <a:pt x="1691411" y="190324"/>
-                </a:lnTo>
-                <a:close/>
-                <a:lnTo>
-                  <a:pt x="1698139" y="186551"/>
-                </a:lnTo>
-                <a:close/>
-                <a:lnTo>
-                  <a:pt x="1704867" y="182790"/>
-                </a:lnTo>
-                <a:close/>
-                <a:lnTo>
-                  <a:pt x="1711595" y="179025"/>
-                </a:lnTo>
-                <a:close/>
-                <a:lnTo>
-                  <a:pt x="1718323" y="175240"/>
-                </a:lnTo>
-                <a:close/>
-                <a:lnTo>
-                  <a:pt x="1725051" y="171445"/>
-                </a:lnTo>
-                <a:close/>
-                <a:lnTo>
-                  <a:pt x="1731779" y="167675"/>
-                </a:lnTo>
-                <a:close/>
-                <a:lnTo>
-                  <a:pt x="1738507" y="163965"/>
-                </a:lnTo>
-                <a:close/>
-                <a:lnTo>
-                  <a:pt x="1745235" y="160328"/>
-                </a:lnTo>
-                <a:close/>
-                <a:lnTo>
-                  <a:pt x="1751963" y="156717"/>
-                </a:lnTo>
-                <a:close/>
-                <a:lnTo>
-                  <a:pt x="1758691" y="153083"/>
-                </a:lnTo>
-                <a:close/>
-                <a:lnTo>
-                  <a:pt x="1765419" y="149377"/>
-                </a:lnTo>
-                <a:close/>
-                <a:lnTo>
-                  <a:pt x="1772147" y="145610"/>
-                </a:lnTo>
-                <a:close/>
-                <a:lnTo>
-                  <a:pt x="1778875" y="141816"/>
-                </a:lnTo>
-                <a:close/>
-                <a:lnTo>
-                  <a:pt x="1785603" y="138029"/>
-                </a:lnTo>
-                <a:close/>
-                <a:lnTo>
-                  <a:pt x="1792331" y="134263"/>
-                </a:lnTo>
-                <a:close/>
-                <a:lnTo>
-                  <a:pt x="1799059" y="130503"/>
-                </a:lnTo>
-                <a:close/>
-                <a:lnTo>
-                  <a:pt x="1805787" y="126730"/>
-                </a:lnTo>
-                <a:close/>
-                <a:lnTo>
-                  <a:pt x="1812515" y="122937"/>
-                </a:lnTo>
-                <a:close/>
-                <a:lnTo>
-                  <a:pt x="1819243" y="119148"/>
-                </a:lnTo>
-                <a:close/>
-                <a:lnTo>
-                  <a:pt x="1825971" y="115399"/>
-                </a:lnTo>
-                <a:close/>
-                <a:lnTo>
-                  <a:pt x="1832699" y="111721"/>
-                </a:lnTo>
-                <a:close/>
-                <a:lnTo>
-                  <a:pt x="1839427" y="108101"/>
-                </a:lnTo>
-                <a:close/>
-                <a:lnTo>
-                  <a:pt x="1846155" y="104487"/>
-                </a:lnTo>
-                <a:close/>
-                <a:lnTo>
-                  <a:pt x="1852883" y="100827"/>
-                </a:lnTo>
-                <a:close/>
-                <a:lnTo>
-                  <a:pt x="1859611" y="97092"/>
-                </a:lnTo>
-                <a:close/>
-                <a:lnTo>
-                  <a:pt x="1866339" y="93310"/>
-                </a:lnTo>
-                <a:close/>
-                <a:lnTo>
-                  <a:pt x="1873067" y="89515"/>
-                </a:lnTo>
-                <a:close/>
-                <a:lnTo>
-                  <a:pt x="1879795" y="85737"/>
-                </a:lnTo>
-                <a:close/>
-                <a:lnTo>
-                  <a:pt x="1886523" y="81976"/>
-                </a:lnTo>
-                <a:close/>
-                <a:lnTo>
-                  <a:pt x="1893251" y="78213"/>
-                </a:lnTo>
-                <a:close/>
-                <a:lnTo>
-                  <a:pt x="1899979" y="74431"/>
-                </a:lnTo>
-                <a:close/>
-                <a:lnTo>
-                  <a:pt x="1906707" y="70636"/>
-                </a:lnTo>
-                <a:close/>
-                <a:lnTo>
-                  <a:pt x="1913436" y="66859"/>
-                </a:lnTo>
-                <a:close/>
-                <a:lnTo>
-                  <a:pt x="1920164" y="63135"/>
-                </a:lnTo>
-                <a:close/>
-                <a:lnTo>
-                  <a:pt x="1926892" y="59487"/>
-                </a:lnTo>
-                <a:close/>
-                <a:lnTo>
-                  <a:pt x="1933620" y="55875"/>
-                </a:lnTo>
-                <a:close/>
-                <a:lnTo>
-                  <a:pt x="1940348" y="52249"/>
-                </a:lnTo>
-                <a:close/>
-                <a:lnTo>
-                  <a:pt x="1947076" y="48559"/>
-                </a:lnTo>
-                <a:close/>
-                <a:lnTo>
-                  <a:pt x="1953804" y="44801"/>
-                </a:lnTo>
-                <a:close/>
-                <a:lnTo>
-                  <a:pt x="1960532" y="41009"/>
-                </a:lnTo>
-                <a:close/>
-                <a:lnTo>
-                  <a:pt x="1967260" y="37216"/>
-                </a:lnTo>
-                <a:close/>
-                <a:lnTo>
-                  <a:pt x="1973988" y="33443"/>
-                </a:lnTo>
-                <a:close/>
-                <a:lnTo>
-                  <a:pt x="1980716" y="29681"/>
-                </a:lnTo>
-                <a:close/>
-                <a:lnTo>
-                  <a:pt x="1987444" y="25917"/>
-                </a:lnTo>
-                <a:close/>
-                <a:lnTo>
-                  <a:pt x="1994172" y="22142"/>
-                </a:lnTo>
-                <a:close/>
-                <a:lnTo>
-                  <a:pt x="2000900" y="18364"/>
-                </a:lnTo>
-                <a:close/>
-                <a:lnTo>
-                  <a:pt x="2007628" y="14599"/>
-                </a:lnTo>
-                <a:close/>
-                <a:lnTo>
-                  <a:pt x="2014356" y="10863"/>
-                </a:lnTo>
-                <a:close/>
-                <a:lnTo>
-                  <a:pt x="2021084" y="7174"/>
-                </a:lnTo>
-                <a:close/>
-                <a:lnTo>
-                  <a:pt x="2027812" y="3547"/>
-                </a:lnTo>
-                <a:close/>
-                <a:lnTo>
-                  <a:pt x="2034540" y="0"/>
+                  <a:pt x="3771" y="194414"/>
+                </a:lnTo>
+                <a:close/>
+                <a:lnTo>
+                  <a:pt x="7562" y="190665"/>
+                </a:lnTo>
+                <a:close/>
+                <a:lnTo>
+                  <a:pt x="11364" y="188114"/>
+                </a:lnTo>
+                <a:close/>
+                <a:lnTo>
+                  <a:pt x="15169" y="186331"/>
+                </a:lnTo>
+                <a:close/>
+                <a:lnTo>
+                  <a:pt x="18970" y="184882"/>
+                </a:lnTo>
+                <a:close/>
+                <a:lnTo>
+                  <a:pt x="22760" y="183414"/>
+                </a:lnTo>
+                <a:close/>
+                <a:lnTo>
+                  <a:pt x="26542" y="181923"/>
+                </a:lnTo>
+                <a:close/>
+                <a:lnTo>
+                  <a:pt x="30322" y="180494"/>
+                </a:lnTo>
+                <a:close/>
+                <a:lnTo>
+                  <a:pt x="34103" y="179154"/>
+                </a:lnTo>
+                <a:close/>
+                <a:lnTo>
+                  <a:pt x="37893" y="177869"/>
+                </a:lnTo>
+                <a:close/>
+                <a:lnTo>
+                  <a:pt x="41695" y="176608"/>
+                </a:lnTo>
+                <a:close/>
+                <a:lnTo>
+                  <a:pt x="45500" y="175374"/>
+                </a:lnTo>
+                <a:close/>
+                <a:lnTo>
+                  <a:pt x="49298" y="174179"/>
+                </a:lnTo>
+                <a:close/>
+                <a:lnTo>
+                  <a:pt x="53084" y="173024"/>
+                </a:lnTo>
+                <a:close/>
+                <a:lnTo>
+                  <a:pt x="56864" y="171900"/>
+                </a:lnTo>
+                <a:close/>
+                <a:lnTo>
+                  <a:pt x="60644" y="170795"/>
+                </a:lnTo>
+                <a:close/>
+                <a:lnTo>
+                  <a:pt x="64429" y="169706"/>
+                </a:lnTo>
+                <a:close/>
+                <a:lnTo>
+                  <a:pt x="68224" y="168631"/>
+                </a:lnTo>
+                <a:close/>
+                <a:lnTo>
+                  <a:pt x="72029" y="167571"/>
+                </a:lnTo>
+                <a:close/>
+                <a:lnTo>
+                  <a:pt x="75832" y="166525"/>
+                </a:lnTo>
+                <a:close/>
+                <a:lnTo>
+                  <a:pt x="79624" y="165494"/>
+                </a:lnTo>
+                <a:close/>
+                <a:lnTo>
+                  <a:pt x="83407" y="164477"/>
+                </a:lnTo>
+                <a:close/>
+                <a:lnTo>
+                  <a:pt x="87186" y="163474"/>
+                </a:lnTo>
+                <a:close/>
+                <a:lnTo>
+                  <a:pt x="90967" y="162484"/>
+                </a:lnTo>
+                <a:close/>
+                <a:lnTo>
+                  <a:pt x="94756" y="161512"/>
+                </a:lnTo>
+                <a:close/>
+                <a:lnTo>
+                  <a:pt x="98557" y="160559"/>
+                </a:lnTo>
+                <a:close/>
+                <a:lnTo>
+                  <a:pt x="102363" y="159617"/>
+                </a:lnTo>
+                <a:close/>
+                <a:lnTo>
+                  <a:pt x="106161" y="158671"/>
+                </a:lnTo>
+                <a:close/>
+                <a:lnTo>
+                  <a:pt x="109948" y="157721"/>
+                </a:lnTo>
+                <a:close/>
+                <a:lnTo>
+                  <a:pt x="113728" y="156778"/>
+                </a:lnTo>
+                <a:close/>
+                <a:lnTo>
+                  <a:pt x="117508" y="155853"/>
+                </a:lnTo>
+                <a:close/>
+                <a:lnTo>
+                  <a:pt x="121292" y="154946"/>
+                </a:lnTo>
+                <a:close/>
+                <a:lnTo>
+                  <a:pt x="125087" y="154050"/>
+                </a:lnTo>
+                <a:close/>
+                <a:lnTo>
+                  <a:pt x="128891" y="153160"/>
+                </a:lnTo>
+                <a:close/>
+                <a:lnTo>
+                  <a:pt x="132695" y="152268"/>
+                </a:lnTo>
+                <a:close/>
+                <a:lnTo>
+                  <a:pt x="136488" y="151371"/>
+                </a:lnTo>
+                <a:close/>
+                <a:lnTo>
+                  <a:pt x="140271" y="150477"/>
+                </a:lnTo>
+                <a:close/>
+                <a:lnTo>
+                  <a:pt x="144050" y="149599"/>
+                </a:lnTo>
+                <a:close/>
+                <a:lnTo>
+                  <a:pt x="147831" y="148742"/>
+                </a:lnTo>
+                <a:close/>
+                <a:lnTo>
+                  <a:pt x="151619" y="147893"/>
+                </a:lnTo>
+                <a:close/>
+                <a:lnTo>
+                  <a:pt x="155420" y="147038"/>
+                </a:lnTo>
+                <a:close/>
+                <a:lnTo>
+                  <a:pt x="159225" y="146181"/>
+                </a:lnTo>
+                <a:close/>
+                <a:lnTo>
+                  <a:pt x="163025" y="145330"/>
+                </a:lnTo>
+                <a:close/>
+                <a:lnTo>
+                  <a:pt x="166812" y="144489"/>
+                </a:lnTo>
+                <a:close/>
+                <a:lnTo>
+                  <a:pt x="170593" y="143657"/>
+                </a:lnTo>
+                <a:close/>
+                <a:lnTo>
+                  <a:pt x="174372" y="142831"/>
+                </a:lnTo>
+                <a:close/>
+                <a:lnTo>
+                  <a:pt x="178156" y="142011"/>
+                </a:lnTo>
+                <a:close/>
+                <a:lnTo>
+                  <a:pt x="181949" y="141202"/>
+                </a:lnTo>
+                <a:close/>
+                <a:lnTo>
+                  <a:pt x="185753" y="140400"/>
+                </a:lnTo>
+                <a:close/>
+                <a:lnTo>
+                  <a:pt x="189558" y="139602"/>
+                </a:lnTo>
+                <a:close/>
+                <a:lnTo>
+                  <a:pt x="193351" y="138799"/>
+                </a:lnTo>
+                <a:close/>
+                <a:lnTo>
+                  <a:pt x="197135" y="137997"/>
+                </a:lnTo>
+                <a:close/>
+                <a:lnTo>
+                  <a:pt x="200914" y="137202"/>
+                </a:lnTo>
+                <a:close/>
+                <a:lnTo>
+                  <a:pt x="204695" y="136419"/>
+                </a:lnTo>
+                <a:close/>
+                <a:lnTo>
+                  <a:pt x="208482" y="135639"/>
+                </a:lnTo>
+                <a:close/>
+                <a:lnTo>
+                  <a:pt x="212282" y="134855"/>
+                </a:lnTo>
+                <a:close/>
+                <a:lnTo>
+                  <a:pt x="216087" y="134071"/>
+                </a:lnTo>
+                <a:close/>
+                <a:lnTo>
+                  <a:pt x="219888" y="133294"/>
+                </a:lnTo>
+                <a:close/>
+                <a:lnTo>
+                  <a:pt x="223676" y="132529"/>
+                </a:lnTo>
+                <a:close/>
+                <a:lnTo>
+                  <a:pt x="227457" y="131767"/>
+                </a:lnTo>
+                <a:close/>
+                <a:lnTo>
+                  <a:pt x="231236" y="131002"/>
+                </a:lnTo>
+                <a:close/>
+                <a:lnTo>
+                  <a:pt x="235019" y="130235"/>
+                </a:lnTo>
+                <a:close/>
+                <a:lnTo>
+                  <a:pt x="238812" y="129476"/>
+                </a:lnTo>
+                <a:close/>
+                <a:lnTo>
+                  <a:pt x="242616" y="128729"/>
+                </a:lnTo>
+                <a:close/>
+                <a:lnTo>
+                  <a:pt x="246420" y="127985"/>
+                </a:lnTo>
+                <a:close/>
+                <a:lnTo>
+                  <a:pt x="250215" y="127239"/>
+                </a:lnTo>
+                <a:close/>
+                <a:lnTo>
+                  <a:pt x="253999" y="126490"/>
+                </a:lnTo>
+                <a:close/>
+                <a:lnTo>
+                  <a:pt x="257778" y="125749"/>
+                </a:lnTo>
+                <a:close/>
+                <a:lnTo>
+                  <a:pt x="261559" y="125020"/>
+                </a:lnTo>
+                <a:close/>
+                <a:lnTo>
+                  <a:pt x="265346" y="124294"/>
+                </a:lnTo>
+                <a:close/>
+                <a:lnTo>
+                  <a:pt x="269144" y="123566"/>
+                </a:lnTo>
+                <a:close/>
+                <a:lnTo>
+                  <a:pt x="272950" y="122836"/>
+                </a:lnTo>
+                <a:close/>
+                <a:lnTo>
+                  <a:pt x="276751" y="122113"/>
+                </a:lnTo>
+                <a:close/>
+                <a:lnTo>
+                  <a:pt x="280540" y="121400"/>
+                </a:lnTo>
+                <a:close/>
+                <a:lnTo>
+                  <a:pt x="284321" y="120693"/>
+                </a:lnTo>
+                <a:close/>
+                <a:lnTo>
+                  <a:pt x="288100" y="119986"/>
+                </a:lnTo>
+                <a:close/>
+                <a:lnTo>
+                  <a:pt x="291883" y="119277"/>
+                </a:lnTo>
+                <a:close/>
+                <a:lnTo>
+                  <a:pt x="295675" y="118565"/>
+                </a:lnTo>
+                <a:close/>
+                <a:lnTo>
+                  <a:pt x="299478" y="117852"/>
+                </a:lnTo>
+                <a:close/>
+                <a:lnTo>
+                  <a:pt x="303283" y="117143"/>
+                </a:lnTo>
+                <a:close/>
+                <a:lnTo>
+                  <a:pt x="307078" y="116445"/>
+                </a:lnTo>
+                <a:close/>
+                <a:lnTo>
+                  <a:pt x="310863" y="115754"/>
+                </a:lnTo>
+                <a:close/>
+                <a:lnTo>
+                  <a:pt x="314643" y="115064"/>
+                </a:lnTo>
+                <a:close/>
+                <a:lnTo>
+                  <a:pt x="318423" y="114371"/>
+                </a:lnTo>
+                <a:close/>
+                <a:lnTo>
+                  <a:pt x="322209" y="113679"/>
+                </a:lnTo>
+                <a:close/>
+                <a:lnTo>
+                  <a:pt x="326006" y="112997"/>
+                </a:lnTo>
+                <a:close/>
+                <a:lnTo>
+                  <a:pt x="329812" y="112324"/>
+                </a:lnTo>
+                <a:close/>
+                <a:lnTo>
+                  <a:pt x="333614" y="111654"/>
+                </a:lnTo>
+                <a:close/>
+                <a:lnTo>
+                  <a:pt x="337404" y="110982"/>
+                </a:lnTo>
+                <a:close/>
+                <a:lnTo>
+                  <a:pt x="341185" y="110308"/>
+                </a:lnTo>
+                <a:close/>
+                <a:lnTo>
+                  <a:pt x="344964" y="109634"/>
+                </a:lnTo>
+                <a:close/>
+                <a:lnTo>
+                  <a:pt x="348746" y="108961"/>
+                </a:lnTo>
+                <a:close/>
+                <a:lnTo>
+                  <a:pt x="352537" y="108288"/>
+                </a:lnTo>
+                <a:close/>
+                <a:lnTo>
+                  <a:pt x="356340" y="107612"/>
+                </a:lnTo>
+                <a:close/>
+                <a:lnTo>
+                  <a:pt x="360145" y="106939"/>
+                </a:lnTo>
+                <a:close/>
+                <a:lnTo>
+                  <a:pt x="363942" y="106272"/>
+                </a:lnTo>
+                <a:close/>
+                <a:lnTo>
+                  <a:pt x="367727" y="105614"/>
+                </a:lnTo>
+                <a:close/>
+                <a:lnTo>
+                  <a:pt x="371507" y="104967"/>
+                </a:lnTo>
+                <a:close/>
+                <a:lnTo>
+                  <a:pt x="375286" y="104331"/>
+                </a:lnTo>
+                <a:close/>
+                <a:lnTo>
+                  <a:pt x="379072" y="103696"/>
+                </a:lnTo>
+                <a:close/>
+                <a:lnTo>
+                  <a:pt x="382869" y="103050"/>
+                </a:lnTo>
+                <a:close/>
+                <a:lnTo>
+                  <a:pt x="386674" y="102394"/>
+                </a:lnTo>
+                <a:close/>
+                <a:lnTo>
+                  <a:pt x="390476" y="101738"/>
+                </a:lnTo>
+                <a:close/>
+                <a:lnTo>
+                  <a:pt x="394267" y="101091"/>
+                </a:lnTo>
+                <a:close/>
+                <a:lnTo>
+                  <a:pt x="398049" y="100457"/>
+                </a:lnTo>
+                <a:close/>
+                <a:lnTo>
+                  <a:pt x="401828" y="99835"/>
+                </a:lnTo>
+                <a:close/>
+                <a:lnTo>
+                  <a:pt x="405610" y="99219"/>
+                </a:lnTo>
+                <a:close/>
+                <a:lnTo>
+                  <a:pt x="409400" y="98598"/>
+                </a:lnTo>
+                <a:close/>
+                <a:lnTo>
+                  <a:pt x="413202" y="97963"/>
+                </a:lnTo>
+                <a:close/>
+                <a:lnTo>
+                  <a:pt x="417007" y="97324"/>
+                </a:lnTo>
+                <a:close/>
+                <a:lnTo>
+                  <a:pt x="420805" y="96692"/>
+                </a:lnTo>
+                <a:close/>
+                <a:lnTo>
+                  <a:pt x="424591" y="96073"/>
+                </a:lnTo>
+                <a:close/>
+                <a:lnTo>
+                  <a:pt x="428371" y="95459"/>
+                </a:lnTo>
+                <a:close/>
+                <a:lnTo>
+                  <a:pt x="432151" y="94841"/>
+                </a:lnTo>
+                <a:close/>
+                <a:lnTo>
+                  <a:pt x="435935" y="94222"/>
+                </a:lnTo>
+                <a:close/>
+                <a:lnTo>
+                  <a:pt x="439731" y="93603"/>
+                </a:lnTo>
+                <a:close/>
+                <a:lnTo>
+                  <a:pt x="443536" y="92985"/>
+                </a:lnTo>
+                <a:close/>
+                <a:lnTo>
+                  <a:pt x="447339" y="92366"/>
+                </a:lnTo>
+                <a:close/>
+                <a:lnTo>
+                  <a:pt x="451131" y="91744"/>
+                </a:lnTo>
+                <a:close/>
+                <a:lnTo>
+                  <a:pt x="454913" y="91125"/>
+                </a:lnTo>
+                <a:close/>
+                <a:lnTo>
+                  <a:pt x="458693" y="90514"/>
+                </a:lnTo>
+                <a:close/>
+                <a:lnTo>
+                  <a:pt x="462474" y="89913"/>
+                </a:lnTo>
+                <a:close/>
+                <a:lnTo>
+                  <a:pt x="466263" y="89315"/>
+                </a:lnTo>
+                <a:close/>
+                <a:lnTo>
+                  <a:pt x="470064" y="88716"/>
+                </a:lnTo>
+                <a:close/>
+                <a:lnTo>
+                  <a:pt x="473870" y="88115"/>
+                </a:lnTo>
+                <a:close/>
+                <a:lnTo>
+                  <a:pt x="477668" y="87514"/>
+                </a:lnTo>
+                <a:close/>
+                <a:lnTo>
+                  <a:pt x="481455" y="86915"/>
+                </a:lnTo>
+                <a:close/>
+                <a:lnTo>
+                  <a:pt x="485235" y="86314"/>
+                </a:lnTo>
+                <a:close/>
+                <a:lnTo>
+                  <a:pt x="489015" y="85710"/>
+                </a:lnTo>
+                <a:close/>
+                <a:lnTo>
+                  <a:pt x="492799" y="85109"/>
+                </a:lnTo>
+                <a:close/>
+                <a:lnTo>
+                  <a:pt x="496594" y="84516"/>
+                </a:lnTo>
+                <a:close/>
+                <a:lnTo>
+                  <a:pt x="500398" y="83932"/>
+                </a:lnTo>
+                <a:close/>
+                <a:lnTo>
+                  <a:pt x="504202" y="83353"/>
+                </a:lnTo>
+                <a:close/>
+                <a:lnTo>
+                  <a:pt x="507995" y="82772"/>
+                </a:lnTo>
+                <a:close/>
+                <a:lnTo>
+                  <a:pt x="511778" y="82189"/>
+                </a:lnTo>
+                <a:close/>
+                <a:lnTo>
+                  <a:pt x="515557" y="81607"/>
+                </a:lnTo>
+                <a:close/>
+                <a:lnTo>
+                  <a:pt x="519338" y="81026"/>
+                </a:lnTo>
+                <a:close/>
+                <a:lnTo>
+                  <a:pt x="523126" y="80443"/>
+                </a:lnTo>
+                <a:close/>
+                <a:lnTo>
+                  <a:pt x="526927" y="79857"/>
+                </a:lnTo>
+                <a:close/>
+                <a:lnTo>
+                  <a:pt x="530732" y="79273"/>
+                </a:lnTo>
+                <a:close/>
+                <a:lnTo>
+                  <a:pt x="534531" y="78700"/>
+                </a:lnTo>
+                <a:close/>
+                <a:lnTo>
+                  <a:pt x="538319" y="78138"/>
+                </a:lnTo>
+                <a:close/>
+                <a:lnTo>
+                  <a:pt x="542099" y="77574"/>
+                </a:lnTo>
+                <a:close/>
+                <a:lnTo>
+                  <a:pt x="545879" y="76996"/>
+                </a:lnTo>
+                <a:close/>
+                <a:lnTo>
+                  <a:pt x="549662" y="76411"/>
+                </a:lnTo>
+                <a:close/>
+                <a:lnTo>
+                  <a:pt x="553456" y="75832"/>
+                </a:lnTo>
+                <a:close/>
+                <a:lnTo>
+                  <a:pt x="557260" y="75267"/>
+                </a:lnTo>
+                <a:close/>
+                <a:lnTo>
+                  <a:pt x="561065" y="74706"/>
+                </a:lnTo>
+                <a:close/>
+                <a:lnTo>
+                  <a:pt x="564858" y="74141"/>
+                </a:lnTo>
+                <a:close/>
+                <a:lnTo>
+                  <a:pt x="568642" y="73574"/>
+                </a:lnTo>
+                <a:close/>
+                <a:lnTo>
+                  <a:pt x="572421" y="73017"/>
+                </a:lnTo>
+                <a:close/>
+                <a:lnTo>
+                  <a:pt x="576201" y="72473"/>
+                </a:lnTo>
+                <a:close/>
+                <a:lnTo>
+                  <a:pt x="579989" y="71929"/>
+                </a:lnTo>
+                <a:close/>
+                <a:lnTo>
+                  <a:pt x="583789" y="71370"/>
+                </a:lnTo>
+                <a:close/>
+                <a:lnTo>
+                  <a:pt x="587594" y="70803"/>
+                </a:lnTo>
+                <a:close/>
+                <a:lnTo>
+                  <a:pt x="591394" y="70241"/>
+                </a:lnTo>
+                <a:close/>
+                <a:lnTo>
+                  <a:pt x="595183" y="69693"/>
+                </a:lnTo>
+                <a:close/>
+                <a:lnTo>
+                  <a:pt x="598964" y="69150"/>
+                </a:lnTo>
+                <a:close/>
+                <a:lnTo>
+                  <a:pt x="602743" y="68607"/>
+                </a:lnTo>
+                <a:close/>
+                <a:lnTo>
+                  <a:pt x="606526" y="68061"/>
+                </a:lnTo>
+                <a:close/>
+                <a:lnTo>
+                  <a:pt x="610319" y="67514"/>
+                </a:lnTo>
+                <a:close/>
+                <a:lnTo>
+                  <a:pt x="614123" y="66967"/>
+                </a:lnTo>
+                <a:close/>
+                <a:lnTo>
+                  <a:pt x="617927" y="66422"/>
+                </a:lnTo>
+                <a:close/>
+                <a:lnTo>
+                  <a:pt x="621722" y="65877"/>
+                </a:lnTo>
+                <a:close/>
+                <a:lnTo>
+                  <a:pt x="625506" y="65331"/>
+                </a:lnTo>
+                <a:close/>
+                <a:lnTo>
+                  <a:pt x="629285" y="64784"/>
+                </a:lnTo>
+                <a:close/>
+                <a:lnTo>
+                  <a:pt x="633065" y="64235"/>
+                </a:lnTo>
+                <a:close/>
+                <a:lnTo>
+                  <a:pt x="636852" y="63691"/>
+                </a:lnTo>
+                <a:close/>
+                <a:lnTo>
+                  <a:pt x="640651" y="63155"/>
+                </a:lnTo>
+                <a:close/>
+                <a:lnTo>
+                  <a:pt x="644457" y="62627"/>
+                </a:lnTo>
+                <a:close/>
+                <a:lnTo>
+                  <a:pt x="648258" y="62104"/>
+                </a:lnTo>
+                <a:close/>
+                <a:lnTo>
+                  <a:pt x="652047" y="61581"/>
+                </a:lnTo>
+                <a:close/>
+                <a:lnTo>
+                  <a:pt x="655828" y="61052"/>
+                </a:lnTo>
+                <a:close/>
+                <a:lnTo>
+                  <a:pt x="659607" y="60510"/>
+                </a:lnTo>
+                <a:close/>
+                <a:lnTo>
+                  <a:pt x="663389" y="59962"/>
+                </a:lnTo>
+                <a:close/>
+                <a:lnTo>
+                  <a:pt x="667182" y="59418"/>
+                </a:lnTo>
+                <a:close/>
+                <a:lnTo>
+                  <a:pt x="670985" y="58887"/>
+                </a:lnTo>
+                <a:close/>
+                <a:lnTo>
+                  <a:pt x="674790" y="58362"/>
+                </a:lnTo>
+                <a:close/>
+                <a:lnTo>
+                  <a:pt x="678585" y="57837"/>
+                </a:lnTo>
+                <a:close/>
+                <a:lnTo>
+                  <a:pt x="682370" y="57310"/>
+                </a:lnTo>
+                <a:close/>
+                <a:lnTo>
+                  <a:pt x="686149" y="56781"/>
+                </a:lnTo>
+                <a:close/>
+                <a:lnTo>
+                  <a:pt x="689929" y="56252"/>
+                </a:lnTo>
+                <a:close/>
+                <a:lnTo>
+                  <a:pt x="693716" y="55725"/>
+                </a:lnTo>
+                <a:close/>
+                <a:lnTo>
+                  <a:pt x="697513" y="55198"/>
+                </a:lnTo>
+                <a:close/>
+                <a:lnTo>
+                  <a:pt x="701319" y="54671"/>
+                </a:lnTo>
+                <a:close/>
+                <a:lnTo>
+                  <a:pt x="705120" y="54142"/>
+                </a:lnTo>
+                <a:close/>
+                <a:lnTo>
+                  <a:pt x="708910" y="53610"/>
+                </a:lnTo>
+                <a:close/>
+                <a:lnTo>
+                  <a:pt x="712692" y="53083"/>
+                </a:lnTo>
+                <a:close/>
+                <a:lnTo>
+                  <a:pt x="716471" y="52568"/>
+                </a:lnTo>
+                <a:close/>
+                <a:lnTo>
+                  <a:pt x="720253" y="52062"/>
+                </a:lnTo>
+                <a:close/>
+                <a:lnTo>
+                  <a:pt x="724044" y="51550"/>
+                </a:lnTo>
+                <a:close/>
+                <a:lnTo>
+                  <a:pt x="727847" y="51024"/>
+                </a:lnTo>
+                <a:close/>
+                <a:lnTo>
+                  <a:pt x="731652" y="50493"/>
+                </a:lnTo>
+                <a:close/>
+                <a:lnTo>
+                  <a:pt x="735449" y="49972"/>
+                </a:lnTo>
+                <a:close/>
+                <a:lnTo>
+                  <a:pt x="739234" y="49463"/>
+                </a:lnTo>
+                <a:close/>
+                <a:lnTo>
+                  <a:pt x="743014" y="48957"/>
+                </a:lnTo>
+                <a:close/>
+                <a:lnTo>
+                  <a:pt x="746793" y="48449"/>
+                </a:lnTo>
+                <a:close/>
+                <a:lnTo>
+                  <a:pt x="750579" y="47939"/>
+                </a:lnTo>
+                <a:close/>
+                <a:lnTo>
+                  <a:pt x="754376" y="47428"/>
+                </a:lnTo>
+                <a:close/>
+                <a:lnTo>
+                  <a:pt x="758181" y="46919"/>
+                </a:lnTo>
+                <a:close/>
+                <a:lnTo>
+                  <a:pt x="761983" y="46410"/>
+                </a:lnTo>
+                <a:close/>
+                <a:lnTo>
+                  <a:pt x="765774" y="45900"/>
+                </a:lnTo>
+                <a:close/>
+                <a:lnTo>
+                  <a:pt x="769556" y="45391"/>
+                </a:lnTo>
+                <a:close/>
+                <a:lnTo>
+                  <a:pt x="773335" y="44881"/>
+                </a:lnTo>
+                <a:close/>
+                <a:lnTo>
+                  <a:pt x="777117" y="44371"/>
+                </a:lnTo>
+                <a:close/>
+                <a:lnTo>
+                  <a:pt x="780907" y="43862"/>
+                </a:lnTo>
+                <a:close/>
+                <a:lnTo>
+                  <a:pt x="784709" y="43354"/>
+                </a:lnTo>
+                <a:close/>
+                <a:lnTo>
+                  <a:pt x="788514" y="42844"/>
+                </a:lnTo>
+                <a:close/>
+                <a:lnTo>
+                  <a:pt x="792312" y="42332"/>
+                </a:lnTo>
+                <a:close/>
+                <a:lnTo>
+                  <a:pt x="796098" y="41819"/>
+                </a:lnTo>
+                <a:close/>
+                <a:lnTo>
+                  <a:pt x="799878" y="41314"/>
+                </a:lnTo>
+                <a:close/>
+                <a:lnTo>
+                  <a:pt x="803657" y="40822"/>
+                </a:lnTo>
+                <a:close/>
+                <a:lnTo>
+                  <a:pt x="807442" y="40334"/>
+                </a:lnTo>
+                <a:close/>
+                <a:lnTo>
+                  <a:pt x="811238" y="39834"/>
+                </a:lnTo>
+                <a:close/>
+                <a:lnTo>
+                  <a:pt x="815043" y="39323"/>
+                </a:lnTo>
+                <a:close/>
+                <a:lnTo>
+                  <a:pt x="818846" y="38813"/>
+                </a:lnTo>
+                <a:close/>
+                <a:lnTo>
+                  <a:pt x="822638" y="38315"/>
+                </a:lnTo>
+                <a:close/>
+                <a:lnTo>
+                  <a:pt x="826420" y="37826"/>
+                </a:lnTo>
+                <a:close/>
+                <a:lnTo>
+                  <a:pt x="830199" y="37339"/>
+                </a:lnTo>
+                <a:close/>
+                <a:lnTo>
+                  <a:pt x="833981" y="36847"/>
+                </a:lnTo>
+                <a:close/>
+                <a:lnTo>
+                  <a:pt x="837770" y="36355"/>
+                </a:lnTo>
+                <a:close/>
+                <a:lnTo>
+                  <a:pt x="841571" y="35863"/>
+                </a:lnTo>
+                <a:close/>
+                <a:lnTo>
+                  <a:pt x="845377" y="35372"/>
+                </a:lnTo>
+                <a:close/>
+                <a:lnTo>
+                  <a:pt x="849175" y="34881"/>
+                </a:lnTo>
+                <a:close/>
+                <a:lnTo>
+                  <a:pt x="852962" y="34389"/>
+                </a:lnTo>
+                <a:close/>
+                <a:lnTo>
+                  <a:pt x="856742" y="33898"/>
+                </a:lnTo>
+                <a:close/>
+                <a:lnTo>
+                  <a:pt x="860521" y="33408"/>
+                </a:lnTo>
+                <a:close/>
+                <a:lnTo>
+                  <a:pt x="864306" y="32917"/>
+                </a:lnTo>
+                <a:close/>
+                <a:lnTo>
+                  <a:pt x="868101" y="32423"/>
+                </a:lnTo>
+                <a:close/>
+                <a:lnTo>
+                  <a:pt x="871905" y="31928"/>
+                </a:lnTo>
+                <a:close/>
+                <a:lnTo>
+                  <a:pt x="875709" y="31440"/>
+                </a:lnTo>
+                <a:close/>
+                <a:lnTo>
+                  <a:pt x="879501" y="30965"/>
+                </a:lnTo>
+                <a:close/>
+                <a:lnTo>
+                  <a:pt x="883284" y="30495"/>
+                </a:lnTo>
+                <a:close/>
+                <a:lnTo>
+                  <a:pt x="887063" y="30016"/>
+                </a:lnTo>
+                <a:close/>
+                <a:lnTo>
+                  <a:pt x="890844" y="29524"/>
+                </a:lnTo>
+                <a:close/>
+                <a:lnTo>
+                  <a:pt x="894633" y="29030"/>
+                </a:lnTo>
+                <a:close/>
+                <a:lnTo>
+                  <a:pt x="898434" y="28549"/>
+                </a:lnTo>
+                <a:close/>
+                <a:lnTo>
+                  <a:pt x="902239" y="28077"/>
+                </a:lnTo>
+                <a:close/>
+                <a:lnTo>
+                  <a:pt x="906038" y="27610"/>
+                </a:lnTo>
+                <a:close/>
+                <a:lnTo>
+                  <a:pt x="909826" y="27141"/>
+                </a:lnTo>
+                <a:close/>
+                <a:lnTo>
+                  <a:pt x="913606" y="26665"/>
+                </a:lnTo>
+                <a:close/>
+                <a:lnTo>
+                  <a:pt x="917385" y="26176"/>
+                </a:lnTo>
+                <a:close/>
+                <a:lnTo>
+                  <a:pt x="921169" y="25682"/>
+                </a:lnTo>
+                <a:close/>
+                <a:lnTo>
+                  <a:pt x="924963" y="25195"/>
+                </a:lnTo>
+                <a:close/>
+                <a:lnTo>
+                  <a:pt x="928767" y="24720"/>
+                </a:lnTo>
+                <a:close/>
+                <a:lnTo>
+                  <a:pt x="932571" y="24250"/>
+                </a:lnTo>
+                <a:close/>
+                <a:lnTo>
+                  <a:pt x="936365" y="23779"/>
+                </a:lnTo>
+                <a:close/>
+                <a:lnTo>
+                  <a:pt x="940148" y="23306"/>
+                </a:lnTo>
+                <a:close/>
+                <a:lnTo>
+                  <a:pt x="943928" y="22832"/>
+                </a:lnTo>
+                <a:close/>
+                <a:lnTo>
+                  <a:pt x="947708" y="22358"/>
+                </a:lnTo>
+                <a:close/>
+                <a:lnTo>
+                  <a:pt x="951496" y="21886"/>
+                </a:lnTo>
+                <a:close/>
+                <a:lnTo>
+                  <a:pt x="955296" y="21412"/>
+                </a:lnTo>
+                <a:close/>
+                <a:lnTo>
+                  <a:pt x="959101" y="20939"/>
+                </a:lnTo>
+                <a:close/>
+                <a:lnTo>
+                  <a:pt x="962901" y="20466"/>
+                </a:lnTo>
+                <a:close/>
+                <a:lnTo>
+                  <a:pt x="966690" y="19994"/>
+                </a:lnTo>
+                <a:close/>
+                <a:lnTo>
+                  <a:pt x="970470" y="19521"/>
+                </a:lnTo>
+                <a:close/>
+                <a:lnTo>
+                  <a:pt x="974249" y="19044"/>
+                </a:lnTo>
+                <a:close/>
+                <a:lnTo>
+                  <a:pt x="978033" y="18569"/>
+                </a:lnTo>
+                <a:close/>
+                <a:lnTo>
+                  <a:pt x="981826" y="18104"/>
+                </a:lnTo>
+                <a:close/>
+                <a:lnTo>
+                  <a:pt x="985630" y="17651"/>
+                </a:lnTo>
+                <a:close/>
+                <a:lnTo>
+                  <a:pt x="989434" y="17197"/>
+                </a:lnTo>
+                <a:close/>
+                <a:lnTo>
+                  <a:pt x="993229" y="16729"/>
+                </a:lnTo>
+                <a:close/>
+                <a:lnTo>
+                  <a:pt x="997013" y="16252"/>
+                </a:lnTo>
+                <a:close/>
+                <a:lnTo>
+                  <a:pt x="1000792" y="15783"/>
+                </a:lnTo>
+                <a:close/>
+                <a:lnTo>
+                  <a:pt x="1004572" y="15329"/>
+                </a:lnTo>
+                <a:close/>
+                <a:lnTo>
+                  <a:pt x="1008359" y="14876"/>
+                </a:lnTo>
+                <a:close/>
+                <a:lnTo>
+                  <a:pt x="1012158" y="14410"/>
+                </a:lnTo>
+                <a:close/>
+                <a:lnTo>
+                  <a:pt x="1015964" y="13934"/>
+                </a:lnTo>
+                <a:close/>
+                <a:lnTo>
+                  <a:pt x="1019764" y="13462"/>
+                </a:lnTo>
+                <a:close/>
+                <a:lnTo>
+                  <a:pt x="1023553" y="13004"/>
+                </a:lnTo>
+                <a:close/>
+                <a:lnTo>
+                  <a:pt x="1027335" y="12553"/>
+                </a:lnTo>
+                <a:close/>
+                <a:lnTo>
+                  <a:pt x="1031114" y="12100"/>
+                </a:lnTo>
+                <a:close/>
+                <a:lnTo>
+                  <a:pt x="1034896" y="11645"/>
+                </a:lnTo>
+                <a:close/>
+                <a:lnTo>
+                  <a:pt x="1038688" y="11189"/>
+                </a:lnTo>
+                <a:close/>
+                <a:lnTo>
+                  <a:pt x="1042492" y="10734"/>
+                </a:lnTo>
+                <a:close/>
+                <a:lnTo>
+                  <a:pt x="1046297" y="10280"/>
+                </a:lnTo>
+                <a:close/>
+                <a:lnTo>
+                  <a:pt x="1050092" y="9825"/>
+                </a:lnTo>
+                <a:close/>
+                <a:lnTo>
+                  <a:pt x="1053877" y="9369"/>
+                </a:lnTo>
+                <a:close/>
+                <a:lnTo>
+                  <a:pt x="1057656" y="8915"/>
+                </a:lnTo>
+                <a:close/>
+                <a:lnTo>
+                  <a:pt x="1061436" y="8461"/>
+                </a:lnTo>
+                <a:close/>
+                <a:lnTo>
+                  <a:pt x="1065222" y="8006"/>
+                </a:lnTo>
+                <a:close/>
+                <a:lnTo>
+                  <a:pt x="1069020" y="7548"/>
+                </a:lnTo>
+                <a:close/>
+                <a:lnTo>
+                  <a:pt x="1072826" y="7090"/>
+                </a:lnTo>
+                <a:close/>
+                <a:lnTo>
+                  <a:pt x="1076627" y="6641"/>
+                </a:lnTo>
+                <a:close/>
+                <a:lnTo>
+                  <a:pt x="1080417" y="6206"/>
+                </a:lnTo>
+                <a:close/>
+                <a:lnTo>
+                  <a:pt x="1084199" y="5771"/>
+                </a:lnTo>
+                <a:close/>
+                <a:lnTo>
+                  <a:pt x="1087978" y="5323"/>
+                </a:lnTo>
+                <a:close/>
+                <a:lnTo>
+                  <a:pt x="1091760" y="4865"/>
+                </a:lnTo>
+                <a:close/>
+                <a:lnTo>
+                  <a:pt x="1095551" y="4412"/>
+                </a:lnTo>
+                <a:close/>
+                <a:lnTo>
+                  <a:pt x="1099354" y="3975"/>
+                </a:lnTo>
+                <a:close/>
+                <a:lnTo>
+                  <a:pt x="1103159" y="3541"/>
+                </a:lnTo>
+                <a:close/>
+                <a:lnTo>
+                  <a:pt x="1106955" y="3095"/>
+                </a:lnTo>
+                <a:close/>
+                <a:lnTo>
+                  <a:pt x="1110740" y="2638"/>
+                </a:lnTo>
+                <a:close/>
+                <a:lnTo>
+                  <a:pt x="1114520" y="2183"/>
+                </a:lnTo>
+                <a:close/>
+                <a:lnTo>
+                  <a:pt x="1118302" y="1740"/>
+                </a:lnTo>
+                <a:close/>
+                <a:lnTo>
+                  <a:pt x="1122088" y="1307"/>
+                </a:lnTo>
+                <a:close/>
+                <a:lnTo>
+                  <a:pt x="1125879" y="876"/>
+                </a:lnTo>
+                <a:close/>
+                <a:lnTo>
+                  <a:pt x="1129680" y="443"/>
+                </a:lnTo>
+                <a:close/>
+                <a:lnTo>
+                  <a:pt x="1133490" y="0"/>
                 </a:lnTo>
                 <a:close/>
               </a:path>
@@ -4389,7 +4389,7 @@
           </a:custGeom>
           <a:ln w="31750">
             <a:solidFill>
-              <a:srgbClr val="00E5FF"/>
+              <a:srgbClr val="FFFFFF"/>
             </a:solidFill>
           </a:ln>
         </p:spPr>
@@ -4415,16 +4415,1265 @@
           </a:p>
         </p:txBody>
       </p:sp>
+      <p:sp>
+        <p:nvSpPr>
+          <p:cNvPr id="5" name="Freeform 4"/>
+          <p:cNvSpPr/>
+          <p:nvPr/>
+        </p:nvSpPr>
+        <p:spPr>
+          <a:xfrm>
+            <a:off x="5717286" y="2067868"/>
+            <a:ext cx="684856" cy="74663"/>
+          </a:xfrm>
+          <a:custGeom>
+            <a:avLst/>
+            <a:gdLst/>
+            <a:ahLst/>
+            <a:cxnLst/>
+            <a:rect l="l" t="t" r="r" b="b"/>
+            <a:pathLst>
+              <a:path w="684856" h="74663">
+                <a:moveTo>
+                  <a:pt x="0" y="74663"/>
+                </a:moveTo>
+                <a:lnTo>
+                  <a:pt x="2324" y="74364"/>
+                </a:lnTo>
+                <a:close/>
+                <a:lnTo>
+                  <a:pt x="4648" y="74065"/>
+                </a:lnTo>
+                <a:close/>
+                <a:lnTo>
+                  <a:pt x="6973" y="73767"/>
+                </a:lnTo>
+                <a:close/>
+                <a:lnTo>
+                  <a:pt x="9297" y="73469"/>
+                </a:lnTo>
+                <a:close/>
+                <a:lnTo>
+                  <a:pt x="11621" y="73171"/>
+                </a:lnTo>
+                <a:close/>
+                <a:lnTo>
+                  <a:pt x="13945" y="72874"/>
+                </a:lnTo>
+                <a:close/>
+                <a:lnTo>
+                  <a:pt x="16270" y="72576"/>
+                </a:lnTo>
+                <a:close/>
+                <a:lnTo>
+                  <a:pt x="18594" y="72278"/>
+                </a:lnTo>
+                <a:close/>
+                <a:lnTo>
+                  <a:pt x="20918" y="71980"/>
+                </a:lnTo>
+                <a:close/>
+                <a:lnTo>
+                  <a:pt x="23242" y="71682"/>
+                </a:lnTo>
+                <a:close/>
+                <a:lnTo>
+                  <a:pt x="25567" y="71384"/>
+                </a:lnTo>
+                <a:close/>
+                <a:lnTo>
+                  <a:pt x="27891" y="71085"/>
+                </a:lnTo>
+                <a:close/>
+                <a:lnTo>
+                  <a:pt x="30215" y="70785"/>
+                </a:lnTo>
+                <a:close/>
+                <a:lnTo>
+                  <a:pt x="32539" y="70485"/>
+                </a:lnTo>
+                <a:close/>
+                <a:lnTo>
+                  <a:pt x="34863" y="70186"/>
+                </a:lnTo>
+                <a:close/>
+                <a:lnTo>
+                  <a:pt x="37188" y="69888"/>
+                </a:lnTo>
+                <a:close/>
+                <a:lnTo>
+                  <a:pt x="39512" y="69591"/>
+                </a:lnTo>
+                <a:close/>
+                <a:lnTo>
+                  <a:pt x="41836" y="69296"/>
+                </a:lnTo>
+                <a:close/>
+                <a:lnTo>
+                  <a:pt x="44160" y="69003"/>
+                </a:lnTo>
+                <a:close/>
+                <a:lnTo>
+                  <a:pt x="46485" y="68711"/>
+                </a:lnTo>
+                <a:close/>
+                <a:lnTo>
+                  <a:pt x="48809" y="68421"/>
+                </a:lnTo>
+                <a:close/>
+                <a:lnTo>
+                  <a:pt x="51133" y="68131"/>
+                </a:lnTo>
+                <a:close/>
+                <a:lnTo>
+                  <a:pt x="53457" y="67842"/>
+                </a:lnTo>
+                <a:close/>
+                <a:lnTo>
+                  <a:pt x="55781" y="67553"/>
+                </a:lnTo>
+                <a:close/>
+                <a:lnTo>
+                  <a:pt x="58106" y="67263"/>
+                </a:lnTo>
+                <a:close/>
+                <a:lnTo>
+                  <a:pt x="60430" y="66973"/>
+                </a:lnTo>
+                <a:close/>
+                <a:lnTo>
+                  <a:pt x="62754" y="66682"/>
+                </a:lnTo>
+                <a:close/>
+                <a:lnTo>
+                  <a:pt x="65078" y="66391"/>
+                </a:lnTo>
+                <a:close/>
+                <a:lnTo>
+                  <a:pt x="67403" y="66100"/>
+                </a:lnTo>
+                <a:close/>
+                <a:lnTo>
+                  <a:pt x="69727" y="65810"/>
+                </a:lnTo>
+                <a:close/>
+                <a:lnTo>
+                  <a:pt x="72051" y="65519"/>
+                </a:lnTo>
+                <a:close/>
+                <a:lnTo>
+                  <a:pt x="74375" y="65229"/>
+                </a:lnTo>
+                <a:close/>
+                <a:lnTo>
+                  <a:pt x="76700" y="64939"/>
+                </a:lnTo>
+                <a:close/>
+                <a:lnTo>
+                  <a:pt x="79024" y="64648"/>
+                </a:lnTo>
+                <a:close/>
+                <a:lnTo>
+                  <a:pt x="81348" y="64358"/>
+                </a:lnTo>
+                <a:close/>
+                <a:lnTo>
+                  <a:pt x="83672" y="64066"/>
+                </a:lnTo>
+                <a:close/>
+                <a:lnTo>
+                  <a:pt x="85996" y="63775"/>
+                </a:lnTo>
+                <a:close/>
+                <a:lnTo>
+                  <a:pt x="88321" y="63483"/>
+                </a:lnTo>
+                <a:close/>
+                <a:lnTo>
+                  <a:pt x="90645" y="63191"/>
+                </a:lnTo>
+                <a:close/>
+                <a:lnTo>
+                  <a:pt x="92969" y="62901"/>
+                </a:lnTo>
+                <a:close/>
+                <a:lnTo>
+                  <a:pt x="95293" y="62611"/>
+                </a:lnTo>
+                <a:close/>
+                <a:lnTo>
+                  <a:pt x="97618" y="62324"/>
+                </a:lnTo>
+                <a:close/>
+                <a:lnTo>
+                  <a:pt x="99942" y="62038"/>
+                </a:lnTo>
+                <a:close/>
+                <a:lnTo>
+                  <a:pt x="102266" y="61754"/>
+                </a:lnTo>
+                <a:close/>
+                <a:lnTo>
+                  <a:pt x="104590" y="61472"/>
+                </a:lnTo>
+                <a:close/>
+                <a:lnTo>
+                  <a:pt x="106914" y="61190"/>
+                </a:lnTo>
+                <a:close/>
+                <a:lnTo>
+                  <a:pt x="109239" y="60909"/>
+                </a:lnTo>
+                <a:close/>
+                <a:lnTo>
+                  <a:pt x="111563" y="60627"/>
+                </a:lnTo>
+                <a:close/>
+                <a:lnTo>
+                  <a:pt x="113887" y="60346"/>
+                </a:lnTo>
+                <a:close/>
+                <a:lnTo>
+                  <a:pt x="116211" y="60063"/>
+                </a:lnTo>
+                <a:close/>
+                <a:lnTo>
+                  <a:pt x="118536" y="59781"/>
+                </a:lnTo>
+                <a:close/>
+                <a:lnTo>
+                  <a:pt x="120860" y="59498"/>
+                </a:lnTo>
+                <a:close/>
+                <a:lnTo>
+                  <a:pt x="123184" y="59214"/>
+                </a:lnTo>
+                <a:close/>
+                <a:lnTo>
+                  <a:pt x="125508" y="58929"/>
+                </a:lnTo>
+                <a:close/>
+                <a:lnTo>
+                  <a:pt x="127833" y="58645"/>
+                </a:lnTo>
+                <a:close/>
+                <a:lnTo>
+                  <a:pt x="130157" y="58360"/>
+                </a:lnTo>
+                <a:close/>
+                <a:lnTo>
+                  <a:pt x="132481" y="58075"/>
+                </a:lnTo>
+                <a:close/>
+                <a:lnTo>
+                  <a:pt x="134805" y="57793"/>
+                </a:lnTo>
+                <a:close/>
+                <a:lnTo>
+                  <a:pt x="137129" y="57512"/>
+                </a:lnTo>
+                <a:close/>
+                <a:lnTo>
+                  <a:pt x="139454" y="57234"/>
+                </a:lnTo>
+                <a:close/>
+                <a:lnTo>
+                  <a:pt x="141778" y="56958"/>
+                </a:lnTo>
+                <a:close/>
+                <a:lnTo>
+                  <a:pt x="144102" y="56684"/>
+                </a:lnTo>
+                <a:close/>
+                <a:lnTo>
+                  <a:pt x="146426" y="56411"/>
+                </a:lnTo>
+                <a:close/>
+                <a:lnTo>
+                  <a:pt x="148751" y="56137"/>
+                </a:lnTo>
+                <a:close/>
+                <a:lnTo>
+                  <a:pt x="151075" y="55861"/>
+                </a:lnTo>
+                <a:close/>
+                <a:lnTo>
+                  <a:pt x="153399" y="55581"/>
+                </a:lnTo>
+                <a:close/>
+                <a:lnTo>
+                  <a:pt x="155723" y="55298"/>
+                </a:lnTo>
+                <a:close/>
+                <a:lnTo>
+                  <a:pt x="158047" y="55013"/>
+                </a:lnTo>
+                <a:close/>
+                <a:lnTo>
+                  <a:pt x="160372" y="54728"/>
+                </a:lnTo>
+                <a:close/>
+                <a:lnTo>
+                  <a:pt x="162696" y="54444"/>
+                </a:lnTo>
+                <a:close/>
+                <a:lnTo>
+                  <a:pt x="165020" y="54162"/>
+                </a:lnTo>
+                <a:close/>
+                <a:lnTo>
+                  <a:pt x="167344" y="53886"/>
+                </a:lnTo>
+                <a:close/>
+                <a:lnTo>
+                  <a:pt x="169669" y="53614"/>
+                </a:lnTo>
+                <a:close/>
+                <a:lnTo>
+                  <a:pt x="171993" y="53347"/>
+                </a:lnTo>
+                <a:close/>
+                <a:lnTo>
+                  <a:pt x="174317" y="53081"/>
+                </a:lnTo>
+                <a:close/>
+                <a:lnTo>
+                  <a:pt x="176641" y="52816"/>
+                </a:lnTo>
+                <a:close/>
+                <a:lnTo>
+                  <a:pt x="178966" y="52550"/>
+                </a:lnTo>
+                <a:close/>
+                <a:lnTo>
+                  <a:pt x="181290" y="52281"/>
+                </a:lnTo>
+                <a:close/>
+                <a:lnTo>
+                  <a:pt x="183614" y="52008"/>
+                </a:lnTo>
+                <a:close/>
+                <a:lnTo>
+                  <a:pt x="185938" y="51733"/>
+                </a:lnTo>
+                <a:close/>
+                <a:lnTo>
+                  <a:pt x="188262" y="51456"/>
+                </a:lnTo>
+                <a:close/>
+                <a:lnTo>
+                  <a:pt x="190587" y="51179"/>
+                </a:lnTo>
+                <a:close/>
+                <a:lnTo>
+                  <a:pt x="192911" y="50903"/>
+                </a:lnTo>
+                <a:close/>
+                <a:lnTo>
+                  <a:pt x="195235" y="50629"/>
+                </a:lnTo>
+                <a:close/>
+                <a:lnTo>
+                  <a:pt x="197559" y="50358"/>
+                </a:lnTo>
+                <a:close/>
+                <a:lnTo>
+                  <a:pt x="199884" y="50089"/>
+                </a:lnTo>
+                <a:close/>
+                <a:lnTo>
+                  <a:pt x="202208" y="49823"/>
+                </a:lnTo>
+                <a:close/>
+                <a:lnTo>
+                  <a:pt x="204532" y="49557"/>
+                </a:lnTo>
+                <a:close/>
+                <a:lnTo>
+                  <a:pt x="206856" y="49291"/>
+                </a:lnTo>
+                <a:close/>
+                <a:lnTo>
+                  <a:pt x="209180" y="49025"/>
+                </a:lnTo>
+                <a:close/>
+                <a:lnTo>
+                  <a:pt x="211505" y="48759"/>
+                </a:lnTo>
+                <a:close/>
+                <a:lnTo>
+                  <a:pt x="213829" y="48492"/>
+                </a:lnTo>
+                <a:close/>
+                <a:lnTo>
+                  <a:pt x="216153" y="48224"/>
+                </a:lnTo>
+                <a:close/>
+                <a:lnTo>
+                  <a:pt x="218477" y="47956"/>
+                </a:lnTo>
+                <a:close/>
+                <a:lnTo>
+                  <a:pt x="220802" y="47688"/>
+                </a:lnTo>
+                <a:close/>
+                <a:lnTo>
+                  <a:pt x="223126" y="47419"/>
+                </a:lnTo>
+                <a:close/>
+                <a:lnTo>
+                  <a:pt x="225450" y="47150"/>
+                </a:lnTo>
+                <a:close/>
+                <a:lnTo>
+                  <a:pt x="227774" y="46881"/>
+                </a:lnTo>
+                <a:close/>
+                <a:lnTo>
+                  <a:pt x="230099" y="46612"/>
+                </a:lnTo>
+                <a:close/>
+                <a:lnTo>
+                  <a:pt x="232423" y="46345"/>
+                </a:lnTo>
+                <a:close/>
+                <a:lnTo>
+                  <a:pt x="234747" y="46079"/>
+                </a:lnTo>
+                <a:close/>
+                <a:lnTo>
+                  <a:pt x="237071" y="45815"/>
+                </a:lnTo>
+                <a:close/>
+                <a:lnTo>
+                  <a:pt x="239395" y="45553"/>
+                </a:lnTo>
+                <a:close/>
+                <a:lnTo>
+                  <a:pt x="241720" y="45293"/>
+                </a:lnTo>
+                <a:close/>
+                <a:lnTo>
+                  <a:pt x="244044" y="45033"/>
+                </a:lnTo>
+                <a:close/>
+                <a:lnTo>
+                  <a:pt x="246368" y="44775"/>
+                </a:lnTo>
+                <a:close/>
+                <a:lnTo>
+                  <a:pt x="248692" y="44516"/>
+                </a:lnTo>
+                <a:close/>
+                <a:lnTo>
+                  <a:pt x="251017" y="44257"/>
+                </a:lnTo>
+                <a:close/>
+                <a:lnTo>
+                  <a:pt x="253341" y="43997"/>
+                </a:lnTo>
+                <a:close/>
+                <a:lnTo>
+                  <a:pt x="255665" y="43738"/>
+                </a:lnTo>
+                <a:close/>
+                <a:lnTo>
+                  <a:pt x="257989" y="43477"/>
+                </a:lnTo>
+                <a:close/>
+                <a:lnTo>
+                  <a:pt x="260313" y="43217"/>
+                </a:lnTo>
+                <a:close/>
+                <a:lnTo>
+                  <a:pt x="262638" y="42957"/>
+                </a:lnTo>
+                <a:close/>
+                <a:lnTo>
+                  <a:pt x="264962" y="42697"/>
+                </a:lnTo>
+                <a:close/>
+                <a:lnTo>
+                  <a:pt x="267286" y="42437"/>
+                </a:lnTo>
+                <a:close/>
+                <a:lnTo>
+                  <a:pt x="269610" y="42178"/>
+                </a:lnTo>
+                <a:close/>
+                <a:lnTo>
+                  <a:pt x="271935" y="41918"/>
+                </a:lnTo>
+                <a:close/>
+                <a:lnTo>
+                  <a:pt x="274259" y="41658"/>
+                </a:lnTo>
+                <a:close/>
+                <a:lnTo>
+                  <a:pt x="276583" y="41398"/>
+                </a:lnTo>
+                <a:close/>
+                <a:lnTo>
+                  <a:pt x="278907" y="41137"/>
+                </a:lnTo>
+                <a:close/>
+                <a:lnTo>
+                  <a:pt x="281232" y="40876"/>
+                </a:lnTo>
+                <a:close/>
+                <a:lnTo>
+                  <a:pt x="283556" y="40614"/>
+                </a:lnTo>
+                <a:close/>
+                <a:lnTo>
+                  <a:pt x="285880" y="40354"/>
+                </a:lnTo>
+                <a:close/>
+                <a:lnTo>
+                  <a:pt x="288204" y="40094"/>
+                </a:lnTo>
+                <a:close/>
+                <a:lnTo>
+                  <a:pt x="290528" y="39836"/>
+                </a:lnTo>
+                <a:close/>
+                <a:lnTo>
+                  <a:pt x="292853" y="39579"/>
+                </a:lnTo>
+                <a:close/>
+                <a:lnTo>
+                  <a:pt x="295177" y="39325"/>
+                </a:lnTo>
+                <a:close/>
+                <a:lnTo>
+                  <a:pt x="297501" y="39072"/>
+                </a:lnTo>
+                <a:close/>
+                <a:lnTo>
+                  <a:pt x="299825" y="38821"/>
+                </a:lnTo>
+                <a:close/>
+                <a:lnTo>
+                  <a:pt x="302150" y="38570"/>
+                </a:lnTo>
+                <a:close/>
+                <a:lnTo>
+                  <a:pt x="304474" y="38319"/>
+                </a:lnTo>
+                <a:close/>
+                <a:lnTo>
+                  <a:pt x="306798" y="38067"/>
+                </a:lnTo>
+                <a:close/>
+                <a:lnTo>
+                  <a:pt x="309122" y="37816"/>
+                </a:lnTo>
+                <a:close/>
+                <a:lnTo>
+                  <a:pt x="311446" y="37564"/>
+                </a:lnTo>
+                <a:close/>
+                <a:lnTo>
+                  <a:pt x="313771" y="37311"/>
+                </a:lnTo>
+                <a:close/>
+                <a:lnTo>
+                  <a:pt x="316095" y="37058"/>
+                </a:lnTo>
+                <a:close/>
+                <a:lnTo>
+                  <a:pt x="318419" y="36806"/>
+                </a:lnTo>
+                <a:close/>
+                <a:lnTo>
+                  <a:pt x="320743" y="36553"/>
+                </a:lnTo>
+                <a:close/>
+                <a:lnTo>
+                  <a:pt x="323068" y="36301"/>
+                </a:lnTo>
+                <a:close/>
+                <a:lnTo>
+                  <a:pt x="325392" y="36048"/>
+                </a:lnTo>
+                <a:close/>
+                <a:lnTo>
+                  <a:pt x="327716" y="35796"/>
+                </a:lnTo>
+                <a:close/>
+                <a:lnTo>
+                  <a:pt x="330040" y="35544"/>
+                </a:lnTo>
+                <a:close/>
+                <a:lnTo>
+                  <a:pt x="332365" y="35292"/>
+                </a:lnTo>
+                <a:close/>
+                <a:lnTo>
+                  <a:pt x="334689" y="35040"/>
+                </a:lnTo>
+                <a:close/>
+                <a:lnTo>
+                  <a:pt x="337013" y="34788"/>
+                </a:lnTo>
+                <a:close/>
+                <a:lnTo>
+                  <a:pt x="339337" y="34536"/>
+                </a:lnTo>
+                <a:close/>
+                <a:lnTo>
+                  <a:pt x="341661" y="34284"/>
+                </a:lnTo>
+                <a:close/>
+                <a:lnTo>
+                  <a:pt x="343986" y="34031"/>
+                </a:lnTo>
+                <a:close/>
+                <a:lnTo>
+                  <a:pt x="346310" y="33778"/>
+                </a:lnTo>
+                <a:close/>
+                <a:lnTo>
+                  <a:pt x="348634" y="33525"/>
+                </a:lnTo>
+                <a:close/>
+                <a:lnTo>
+                  <a:pt x="350958" y="33271"/>
+                </a:lnTo>
+                <a:close/>
+                <a:lnTo>
+                  <a:pt x="353283" y="33018"/>
+                </a:lnTo>
+                <a:close/>
+                <a:lnTo>
+                  <a:pt x="355607" y="32765"/>
+                </a:lnTo>
+                <a:close/>
+                <a:lnTo>
+                  <a:pt x="357931" y="32513"/>
+                </a:lnTo>
+                <a:close/>
+                <a:lnTo>
+                  <a:pt x="360255" y="32263"/>
+                </a:lnTo>
+                <a:close/>
+                <a:lnTo>
+                  <a:pt x="362579" y="32014"/>
+                </a:lnTo>
+                <a:close/>
+                <a:lnTo>
+                  <a:pt x="364904" y="31768"/>
+                </a:lnTo>
+                <a:close/>
+                <a:lnTo>
+                  <a:pt x="367228" y="31523"/>
+                </a:lnTo>
+                <a:close/>
+                <a:lnTo>
+                  <a:pt x="369552" y="31279"/>
+                </a:lnTo>
+                <a:close/>
+                <a:lnTo>
+                  <a:pt x="371876" y="31035"/>
+                </a:lnTo>
+                <a:close/>
+                <a:lnTo>
+                  <a:pt x="374201" y="30792"/>
+                </a:lnTo>
+                <a:close/>
+                <a:lnTo>
+                  <a:pt x="376525" y="30548"/>
+                </a:lnTo>
+                <a:close/>
+                <a:lnTo>
+                  <a:pt x="378849" y="30304"/>
+                </a:lnTo>
+                <a:close/>
+                <a:lnTo>
+                  <a:pt x="381173" y="30060"/>
+                </a:lnTo>
+                <a:close/>
+                <a:lnTo>
+                  <a:pt x="383498" y="29815"/>
+                </a:lnTo>
+                <a:close/>
+                <a:lnTo>
+                  <a:pt x="385822" y="29570"/>
+                </a:lnTo>
+                <a:close/>
+                <a:lnTo>
+                  <a:pt x="388146" y="29325"/>
+                </a:lnTo>
+                <a:close/>
+                <a:lnTo>
+                  <a:pt x="390470" y="29080"/>
+                </a:lnTo>
+                <a:close/>
+                <a:lnTo>
+                  <a:pt x="392794" y="28835"/>
+                </a:lnTo>
+                <a:close/>
+                <a:lnTo>
+                  <a:pt x="395119" y="28590"/>
+                </a:lnTo>
+                <a:close/>
+                <a:lnTo>
+                  <a:pt x="397443" y="28345"/>
+                </a:lnTo>
+                <a:close/>
+                <a:lnTo>
+                  <a:pt x="399767" y="28101"/>
+                </a:lnTo>
+                <a:close/>
+                <a:lnTo>
+                  <a:pt x="402091" y="27857"/>
+                </a:lnTo>
+                <a:close/>
+                <a:lnTo>
+                  <a:pt x="404416" y="27612"/>
+                </a:lnTo>
+                <a:close/>
+                <a:lnTo>
+                  <a:pt x="406740" y="27368"/>
+                </a:lnTo>
+                <a:close/>
+                <a:lnTo>
+                  <a:pt x="409064" y="27124"/>
+                </a:lnTo>
+                <a:close/>
+                <a:lnTo>
+                  <a:pt x="411388" y="26879"/>
+                </a:lnTo>
+                <a:close/>
+                <a:lnTo>
+                  <a:pt x="413712" y="26634"/>
+                </a:lnTo>
+                <a:close/>
+                <a:lnTo>
+                  <a:pt x="416037" y="26389"/>
+                </a:lnTo>
+                <a:close/>
+                <a:lnTo>
+                  <a:pt x="418361" y="26143"/>
+                </a:lnTo>
+                <a:close/>
+                <a:lnTo>
+                  <a:pt x="420685" y="25897"/>
+                </a:lnTo>
+                <a:close/>
+                <a:lnTo>
+                  <a:pt x="423009" y="25651"/>
+                </a:lnTo>
+                <a:close/>
+                <a:lnTo>
+                  <a:pt x="425334" y="25406"/>
+                </a:lnTo>
+                <a:close/>
+                <a:lnTo>
+                  <a:pt x="427658" y="25162"/>
+                </a:lnTo>
+                <a:close/>
+                <a:lnTo>
+                  <a:pt x="429982" y="24920"/>
+                </a:lnTo>
+                <a:close/>
+                <a:lnTo>
+                  <a:pt x="432306" y="24679"/>
+                </a:lnTo>
+                <a:close/>
+                <a:lnTo>
+                  <a:pt x="434631" y="24440"/>
+                </a:lnTo>
+                <a:close/>
+                <a:lnTo>
+                  <a:pt x="436955" y="24203"/>
+                </a:lnTo>
+                <a:close/>
+                <a:lnTo>
+                  <a:pt x="439279" y="23967"/>
+                </a:lnTo>
+                <a:close/>
+                <a:lnTo>
+                  <a:pt x="441603" y="23731"/>
+                </a:lnTo>
+                <a:close/>
+                <a:lnTo>
+                  <a:pt x="443927" y="23495"/>
+                </a:lnTo>
+                <a:close/>
+                <a:lnTo>
+                  <a:pt x="446252" y="23259"/>
+                </a:lnTo>
+                <a:close/>
+                <a:lnTo>
+                  <a:pt x="448576" y="23023"/>
+                </a:lnTo>
+                <a:close/>
+                <a:lnTo>
+                  <a:pt x="450900" y="22786"/>
+                </a:lnTo>
+                <a:close/>
+                <a:lnTo>
+                  <a:pt x="453224" y="22549"/>
+                </a:lnTo>
+                <a:close/>
+                <a:lnTo>
+                  <a:pt x="455549" y="22311"/>
+                </a:lnTo>
+                <a:close/>
+                <a:lnTo>
+                  <a:pt x="457873" y="22074"/>
+                </a:lnTo>
+                <a:close/>
+                <a:lnTo>
+                  <a:pt x="460197" y="21837"/>
+                </a:lnTo>
+                <a:close/>
+                <a:lnTo>
+                  <a:pt x="462521" y="21599"/>
+                </a:lnTo>
+                <a:close/>
+                <a:lnTo>
+                  <a:pt x="464845" y="21362"/>
+                </a:lnTo>
+                <a:close/>
+                <a:lnTo>
+                  <a:pt x="467170" y="21125"/>
+                </a:lnTo>
+                <a:close/>
+                <a:lnTo>
+                  <a:pt x="469494" y="20888"/>
+                </a:lnTo>
+                <a:close/>
+                <a:lnTo>
+                  <a:pt x="471818" y="20652"/>
+                </a:lnTo>
+                <a:close/>
+                <a:lnTo>
+                  <a:pt x="474142" y="20415"/>
+                </a:lnTo>
+                <a:close/>
+                <a:lnTo>
+                  <a:pt x="476467" y="20178"/>
+                </a:lnTo>
+                <a:close/>
+                <a:lnTo>
+                  <a:pt x="478791" y="19942"/>
+                </a:lnTo>
+                <a:close/>
+                <a:lnTo>
+                  <a:pt x="481115" y="19705"/>
+                </a:lnTo>
+                <a:close/>
+                <a:lnTo>
+                  <a:pt x="483439" y="19468"/>
+                </a:lnTo>
+                <a:close/>
+                <a:lnTo>
+                  <a:pt x="485764" y="19230"/>
+                </a:lnTo>
+                <a:close/>
+                <a:lnTo>
+                  <a:pt x="488088" y="18992"/>
+                </a:lnTo>
+                <a:close/>
+                <a:lnTo>
+                  <a:pt x="490412" y="18753"/>
+                </a:lnTo>
+                <a:close/>
+                <a:lnTo>
+                  <a:pt x="492736" y="18515"/>
+                </a:lnTo>
+                <a:close/>
+                <a:lnTo>
+                  <a:pt x="495060" y="18278"/>
+                </a:lnTo>
+                <a:close/>
+                <a:lnTo>
+                  <a:pt x="497385" y="18041"/>
+                </a:lnTo>
+                <a:close/>
+                <a:lnTo>
+                  <a:pt x="499709" y="17807"/>
+                </a:lnTo>
+                <a:close/>
+                <a:lnTo>
+                  <a:pt x="502033" y="17574"/>
+                </a:lnTo>
+                <a:close/>
+                <a:lnTo>
+                  <a:pt x="504357" y="17343"/>
+                </a:lnTo>
+                <a:close/>
+                <a:lnTo>
+                  <a:pt x="506682" y="17114"/>
+                </a:lnTo>
+                <a:close/>
+                <a:lnTo>
+                  <a:pt x="509006" y="16885"/>
+                </a:lnTo>
+                <a:close/>
+                <a:lnTo>
+                  <a:pt x="511330" y="16657"/>
+                </a:lnTo>
+                <a:close/>
+                <a:lnTo>
+                  <a:pt x="513654" y="16429"/>
+                </a:lnTo>
+                <a:close/>
+                <a:lnTo>
+                  <a:pt x="515978" y="16201"/>
+                </a:lnTo>
+                <a:close/>
+                <a:lnTo>
+                  <a:pt x="518303" y="15972"/>
+                </a:lnTo>
+                <a:close/>
+                <a:lnTo>
+                  <a:pt x="520627" y="15742"/>
+                </a:lnTo>
+                <a:close/>
+                <a:lnTo>
+                  <a:pt x="522951" y="15513"/>
+                </a:lnTo>
+                <a:close/>
+                <a:lnTo>
+                  <a:pt x="525275" y="15283"/>
+                </a:lnTo>
+                <a:close/>
+                <a:lnTo>
+                  <a:pt x="527600" y="15053"/>
+                </a:lnTo>
+                <a:close/>
+                <a:lnTo>
+                  <a:pt x="529924" y="14823"/>
+                </a:lnTo>
+                <a:close/>
+                <a:lnTo>
+                  <a:pt x="532248" y="14594"/>
+                </a:lnTo>
+                <a:close/>
+                <a:lnTo>
+                  <a:pt x="534572" y="14364"/>
+                </a:lnTo>
+                <a:close/>
+                <a:lnTo>
+                  <a:pt x="536897" y="14135"/>
+                </a:lnTo>
+                <a:close/>
+                <a:lnTo>
+                  <a:pt x="539221" y="13906"/>
+                </a:lnTo>
+                <a:close/>
+                <a:lnTo>
+                  <a:pt x="541545" y="13677"/>
+                </a:lnTo>
+                <a:close/>
+                <a:lnTo>
+                  <a:pt x="543869" y="13448"/>
+                </a:lnTo>
+                <a:close/>
+                <a:lnTo>
+                  <a:pt x="546193" y="13219"/>
+                </a:lnTo>
+                <a:close/>
+                <a:lnTo>
+                  <a:pt x="548518" y="12990"/>
+                </a:lnTo>
+                <a:close/>
+                <a:lnTo>
+                  <a:pt x="550842" y="12761"/>
+                </a:lnTo>
+                <a:close/>
+                <a:lnTo>
+                  <a:pt x="553166" y="12531"/>
+                </a:lnTo>
+                <a:close/>
+                <a:lnTo>
+                  <a:pt x="555490" y="12301"/>
+                </a:lnTo>
+                <a:close/>
+                <a:lnTo>
+                  <a:pt x="557815" y="12070"/>
+                </a:lnTo>
+                <a:close/>
+                <a:lnTo>
+                  <a:pt x="560139" y="11840"/>
+                </a:lnTo>
+                <a:close/>
+                <a:lnTo>
+                  <a:pt x="562463" y="11609"/>
+                </a:lnTo>
+                <a:close/>
+                <a:lnTo>
+                  <a:pt x="564787" y="11379"/>
+                </a:lnTo>
+                <a:close/>
+                <a:lnTo>
+                  <a:pt x="567112" y="11151"/>
+                </a:lnTo>
+                <a:close/>
+                <a:lnTo>
+                  <a:pt x="569436" y="10924"/>
+                </a:lnTo>
+                <a:close/>
+                <a:lnTo>
+                  <a:pt x="571760" y="10699"/>
+                </a:lnTo>
+                <a:close/>
+                <a:lnTo>
+                  <a:pt x="574084" y="10476"/>
+                </a:lnTo>
+                <a:close/>
+                <a:lnTo>
+                  <a:pt x="576408" y="10254"/>
+                </a:lnTo>
+                <a:close/>
+                <a:lnTo>
+                  <a:pt x="578733" y="10033"/>
+                </a:lnTo>
+                <a:close/>
+                <a:lnTo>
+                  <a:pt x="581057" y="9813"/>
+                </a:lnTo>
+                <a:close/>
+                <a:lnTo>
+                  <a:pt x="583381" y="9593"/>
+                </a:lnTo>
+                <a:close/>
+                <a:lnTo>
+                  <a:pt x="585705" y="9372"/>
+                </a:lnTo>
+                <a:close/>
+                <a:lnTo>
+                  <a:pt x="588030" y="9150"/>
+                </a:lnTo>
+                <a:close/>
+                <a:lnTo>
+                  <a:pt x="590354" y="8929"/>
+                </a:lnTo>
+                <a:close/>
+                <a:lnTo>
+                  <a:pt x="592678" y="8707"/>
+                </a:lnTo>
+                <a:close/>
+                <a:lnTo>
+                  <a:pt x="595002" y="8485"/>
+                </a:lnTo>
+                <a:close/>
+                <a:lnTo>
+                  <a:pt x="597326" y="8263"/>
+                </a:lnTo>
+                <a:close/>
+                <a:lnTo>
+                  <a:pt x="599650" y="8041"/>
+                </a:lnTo>
+                <a:close/>
+                <a:lnTo>
+                  <a:pt x="601974" y="7819"/>
+                </a:lnTo>
+                <a:close/>
+                <a:lnTo>
+                  <a:pt x="604298" y="7597"/>
+                </a:lnTo>
+                <a:close/>
+                <a:lnTo>
+                  <a:pt x="606623" y="7375"/>
+                </a:lnTo>
+                <a:close/>
+                <a:lnTo>
+                  <a:pt x="608947" y="7154"/>
+                </a:lnTo>
+                <a:close/>
+                <a:lnTo>
+                  <a:pt x="611272" y="6932"/>
+                </a:lnTo>
+                <a:close/>
+                <a:lnTo>
+                  <a:pt x="613597" y="6711"/>
+                </a:lnTo>
+                <a:close/>
+                <a:lnTo>
+                  <a:pt x="615922" y="6490"/>
+                </a:lnTo>
+                <a:close/>
+                <a:lnTo>
+                  <a:pt x="618247" y="6268"/>
+                </a:lnTo>
+                <a:close/>
+                <a:lnTo>
+                  <a:pt x="620572" y="6047"/>
+                </a:lnTo>
+                <a:close/>
+                <a:lnTo>
+                  <a:pt x="622895" y="5825"/>
+                </a:lnTo>
+                <a:close/>
+                <a:lnTo>
+                  <a:pt x="625217" y="5602"/>
+                </a:lnTo>
+                <a:close/>
+                <a:lnTo>
+                  <a:pt x="627538" y="5379"/>
+                </a:lnTo>
+                <a:close/>
+                <a:lnTo>
+                  <a:pt x="629859" y="5156"/>
+                </a:lnTo>
+                <a:close/>
+                <a:lnTo>
+                  <a:pt x="632180" y="4933"/>
+                </a:lnTo>
+                <a:close/>
+                <a:lnTo>
+                  <a:pt x="634503" y="4711"/>
+                </a:lnTo>
+                <a:close/>
+                <a:lnTo>
+                  <a:pt x="636830" y="4490"/>
+                </a:lnTo>
+                <a:close/>
+                <a:lnTo>
+                  <a:pt x="639162" y="4271"/>
+                </a:lnTo>
+                <a:close/>
+                <a:lnTo>
+                  <a:pt x="641499" y="4055"/>
+                </a:lnTo>
+                <a:close/>
+                <a:lnTo>
+                  <a:pt x="643837" y="3840"/>
+                </a:lnTo>
+                <a:close/>
+                <a:lnTo>
+                  <a:pt x="646172" y="3626"/>
+                </a:lnTo>
+                <a:close/>
+                <a:lnTo>
+                  <a:pt x="648499" y="3413"/>
+                </a:lnTo>
+                <a:close/>
+                <a:lnTo>
+                  <a:pt x="650814" y="3200"/>
+                </a:lnTo>
+                <a:close/>
+                <a:lnTo>
+                  <a:pt x="653110" y="2987"/>
+                </a:lnTo>
+                <a:close/>
+                <a:lnTo>
+                  <a:pt x="655387" y="2772"/>
+                </a:lnTo>
+                <a:close/>
+                <a:lnTo>
+                  <a:pt x="657658" y="2555"/>
+                </a:lnTo>
+                <a:close/>
+                <a:lnTo>
+                  <a:pt x="659942" y="2335"/>
+                </a:lnTo>
+                <a:close/>
+                <a:lnTo>
+                  <a:pt x="662256" y="2113"/>
+                </a:lnTo>
+                <a:close/>
+                <a:lnTo>
+                  <a:pt x="664618" y="1887"/>
+                </a:lnTo>
+                <a:close/>
+                <a:lnTo>
+                  <a:pt x="667047" y="1657"/>
+                </a:lnTo>
+                <a:close/>
+                <a:lnTo>
+                  <a:pt x="669549" y="1423"/>
+                </a:lnTo>
+                <a:close/>
+                <a:lnTo>
+                  <a:pt x="672071" y="1190"/>
+                </a:lnTo>
+                <a:close/>
+                <a:lnTo>
+                  <a:pt x="674546" y="962"/>
+                </a:lnTo>
+                <a:close/>
+                <a:lnTo>
+                  <a:pt x="676906" y="746"/>
+                </a:lnTo>
+                <a:close/>
+                <a:lnTo>
+                  <a:pt x="679083" y="547"/>
+                </a:lnTo>
+                <a:close/>
+                <a:lnTo>
+                  <a:pt x="681010" y="371"/>
+                </a:lnTo>
+                <a:close/>
+                <a:lnTo>
+                  <a:pt x="682618" y="222"/>
+                </a:lnTo>
+                <a:close/>
+                <a:lnTo>
+                  <a:pt x="683840" y="108"/>
+                </a:lnTo>
+                <a:close/>
+                <a:lnTo>
+                  <a:pt x="684609" y="32"/>
+                </a:lnTo>
+                <a:close/>
+                <a:lnTo>
+                  <a:pt x="684856" y="0"/>
+                </a:lnTo>
+                <a:close/>
+                <a:lnTo>
+                  <a:pt x="684514" y="19"/>
+                </a:lnTo>
+                <a:close/>
+                <a:lnTo>
+                  <a:pt x="683514" y="93"/>
+                </a:lnTo>
+                <a:close/>
+              </a:path>
+            </a:pathLst>
+          </a:custGeom>
+          <a:ln w="31750">
+            <a:solidFill>
+              <a:srgbClr val="FFFFFF"/>
+            </a:solidFill>
+          </a:ln>
+        </p:spPr>
+        <p:style>
+          <a:lnRef idx="1">
+            <a:schemeClr val="accent1"/>
+          </a:lnRef>
+          <a:fillRef idx="3">
+            <a:schemeClr val="accent1"/>
+          </a:fillRef>
+          <a:effectRef idx="2">
+            <a:schemeClr val="accent1"/>
+          </a:effectRef>
+          <a:fontRef idx="minor">
+            <a:schemeClr val="lt1"/>
+          </a:fontRef>
+        </p:style>
+        <p:txBody>
+          <a:bodyPr rtlCol="0" anchor="ctr"/>
+          <a:lstStyle/>
+          <a:p>
+            <a:pPr algn="ctr"/>
+          </a:p>
+        </p:txBody>
+      </p:sp>
       <p:cxnSp>
         <p:nvCxnSpPr>
-          <p:cNvPr id="5" name="Connector 4"/>
+          <p:cNvPr id="6" name="Connector 5"/>
           <p:cNvCxnSpPr/>
           <p:nvPr/>
         </p:nvCxnSpPr>
         <p:spPr>
           <a:xfrm flipV="1">
-            <a:off x="5943600.0" y="997153.2"/>
-            <a:ext cx="0.0" cy="1574596.8"/>
+            <a:off x="5715000.0" y="1657350.0"/>
+            <a:ext cx="0.0" cy="914400.0"/>
           </a:xfrm>
           <a:prstGeom prst="line">
             <a:avLst/>
@@ -4453,20 +5702,20 @@
       </p:cxnSp>
       <p:sp>
         <p:nvSpPr>
-          <p:cNvPr id="6" name="Oval 5"/>
+          <p:cNvPr id="7" name="Oval 6"/>
           <p:cNvSpPr/>
           <p:nvPr/>
         </p:nvSpPr>
         <p:spPr>
           <a:xfrm>
-            <a:off x="5892800" y="946353"/>
+            <a:off x="5664200" y="1606550"/>
             <a:ext cx="101600" cy="101600"/>
           </a:xfrm>
           <a:prstGeom prst="ellipse">
             <a:avLst/>
           </a:prstGeom>
           <a:solidFill>
-            <a:srgbClr val="0A0A0A"/>
+            <a:srgbClr val="000000"/>
           </a:solidFill>
           <a:ln w="12700">
             <a:solidFill>
@@ -4498,13 +5747,13 @@
       </p:sp>
       <p:sp>
         <p:nvSpPr>
-          <p:cNvPr id="7" name="Oval 6"/>
+          <p:cNvPr id="8" name="Oval 7"/>
           <p:cNvSpPr/>
           <p:nvPr/>
         </p:nvSpPr>
         <p:spPr>
           <a:xfrm>
-            <a:off x="5892800" y="1377950"/>
+            <a:off x="5664200" y="1835150"/>
             <a:ext cx="101600" cy="101600"/>
           </a:xfrm>
           <a:prstGeom prst="ellipse">
@@ -4543,14 +5792,14 @@
       </p:sp>
       <p:sp>
         <p:nvSpPr>
-          <p:cNvPr id="8" name="Freeform 7"/>
+          <p:cNvPr id="9" name="Freeform 8"/>
           <p:cNvSpPr/>
           <p:nvPr/>
         </p:nvSpPr>
         <p:spPr>
           <a:xfrm>
-            <a:off x="5577840" y="1041959"/>
-            <a:ext cx="342900" cy="166878"/>
+            <a:off x="5394960" y="2147377"/>
+            <a:ext cx="297180" cy="34747"/>
           </a:xfrm>
           <a:custGeom>
             <a:avLst/>
@@ -4559,404 +5808,404 @@
             <a:cxnLst/>
             <a:rect l="l" t="t" r="r" b="b"/>
             <a:pathLst>
-              <a:path w="342900" h="166878">
+              <a:path w="297180" h="34747">
                 <a:moveTo>
-                  <a:pt x="0" y="166878"/>
+                  <a:pt x="0" y="34747"/>
                 </a:moveTo>
                 <a:lnTo>
-                  <a:pt x="3464" y="164957"/>
-                </a:lnTo>
-                <a:close/>
-                <a:lnTo>
-                  <a:pt x="6927" y="163057"/>
-                </a:lnTo>
-                <a:close/>
-                <a:lnTo>
-                  <a:pt x="10391" y="161176"/>
-                </a:lnTo>
-                <a:close/>
-                <a:lnTo>
-                  <a:pt x="13855" y="159312"/>
-                </a:lnTo>
-                <a:close/>
-                <a:lnTo>
-                  <a:pt x="17318" y="157464"/>
-                </a:lnTo>
-                <a:close/>
-                <a:lnTo>
-                  <a:pt x="20782" y="155629"/>
-                </a:lnTo>
-                <a:close/>
-                <a:lnTo>
-                  <a:pt x="24245" y="153805"/>
-                </a:lnTo>
-                <a:close/>
-                <a:lnTo>
-                  <a:pt x="27709" y="151991"/>
-                </a:lnTo>
-                <a:close/>
-                <a:lnTo>
-                  <a:pt x="31173" y="150186"/>
-                </a:lnTo>
-                <a:close/>
-                <a:lnTo>
-                  <a:pt x="34636" y="148386"/>
-                </a:lnTo>
-                <a:close/>
-                <a:lnTo>
-                  <a:pt x="38100" y="146590"/>
-                </a:lnTo>
-                <a:close/>
-                <a:lnTo>
-                  <a:pt x="41564" y="144797"/>
-                </a:lnTo>
-                <a:close/>
-                <a:lnTo>
-                  <a:pt x="45027" y="143005"/>
-                </a:lnTo>
-                <a:close/>
-                <a:lnTo>
-                  <a:pt x="48491" y="141211"/>
-                </a:lnTo>
-                <a:close/>
-                <a:lnTo>
-                  <a:pt x="51955" y="139416"/>
-                </a:lnTo>
-                <a:close/>
-                <a:lnTo>
-                  <a:pt x="55418" y="137618"/>
-                </a:lnTo>
-                <a:close/>
-                <a:lnTo>
-                  <a:pt x="58882" y="135817"/>
-                </a:lnTo>
-                <a:close/>
-                <a:lnTo>
-                  <a:pt x="62345" y="134014"/>
-                </a:lnTo>
-                <a:close/>
-                <a:lnTo>
-                  <a:pt x="65809" y="132207"/>
-                </a:lnTo>
-                <a:close/>
-                <a:lnTo>
-                  <a:pt x="69273" y="130397"/>
-                </a:lnTo>
-                <a:close/>
-                <a:lnTo>
-                  <a:pt x="72736" y="128583"/>
-                </a:lnTo>
-                <a:close/>
-                <a:lnTo>
-                  <a:pt x="76200" y="126769"/>
-                </a:lnTo>
-                <a:close/>
-                <a:lnTo>
-                  <a:pt x="79664" y="124959"/>
-                </a:lnTo>
-                <a:close/>
-                <a:lnTo>
-                  <a:pt x="83127" y="123155"/>
-                </a:lnTo>
-                <a:close/>
-                <a:lnTo>
-                  <a:pt x="86591" y="121361"/>
-                </a:lnTo>
-                <a:close/>
-                <a:lnTo>
-                  <a:pt x="90055" y="119580"/>
-                </a:lnTo>
-                <a:close/>
-                <a:lnTo>
-                  <a:pt x="93518" y="117815"/>
-                </a:lnTo>
-                <a:close/>
-                <a:lnTo>
-                  <a:pt x="96982" y="116065"/>
-                </a:lnTo>
-                <a:close/>
-                <a:lnTo>
-                  <a:pt x="100445" y="114329"/>
-                </a:lnTo>
-                <a:close/>
-                <a:lnTo>
-                  <a:pt x="103909" y="112601"/>
-                </a:lnTo>
-                <a:close/>
-                <a:lnTo>
-                  <a:pt x="107373" y="110879"/>
-                </a:lnTo>
-                <a:close/>
-                <a:lnTo>
-                  <a:pt x="110836" y="109161"/>
-                </a:lnTo>
-                <a:close/>
-                <a:lnTo>
-                  <a:pt x="114300" y="107442"/>
-                </a:lnTo>
-                <a:close/>
-                <a:lnTo>
-                  <a:pt x="117764" y="105720"/>
-                </a:lnTo>
-                <a:close/>
-                <a:lnTo>
-                  <a:pt x="121227" y="103994"/>
-                </a:lnTo>
-                <a:close/>
-                <a:lnTo>
-                  <a:pt x="124691" y="102265"/>
-                </a:lnTo>
-                <a:close/>
-                <a:lnTo>
-                  <a:pt x="128155" y="100533"/>
-                </a:lnTo>
-                <a:close/>
-                <a:lnTo>
-                  <a:pt x="131618" y="98797"/>
-                </a:lnTo>
-                <a:close/>
-                <a:lnTo>
-                  <a:pt x="135082" y="97057"/>
-                </a:lnTo>
-                <a:close/>
-                <a:lnTo>
-                  <a:pt x="138545" y="95314"/>
-                </a:lnTo>
-                <a:close/>
-                <a:lnTo>
-                  <a:pt x="142009" y="93569"/>
-                </a:lnTo>
-                <a:close/>
-                <a:lnTo>
-                  <a:pt x="145473" y="91825"/>
-                </a:lnTo>
-                <a:close/>
-                <a:lnTo>
-                  <a:pt x="148936" y="90085"/>
-                </a:lnTo>
-                <a:close/>
-                <a:lnTo>
-                  <a:pt x="152400" y="88352"/>
-                </a:lnTo>
-                <a:close/>
-                <a:lnTo>
-                  <a:pt x="155864" y="86630"/>
-                </a:lnTo>
-                <a:close/>
-                <a:lnTo>
-                  <a:pt x="159327" y="84922"/>
-                </a:lnTo>
-                <a:close/>
-                <a:lnTo>
-                  <a:pt x="162791" y="83229"/>
-                </a:lnTo>
-                <a:close/>
-                <a:lnTo>
-                  <a:pt x="166255" y="81552"/>
-                </a:lnTo>
-                <a:close/>
-                <a:lnTo>
-                  <a:pt x="169718" y="79887"/>
-                </a:lnTo>
-                <a:close/>
-                <a:lnTo>
-                  <a:pt x="173182" y="78230"/>
-                </a:lnTo>
-                <a:close/>
-                <a:lnTo>
-                  <a:pt x="176645" y="76578"/>
-                </a:lnTo>
-                <a:close/>
-                <a:lnTo>
-                  <a:pt x="180109" y="74929"/>
-                </a:lnTo>
-                <a:close/>
-                <a:lnTo>
-                  <a:pt x="183573" y="73279"/>
-                </a:lnTo>
-                <a:close/>
-                <a:lnTo>
-                  <a:pt x="187036" y="71625"/>
-                </a:lnTo>
-                <a:close/>
-                <a:lnTo>
-                  <a:pt x="190500" y="69968"/>
-                </a:lnTo>
-                <a:close/>
-                <a:lnTo>
-                  <a:pt x="193964" y="68308"/>
-                </a:lnTo>
-                <a:close/>
-                <a:lnTo>
-                  <a:pt x="197427" y="66644"/>
-                </a:lnTo>
-                <a:close/>
-                <a:lnTo>
-                  <a:pt x="200891" y="64977"/>
-                </a:lnTo>
-                <a:close/>
-                <a:lnTo>
-                  <a:pt x="204355" y="63306"/>
-                </a:lnTo>
-                <a:close/>
-                <a:lnTo>
-                  <a:pt x="207818" y="61631"/>
-                </a:lnTo>
-                <a:close/>
-                <a:lnTo>
-                  <a:pt x="211282" y="59955"/>
-                </a:lnTo>
-                <a:close/>
-                <a:lnTo>
-                  <a:pt x="214745" y="58281"/>
-                </a:lnTo>
-                <a:close/>
-                <a:lnTo>
-                  <a:pt x="218209" y="56611"/>
-                </a:lnTo>
-                <a:close/>
-                <a:lnTo>
-                  <a:pt x="221673" y="54950"/>
-                </a:lnTo>
-                <a:close/>
-                <a:lnTo>
-                  <a:pt x="225136" y="53299"/>
-                </a:lnTo>
-                <a:close/>
-                <a:lnTo>
-                  <a:pt x="228600" y="51663"/>
-                </a:lnTo>
-                <a:close/>
-                <a:lnTo>
-                  <a:pt x="232064" y="50044"/>
-                </a:lnTo>
-                <a:close/>
-                <a:lnTo>
-                  <a:pt x="235527" y="48438"/>
-                </a:lnTo>
-                <a:close/>
-                <a:lnTo>
-                  <a:pt x="238991" y="46844"/>
-                </a:lnTo>
-                <a:close/>
-                <a:lnTo>
-                  <a:pt x="242455" y="45258"/>
-                </a:lnTo>
-                <a:close/>
-                <a:lnTo>
-                  <a:pt x="245918" y="43676"/>
-                </a:lnTo>
-                <a:close/>
-                <a:lnTo>
-                  <a:pt x="249382" y="42096"/>
-                </a:lnTo>
-                <a:close/>
-                <a:lnTo>
-                  <a:pt x="252845" y="40515"/>
-                </a:lnTo>
-                <a:close/>
-                <a:lnTo>
-                  <a:pt x="256309" y="38930"/>
-                </a:lnTo>
-                <a:close/>
-                <a:lnTo>
-                  <a:pt x="259773" y="37341"/>
-                </a:lnTo>
-                <a:close/>
-                <a:lnTo>
-                  <a:pt x="263236" y="35749"/>
-                </a:lnTo>
-                <a:close/>
-                <a:lnTo>
-                  <a:pt x="266700" y="34154"/>
-                </a:lnTo>
-                <a:close/>
-                <a:lnTo>
-                  <a:pt x="270164" y="32555"/>
-                </a:lnTo>
-                <a:close/>
-                <a:lnTo>
-                  <a:pt x="273627" y="30953"/>
-                </a:lnTo>
-                <a:close/>
-                <a:lnTo>
-                  <a:pt x="277091" y="29348"/>
-                </a:lnTo>
-                <a:close/>
-                <a:lnTo>
-                  <a:pt x="280555" y="27742"/>
-                </a:lnTo>
-                <a:close/>
-                <a:lnTo>
-                  <a:pt x="284018" y="26138"/>
-                </a:lnTo>
-                <a:close/>
-                <a:lnTo>
-                  <a:pt x="287482" y="24540"/>
-                </a:lnTo>
-                <a:close/>
-                <a:lnTo>
-                  <a:pt x="290945" y="22949"/>
-                </a:lnTo>
-                <a:close/>
-                <a:lnTo>
-                  <a:pt x="294409" y="21370"/>
-                </a:lnTo>
-                <a:close/>
-                <a:lnTo>
-                  <a:pt x="297873" y="19805"/>
-                </a:lnTo>
-                <a:close/>
-                <a:lnTo>
-                  <a:pt x="301336" y="18255"/>
-                </a:lnTo>
-                <a:close/>
-                <a:lnTo>
-                  <a:pt x="304800" y="16719"/>
-                </a:lnTo>
-                <a:close/>
-                <a:lnTo>
-                  <a:pt x="308264" y="15194"/>
-                </a:lnTo>
-                <a:close/>
-                <a:lnTo>
-                  <a:pt x="311727" y="13678"/>
-                </a:lnTo>
-                <a:close/>
-                <a:lnTo>
-                  <a:pt x="315191" y="12167"/>
-                </a:lnTo>
-                <a:close/>
-                <a:lnTo>
-                  <a:pt x="318655" y="10661"/>
-                </a:lnTo>
-                <a:close/>
-                <a:lnTo>
-                  <a:pt x="322118" y="9155"/>
-                </a:lnTo>
-                <a:close/>
-                <a:lnTo>
-                  <a:pt x="325582" y="7647"/>
-                </a:lnTo>
-                <a:close/>
-                <a:lnTo>
-                  <a:pt x="329045" y="6136"/>
-                </a:lnTo>
-                <a:close/>
-                <a:lnTo>
-                  <a:pt x="332509" y="4618"/>
-                </a:lnTo>
-                <a:close/>
-                <a:lnTo>
-                  <a:pt x="335973" y="3091"/>
-                </a:lnTo>
-                <a:close/>
-                <a:lnTo>
-                  <a:pt x="339436" y="1552"/>
-                </a:lnTo>
-                <a:close/>
-                <a:lnTo>
-                  <a:pt x="342900" y="0"/>
+                  <a:pt x="3060" y="34379"/>
+                </a:lnTo>
+                <a:close/>
+                <a:lnTo>
+                  <a:pt x="6123" y="34010"/>
+                </a:lnTo>
+                <a:close/>
+                <a:lnTo>
+                  <a:pt x="9189" y="33642"/>
+                </a:lnTo>
+                <a:close/>
+                <a:lnTo>
+                  <a:pt x="12256" y="33273"/>
+                </a:lnTo>
+                <a:close/>
+                <a:lnTo>
+                  <a:pt x="15324" y="32905"/>
+                </a:lnTo>
+                <a:close/>
+                <a:lnTo>
+                  <a:pt x="18392" y="32536"/>
+                </a:lnTo>
+                <a:close/>
+                <a:lnTo>
+                  <a:pt x="21458" y="32167"/>
+                </a:lnTo>
+                <a:close/>
+                <a:lnTo>
+                  <a:pt x="24523" y="31799"/>
+                </a:lnTo>
+                <a:close/>
+                <a:lnTo>
+                  <a:pt x="27584" y="31430"/>
+                </a:lnTo>
+                <a:close/>
+                <a:lnTo>
+                  <a:pt x="30642" y="31062"/>
+                </a:lnTo>
+                <a:close/>
+                <a:lnTo>
+                  <a:pt x="33697" y="30693"/>
+                </a:lnTo>
+                <a:close/>
+                <a:lnTo>
+                  <a:pt x="36750" y="30325"/>
+                </a:lnTo>
+                <a:close/>
+                <a:lnTo>
+                  <a:pt x="39804" y="29956"/>
+                </a:lnTo>
+                <a:close/>
+                <a:lnTo>
+                  <a:pt x="42860" y="29588"/>
+                </a:lnTo>
+                <a:close/>
+                <a:lnTo>
+                  <a:pt x="45920" y="29219"/>
+                </a:lnTo>
+                <a:close/>
+                <a:lnTo>
+                  <a:pt x="48983" y="28851"/>
+                </a:lnTo>
+                <a:close/>
+                <a:lnTo>
+                  <a:pt x="52049" y="28482"/>
+                </a:lnTo>
+                <a:close/>
+                <a:lnTo>
+                  <a:pt x="55116" y="28114"/>
+                </a:lnTo>
+                <a:close/>
+                <a:lnTo>
+                  <a:pt x="58182" y="27745"/>
+                </a:lnTo>
+                <a:close/>
+                <a:lnTo>
+                  <a:pt x="61248" y="27376"/>
+                </a:lnTo>
+                <a:close/>
+                <a:lnTo>
+                  <a:pt x="64313" y="27008"/>
+                </a:lnTo>
+                <a:close/>
+                <a:lnTo>
+                  <a:pt x="67377" y="26639"/>
+                </a:lnTo>
+                <a:close/>
+                <a:lnTo>
+                  <a:pt x="70441" y="26271"/>
+                </a:lnTo>
+                <a:close/>
+                <a:lnTo>
+                  <a:pt x="73505" y="25903"/>
+                </a:lnTo>
+                <a:close/>
+                <a:lnTo>
+                  <a:pt x="76569" y="25535"/>
+                </a:lnTo>
+                <a:close/>
+                <a:lnTo>
+                  <a:pt x="79633" y="25166"/>
+                </a:lnTo>
+                <a:close/>
+                <a:lnTo>
+                  <a:pt x="82698" y="24798"/>
+                </a:lnTo>
+                <a:close/>
+                <a:lnTo>
+                  <a:pt x="85763" y="24429"/>
+                </a:lnTo>
+                <a:close/>
+                <a:lnTo>
+                  <a:pt x="88830" y="24059"/>
+                </a:lnTo>
+                <a:close/>
+                <a:lnTo>
+                  <a:pt x="91897" y="23688"/>
+                </a:lnTo>
+                <a:close/>
+                <a:lnTo>
+                  <a:pt x="94963" y="23319"/>
+                </a:lnTo>
+                <a:close/>
+                <a:lnTo>
+                  <a:pt x="98026" y="22951"/>
+                </a:lnTo>
+                <a:close/>
+                <a:lnTo>
+                  <a:pt x="101087" y="22586"/>
+                </a:lnTo>
+                <a:close/>
+                <a:lnTo>
+                  <a:pt x="104143" y="22224"/>
+                </a:lnTo>
+                <a:close/>
+                <a:lnTo>
+                  <a:pt x="107197" y="21864"/>
+                </a:lnTo>
+                <a:close/>
+                <a:lnTo>
+                  <a:pt x="110251" y="21506"/>
+                </a:lnTo>
+                <a:close/>
+                <a:lnTo>
+                  <a:pt x="113305" y="21149"/>
+                </a:lnTo>
+                <a:close/>
+                <a:lnTo>
+                  <a:pt x="116363" y="20792"/>
+                </a:lnTo>
+                <a:close/>
+                <a:lnTo>
+                  <a:pt x="119425" y="20434"/>
+                </a:lnTo>
+                <a:close/>
+                <a:lnTo>
+                  <a:pt x="122489" y="20075"/>
+                </a:lnTo>
+                <a:close/>
+                <a:lnTo>
+                  <a:pt x="125556" y="19716"/>
+                </a:lnTo>
+                <a:close/>
+                <a:lnTo>
+                  <a:pt x="128622" y="19356"/>
+                </a:lnTo>
+                <a:close/>
+                <a:lnTo>
+                  <a:pt x="131688" y="18997"/>
+                </a:lnTo>
+                <a:close/>
+                <a:lnTo>
+                  <a:pt x="134753" y="18638"/>
+                </a:lnTo>
+                <a:close/>
+                <a:lnTo>
+                  <a:pt x="137817" y="18279"/>
+                </a:lnTo>
+                <a:close/>
+                <a:lnTo>
+                  <a:pt x="140881" y="17920"/>
+                </a:lnTo>
+                <a:close/>
+                <a:lnTo>
+                  <a:pt x="143946" y="17562"/>
+                </a:lnTo>
+                <a:close/>
+                <a:lnTo>
+                  <a:pt x="147012" y="17204"/>
+                </a:lnTo>
+                <a:close/>
+                <a:lnTo>
+                  <a:pt x="150079" y="16845"/>
+                </a:lnTo>
+                <a:close/>
+                <a:lnTo>
+                  <a:pt x="153144" y="16487"/>
+                </a:lnTo>
+                <a:close/>
+                <a:lnTo>
+                  <a:pt x="156208" y="16128"/>
+                </a:lnTo>
+                <a:close/>
+                <a:lnTo>
+                  <a:pt x="159268" y="15768"/>
+                </a:lnTo>
+                <a:close/>
+                <a:lnTo>
+                  <a:pt x="162324" y="15406"/>
+                </a:lnTo>
+                <a:close/>
+                <a:lnTo>
+                  <a:pt x="165378" y="15046"/>
+                </a:lnTo>
+                <a:close/>
+                <a:lnTo>
+                  <a:pt x="168431" y="14686"/>
+                </a:lnTo>
+                <a:close/>
+                <a:lnTo>
+                  <a:pt x="171486" y="14329"/>
+                </a:lnTo>
+                <a:close/>
+                <a:lnTo>
+                  <a:pt x="174544" y="13977"/>
+                </a:lnTo>
+                <a:close/>
+                <a:lnTo>
+                  <a:pt x="177606" y="13628"/>
+                </a:lnTo>
+                <a:close/>
+                <a:lnTo>
+                  <a:pt x="180671" y="13281"/>
+                </a:lnTo>
+                <a:close/>
+                <a:lnTo>
+                  <a:pt x="183738" y="12933"/>
+                </a:lnTo>
+                <a:close/>
+                <a:lnTo>
+                  <a:pt x="186804" y="12582"/>
+                </a:lnTo>
+                <a:close/>
+                <a:lnTo>
+                  <a:pt x="189871" y="12227"/>
+                </a:lnTo>
+                <a:close/>
+                <a:lnTo>
+                  <a:pt x="192936" y="11868"/>
+                </a:lnTo>
+                <a:close/>
+                <a:lnTo>
+                  <a:pt x="196000" y="11507"/>
+                </a:lnTo>
+                <a:close/>
+                <a:lnTo>
+                  <a:pt x="199064" y="11147"/>
+                </a:lnTo>
+                <a:close/>
+                <a:lnTo>
+                  <a:pt x="202128" y="10790"/>
+                </a:lnTo>
+                <a:close/>
+                <a:lnTo>
+                  <a:pt x="205192" y="10437"/>
+                </a:lnTo>
+                <a:close/>
+                <a:lnTo>
+                  <a:pt x="208256" y="10088"/>
+                </a:lnTo>
+                <a:close/>
+                <a:lnTo>
+                  <a:pt x="211320" y="9740"/>
+                </a:lnTo>
+                <a:close/>
+                <a:lnTo>
+                  <a:pt x="214385" y="9393"/>
+                </a:lnTo>
+                <a:close/>
+                <a:lnTo>
+                  <a:pt x="217452" y="9044"/>
+                </a:lnTo>
+                <a:close/>
+                <a:lnTo>
+                  <a:pt x="220519" y="8693"/>
+                </a:lnTo>
+                <a:close/>
+                <a:lnTo>
+                  <a:pt x="223586" y="8342"/>
+                </a:lnTo>
+                <a:close/>
+                <a:lnTo>
+                  <a:pt x="226651" y="7992"/>
+                </a:lnTo>
+                <a:close/>
+                <a:lnTo>
+                  <a:pt x="229713" y="7645"/>
+                </a:lnTo>
+                <a:close/>
+                <a:lnTo>
+                  <a:pt x="232769" y="7303"/>
+                </a:lnTo>
+                <a:close/>
+                <a:lnTo>
+                  <a:pt x="235821" y="6964"/>
+                </a:lnTo>
+                <a:close/>
+                <a:lnTo>
+                  <a:pt x="238873" y="6627"/>
+                </a:lnTo>
+                <a:close/>
+                <a:lnTo>
+                  <a:pt x="241927" y="6289"/>
+                </a:lnTo>
+                <a:close/>
+                <a:lnTo>
+                  <a:pt x="244987" y="5947"/>
+                </a:lnTo>
+                <a:close/>
+                <a:lnTo>
+                  <a:pt x="248056" y="5600"/>
+                </a:lnTo>
+                <a:close/>
+                <a:lnTo>
+                  <a:pt x="251128" y="5250"/>
+                </a:lnTo>
+                <a:close/>
+                <a:lnTo>
+                  <a:pt x="254198" y="4898"/>
+                </a:lnTo>
+                <a:close/>
+                <a:lnTo>
+                  <a:pt x="257260" y="4549"/>
+                </a:lnTo>
+                <a:close/>
+                <a:lnTo>
+                  <a:pt x="260307" y="4203"/>
+                </a:lnTo>
+                <a:close/>
+                <a:lnTo>
+                  <a:pt x="263338" y="3863"/>
+                </a:lnTo>
+                <a:close/>
+                <a:lnTo>
+                  <a:pt x="266371" y="3526"/>
+                </a:lnTo>
+                <a:close/>
+                <a:lnTo>
+                  <a:pt x="269427" y="3189"/>
+                </a:lnTo>
+                <a:close/>
+                <a:lnTo>
+                  <a:pt x="272524" y="2849"/>
+                </a:lnTo>
+                <a:close/>
+                <a:lnTo>
+                  <a:pt x="275681" y="2503"/>
+                </a:lnTo>
+                <a:close/>
+                <a:lnTo>
+                  <a:pt x="278878" y="2152"/>
+                </a:lnTo>
+                <a:close/>
+                <a:lnTo>
+                  <a:pt x="282043" y="1803"/>
+                </a:lnTo>
+                <a:close/>
+                <a:lnTo>
+                  <a:pt x="285104" y="1464"/>
+                </a:lnTo>
+                <a:close/>
+                <a:lnTo>
+                  <a:pt x="287987" y="1140"/>
+                </a:lnTo>
+                <a:close/>
+                <a:lnTo>
+                  <a:pt x="290619" y="839"/>
+                </a:lnTo>
+                <a:close/>
+                <a:lnTo>
+                  <a:pt x="292928" y="568"/>
+                </a:lnTo>
+                <a:close/>
+                <a:lnTo>
+                  <a:pt x="294839" y="333"/>
+                </a:lnTo>
+                <a:close/>
+                <a:lnTo>
+                  <a:pt x="296281" y="141"/>
+                </a:lnTo>
+                <a:close/>
+                <a:lnTo>
+                  <a:pt x="297180" y="0"/>
                 </a:lnTo>
                 <a:close/>
               </a:path>
@@ -4992,14 +6241,14 @@
       </p:sp>
       <p:sp>
         <p:nvSpPr>
-          <p:cNvPr id="9" name="Freeform 8"/>
+          <p:cNvPr id="10" name="Freeform 9"/>
           <p:cNvSpPr/>
           <p:nvPr/>
         </p:nvSpPr>
         <p:spPr>
           <a:xfrm>
-            <a:off x="5989320" y="664312"/>
-            <a:ext cx="548640" cy="304495"/>
+            <a:off x="5737860" y="2104537"/>
+            <a:ext cx="297180" cy="36988"/>
           </a:xfrm>
           <a:custGeom>
             <a:avLst/>
@@ -5008,404 +6257,404 @@
             <a:cxnLst/>
             <a:rect l="l" t="t" r="r" b="b"/>
             <a:pathLst>
-              <a:path w="548640" h="304495">
+              <a:path w="297180" h="36988">
                 <a:moveTo>
-                  <a:pt x="548640" y="0"/>
+                  <a:pt x="297180" y="0"/>
                 </a:moveTo>
                 <a:lnTo>
-                  <a:pt x="543098" y="3217"/>
-                </a:lnTo>
-                <a:close/>
-                <a:lnTo>
-                  <a:pt x="537556" y="6348"/>
-                </a:lnTo>
-                <a:close/>
-                <a:lnTo>
-                  <a:pt x="532015" y="9411"/>
-                </a:lnTo>
-                <a:close/>
-                <a:lnTo>
-                  <a:pt x="526473" y="12427"/>
-                </a:lnTo>
-                <a:close/>
-                <a:lnTo>
-                  <a:pt x="520931" y="15413"/>
-                </a:lnTo>
-                <a:close/>
-                <a:lnTo>
-                  <a:pt x="515389" y="18389"/>
-                </a:lnTo>
-                <a:close/>
-                <a:lnTo>
-                  <a:pt x="509847" y="21374"/>
-                </a:lnTo>
-                <a:close/>
-                <a:lnTo>
-                  <a:pt x="504305" y="24386"/>
-                </a:lnTo>
-                <a:close/>
-                <a:lnTo>
-                  <a:pt x="498764" y="27443"/>
-                </a:lnTo>
-                <a:close/>
-                <a:lnTo>
-                  <a:pt x="493222" y="30538"/>
-                </a:lnTo>
-                <a:close/>
-                <a:lnTo>
-                  <a:pt x="487680" y="33655"/>
-                </a:lnTo>
-                <a:close/>
-                <a:lnTo>
-                  <a:pt x="482138" y="36778"/>
-                </a:lnTo>
-                <a:close/>
-                <a:lnTo>
-                  <a:pt x="476596" y="39891"/>
-                </a:lnTo>
-                <a:close/>
-                <a:lnTo>
-                  <a:pt x="471055" y="42991"/>
-                </a:lnTo>
-                <a:close/>
-                <a:lnTo>
-                  <a:pt x="465513" y="46089"/>
-                </a:lnTo>
-                <a:close/>
-                <a:lnTo>
-                  <a:pt x="459971" y="49192"/>
-                </a:lnTo>
-                <a:close/>
-                <a:lnTo>
-                  <a:pt x="454429" y="52310"/>
-                </a:lnTo>
-                <a:close/>
-                <a:lnTo>
-                  <a:pt x="448887" y="55437"/>
-                </a:lnTo>
-                <a:close/>
-                <a:lnTo>
-                  <a:pt x="443345" y="58554"/>
-                </a:lnTo>
-                <a:close/>
-                <a:lnTo>
-                  <a:pt x="437804" y="61643"/>
-                </a:lnTo>
-                <a:close/>
-                <a:lnTo>
-                  <a:pt x="432262" y="64684"/>
-                </a:lnTo>
-                <a:close/>
-                <a:lnTo>
-                  <a:pt x="426720" y="67678"/>
-                </a:lnTo>
-                <a:close/>
-                <a:lnTo>
-                  <a:pt x="421178" y="70651"/>
-                </a:lnTo>
-                <a:close/>
-                <a:lnTo>
-                  <a:pt x="415636" y="73634"/>
-                </a:lnTo>
-                <a:close/>
-                <a:lnTo>
-                  <a:pt x="410095" y="76655"/>
-                </a:lnTo>
-                <a:close/>
-                <a:lnTo>
-                  <a:pt x="404553" y="79728"/>
-                </a:lnTo>
-                <a:close/>
-                <a:lnTo>
-                  <a:pt x="399011" y="82838"/>
-                </a:lnTo>
-                <a:close/>
-                <a:lnTo>
-                  <a:pt x="393469" y="85963"/>
-                </a:lnTo>
-                <a:close/>
-                <a:lnTo>
-                  <a:pt x="387927" y="89086"/>
-                </a:lnTo>
-                <a:close/>
-                <a:lnTo>
-                  <a:pt x="382385" y="92193"/>
-                </a:lnTo>
-                <a:close/>
-                <a:lnTo>
-                  <a:pt x="376844" y="95291"/>
-                </a:lnTo>
-                <a:close/>
-                <a:lnTo>
-                  <a:pt x="371302" y="98389"/>
-                </a:lnTo>
-                <a:close/>
-                <a:lnTo>
-                  <a:pt x="365760" y="101498"/>
-                </a:lnTo>
-                <a:close/>
-                <a:lnTo>
-                  <a:pt x="360218" y="104622"/>
-                </a:lnTo>
-                <a:close/>
-                <a:lnTo>
-                  <a:pt x="354676" y="107747"/>
-                </a:lnTo>
-                <a:close/>
-                <a:lnTo>
-                  <a:pt x="349135" y="110853"/>
-                </a:lnTo>
-                <a:close/>
-                <a:lnTo>
-                  <a:pt x="343593" y="113920"/>
-                </a:lnTo>
-                <a:close/>
-                <a:lnTo>
-                  <a:pt x="338051" y="116935"/>
-                </a:lnTo>
-                <a:close/>
-                <a:lnTo>
-                  <a:pt x="332509" y="119915"/>
-                </a:lnTo>
-                <a:close/>
-                <a:lnTo>
-                  <a:pt x="326967" y="122889"/>
-                </a:lnTo>
-                <a:close/>
-                <a:lnTo>
-                  <a:pt x="321425" y="125887"/>
-                </a:lnTo>
-                <a:close/>
-                <a:lnTo>
-                  <a:pt x="315884" y="128935"/>
-                </a:lnTo>
-                <a:close/>
-                <a:lnTo>
-                  <a:pt x="310342" y="132029"/>
-                </a:lnTo>
-                <a:close/>
-                <a:lnTo>
-                  <a:pt x="304800" y="135149"/>
-                </a:lnTo>
-                <a:close/>
-                <a:lnTo>
-                  <a:pt x="299258" y="138275"/>
-                </a:lnTo>
-                <a:close/>
-                <a:lnTo>
-                  <a:pt x="293716" y="141390"/>
-                </a:lnTo>
-                <a:close/>
-                <a:lnTo>
-                  <a:pt x="288175" y="144492"/>
-                </a:lnTo>
-                <a:close/>
-                <a:lnTo>
-                  <a:pt x="282633" y="147588"/>
-                </a:lnTo>
-                <a:close/>
-                <a:lnTo>
-                  <a:pt x="277091" y="150691"/>
-                </a:lnTo>
-                <a:close/>
-                <a:lnTo>
-                  <a:pt x="271549" y="153808"/>
-                </a:lnTo>
-                <a:close/>
-                <a:lnTo>
-                  <a:pt x="266007" y="156935"/>
-                </a:lnTo>
-                <a:close/>
-                <a:lnTo>
-                  <a:pt x="260465" y="160052"/>
-                </a:lnTo>
-                <a:close/>
-                <a:lnTo>
-                  <a:pt x="254924" y="163141"/>
-                </a:lnTo>
-                <a:close/>
-                <a:lnTo>
-                  <a:pt x="249382" y="166183"/>
-                </a:lnTo>
-                <a:close/>
-                <a:lnTo>
-                  <a:pt x="243840" y="169176"/>
-                </a:lnTo>
-                <a:close/>
-                <a:lnTo>
-                  <a:pt x="238298" y="172150"/>
-                </a:lnTo>
-                <a:close/>
-                <a:lnTo>
-                  <a:pt x="232756" y="175133"/>
-                </a:lnTo>
-                <a:close/>
-                <a:lnTo>
-                  <a:pt x="227215" y="178154"/>
-                </a:lnTo>
-                <a:close/>
-                <a:lnTo>
-                  <a:pt x="221673" y="181227"/>
-                </a:lnTo>
-                <a:close/>
-                <a:lnTo>
-                  <a:pt x="216131" y="184336"/>
-                </a:lnTo>
-                <a:close/>
-                <a:lnTo>
-                  <a:pt x="210589" y="187462"/>
-                </a:lnTo>
-                <a:close/>
-                <a:lnTo>
-                  <a:pt x="205047" y="190584"/>
-                </a:lnTo>
-                <a:close/>
-                <a:lnTo>
-                  <a:pt x="199505" y="193691"/>
-                </a:lnTo>
-                <a:close/>
-                <a:lnTo>
-                  <a:pt x="193964" y="196789"/>
-                </a:lnTo>
-                <a:close/>
-                <a:lnTo>
-                  <a:pt x="188422" y="199888"/>
-                </a:lnTo>
-                <a:close/>
-                <a:lnTo>
-                  <a:pt x="182880" y="202996"/>
-                </a:lnTo>
-                <a:close/>
-                <a:lnTo>
-                  <a:pt x="177338" y="206120"/>
-                </a:lnTo>
-                <a:close/>
-                <a:lnTo>
-                  <a:pt x="171796" y="209245"/>
-                </a:lnTo>
-                <a:close/>
-                <a:lnTo>
-                  <a:pt x="166255" y="212351"/>
-                </a:lnTo>
-                <a:close/>
-                <a:lnTo>
-                  <a:pt x="160713" y="215418"/>
-                </a:lnTo>
-                <a:close/>
-                <a:lnTo>
-                  <a:pt x="155171" y="218433"/>
-                </a:lnTo>
-                <a:close/>
-                <a:lnTo>
-                  <a:pt x="149629" y="221414"/>
-                </a:lnTo>
-                <a:close/>
-                <a:lnTo>
-                  <a:pt x="144087" y="224389"/>
-                </a:lnTo>
-                <a:close/>
-                <a:lnTo>
-                  <a:pt x="138545" y="227386"/>
-                </a:lnTo>
-                <a:close/>
-                <a:lnTo>
-                  <a:pt x="133004" y="230432"/>
-                </a:lnTo>
-                <a:close/>
-                <a:lnTo>
-                  <a:pt x="127462" y="233524"/>
-                </a:lnTo>
-                <a:close/>
-                <a:lnTo>
-                  <a:pt x="121920" y="236643"/>
-                </a:lnTo>
-                <a:close/>
-                <a:lnTo>
-                  <a:pt x="116378" y="239772"/>
-                </a:lnTo>
-                <a:close/>
-                <a:lnTo>
-                  <a:pt x="110836" y="242893"/>
-                </a:lnTo>
-                <a:close/>
-                <a:lnTo>
-                  <a:pt x="105295" y="246003"/>
-                </a:lnTo>
-                <a:close/>
-                <a:lnTo>
-                  <a:pt x="99753" y="249103"/>
-                </a:lnTo>
-                <a:close/>
-                <a:lnTo>
-                  <a:pt x="94211" y="252199"/>
-                </a:lnTo>
-                <a:close/>
-                <a:lnTo>
-                  <a:pt x="88669" y="255293"/>
-                </a:lnTo>
-                <a:close/>
-                <a:lnTo>
-                  <a:pt x="83127" y="258389"/>
-                </a:lnTo>
-                <a:close/>
-                <a:lnTo>
-                  <a:pt x="77585" y="261490"/>
-                </a:lnTo>
-                <a:close/>
-                <a:lnTo>
-                  <a:pt x="72044" y="264599"/>
-                </a:lnTo>
-                <a:close/>
-                <a:lnTo>
-                  <a:pt x="66502" y="267718"/>
-                </a:lnTo>
-                <a:close/>
-                <a:lnTo>
-                  <a:pt x="60960" y="270844"/>
-                </a:lnTo>
-                <a:close/>
-                <a:lnTo>
-                  <a:pt x="55418" y="273960"/>
-                </a:lnTo>
-                <a:close/>
-                <a:lnTo>
-                  <a:pt x="49876" y="277054"/>
-                </a:lnTo>
-                <a:close/>
-                <a:lnTo>
-                  <a:pt x="44335" y="280108"/>
-                </a:lnTo>
-                <a:close/>
-                <a:lnTo>
-                  <a:pt x="38793" y="283119"/>
-                </a:lnTo>
-                <a:close/>
-                <a:lnTo>
-                  <a:pt x="33251" y="286104"/>
-                </a:lnTo>
-                <a:close/>
-                <a:lnTo>
-                  <a:pt x="27709" y="289081"/>
-                </a:lnTo>
-                <a:close/>
-                <a:lnTo>
-                  <a:pt x="22167" y="292068"/>
-                </a:lnTo>
-                <a:close/>
-                <a:lnTo>
-                  <a:pt x="16625" y="295084"/>
-                </a:lnTo>
-                <a:close/>
-                <a:lnTo>
-                  <a:pt x="11084" y="298148"/>
-                </a:lnTo>
-                <a:close/>
-                <a:lnTo>
-                  <a:pt x="5542" y="301279"/>
-                </a:lnTo>
-                <a:close/>
-                <a:lnTo>
-                  <a:pt x="0" y="304495"/>
+                  <a:pt x="294131" y="366"/>
+                </a:lnTo>
+                <a:close/>
+                <a:lnTo>
+                  <a:pt x="291077" y="732"/>
+                </a:lnTo>
+                <a:close/>
+                <a:lnTo>
+                  <a:pt x="288018" y="1098"/>
+                </a:lnTo>
+                <a:close/>
+                <a:lnTo>
+                  <a:pt x="284955" y="1464"/>
+                </a:lnTo>
+                <a:close/>
+                <a:lnTo>
+                  <a:pt x="281889" y="1829"/>
+                </a:lnTo>
+                <a:close/>
+                <a:lnTo>
+                  <a:pt x="278821" y="2195"/>
+                </a:lnTo>
+                <a:close/>
+                <a:lnTo>
+                  <a:pt x="275752" y="2560"/>
+                </a:lnTo>
+                <a:close/>
+                <a:lnTo>
+                  <a:pt x="272683" y="2926"/>
+                </a:lnTo>
+                <a:close/>
+                <a:lnTo>
+                  <a:pt x="269614" y="3292"/>
+                </a:lnTo>
+                <a:close/>
+                <a:lnTo>
+                  <a:pt x="266548" y="3658"/>
+                </a:lnTo>
+                <a:close/>
+                <a:lnTo>
+                  <a:pt x="263484" y="4024"/>
+                </a:lnTo>
+                <a:close/>
+                <a:lnTo>
+                  <a:pt x="260424" y="4390"/>
+                </a:lnTo>
+                <a:close/>
+                <a:lnTo>
+                  <a:pt x="257366" y="4756"/>
+                </a:lnTo>
+                <a:close/>
+                <a:lnTo>
+                  <a:pt x="254309" y="5122"/>
+                </a:lnTo>
+                <a:close/>
+                <a:lnTo>
+                  <a:pt x="251251" y="5488"/>
+                </a:lnTo>
+                <a:close/>
+                <a:lnTo>
+                  <a:pt x="248191" y="5853"/>
+                </a:lnTo>
+                <a:close/>
+                <a:lnTo>
+                  <a:pt x="245127" y="6218"/>
+                </a:lnTo>
+                <a:close/>
+                <a:lnTo>
+                  <a:pt x="242060" y="6582"/>
+                </a:lnTo>
+                <a:close/>
+                <a:lnTo>
+                  <a:pt x="238991" y="6946"/>
+                </a:lnTo>
+                <a:close/>
+                <a:lnTo>
+                  <a:pt x="235922" y="7312"/>
+                </a:lnTo>
+                <a:close/>
+                <a:lnTo>
+                  <a:pt x="232854" y="7678"/>
+                </a:lnTo>
+                <a:close/>
+                <a:lnTo>
+                  <a:pt x="229789" y="8047"/>
+                </a:lnTo>
+                <a:close/>
+                <a:lnTo>
+                  <a:pt x="226727" y="8418"/>
+                </a:lnTo>
+                <a:close/>
+                <a:lnTo>
+                  <a:pt x="223669" y="8791"/>
+                </a:lnTo>
+                <a:close/>
+                <a:lnTo>
+                  <a:pt x="220612" y="9166"/>
+                </a:lnTo>
+                <a:close/>
+                <a:lnTo>
+                  <a:pt x="217554" y="9541"/>
+                </a:lnTo>
+                <a:close/>
+                <a:lnTo>
+                  <a:pt x="214495" y="9917"/>
+                </a:lnTo>
+                <a:close/>
+                <a:lnTo>
+                  <a:pt x="211432" y="10292"/>
+                </a:lnTo>
+                <a:close/>
+                <a:lnTo>
+                  <a:pt x="208366" y="10667"/>
+                </a:lnTo>
+                <a:close/>
+                <a:lnTo>
+                  <a:pt x="205297" y="11042"/>
+                </a:lnTo>
+                <a:close/>
+                <a:lnTo>
+                  <a:pt x="202228" y="11415"/>
+                </a:lnTo>
+                <a:close/>
+                <a:lnTo>
+                  <a:pt x="199160" y="11789"/>
+                </a:lnTo>
+                <a:close/>
+                <a:lnTo>
+                  <a:pt x="196093" y="12162"/>
+                </a:lnTo>
+                <a:close/>
+                <a:lnTo>
+                  <a:pt x="193029" y="12534"/>
+                </a:lnTo>
+                <a:close/>
+                <a:lnTo>
+                  <a:pt x="189969" y="12907"/>
+                </a:lnTo>
+                <a:close/>
+                <a:lnTo>
+                  <a:pt x="186910" y="13280"/>
+                </a:lnTo>
+                <a:close/>
+                <a:lnTo>
+                  <a:pt x="183853" y="13654"/>
+                </a:lnTo>
+                <a:close/>
+                <a:lnTo>
+                  <a:pt x="180796" y="14030"/>
+                </a:lnTo>
+                <a:close/>
+                <a:lnTo>
+                  <a:pt x="177740" y="14409"/>
+                </a:lnTo>
+                <a:close/>
+                <a:lnTo>
+                  <a:pt x="174684" y="14789"/>
+                </a:lnTo>
+                <a:close/>
+                <a:lnTo>
+                  <a:pt x="171626" y="15171"/>
+                </a:lnTo>
+                <a:close/>
+                <a:lnTo>
+                  <a:pt x="168568" y="15554"/>
+                </a:lnTo>
+                <a:close/>
+                <a:lnTo>
+                  <a:pt x="165507" y="15938"/>
+                </a:lnTo>
+                <a:close/>
+                <a:lnTo>
+                  <a:pt x="162443" y="16322"/>
+                </a:lnTo>
+                <a:close/>
+                <a:lnTo>
+                  <a:pt x="159377" y="16706"/>
+                </a:lnTo>
+                <a:close/>
+                <a:lnTo>
+                  <a:pt x="156308" y="17089"/>
+                </a:lnTo>
+                <a:close/>
+                <a:lnTo>
+                  <a:pt x="153239" y="17472"/>
+                </a:lnTo>
+                <a:close/>
+                <a:lnTo>
+                  <a:pt x="150171" y="17854"/>
+                </a:lnTo>
+                <a:close/>
+                <a:lnTo>
+                  <a:pt x="147104" y="18235"/>
+                </a:lnTo>
+                <a:close/>
+                <a:lnTo>
+                  <a:pt x="144042" y="18616"/>
+                </a:lnTo>
+                <a:close/>
+                <a:lnTo>
+                  <a:pt x="140982" y="18996"/>
+                </a:lnTo>
+                <a:close/>
+                <a:lnTo>
+                  <a:pt x="137924" y="19377"/>
+                </a:lnTo>
+                <a:close/>
+                <a:lnTo>
+                  <a:pt x="134867" y="19759"/>
+                </a:lnTo>
+                <a:close/>
+                <a:lnTo>
+                  <a:pt x="131809" y="20142"/>
+                </a:lnTo>
+                <a:close/>
+                <a:lnTo>
+                  <a:pt x="128748" y="20529"/>
+                </a:lnTo>
+                <a:close/>
+                <a:lnTo>
+                  <a:pt x="125683" y="20918"/>
+                </a:lnTo>
+                <a:close/>
+                <a:lnTo>
+                  <a:pt x="122615" y="21310"/>
+                </a:lnTo>
+                <a:close/>
+                <a:lnTo>
+                  <a:pt x="119546" y="21702"/>
+                </a:lnTo>
+                <a:close/>
+                <a:lnTo>
+                  <a:pt x="116477" y="22094"/>
+                </a:lnTo>
+                <a:close/>
+                <a:lnTo>
+                  <a:pt x="113410" y="22484"/>
+                </a:lnTo>
+                <a:close/>
+                <a:lnTo>
+                  <a:pt x="110345" y="22870"/>
+                </a:lnTo>
+                <a:close/>
+                <a:lnTo>
+                  <a:pt x="107283" y="23254"/>
+                </a:lnTo>
+                <a:close/>
+                <a:lnTo>
+                  <a:pt x="104223" y="23636"/>
+                </a:lnTo>
+                <a:close/>
+                <a:lnTo>
+                  <a:pt x="101165" y="24017"/>
+                </a:lnTo>
+                <a:close/>
+                <a:lnTo>
+                  <a:pt x="98108" y="24398"/>
+                </a:lnTo>
+                <a:close/>
+                <a:lnTo>
+                  <a:pt x="95052" y="24781"/>
+                </a:lnTo>
+                <a:close/>
+                <a:lnTo>
+                  <a:pt x="91995" y="25166"/>
+                </a:lnTo>
+                <a:close/>
+                <a:lnTo>
+                  <a:pt x="88938" y="25553"/>
+                </a:lnTo>
+                <a:close/>
+                <a:lnTo>
+                  <a:pt x="85880" y="25943"/>
+                </a:lnTo>
+                <a:close/>
+                <a:lnTo>
+                  <a:pt x="82820" y="26336"/>
+                </a:lnTo>
+                <a:close/>
+                <a:lnTo>
+                  <a:pt x="79758" y="26731"/>
+                </a:lnTo>
+                <a:close/>
+                <a:lnTo>
+                  <a:pt x="76695" y="27128"/>
+                </a:lnTo>
+                <a:close/>
+                <a:lnTo>
+                  <a:pt x="73629" y="27528"/>
+                </a:lnTo>
+                <a:close/>
+                <a:lnTo>
+                  <a:pt x="70562" y="27928"/>
+                </a:lnTo>
+                <a:close/>
+                <a:lnTo>
+                  <a:pt x="67494" y="28328"/>
+                </a:lnTo>
+                <a:close/>
+                <a:lnTo>
+                  <a:pt x="64425" y="28727"/>
+                </a:lnTo>
+                <a:close/>
+                <a:lnTo>
+                  <a:pt x="61356" y="29124"/>
+                </a:lnTo>
+                <a:close/>
+                <a:lnTo>
+                  <a:pt x="58288" y="29518"/>
+                </a:lnTo>
+                <a:close/>
+                <a:lnTo>
+                  <a:pt x="55221" y="29909"/>
+                </a:lnTo>
+                <a:close/>
+                <a:lnTo>
+                  <a:pt x="52159" y="30299"/>
+                </a:lnTo>
+                <a:close/>
+                <a:lnTo>
+                  <a:pt x="49102" y="30688"/>
+                </a:lnTo>
+                <a:close/>
+                <a:lnTo>
+                  <a:pt x="46053" y="31078"/>
+                </a:lnTo>
+                <a:close/>
+                <a:lnTo>
+                  <a:pt x="43012" y="31468"/>
+                </a:lnTo>
+                <a:close/>
+                <a:lnTo>
+                  <a:pt x="39976" y="31860"/>
+                </a:lnTo>
+                <a:close/>
+                <a:lnTo>
+                  <a:pt x="36934" y="32255"/>
+                </a:lnTo>
+                <a:close/>
+                <a:lnTo>
+                  <a:pt x="33874" y="32654"/>
+                </a:lnTo>
+                <a:close/>
+                <a:lnTo>
+                  <a:pt x="30787" y="33058"/>
+                </a:lnTo>
+                <a:close/>
+                <a:lnTo>
+                  <a:pt x="27661" y="33467"/>
+                </a:lnTo>
+                <a:close/>
+                <a:lnTo>
+                  <a:pt x="24494" y="33882"/>
+                </a:lnTo>
+                <a:close/>
+                <a:lnTo>
+                  <a:pt x="21322" y="34298"/>
+                </a:lnTo>
+                <a:close/>
+                <a:lnTo>
+                  <a:pt x="18191" y="34707"/>
+                </a:lnTo>
+                <a:close/>
+                <a:lnTo>
+                  <a:pt x="15146" y="35104"/>
+                </a:lnTo>
+                <a:close/>
+                <a:lnTo>
+                  <a:pt x="12230" y="35482"/>
+                </a:lnTo>
+                <a:close/>
+                <a:lnTo>
+                  <a:pt x="9490" y="35835"/>
+                </a:lnTo>
+                <a:close/>
+                <a:lnTo>
+                  <a:pt x="6971" y="36155"/>
+                </a:lnTo>
+                <a:close/>
+                <a:lnTo>
+                  <a:pt x="4717" y="36437"/>
+                </a:lnTo>
+                <a:close/>
+                <a:lnTo>
+                  <a:pt x="2774" y="36674"/>
+                </a:lnTo>
+                <a:close/>
+                <a:lnTo>
+                  <a:pt x="1187" y="36860"/>
+                </a:lnTo>
+                <a:close/>
+                <a:lnTo>
+                  <a:pt x="0" y="36988"/>
                 </a:lnTo>
                 <a:close/>
               </a:path>
@@ -5441,13 +6690,121 @@
       </p:sp>
       <p:sp>
         <p:nvSpPr>
-          <p:cNvPr id="10" name="TextBox 9"/>
+          <p:cNvPr id="11" name="TextBox 10"/>
           <p:cNvSpPr txBox="1"/>
           <p:nvPr/>
         </p:nvSpPr>
         <p:spPr>
           <a:xfrm>
-            <a:off x="5689600" y="2391410"/>
+            <a:off x="4226560" y="2368550"/>
+            <a:ext cx="1524000" cy="508000"/>
+          </a:xfrm>
+          <a:prstGeom prst="rect">
+            <a:avLst/>
+          </a:prstGeom>
+          <a:noFill/>
+        </p:spPr>
+        <p:txBody>
+          <a:bodyPr wrap="none">
+            <a:spAutoFit/>
+          </a:bodyPr>
+          <a:lstStyle/>
+          <a:p>
+            <a:pPr>
+              <a:defRPr sz="1400" b="1">
+                <a:solidFill>
+                  <a:srgbClr val="FFFFFF"/>
+                </a:solidFill>
+                <a:latin typeface="Inter"/>
+              </a:defRPr>
+            </a:pPr>
+            <a:r>
+              <a:t>O</a:t>
+            </a:r>
+          </a:p>
+        </p:txBody>
+      </p:sp>
+      <p:sp>
+        <p:nvSpPr>
+          <p:cNvPr id="12" name="TextBox 11"/>
+          <p:cNvSpPr txBox="1"/>
+          <p:nvPr/>
+        </p:nvSpPr>
+        <p:spPr>
+          <a:xfrm>
+            <a:off x="6329680" y="2368550"/>
+            <a:ext cx="1524000" cy="508000"/>
+          </a:xfrm>
+          <a:prstGeom prst="rect">
+            <a:avLst/>
+          </a:prstGeom>
+          <a:noFill/>
+        </p:spPr>
+        <p:txBody>
+          <a:bodyPr wrap="none">
+            <a:spAutoFit/>
+          </a:bodyPr>
+          <a:lstStyle/>
+          <a:p>
+            <a:pPr>
+              <a:defRPr sz="1400" b="1">
+                <a:solidFill>
+                  <a:srgbClr val="FFFFFF"/>
+                </a:solidFill>
+                <a:latin typeface="Inter"/>
+              </a:defRPr>
+            </a:pPr>
+            <a:r>
+              <a:t>x</a:t>
+            </a:r>
+          </a:p>
+        </p:txBody>
+      </p:sp>
+      <p:sp>
+        <p:nvSpPr>
+          <p:cNvPr id="13" name="TextBox 12"/>
+          <p:cNvSpPr txBox="1"/>
+          <p:nvPr/>
+        </p:nvSpPr>
+        <p:spPr>
+          <a:xfrm>
+            <a:off x="4203700" y="928370"/>
+            <a:ext cx="1524000" cy="508000"/>
+          </a:xfrm>
+          <a:prstGeom prst="rect">
+            <a:avLst/>
+          </a:prstGeom>
+          <a:noFill/>
+        </p:spPr>
+        <p:txBody>
+          <a:bodyPr wrap="none">
+            <a:spAutoFit/>
+          </a:bodyPr>
+          <a:lstStyle/>
+          <a:p>
+            <a:pPr>
+              <a:defRPr sz="1400" b="1">
+                <a:solidFill>
+                  <a:srgbClr val="FFFFFF"/>
+                </a:solidFill>
+                <a:latin typeface="Inter"/>
+              </a:defRPr>
+            </a:pPr>
+            <a:r>
+              <a:t>y</a:t>
+            </a:r>
+          </a:p>
+        </p:txBody>
+      </p:sp>
+      <p:sp>
+        <p:nvSpPr>
+          <p:cNvPr id="14" name="TextBox 13"/>
+          <p:cNvSpPr txBox="1"/>
+          <p:nvPr/>
+        </p:nvSpPr>
+        <p:spPr>
+          <a:xfrm>
+            <a:off x="5461000" y="2414270"/>
             <a:ext cx="1524000" cy="508000"/>
           </a:xfrm>
           <a:prstGeom prst="rect">

--- a/output/6.pptx
+++ b/output/6.pptx
@@ -3104,8 +3104,8 @@
         </p:nvCxnSpPr>
         <p:spPr>
           <a:xfrm>
-            <a:off x="4343400.0" y="2571750.0"/>
-            <a:ext cx="2286000.0" cy="0.0"/>
+            <a:off x="4114800.0" y="2571750.0"/>
+            <a:ext cx="2971800.0" cy="0.0"/>
           </a:xfrm>
           <a:prstGeom prst="line">
             <a:avLst/>
@@ -3139,8 +3139,8 @@
         </p:nvCxnSpPr>
         <p:spPr>
           <a:xfrm flipV="1">
-            <a:off x="4572000.0" y="1200150.0"/>
-            <a:ext cx="0.0" cy="1600200.0"/>
+            <a:off x="4572000.0" y="971550.0"/>
+            <a:ext cx="0.0" cy="2057400.0"/>
           </a:xfrm>
           <a:prstGeom prst="line">
             <a:avLst/>
@@ -3174,8 +3174,8 @@
         </p:nvSpPr>
         <p:spPr>
           <a:xfrm>
-            <a:off x="4572000" y="2143354"/>
-            <a:ext cx="1133490" cy="199796"/>
+            <a:off x="4572000" y="1278788"/>
+            <a:ext cx="2286000" cy="1292962"/>
           </a:xfrm>
           <a:custGeom>
             <a:avLst/>
@@ -3184,1204 +3184,1204 @@
             <a:cxnLst/>
             <a:rect l="l" t="t" r="r" b="b"/>
             <a:pathLst>
-              <a:path w="1133490" h="199796">
+              <a:path w="2286000" h="1292962">
                 <a:moveTo>
-                  <a:pt x="0" y="199796"/>
+                  <a:pt x="0" y="1292962"/>
                 </a:moveTo>
                 <a:lnTo>
-                  <a:pt x="3771" y="194414"/>
-                </a:lnTo>
-                <a:close/>
-                <a:lnTo>
-                  <a:pt x="7562" y="190665"/>
-                </a:lnTo>
-                <a:close/>
-                <a:lnTo>
-                  <a:pt x="11364" y="188114"/>
-                </a:lnTo>
-                <a:close/>
-                <a:lnTo>
-                  <a:pt x="15169" y="186331"/>
-                </a:lnTo>
-                <a:close/>
-                <a:lnTo>
-                  <a:pt x="18970" y="184882"/>
-                </a:lnTo>
-                <a:close/>
-                <a:lnTo>
-                  <a:pt x="22760" y="183414"/>
-                </a:lnTo>
-                <a:close/>
-                <a:lnTo>
-                  <a:pt x="26542" y="181923"/>
-                </a:lnTo>
-                <a:close/>
-                <a:lnTo>
-                  <a:pt x="30322" y="180494"/>
-                </a:lnTo>
-                <a:close/>
-                <a:lnTo>
-                  <a:pt x="34103" y="179154"/>
-                </a:lnTo>
-                <a:close/>
-                <a:lnTo>
-                  <a:pt x="37893" y="177869"/>
-                </a:lnTo>
-                <a:close/>
-                <a:lnTo>
-                  <a:pt x="41695" y="176608"/>
-                </a:lnTo>
-                <a:close/>
-                <a:lnTo>
-                  <a:pt x="45500" y="175374"/>
-                </a:lnTo>
-                <a:close/>
-                <a:lnTo>
-                  <a:pt x="49298" y="174179"/>
-                </a:lnTo>
-                <a:close/>
-                <a:lnTo>
-                  <a:pt x="53084" y="173024"/>
-                </a:lnTo>
-                <a:close/>
-                <a:lnTo>
-                  <a:pt x="56864" y="171900"/>
-                </a:lnTo>
-                <a:close/>
-                <a:lnTo>
-                  <a:pt x="60644" y="170795"/>
-                </a:lnTo>
-                <a:close/>
-                <a:lnTo>
-                  <a:pt x="64429" y="169706"/>
-                </a:lnTo>
-                <a:close/>
-                <a:lnTo>
-                  <a:pt x="68224" y="168631"/>
-                </a:lnTo>
-                <a:close/>
-                <a:lnTo>
-                  <a:pt x="72029" y="167571"/>
-                </a:lnTo>
-                <a:close/>
-                <a:lnTo>
-                  <a:pt x="75832" y="166525"/>
-                </a:lnTo>
-                <a:close/>
-                <a:lnTo>
-                  <a:pt x="79624" y="165494"/>
-                </a:lnTo>
-                <a:close/>
-                <a:lnTo>
-                  <a:pt x="83407" y="164477"/>
-                </a:lnTo>
-                <a:close/>
-                <a:lnTo>
-                  <a:pt x="87186" y="163474"/>
-                </a:lnTo>
-                <a:close/>
-                <a:lnTo>
-                  <a:pt x="90967" y="162484"/>
-                </a:lnTo>
-                <a:close/>
-                <a:lnTo>
-                  <a:pt x="94756" y="161512"/>
-                </a:lnTo>
-                <a:close/>
-                <a:lnTo>
-                  <a:pt x="98557" y="160559"/>
-                </a:lnTo>
-                <a:close/>
-                <a:lnTo>
-                  <a:pt x="102363" y="159617"/>
-                </a:lnTo>
-                <a:close/>
-                <a:lnTo>
-                  <a:pt x="106161" y="158671"/>
-                </a:lnTo>
-                <a:close/>
-                <a:lnTo>
-                  <a:pt x="109948" y="157721"/>
-                </a:lnTo>
-                <a:close/>
-                <a:lnTo>
-                  <a:pt x="113728" y="156778"/>
-                </a:lnTo>
-                <a:close/>
-                <a:lnTo>
-                  <a:pt x="117508" y="155853"/>
-                </a:lnTo>
-                <a:close/>
-                <a:lnTo>
-                  <a:pt x="121292" y="154946"/>
-                </a:lnTo>
-                <a:close/>
-                <a:lnTo>
-                  <a:pt x="125087" y="154050"/>
-                </a:lnTo>
-                <a:close/>
-                <a:lnTo>
-                  <a:pt x="128891" y="153160"/>
-                </a:lnTo>
-                <a:close/>
-                <a:lnTo>
-                  <a:pt x="132695" y="152268"/>
-                </a:lnTo>
-                <a:close/>
-                <a:lnTo>
-                  <a:pt x="136488" y="151371"/>
-                </a:lnTo>
-                <a:close/>
-                <a:lnTo>
-                  <a:pt x="140271" y="150477"/>
-                </a:lnTo>
-                <a:close/>
-                <a:lnTo>
-                  <a:pt x="144050" y="149599"/>
-                </a:lnTo>
-                <a:close/>
-                <a:lnTo>
-                  <a:pt x="147831" y="148742"/>
-                </a:lnTo>
-                <a:close/>
-                <a:lnTo>
-                  <a:pt x="151619" y="147893"/>
-                </a:lnTo>
-                <a:close/>
-                <a:lnTo>
-                  <a:pt x="155420" y="147038"/>
-                </a:lnTo>
-                <a:close/>
-                <a:lnTo>
-                  <a:pt x="159225" y="146181"/>
-                </a:lnTo>
-                <a:close/>
-                <a:lnTo>
-                  <a:pt x="163025" y="145330"/>
-                </a:lnTo>
-                <a:close/>
-                <a:lnTo>
-                  <a:pt x="166812" y="144489"/>
-                </a:lnTo>
-                <a:close/>
-                <a:lnTo>
-                  <a:pt x="170593" y="143657"/>
-                </a:lnTo>
-                <a:close/>
-                <a:lnTo>
-                  <a:pt x="174372" y="142831"/>
-                </a:lnTo>
-                <a:close/>
-                <a:lnTo>
-                  <a:pt x="178156" y="142011"/>
-                </a:lnTo>
-                <a:close/>
-                <a:lnTo>
-                  <a:pt x="181949" y="141202"/>
-                </a:lnTo>
-                <a:close/>
-                <a:lnTo>
-                  <a:pt x="185753" y="140400"/>
-                </a:lnTo>
-                <a:close/>
-                <a:lnTo>
-                  <a:pt x="189558" y="139602"/>
-                </a:lnTo>
-                <a:close/>
-                <a:lnTo>
-                  <a:pt x="193351" y="138799"/>
-                </a:lnTo>
-                <a:close/>
-                <a:lnTo>
-                  <a:pt x="197135" y="137997"/>
-                </a:lnTo>
-                <a:close/>
-                <a:lnTo>
-                  <a:pt x="200914" y="137202"/>
-                </a:lnTo>
-                <a:close/>
-                <a:lnTo>
-                  <a:pt x="204695" y="136419"/>
-                </a:lnTo>
-                <a:close/>
-                <a:lnTo>
-                  <a:pt x="208482" y="135639"/>
-                </a:lnTo>
-                <a:close/>
-                <a:lnTo>
-                  <a:pt x="212282" y="134855"/>
-                </a:lnTo>
-                <a:close/>
-                <a:lnTo>
-                  <a:pt x="216087" y="134071"/>
-                </a:lnTo>
-                <a:close/>
-                <a:lnTo>
-                  <a:pt x="219888" y="133294"/>
-                </a:lnTo>
-                <a:close/>
-                <a:lnTo>
-                  <a:pt x="223676" y="132529"/>
-                </a:lnTo>
-                <a:close/>
-                <a:lnTo>
-                  <a:pt x="227457" y="131767"/>
-                </a:lnTo>
-                <a:close/>
-                <a:lnTo>
-                  <a:pt x="231236" y="131002"/>
-                </a:lnTo>
-                <a:close/>
-                <a:lnTo>
-                  <a:pt x="235019" y="130235"/>
-                </a:lnTo>
-                <a:close/>
-                <a:lnTo>
-                  <a:pt x="238812" y="129476"/>
-                </a:lnTo>
-                <a:close/>
-                <a:lnTo>
-                  <a:pt x="242616" y="128729"/>
-                </a:lnTo>
-                <a:close/>
-                <a:lnTo>
-                  <a:pt x="246420" y="127985"/>
-                </a:lnTo>
-                <a:close/>
-                <a:lnTo>
-                  <a:pt x="250215" y="127239"/>
-                </a:lnTo>
-                <a:close/>
-                <a:lnTo>
-                  <a:pt x="253999" y="126490"/>
-                </a:lnTo>
-                <a:close/>
-                <a:lnTo>
-                  <a:pt x="257778" y="125749"/>
-                </a:lnTo>
-                <a:close/>
-                <a:lnTo>
-                  <a:pt x="261559" y="125020"/>
-                </a:lnTo>
-                <a:close/>
-                <a:lnTo>
-                  <a:pt x="265346" y="124294"/>
-                </a:lnTo>
-                <a:close/>
-                <a:lnTo>
-                  <a:pt x="269144" y="123566"/>
-                </a:lnTo>
-                <a:close/>
-                <a:lnTo>
-                  <a:pt x="272950" y="122836"/>
-                </a:lnTo>
-                <a:close/>
-                <a:lnTo>
-                  <a:pt x="276751" y="122113"/>
-                </a:lnTo>
-                <a:close/>
-                <a:lnTo>
-                  <a:pt x="280540" y="121400"/>
-                </a:lnTo>
-                <a:close/>
-                <a:lnTo>
-                  <a:pt x="284321" y="120693"/>
-                </a:lnTo>
-                <a:close/>
-                <a:lnTo>
-                  <a:pt x="288100" y="119986"/>
-                </a:lnTo>
-                <a:close/>
-                <a:lnTo>
-                  <a:pt x="291883" y="119277"/>
-                </a:lnTo>
-                <a:close/>
-                <a:lnTo>
-                  <a:pt x="295675" y="118565"/>
-                </a:lnTo>
-                <a:close/>
-                <a:lnTo>
-                  <a:pt x="299478" y="117852"/>
-                </a:lnTo>
-                <a:close/>
-                <a:lnTo>
-                  <a:pt x="303283" y="117143"/>
-                </a:lnTo>
-                <a:close/>
-                <a:lnTo>
-                  <a:pt x="307078" y="116445"/>
-                </a:lnTo>
-                <a:close/>
-                <a:lnTo>
-                  <a:pt x="310863" y="115754"/>
-                </a:lnTo>
-                <a:close/>
-                <a:lnTo>
-                  <a:pt x="314643" y="115064"/>
-                </a:lnTo>
-                <a:close/>
-                <a:lnTo>
-                  <a:pt x="318423" y="114371"/>
-                </a:lnTo>
-                <a:close/>
-                <a:lnTo>
-                  <a:pt x="322209" y="113679"/>
-                </a:lnTo>
-                <a:close/>
-                <a:lnTo>
-                  <a:pt x="326006" y="112997"/>
-                </a:lnTo>
-                <a:close/>
-                <a:lnTo>
-                  <a:pt x="329812" y="112324"/>
-                </a:lnTo>
-                <a:close/>
-                <a:lnTo>
-                  <a:pt x="333614" y="111654"/>
-                </a:lnTo>
-                <a:close/>
-                <a:lnTo>
-                  <a:pt x="337404" y="110982"/>
-                </a:lnTo>
-                <a:close/>
-                <a:lnTo>
-                  <a:pt x="341185" y="110308"/>
-                </a:lnTo>
-                <a:close/>
-                <a:lnTo>
-                  <a:pt x="344964" y="109634"/>
-                </a:lnTo>
-                <a:close/>
-                <a:lnTo>
-                  <a:pt x="348746" y="108961"/>
-                </a:lnTo>
-                <a:close/>
-                <a:lnTo>
-                  <a:pt x="352537" y="108288"/>
-                </a:lnTo>
-                <a:close/>
-                <a:lnTo>
-                  <a:pt x="356340" y="107612"/>
-                </a:lnTo>
-                <a:close/>
-                <a:lnTo>
-                  <a:pt x="360145" y="106939"/>
-                </a:lnTo>
-                <a:close/>
-                <a:lnTo>
-                  <a:pt x="363942" y="106272"/>
-                </a:lnTo>
-                <a:close/>
-                <a:lnTo>
-                  <a:pt x="367727" y="105614"/>
-                </a:lnTo>
-                <a:close/>
-                <a:lnTo>
-                  <a:pt x="371507" y="104967"/>
-                </a:lnTo>
-                <a:close/>
-                <a:lnTo>
-                  <a:pt x="375286" y="104331"/>
-                </a:lnTo>
-                <a:close/>
-                <a:lnTo>
-                  <a:pt x="379072" y="103696"/>
-                </a:lnTo>
-                <a:close/>
-                <a:lnTo>
-                  <a:pt x="382869" y="103050"/>
-                </a:lnTo>
-                <a:close/>
-                <a:lnTo>
-                  <a:pt x="386674" y="102394"/>
-                </a:lnTo>
-                <a:close/>
-                <a:lnTo>
-                  <a:pt x="390476" y="101738"/>
-                </a:lnTo>
-                <a:close/>
-                <a:lnTo>
-                  <a:pt x="394267" y="101091"/>
-                </a:lnTo>
-                <a:close/>
-                <a:lnTo>
-                  <a:pt x="398049" y="100457"/>
-                </a:lnTo>
-                <a:close/>
-                <a:lnTo>
-                  <a:pt x="401828" y="99835"/>
-                </a:lnTo>
-                <a:close/>
-                <a:lnTo>
-                  <a:pt x="405610" y="99219"/>
-                </a:lnTo>
-                <a:close/>
-                <a:lnTo>
-                  <a:pt x="409400" y="98598"/>
-                </a:lnTo>
-                <a:close/>
-                <a:lnTo>
-                  <a:pt x="413202" y="97963"/>
-                </a:lnTo>
-                <a:close/>
-                <a:lnTo>
-                  <a:pt x="417007" y="97324"/>
-                </a:lnTo>
-                <a:close/>
-                <a:lnTo>
-                  <a:pt x="420805" y="96692"/>
-                </a:lnTo>
-                <a:close/>
-                <a:lnTo>
-                  <a:pt x="424591" y="96073"/>
-                </a:lnTo>
-                <a:close/>
-                <a:lnTo>
-                  <a:pt x="428371" y="95459"/>
-                </a:lnTo>
-                <a:close/>
-                <a:lnTo>
-                  <a:pt x="432151" y="94841"/>
-                </a:lnTo>
-                <a:close/>
-                <a:lnTo>
-                  <a:pt x="435935" y="94222"/>
-                </a:lnTo>
-                <a:close/>
-                <a:lnTo>
-                  <a:pt x="439731" y="93603"/>
-                </a:lnTo>
-                <a:close/>
-                <a:lnTo>
-                  <a:pt x="443536" y="92985"/>
-                </a:lnTo>
-                <a:close/>
-                <a:lnTo>
-                  <a:pt x="447339" y="92366"/>
-                </a:lnTo>
-                <a:close/>
-                <a:lnTo>
-                  <a:pt x="451131" y="91744"/>
-                </a:lnTo>
-                <a:close/>
-                <a:lnTo>
-                  <a:pt x="454913" y="91125"/>
-                </a:lnTo>
-                <a:close/>
-                <a:lnTo>
-                  <a:pt x="458693" y="90514"/>
-                </a:lnTo>
-                <a:close/>
-                <a:lnTo>
-                  <a:pt x="462474" y="89913"/>
-                </a:lnTo>
-                <a:close/>
-                <a:lnTo>
-                  <a:pt x="466263" y="89315"/>
-                </a:lnTo>
-                <a:close/>
-                <a:lnTo>
-                  <a:pt x="470064" y="88716"/>
-                </a:lnTo>
-                <a:close/>
-                <a:lnTo>
-                  <a:pt x="473870" y="88115"/>
-                </a:lnTo>
-                <a:close/>
-                <a:lnTo>
-                  <a:pt x="477668" y="87514"/>
-                </a:lnTo>
-                <a:close/>
-                <a:lnTo>
-                  <a:pt x="481455" y="86915"/>
-                </a:lnTo>
-                <a:close/>
-                <a:lnTo>
-                  <a:pt x="485235" y="86314"/>
-                </a:lnTo>
-                <a:close/>
-                <a:lnTo>
-                  <a:pt x="489015" y="85710"/>
-                </a:lnTo>
-                <a:close/>
-                <a:lnTo>
-                  <a:pt x="492799" y="85109"/>
-                </a:lnTo>
-                <a:close/>
-                <a:lnTo>
-                  <a:pt x="496594" y="84516"/>
-                </a:lnTo>
-                <a:close/>
-                <a:lnTo>
-                  <a:pt x="500398" y="83932"/>
-                </a:lnTo>
-                <a:close/>
-                <a:lnTo>
-                  <a:pt x="504202" y="83353"/>
-                </a:lnTo>
-                <a:close/>
-                <a:lnTo>
-                  <a:pt x="507995" y="82772"/>
-                </a:lnTo>
-                <a:close/>
-                <a:lnTo>
-                  <a:pt x="511778" y="82189"/>
-                </a:lnTo>
-                <a:close/>
-                <a:lnTo>
-                  <a:pt x="515557" y="81607"/>
-                </a:lnTo>
-                <a:close/>
-                <a:lnTo>
-                  <a:pt x="519338" y="81026"/>
-                </a:lnTo>
-                <a:close/>
-                <a:lnTo>
-                  <a:pt x="523126" y="80443"/>
-                </a:lnTo>
-                <a:close/>
-                <a:lnTo>
-                  <a:pt x="526927" y="79857"/>
-                </a:lnTo>
-                <a:close/>
-                <a:lnTo>
-                  <a:pt x="530732" y="79273"/>
-                </a:lnTo>
-                <a:close/>
-                <a:lnTo>
-                  <a:pt x="534531" y="78700"/>
-                </a:lnTo>
-                <a:close/>
-                <a:lnTo>
-                  <a:pt x="538319" y="78138"/>
-                </a:lnTo>
-                <a:close/>
-                <a:lnTo>
-                  <a:pt x="542099" y="77574"/>
-                </a:lnTo>
-                <a:close/>
-                <a:lnTo>
-                  <a:pt x="545879" y="76996"/>
-                </a:lnTo>
-                <a:close/>
-                <a:lnTo>
-                  <a:pt x="549662" y="76411"/>
-                </a:lnTo>
-                <a:close/>
-                <a:lnTo>
-                  <a:pt x="553456" y="75832"/>
-                </a:lnTo>
-                <a:close/>
-                <a:lnTo>
-                  <a:pt x="557260" y="75267"/>
-                </a:lnTo>
-                <a:close/>
-                <a:lnTo>
-                  <a:pt x="561065" y="74706"/>
-                </a:lnTo>
-                <a:close/>
-                <a:lnTo>
-                  <a:pt x="564858" y="74141"/>
-                </a:lnTo>
-                <a:close/>
-                <a:lnTo>
-                  <a:pt x="568642" y="73574"/>
-                </a:lnTo>
-                <a:close/>
-                <a:lnTo>
-                  <a:pt x="572421" y="73017"/>
-                </a:lnTo>
-                <a:close/>
-                <a:lnTo>
-                  <a:pt x="576201" y="72473"/>
-                </a:lnTo>
-                <a:close/>
-                <a:lnTo>
-                  <a:pt x="579989" y="71929"/>
-                </a:lnTo>
-                <a:close/>
-                <a:lnTo>
-                  <a:pt x="583789" y="71370"/>
-                </a:lnTo>
-                <a:close/>
-                <a:lnTo>
-                  <a:pt x="587594" y="70803"/>
-                </a:lnTo>
-                <a:close/>
-                <a:lnTo>
-                  <a:pt x="591394" y="70241"/>
-                </a:lnTo>
-                <a:close/>
-                <a:lnTo>
-                  <a:pt x="595183" y="69693"/>
-                </a:lnTo>
-                <a:close/>
-                <a:lnTo>
-                  <a:pt x="598964" y="69150"/>
-                </a:lnTo>
-                <a:close/>
-                <a:lnTo>
-                  <a:pt x="602743" y="68607"/>
-                </a:lnTo>
-                <a:close/>
-                <a:lnTo>
-                  <a:pt x="606526" y="68061"/>
-                </a:lnTo>
-                <a:close/>
-                <a:lnTo>
-                  <a:pt x="610319" y="67514"/>
-                </a:lnTo>
-                <a:close/>
-                <a:lnTo>
-                  <a:pt x="614123" y="66967"/>
-                </a:lnTo>
-                <a:close/>
-                <a:lnTo>
-                  <a:pt x="617927" y="66422"/>
-                </a:lnTo>
-                <a:close/>
-                <a:lnTo>
-                  <a:pt x="621722" y="65877"/>
-                </a:lnTo>
-                <a:close/>
-                <a:lnTo>
-                  <a:pt x="625506" y="65331"/>
-                </a:lnTo>
-                <a:close/>
-                <a:lnTo>
-                  <a:pt x="629285" y="64784"/>
-                </a:lnTo>
-                <a:close/>
-                <a:lnTo>
-                  <a:pt x="633065" y="64235"/>
-                </a:lnTo>
-                <a:close/>
-                <a:lnTo>
-                  <a:pt x="636852" y="63691"/>
-                </a:lnTo>
-                <a:close/>
-                <a:lnTo>
-                  <a:pt x="640651" y="63155"/>
-                </a:lnTo>
-                <a:close/>
-                <a:lnTo>
-                  <a:pt x="644457" y="62627"/>
-                </a:lnTo>
-                <a:close/>
-                <a:lnTo>
-                  <a:pt x="648258" y="62104"/>
-                </a:lnTo>
-                <a:close/>
-                <a:lnTo>
-                  <a:pt x="652047" y="61581"/>
-                </a:lnTo>
-                <a:close/>
-                <a:lnTo>
-                  <a:pt x="655828" y="61052"/>
-                </a:lnTo>
-                <a:close/>
-                <a:lnTo>
-                  <a:pt x="659607" y="60510"/>
-                </a:lnTo>
-                <a:close/>
-                <a:lnTo>
-                  <a:pt x="663389" y="59962"/>
-                </a:lnTo>
-                <a:close/>
-                <a:lnTo>
-                  <a:pt x="667182" y="59418"/>
-                </a:lnTo>
-                <a:close/>
-                <a:lnTo>
-                  <a:pt x="670985" y="58887"/>
-                </a:lnTo>
-                <a:close/>
-                <a:lnTo>
-                  <a:pt x="674790" y="58362"/>
-                </a:lnTo>
-                <a:close/>
-                <a:lnTo>
-                  <a:pt x="678585" y="57837"/>
-                </a:lnTo>
-                <a:close/>
-                <a:lnTo>
-                  <a:pt x="682370" y="57310"/>
-                </a:lnTo>
-                <a:close/>
-                <a:lnTo>
-                  <a:pt x="686149" y="56781"/>
-                </a:lnTo>
-                <a:close/>
-                <a:lnTo>
-                  <a:pt x="689929" y="56252"/>
-                </a:lnTo>
-                <a:close/>
-                <a:lnTo>
-                  <a:pt x="693716" y="55725"/>
-                </a:lnTo>
-                <a:close/>
-                <a:lnTo>
-                  <a:pt x="697513" y="55198"/>
-                </a:lnTo>
-                <a:close/>
-                <a:lnTo>
-                  <a:pt x="701319" y="54671"/>
-                </a:lnTo>
-                <a:close/>
-                <a:lnTo>
-                  <a:pt x="705120" y="54142"/>
-                </a:lnTo>
-                <a:close/>
-                <a:lnTo>
-                  <a:pt x="708910" y="53610"/>
-                </a:lnTo>
-                <a:close/>
-                <a:lnTo>
-                  <a:pt x="712692" y="53083"/>
-                </a:lnTo>
-                <a:close/>
-                <a:lnTo>
-                  <a:pt x="716471" y="52568"/>
-                </a:lnTo>
-                <a:close/>
-                <a:lnTo>
-                  <a:pt x="720253" y="52062"/>
-                </a:lnTo>
-                <a:close/>
-                <a:lnTo>
-                  <a:pt x="724044" y="51550"/>
-                </a:lnTo>
-                <a:close/>
-                <a:lnTo>
-                  <a:pt x="727847" y="51024"/>
-                </a:lnTo>
-                <a:close/>
-                <a:lnTo>
-                  <a:pt x="731652" y="50493"/>
-                </a:lnTo>
-                <a:close/>
-                <a:lnTo>
-                  <a:pt x="735449" y="49972"/>
-                </a:lnTo>
-                <a:close/>
-                <a:lnTo>
-                  <a:pt x="739234" y="49463"/>
-                </a:lnTo>
-                <a:close/>
-                <a:lnTo>
-                  <a:pt x="743014" y="48957"/>
-                </a:lnTo>
-                <a:close/>
-                <a:lnTo>
-                  <a:pt x="746793" y="48449"/>
-                </a:lnTo>
-                <a:close/>
-                <a:lnTo>
-                  <a:pt x="750579" y="47939"/>
-                </a:lnTo>
-                <a:close/>
-                <a:lnTo>
-                  <a:pt x="754376" y="47428"/>
-                </a:lnTo>
-                <a:close/>
-                <a:lnTo>
-                  <a:pt x="758181" y="46919"/>
-                </a:lnTo>
-                <a:close/>
-                <a:lnTo>
-                  <a:pt x="761983" y="46410"/>
-                </a:lnTo>
-                <a:close/>
-                <a:lnTo>
-                  <a:pt x="765774" y="45900"/>
-                </a:lnTo>
-                <a:close/>
-                <a:lnTo>
-                  <a:pt x="769556" y="45391"/>
-                </a:lnTo>
-                <a:close/>
-                <a:lnTo>
-                  <a:pt x="773335" y="44881"/>
-                </a:lnTo>
-                <a:close/>
-                <a:lnTo>
-                  <a:pt x="777117" y="44371"/>
-                </a:lnTo>
-                <a:close/>
-                <a:lnTo>
-                  <a:pt x="780907" y="43862"/>
-                </a:lnTo>
-                <a:close/>
-                <a:lnTo>
-                  <a:pt x="784709" y="43354"/>
-                </a:lnTo>
-                <a:close/>
-                <a:lnTo>
-                  <a:pt x="788514" y="42844"/>
-                </a:lnTo>
-                <a:close/>
-                <a:lnTo>
-                  <a:pt x="792312" y="42332"/>
-                </a:lnTo>
-                <a:close/>
-                <a:lnTo>
-                  <a:pt x="796098" y="41819"/>
-                </a:lnTo>
-                <a:close/>
-                <a:lnTo>
-                  <a:pt x="799878" y="41314"/>
-                </a:lnTo>
-                <a:close/>
-                <a:lnTo>
-                  <a:pt x="803657" y="40822"/>
-                </a:lnTo>
-                <a:close/>
-                <a:lnTo>
-                  <a:pt x="807442" y="40334"/>
-                </a:lnTo>
-                <a:close/>
-                <a:lnTo>
-                  <a:pt x="811238" y="39834"/>
-                </a:lnTo>
-                <a:close/>
-                <a:lnTo>
-                  <a:pt x="815043" y="39323"/>
-                </a:lnTo>
-                <a:close/>
-                <a:lnTo>
-                  <a:pt x="818846" y="38813"/>
-                </a:lnTo>
-                <a:close/>
-                <a:lnTo>
-                  <a:pt x="822638" y="38315"/>
-                </a:lnTo>
-                <a:close/>
-                <a:lnTo>
-                  <a:pt x="826420" y="37826"/>
-                </a:lnTo>
-                <a:close/>
-                <a:lnTo>
-                  <a:pt x="830199" y="37339"/>
-                </a:lnTo>
-                <a:close/>
-                <a:lnTo>
-                  <a:pt x="833981" y="36847"/>
-                </a:lnTo>
-                <a:close/>
-                <a:lnTo>
-                  <a:pt x="837770" y="36355"/>
-                </a:lnTo>
-                <a:close/>
-                <a:lnTo>
-                  <a:pt x="841571" y="35863"/>
-                </a:lnTo>
-                <a:close/>
-                <a:lnTo>
-                  <a:pt x="845377" y="35372"/>
-                </a:lnTo>
-                <a:close/>
-                <a:lnTo>
-                  <a:pt x="849175" y="34881"/>
-                </a:lnTo>
-                <a:close/>
-                <a:lnTo>
-                  <a:pt x="852962" y="34389"/>
-                </a:lnTo>
-                <a:close/>
-                <a:lnTo>
-                  <a:pt x="856742" y="33898"/>
-                </a:lnTo>
-                <a:close/>
-                <a:lnTo>
-                  <a:pt x="860521" y="33408"/>
-                </a:lnTo>
-                <a:close/>
-                <a:lnTo>
-                  <a:pt x="864306" y="32917"/>
-                </a:lnTo>
-                <a:close/>
-                <a:lnTo>
-                  <a:pt x="868101" y="32423"/>
-                </a:lnTo>
-                <a:close/>
-                <a:lnTo>
-                  <a:pt x="871905" y="31928"/>
-                </a:lnTo>
-                <a:close/>
-                <a:lnTo>
-                  <a:pt x="875709" y="31440"/>
-                </a:lnTo>
-                <a:close/>
-                <a:lnTo>
-                  <a:pt x="879501" y="30965"/>
-                </a:lnTo>
-                <a:close/>
-                <a:lnTo>
-                  <a:pt x="883284" y="30495"/>
-                </a:lnTo>
-                <a:close/>
-                <a:lnTo>
-                  <a:pt x="887063" y="30016"/>
-                </a:lnTo>
-                <a:close/>
-                <a:lnTo>
-                  <a:pt x="890844" y="29524"/>
-                </a:lnTo>
-                <a:close/>
-                <a:lnTo>
-                  <a:pt x="894633" y="29030"/>
-                </a:lnTo>
-                <a:close/>
-                <a:lnTo>
-                  <a:pt x="898434" y="28549"/>
-                </a:lnTo>
-                <a:close/>
-                <a:lnTo>
-                  <a:pt x="902239" y="28077"/>
-                </a:lnTo>
-                <a:close/>
-                <a:lnTo>
-                  <a:pt x="906038" y="27610"/>
-                </a:lnTo>
-                <a:close/>
-                <a:lnTo>
-                  <a:pt x="909826" y="27141"/>
-                </a:lnTo>
-                <a:close/>
-                <a:lnTo>
-                  <a:pt x="913606" y="26665"/>
-                </a:lnTo>
-                <a:close/>
-                <a:lnTo>
-                  <a:pt x="917385" y="26176"/>
-                </a:lnTo>
-                <a:close/>
-                <a:lnTo>
-                  <a:pt x="921169" y="25682"/>
-                </a:lnTo>
-                <a:close/>
-                <a:lnTo>
-                  <a:pt x="924963" y="25195"/>
-                </a:lnTo>
-                <a:close/>
-                <a:lnTo>
-                  <a:pt x="928767" y="24720"/>
-                </a:lnTo>
-                <a:close/>
-                <a:lnTo>
-                  <a:pt x="932571" y="24250"/>
-                </a:lnTo>
-                <a:close/>
-                <a:lnTo>
-                  <a:pt x="936365" y="23779"/>
-                </a:lnTo>
-                <a:close/>
-                <a:lnTo>
-                  <a:pt x="940148" y="23306"/>
-                </a:lnTo>
-                <a:close/>
-                <a:lnTo>
-                  <a:pt x="943928" y="22832"/>
-                </a:lnTo>
-                <a:close/>
-                <a:lnTo>
-                  <a:pt x="947708" y="22358"/>
-                </a:lnTo>
-                <a:close/>
-                <a:lnTo>
-                  <a:pt x="951496" y="21886"/>
-                </a:lnTo>
-                <a:close/>
-                <a:lnTo>
-                  <a:pt x="955296" y="21412"/>
-                </a:lnTo>
-                <a:close/>
-                <a:lnTo>
-                  <a:pt x="959101" y="20939"/>
-                </a:lnTo>
-                <a:close/>
-                <a:lnTo>
-                  <a:pt x="962901" y="20466"/>
-                </a:lnTo>
-                <a:close/>
-                <a:lnTo>
-                  <a:pt x="966690" y="19994"/>
-                </a:lnTo>
-                <a:close/>
-                <a:lnTo>
-                  <a:pt x="970470" y="19521"/>
-                </a:lnTo>
-                <a:close/>
-                <a:lnTo>
-                  <a:pt x="974249" y="19044"/>
-                </a:lnTo>
-                <a:close/>
-                <a:lnTo>
-                  <a:pt x="978033" y="18569"/>
-                </a:lnTo>
-                <a:close/>
-                <a:lnTo>
-                  <a:pt x="981826" y="18104"/>
-                </a:lnTo>
-                <a:close/>
-                <a:lnTo>
-                  <a:pt x="985630" y="17651"/>
-                </a:lnTo>
-                <a:close/>
-                <a:lnTo>
-                  <a:pt x="989434" y="17197"/>
-                </a:lnTo>
-                <a:close/>
-                <a:lnTo>
-                  <a:pt x="993229" y="16729"/>
-                </a:lnTo>
-                <a:close/>
-                <a:lnTo>
-                  <a:pt x="997013" y="16252"/>
-                </a:lnTo>
-                <a:close/>
-                <a:lnTo>
-                  <a:pt x="1000792" y="15783"/>
-                </a:lnTo>
-                <a:close/>
-                <a:lnTo>
-                  <a:pt x="1004572" y="15329"/>
-                </a:lnTo>
-                <a:close/>
-                <a:lnTo>
-                  <a:pt x="1008359" y="14876"/>
-                </a:lnTo>
-                <a:close/>
-                <a:lnTo>
-                  <a:pt x="1012158" y="14410"/>
-                </a:lnTo>
-                <a:close/>
-                <a:lnTo>
-                  <a:pt x="1015964" y="13934"/>
-                </a:lnTo>
-                <a:close/>
-                <a:lnTo>
-                  <a:pt x="1019764" y="13462"/>
-                </a:lnTo>
-                <a:close/>
-                <a:lnTo>
-                  <a:pt x="1023553" y="13004"/>
-                </a:lnTo>
-                <a:close/>
-                <a:lnTo>
-                  <a:pt x="1027335" y="12553"/>
-                </a:lnTo>
-                <a:close/>
-                <a:lnTo>
-                  <a:pt x="1031114" y="12100"/>
-                </a:lnTo>
-                <a:close/>
-                <a:lnTo>
-                  <a:pt x="1034896" y="11645"/>
-                </a:lnTo>
-                <a:close/>
-                <a:lnTo>
-                  <a:pt x="1038688" y="11189"/>
-                </a:lnTo>
-                <a:close/>
-                <a:lnTo>
-                  <a:pt x="1042492" y="10734"/>
-                </a:lnTo>
-                <a:close/>
-                <a:lnTo>
-                  <a:pt x="1046297" y="10280"/>
-                </a:lnTo>
-                <a:close/>
-                <a:lnTo>
-                  <a:pt x="1050092" y="9825"/>
-                </a:lnTo>
-                <a:close/>
-                <a:lnTo>
-                  <a:pt x="1053877" y="9369"/>
-                </a:lnTo>
-                <a:close/>
-                <a:lnTo>
-                  <a:pt x="1057656" y="8915"/>
-                </a:lnTo>
-                <a:close/>
-                <a:lnTo>
-                  <a:pt x="1061436" y="8461"/>
-                </a:lnTo>
-                <a:close/>
-                <a:lnTo>
-                  <a:pt x="1065222" y="8006"/>
-                </a:lnTo>
-                <a:close/>
-                <a:lnTo>
-                  <a:pt x="1069020" y="7548"/>
-                </a:lnTo>
-                <a:close/>
-                <a:lnTo>
-                  <a:pt x="1072826" y="7090"/>
-                </a:lnTo>
-                <a:close/>
-                <a:lnTo>
-                  <a:pt x="1076627" y="6641"/>
-                </a:lnTo>
-                <a:close/>
-                <a:lnTo>
-                  <a:pt x="1080417" y="6206"/>
-                </a:lnTo>
-                <a:close/>
-                <a:lnTo>
-                  <a:pt x="1084199" y="5771"/>
-                </a:lnTo>
-                <a:close/>
-                <a:lnTo>
-                  <a:pt x="1087978" y="5323"/>
-                </a:lnTo>
-                <a:close/>
-                <a:lnTo>
-                  <a:pt x="1091760" y="4865"/>
-                </a:lnTo>
-                <a:close/>
-                <a:lnTo>
-                  <a:pt x="1095551" y="4412"/>
-                </a:lnTo>
-                <a:close/>
-                <a:lnTo>
-                  <a:pt x="1099354" y="3975"/>
-                </a:lnTo>
-                <a:close/>
-                <a:lnTo>
-                  <a:pt x="1103159" y="3541"/>
-                </a:lnTo>
-                <a:close/>
-                <a:lnTo>
-                  <a:pt x="1106955" y="3095"/>
-                </a:lnTo>
-                <a:close/>
-                <a:lnTo>
-                  <a:pt x="1110740" y="2638"/>
-                </a:lnTo>
-                <a:close/>
-                <a:lnTo>
-                  <a:pt x="1114520" y="2183"/>
-                </a:lnTo>
-                <a:close/>
-                <a:lnTo>
-                  <a:pt x="1118302" y="1740"/>
-                </a:lnTo>
-                <a:close/>
-                <a:lnTo>
-                  <a:pt x="1122088" y="1307"/>
-                </a:lnTo>
-                <a:close/>
-                <a:lnTo>
-                  <a:pt x="1125879" y="876"/>
-                </a:lnTo>
-                <a:close/>
-                <a:lnTo>
-                  <a:pt x="1129680" y="443"/>
-                </a:lnTo>
-                <a:close/>
-                <a:lnTo>
-                  <a:pt x="1133490" y="0"/>
+                  <a:pt x="2510" y="1275121"/>
+                </a:lnTo>
+                <a:close/>
+                <a:lnTo>
+                  <a:pt x="4894" y="1258761"/>
+                </a:lnTo>
+                <a:close/>
+                <a:lnTo>
+                  <a:pt x="7164" y="1243797"/>
+                </a:lnTo>
+                <a:close/>
+                <a:lnTo>
+                  <a:pt x="9332" y="1230143"/>
+                </a:lnTo>
+                <a:close/>
+                <a:lnTo>
+                  <a:pt x="11412" y="1217713"/>
+                </a:lnTo>
+                <a:close/>
+                <a:lnTo>
+                  <a:pt x="13415" y="1206423"/>
+                </a:lnTo>
+                <a:close/>
+                <a:lnTo>
+                  <a:pt x="15354" y="1196186"/>
+                </a:lnTo>
+                <a:close/>
+                <a:lnTo>
+                  <a:pt x="17243" y="1186916"/>
+                </a:lnTo>
+                <a:close/>
+                <a:lnTo>
+                  <a:pt x="19092" y="1178529"/>
+                </a:lnTo>
+                <a:close/>
+                <a:lnTo>
+                  <a:pt x="20916" y="1170938"/>
+                </a:lnTo>
+                <a:close/>
+                <a:lnTo>
+                  <a:pt x="22726" y="1164058"/>
+                </a:lnTo>
+                <a:close/>
+                <a:lnTo>
+                  <a:pt x="24535" y="1157803"/>
+                </a:lnTo>
+                <a:close/>
+                <a:lnTo>
+                  <a:pt x="26356" y="1152088"/>
+                </a:lnTo>
+                <a:close/>
+                <a:lnTo>
+                  <a:pt x="28201" y="1146827"/>
+                </a:lnTo>
+                <a:close/>
+                <a:lnTo>
+                  <a:pt x="30083" y="1141934"/>
+                </a:lnTo>
+                <a:close/>
+                <a:lnTo>
+                  <a:pt x="32014" y="1137324"/>
+                </a:lnTo>
+                <a:close/>
+                <a:lnTo>
+                  <a:pt x="34007" y="1132910"/>
+                </a:lnTo>
+                <a:close/>
+                <a:lnTo>
+                  <a:pt x="36075" y="1128609"/>
+                </a:lnTo>
+                <a:close/>
+                <a:lnTo>
+                  <a:pt x="38229" y="1124333"/>
+                </a:lnTo>
+                <a:close/>
+                <a:lnTo>
+                  <a:pt x="40483" y="1119998"/>
+                </a:lnTo>
+                <a:close/>
+                <a:lnTo>
+                  <a:pt x="42849" y="1115517"/>
+                </a:lnTo>
+                <a:close/>
+                <a:lnTo>
+                  <a:pt x="45340" y="1110805"/>
+                </a:lnTo>
+                <a:close/>
+                <a:lnTo>
+                  <a:pt x="47970" y="1105785"/>
+                </a:lnTo>
+                <a:close/>
+                <a:lnTo>
+                  <a:pt x="50772" y="1100430"/>
+                </a:lnTo>
+                <a:close/>
+                <a:lnTo>
+                  <a:pt x="53784" y="1094734"/>
+                </a:lnTo>
+                <a:close/>
+                <a:lnTo>
+                  <a:pt x="57045" y="1088692"/>
+                </a:lnTo>
+                <a:close/>
+                <a:lnTo>
+                  <a:pt x="60591" y="1082296"/>
+                </a:lnTo>
+                <a:close/>
+                <a:lnTo>
+                  <a:pt x="64461" y="1075541"/>
+                </a:lnTo>
+                <a:close/>
+                <a:lnTo>
+                  <a:pt x="68695" y="1068421"/>
+                </a:lnTo>
+                <a:close/>
+                <a:lnTo>
+                  <a:pt x="73329" y="1060929"/>
+                </a:lnTo>
+                <a:close/>
+                <a:lnTo>
+                  <a:pt x="78402" y="1053059"/>
+                </a:lnTo>
+                <a:close/>
+                <a:lnTo>
+                  <a:pt x="83952" y="1044805"/>
+                </a:lnTo>
+                <a:close/>
+                <a:lnTo>
+                  <a:pt x="90018" y="1036161"/>
+                </a:lnTo>
+                <a:close/>
+                <a:lnTo>
+                  <a:pt x="96630" y="1027127"/>
+                </a:lnTo>
+                <a:close/>
+                <a:lnTo>
+                  <a:pt x="103753" y="1017751"/>
+                </a:lnTo>
+                <a:close/>
+                <a:lnTo>
+                  <a:pt x="111324" y="1008105"/>
+                </a:lnTo>
+                <a:close/>
+                <a:lnTo>
+                  <a:pt x="119278" y="998262"/>
+                </a:lnTo>
+                <a:close/>
+                <a:lnTo>
+                  <a:pt x="127551" y="988292"/>
+                </a:lnTo>
+                <a:close/>
+                <a:lnTo>
+                  <a:pt x="136079" y="978269"/>
+                </a:lnTo>
+                <a:close/>
+                <a:lnTo>
+                  <a:pt x="144797" y="968264"/>
+                </a:lnTo>
+                <a:close/>
+                <a:lnTo>
+                  <a:pt x="153641" y="958348"/>
+                </a:lnTo>
+                <a:close/>
+                <a:lnTo>
+                  <a:pt x="162546" y="948595"/>
+                </a:lnTo>
+                <a:close/>
+                <a:lnTo>
+                  <a:pt x="171449" y="939076"/>
+                </a:lnTo>
+                <a:close/>
+                <a:lnTo>
+                  <a:pt x="180284" y="929863"/>
+                </a:lnTo>
+                <a:close/>
+                <a:lnTo>
+                  <a:pt x="188993" y="921021"/>
+                </a:lnTo>
+                <a:close/>
+                <a:lnTo>
+                  <a:pt x="197564" y="912555"/>
+                </a:lnTo>
+                <a:close/>
+                <a:lnTo>
+                  <a:pt x="206013" y="904431"/>
+                </a:lnTo>
+                <a:close/>
+                <a:lnTo>
+                  <a:pt x="214358" y="896617"/>
+                </a:lnTo>
+                <a:close/>
+                <a:lnTo>
+                  <a:pt x="222617" y="889079"/>
+                </a:lnTo>
+                <a:close/>
+                <a:lnTo>
+                  <a:pt x="230806" y="881784"/>
+                </a:lnTo>
+                <a:close/>
+                <a:lnTo>
+                  <a:pt x="238943" y="874698"/>
+                </a:lnTo>
+                <a:close/>
+                <a:lnTo>
+                  <a:pt x="247044" y="867789"/>
+                </a:lnTo>
+                <a:close/>
+                <a:lnTo>
+                  <a:pt x="255128" y="861023"/>
+                </a:lnTo>
+                <a:close/>
+                <a:lnTo>
+                  <a:pt x="263212" y="854367"/>
+                </a:lnTo>
+                <a:close/>
+                <a:lnTo>
+                  <a:pt x="271312" y="847787"/>
+                </a:lnTo>
+                <a:close/>
+                <a:lnTo>
+                  <a:pt x="279446" y="841253"/>
+                </a:lnTo>
+                <a:close/>
+                <a:lnTo>
+                  <a:pt x="287616" y="834752"/>
+                </a:lnTo>
+                <a:close/>
+                <a:lnTo>
+                  <a:pt x="295819" y="828290"/>
+                </a:lnTo>
+                <a:close/>
+                <a:lnTo>
+                  <a:pt x="304051" y="821871"/>
+                </a:lnTo>
+                <a:close/>
+                <a:lnTo>
+                  <a:pt x="312306" y="815499"/>
+                </a:lnTo>
+                <a:close/>
+                <a:lnTo>
+                  <a:pt x="320580" y="809179"/>
+                </a:lnTo>
+                <a:close/>
+                <a:lnTo>
+                  <a:pt x="328869" y="802915"/>
+                </a:lnTo>
+                <a:close/>
+                <a:lnTo>
+                  <a:pt x="337167" y="796711"/>
+                </a:lnTo>
+                <a:close/>
+                <a:lnTo>
+                  <a:pt x="345470" y="790573"/>
+                </a:lnTo>
+                <a:close/>
+                <a:lnTo>
+                  <a:pt x="353774" y="784504"/>
+                </a:lnTo>
+                <a:close/>
+                <a:lnTo>
+                  <a:pt x="362074" y="778508"/>
+                </a:lnTo>
+                <a:close/>
+                <a:lnTo>
+                  <a:pt x="370365" y="772591"/>
+                </a:lnTo>
+                <a:close/>
+                <a:lnTo>
+                  <a:pt x="378646" y="766753"/>
+                </a:lnTo>
+                <a:close/>
+                <a:lnTo>
+                  <a:pt x="386918" y="760991"/>
+                </a:lnTo>
+                <a:close/>
+                <a:lnTo>
+                  <a:pt x="395182" y="755302"/>
+                </a:lnTo>
+                <a:close/>
+                <a:lnTo>
+                  <a:pt x="403441" y="749684"/>
+                </a:lnTo>
+                <a:close/>
+                <a:lnTo>
+                  <a:pt x="411693" y="744133"/>
+                </a:lnTo>
+                <a:close/>
+                <a:lnTo>
+                  <a:pt x="419942" y="738648"/>
+                </a:lnTo>
+                <a:close/>
+                <a:lnTo>
+                  <a:pt x="428189" y="733226"/>
+                </a:lnTo>
+                <a:close/>
+                <a:lnTo>
+                  <a:pt x="436434" y="727863"/>
+                </a:lnTo>
+                <a:close/>
+                <a:lnTo>
+                  <a:pt x="444678" y="722558"/>
+                </a:lnTo>
+                <a:close/>
+                <a:lnTo>
+                  <a:pt x="452924" y="717306"/>
+                </a:lnTo>
+                <a:close/>
+                <a:lnTo>
+                  <a:pt x="461172" y="712107"/>
+                </a:lnTo>
+                <a:close/>
+                <a:lnTo>
+                  <a:pt x="469422" y="706957"/>
+                </a:lnTo>
+                <a:close/>
+                <a:lnTo>
+                  <a:pt x="477675" y="701855"/>
+                </a:lnTo>
+                <a:close/>
+                <a:lnTo>
+                  <a:pt x="485930" y="696798"/>
+                </a:lnTo>
+                <a:close/>
+                <a:lnTo>
+                  <a:pt x="494187" y="691787"/>
+                </a:lnTo>
+                <a:close/>
+                <a:lnTo>
+                  <a:pt x="502445" y="686818"/>
+                </a:lnTo>
+                <a:close/>
+                <a:lnTo>
+                  <a:pt x="510704" y="681890"/>
+                </a:lnTo>
+                <a:close/>
+                <a:lnTo>
+                  <a:pt x="518964" y="677002"/>
+                </a:lnTo>
+                <a:close/>
+                <a:lnTo>
+                  <a:pt x="527225" y="672151"/>
+                </a:lnTo>
+                <a:close/>
+                <a:lnTo>
+                  <a:pt x="535485" y="667337"/>
+                </a:lnTo>
+                <a:close/>
+                <a:lnTo>
+                  <a:pt x="543745" y="662557"/>
+                </a:lnTo>
+                <a:close/>
+                <a:lnTo>
+                  <a:pt x="552005" y="657810"/>
+                </a:lnTo>
+                <a:close/>
+                <a:lnTo>
+                  <a:pt x="560264" y="653094"/>
+                </a:lnTo>
+                <a:close/>
+                <a:lnTo>
+                  <a:pt x="568522" y="648410"/>
+                </a:lnTo>
+                <a:close/>
+                <a:lnTo>
+                  <a:pt x="576780" y="643755"/>
+                </a:lnTo>
+                <a:close/>
+                <a:lnTo>
+                  <a:pt x="585037" y="639129"/>
+                </a:lnTo>
+                <a:close/>
+                <a:lnTo>
+                  <a:pt x="593294" y="634533"/>
+                </a:lnTo>
+                <a:close/>
+                <a:lnTo>
+                  <a:pt x="601551" y="629964"/>
+                </a:lnTo>
+                <a:close/>
+                <a:lnTo>
+                  <a:pt x="609807" y="625422"/>
+                </a:lnTo>
+                <a:close/>
+                <a:lnTo>
+                  <a:pt x="618063" y="620907"/>
+                </a:lnTo>
+                <a:close/>
+                <a:lnTo>
+                  <a:pt x="626319" y="616418"/>
+                </a:lnTo>
+                <a:close/>
+                <a:lnTo>
+                  <a:pt x="634576" y="611953"/>
+                </a:lnTo>
+                <a:close/>
+                <a:lnTo>
+                  <a:pt x="642832" y="607513"/>
+                </a:lnTo>
+                <a:close/>
+                <a:lnTo>
+                  <a:pt x="651089" y="603097"/>
+                </a:lnTo>
+                <a:close/>
+                <a:lnTo>
+                  <a:pt x="659346" y="598706"/>
+                </a:lnTo>
+                <a:close/>
+                <a:lnTo>
+                  <a:pt x="667603" y="594340"/>
+                </a:lnTo>
+                <a:close/>
+                <a:lnTo>
+                  <a:pt x="675860" y="589999"/>
+                </a:lnTo>
+                <a:close/>
+                <a:lnTo>
+                  <a:pt x="684117" y="585684"/>
+                </a:lnTo>
+                <a:close/>
+                <a:lnTo>
+                  <a:pt x="692374" y="581395"/>
+                </a:lnTo>
+                <a:close/>
+                <a:lnTo>
+                  <a:pt x="700631" y="577134"/>
+                </a:lnTo>
+                <a:close/>
+                <a:lnTo>
+                  <a:pt x="708889" y="572900"/>
+                </a:lnTo>
+                <a:close/>
+                <a:lnTo>
+                  <a:pt x="717146" y="568695"/>
+                </a:lnTo>
+                <a:close/>
+                <a:lnTo>
+                  <a:pt x="725403" y="564517"/>
+                </a:lnTo>
+                <a:close/>
+                <a:lnTo>
+                  <a:pt x="733661" y="560369"/>
+                </a:lnTo>
+                <a:close/>
+                <a:lnTo>
+                  <a:pt x="741918" y="556250"/>
+                </a:lnTo>
+                <a:close/>
+                <a:lnTo>
+                  <a:pt x="750175" y="552159"/>
+                </a:lnTo>
+                <a:close/>
+                <a:lnTo>
+                  <a:pt x="758432" y="548094"/>
+                </a:lnTo>
+                <a:close/>
+                <a:lnTo>
+                  <a:pt x="766690" y="544055"/>
+                </a:lnTo>
+                <a:close/>
+                <a:lnTo>
+                  <a:pt x="774947" y="540039"/>
+                </a:lnTo>
+                <a:close/>
+                <a:lnTo>
+                  <a:pt x="783204" y="536046"/>
+                </a:lnTo>
+                <a:close/>
+                <a:lnTo>
+                  <a:pt x="791461" y="532074"/>
+                </a:lnTo>
+                <a:close/>
+                <a:lnTo>
+                  <a:pt x="799718" y="528122"/>
+                </a:lnTo>
+                <a:close/>
+                <a:lnTo>
+                  <a:pt x="807975" y="524189"/>
+                </a:lnTo>
+                <a:close/>
+                <a:lnTo>
+                  <a:pt x="816232" y="520273"/>
+                </a:lnTo>
+                <a:close/>
+                <a:lnTo>
+                  <a:pt x="824489" y="516373"/>
+                </a:lnTo>
+                <a:close/>
+                <a:lnTo>
+                  <a:pt x="832746" y="512488"/>
+                </a:lnTo>
+                <a:close/>
+                <a:lnTo>
+                  <a:pt x="841003" y="508619"/>
+                </a:lnTo>
+                <a:close/>
+                <a:lnTo>
+                  <a:pt x="849260" y="504766"/>
+                </a:lnTo>
+                <a:close/>
+                <a:lnTo>
+                  <a:pt x="857518" y="500931"/>
+                </a:lnTo>
+                <a:close/>
+                <a:lnTo>
+                  <a:pt x="865775" y="497113"/>
+                </a:lnTo>
+                <a:close/>
+                <a:lnTo>
+                  <a:pt x="874032" y="493314"/>
+                </a:lnTo>
+                <a:close/>
+                <a:lnTo>
+                  <a:pt x="882289" y="489535"/>
+                </a:lnTo>
+                <a:close/>
+                <a:lnTo>
+                  <a:pt x="890546" y="485775"/>
+                </a:lnTo>
+                <a:close/>
+                <a:lnTo>
+                  <a:pt x="898803" y="482036"/>
+                </a:lnTo>
+                <a:close/>
+                <a:lnTo>
+                  <a:pt x="907060" y="478318"/>
+                </a:lnTo>
+                <a:close/>
+                <a:lnTo>
+                  <a:pt x="915317" y="474622"/>
+                </a:lnTo>
+                <a:close/>
+                <a:lnTo>
+                  <a:pt x="923575" y="470948"/>
+                </a:lnTo>
+                <a:close/>
+                <a:lnTo>
+                  <a:pt x="931832" y="467295"/>
+                </a:lnTo>
+                <a:close/>
+                <a:lnTo>
+                  <a:pt x="940089" y="463662"/>
+                </a:lnTo>
+                <a:close/>
+                <a:lnTo>
+                  <a:pt x="948346" y="460047"/>
+                </a:lnTo>
+                <a:close/>
+                <a:lnTo>
+                  <a:pt x="956603" y="456448"/>
+                </a:lnTo>
+                <a:close/>
+                <a:lnTo>
+                  <a:pt x="964860" y="452865"/>
+                </a:lnTo>
+                <a:close/>
+                <a:lnTo>
+                  <a:pt x="973117" y="449295"/>
+                </a:lnTo>
+                <a:close/>
+                <a:lnTo>
+                  <a:pt x="981374" y="445738"/>
+                </a:lnTo>
+                <a:close/>
+                <a:lnTo>
+                  <a:pt x="989632" y="442191"/>
+                </a:lnTo>
+                <a:close/>
+                <a:lnTo>
+                  <a:pt x="997889" y="438654"/>
+                </a:lnTo>
+                <a:close/>
+                <a:lnTo>
+                  <a:pt x="1006146" y="435124"/>
+                </a:lnTo>
+                <a:close/>
+                <a:lnTo>
+                  <a:pt x="1014403" y="431602"/>
+                </a:lnTo>
+                <a:close/>
+                <a:lnTo>
+                  <a:pt x="1022660" y="428087"/>
+                </a:lnTo>
+                <a:close/>
+                <a:lnTo>
+                  <a:pt x="1030917" y="424581"/>
+                </a:lnTo>
+                <a:close/>
+                <a:lnTo>
+                  <a:pt x="1039174" y="421084"/>
+                </a:lnTo>
+                <a:close/>
+                <a:lnTo>
+                  <a:pt x="1047431" y="417599"/>
+                </a:lnTo>
+                <a:close/>
+                <a:lnTo>
+                  <a:pt x="1055689" y="414125"/>
+                </a:lnTo>
+                <a:close/>
+                <a:lnTo>
+                  <a:pt x="1063946" y="410665"/>
+                </a:lnTo>
+                <a:close/>
+                <a:lnTo>
+                  <a:pt x="1072203" y="407218"/>
+                </a:lnTo>
+                <a:close/>
+                <a:lnTo>
+                  <a:pt x="1080460" y="403787"/>
+                </a:lnTo>
+                <a:close/>
+                <a:lnTo>
+                  <a:pt x="1088717" y="400373"/>
+                </a:lnTo>
+                <a:close/>
+                <a:lnTo>
+                  <a:pt x="1096974" y="396975"/>
+                </a:lnTo>
+                <a:close/>
+                <a:lnTo>
+                  <a:pt x="1105231" y="393596"/>
+                </a:lnTo>
+                <a:close/>
+                <a:lnTo>
+                  <a:pt x="1113488" y="390235"/>
+                </a:lnTo>
+                <a:close/>
+                <a:lnTo>
+                  <a:pt x="1121746" y="386891"/>
+                </a:lnTo>
+                <a:close/>
+                <a:lnTo>
+                  <a:pt x="1130003" y="383562"/>
+                </a:lnTo>
+                <a:close/>
+                <a:lnTo>
+                  <a:pt x="1138260" y="380249"/>
+                </a:lnTo>
+                <a:close/>
+                <a:lnTo>
+                  <a:pt x="1146517" y="376949"/>
+                </a:lnTo>
+                <a:close/>
+                <a:lnTo>
+                  <a:pt x="1154774" y="373663"/>
+                </a:lnTo>
+                <a:close/>
+                <a:lnTo>
+                  <a:pt x="1163031" y="370389"/>
+                </a:lnTo>
+                <a:close/>
+                <a:lnTo>
+                  <a:pt x="1171288" y="367127"/>
+                </a:lnTo>
+                <a:close/>
+                <a:lnTo>
+                  <a:pt x="1179545" y="363876"/>
+                </a:lnTo>
+                <a:close/>
+                <a:lnTo>
+                  <a:pt x="1187803" y="360634"/>
+                </a:lnTo>
+                <a:close/>
+                <a:lnTo>
+                  <a:pt x="1196060" y="357401"/>
+                </a:lnTo>
+                <a:close/>
+                <a:lnTo>
+                  <a:pt x="1204317" y="354177"/>
+                </a:lnTo>
+                <a:close/>
+                <a:lnTo>
+                  <a:pt x="1212574" y="350963"/>
+                </a:lnTo>
+                <a:close/>
+                <a:lnTo>
+                  <a:pt x="1220831" y="347758"/>
+                </a:lnTo>
+                <a:close/>
+                <a:lnTo>
+                  <a:pt x="1229088" y="344565"/>
+                </a:lnTo>
+                <a:close/>
+                <a:lnTo>
+                  <a:pt x="1237345" y="341382"/>
+                </a:lnTo>
+                <a:close/>
+                <a:lnTo>
+                  <a:pt x="1245602" y="338210"/>
+                </a:lnTo>
+                <a:close/>
+                <a:lnTo>
+                  <a:pt x="1253860" y="335050"/>
+                </a:lnTo>
+                <a:close/>
+                <a:lnTo>
+                  <a:pt x="1262117" y="331903"/>
+                </a:lnTo>
+                <a:close/>
+                <a:lnTo>
+                  <a:pt x="1270374" y="328768"/>
+                </a:lnTo>
+                <a:close/>
+                <a:lnTo>
+                  <a:pt x="1278631" y="325646"/>
+                </a:lnTo>
+                <a:close/>
+                <a:lnTo>
+                  <a:pt x="1286888" y="322538"/>
+                </a:lnTo>
+                <a:close/>
+                <a:lnTo>
+                  <a:pt x="1295145" y="319443"/>
+                </a:lnTo>
+                <a:close/>
+                <a:lnTo>
+                  <a:pt x="1303402" y="316359"/>
+                </a:lnTo>
+                <a:close/>
+                <a:lnTo>
+                  <a:pt x="1311659" y="313287"/>
+                </a:lnTo>
+                <a:close/>
+                <a:lnTo>
+                  <a:pt x="1319917" y="310225"/>
+                </a:lnTo>
+                <a:close/>
+                <a:lnTo>
+                  <a:pt x="1328174" y="307173"/>
+                </a:lnTo>
+                <a:close/>
+                <a:lnTo>
+                  <a:pt x="1336431" y="304129"/>
+                </a:lnTo>
+                <a:close/>
+                <a:lnTo>
+                  <a:pt x="1344688" y="301092"/>
+                </a:lnTo>
+                <a:close/>
+                <a:lnTo>
+                  <a:pt x="1352945" y="298062"/>
+                </a:lnTo>
+                <a:close/>
+                <a:lnTo>
+                  <a:pt x="1361202" y="295038"/>
+                </a:lnTo>
+                <a:close/>
+                <a:lnTo>
+                  <a:pt x="1369459" y="292019"/>
+                </a:lnTo>
+                <a:close/>
+                <a:lnTo>
+                  <a:pt x="1377716" y="289004"/>
+                </a:lnTo>
+                <a:close/>
+                <a:lnTo>
+                  <a:pt x="1385974" y="285993"/>
+                </a:lnTo>
+                <a:close/>
+                <a:lnTo>
+                  <a:pt x="1394231" y="282988"/>
+                </a:lnTo>
+                <a:close/>
+                <a:lnTo>
+                  <a:pt x="1402488" y="279990"/>
+                </a:lnTo>
+                <a:close/>
+                <a:lnTo>
+                  <a:pt x="1410745" y="277000"/>
+                </a:lnTo>
+                <a:close/>
+                <a:lnTo>
+                  <a:pt x="1419002" y="274019"/>
+                </a:lnTo>
+                <a:close/>
+                <a:lnTo>
+                  <a:pt x="1427259" y="271048"/>
+                </a:lnTo>
+                <a:close/>
+                <a:lnTo>
+                  <a:pt x="1435516" y="268089"/>
+                </a:lnTo>
+                <a:close/>
+                <a:lnTo>
+                  <a:pt x="1443773" y="265141"/>
+                </a:lnTo>
+                <a:close/>
+                <a:lnTo>
+                  <a:pt x="1452031" y="262207"/>
+                </a:lnTo>
+                <a:close/>
+                <a:lnTo>
+                  <a:pt x="1460288" y="259288"/>
+                </a:lnTo>
+                <a:close/>
+                <a:lnTo>
+                  <a:pt x="1468545" y="256384"/>
+                </a:lnTo>
+                <a:close/>
+                <a:lnTo>
+                  <a:pt x="1476802" y="253496"/>
+                </a:lnTo>
+                <a:close/>
+                <a:lnTo>
+                  <a:pt x="1485059" y="250620"/>
+                </a:lnTo>
+                <a:close/>
+                <a:lnTo>
+                  <a:pt x="1493316" y="247757"/>
+                </a:lnTo>
+                <a:close/>
+                <a:lnTo>
+                  <a:pt x="1501573" y="244904"/>
+                </a:lnTo>
+                <a:close/>
+                <a:lnTo>
+                  <a:pt x="1509830" y="242060"/>
+                </a:lnTo>
+                <a:close/>
+                <a:lnTo>
+                  <a:pt x="1518087" y="239224"/>
+                </a:lnTo>
+                <a:close/>
+                <a:lnTo>
+                  <a:pt x="1526345" y="236393"/>
+                </a:lnTo>
+                <a:close/>
+                <a:lnTo>
+                  <a:pt x="1534602" y="233567"/>
+                </a:lnTo>
+                <a:close/>
+                <a:lnTo>
+                  <a:pt x="1542859" y="230744"/>
+                </a:lnTo>
+                <a:close/>
+                <a:lnTo>
+                  <a:pt x="1551116" y="227921"/>
+                </a:lnTo>
+                <a:close/>
+                <a:lnTo>
+                  <a:pt x="1559373" y="225099"/>
+                </a:lnTo>
+                <a:close/>
+                <a:lnTo>
+                  <a:pt x="1567630" y="222276"/>
+                </a:lnTo>
+                <a:close/>
+                <a:lnTo>
+                  <a:pt x="1575887" y="219454"/>
+                </a:lnTo>
+                <a:close/>
+                <a:lnTo>
+                  <a:pt x="1584144" y="216634"/>
+                </a:lnTo>
+                <a:close/>
+                <a:lnTo>
+                  <a:pt x="1592402" y="213816"/>
+                </a:lnTo>
+                <a:close/>
+                <a:lnTo>
+                  <a:pt x="1600659" y="211002"/>
+                </a:lnTo>
+                <a:close/>
+                <a:lnTo>
+                  <a:pt x="1608916" y="208192"/>
+                </a:lnTo>
+                <a:close/>
+                <a:lnTo>
+                  <a:pt x="1617173" y="205388"/>
+                </a:lnTo>
+                <a:close/>
+                <a:lnTo>
+                  <a:pt x="1625430" y="202590"/>
+                </a:lnTo>
+                <a:close/>
+                <a:lnTo>
+                  <a:pt x="1633687" y="199800"/>
+                </a:lnTo>
+                <a:close/>
+                <a:lnTo>
+                  <a:pt x="1641944" y="197018"/>
+                </a:lnTo>
+                <a:close/>
+                <a:lnTo>
+                  <a:pt x="1650201" y="194246"/>
+                </a:lnTo>
+                <a:close/>
+                <a:lnTo>
+                  <a:pt x="1658459" y="191483"/>
+                </a:lnTo>
+                <a:close/>
+                <a:lnTo>
+                  <a:pt x="1666716" y="188729"/>
+                </a:lnTo>
+                <a:close/>
+                <a:lnTo>
+                  <a:pt x="1674973" y="185984"/>
+                </a:lnTo>
+                <a:close/>
+                <a:lnTo>
+                  <a:pt x="1683230" y="183248"/>
+                </a:lnTo>
+                <a:close/>
+                <a:lnTo>
+                  <a:pt x="1691487" y="180521"/>
+                </a:lnTo>
+                <a:close/>
+                <a:lnTo>
+                  <a:pt x="1699744" y="177801"/>
+                </a:lnTo>
+                <a:close/>
+                <a:lnTo>
+                  <a:pt x="1708001" y="175090"/>
+                </a:lnTo>
+                <a:close/>
+                <a:lnTo>
+                  <a:pt x="1716258" y="172386"/>
+                </a:lnTo>
+                <a:close/>
+                <a:lnTo>
+                  <a:pt x="1724516" y="169689"/>
+                </a:lnTo>
+                <a:close/>
+                <a:lnTo>
+                  <a:pt x="1732773" y="166998"/>
+                </a:lnTo>
+                <a:close/>
+                <a:lnTo>
+                  <a:pt x="1741030" y="164315"/>
+                </a:lnTo>
+                <a:close/>
+                <a:lnTo>
+                  <a:pt x="1749287" y="161638"/>
+                </a:lnTo>
+                <a:close/>
+                <a:lnTo>
+                  <a:pt x="1757544" y="158968"/>
+                </a:lnTo>
+                <a:close/>
+                <a:lnTo>
+                  <a:pt x="1765801" y="156304"/>
+                </a:lnTo>
+                <a:close/>
+                <a:lnTo>
+                  <a:pt x="1774058" y="153648"/>
+                </a:lnTo>
+                <a:close/>
+                <a:lnTo>
+                  <a:pt x="1782315" y="151000"/>
+                </a:lnTo>
+                <a:close/>
+                <a:lnTo>
+                  <a:pt x="1790573" y="148360"/>
+                </a:lnTo>
+                <a:close/>
+                <a:lnTo>
+                  <a:pt x="1798830" y="145727"/>
+                </a:lnTo>
+                <a:close/>
+                <a:lnTo>
+                  <a:pt x="1807087" y="143104"/>
+                </a:lnTo>
+                <a:close/>
+                <a:lnTo>
+                  <a:pt x="1815344" y="140488"/>
+                </a:lnTo>
+                <a:close/>
+                <a:lnTo>
+                  <a:pt x="1823601" y="137882"/>
+                </a:lnTo>
+                <a:close/>
+                <a:lnTo>
+                  <a:pt x="1831858" y="135285"/>
+                </a:lnTo>
+                <a:close/>
+                <a:lnTo>
+                  <a:pt x="1840115" y="132697"/>
+                </a:lnTo>
+                <a:close/>
+                <a:lnTo>
+                  <a:pt x="1848372" y="130118"/>
+                </a:lnTo>
+                <a:close/>
+                <a:lnTo>
+                  <a:pt x="1856630" y="127546"/>
+                </a:lnTo>
+                <a:close/>
+                <a:lnTo>
+                  <a:pt x="1864887" y="124981"/>
+                </a:lnTo>
+                <a:close/>
+                <a:lnTo>
+                  <a:pt x="1873144" y="122421"/>
+                </a:lnTo>
+                <a:close/>
+                <a:lnTo>
+                  <a:pt x="1881401" y="119867"/>
+                </a:lnTo>
+                <a:close/>
+                <a:lnTo>
+                  <a:pt x="1889658" y="117318"/>
+                </a:lnTo>
+                <a:close/>
+                <a:lnTo>
+                  <a:pt x="1897915" y="114772"/>
+                </a:lnTo>
+                <a:close/>
+                <a:lnTo>
+                  <a:pt x="1906172" y="112228"/>
+                </a:lnTo>
+                <a:close/>
+                <a:lnTo>
+                  <a:pt x="1914429" y="109687"/>
+                </a:lnTo>
+                <a:close/>
+                <a:lnTo>
+                  <a:pt x="1922687" y="107147"/>
+                </a:lnTo>
+                <a:close/>
+                <a:lnTo>
+                  <a:pt x="1930944" y="104608"/>
+                </a:lnTo>
+                <a:close/>
+                <a:lnTo>
+                  <a:pt x="1939201" y="102071"/>
+                </a:lnTo>
+                <a:close/>
+                <a:lnTo>
+                  <a:pt x="1947458" y="99536"/>
+                </a:lnTo>
+                <a:close/>
+                <a:lnTo>
+                  <a:pt x="1955715" y="97005"/>
+                </a:lnTo>
+                <a:close/>
+                <a:lnTo>
+                  <a:pt x="1963972" y="94479"/>
+                </a:lnTo>
+                <a:close/>
+                <a:lnTo>
+                  <a:pt x="1972229" y="91957"/>
+                </a:lnTo>
+                <a:close/>
+                <a:lnTo>
+                  <a:pt x="1980486" y="89442"/>
+                </a:lnTo>
+                <a:close/>
+                <a:lnTo>
+                  <a:pt x="1988744" y="86934"/>
+                </a:lnTo>
+                <a:close/>
+                <a:lnTo>
+                  <a:pt x="1997001" y="84433"/>
+                </a:lnTo>
+                <a:close/>
+                <a:lnTo>
+                  <a:pt x="2005258" y="81942"/>
+                </a:lnTo>
+                <a:close/>
+                <a:lnTo>
+                  <a:pt x="2013515" y="79460"/>
+                </a:lnTo>
+                <a:close/>
+                <a:lnTo>
+                  <a:pt x="2021772" y="76988"/>
+                </a:lnTo>
+                <a:close/>
+                <a:lnTo>
+                  <a:pt x="2030029" y="74525"/>
+                </a:lnTo>
+                <a:close/>
+                <a:lnTo>
+                  <a:pt x="2038286" y="72071"/>
+                </a:lnTo>
+                <a:close/>
+                <a:lnTo>
+                  <a:pt x="2046543" y="69625"/>
+                </a:lnTo>
+                <a:close/>
+                <a:lnTo>
+                  <a:pt x="2054801" y="67187"/>
+                </a:lnTo>
+                <a:close/>
+                <a:lnTo>
+                  <a:pt x="2063058" y="64756"/>
+                </a:lnTo>
+                <a:close/>
+                <a:lnTo>
+                  <a:pt x="2071315" y="62331"/>
+                </a:lnTo>
+                <a:close/>
+                <a:lnTo>
+                  <a:pt x="2079572" y="59911"/>
+                </a:lnTo>
+                <a:close/>
+                <a:lnTo>
+                  <a:pt x="2087829" y="57497"/>
+                </a:lnTo>
+                <a:close/>
+                <a:lnTo>
+                  <a:pt x="2096086" y="55086"/>
+                </a:lnTo>
+                <a:close/>
+                <a:lnTo>
+                  <a:pt x="2104343" y="52679"/>
+                </a:lnTo>
+                <a:close/>
+                <a:lnTo>
+                  <a:pt x="2112600" y="50275"/>
+                </a:lnTo>
+                <a:close/>
+                <a:lnTo>
+                  <a:pt x="2120858" y="47874"/>
+                </a:lnTo>
+                <a:close/>
+                <a:lnTo>
+                  <a:pt x="2129115" y="45476"/>
+                </a:lnTo>
+                <a:close/>
+                <a:lnTo>
+                  <a:pt x="2137372" y="43079"/>
+                </a:lnTo>
+                <a:close/>
+                <a:lnTo>
+                  <a:pt x="2145629" y="40684"/>
+                </a:lnTo>
+                <a:close/>
+                <a:lnTo>
+                  <a:pt x="2153886" y="38291"/>
+                </a:lnTo>
+                <a:close/>
+                <a:lnTo>
+                  <a:pt x="2162143" y="35900"/>
+                </a:lnTo>
+                <a:close/>
+                <a:lnTo>
+                  <a:pt x="2170400" y="33509"/>
+                </a:lnTo>
+                <a:close/>
+                <a:lnTo>
+                  <a:pt x="2178657" y="31119"/>
+                </a:lnTo>
+                <a:close/>
+                <a:lnTo>
+                  <a:pt x="2186915" y="28730"/>
+                </a:lnTo>
+                <a:close/>
+                <a:lnTo>
+                  <a:pt x="2195172" y="26341"/>
+                </a:lnTo>
+                <a:close/>
+                <a:lnTo>
+                  <a:pt x="2203429" y="23952"/>
+                </a:lnTo>
+                <a:close/>
+                <a:lnTo>
+                  <a:pt x="2211686" y="21563"/>
+                </a:lnTo>
+                <a:close/>
+                <a:lnTo>
+                  <a:pt x="2219943" y="19173"/>
+                </a:lnTo>
+                <a:close/>
+                <a:lnTo>
+                  <a:pt x="2228200" y="16782"/>
+                </a:lnTo>
+                <a:close/>
+                <a:lnTo>
+                  <a:pt x="2236457" y="14390"/>
+                </a:lnTo>
+                <a:close/>
+                <a:lnTo>
+                  <a:pt x="2244714" y="11997"/>
+                </a:lnTo>
+                <a:close/>
+                <a:lnTo>
+                  <a:pt x="2252972" y="9602"/>
+                </a:lnTo>
+                <a:close/>
+                <a:lnTo>
+                  <a:pt x="2261229" y="7205"/>
+                </a:lnTo>
+                <a:close/>
+                <a:lnTo>
+                  <a:pt x="2269486" y="4806"/>
+                </a:lnTo>
+                <a:close/>
+                <a:lnTo>
+                  <a:pt x="2277743" y="2405"/>
+                </a:lnTo>
+                <a:close/>
+                <a:lnTo>
+                  <a:pt x="2286000" y="0"/>
                 </a:lnTo>
                 <a:close/>
               </a:path>
@@ -4389,7 +4389,7 @@
           </a:custGeom>
           <a:ln w="31750">
             <a:solidFill>
-              <a:srgbClr val="FFFFFF"/>
+              <a:srgbClr val="000000"/>
             </a:solidFill>
           </a:ln>
         </p:spPr>
@@ -4415,1258 +4415,9 @@
           </a:p>
         </p:txBody>
       </p:sp>
-      <p:sp>
-        <p:nvSpPr>
-          <p:cNvPr id="5" name="Freeform 4"/>
-          <p:cNvSpPr/>
-          <p:nvPr/>
-        </p:nvSpPr>
-        <p:spPr>
-          <a:xfrm>
-            <a:off x="5717286" y="2067868"/>
-            <a:ext cx="684856" cy="74663"/>
-          </a:xfrm>
-          <a:custGeom>
-            <a:avLst/>
-            <a:gdLst/>
-            <a:ahLst/>
-            <a:cxnLst/>
-            <a:rect l="l" t="t" r="r" b="b"/>
-            <a:pathLst>
-              <a:path w="684856" h="74663">
-                <a:moveTo>
-                  <a:pt x="0" y="74663"/>
-                </a:moveTo>
-                <a:lnTo>
-                  <a:pt x="2324" y="74364"/>
-                </a:lnTo>
-                <a:close/>
-                <a:lnTo>
-                  <a:pt x="4648" y="74065"/>
-                </a:lnTo>
-                <a:close/>
-                <a:lnTo>
-                  <a:pt x="6973" y="73767"/>
-                </a:lnTo>
-                <a:close/>
-                <a:lnTo>
-                  <a:pt x="9297" y="73469"/>
-                </a:lnTo>
-                <a:close/>
-                <a:lnTo>
-                  <a:pt x="11621" y="73171"/>
-                </a:lnTo>
-                <a:close/>
-                <a:lnTo>
-                  <a:pt x="13945" y="72874"/>
-                </a:lnTo>
-                <a:close/>
-                <a:lnTo>
-                  <a:pt x="16270" y="72576"/>
-                </a:lnTo>
-                <a:close/>
-                <a:lnTo>
-                  <a:pt x="18594" y="72278"/>
-                </a:lnTo>
-                <a:close/>
-                <a:lnTo>
-                  <a:pt x="20918" y="71980"/>
-                </a:lnTo>
-                <a:close/>
-                <a:lnTo>
-                  <a:pt x="23242" y="71682"/>
-                </a:lnTo>
-                <a:close/>
-                <a:lnTo>
-                  <a:pt x="25567" y="71384"/>
-                </a:lnTo>
-                <a:close/>
-                <a:lnTo>
-                  <a:pt x="27891" y="71085"/>
-                </a:lnTo>
-                <a:close/>
-                <a:lnTo>
-                  <a:pt x="30215" y="70785"/>
-                </a:lnTo>
-                <a:close/>
-                <a:lnTo>
-                  <a:pt x="32539" y="70485"/>
-                </a:lnTo>
-                <a:close/>
-                <a:lnTo>
-                  <a:pt x="34863" y="70186"/>
-                </a:lnTo>
-                <a:close/>
-                <a:lnTo>
-                  <a:pt x="37188" y="69888"/>
-                </a:lnTo>
-                <a:close/>
-                <a:lnTo>
-                  <a:pt x="39512" y="69591"/>
-                </a:lnTo>
-                <a:close/>
-                <a:lnTo>
-                  <a:pt x="41836" y="69296"/>
-                </a:lnTo>
-                <a:close/>
-                <a:lnTo>
-                  <a:pt x="44160" y="69003"/>
-                </a:lnTo>
-                <a:close/>
-                <a:lnTo>
-                  <a:pt x="46485" y="68711"/>
-                </a:lnTo>
-                <a:close/>
-                <a:lnTo>
-                  <a:pt x="48809" y="68421"/>
-                </a:lnTo>
-                <a:close/>
-                <a:lnTo>
-                  <a:pt x="51133" y="68131"/>
-                </a:lnTo>
-                <a:close/>
-                <a:lnTo>
-                  <a:pt x="53457" y="67842"/>
-                </a:lnTo>
-                <a:close/>
-                <a:lnTo>
-                  <a:pt x="55781" y="67553"/>
-                </a:lnTo>
-                <a:close/>
-                <a:lnTo>
-                  <a:pt x="58106" y="67263"/>
-                </a:lnTo>
-                <a:close/>
-                <a:lnTo>
-                  <a:pt x="60430" y="66973"/>
-                </a:lnTo>
-                <a:close/>
-                <a:lnTo>
-                  <a:pt x="62754" y="66682"/>
-                </a:lnTo>
-                <a:close/>
-                <a:lnTo>
-                  <a:pt x="65078" y="66391"/>
-                </a:lnTo>
-                <a:close/>
-                <a:lnTo>
-                  <a:pt x="67403" y="66100"/>
-                </a:lnTo>
-                <a:close/>
-                <a:lnTo>
-                  <a:pt x="69727" y="65810"/>
-                </a:lnTo>
-                <a:close/>
-                <a:lnTo>
-                  <a:pt x="72051" y="65519"/>
-                </a:lnTo>
-                <a:close/>
-                <a:lnTo>
-                  <a:pt x="74375" y="65229"/>
-                </a:lnTo>
-                <a:close/>
-                <a:lnTo>
-                  <a:pt x="76700" y="64939"/>
-                </a:lnTo>
-                <a:close/>
-                <a:lnTo>
-                  <a:pt x="79024" y="64648"/>
-                </a:lnTo>
-                <a:close/>
-                <a:lnTo>
-                  <a:pt x="81348" y="64358"/>
-                </a:lnTo>
-                <a:close/>
-                <a:lnTo>
-                  <a:pt x="83672" y="64066"/>
-                </a:lnTo>
-                <a:close/>
-                <a:lnTo>
-                  <a:pt x="85996" y="63775"/>
-                </a:lnTo>
-                <a:close/>
-                <a:lnTo>
-                  <a:pt x="88321" y="63483"/>
-                </a:lnTo>
-                <a:close/>
-                <a:lnTo>
-                  <a:pt x="90645" y="63191"/>
-                </a:lnTo>
-                <a:close/>
-                <a:lnTo>
-                  <a:pt x="92969" y="62901"/>
-                </a:lnTo>
-                <a:close/>
-                <a:lnTo>
-                  <a:pt x="95293" y="62611"/>
-                </a:lnTo>
-                <a:close/>
-                <a:lnTo>
-                  <a:pt x="97618" y="62324"/>
-                </a:lnTo>
-                <a:close/>
-                <a:lnTo>
-                  <a:pt x="99942" y="62038"/>
-                </a:lnTo>
-                <a:close/>
-                <a:lnTo>
-                  <a:pt x="102266" y="61754"/>
-                </a:lnTo>
-                <a:close/>
-                <a:lnTo>
-                  <a:pt x="104590" y="61472"/>
-                </a:lnTo>
-                <a:close/>
-                <a:lnTo>
-                  <a:pt x="106914" y="61190"/>
-                </a:lnTo>
-                <a:close/>
-                <a:lnTo>
-                  <a:pt x="109239" y="60909"/>
-                </a:lnTo>
-                <a:close/>
-                <a:lnTo>
-                  <a:pt x="111563" y="60627"/>
-                </a:lnTo>
-                <a:close/>
-                <a:lnTo>
-                  <a:pt x="113887" y="60346"/>
-                </a:lnTo>
-                <a:close/>
-                <a:lnTo>
-                  <a:pt x="116211" y="60063"/>
-                </a:lnTo>
-                <a:close/>
-                <a:lnTo>
-                  <a:pt x="118536" y="59781"/>
-                </a:lnTo>
-                <a:close/>
-                <a:lnTo>
-                  <a:pt x="120860" y="59498"/>
-                </a:lnTo>
-                <a:close/>
-                <a:lnTo>
-                  <a:pt x="123184" y="59214"/>
-                </a:lnTo>
-                <a:close/>
-                <a:lnTo>
-                  <a:pt x="125508" y="58929"/>
-                </a:lnTo>
-                <a:close/>
-                <a:lnTo>
-                  <a:pt x="127833" y="58645"/>
-                </a:lnTo>
-                <a:close/>
-                <a:lnTo>
-                  <a:pt x="130157" y="58360"/>
-                </a:lnTo>
-                <a:close/>
-                <a:lnTo>
-                  <a:pt x="132481" y="58075"/>
-                </a:lnTo>
-                <a:close/>
-                <a:lnTo>
-                  <a:pt x="134805" y="57793"/>
-                </a:lnTo>
-                <a:close/>
-                <a:lnTo>
-                  <a:pt x="137129" y="57512"/>
-                </a:lnTo>
-                <a:close/>
-                <a:lnTo>
-                  <a:pt x="139454" y="57234"/>
-                </a:lnTo>
-                <a:close/>
-                <a:lnTo>
-                  <a:pt x="141778" y="56958"/>
-                </a:lnTo>
-                <a:close/>
-                <a:lnTo>
-                  <a:pt x="144102" y="56684"/>
-                </a:lnTo>
-                <a:close/>
-                <a:lnTo>
-                  <a:pt x="146426" y="56411"/>
-                </a:lnTo>
-                <a:close/>
-                <a:lnTo>
-                  <a:pt x="148751" y="56137"/>
-                </a:lnTo>
-                <a:close/>
-                <a:lnTo>
-                  <a:pt x="151075" y="55861"/>
-                </a:lnTo>
-                <a:close/>
-                <a:lnTo>
-                  <a:pt x="153399" y="55581"/>
-                </a:lnTo>
-                <a:close/>
-                <a:lnTo>
-                  <a:pt x="155723" y="55298"/>
-                </a:lnTo>
-                <a:close/>
-                <a:lnTo>
-                  <a:pt x="158047" y="55013"/>
-                </a:lnTo>
-                <a:close/>
-                <a:lnTo>
-                  <a:pt x="160372" y="54728"/>
-                </a:lnTo>
-                <a:close/>
-                <a:lnTo>
-                  <a:pt x="162696" y="54444"/>
-                </a:lnTo>
-                <a:close/>
-                <a:lnTo>
-                  <a:pt x="165020" y="54162"/>
-                </a:lnTo>
-                <a:close/>
-                <a:lnTo>
-                  <a:pt x="167344" y="53886"/>
-                </a:lnTo>
-                <a:close/>
-                <a:lnTo>
-                  <a:pt x="169669" y="53614"/>
-                </a:lnTo>
-                <a:close/>
-                <a:lnTo>
-                  <a:pt x="171993" y="53347"/>
-                </a:lnTo>
-                <a:close/>
-                <a:lnTo>
-                  <a:pt x="174317" y="53081"/>
-                </a:lnTo>
-                <a:close/>
-                <a:lnTo>
-                  <a:pt x="176641" y="52816"/>
-                </a:lnTo>
-                <a:close/>
-                <a:lnTo>
-                  <a:pt x="178966" y="52550"/>
-                </a:lnTo>
-                <a:close/>
-                <a:lnTo>
-                  <a:pt x="181290" y="52281"/>
-                </a:lnTo>
-                <a:close/>
-                <a:lnTo>
-                  <a:pt x="183614" y="52008"/>
-                </a:lnTo>
-                <a:close/>
-                <a:lnTo>
-                  <a:pt x="185938" y="51733"/>
-                </a:lnTo>
-                <a:close/>
-                <a:lnTo>
-                  <a:pt x="188262" y="51456"/>
-                </a:lnTo>
-                <a:close/>
-                <a:lnTo>
-                  <a:pt x="190587" y="51179"/>
-                </a:lnTo>
-                <a:close/>
-                <a:lnTo>
-                  <a:pt x="192911" y="50903"/>
-                </a:lnTo>
-                <a:close/>
-                <a:lnTo>
-                  <a:pt x="195235" y="50629"/>
-                </a:lnTo>
-                <a:close/>
-                <a:lnTo>
-                  <a:pt x="197559" y="50358"/>
-                </a:lnTo>
-                <a:close/>
-                <a:lnTo>
-                  <a:pt x="199884" y="50089"/>
-                </a:lnTo>
-                <a:close/>
-                <a:lnTo>
-                  <a:pt x="202208" y="49823"/>
-                </a:lnTo>
-                <a:close/>
-                <a:lnTo>
-                  <a:pt x="204532" y="49557"/>
-                </a:lnTo>
-                <a:close/>
-                <a:lnTo>
-                  <a:pt x="206856" y="49291"/>
-                </a:lnTo>
-                <a:close/>
-                <a:lnTo>
-                  <a:pt x="209180" y="49025"/>
-                </a:lnTo>
-                <a:close/>
-                <a:lnTo>
-                  <a:pt x="211505" y="48759"/>
-                </a:lnTo>
-                <a:close/>
-                <a:lnTo>
-                  <a:pt x="213829" y="48492"/>
-                </a:lnTo>
-                <a:close/>
-                <a:lnTo>
-                  <a:pt x="216153" y="48224"/>
-                </a:lnTo>
-                <a:close/>
-                <a:lnTo>
-                  <a:pt x="218477" y="47956"/>
-                </a:lnTo>
-                <a:close/>
-                <a:lnTo>
-                  <a:pt x="220802" y="47688"/>
-                </a:lnTo>
-                <a:close/>
-                <a:lnTo>
-                  <a:pt x="223126" y="47419"/>
-                </a:lnTo>
-                <a:close/>
-                <a:lnTo>
-                  <a:pt x="225450" y="47150"/>
-                </a:lnTo>
-                <a:close/>
-                <a:lnTo>
-                  <a:pt x="227774" y="46881"/>
-                </a:lnTo>
-                <a:close/>
-                <a:lnTo>
-                  <a:pt x="230099" y="46612"/>
-                </a:lnTo>
-                <a:close/>
-                <a:lnTo>
-                  <a:pt x="232423" y="46345"/>
-                </a:lnTo>
-                <a:close/>
-                <a:lnTo>
-                  <a:pt x="234747" y="46079"/>
-                </a:lnTo>
-                <a:close/>
-                <a:lnTo>
-                  <a:pt x="237071" y="45815"/>
-                </a:lnTo>
-                <a:close/>
-                <a:lnTo>
-                  <a:pt x="239395" y="45553"/>
-                </a:lnTo>
-                <a:close/>
-                <a:lnTo>
-                  <a:pt x="241720" y="45293"/>
-                </a:lnTo>
-                <a:close/>
-                <a:lnTo>
-                  <a:pt x="244044" y="45033"/>
-                </a:lnTo>
-                <a:close/>
-                <a:lnTo>
-                  <a:pt x="246368" y="44775"/>
-                </a:lnTo>
-                <a:close/>
-                <a:lnTo>
-                  <a:pt x="248692" y="44516"/>
-                </a:lnTo>
-                <a:close/>
-                <a:lnTo>
-                  <a:pt x="251017" y="44257"/>
-                </a:lnTo>
-                <a:close/>
-                <a:lnTo>
-                  <a:pt x="253341" y="43997"/>
-                </a:lnTo>
-                <a:close/>
-                <a:lnTo>
-                  <a:pt x="255665" y="43738"/>
-                </a:lnTo>
-                <a:close/>
-                <a:lnTo>
-                  <a:pt x="257989" y="43477"/>
-                </a:lnTo>
-                <a:close/>
-                <a:lnTo>
-                  <a:pt x="260313" y="43217"/>
-                </a:lnTo>
-                <a:close/>
-                <a:lnTo>
-                  <a:pt x="262638" y="42957"/>
-                </a:lnTo>
-                <a:close/>
-                <a:lnTo>
-                  <a:pt x="264962" y="42697"/>
-                </a:lnTo>
-                <a:close/>
-                <a:lnTo>
-                  <a:pt x="267286" y="42437"/>
-                </a:lnTo>
-                <a:close/>
-                <a:lnTo>
-                  <a:pt x="269610" y="42178"/>
-                </a:lnTo>
-                <a:close/>
-                <a:lnTo>
-                  <a:pt x="271935" y="41918"/>
-                </a:lnTo>
-                <a:close/>
-                <a:lnTo>
-                  <a:pt x="274259" y="41658"/>
-                </a:lnTo>
-                <a:close/>
-                <a:lnTo>
-                  <a:pt x="276583" y="41398"/>
-                </a:lnTo>
-                <a:close/>
-                <a:lnTo>
-                  <a:pt x="278907" y="41137"/>
-                </a:lnTo>
-                <a:close/>
-                <a:lnTo>
-                  <a:pt x="281232" y="40876"/>
-                </a:lnTo>
-                <a:close/>
-                <a:lnTo>
-                  <a:pt x="283556" y="40614"/>
-                </a:lnTo>
-                <a:close/>
-                <a:lnTo>
-                  <a:pt x="285880" y="40354"/>
-                </a:lnTo>
-                <a:close/>
-                <a:lnTo>
-                  <a:pt x="288204" y="40094"/>
-                </a:lnTo>
-                <a:close/>
-                <a:lnTo>
-                  <a:pt x="290528" y="39836"/>
-                </a:lnTo>
-                <a:close/>
-                <a:lnTo>
-                  <a:pt x="292853" y="39579"/>
-                </a:lnTo>
-                <a:close/>
-                <a:lnTo>
-                  <a:pt x="295177" y="39325"/>
-                </a:lnTo>
-                <a:close/>
-                <a:lnTo>
-                  <a:pt x="297501" y="39072"/>
-                </a:lnTo>
-                <a:close/>
-                <a:lnTo>
-                  <a:pt x="299825" y="38821"/>
-                </a:lnTo>
-                <a:close/>
-                <a:lnTo>
-                  <a:pt x="302150" y="38570"/>
-                </a:lnTo>
-                <a:close/>
-                <a:lnTo>
-                  <a:pt x="304474" y="38319"/>
-                </a:lnTo>
-                <a:close/>
-                <a:lnTo>
-                  <a:pt x="306798" y="38067"/>
-                </a:lnTo>
-                <a:close/>
-                <a:lnTo>
-                  <a:pt x="309122" y="37816"/>
-                </a:lnTo>
-                <a:close/>
-                <a:lnTo>
-                  <a:pt x="311446" y="37564"/>
-                </a:lnTo>
-                <a:close/>
-                <a:lnTo>
-                  <a:pt x="313771" y="37311"/>
-                </a:lnTo>
-                <a:close/>
-                <a:lnTo>
-                  <a:pt x="316095" y="37058"/>
-                </a:lnTo>
-                <a:close/>
-                <a:lnTo>
-                  <a:pt x="318419" y="36806"/>
-                </a:lnTo>
-                <a:close/>
-                <a:lnTo>
-                  <a:pt x="320743" y="36553"/>
-                </a:lnTo>
-                <a:close/>
-                <a:lnTo>
-                  <a:pt x="323068" y="36301"/>
-                </a:lnTo>
-                <a:close/>
-                <a:lnTo>
-                  <a:pt x="325392" y="36048"/>
-                </a:lnTo>
-                <a:close/>
-                <a:lnTo>
-                  <a:pt x="327716" y="35796"/>
-                </a:lnTo>
-                <a:close/>
-                <a:lnTo>
-                  <a:pt x="330040" y="35544"/>
-                </a:lnTo>
-                <a:close/>
-                <a:lnTo>
-                  <a:pt x="332365" y="35292"/>
-                </a:lnTo>
-                <a:close/>
-                <a:lnTo>
-                  <a:pt x="334689" y="35040"/>
-                </a:lnTo>
-                <a:close/>
-                <a:lnTo>
-                  <a:pt x="337013" y="34788"/>
-                </a:lnTo>
-                <a:close/>
-                <a:lnTo>
-                  <a:pt x="339337" y="34536"/>
-                </a:lnTo>
-                <a:close/>
-                <a:lnTo>
-                  <a:pt x="341661" y="34284"/>
-                </a:lnTo>
-                <a:close/>
-                <a:lnTo>
-                  <a:pt x="343986" y="34031"/>
-                </a:lnTo>
-                <a:close/>
-                <a:lnTo>
-                  <a:pt x="346310" y="33778"/>
-                </a:lnTo>
-                <a:close/>
-                <a:lnTo>
-                  <a:pt x="348634" y="33525"/>
-                </a:lnTo>
-                <a:close/>
-                <a:lnTo>
-                  <a:pt x="350958" y="33271"/>
-                </a:lnTo>
-                <a:close/>
-                <a:lnTo>
-                  <a:pt x="353283" y="33018"/>
-                </a:lnTo>
-                <a:close/>
-                <a:lnTo>
-                  <a:pt x="355607" y="32765"/>
-                </a:lnTo>
-                <a:close/>
-                <a:lnTo>
-                  <a:pt x="357931" y="32513"/>
-                </a:lnTo>
-                <a:close/>
-                <a:lnTo>
-                  <a:pt x="360255" y="32263"/>
-                </a:lnTo>
-                <a:close/>
-                <a:lnTo>
-                  <a:pt x="362579" y="32014"/>
-                </a:lnTo>
-                <a:close/>
-                <a:lnTo>
-                  <a:pt x="364904" y="31768"/>
-                </a:lnTo>
-                <a:close/>
-                <a:lnTo>
-                  <a:pt x="367228" y="31523"/>
-                </a:lnTo>
-                <a:close/>
-                <a:lnTo>
-                  <a:pt x="369552" y="31279"/>
-                </a:lnTo>
-                <a:close/>
-                <a:lnTo>
-                  <a:pt x="371876" y="31035"/>
-                </a:lnTo>
-                <a:close/>
-                <a:lnTo>
-                  <a:pt x="374201" y="30792"/>
-                </a:lnTo>
-                <a:close/>
-                <a:lnTo>
-                  <a:pt x="376525" y="30548"/>
-                </a:lnTo>
-                <a:close/>
-                <a:lnTo>
-                  <a:pt x="378849" y="30304"/>
-                </a:lnTo>
-                <a:close/>
-                <a:lnTo>
-                  <a:pt x="381173" y="30060"/>
-                </a:lnTo>
-                <a:close/>
-                <a:lnTo>
-                  <a:pt x="383498" y="29815"/>
-                </a:lnTo>
-                <a:close/>
-                <a:lnTo>
-                  <a:pt x="385822" y="29570"/>
-                </a:lnTo>
-                <a:close/>
-                <a:lnTo>
-                  <a:pt x="388146" y="29325"/>
-                </a:lnTo>
-                <a:close/>
-                <a:lnTo>
-                  <a:pt x="390470" y="29080"/>
-                </a:lnTo>
-                <a:close/>
-                <a:lnTo>
-                  <a:pt x="392794" y="28835"/>
-                </a:lnTo>
-                <a:close/>
-                <a:lnTo>
-                  <a:pt x="395119" y="28590"/>
-                </a:lnTo>
-                <a:close/>
-                <a:lnTo>
-                  <a:pt x="397443" y="28345"/>
-                </a:lnTo>
-                <a:close/>
-                <a:lnTo>
-                  <a:pt x="399767" y="28101"/>
-                </a:lnTo>
-                <a:close/>
-                <a:lnTo>
-                  <a:pt x="402091" y="27857"/>
-                </a:lnTo>
-                <a:close/>
-                <a:lnTo>
-                  <a:pt x="404416" y="27612"/>
-                </a:lnTo>
-                <a:close/>
-                <a:lnTo>
-                  <a:pt x="406740" y="27368"/>
-                </a:lnTo>
-                <a:close/>
-                <a:lnTo>
-                  <a:pt x="409064" y="27124"/>
-                </a:lnTo>
-                <a:close/>
-                <a:lnTo>
-                  <a:pt x="411388" y="26879"/>
-                </a:lnTo>
-                <a:close/>
-                <a:lnTo>
-                  <a:pt x="413712" y="26634"/>
-                </a:lnTo>
-                <a:close/>
-                <a:lnTo>
-                  <a:pt x="416037" y="26389"/>
-                </a:lnTo>
-                <a:close/>
-                <a:lnTo>
-                  <a:pt x="418361" y="26143"/>
-                </a:lnTo>
-                <a:close/>
-                <a:lnTo>
-                  <a:pt x="420685" y="25897"/>
-                </a:lnTo>
-                <a:close/>
-                <a:lnTo>
-                  <a:pt x="423009" y="25651"/>
-                </a:lnTo>
-                <a:close/>
-                <a:lnTo>
-                  <a:pt x="425334" y="25406"/>
-                </a:lnTo>
-                <a:close/>
-                <a:lnTo>
-                  <a:pt x="427658" y="25162"/>
-                </a:lnTo>
-                <a:close/>
-                <a:lnTo>
-                  <a:pt x="429982" y="24920"/>
-                </a:lnTo>
-                <a:close/>
-                <a:lnTo>
-                  <a:pt x="432306" y="24679"/>
-                </a:lnTo>
-                <a:close/>
-                <a:lnTo>
-                  <a:pt x="434631" y="24440"/>
-                </a:lnTo>
-                <a:close/>
-                <a:lnTo>
-                  <a:pt x="436955" y="24203"/>
-                </a:lnTo>
-                <a:close/>
-                <a:lnTo>
-                  <a:pt x="439279" y="23967"/>
-                </a:lnTo>
-                <a:close/>
-                <a:lnTo>
-                  <a:pt x="441603" y="23731"/>
-                </a:lnTo>
-                <a:close/>
-                <a:lnTo>
-                  <a:pt x="443927" y="23495"/>
-                </a:lnTo>
-                <a:close/>
-                <a:lnTo>
-                  <a:pt x="446252" y="23259"/>
-                </a:lnTo>
-                <a:close/>
-                <a:lnTo>
-                  <a:pt x="448576" y="23023"/>
-                </a:lnTo>
-                <a:close/>
-                <a:lnTo>
-                  <a:pt x="450900" y="22786"/>
-                </a:lnTo>
-                <a:close/>
-                <a:lnTo>
-                  <a:pt x="453224" y="22549"/>
-                </a:lnTo>
-                <a:close/>
-                <a:lnTo>
-                  <a:pt x="455549" y="22311"/>
-                </a:lnTo>
-                <a:close/>
-                <a:lnTo>
-                  <a:pt x="457873" y="22074"/>
-                </a:lnTo>
-                <a:close/>
-                <a:lnTo>
-                  <a:pt x="460197" y="21837"/>
-                </a:lnTo>
-                <a:close/>
-                <a:lnTo>
-                  <a:pt x="462521" y="21599"/>
-                </a:lnTo>
-                <a:close/>
-                <a:lnTo>
-                  <a:pt x="464845" y="21362"/>
-                </a:lnTo>
-                <a:close/>
-                <a:lnTo>
-                  <a:pt x="467170" y="21125"/>
-                </a:lnTo>
-                <a:close/>
-                <a:lnTo>
-                  <a:pt x="469494" y="20888"/>
-                </a:lnTo>
-                <a:close/>
-                <a:lnTo>
-                  <a:pt x="471818" y="20652"/>
-                </a:lnTo>
-                <a:close/>
-                <a:lnTo>
-                  <a:pt x="474142" y="20415"/>
-                </a:lnTo>
-                <a:close/>
-                <a:lnTo>
-                  <a:pt x="476467" y="20178"/>
-                </a:lnTo>
-                <a:close/>
-                <a:lnTo>
-                  <a:pt x="478791" y="19942"/>
-                </a:lnTo>
-                <a:close/>
-                <a:lnTo>
-                  <a:pt x="481115" y="19705"/>
-                </a:lnTo>
-                <a:close/>
-                <a:lnTo>
-                  <a:pt x="483439" y="19468"/>
-                </a:lnTo>
-                <a:close/>
-                <a:lnTo>
-                  <a:pt x="485764" y="19230"/>
-                </a:lnTo>
-                <a:close/>
-                <a:lnTo>
-                  <a:pt x="488088" y="18992"/>
-                </a:lnTo>
-                <a:close/>
-                <a:lnTo>
-                  <a:pt x="490412" y="18753"/>
-                </a:lnTo>
-                <a:close/>
-                <a:lnTo>
-                  <a:pt x="492736" y="18515"/>
-                </a:lnTo>
-                <a:close/>
-                <a:lnTo>
-                  <a:pt x="495060" y="18278"/>
-                </a:lnTo>
-                <a:close/>
-                <a:lnTo>
-                  <a:pt x="497385" y="18041"/>
-                </a:lnTo>
-                <a:close/>
-                <a:lnTo>
-                  <a:pt x="499709" y="17807"/>
-                </a:lnTo>
-                <a:close/>
-                <a:lnTo>
-                  <a:pt x="502033" y="17574"/>
-                </a:lnTo>
-                <a:close/>
-                <a:lnTo>
-                  <a:pt x="504357" y="17343"/>
-                </a:lnTo>
-                <a:close/>
-                <a:lnTo>
-                  <a:pt x="506682" y="17114"/>
-                </a:lnTo>
-                <a:close/>
-                <a:lnTo>
-                  <a:pt x="509006" y="16885"/>
-                </a:lnTo>
-                <a:close/>
-                <a:lnTo>
-                  <a:pt x="511330" y="16657"/>
-                </a:lnTo>
-                <a:close/>
-                <a:lnTo>
-                  <a:pt x="513654" y="16429"/>
-                </a:lnTo>
-                <a:close/>
-                <a:lnTo>
-                  <a:pt x="515978" y="16201"/>
-                </a:lnTo>
-                <a:close/>
-                <a:lnTo>
-                  <a:pt x="518303" y="15972"/>
-                </a:lnTo>
-                <a:close/>
-                <a:lnTo>
-                  <a:pt x="520627" y="15742"/>
-                </a:lnTo>
-                <a:close/>
-                <a:lnTo>
-                  <a:pt x="522951" y="15513"/>
-                </a:lnTo>
-                <a:close/>
-                <a:lnTo>
-                  <a:pt x="525275" y="15283"/>
-                </a:lnTo>
-                <a:close/>
-                <a:lnTo>
-                  <a:pt x="527600" y="15053"/>
-                </a:lnTo>
-                <a:close/>
-                <a:lnTo>
-                  <a:pt x="529924" y="14823"/>
-                </a:lnTo>
-                <a:close/>
-                <a:lnTo>
-                  <a:pt x="532248" y="14594"/>
-                </a:lnTo>
-                <a:close/>
-                <a:lnTo>
-                  <a:pt x="534572" y="14364"/>
-                </a:lnTo>
-                <a:close/>
-                <a:lnTo>
-                  <a:pt x="536897" y="14135"/>
-                </a:lnTo>
-                <a:close/>
-                <a:lnTo>
-                  <a:pt x="539221" y="13906"/>
-                </a:lnTo>
-                <a:close/>
-                <a:lnTo>
-                  <a:pt x="541545" y="13677"/>
-                </a:lnTo>
-                <a:close/>
-                <a:lnTo>
-                  <a:pt x="543869" y="13448"/>
-                </a:lnTo>
-                <a:close/>
-                <a:lnTo>
-                  <a:pt x="546193" y="13219"/>
-                </a:lnTo>
-                <a:close/>
-                <a:lnTo>
-                  <a:pt x="548518" y="12990"/>
-                </a:lnTo>
-                <a:close/>
-                <a:lnTo>
-                  <a:pt x="550842" y="12761"/>
-                </a:lnTo>
-                <a:close/>
-                <a:lnTo>
-                  <a:pt x="553166" y="12531"/>
-                </a:lnTo>
-                <a:close/>
-                <a:lnTo>
-                  <a:pt x="555490" y="12301"/>
-                </a:lnTo>
-                <a:close/>
-                <a:lnTo>
-                  <a:pt x="557815" y="12070"/>
-                </a:lnTo>
-                <a:close/>
-                <a:lnTo>
-                  <a:pt x="560139" y="11840"/>
-                </a:lnTo>
-                <a:close/>
-                <a:lnTo>
-                  <a:pt x="562463" y="11609"/>
-                </a:lnTo>
-                <a:close/>
-                <a:lnTo>
-                  <a:pt x="564787" y="11379"/>
-                </a:lnTo>
-                <a:close/>
-                <a:lnTo>
-                  <a:pt x="567112" y="11151"/>
-                </a:lnTo>
-                <a:close/>
-                <a:lnTo>
-                  <a:pt x="569436" y="10924"/>
-                </a:lnTo>
-                <a:close/>
-                <a:lnTo>
-                  <a:pt x="571760" y="10699"/>
-                </a:lnTo>
-                <a:close/>
-                <a:lnTo>
-                  <a:pt x="574084" y="10476"/>
-                </a:lnTo>
-                <a:close/>
-                <a:lnTo>
-                  <a:pt x="576408" y="10254"/>
-                </a:lnTo>
-                <a:close/>
-                <a:lnTo>
-                  <a:pt x="578733" y="10033"/>
-                </a:lnTo>
-                <a:close/>
-                <a:lnTo>
-                  <a:pt x="581057" y="9813"/>
-                </a:lnTo>
-                <a:close/>
-                <a:lnTo>
-                  <a:pt x="583381" y="9593"/>
-                </a:lnTo>
-                <a:close/>
-                <a:lnTo>
-                  <a:pt x="585705" y="9372"/>
-                </a:lnTo>
-                <a:close/>
-                <a:lnTo>
-                  <a:pt x="588030" y="9150"/>
-                </a:lnTo>
-                <a:close/>
-                <a:lnTo>
-                  <a:pt x="590354" y="8929"/>
-                </a:lnTo>
-                <a:close/>
-                <a:lnTo>
-                  <a:pt x="592678" y="8707"/>
-                </a:lnTo>
-                <a:close/>
-                <a:lnTo>
-                  <a:pt x="595002" y="8485"/>
-                </a:lnTo>
-                <a:close/>
-                <a:lnTo>
-                  <a:pt x="597326" y="8263"/>
-                </a:lnTo>
-                <a:close/>
-                <a:lnTo>
-                  <a:pt x="599650" y="8041"/>
-                </a:lnTo>
-                <a:close/>
-                <a:lnTo>
-                  <a:pt x="601974" y="7819"/>
-                </a:lnTo>
-                <a:close/>
-                <a:lnTo>
-                  <a:pt x="604298" y="7597"/>
-                </a:lnTo>
-                <a:close/>
-                <a:lnTo>
-                  <a:pt x="606623" y="7375"/>
-                </a:lnTo>
-                <a:close/>
-                <a:lnTo>
-                  <a:pt x="608947" y="7154"/>
-                </a:lnTo>
-                <a:close/>
-                <a:lnTo>
-                  <a:pt x="611272" y="6932"/>
-                </a:lnTo>
-                <a:close/>
-                <a:lnTo>
-                  <a:pt x="613597" y="6711"/>
-                </a:lnTo>
-                <a:close/>
-                <a:lnTo>
-                  <a:pt x="615922" y="6490"/>
-                </a:lnTo>
-                <a:close/>
-                <a:lnTo>
-                  <a:pt x="618247" y="6268"/>
-                </a:lnTo>
-                <a:close/>
-                <a:lnTo>
-                  <a:pt x="620572" y="6047"/>
-                </a:lnTo>
-                <a:close/>
-                <a:lnTo>
-                  <a:pt x="622895" y="5825"/>
-                </a:lnTo>
-                <a:close/>
-                <a:lnTo>
-                  <a:pt x="625217" y="5602"/>
-                </a:lnTo>
-                <a:close/>
-                <a:lnTo>
-                  <a:pt x="627538" y="5379"/>
-                </a:lnTo>
-                <a:close/>
-                <a:lnTo>
-                  <a:pt x="629859" y="5156"/>
-                </a:lnTo>
-                <a:close/>
-                <a:lnTo>
-                  <a:pt x="632180" y="4933"/>
-                </a:lnTo>
-                <a:close/>
-                <a:lnTo>
-                  <a:pt x="634503" y="4711"/>
-                </a:lnTo>
-                <a:close/>
-                <a:lnTo>
-                  <a:pt x="636830" y="4490"/>
-                </a:lnTo>
-                <a:close/>
-                <a:lnTo>
-                  <a:pt x="639162" y="4271"/>
-                </a:lnTo>
-                <a:close/>
-                <a:lnTo>
-                  <a:pt x="641499" y="4055"/>
-                </a:lnTo>
-                <a:close/>
-                <a:lnTo>
-                  <a:pt x="643837" y="3840"/>
-                </a:lnTo>
-                <a:close/>
-                <a:lnTo>
-                  <a:pt x="646172" y="3626"/>
-                </a:lnTo>
-                <a:close/>
-                <a:lnTo>
-                  <a:pt x="648499" y="3413"/>
-                </a:lnTo>
-                <a:close/>
-                <a:lnTo>
-                  <a:pt x="650814" y="3200"/>
-                </a:lnTo>
-                <a:close/>
-                <a:lnTo>
-                  <a:pt x="653110" y="2987"/>
-                </a:lnTo>
-                <a:close/>
-                <a:lnTo>
-                  <a:pt x="655387" y="2772"/>
-                </a:lnTo>
-                <a:close/>
-                <a:lnTo>
-                  <a:pt x="657658" y="2555"/>
-                </a:lnTo>
-                <a:close/>
-                <a:lnTo>
-                  <a:pt x="659942" y="2335"/>
-                </a:lnTo>
-                <a:close/>
-                <a:lnTo>
-                  <a:pt x="662256" y="2113"/>
-                </a:lnTo>
-                <a:close/>
-                <a:lnTo>
-                  <a:pt x="664618" y="1887"/>
-                </a:lnTo>
-                <a:close/>
-                <a:lnTo>
-                  <a:pt x="667047" y="1657"/>
-                </a:lnTo>
-                <a:close/>
-                <a:lnTo>
-                  <a:pt x="669549" y="1423"/>
-                </a:lnTo>
-                <a:close/>
-                <a:lnTo>
-                  <a:pt x="672071" y="1190"/>
-                </a:lnTo>
-                <a:close/>
-                <a:lnTo>
-                  <a:pt x="674546" y="962"/>
-                </a:lnTo>
-                <a:close/>
-                <a:lnTo>
-                  <a:pt x="676906" y="746"/>
-                </a:lnTo>
-                <a:close/>
-                <a:lnTo>
-                  <a:pt x="679083" y="547"/>
-                </a:lnTo>
-                <a:close/>
-                <a:lnTo>
-                  <a:pt x="681010" y="371"/>
-                </a:lnTo>
-                <a:close/>
-                <a:lnTo>
-                  <a:pt x="682618" y="222"/>
-                </a:lnTo>
-                <a:close/>
-                <a:lnTo>
-                  <a:pt x="683840" y="108"/>
-                </a:lnTo>
-                <a:close/>
-                <a:lnTo>
-                  <a:pt x="684609" y="32"/>
-                </a:lnTo>
-                <a:close/>
-                <a:lnTo>
-                  <a:pt x="684856" y="0"/>
-                </a:lnTo>
-                <a:close/>
-                <a:lnTo>
-                  <a:pt x="684514" y="19"/>
-                </a:lnTo>
-                <a:close/>
-                <a:lnTo>
-                  <a:pt x="683514" y="93"/>
-                </a:lnTo>
-                <a:close/>
-              </a:path>
-            </a:pathLst>
-          </a:custGeom>
-          <a:ln w="31750">
-            <a:solidFill>
-              <a:srgbClr val="FFFFFF"/>
-            </a:solidFill>
-          </a:ln>
-        </p:spPr>
-        <p:style>
-          <a:lnRef idx="1">
-            <a:schemeClr val="accent1"/>
-          </a:lnRef>
-          <a:fillRef idx="3">
-            <a:schemeClr val="accent1"/>
-          </a:fillRef>
-          <a:effectRef idx="2">
-            <a:schemeClr val="accent1"/>
-          </a:effectRef>
-          <a:fontRef idx="minor">
-            <a:schemeClr val="lt1"/>
-          </a:fontRef>
-        </p:style>
-        <p:txBody>
-          <a:bodyPr rtlCol="0" anchor="ctr"/>
-          <a:lstStyle/>
-          <a:p>
-            <a:pPr algn="ctr"/>
-          </a:p>
-        </p:txBody>
-      </p:sp>
       <p:cxnSp>
         <p:nvCxnSpPr>
-          <p:cNvPr id="6" name="Connector 5"/>
+          <p:cNvPr id="5" name="Connector 4"/>
           <p:cNvCxnSpPr/>
           <p:nvPr/>
         </p:nvCxnSpPr>
@@ -5702,14 +4453,14 @@
       </p:cxnSp>
       <p:sp>
         <p:nvSpPr>
-          <p:cNvPr id="7" name="Oval 6"/>
+          <p:cNvPr id="6" name="Oval 5"/>
           <p:cNvSpPr/>
           <p:nvPr/>
         </p:nvSpPr>
         <p:spPr>
           <a:xfrm>
-            <a:off x="5664200" y="1606550"/>
-            <a:ext cx="101600" cy="101600"/>
+            <a:off x="5638800" y="1581150"/>
+            <a:ext cx="152400" cy="152400"/>
           </a:xfrm>
           <a:prstGeom prst="ellipse">
             <a:avLst/>
@@ -5747,14 +4498,14 @@
       </p:sp>
       <p:sp>
         <p:nvSpPr>
-          <p:cNvPr id="8" name="Oval 7"/>
+          <p:cNvPr id="7" name="Oval 6"/>
           <p:cNvSpPr/>
           <p:nvPr/>
         </p:nvSpPr>
         <p:spPr>
           <a:xfrm>
-            <a:off x="5664200" y="1835150"/>
-            <a:ext cx="101600" cy="101600"/>
+            <a:off x="5638800" y="1946910"/>
+            <a:ext cx="152400" cy="152400"/>
           </a:xfrm>
           <a:prstGeom prst="ellipse">
             <a:avLst/>
@@ -5792,14 +4543,14 @@
       </p:sp>
       <p:sp>
         <p:nvSpPr>
-          <p:cNvPr id="9" name="Freeform 8"/>
+          <p:cNvPr id="8" name="Freeform 7"/>
           <p:cNvSpPr/>
           <p:nvPr/>
         </p:nvSpPr>
         <p:spPr>
           <a:xfrm>
-            <a:off x="5394960" y="2147377"/>
-            <a:ext cx="297180" cy="34747"/>
+            <a:off x="5394960" y="1695755"/>
+            <a:ext cx="228600" cy="100127"/>
           </a:xfrm>
           <a:custGeom>
             <a:avLst/>
@@ -5808,404 +4559,404 @@
             <a:cxnLst/>
             <a:rect l="l" t="t" r="r" b="b"/>
             <a:pathLst>
-              <a:path w="297180" h="34747">
+              <a:path w="228600" h="100127">
                 <a:moveTo>
-                  <a:pt x="0" y="34747"/>
+                  <a:pt x="0" y="100127"/>
                 </a:moveTo>
                 <a:lnTo>
-                  <a:pt x="3060" y="34379"/>
-                </a:lnTo>
-                <a:close/>
-                <a:lnTo>
-                  <a:pt x="6123" y="34010"/>
-                </a:lnTo>
-                <a:close/>
-                <a:lnTo>
-                  <a:pt x="9189" y="33642"/>
-                </a:lnTo>
-                <a:close/>
-                <a:lnTo>
-                  <a:pt x="12256" y="33273"/>
-                </a:lnTo>
-                <a:close/>
-                <a:lnTo>
-                  <a:pt x="15324" y="32905"/>
-                </a:lnTo>
-                <a:close/>
-                <a:lnTo>
-                  <a:pt x="18392" y="32536"/>
-                </a:lnTo>
-                <a:close/>
-                <a:lnTo>
-                  <a:pt x="21458" y="32167"/>
-                </a:lnTo>
-                <a:close/>
-                <a:lnTo>
-                  <a:pt x="24523" y="31799"/>
-                </a:lnTo>
-                <a:close/>
-                <a:lnTo>
-                  <a:pt x="27584" y="31430"/>
-                </a:lnTo>
-                <a:close/>
-                <a:lnTo>
-                  <a:pt x="30642" y="31062"/>
-                </a:lnTo>
-                <a:close/>
-                <a:lnTo>
-                  <a:pt x="33697" y="30693"/>
-                </a:lnTo>
-                <a:close/>
-                <a:lnTo>
-                  <a:pt x="36750" y="30325"/>
-                </a:lnTo>
-                <a:close/>
-                <a:lnTo>
-                  <a:pt x="39804" y="29956"/>
-                </a:lnTo>
-                <a:close/>
-                <a:lnTo>
-                  <a:pt x="42860" y="29588"/>
-                </a:lnTo>
-                <a:close/>
-                <a:lnTo>
-                  <a:pt x="45920" y="29219"/>
-                </a:lnTo>
-                <a:close/>
-                <a:lnTo>
-                  <a:pt x="48983" y="28851"/>
-                </a:lnTo>
-                <a:close/>
-                <a:lnTo>
-                  <a:pt x="52049" y="28482"/>
-                </a:lnTo>
-                <a:close/>
-                <a:lnTo>
-                  <a:pt x="55116" y="28114"/>
-                </a:lnTo>
-                <a:close/>
-                <a:lnTo>
-                  <a:pt x="58182" y="27745"/>
-                </a:lnTo>
-                <a:close/>
-                <a:lnTo>
-                  <a:pt x="61248" y="27376"/>
-                </a:lnTo>
-                <a:close/>
-                <a:lnTo>
-                  <a:pt x="64313" y="27008"/>
-                </a:lnTo>
-                <a:close/>
-                <a:lnTo>
-                  <a:pt x="67377" y="26639"/>
-                </a:lnTo>
-                <a:close/>
-                <a:lnTo>
-                  <a:pt x="70441" y="26271"/>
-                </a:lnTo>
-                <a:close/>
-                <a:lnTo>
-                  <a:pt x="73505" y="25903"/>
-                </a:lnTo>
-                <a:close/>
-                <a:lnTo>
-                  <a:pt x="76569" y="25535"/>
-                </a:lnTo>
-                <a:close/>
-                <a:lnTo>
-                  <a:pt x="79633" y="25166"/>
-                </a:lnTo>
-                <a:close/>
-                <a:lnTo>
-                  <a:pt x="82698" y="24798"/>
-                </a:lnTo>
-                <a:close/>
-                <a:lnTo>
-                  <a:pt x="85763" y="24429"/>
-                </a:lnTo>
-                <a:close/>
-                <a:lnTo>
-                  <a:pt x="88830" y="24059"/>
-                </a:lnTo>
-                <a:close/>
-                <a:lnTo>
-                  <a:pt x="91897" y="23688"/>
-                </a:lnTo>
-                <a:close/>
-                <a:lnTo>
-                  <a:pt x="94963" y="23319"/>
-                </a:lnTo>
-                <a:close/>
-                <a:lnTo>
-                  <a:pt x="98026" y="22951"/>
-                </a:lnTo>
-                <a:close/>
-                <a:lnTo>
-                  <a:pt x="101087" y="22586"/>
-                </a:lnTo>
-                <a:close/>
-                <a:lnTo>
-                  <a:pt x="104143" y="22224"/>
-                </a:lnTo>
-                <a:close/>
-                <a:lnTo>
-                  <a:pt x="107197" y="21864"/>
-                </a:lnTo>
-                <a:close/>
-                <a:lnTo>
-                  <a:pt x="110251" y="21506"/>
-                </a:lnTo>
-                <a:close/>
-                <a:lnTo>
-                  <a:pt x="113305" y="21149"/>
-                </a:lnTo>
-                <a:close/>
-                <a:lnTo>
-                  <a:pt x="116363" y="20792"/>
-                </a:lnTo>
-                <a:close/>
-                <a:lnTo>
-                  <a:pt x="119425" y="20434"/>
-                </a:lnTo>
-                <a:close/>
-                <a:lnTo>
-                  <a:pt x="122489" y="20075"/>
-                </a:lnTo>
-                <a:close/>
-                <a:lnTo>
-                  <a:pt x="125556" y="19716"/>
-                </a:lnTo>
-                <a:close/>
-                <a:lnTo>
-                  <a:pt x="128622" y="19356"/>
-                </a:lnTo>
-                <a:close/>
-                <a:lnTo>
-                  <a:pt x="131688" y="18997"/>
-                </a:lnTo>
-                <a:close/>
-                <a:lnTo>
-                  <a:pt x="134753" y="18638"/>
-                </a:lnTo>
-                <a:close/>
-                <a:lnTo>
-                  <a:pt x="137817" y="18279"/>
-                </a:lnTo>
-                <a:close/>
-                <a:lnTo>
-                  <a:pt x="140881" y="17920"/>
-                </a:lnTo>
-                <a:close/>
-                <a:lnTo>
-                  <a:pt x="143946" y="17562"/>
-                </a:lnTo>
-                <a:close/>
-                <a:lnTo>
-                  <a:pt x="147012" y="17204"/>
-                </a:lnTo>
-                <a:close/>
-                <a:lnTo>
-                  <a:pt x="150079" y="16845"/>
-                </a:lnTo>
-                <a:close/>
-                <a:lnTo>
-                  <a:pt x="153144" y="16487"/>
-                </a:lnTo>
-                <a:close/>
-                <a:lnTo>
-                  <a:pt x="156208" y="16128"/>
-                </a:lnTo>
-                <a:close/>
-                <a:lnTo>
-                  <a:pt x="159268" y="15768"/>
-                </a:lnTo>
-                <a:close/>
-                <a:lnTo>
-                  <a:pt x="162324" y="15406"/>
-                </a:lnTo>
-                <a:close/>
-                <a:lnTo>
-                  <a:pt x="165378" y="15046"/>
-                </a:lnTo>
-                <a:close/>
-                <a:lnTo>
-                  <a:pt x="168431" y="14686"/>
-                </a:lnTo>
-                <a:close/>
-                <a:lnTo>
-                  <a:pt x="171486" y="14329"/>
-                </a:lnTo>
-                <a:close/>
-                <a:lnTo>
-                  <a:pt x="174544" y="13977"/>
-                </a:lnTo>
-                <a:close/>
-                <a:lnTo>
-                  <a:pt x="177606" y="13628"/>
-                </a:lnTo>
-                <a:close/>
-                <a:lnTo>
-                  <a:pt x="180671" y="13281"/>
-                </a:lnTo>
-                <a:close/>
-                <a:lnTo>
-                  <a:pt x="183738" y="12933"/>
-                </a:lnTo>
-                <a:close/>
-                <a:lnTo>
-                  <a:pt x="186804" y="12582"/>
-                </a:lnTo>
-                <a:close/>
-                <a:lnTo>
-                  <a:pt x="189871" y="12227"/>
-                </a:lnTo>
-                <a:close/>
-                <a:lnTo>
-                  <a:pt x="192936" y="11868"/>
-                </a:lnTo>
-                <a:close/>
-                <a:lnTo>
-                  <a:pt x="196000" y="11507"/>
-                </a:lnTo>
-                <a:close/>
-                <a:lnTo>
-                  <a:pt x="199064" y="11147"/>
-                </a:lnTo>
-                <a:close/>
-                <a:lnTo>
-                  <a:pt x="202128" y="10790"/>
-                </a:lnTo>
-                <a:close/>
-                <a:lnTo>
-                  <a:pt x="205192" y="10437"/>
-                </a:lnTo>
-                <a:close/>
-                <a:lnTo>
-                  <a:pt x="208256" y="10088"/>
-                </a:lnTo>
-                <a:close/>
-                <a:lnTo>
-                  <a:pt x="211320" y="9740"/>
-                </a:lnTo>
-                <a:close/>
-                <a:lnTo>
-                  <a:pt x="214385" y="9393"/>
-                </a:lnTo>
-                <a:close/>
-                <a:lnTo>
-                  <a:pt x="217452" y="9044"/>
-                </a:lnTo>
-                <a:close/>
-                <a:lnTo>
-                  <a:pt x="220519" y="8693"/>
-                </a:lnTo>
-                <a:close/>
-                <a:lnTo>
-                  <a:pt x="223586" y="8342"/>
-                </a:lnTo>
-                <a:close/>
-                <a:lnTo>
-                  <a:pt x="226651" y="7992"/>
-                </a:lnTo>
-                <a:close/>
-                <a:lnTo>
-                  <a:pt x="229713" y="7645"/>
-                </a:lnTo>
-                <a:close/>
-                <a:lnTo>
-                  <a:pt x="232769" y="7303"/>
-                </a:lnTo>
-                <a:close/>
-                <a:lnTo>
-                  <a:pt x="235821" y="6964"/>
-                </a:lnTo>
-                <a:close/>
-                <a:lnTo>
-                  <a:pt x="238873" y="6627"/>
-                </a:lnTo>
-                <a:close/>
-                <a:lnTo>
-                  <a:pt x="241927" y="6289"/>
-                </a:lnTo>
-                <a:close/>
-                <a:lnTo>
-                  <a:pt x="244987" y="5947"/>
-                </a:lnTo>
-                <a:close/>
-                <a:lnTo>
-                  <a:pt x="248056" y="5600"/>
-                </a:lnTo>
-                <a:close/>
-                <a:lnTo>
-                  <a:pt x="251128" y="5250"/>
-                </a:lnTo>
-                <a:close/>
-                <a:lnTo>
-                  <a:pt x="254198" y="4898"/>
-                </a:lnTo>
-                <a:close/>
-                <a:lnTo>
-                  <a:pt x="257260" y="4549"/>
-                </a:lnTo>
-                <a:close/>
-                <a:lnTo>
-                  <a:pt x="260307" y="4203"/>
-                </a:lnTo>
-                <a:close/>
-                <a:lnTo>
-                  <a:pt x="263338" y="3863"/>
-                </a:lnTo>
-                <a:close/>
-                <a:lnTo>
-                  <a:pt x="266371" y="3526"/>
-                </a:lnTo>
-                <a:close/>
-                <a:lnTo>
-                  <a:pt x="269427" y="3189"/>
-                </a:lnTo>
-                <a:close/>
-                <a:lnTo>
-                  <a:pt x="272524" y="2849"/>
-                </a:lnTo>
-                <a:close/>
-                <a:lnTo>
-                  <a:pt x="275681" y="2503"/>
-                </a:lnTo>
-                <a:close/>
-                <a:lnTo>
-                  <a:pt x="278878" y="2152"/>
-                </a:lnTo>
-                <a:close/>
-                <a:lnTo>
-                  <a:pt x="282043" y="1803"/>
-                </a:lnTo>
-                <a:close/>
-                <a:lnTo>
-                  <a:pt x="285104" y="1464"/>
-                </a:lnTo>
-                <a:close/>
-                <a:lnTo>
-                  <a:pt x="287987" y="1140"/>
-                </a:lnTo>
-                <a:close/>
-                <a:lnTo>
-                  <a:pt x="290619" y="839"/>
-                </a:lnTo>
-                <a:close/>
-                <a:lnTo>
-                  <a:pt x="292928" y="568"/>
-                </a:lnTo>
-                <a:close/>
-                <a:lnTo>
-                  <a:pt x="294839" y="333"/>
-                </a:lnTo>
-                <a:close/>
-                <a:lnTo>
-                  <a:pt x="296281" y="141"/>
-                </a:lnTo>
-                <a:close/>
-                <a:lnTo>
-                  <a:pt x="297180" y="0"/>
+                  <a:pt x="2309" y="99086"/>
+                </a:lnTo>
+                <a:close/>
+                <a:lnTo>
+                  <a:pt x="4618" y="98042"/>
+                </a:lnTo>
+                <a:close/>
+                <a:lnTo>
+                  <a:pt x="6927" y="96994"/>
+                </a:lnTo>
+                <a:close/>
+                <a:lnTo>
+                  <a:pt x="9236" y="95944"/>
+                </a:lnTo>
+                <a:close/>
+                <a:lnTo>
+                  <a:pt x="11545" y="94891"/>
+                </a:lnTo>
+                <a:close/>
+                <a:lnTo>
+                  <a:pt x="13855" y="93835"/>
+                </a:lnTo>
+                <a:close/>
+                <a:lnTo>
+                  <a:pt x="16164" y="92777"/>
+                </a:lnTo>
+                <a:close/>
+                <a:lnTo>
+                  <a:pt x="18473" y="91717"/>
+                </a:lnTo>
+                <a:close/>
+                <a:lnTo>
+                  <a:pt x="20782" y="90655"/>
+                </a:lnTo>
+                <a:close/>
+                <a:lnTo>
+                  <a:pt x="23091" y="89590"/>
+                </a:lnTo>
+                <a:close/>
+                <a:lnTo>
+                  <a:pt x="25400" y="88524"/>
+                </a:lnTo>
+                <a:close/>
+                <a:lnTo>
+                  <a:pt x="27709" y="87456"/>
+                </a:lnTo>
+                <a:close/>
+                <a:lnTo>
+                  <a:pt x="30018" y="86387"/>
+                </a:lnTo>
+                <a:close/>
+                <a:lnTo>
+                  <a:pt x="32327" y="85317"/>
+                </a:lnTo>
+                <a:close/>
+                <a:lnTo>
+                  <a:pt x="34636" y="84246"/>
+                </a:lnTo>
+                <a:close/>
+                <a:lnTo>
+                  <a:pt x="36945" y="83174"/>
+                </a:lnTo>
+                <a:close/>
+                <a:lnTo>
+                  <a:pt x="39255" y="82101"/>
+                </a:lnTo>
+                <a:close/>
+                <a:lnTo>
+                  <a:pt x="41564" y="81028"/>
+                </a:lnTo>
+                <a:close/>
+                <a:lnTo>
+                  <a:pt x="43873" y="79954"/>
+                </a:lnTo>
+                <a:close/>
+                <a:lnTo>
+                  <a:pt x="46182" y="78881"/>
+                </a:lnTo>
+                <a:close/>
+                <a:lnTo>
+                  <a:pt x="48491" y="77807"/>
+                </a:lnTo>
+                <a:close/>
+                <a:lnTo>
+                  <a:pt x="50800" y="76734"/>
+                </a:lnTo>
+                <a:close/>
+                <a:lnTo>
+                  <a:pt x="53109" y="75660"/>
+                </a:lnTo>
+                <a:close/>
+                <a:lnTo>
+                  <a:pt x="55418" y="74588"/>
+                </a:lnTo>
+                <a:close/>
+                <a:lnTo>
+                  <a:pt x="57727" y="73516"/>
+                </a:lnTo>
+                <a:close/>
+                <a:lnTo>
+                  <a:pt x="60036" y="72445"/>
+                </a:lnTo>
+                <a:close/>
+                <a:lnTo>
+                  <a:pt x="62345" y="71376"/>
+                </a:lnTo>
+                <a:close/>
+                <a:lnTo>
+                  <a:pt x="64655" y="70307"/>
+                </a:lnTo>
+                <a:close/>
+                <a:lnTo>
+                  <a:pt x="66964" y="69240"/>
+                </a:lnTo>
+                <a:close/>
+                <a:lnTo>
+                  <a:pt x="69273" y="68175"/>
+                </a:lnTo>
+                <a:close/>
+                <a:lnTo>
+                  <a:pt x="71582" y="67111"/>
+                </a:lnTo>
+                <a:close/>
+                <a:lnTo>
+                  <a:pt x="73891" y="66049"/>
+                </a:lnTo>
+                <a:close/>
+                <a:lnTo>
+                  <a:pt x="76200" y="64990"/>
+                </a:lnTo>
+                <a:close/>
+                <a:lnTo>
+                  <a:pt x="78509" y="63933"/>
+                </a:lnTo>
+                <a:close/>
+                <a:lnTo>
+                  <a:pt x="80818" y="62878"/>
+                </a:lnTo>
+                <a:close/>
+                <a:lnTo>
+                  <a:pt x="83127" y="61826"/>
+                </a:lnTo>
+                <a:close/>
+                <a:lnTo>
+                  <a:pt x="85436" y="60777"/>
+                </a:lnTo>
+                <a:close/>
+                <a:lnTo>
+                  <a:pt x="87745" y="59731"/>
+                </a:lnTo>
+                <a:close/>
+                <a:lnTo>
+                  <a:pt x="90055" y="58688"/>
+                </a:lnTo>
+                <a:close/>
+                <a:lnTo>
+                  <a:pt x="92364" y="57649"/>
+                </a:lnTo>
+                <a:close/>
+                <a:lnTo>
+                  <a:pt x="94673" y="56613"/>
+                </a:lnTo>
+                <a:close/>
+                <a:lnTo>
+                  <a:pt x="96982" y="55580"/>
+                </a:lnTo>
+                <a:close/>
+                <a:lnTo>
+                  <a:pt x="99291" y="54550"/>
+                </a:lnTo>
+                <a:close/>
+                <a:lnTo>
+                  <a:pt x="101600" y="53524"/>
+                </a:lnTo>
+                <a:close/>
+                <a:lnTo>
+                  <a:pt x="103909" y="52499"/>
+                </a:lnTo>
+                <a:close/>
+                <a:lnTo>
+                  <a:pt x="106218" y="51478"/>
+                </a:lnTo>
+                <a:close/>
+                <a:lnTo>
+                  <a:pt x="108527" y="50459"/>
+                </a:lnTo>
+                <a:close/>
+                <a:lnTo>
+                  <a:pt x="110836" y="49442"/>
+                </a:lnTo>
+                <a:close/>
+                <a:lnTo>
+                  <a:pt x="113145" y="48427"/>
+                </a:lnTo>
+                <a:close/>
+                <a:lnTo>
+                  <a:pt x="115455" y="47414"/>
+                </a:lnTo>
+                <a:close/>
+                <a:lnTo>
+                  <a:pt x="117764" y="46402"/>
+                </a:lnTo>
+                <a:close/>
+                <a:lnTo>
+                  <a:pt x="120073" y="45392"/>
+                </a:lnTo>
+                <a:close/>
+                <a:lnTo>
+                  <a:pt x="122382" y="44384"/>
+                </a:lnTo>
+                <a:close/>
+                <a:lnTo>
+                  <a:pt x="124691" y="43376"/>
+                </a:lnTo>
+                <a:close/>
+                <a:lnTo>
+                  <a:pt x="127000" y="42370"/>
+                </a:lnTo>
+                <a:close/>
+                <a:lnTo>
+                  <a:pt x="129309" y="41364"/>
+                </a:lnTo>
+                <a:close/>
+                <a:lnTo>
+                  <a:pt x="131618" y="40358"/>
+                </a:lnTo>
+                <a:close/>
+                <a:lnTo>
+                  <a:pt x="133927" y="39354"/>
+                </a:lnTo>
+                <a:close/>
+                <a:lnTo>
+                  <a:pt x="136236" y="38349"/>
+                </a:lnTo>
+                <a:close/>
+                <a:lnTo>
+                  <a:pt x="138545" y="37345"/>
+                </a:lnTo>
+                <a:close/>
+                <a:lnTo>
+                  <a:pt x="140855" y="36340"/>
+                </a:lnTo>
+                <a:close/>
+                <a:lnTo>
+                  <a:pt x="143164" y="35336"/>
+                </a:lnTo>
+                <a:close/>
+                <a:lnTo>
+                  <a:pt x="145473" y="34333"/>
+                </a:lnTo>
+                <a:close/>
+                <a:lnTo>
+                  <a:pt x="147782" y="33330"/>
+                </a:lnTo>
+                <a:close/>
+                <a:lnTo>
+                  <a:pt x="150091" y="32328"/>
+                </a:lnTo>
+                <a:close/>
+                <a:lnTo>
+                  <a:pt x="152400" y="31326"/>
+                </a:lnTo>
+                <a:close/>
+                <a:lnTo>
+                  <a:pt x="154709" y="30326"/>
+                </a:lnTo>
+                <a:close/>
+                <a:lnTo>
+                  <a:pt x="157018" y="29328"/>
+                </a:lnTo>
+                <a:close/>
+                <a:lnTo>
+                  <a:pt x="159327" y="28331"/>
+                </a:lnTo>
+                <a:close/>
+                <a:lnTo>
+                  <a:pt x="161636" y="27335"/>
+                </a:lnTo>
+                <a:close/>
+                <a:lnTo>
+                  <a:pt x="163945" y="26342"/>
+                </a:lnTo>
+                <a:close/>
+                <a:lnTo>
+                  <a:pt x="166255" y="25350"/>
+                </a:lnTo>
+                <a:close/>
+                <a:lnTo>
+                  <a:pt x="168564" y="24361"/>
+                </a:lnTo>
+                <a:close/>
+                <a:lnTo>
+                  <a:pt x="170873" y="23374"/>
+                </a:lnTo>
+                <a:close/>
+                <a:lnTo>
+                  <a:pt x="173182" y="22390"/>
+                </a:lnTo>
+                <a:close/>
+                <a:lnTo>
+                  <a:pt x="175491" y="21408"/>
+                </a:lnTo>
+                <a:close/>
+                <a:lnTo>
+                  <a:pt x="177800" y="20430"/>
+                </a:lnTo>
+                <a:close/>
+                <a:lnTo>
+                  <a:pt x="180109" y="19454"/>
+                </a:lnTo>
+                <a:close/>
+                <a:lnTo>
+                  <a:pt x="182418" y="18482"/>
+                </a:lnTo>
+                <a:close/>
+                <a:lnTo>
+                  <a:pt x="184727" y="17513"/>
+                </a:lnTo>
+                <a:close/>
+                <a:lnTo>
+                  <a:pt x="187036" y="16548"/>
+                </a:lnTo>
+                <a:close/>
+                <a:lnTo>
+                  <a:pt x="189345" y="15587"/>
+                </a:lnTo>
+                <a:close/>
+                <a:lnTo>
+                  <a:pt x="191655" y="14629"/>
+                </a:lnTo>
+                <a:close/>
+                <a:lnTo>
+                  <a:pt x="193964" y="13676"/>
+                </a:lnTo>
+                <a:close/>
+                <a:lnTo>
+                  <a:pt x="196273" y="12727"/>
+                </a:lnTo>
+                <a:close/>
+                <a:lnTo>
+                  <a:pt x="198582" y="11783"/>
+                </a:lnTo>
+                <a:close/>
+                <a:lnTo>
+                  <a:pt x="200891" y="10844"/>
+                </a:lnTo>
+                <a:close/>
+                <a:lnTo>
+                  <a:pt x="203200" y="9909"/>
+                </a:lnTo>
+                <a:close/>
+                <a:lnTo>
+                  <a:pt x="205509" y="8979"/>
+                </a:lnTo>
+                <a:close/>
+                <a:lnTo>
+                  <a:pt x="207818" y="8055"/>
+                </a:lnTo>
+                <a:close/>
+                <a:lnTo>
+                  <a:pt x="210127" y="7136"/>
+                </a:lnTo>
+                <a:close/>
+                <a:lnTo>
+                  <a:pt x="212436" y="6222"/>
+                </a:lnTo>
+                <a:close/>
+                <a:lnTo>
+                  <a:pt x="214745" y="5315"/>
+                </a:lnTo>
+                <a:close/>
+                <a:lnTo>
+                  <a:pt x="217055" y="4413"/>
+                </a:lnTo>
+                <a:close/>
+                <a:lnTo>
+                  <a:pt x="219364" y="3518"/>
+                </a:lnTo>
+                <a:close/>
+                <a:lnTo>
+                  <a:pt x="221673" y="2628"/>
+                </a:lnTo>
+                <a:close/>
+                <a:lnTo>
+                  <a:pt x="223982" y="1745"/>
+                </a:lnTo>
+                <a:close/>
+                <a:lnTo>
+                  <a:pt x="226291" y="869"/>
+                </a:lnTo>
+                <a:close/>
+                <a:lnTo>
+                  <a:pt x="228600" y="0"/>
                 </a:lnTo>
                 <a:close/>
               </a:path>
@@ -6213,7 +4964,7 @@
           </a:custGeom>
           <a:ln w="19050">
             <a:solidFill>
-              <a:srgbClr val="B4B4B4"/>
+              <a:srgbClr val="FFFFFF"/>
             </a:solidFill>
           </a:ln>
         </p:spPr>
@@ -6241,14 +4992,14 @@
       </p:sp>
       <p:sp>
         <p:nvSpPr>
-          <p:cNvPr id="10" name="Freeform 9"/>
+          <p:cNvPr id="9" name="Freeform 8"/>
           <p:cNvSpPr/>
           <p:nvPr/>
         </p:nvSpPr>
         <p:spPr>
           <a:xfrm>
-            <a:off x="5737860" y="2104537"/>
-            <a:ext cx="297180" cy="36988"/>
+            <a:off x="5806440" y="1537106"/>
+            <a:ext cx="228600" cy="84582"/>
           </a:xfrm>
           <a:custGeom>
             <a:avLst/>
@@ -6257,404 +5008,404 @@
             <a:cxnLst/>
             <a:rect l="l" t="t" r="r" b="b"/>
             <a:pathLst>
-              <a:path w="297180" h="36988">
+              <a:path w="228600" h="84582">
                 <a:moveTo>
-                  <a:pt x="297180" y="0"/>
+                  <a:pt x="228600" y="0"/>
                 </a:moveTo>
                 <a:lnTo>
-                  <a:pt x="294131" y="366"/>
-                </a:lnTo>
-                <a:close/>
-                <a:lnTo>
-                  <a:pt x="291077" y="732"/>
-                </a:lnTo>
-                <a:close/>
-                <a:lnTo>
-                  <a:pt x="288018" y="1098"/>
-                </a:lnTo>
-                <a:close/>
-                <a:lnTo>
-                  <a:pt x="284955" y="1464"/>
-                </a:lnTo>
-                <a:close/>
-                <a:lnTo>
-                  <a:pt x="281889" y="1829"/>
-                </a:lnTo>
-                <a:close/>
-                <a:lnTo>
-                  <a:pt x="278821" y="2195"/>
-                </a:lnTo>
-                <a:close/>
-                <a:lnTo>
-                  <a:pt x="275752" y="2560"/>
-                </a:lnTo>
-                <a:close/>
-                <a:lnTo>
-                  <a:pt x="272683" y="2926"/>
-                </a:lnTo>
-                <a:close/>
-                <a:lnTo>
-                  <a:pt x="269614" y="3292"/>
-                </a:lnTo>
-                <a:close/>
-                <a:lnTo>
-                  <a:pt x="266548" y="3658"/>
-                </a:lnTo>
-                <a:close/>
-                <a:lnTo>
-                  <a:pt x="263484" y="4024"/>
-                </a:lnTo>
-                <a:close/>
-                <a:lnTo>
-                  <a:pt x="260424" y="4390"/>
-                </a:lnTo>
-                <a:close/>
-                <a:lnTo>
-                  <a:pt x="257366" y="4756"/>
-                </a:lnTo>
-                <a:close/>
-                <a:lnTo>
-                  <a:pt x="254309" y="5122"/>
-                </a:lnTo>
-                <a:close/>
-                <a:lnTo>
-                  <a:pt x="251251" y="5488"/>
-                </a:lnTo>
-                <a:close/>
-                <a:lnTo>
-                  <a:pt x="248191" y="5853"/>
-                </a:lnTo>
-                <a:close/>
-                <a:lnTo>
-                  <a:pt x="245127" y="6218"/>
-                </a:lnTo>
-                <a:close/>
-                <a:lnTo>
-                  <a:pt x="242060" y="6582"/>
-                </a:lnTo>
-                <a:close/>
-                <a:lnTo>
-                  <a:pt x="238991" y="6946"/>
-                </a:lnTo>
-                <a:close/>
-                <a:lnTo>
-                  <a:pt x="235922" y="7312"/>
-                </a:lnTo>
-                <a:close/>
-                <a:lnTo>
-                  <a:pt x="232854" y="7678"/>
-                </a:lnTo>
-                <a:close/>
-                <a:lnTo>
-                  <a:pt x="229789" y="8047"/>
-                </a:lnTo>
-                <a:close/>
-                <a:lnTo>
-                  <a:pt x="226727" y="8418"/>
-                </a:lnTo>
-                <a:close/>
-                <a:lnTo>
-                  <a:pt x="223669" y="8791"/>
-                </a:lnTo>
-                <a:close/>
-                <a:lnTo>
-                  <a:pt x="220612" y="9166"/>
-                </a:lnTo>
-                <a:close/>
-                <a:lnTo>
-                  <a:pt x="217554" y="9541"/>
-                </a:lnTo>
-                <a:close/>
-                <a:lnTo>
-                  <a:pt x="214495" y="9917"/>
-                </a:lnTo>
-                <a:close/>
-                <a:lnTo>
-                  <a:pt x="211432" y="10292"/>
-                </a:lnTo>
-                <a:close/>
-                <a:lnTo>
-                  <a:pt x="208366" y="10667"/>
-                </a:lnTo>
-                <a:close/>
-                <a:lnTo>
-                  <a:pt x="205297" y="11042"/>
-                </a:lnTo>
-                <a:close/>
-                <a:lnTo>
-                  <a:pt x="202228" y="11415"/>
-                </a:lnTo>
-                <a:close/>
-                <a:lnTo>
-                  <a:pt x="199160" y="11789"/>
-                </a:lnTo>
-                <a:close/>
-                <a:lnTo>
-                  <a:pt x="196093" y="12162"/>
-                </a:lnTo>
-                <a:close/>
-                <a:lnTo>
-                  <a:pt x="193029" y="12534"/>
-                </a:lnTo>
-                <a:close/>
-                <a:lnTo>
-                  <a:pt x="189969" y="12907"/>
-                </a:lnTo>
-                <a:close/>
-                <a:lnTo>
-                  <a:pt x="186910" y="13280"/>
-                </a:lnTo>
-                <a:close/>
-                <a:lnTo>
-                  <a:pt x="183853" y="13654"/>
-                </a:lnTo>
-                <a:close/>
-                <a:lnTo>
-                  <a:pt x="180796" y="14030"/>
-                </a:lnTo>
-                <a:close/>
-                <a:lnTo>
-                  <a:pt x="177740" y="14409"/>
-                </a:lnTo>
-                <a:close/>
-                <a:lnTo>
-                  <a:pt x="174684" y="14789"/>
-                </a:lnTo>
-                <a:close/>
-                <a:lnTo>
-                  <a:pt x="171626" y="15171"/>
-                </a:lnTo>
-                <a:close/>
-                <a:lnTo>
-                  <a:pt x="168568" y="15554"/>
-                </a:lnTo>
-                <a:close/>
-                <a:lnTo>
-                  <a:pt x="165507" y="15938"/>
-                </a:lnTo>
-                <a:close/>
-                <a:lnTo>
-                  <a:pt x="162443" y="16322"/>
-                </a:lnTo>
-                <a:close/>
-                <a:lnTo>
-                  <a:pt x="159377" y="16706"/>
-                </a:lnTo>
-                <a:close/>
-                <a:lnTo>
-                  <a:pt x="156308" y="17089"/>
-                </a:lnTo>
-                <a:close/>
-                <a:lnTo>
-                  <a:pt x="153239" y="17472"/>
-                </a:lnTo>
-                <a:close/>
-                <a:lnTo>
-                  <a:pt x="150171" y="17854"/>
-                </a:lnTo>
-                <a:close/>
-                <a:lnTo>
-                  <a:pt x="147104" y="18235"/>
-                </a:lnTo>
-                <a:close/>
-                <a:lnTo>
-                  <a:pt x="144042" y="18616"/>
-                </a:lnTo>
-                <a:close/>
-                <a:lnTo>
-                  <a:pt x="140982" y="18996"/>
-                </a:lnTo>
-                <a:close/>
-                <a:lnTo>
-                  <a:pt x="137924" y="19377"/>
-                </a:lnTo>
-                <a:close/>
-                <a:lnTo>
-                  <a:pt x="134867" y="19759"/>
-                </a:lnTo>
-                <a:close/>
-                <a:lnTo>
-                  <a:pt x="131809" y="20142"/>
-                </a:lnTo>
-                <a:close/>
-                <a:lnTo>
-                  <a:pt x="128748" y="20529"/>
-                </a:lnTo>
-                <a:close/>
-                <a:lnTo>
-                  <a:pt x="125683" y="20918"/>
-                </a:lnTo>
-                <a:close/>
-                <a:lnTo>
-                  <a:pt x="122615" y="21310"/>
-                </a:lnTo>
-                <a:close/>
-                <a:lnTo>
-                  <a:pt x="119546" y="21702"/>
-                </a:lnTo>
-                <a:close/>
-                <a:lnTo>
-                  <a:pt x="116477" y="22094"/>
-                </a:lnTo>
-                <a:close/>
-                <a:lnTo>
-                  <a:pt x="113410" y="22484"/>
-                </a:lnTo>
-                <a:close/>
-                <a:lnTo>
-                  <a:pt x="110345" y="22870"/>
-                </a:lnTo>
-                <a:close/>
-                <a:lnTo>
-                  <a:pt x="107283" y="23254"/>
-                </a:lnTo>
-                <a:close/>
-                <a:lnTo>
-                  <a:pt x="104223" y="23636"/>
-                </a:lnTo>
-                <a:close/>
-                <a:lnTo>
-                  <a:pt x="101165" y="24017"/>
-                </a:lnTo>
-                <a:close/>
-                <a:lnTo>
-                  <a:pt x="98108" y="24398"/>
-                </a:lnTo>
-                <a:close/>
-                <a:lnTo>
-                  <a:pt x="95052" y="24781"/>
-                </a:lnTo>
-                <a:close/>
-                <a:lnTo>
-                  <a:pt x="91995" y="25166"/>
-                </a:lnTo>
-                <a:close/>
-                <a:lnTo>
-                  <a:pt x="88938" y="25553"/>
-                </a:lnTo>
-                <a:close/>
-                <a:lnTo>
-                  <a:pt x="85880" y="25943"/>
-                </a:lnTo>
-                <a:close/>
-                <a:lnTo>
-                  <a:pt x="82820" y="26336"/>
-                </a:lnTo>
-                <a:close/>
-                <a:lnTo>
-                  <a:pt x="79758" y="26731"/>
-                </a:lnTo>
-                <a:close/>
-                <a:lnTo>
-                  <a:pt x="76695" y="27128"/>
-                </a:lnTo>
-                <a:close/>
-                <a:lnTo>
-                  <a:pt x="73629" y="27528"/>
-                </a:lnTo>
-                <a:close/>
-                <a:lnTo>
-                  <a:pt x="70562" y="27928"/>
-                </a:lnTo>
-                <a:close/>
-                <a:lnTo>
-                  <a:pt x="67494" y="28328"/>
-                </a:lnTo>
-                <a:close/>
-                <a:lnTo>
-                  <a:pt x="64425" y="28727"/>
-                </a:lnTo>
-                <a:close/>
-                <a:lnTo>
-                  <a:pt x="61356" y="29124"/>
-                </a:lnTo>
-                <a:close/>
-                <a:lnTo>
-                  <a:pt x="58288" y="29518"/>
-                </a:lnTo>
-                <a:close/>
-                <a:lnTo>
-                  <a:pt x="55221" y="29909"/>
-                </a:lnTo>
-                <a:close/>
-                <a:lnTo>
-                  <a:pt x="52159" y="30299"/>
-                </a:lnTo>
-                <a:close/>
-                <a:lnTo>
-                  <a:pt x="49102" y="30688"/>
-                </a:lnTo>
-                <a:close/>
-                <a:lnTo>
-                  <a:pt x="46053" y="31078"/>
-                </a:lnTo>
-                <a:close/>
-                <a:lnTo>
-                  <a:pt x="43012" y="31468"/>
-                </a:lnTo>
-                <a:close/>
-                <a:lnTo>
-                  <a:pt x="39976" y="31860"/>
-                </a:lnTo>
-                <a:close/>
-                <a:lnTo>
-                  <a:pt x="36934" y="32255"/>
-                </a:lnTo>
-                <a:close/>
-                <a:lnTo>
-                  <a:pt x="33874" y="32654"/>
-                </a:lnTo>
-                <a:close/>
-                <a:lnTo>
-                  <a:pt x="30787" y="33058"/>
-                </a:lnTo>
-                <a:close/>
-                <a:lnTo>
-                  <a:pt x="27661" y="33467"/>
-                </a:lnTo>
-                <a:close/>
-                <a:lnTo>
-                  <a:pt x="24494" y="33882"/>
-                </a:lnTo>
-                <a:close/>
-                <a:lnTo>
-                  <a:pt x="21322" y="34298"/>
-                </a:lnTo>
-                <a:close/>
-                <a:lnTo>
-                  <a:pt x="18191" y="34707"/>
-                </a:lnTo>
-                <a:close/>
-                <a:lnTo>
-                  <a:pt x="15146" y="35104"/>
-                </a:lnTo>
-                <a:close/>
-                <a:lnTo>
-                  <a:pt x="12230" y="35482"/>
-                </a:lnTo>
-                <a:close/>
-                <a:lnTo>
-                  <a:pt x="9490" y="35835"/>
-                </a:lnTo>
-                <a:close/>
-                <a:lnTo>
-                  <a:pt x="6971" y="36155"/>
-                </a:lnTo>
-                <a:close/>
-                <a:lnTo>
-                  <a:pt x="4717" y="36437"/>
-                </a:lnTo>
-                <a:close/>
-                <a:lnTo>
-                  <a:pt x="2774" y="36674"/>
-                </a:lnTo>
-                <a:close/>
-                <a:lnTo>
-                  <a:pt x="1187" y="36860"/>
-                </a:lnTo>
-                <a:close/>
-                <a:lnTo>
-                  <a:pt x="0" y="36988"/>
+                  <a:pt x="226291" y="844"/>
+                </a:lnTo>
+                <a:close/>
+                <a:lnTo>
+                  <a:pt x="223982" y="1686"/>
+                </a:lnTo>
+                <a:close/>
+                <a:lnTo>
+                  <a:pt x="221673" y="2526"/>
+                </a:lnTo>
+                <a:close/>
+                <a:lnTo>
+                  <a:pt x="219364" y="3364"/>
+                </a:lnTo>
+                <a:close/>
+                <a:lnTo>
+                  <a:pt x="217055" y="4200"/>
+                </a:lnTo>
+                <a:close/>
+                <a:lnTo>
+                  <a:pt x="214745" y="5035"/>
+                </a:lnTo>
+                <a:close/>
+                <a:lnTo>
+                  <a:pt x="212436" y="5869"/>
+                </a:lnTo>
+                <a:close/>
+                <a:lnTo>
+                  <a:pt x="210127" y="6701"/>
+                </a:lnTo>
+                <a:close/>
+                <a:lnTo>
+                  <a:pt x="207818" y="7532"/>
+                </a:lnTo>
+                <a:close/>
+                <a:lnTo>
+                  <a:pt x="205509" y="8362"/>
+                </a:lnTo>
+                <a:close/>
+                <a:lnTo>
+                  <a:pt x="203200" y="9192"/>
+                </a:lnTo>
+                <a:close/>
+                <a:lnTo>
+                  <a:pt x="200891" y="10020"/>
+                </a:lnTo>
+                <a:close/>
+                <a:lnTo>
+                  <a:pt x="198582" y="10847"/>
+                </a:lnTo>
+                <a:close/>
+                <a:lnTo>
+                  <a:pt x="196273" y="11674"/>
+                </a:lnTo>
+                <a:close/>
+                <a:lnTo>
+                  <a:pt x="193964" y="12500"/>
+                </a:lnTo>
+                <a:close/>
+                <a:lnTo>
+                  <a:pt x="191655" y="13325"/>
+                </a:lnTo>
+                <a:close/>
+                <a:lnTo>
+                  <a:pt x="189345" y="14150"/>
+                </a:lnTo>
+                <a:close/>
+                <a:lnTo>
+                  <a:pt x="187036" y="14975"/>
+                </a:lnTo>
+                <a:close/>
+                <a:lnTo>
+                  <a:pt x="184727" y="15800"/>
+                </a:lnTo>
+                <a:close/>
+                <a:lnTo>
+                  <a:pt x="182418" y="16625"/>
+                </a:lnTo>
+                <a:close/>
+                <a:lnTo>
+                  <a:pt x="180109" y="17449"/>
+                </a:lnTo>
+                <a:close/>
+                <a:lnTo>
+                  <a:pt x="177800" y="18274"/>
+                </a:lnTo>
+                <a:close/>
+                <a:lnTo>
+                  <a:pt x="175491" y="19099"/>
+                </a:lnTo>
+                <a:close/>
+                <a:lnTo>
+                  <a:pt x="173182" y="19924"/>
+                </a:lnTo>
+                <a:close/>
+                <a:lnTo>
+                  <a:pt x="170873" y="20750"/>
+                </a:lnTo>
+                <a:close/>
+                <a:lnTo>
+                  <a:pt x="168564" y="21576"/>
+                </a:lnTo>
+                <a:close/>
+                <a:lnTo>
+                  <a:pt x="166255" y="22403"/>
+                </a:lnTo>
+                <a:close/>
+                <a:lnTo>
+                  <a:pt x="163945" y="23231"/>
+                </a:lnTo>
+                <a:close/>
+                <a:lnTo>
+                  <a:pt x="161636" y="24059"/>
+                </a:lnTo>
+                <a:close/>
+                <a:lnTo>
+                  <a:pt x="159327" y="24889"/>
+                </a:lnTo>
+                <a:close/>
+                <a:lnTo>
+                  <a:pt x="157018" y="25719"/>
+                </a:lnTo>
+                <a:close/>
+                <a:lnTo>
+                  <a:pt x="154709" y="26551"/>
+                </a:lnTo>
+                <a:close/>
+                <a:lnTo>
+                  <a:pt x="152400" y="27383"/>
+                </a:lnTo>
+                <a:close/>
+                <a:lnTo>
+                  <a:pt x="150091" y="28218"/>
+                </a:lnTo>
+                <a:close/>
+                <a:lnTo>
+                  <a:pt x="147782" y="29053"/>
+                </a:lnTo>
+                <a:close/>
+                <a:lnTo>
+                  <a:pt x="145473" y="29890"/>
+                </a:lnTo>
+                <a:close/>
+                <a:lnTo>
+                  <a:pt x="143164" y="30729"/>
+                </a:lnTo>
+                <a:close/>
+                <a:lnTo>
+                  <a:pt x="140855" y="31570"/>
+                </a:lnTo>
+                <a:close/>
+                <a:lnTo>
+                  <a:pt x="138545" y="32412"/>
+                </a:lnTo>
+                <a:close/>
+                <a:lnTo>
+                  <a:pt x="136236" y="33257"/>
+                </a:lnTo>
+                <a:close/>
+                <a:lnTo>
+                  <a:pt x="133927" y="34103"/>
+                </a:lnTo>
+                <a:close/>
+                <a:lnTo>
+                  <a:pt x="131618" y="34951"/>
+                </a:lnTo>
+                <a:close/>
+                <a:lnTo>
+                  <a:pt x="129309" y="35801"/>
+                </a:lnTo>
+                <a:close/>
+                <a:lnTo>
+                  <a:pt x="127000" y="36652"/>
+                </a:lnTo>
+                <a:close/>
+                <a:lnTo>
+                  <a:pt x="124691" y="37505"/>
+                </a:lnTo>
+                <a:close/>
+                <a:lnTo>
+                  <a:pt x="122382" y="38359"/>
+                </a:lnTo>
+                <a:close/>
+                <a:lnTo>
+                  <a:pt x="120073" y="39214"/>
+                </a:lnTo>
+                <a:close/>
+                <a:lnTo>
+                  <a:pt x="117764" y="40069"/>
+                </a:lnTo>
+                <a:close/>
+                <a:lnTo>
+                  <a:pt x="115455" y="40926"/>
+                </a:lnTo>
+                <a:close/>
+                <a:lnTo>
+                  <a:pt x="113145" y="41783"/>
+                </a:lnTo>
+                <a:close/>
+                <a:lnTo>
+                  <a:pt x="110836" y="42640"/>
+                </a:lnTo>
+                <a:close/>
+                <a:lnTo>
+                  <a:pt x="108527" y="43498"/>
+                </a:lnTo>
+                <a:close/>
+                <a:lnTo>
+                  <a:pt x="106218" y="44355"/>
+                </a:lnTo>
+                <a:close/>
+                <a:lnTo>
+                  <a:pt x="103909" y="45213"/>
+                </a:lnTo>
+                <a:close/>
+                <a:lnTo>
+                  <a:pt x="101600" y="46070"/>
+                </a:lnTo>
+                <a:close/>
+                <a:lnTo>
+                  <a:pt x="99291" y="46927"/>
+                </a:lnTo>
+                <a:close/>
+                <a:lnTo>
+                  <a:pt x="96982" y="47783"/>
+                </a:lnTo>
+                <a:close/>
+                <a:lnTo>
+                  <a:pt x="94673" y="48639"/>
+                </a:lnTo>
+                <a:close/>
+                <a:lnTo>
+                  <a:pt x="92364" y="49494"/>
+                </a:lnTo>
+                <a:close/>
+                <a:lnTo>
+                  <a:pt x="90055" y="50347"/>
+                </a:lnTo>
+                <a:close/>
+                <a:lnTo>
+                  <a:pt x="87745" y="51200"/>
+                </a:lnTo>
+                <a:close/>
+                <a:lnTo>
+                  <a:pt x="85436" y="52052"/>
+                </a:lnTo>
+                <a:close/>
+                <a:lnTo>
+                  <a:pt x="83127" y="52903"/>
+                </a:lnTo>
+                <a:close/>
+                <a:lnTo>
+                  <a:pt x="80818" y="53754"/>
+                </a:lnTo>
+                <a:close/>
+                <a:lnTo>
+                  <a:pt x="78509" y="54605"/>
+                </a:lnTo>
+                <a:close/>
+                <a:lnTo>
+                  <a:pt x="76200" y="55455"/>
+                </a:lnTo>
+                <a:close/>
+                <a:lnTo>
+                  <a:pt x="73891" y="56306"/>
+                </a:lnTo>
+                <a:close/>
+                <a:lnTo>
+                  <a:pt x="71582" y="57156"/>
+                </a:lnTo>
+                <a:close/>
+                <a:lnTo>
+                  <a:pt x="69273" y="58007"/>
+                </a:lnTo>
+                <a:close/>
+                <a:lnTo>
+                  <a:pt x="66964" y="58859"/>
+                </a:lnTo>
+                <a:close/>
+                <a:lnTo>
+                  <a:pt x="64655" y="59712"/>
+                </a:lnTo>
+                <a:close/>
+                <a:lnTo>
+                  <a:pt x="62345" y="60565"/>
+                </a:lnTo>
+                <a:close/>
+                <a:lnTo>
+                  <a:pt x="60036" y="61419"/>
+                </a:lnTo>
+                <a:close/>
+                <a:lnTo>
+                  <a:pt x="57727" y="62275"/>
+                </a:lnTo>
+                <a:close/>
+                <a:lnTo>
+                  <a:pt x="55418" y="63132"/>
+                </a:lnTo>
+                <a:close/>
+                <a:lnTo>
+                  <a:pt x="53109" y="63991"/>
+                </a:lnTo>
+                <a:close/>
+                <a:lnTo>
+                  <a:pt x="50800" y="64851"/>
+                </a:lnTo>
+                <a:close/>
+                <a:lnTo>
+                  <a:pt x="48491" y="65714"/>
+                </a:lnTo>
+                <a:close/>
+                <a:lnTo>
+                  <a:pt x="46182" y="66578"/>
+                </a:lnTo>
+                <a:close/>
+                <a:lnTo>
+                  <a:pt x="43873" y="67445"/>
+                </a:lnTo>
+                <a:close/>
+                <a:lnTo>
+                  <a:pt x="41564" y="68315"/>
+                </a:lnTo>
+                <a:close/>
+                <a:lnTo>
+                  <a:pt x="39255" y="69187"/>
+                </a:lnTo>
+                <a:close/>
+                <a:lnTo>
+                  <a:pt x="36945" y="70061"/>
+                </a:lnTo>
+                <a:close/>
+                <a:lnTo>
+                  <a:pt x="34636" y="70939"/>
+                </a:lnTo>
+                <a:close/>
+                <a:lnTo>
+                  <a:pt x="32327" y="71820"/>
+                </a:lnTo>
+                <a:close/>
+                <a:lnTo>
+                  <a:pt x="30018" y="72705"/>
+                </a:lnTo>
+                <a:close/>
+                <a:lnTo>
+                  <a:pt x="27709" y="73592"/>
+                </a:lnTo>
+                <a:close/>
+                <a:lnTo>
+                  <a:pt x="25400" y="74484"/>
+                </a:lnTo>
+                <a:close/>
+                <a:lnTo>
+                  <a:pt x="23091" y="75379"/>
+                </a:lnTo>
+                <a:close/>
+                <a:lnTo>
+                  <a:pt x="20782" y="76278"/>
+                </a:lnTo>
+                <a:close/>
+                <a:lnTo>
+                  <a:pt x="18473" y="77182"/>
+                </a:lnTo>
+                <a:close/>
+                <a:lnTo>
+                  <a:pt x="16164" y="78090"/>
+                </a:lnTo>
+                <a:close/>
+                <a:lnTo>
+                  <a:pt x="13855" y="79002"/>
+                </a:lnTo>
+                <a:close/>
+                <a:lnTo>
+                  <a:pt x="11545" y="79920"/>
+                </a:lnTo>
+                <a:close/>
+                <a:lnTo>
+                  <a:pt x="9236" y="80842"/>
+                </a:lnTo>
+                <a:close/>
+                <a:lnTo>
+                  <a:pt x="6927" y="81769"/>
+                </a:lnTo>
+                <a:close/>
+                <a:lnTo>
+                  <a:pt x="4618" y="82701"/>
+                </a:lnTo>
+                <a:close/>
+                <a:lnTo>
+                  <a:pt x="2309" y="83639"/>
+                </a:lnTo>
+                <a:close/>
+                <a:lnTo>
+                  <a:pt x="0" y="84582"/>
                 </a:lnTo>
                 <a:close/>
               </a:path>
@@ -6662,7 +5413,7 @@
           </a:custGeom>
           <a:ln w="19050">
             <a:solidFill>
-              <a:srgbClr val="B4B4B4"/>
+              <a:srgbClr val="FFFFFF"/>
             </a:solidFill>
           </a:ln>
         </p:spPr>
@@ -6690,13 +5441,13 @@
       </p:sp>
       <p:sp>
         <p:nvSpPr>
-          <p:cNvPr id="11" name="TextBox 10"/>
+          <p:cNvPr id="10" name="TextBox 9"/>
           <p:cNvSpPr txBox="1"/>
           <p:nvPr/>
         </p:nvSpPr>
         <p:spPr>
           <a:xfrm>
-            <a:off x="4226560" y="2368550"/>
+            <a:off x="5461000" y="2368550"/>
             <a:ext cx="1524000" cy="508000"/>
           </a:xfrm>
           <a:prstGeom prst="rect">
@@ -6711,115 +5462,7 @@
           <a:lstStyle/>
           <a:p>
             <a:pPr>
-              <a:defRPr sz="1400" b="1">
-                <a:solidFill>
-                  <a:srgbClr val="FFFFFF"/>
-                </a:solidFill>
-                <a:latin typeface="Inter"/>
-              </a:defRPr>
-            </a:pPr>
-            <a:r>
-              <a:t>O</a:t>
-            </a:r>
-          </a:p>
-        </p:txBody>
-      </p:sp>
-      <p:sp>
-        <p:nvSpPr>
-          <p:cNvPr id="12" name="TextBox 11"/>
-          <p:cNvSpPr txBox="1"/>
-          <p:nvPr/>
-        </p:nvSpPr>
-        <p:spPr>
-          <a:xfrm>
-            <a:off x="6329680" y="2368550"/>
-            <a:ext cx="1524000" cy="508000"/>
-          </a:xfrm>
-          <a:prstGeom prst="rect">
-            <a:avLst/>
-          </a:prstGeom>
-          <a:noFill/>
-        </p:spPr>
-        <p:txBody>
-          <a:bodyPr wrap="none">
-            <a:spAutoFit/>
-          </a:bodyPr>
-          <a:lstStyle/>
-          <a:p>
-            <a:pPr>
-              <a:defRPr sz="1400" b="1">
-                <a:solidFill>
-                  <a:srgbClr val="FFFFFF"/>
-                </a:solidFill>
-                <a:latin typeface="Inter"/>
-              </a:defRPr>
-            </a:pPr>
-            <a:r>
-              <a:t>x</a:t>
-            </a:r>
-          </a:p>
-        </p:txBody>
-      </p:sp>
-      <p:sp>
-        <p:nvSpPr>
-          <p:cNvPr id="13" name="TextBox 12"/>
-          <p:cNvSpPr txBox="1"/>
-          <p:nvPr/>
-        </p:nvSpPr>
-        <p:spPr>
-          <a:xfrm>
-            <a:off x="4203700" y="928370"/>
-            <a:ext cx="1524000" cy="508000"/>
-          </a:xfrm>
-          <a:prstGeom prst="rect">
-            <a:avLst/>
-          </a:prstGeom>
-          <a:noFill/>
-        </p:spPr>
-        <p:txBody>
-          <a:bodyPr wrap="none">
-            <a:spAutoFit/>
-          </a:bodyPr>
-          <a:lstStyle/>
-          <a:p>
-            <a:pPr>
-              <a:defRPr sz="1400" b="1">
-                <a:solidFill>
-                  <a:srgbClr val="FFFFFF"/>
-                </a:solidFill>
-                <a:latin typeface="Inter"/>
-              </a:defRPr>
-            </a:pPr>
-            <a:r>
-              <a:t>y</a:t>
-            </a:r>
-          </a:p>
-        </p:txBody>
-      </p:sp>
-      <p:sp>
-        <p:nvSpPr>
-          <p:cNvPr id="14" name="TextBox 13"/>
-          <p:cNvSpPr txBox="1"/>
-          <p:nvPr/>
-        </p:nvSpPr>
-        <p:spPr>
-          <a:xfrm>
-            <a:off x="5461000" y="2414270"/>
-            <a:ext cx="1524000" cy="508000"/>
-          </a:xfrm>
-          <a:prstGeom prst="rect">
-            <a:avLst/>
-          </a:prstGeom>
-          <a:noFill/>
-        </p:spPr>
-        <p:txBody>
-          <a:bodyPr wrap="none">
-            <a:spAutoFit/>
-          </a:bodyPr>
-          <a:lstStyle/>
-          <a:p>
-            <a:pPr>
-              <a:defRPr sz="1400" b="1">
+              <a:defRPr sz="1800" b="1">
                 <a:solidFill>
                   <a:srgbClr val="FFFFFF"/>
                 </a:solidFill>

--- a/output/6.pptx
+++ b/output/6.pptx
@@ -3139,8 +3139,8 @@
         </p:nvCxnSpPr>
         <p:spPr>
           <a:xfrm flipV="1">
-            <a:off x="4572000.0" y="971550.0"/>
-            <a:ext cx="0.0" cy="2057400.0"/>
+            <a:off x="4572000.0" y="514350.0"/>
+            <a:ext cx="0.0" cy="2514600.0"/>
           </a:xfrm>
           <a:prstGeom prst="line">
             <a:avLst/>
@@ -3174,8 +3174,8 @@
         </p:nvSpPr>
         <p:spPr>
           <a:xfrm>
-            <a:off x="4572000" y="1278788"/>
-            <a:ext cx="2286000" cy="1292962"/>
+            <a:off x="4572000" y="1072683"/>
+            <a:ext cx="2286000" cy="1499067"/>
           </a:xfrm>
           <a:custGeom>
             <a:avLst/>
@@ -3184,1200 +3184,2400 @@
             <a:cxnLst/>
             <a:rect l="l" t="t" r="r" b="b"/>
             <a:pathLst>
-              <a:path w="2286000" h="1292962">
+              <a:path w="2286000" h="1499067">
                 <a:moveTo>
-                  <a:pt x="0" y="1292962"/>
+                  <a:pt x="0" y="1499067"/>
                 </a:moveTo>
                 <a:lnTo>
-                  <a:pt x="2510" y="1275121"/>
-                </a:lnTo>
-                <a:close/>
-                <a:lnTo>
-                  <a:pt x="4894" y="1258761"/>
-                </a:lnTo>
-                <a:close/>
-                <a:lnTo>
-                  <a:pt x="7164" y="1243797"/>
-                </a:lnTo>
-                <a:close/>
-                <a:lnTo>
-                  <a:pt x="9332" y="1230143"/>
-                </a:lnTo>
-                <a:close/>
-                <a:lnTo>
-                  <a:pt x="11412" y="1217713"/>
-                </a:lnTo>
-                <a:close/>
-                <a:lnTo>
-                  <a:pt x="13415" y="1206423"/>
-                </a:lnTo>
-                <a:close/>
-                <a:lnTo>
-                  <a:pt x="15354" y="1196186"/>
-                </a:lnTo>
-                <a:close/>
-                <a:lnTo>
-                  <a:pt x="17243" y="1186916"/>
-                </a:lnTo>
-                <a:close/>
-                <a:lnTo>
-                  <a:pt x="19092" y="1178529"/>
-                </a:lnTo>
-                <a:close/>
-                <a:lnTo>
-                  <a:pt x="20916" y="1170938"/>
-                </a:lnTo>
-                <a:close/>
-                <a:lnTo>
-                  <a:pt x="22726" y="1164058"/>
-                </a:lnTo>
-                <a:close/>
-                <a:lnTo>
-                  <a:pt x="24535" y="1157803"/>
-                </a:lnTo>
-                <a:close/>
-                <a:lnTo>
-                  <a:pt x="26356" y="1152088"/>
-                </a:lnTo>
-                <a:close/>
-                <a:lnTo>
-                  <a:pt x="28201" y="1146827"/>
-                </a:lnTo>
-                <a:close/>
-                <a:lnTo>
-                  <a:pt x="30083" y="1141934"/>
-                </a:lnTo>
-                <a:close/>
-                <a:lnTo>
-                  <a:pt x="32014" y="1137324"/>
-                </a:lnTo>
-                <a:close/>
-                <a:lnTo>
-                  <a:pt x="34007" y="1132910"/>
-                </a:lnTo>
-                <a:close/>
-                <a:lnTo>
-                  <a:pt x="36075" y="1128609"/>
-                </a:lnTo>
-                <a:close/>
-                <a:lnTo>
-                  <a:pt x="38229" y="1124333"/>
-                </a:lnTo>
-                <a:close/>
-                <a:lnTo>
-                  <a:pt x="40483" y="1119998"/>
-                </a:lnTo>
-                <a:close/>
-                <a:lnTo>
-                  <a:pt x="42849" y="1115517"/>
-                </a:lnTo>
-                <a:close/>
-                <a:lnTo>
-                  <a:pt x="45340" y="1110805"/>
-                </a:lnTo>
-                <a:close/>
-                <a:lnTo>
-                  <a:pt x="47970" y="1105785"/>
-                </a:lnTo>
-                <a:close/>
-                <a:lnTo>
-                  <a:pt x="50772" y="1100430"/>
-                </a:lnTo>
-                <a:close/>
-                <a:lnTo>
-                  <a:pt x="53784" y="1094734"/>
-                </a:lnTo>
-                <a:close/>
-                <a:lnTo>
-                  <a:pt x="57045" y="1088692"/>
-                </a:lnTo>
-                <a:close/>
-                <a:lnTo>
-                  <a:pt x="60591" y="1082296"/>
-                </a:lnTo>
-                <a:close/>
-                <a:lnTo>
-                  <a:pt x="64461" y="1075541"/>
-                </a:lnTo>
-                <a:close/>
-                <a:lnTo>
-                  <a:pt x="68695" y="1068421"/>
-                </a:lnTo>
-                <a:close/>
-                <a:lnTo>
-                  <a:pt x="73329" y="1060929"/>
-                </a:lnTo>
-                <a:close/>
-                <a:lnTo>
-                  <a:pt x="78402" y="1053059"/>
-                </a:lnTo>
-                <a:close/>
-                <a:lnTo>
-                  <a:pt x="83952" y="1044805"/>
-                </a:lnTo>
-                <a:close/>
-                <a:lnTo>
-                  <a:pt x="90018" y="1036161"/>
-                </a:lnTo>
-                <a:close/>
-                <a:lnTo>
-                  <a:pt x="96630" y="1027127"/>
-                </a:lnTo>
-                <a:close/>
-                <a:lnTo>
-                  <a:pt x="103753" y="1017751"/>
-                </a:lnTo>
-                <a:close/>
-                <a:lnTo>
-                  <a:pt x="111324" y="1008105"/>
-                </a:lnTo>
-                <a:close/>
-                <a:lnTo>
-                  <a:pt x="119278" y="998262"/>
-                </a:lnTo>
-                <a:close/>
-                <a:lnTo>
-                  <a:pt x="127551" y="988292"/>
-                </a:lnTo>
-                <a:close/>
-                <a:lnTo>
-                  <a:pt x="136079" y="978269"/>
-                </a:lnTo>
-                <a:close/>
-                <a:lnTo>
-                  <a:pt x="144797" y="968264"/>
-                </a:lnTo>
-                <a:close/>
-                <a:lnTo>
-                  <a:pt x="153641" y="958348"/>
-                </a:lnTo>
-                <a:close/>
-                <a:lnTo>
-                  <a:pt x="162546" y="948595"/>
-                </a:lnTo>
-                <a:close/>
-                <a:lnTo>
-                  <a:pt x="171449" y="939076"/>
-                </a:lnTo>
-                <a:close/>
-                <a:lnTo>
-                  <a:pt x="180284" y="929863"/>
-                </a:lnTo>
-                <a:close/>
-                <a:lnTo>
-                  <a:pt x="188993" y="921021"/>
-                </a:lnTo>
-                <a:close/>
-                <a:lnTo>
-                  <a:pt x="197564" y="912555"/>
-                </a:lnTo>
-                <a:close/>
-                <a:lnTo>
-                  <a:pt x="206013" y="904431"/>
-                </a:lnTo>
-                <a:close/>
-                <a:lnTo>
-                  <a:pt x="214358" y="896617"/>
-                </a:lnTo>
-                <a:close/>
-                <a:lnTo>
-                  <a:pt x="222617" y="889079"/>
-                </a:lnTo>
-                <a:close/>
-                <a:lnTo>
-                  <a:pt x="230806" y="881784"/>
-                </a:lnTo>
-                <a:close/>
-                <a:lnTo>
-                  <a:pt x="238943" y="874698"/>
-                </a:lnTo>
-                <a:close/>
-                <a:lnTo>
-                  <a:pt x="247044" y="867789"/>
-                </a:lnTo>
-                <a:close/>
-                <a:lnTo>
-                  <a:pt x="255128" y="861023"/>
-                </a:lnTo>
-                <a:close/>
-                <a:lnTo>
-                  <a:pt x="263212" y="854367"/>
-                </a:lnTo>
-                <a:close/>
-                <a:lnTo>
-                  <a:pt x="271312" y="847787"/>
-                </a:lnTo>
-                <a:close/>
-                <a:lnTo>
-                  <a:pt x="279446" y="841253"/>
-                </a:lnTo>
-                <a:close/>
-                <a:lnTo>
-                  <a:pt x="287616" y="834752"/>
-                </a:lnTo>
-                <a:close/>
-                <a:lnTo>
-                  <a:pt x="295819" y="828290"/>
-                </a:lnTo>
-                <a:close/>
-                <a:lnTo>
-                  <a:pt x="304051" y="821871"/>
-                </a:lnTo>
-                <a:close/>
-                <a:lnTo>
-                  <a:pt x="312306" y="815499"/>
-                </a:lnTo>
-                <a:close/>
-                <a:lnTo>
-                  <a:pt x="320580" y="809179"/>
-                </a:lnTo>
-                <a:close/>
-                <a:lnTo>
-                  <a:pt x="328869" y="802915"/>
-                </a:lnTo>
-                <a:close/>
-                <a:lnTo>
-                  <a:pt x="337167" y="796711"/>
-                </a:lnTo>
-                <a:close/>
-                <a:lnTo>
-                  <a:pt x="345470" y="790573"/>
-                </a:lnTo>
-                <a:close/>
-                <a:lnTo>
-                  <a:pt x="353774" y="784504"/>
-                </a:lnTo>
-                <a:close/>
-                <a:lnTo>
-                  <a:pt x="362074" y="778508"/>
-                </a:lnTo>
-                <a:close/>
-                <a:lnTo>
-                  <a:pt x="370365" y="772591"/>
-                </a:lnTo>
-                <a:close/>
-                <a:lnTo>
-                  <a:pt x="378646" y="766753"/>
-                </a:lnTo>
-                <a:close/>
-                <a:lnTo>
-                  <a:pt x="386918" y="760991"/>
-                </a:lnTo>
-                <a:close/>
-                <a:lnTo>
-                  <a:pt x="395182" y="755302"/>
-                </a:lnTo>
-                <a:close/>
-                <a:lnTo>
-                  <a:pt x="403441" y="749684"/>
-                </a:lnTo>
-                <a:close/>
-                <a:lnTo>
-                  <a:pt x="411693" y="744133"/>
-                </a:lnTo>
-                <a:close/>
-                <a:lnTo>
-                  <a:pt x="419942" y="738648"/>
-                </a:lnTo>
-                <a:close/>
-                <a:lnTo>
-                  <a:pt x="428189" y="733226"/>
-                </a:lnTo>
-                <a:close/>
-                <a:lnTo>
-                  <a:pt x="436434" y="727863"/>
-                </a:lnTo>
-                <a:close/>
-                <a:lnTo>
-                  <a:pt x="444678" y="722558"/>
-                </a:lnTo>
-                <a:close/>
-                <a:lnTo>
-                  <a:pt x="452924" y="717306"/>
-                </a:lnTo>
-                <a:close/>
-                <a:lnTo>
-                  <a:pt x="461172" y="712107"/>
-                </a:lnTo>
-                <a:close/>
-                <a:lnTo>
-                  <a:pt x="469422" y="706957"/>
-                </a:lnTo>
-                <a:close/>
-                <a:lnTo>
-                  <a:pt x="477675" y="701855"/>
-                </a:lnTo>
-                <a:close/>
-                <a:lnTo>
-                  <a:pt x="485930" y="696798"/>
-                </a:lnTo>
-                <a:close/>
-                <a:lnTo>
-                  <a:pt x="494187" y="691787"/>
-                </a:lnTo>
-                <a:close/>
-                <a:lnTo>
-                  <a:pt x="502445" y="686818"/>
-                </a:lnTo>
-                <a:close/>
-                <a:lnTo>
-                  <a:pt x="510704" y="681890"/>
-                </a:lnTo>
-                <a:close/>
-                <a:lnTo>
-                  <a:pt x="518964" y="677002"/>
-                </a:lnTo>
-                <a:close/>
-                <a:lnTo>
-                  <a:pt x="527225" y="672151"/>
-                </a:lnTo>
-                <a:close/>
-                <a:lnTo>
-                  <a:pt x="535485" y="667337"/>
-                </a:lnTo>
-                <a:close/>
-                <a:lnTo>
-                  <a:pt x="543745" y="662557"/>
-                </a:lnTo>
-                <a:close/>
-                <a:lnTo>
-                  <a:pt x="552005" y="657810"/>
-                </a:lnTo>
-                <a:close/>
-                <a:lnTo>
-                  <a:pt x="560264" y="653094"/>
-                </a:lnTo>
-                <a:close/>
-                <a:lnTo>
-                  <a:pt x="568522" y="648410"/>
-                </a:lnTo>
-                <a:close/>
-                <a:lnTo>
-                  <a:pt x="576780" y="643755"/>
-                </a:lnTo>
-                <a:close/>
-                <a:lnTo>
-                  <a:pt x="585037" y="639129"/>
-                </a:lnTo>
-                <a:close/>
-                <a:lnTo>
-                  <a:pt x="593294" y="634533"/>
-                </a:lnTo>
-                <a:close/>
-                <a:lnTo>
-                  <a:pt x="601551" y="629964"/>
-                </a:lnTo>
-                <a:close/>
-                <a:lnTo>
-                  <a:pt x="609807" y="625422"/>
-                </a:lnTo>
-                <a:close/>
-                <a:lnTo>
-                  <a:pt x="618063" y="620907"/>
-                </a:lnTo>
-                <a:close/>
-                <a:lnTo>
-                  <a:pt x="626319" y="616418"/>
-                </a:lnTo>
-                <a:close/>
-                <a:lnTo>
-                  <a:pt x="634576" y="611953"/>
-                </a:lnTo>
-                <a:close/>
-                <a:lnTo>
-                  <a:pt x="642832" y="607513"/>
-                </a:lnTo>
-                <a:close/>
-                <a:lnTo>
-                  <a:pt x="651089" y="603097"/>
-                </a:lnTo>
-                <a:close/>
-                <a:lnTo>
-                  <a:pt x="659346" y="598706"/>
-                </a:lnTo>
-                <a:close/>
-                <a:lnTo>
-                  <a:pt x="667603" y="594340"/>
-                </a:lnTo>
-                <a:close/>
-                <a:lnTo>
-                  <a:pt x="675860" y="589999"/>
-                </a:lnTo>
-                <a:close/>
-                <a:lnTo>
-                  <a:pt x="684117" y="585684"/>
-                </a:lnTo>
-                <a:close/>
-                <a:lnTo>
-                  <a:pt x="692374" y="581395"/>
-                </a:lnTo>
-                <a:close/>
-                <a:lnTo>
-                  <a:pt x="700631" y="577134"/>
-                </a:lnTo>
-                <a:close/>
-                <a:lnTo>
-                  <a:pt x="708889" y="572900"/>
-                </a:lnTo>
-                <a:close/>
-                <a:lnTo>
-                  <a:pt x="717146" y="568695"/>
-                </a:lnTo>
-                <a:close/>
-                <a:lnTo>
-                  <a:pt x="725403" y="564517"/>
-                </a:lnTo>
-                <a:close/>
-                <a:lnTo>
-                  <a:pt x="733661" y="560369"/>
-                </a:lnTo>
-                <a:close/>
-                <a:lnTo>
-                  <a:pt x="741918" y="556250"/>
-                </a:lnTo>
-                <a:close/>
-                <a:lnTo>
-                  <a:pt x="750175" y="552159"/>
-                </a:lnTo>
-                <a:close/>
-                <a:lnTo>
-                  <a:pt x="758432" y="548094"/>
-                </a:lnTo>
-                <a:close/>
-                <a:lnTo>
-                  <a:pt x="766690" y="544055"/>
-                </a:lnTo>
-                <a:close/>
-                <a:lnTo>
-                  <a:pt x="774947" y="540039"/>
-                </a:lnTo>
-                <a:close/>
-                <a:lnTo>
-                  <a:pt x="783204" y="536046"/>
-                </a:lnTo>
-                <a:close/>
-                <a:lnTo>
-                  <a:pt x="791461" y="532074"/>
-                </a:lnTo>
-                <a:close/>
-                <a:lnTo>
-                  <a:pt x="799718" y="528122"/>
-                </a:lnTo>
-                <a:close/>
-                <a:lnTo>
-                  <a:pt x="807975" y="524189"/>
-                </a:lnTo>
-                <a:close/>
-                <a:lnTo>
-                  <a:pt x="816232" y="520273"/>
-                </a:lnTo>
-                <a:close/>
-                <a:lnTo>
-                  <a:pt x="824489" y="516373"/>
-                </a:lnTo>
-                <a:close/>
-                <a:lnTo>
-                  <a:pt x="832746" y="512488"/>
-                </a:lnTo>
-                <a:close/>
-                <a:lnTo>
-                  <a:pt x="841003" y="508619"/>
-                </a:lnTo>
-                <a:close/>
-                <a:lnTo>
-                  <a:pt x="849260" y="504766"/>
-                </a:lnTo>
-                <a:close/>
-                <a:lnTo>
-                  <a:pt x="857518" y="500931"/>
-                </a:lnTo>
-                <a:close/>
-                <a:lnTo>
-                  <a:pt x="865775" y="497113"/>
-                </a:lnTo>
-                <a:close/>
-                <a:lnTo>
-                  <a:pt x="874032" y="493314"/>
-                </a:lnTo>
-                <a:close/>
-                <a:lnTo>
-                  <a:pt x="882289" y="489535"/>
-                </a:lnTo>
-                <a:close/>
-                <a:lnTo>
-                  <a:pt x="890546" y="485775"/>
-                </a:lnTo>
-                <a:close/>
-                <a:lnTo>
-                  <a:pt x="898803" y="482036"/>
-                </a:lnTo>
-                <a:close/>
-                <a:lnTo>
-                  <a:pt x="907060" y="478318"/>
-                </a:lnTo>
-                <a:close/>
-                <a:lnTo>
-                  <a:pt x="915317" y="474622"/>
-                </a:lnTo>
-                <a:close/>
-                <a:lnTo>
-                  <a:pt x="923575" y="470948"/>
-                </a:lnTo>
-                <a:close/>
-                <a:lnTo>
-                  <a:pt x="931832" y="467295"/>
-                </a:lnTo>
-                <a:close/>
-                <a:lnTo>
-                  <a:pt x="940089" y="463662"/>
-                </a:lnTo>
-                <a:close/>
-                <a:lnTo>
-                  <a:pt x="948346" y="460047"/>
-                </a:lnTo>
-                <a:close/>
-                <a:lnTo>
-                  <a:pt x="956603" y="456448"/>
-                </a:lnTo>
-                <a:close/>
-                <a:lnTo>
-                  <a:pt x="964860" y="452865"/>
-                </a:lnTo>
-                <a:close/>
-                <a:lnTo>
-                  <a:pt x="973117" y="449295"/>
-                </a:lnTo>
-                <a:close/>
-                <a:lnTo>
-                  <a:pt x="981374" y="445738"/>
-                </a:lnTo>
-                <a:close/>
-                <a:lnTo>
-                  <a:pt x="989632" y="442191"/>
-                </a:lnTo>
-                <a:close/>
-                <a:lnTo>
-                  <a:pt x="997889" y="438654"/>
-                </a:lnTo>
-                <a:close/>
-                <a:lnTo>
-                  <a:pt x="1006146" y="435124"/>
-                </a:lnTo>
-                <a:close/>
-                <a:lnTo>
-                  <a:pt x="1014403" y="431602"/>
-                </a:lnTo>
-                <a:close/>
-                <a:lnTo>
-                  <a:pt x="1022660" y="428087"/>
-                </a:lnTo>
-                <a:close/>
-                <a:lnTo>
-                  <a:pt x="1030917" y="424581"/>
-                </a:lnTo>
-                <a:close/>
-                <a:lnTo>
-                  <a:pt x="1039174" y="421084"/>
-                </a:lnTo>
-                <a:close/>
-                <a:lnTo>
-                  <a:pt x="1047431" y="417599"/>
-                </a:lnTo>
-                <a:close/>
-                <a:lnTo>
-                  <a:pt x="1055689" y="414125"/>
-                </a:lnTo>
-                <a:close/>
-                <a:lnTo>
-                  <a:pt x="1063946" y="410665"/>
-                </a:lnTo>
-                <a:close/>
-                <a:lnTo>
-                  <a:pt x="1072203" y="407218"/>
-                </a:lnTo>
-                <a:close/>
-                <a:lnTo>
-                  <a:pt x="1080460" y="403787"/>
-                </a:lnTo>
-                <a:close/>
-                <a:lnTo>
-                  <a:pt x="1088717" y="400373"/>
-                </a:lnTo>
-                <a:close/>
-                <a:lnTo>
-                  <a:pt x="1096974" y="396975"/>
-                </a:lnTo>
-                <a:close/>
-                <a:lnTo>
-                  <a:pt x="1105231" y="393596"/>
-                </a:lnTo>
-                <a:close/>
-                <a:lnTo>
-                  <a:pt x="1113488" y="390235"/>
-                </a:lnTo>
-                <a:close/>
-                <a:lnTo>
-                  <a:pt x="1121746" y="386891"/>
-                </a:lnTo>
-                <a:close/>
-                <a:lnTo>
-                  <a:pt x="1130003" y="383562"/>
-                </a:lnTo>
-                <a:close/>
-                <a:lnTo>
-                  <a:pt x="1138260" y="380249"/>
-                </a:lnTo>
-                <a:close/>
-                <a:lnTo>
-                  <a:pt x="1146517" y="376949"/>
-                </a:lnTo>
-                <a:close/>
-                <a:lnTo>
-                  <a:pt x="1154774" y="373663"/>
-                </a:lnTo>
-                <a:close/>
-                <a:lnTo>
-                  <a:pt x="1163031" y="370389"/>
-                </a:lnTo>
-                <a:close/>
-                <a:lnTo>
-                  <a:pt x="1171288" y="367127"/>
-                </a:lnTo>
-                <a:close/>
-                <a:lnTo>
-                  <a:pt x="1179545" y="363876"/>
-                </a:lnTo>
-                <a:close/>
-                <a:lnTo>
-                  <a:pt x="1187803" y="360634"/>
-                </a:lnTo>
-                <a:close/>
-                <a:lnTo>
-                  <a:pt x="1196060" y="357401"/>
-                </a:lnTo>
-                <a:close/>
-                <a:lnTo>
-                  <a:pt x="1204317" y="354177"/>
-                </a:lnTo>
-                <a:close/>
-                <a:lnTo>
-                  <a:pt x="1212574" y="350963"/>
-                </a:lnTo>
-                <a:close/>
-                <a:lnTo>
-                  <a:pt x="1220831" y="347758"/>
-                </a:lnTo>
-                <a:close/>
-                <a:lnTo>
-                  <a:pt x="1229088" y="344565"/>
-                </a:lnTo>
-                <a:close/>
-                <a:lnTo>
-                  <a:pt x="1237345" y="341382"/>
-                </a:lnTo>
-                <a:close/>
-                <a:lnTo>
-                  <a:pt x="1245602" y="338210"/>
-                </a:lnTo>
-                <a:close/>
-                <a:lnTo>
-                  <a:pt x="1253860" y="335050"/>
-                </a:lnTo>
-                <a:close/>
-                <a:lnTo>
-                  <a:pt x="1262117" y="331903"/>
-                </a:lnTo>
-                <a:close/>
-                <a:lnTo>
-                  <a:pt x="1270374" y="328768"/>
-                </a:lnTo>
-                <a:close/>
-                <a:lnTo>
-                  <a:pt x="1278631" y="325646"/>
-                </a:lnTo>
-                <a:close/>
-                <a:lnTo>
-                  <a:pt x="1286888" y="322538"/>
-                </a:lnTo>
-                <a:close/>
-                <a:lnTo>
-                  <a:pt x="1295145" y="319443"/>
-                </a:lnTo>
-                <a:close/>
-                <a:lnTo>
-                  <a:pt x="1303402" y="316359"/>
-                </a:lnTo>
-                <a:close/>
-                <a:lnTo>
-                  <a:pt x="1311659" y="313287"/>
-                </a:lnTo>
-                <a:close/>
-                <a:lnTo>
-                  <a:pt x="1319917" y="310225"/>
-                </a:lnTo>
-                <a:close/>
-                <a:lnTo>
-                  <a:pt x="1328174" y="307173"/>
-                </a:lnTo>
-                <a:close/>
-                <a:lnTo>
-                  <a:pt x="1336431" y="304129"/>
-                </a:lnTo>
-                <a:close/>
-                <a:lnTo>
-                  <a:pt x="1344688" y="301092"/>
-                </a:lnTo>
-                <a:close/>
-                <a:lnTo>
-                  <a:pt x="1352945" y="298062"/>
-                </a:lnTo>
-                <a:close/>
-                <a:lnTo>
-                  <a:pt x="1361202" y="295038"/>
-                </a:lnTo>
-                <a:close/>
-                <a:lnTo>
-                  <a:pt x="1369459" y="292019"/>
-                </a:lnTo>
-                <a:close/>
-                <a:lnTo>
-                  <a:pt x="1377716" y="289004"/>
-                </a:lnTo>
-                <a:close/>
-                <a:lnTo>
-                  <a:pt x="1385974" y="285993"/>
-                </a:lnTo>
-                <a:close/>
-                <a:lnTo>
-                  <a:pt x="1394231" y="282988"/>
-                </a:lnTo>
-                <a:close/>
-                <a:lnTo>
-                  <a:pt x="1402488" y="279990"/>
-                </a:lnTo>
-                <a:close/>
-                <a:lnTo>
-                  <a:pt x="1410745" y="277000"/>
-                </a:lnTo>
-                <a:close/>
-                <a:lnTo>
-                  <a:pt x="1419002" y="274019"/>
-                </a:lnTo>
-                <a:close/>
-                <a:lnTo>
-                  <a:pt x="1427259" y="271048"/>
-                </a:lnTo>
-                <a:close/>
-                <a:lnTo>
-                  <a:pt x="1435516" y="268089"/>
-                </a:lnTo>
-                <a:close/>
-                <a:lnTo>
-                  <a:pt x="1443773" y="265141"/>
-                </a:lnTo>
-                <a:close/>
-                <a:lnTo>
-                  <a:pt x="1452031" y="262207"/>
-                </a:lnTo>
-                <a:close/>
-                <a:lnTo>
-                  <a:pt x="1460288" y="259288"/>
-                </a:lnTo>
-                <a:close/>
-                <a:lnTo>
-                  <a:pt x="1468545" y="256384"/>
-                </a:lnTo>
-                <a:close/>
-                <a:lnTo>
-                  <a:pt x="1476802" y="253496"/>
-                </a:lnTo>
-                <a:close/>
-                <a:lnTo>
-                  <a:pt x="1485059" y="250620"/>
-                </a:lnTo>
-                <a:close/>
-                <a:lnTo>
-                  <a:pt x="1493316" y="247757"/>
-                </a:lnTo>
-                <a:close/>
-                <a:lnTo>
-                  <a:pt x="1501573" y="244904"/>
-                </a:lnTo>
-                <a:close/>
-                <a:lnTo>
-                  <a:pt x="1509830" y="242060"/>
-                </a:lnTo>
-                <a:close/>
-                <a:lnTo>
-                  <a:pt x="1518087" y="239224"/>
-                </a:lnTo>
-                <a:close/>
-                <a:lnTo>
-                  <a:pt x="1526345" y="236393"/>
-                </a:lnTo>
-                <a:close/>
-                <a:lnTo>
-                  <a:pt x="1534602" y="233567"/>
-                </a:lnTo>
-                <a:close/>
-                <a:lnTo>
-                  <a:pt x="1542859" y="230744"/>
-                </a:lnTo>
-                <a:close/>
-                <a:lnTo>
-                  <a:pt x="1551116" y="227921"/>
-                </a:lnTo>
-                <a:close/>
-                <a:lnTo>
-                  <a:pt x="1559373" y="225099"/>
-                </a:lnTo>
-                <a:close/>
-                <a:lnTo>
-                  <a:pt x="1567630" y="222276"/>
-                </a:lnTo>
-                <a:close/>
-                <a:lnTo>
-                  <a:pt x="1575887" y="219454"/>
-                </a:lnTo>
-                <a:close/>
-                <a:lnTo>
-                  <a:pt x="1584144" y="216634"/>
-                </a:lnTo>
-                <a:close/>
-                <a:lnTo>
-                  <a:pt x="1592402" y="213816"/>
-                </a:lnTo>
-                <a:close/>
-                <a:lnTo>
-                  <a:pt x="1600659" y="211002"/>
-                </a:lnTo>
-                <a:close/>
-                <a:lnTo>
-                  <a:pt x="1608916" y="208192"/>
-                </a:lnTo>
-                <a:close/>
-                <a:lnTo>
-                  <a:pt x="1617173" y="205388"/>
-                </a:lnTo>
-                <a:close/>
-                <a:lnTo>
-                  <a:pt x="1625430" y="202590"/>
-                </a:lnTo>
-                <a:close/>
-                <a:lnTo>
-                  <a:pt x="1633687" y="199800"/>
-                </a:lnTo>
-                <a:close/>
-                <a:lnTo>
-                  <a:pt x="1641944" y="197018"/>
-                </a:lnTo>
-                <a:close/>
-                <a:lnTo>
-                  <a:pt x="1650201" y="194246"/>
-                </a:lnTo>
-                <a:close/>
-                <a:lnTo>
-                  <a:pt x="1658459" y="191483"/>
-                </a:lnTo>
-                <a:close/>
-                <a:lnTo>
-                  <a:pt x="1666716" y="188729"/>
-                </a:lnTo>
-                <a:close/>
-                <a:lnTo>
-                  <a:pt x="1674973" y="185984"/>
-                </a:lnTo>
-                <a:close/>
-                <a:lnTo>
-                  <a:pt x="1683230" y="183248"/>
-                </a:lnTo>
-                <a:close/>
-                <a:lnTo>
-                  <a:pt x="1691487" y="180521"/>
-                </a:lnTo>
-                <a:close/>
-                <a:lnTo>
-                  <a:pt x="1699744" y="177801"/>
-                </a:lnTo>
-                <a:close/>
-                <a:lnTo>
-                  <a:pt x="1708001" y="175090"/>
-                </a:lnTo>
-                <a:close/>
-                <a:lnTo>
-                  <a:pt x="1716258" y="172386"/>
-                </a:lnTo>
-                <a:close/>
-                <a:lnTo>
-                  <a:pt x="1724516" y="169689"/>
-                </a:lnTo>
-                <a:close/>
-                <a:lnTo>
-                  <a:pt x="1732773" y="166998"/>
-                </a:lnTo>
-                <a:close/>
-                <a:lnTo>
-                  <a:pt x="1741030" y="164315"/>
-                </a:lnTo>
-                <a:close/>
-                <a:lnTo>
-                  <a:pt x="1749287" y="161638"/>
-                </a:lnTo>
-                <a:close/>
-                <a:lnTo>
-                  <a:pt x="1757544" y="158968"/>
-                </a:lnTo>
-                <a:close/>
-                <a:lnTo>
-                  <a:pt x="1765801" y="156304"/>
-                </a:lnTo>
-                <a:close/>
-                <a:lnTo>
-                  <a:pt x="1774058" y="153648"/>
-                </a:lnTo>
-                <a:close/>
-                <a:lnTo>
-                  <a:pt x="1782315" y="151000"/>
-                </a:lnTo>
-                <a:close/>
-                <a:lnTo>
-                  <a:pt x="1790573" y="148360"/>
-                </a:lnTo>
-                <a:close/>
-                <a:lnTo>
-                  <a:pt x="1798830" y="145727"/>
-                </a:lnTo>
-                <a:close/>
-                <a:lnTo>
-                  <a:pt x="1807087" y="143104"/>
-                </a:lnTo>
-                <a:close/>
-                <a:lnTo>
-                  <a:pt x="1815344" y="140488"/>
-                </a:lnTo>
-                <a:close/>
-                <a:lnTo>
-                  <a:pt x="1823601" y="137882"/>
-                </a:lnTo>
-                <a:close/>
-                <a:lnTo>
-                  <a:pt x="1831858" y="135285"/>
-                </a:lnTo>
-                <a:close/>
-                <a:lnTo>
-                  <a:pt x="1840115" y="132697"/>
-                </a:lnTo>
-                <a:close/>
-                <a:lnTo>
-                  <a:pt x="1848372" y="130118"/>
-                </a:lnTo>
-                <a:close/>
-                <a:lnTo>
-                  <a:pt x="1856630" y="127546"/>
-                </a:lnTo>
-                <a:close/>
-                <a:lnTo>
-                  <a:pt x="1864887" y="124981"/>
-                </a:lnTo>
-                <a:close/>
-                <a:lnTo>
-                  <a:pt x="1873144" y="122421"/>
-                </a:lnTo>
-                <a:close/>
-                <a:lnTo>
-                  <a:pt x="1881401" y="119867"/>
-                </a:lnTo>
-                <a:close/>
-                <a:lnTo>
-                  <a:pt x="1889658" y="117318"/>
-                </a:lnTo>
-                <a:close/>
-                <a:lnTo>
-                  <a:pt x="1897915" y="114772"/>
-                </a:lnTo>
-                <a:close/>
-                <a:lnTo>
-                  <a:pt x="1906172" y="112228"/>
-                </a:lnTo>
-                <a:close/>
-                <a:lnTo>
-                  <a:pt x="1914429" y="109687"/>
-                </a:lnTo>
-                <a:close/>
-                <a:lnTo>
-                  <a:pt x="1922687" y="107147"/>
-                </a:lnTo>
-                <a:close/>
-                <a:lnTo>
-                  <a:pt x="1930944" y="104608"/>
-                </a:lnTo>
-                <a:close/>
-                <a:lnTo>
-                  <a:pt x="1939201" y="102071"/>
-                </a:lnTo>
-                <a:close/>
-                <a:lnTo>
-                  <a:pt x="1947458" y="99536"/>
-                </a:lnTo>
-                <a:close/>
-                <a:lnTo>
-                  <a:pt x="1955715" y="97005"/>
-                </a:lnTo>
-                <a:close/>
-                <a:lnTo>
-                  <a:pt x="1963972" y="94479"/>
-                </a:lnTo>
-                <a:close/>
-                <a:lnTo>
-                  <a:pt x="1972229" y="91957"/>
-                </a:lnTo>
-                <a:close/>
-                <a:lnTo>
-                  <a:pt x="1980486" y="89442"/>
-                </a:lnTo>
-                <a:close/>
-                <a:lnTo>
-                  <a:pt x="1988744" y="86934"/>
-                </a:lnTo>
-                <a:close/>
-                <a:lnTo>
-                  <a:pt x="1997001" y="84433"/>
-                </a:lnTo>
-                <a:close/>
-                <a:lnTo>
-                  <a:pt x="2005258" y="81942"/>
-                </a:lnTo>
-                <a:close/>
-                <a:lnTo>
-                  <a:pt x="2013515" y="79460"/>
-                </a:lnTo>
-                <a:close/>
-                <a:lnTo>
-                  <a:pt x="2021772" y="76988"/>
-                </a:lnTo>
-                <a:close/>
-                <a:lnTo>
-                  <a:pt x="2030029" y="74525"/>
-                </a:lnTo>
-                <a:close/>
-                <a:lnTo>
-                  <a:pt x="2038286" y="72071"/>
-                </a:lnTo>
-                <a:close/>
-                <a:lnTo>
-                  <a:pt x="2046543" y="69625"/>
-                </a:lnTo>
-                <a:close/>
-                <a:lnTo>
-                  <a:pt x="2054801" y="67187"/>
-                </a:lnTo>
-                <a:close/>
-                <a:lnTo>
-                  <a:pt x="2063058" y="64756"/>
-                </a:lnTo>
-                <a:close/>
-                <a:lnTo>
-                  <a:pt x="2071315" y="62331"/>
-                </a:lnTo>
-                <a:close/>
-                <a:lnTo>
-                  <a:pt x="2079572" y="59911"/>
-                </a:lnTo>
-                <a:close/>
-                <a:lnTo>
-                  <a:pt x="2087829" y="57497"/>
-                </a:lnTo>
-                <a:close/>
-                <a:lnTo>
-                  <a:pt x="2096086" y="55086"/>
-                </a:lnTo>
-                <a:close/>
-                <a:lnTo>
-                  <a:pt x="2104343" y="52679"/>
-                </a:lnTo>
-                <a:close/>
-                <a:lnTo>
-                  <a:pt x="2112600" y="50275"/>
-                </a:lnTo>
-                <a:close/>
-                <a:lnTo>
-                  <a:pt x="2120858" y="47874"/>
-                </a:lnTo>
-                <a:close/>
-                <a:lnTo>
-                  <a:pt x="2129115" y="45476"/>
-                </a:lnTo>
-                <a:close/>
-                <a:lnTo>
-                  <a:pt x="2137372" y="43079"/>
-                </a:lnTo>
-                <a:close/>
-                <a:lnTo>
-                  <a:pt x="2145629" y="40684"/>
-                </a:lnTo>
-                <a:close/>
-                <a:lnTo>
-                  <a:pt x="2153886" y="38291"/>
-                </a:lnTo>
-                <a:close/>
-                <a:lnTo>
-                  <a:pt x="2162143" y="35900"/>
-                </a:lnTo>
-                <a:close/>
-                <a:lnTo>
-                  <a:pt x="2170400" y="33509"/>
-                </a:lnTo>
-                <a:close/>
-                <a:lnTo>
-                  <a:pt x="2178657" y="31119"/>
-                </a:lnTo>
-                <a:close/>
-                <a:lnTo>
-                  <a:pt x="2186915" y="28730"/>
-                </a:lnTo>
-                <a:close/>
-                <a:lnTo>
-                  <a:pt x="2195172" y="26341"/>
-                </a:lnTo>
-                <a:close/>
-                <a:lnTo>
-                  <a:pt x="2203429" y="23952"/>
-                </a:lnTo>
-                <a:close/>
-                <a:lnTo>
-                  <a:pt x="2211686" y="21563"/>
-                </a:lnTo>
-                <a:close/>
-                <a:lnTo>
-                  <a:pt x="2219943" y="19173"/>
-                </a:lnTo>
-                <a:close/>
-                <a:lnTo>
-                  <a:pt x="2228200" y="16782"/>
-                </a:lnTo>
-                <a:close/>
-                <a:lnTo>
-                  <a:pt x="2236457" y="14390"/>
-                </a:lnTo>
-                <a:close/>
-                <a:lnTo>
-                  <a:pt x="2244714" y="11997"/>
-                </a:lnTo>
-                <a:close/>
-                <a:lnTo>
-                  <a:pt x="2252972" y="9602"/>
-                </a:lnTo>
-                <a:close/>
-                <a:lnTo>
-                  <a:pt x="2261229" y="7205"/>
-                </a:lnTo>
-                <a:close/>
-                <a:lnTo>
-                  <a:pt x="2269486" y="4806"/>
-                </a:lnTo>
-                <a:close/>
-                <a:lnTo>
-                  <a:pt x="2277743" y="2405"/>
+                  <a:pt x="3809" y="1470580"/>
+                </a:lnTo>
+                <a:close/>
+                <a:lnTo>
+                  <a:pt x="7620" y="1444342"/>
+                </a:lnTo>
+                <a:close/>
+                <a:lnTo>
+                  <a:pt x="11432" y="1420232"/>
+                </a:lnTo>
+                <a:close/>
+                <a:lnTo>
+                  <a:pt x="15246" y="1398129"/>
+                </a:lnTo>
+                <a:close/>
+                <a:lnTo>
+                  <a:pt x="19061" y="1377913"/>
+                </a:lnTo>
+                <a:close/>
+                <a:lnTo>
+                  <a:pt x="22877" y="1359462"/>
+                </a:lnTo>
+                <a:close/>
+                <a:lnTo>
+                  <a:pt x="26693" y="1342657"/>
+                </a:lnTo>
+                <a:close/>
+                <a:lnTo>
+                  <a:pt x="30511" y="1327375"/>
+                </a:lnTo>
+                <a:close/>
+                <a:lnTo>
+                  <a:pt x="34329" y="1313496"/>
+                </a:lnTo>
+                <a:close/>
+                <a:lnTo>
+                  <a:pt x="38148" y="1300899"/>
+                </a:lnTo>
+                <a:close/>
+                <a:lnTo>
+                  <a:pt x="41968" y="1289464"/>
+                </a:lnTo>
+                <a:close/>
+                <a:lnTo>
+                  <a:pt x="45788" y="1279069"/>
+                </a:lnTo>
+                <a:close/>
+                <a:lnTo>
+                  <a:pt x="49608" y="1269594"/>
+                </a:lnTo>
+                <a:close/>
+                <a:lnTo>
+                  <a:pt x="53428" y="1260917"/>
+                </a:lnTo>
+                <a:close/>
+                <a:lnTo>
+                  <a:pt x="57248" y="1252919"/>
+                </a:lnTo>
+                <a:close/>
+                <a:lnTo>
+                  <a:pt x="61067" y="1245477"/>
+                </a:lnTo>
+                <a:close/>
+                <a:lnTo>
+                  <a:pt x="64887" y="1238472"/>
+                </a:lnTo>
+                <a:close/>
+                <a:lnTo>
+                  <a:pt x="68706" y="1231782"/>
+                </a:lnTo>
+                <a:close/>
+                <a:lnTo>
+                  <a:pt x="72525" y="1225286"/>
+                </a:lnTo>
+                <a:close/>
+                <a:lnTo>
+                  <a:pt x="76342" y="1218864"/>
+                </a:lnTo>
+                <a:close/>
+                <a:lnTo>
+                  <a:pt x="80160" y="1212420"/>
+                </a:lnTo>
+                <a:close/>
+                <a:lnTo>
+                  <a:pt x="83976" y="1205954"/>
+                </a:lnTo>
+                <a:close/>
+                <a:lnTo>
+                  <a:pt x="87792" y="1199487"/>
+                </a:lnTo>
+                <a:close/>
+                <a:lnTo>
+                  <a:pt x="91607" y="1193038"/>
+                </a:lnTo>
+                <a:close/>
+                <a:lnTo>
+                  <a:pt x="95422" y="1186628"/>
+                </a:lnTo>
+                <a:close/>
+                <a:lnTo>
+                  <a:pt x="99236" y="1180277"/>
+                </a:lnTo>
+                <a:close/>
+                <a:lnTo>
+                  <a:pt x="103050" y="1174006"/>
+                </a:lnTo>
+                <a:close/>
+                <a:lnTo>
+                  <a:pt x="106864" y="1167835"/>
+                </a:lnTo>
+                <a:close/>
+                <a:lnTo>
+                  <a:pt x="110677" y="1161785"/>
+                </a:lnTo>
+                <a:close/>
+                <a:lnTo>
+                  <a:pt x="114491" y="1155875"/>
+                </a:lnTo>
+                <a:close/>
+                <a:lnTo>
+                  <a:pt x="118304" y="1150120"/>
+                </a:lnTo>
+                <a:close/>
+                <a:lnTo>
+                  <a:pt x="122118" y="1144508"/>
+                </a:lnTo>
+                <a:close/>
+                <a:lnTo>
+                  <a:pt x="125931" y="1139022"/>
+                </a:lnTo>
+                <a:close/>
+                <a:lnTo>
+                  <a:pt x="129745" y="1133647"/>
+                </a:lnTo>
+                <a:close/>
+                <a:lnTo>
+                  <a:pt x="133559" y="1128365"/>
+                </a:lnTo>
+                <a:close/>
+                <a:lnTo>
+                  <a:pt x="137374" y="1123162"/>
+                </a:lnTo>
+                <a:close/>
+                <a:lnTo>
+                  <a:pt x="141189" y="1118019"/>
+                </a:lnTo>
+                <a:close/>
+                <a:lnTo>
+                  <a:pt x="145005" y="1112921"/>
+                </a:lnTo>
+                <a:close/>
+                <a:lnTo>
+                  <a:pt x="148822" y="1107852"/>
+                </a:lnTo>
+                <a:close/>
+                <a:lnTo>
+                  <a:pt x="152639" y="1102795"/>
+                </a:lnTo>
+                <a:close/>
+                <a:lnTo>
+                  <a:pt x="156458" y="1097739"/>
+                </a:lnTo>
+                <a:close/>
+                <a:lnTo>
+                  <a:pt x="160277" y="1092694"/>
+                </a:lnTo>
+                <a:close/>
+                <a:lnTo>
+                  <a:pt x="164096" y="1087672"/>
+                </a:lnTo>
+                <a:close/>
+                <a:lnTo>
+                  <a:pt x="167916" y="1082686"/>
+                </a:lnTo>
+                <a:close/>
+                <a:lnTo>
+                  <a:pt x="171736" y="1077750"/>
+                </a:lnTo>
+                <a:close/>
+                <a:lnTo>
+                  <a:pt x="175557" y="1072875"/>
+                </a:lnTo>
+                <a:close/>
+                <a:lnTo>
+                  <a:pt x="179377" y="1068075"/>
+                </a:lnTo>
+                <a:close/>
+                <a:lnTo>
+                  <a:pt x="183196" y="1063363"/>
+                </a:lnTo>
+                <a:close/>
+                <a:lnTo>
+                  <a:pt x="187015" y="1058751"/>
+                </a:lnTo>
+                <a:close/>
+                <a:lnTo>
+                  <a:pt x="190833" y="1054253"/>
+                </a:lnTo>
+                <a:close/>
+                <a:lnTo>
+                  <a:pt x="194651" y="1049875"/>
+                </a:lnTo>
+                <a:close/>
+                <a:lnTo>
+                  <a:pt x="198467" y="1045607"/>
+                </a:lnTo>
+                <a:close/>
+                <a:lnTo>
+                  <a:pt x="202283" y="1041434"/>
+                </a:lnTo>
+                <a:close/>
+                <a:lnTo>
+                  <a:pt x="206098" y="1037344"/>
+                </a:lnTo>
+                <a:close/>
+                <a:lnTo>
+                  <a:pt x="209913" y="1033320"/>
+                </a:lnTo>
+                <a:close/>
+                <a:lnTo>
+                  <a:pt x="213727" y="1029351"/>
+                </a:lnTo>
+                <a:close/>
+                <a:lnTo>
+                  <a:pt x="217541" y="1025420"/>
+                </a:lnTo>
+                <a:close/>
+                <a:lnTo>
+                  <a:pt x="221355" y="1021515"/>
+                </a:lnTo>
+                <a:close/>
+                <a:lnTo>
+                  <a:pt x="225168" y="1017622"/>
+                </a:lnTo>
+                <a:close/>
+                <a:lnTo>
+                  <a:pt x="228981" y="1013725"/>
+                </a:lnTo>
+                <a:close/>
+                <a:lnTo>
+                  <a:pt x="232795" y="1009815"/>
+                </a:lnTo>
+                <a:close/>
+                <a:lnTo>
+                  <a:pt x="236608" y="1005896"/>
+                </a:lnTo>
+                <a:close/>
+                <a:lnTo>
+                  <a:pt x="240422" y="1001973"/>
+                </a:lnTo>
+                <a:close/>
+                <a:lnTo>
+                  <a:pt x="244236" y="998051"/>
+                </a:lnTo>
+                <a:close/>
+                <a:lnTo>
+                  <a:pt x="248050" y="994136"/>
+                </a:lnTo>
+                <a:close/>
+                <a:lnTo>
+                  <a:pt x="251865" y="990234"/>
+                </a:lnTo>
+                <a:close/>
+                <a:lnTo>
+                  <a:pt x="255680" y="986349"/>
+                </a:lnTo>
+                <a:close/>
+                <a:lnTo>
+                  <a:pt x="259496" y="982488"/>
+                </a:lnTo>
+                <a:close/>
+                <a:lnTo>
+                  <a:pt x="263313" y="978656"/>
+                </a:lnTo>
+                <a:close/>
+                <a:lnTo>
+                  <a:pt x="267130" y="974858"/>
+                </a:lnTo>
+                <a:close/>
+                <a:lnTo>
+                  <a:pt x="270949" y="971097"/>
+                </a:lnTo>
+                <a:close/>
+                <a:lnTo>
+                  <a:pt x="274768" y="967374"/>
+                </a:lnTo>
+                <a:close/>
+                <a:lnTo>
+                  <a:pt x="278587" y="963686"/>
+                </a:lnTo>
+                <a:close/>
+                <a:lnTo>
+                  <a:pt x="282407" y="960030"/>
+                </a:lnTo>
+                <a:close/>
+                <a:lnTo>
+                  <a:pt x="286228" y="956405"/>
+                </a:lnTo>
+                <a:close/>
+                <a:lnTo>
+                  <a:pt x="290048" y="952809"/>
+                </a:lnTo>
+                <a:close/>
+                <a:lnTo>
+                  <a:pt x="293868" y="949239"/>
+                </a:lnTo>
+                <a:close/>
+                <a:lnTo>
+                  <a:pt x="297687" y="945694"/>
+                </a:lnTo>
+                <a:close/>
+                <a:lnTo>
+                  <a:pt x="301506" y="942171"/>
+                </a:lnTo>
+                <a:close/>
+                <a:lnTo>
+                  <a:pt x="305324" y="938668"/>
+                </a:lnTo>
+                <a:close/>
+                <a:lnTo>
+                  <a:pt x="309142" y="935184"/>
+                </a:lnTo>
+                <a:close/>
+                <a:lnTo>
+                  <a:pt x="312958" y="931719"/>
+                </a:lnTo>
+                <a:close/>
+                <a:lnTo>
+                  <a:pt x="316774" y="928272"/>
+                </a:lnTo>
+                <a:close/>
+                <a:lnTo>
+                  <a:pt x="320589" y="924844"/>
+                </a:lnTo>
+                <a:close/>
+                <a:lnTo>
+                  <a:pt x="324404" y="921435"/>
+                </a:lnTo>
+                <a:close/>
+                <a:lnTo>
+                  <a:pt x="328218" y="918044"/>
+                </a:lnTo>
+                <a:close/>
+                <a:lnTo>
+                  <a:pt x="332032" y="914672"/>
+                </a:lnTo>
+                <a:close/>
+                <a:lnTo>
+                  <a:pt x="335845" y="911318"/>
+                </a:lnTo>
+                <a:close/>
+                <a:lnTo>
+                  <a:pt x="339659" y="907984"/>
+                </a:lnTo>
+                <a:close/>
+                <a:lnTo>
+                  <a:pt x="343472" y="904668"/>
+                </a:lnTo>
+                <a:close/>
+                <a:lnTo>
+                  <a:pt x="347285" y="901371"/>
+                </a:lnTo>
+                <a:close/>
+                <a:lnTo>
+                  <a:pt x="351099" y="898093"/>
+                </a:lnTo>
+                <a:close/>
+                <a:lnTo>
+                  <a:pt x="354912" y="894833"/>
+                </a:lnTo>
+                <a:close/>
+                <a:lnTo>
+                  <a:pt x="358726" y="891591"/>
+                </a:lnTo>
+                <a:close/>
+                <a:lnTo>
+                  <a:pt x="362541" y="888366"/>
+                </a:lnTo>
+                <a:close/>
+                <a:lnTo>
+                  <a:pt x="366355" y="885159"/>
+                </a:lnTo>
+                <a:close/>
+                <a:lnTo>
+                  <a:pt x="370171" y="881970"/>
+                </a:lnTo>
+                <a:close/>
+                <a:lnTo>
+                  <a:pt x="373987" y="878797"/>
+                </a:lnTo>
+                <a:close/>
+                <a:lnTo>
+                  <a:pt x="377803" y="875641"/>
+                </a:lnTo>
+                <a:close/>
+                <a:lnTo>
+                  <a:pt x="381621" y="872501"/>
+                </a:lnTo>
+                <a:close/>
+                <a:lnTo>
+                  <a:pt x="385440" y="869377"/>
+                </a:lnTo>
+                <a:close/>
+                <a:lnTo>
+                  <a:pt x="389259" y="866269"/>
+                </a:lnTo>
+                <a:close/>
+                <a:lnTo>
+                  <a:pt x="393078" y="863177"/>
+                </a:lnTo>
+                <a:close/>
+                <a:lnTo>
+                  <a:pt x="396898" y="860100"/>
+                </a:lnTo>
+                <a:close/>
+                <a:lnTo>
+                  <a:pt x="400719" y="857037"/>
+                </a:lnTo>
+                <a:close/>
+                <a:lnTo>
+                  <a:pt x="404539" y="853989"/>
+                </a:lnTo>
+                <a:close/>
+                <a:lnTo>
+                  <a:pt x="408359" y="850955"/>
+                </a:lnTo>
+                <a:close/>
+                <a:lnTo>
+                  <a:pt x="412178" y="847935"/>
+                </a:lnTo>
+                <a:close/>
+                <a:lnTo>
+                  <a:pt x="415997" y="844928"/>
+                </a:lnTo>
+                <a:close/>
+                <a:lnTo>
+                  <a:pt x="419815" y="841934"/>
+                </a:lnTo>
+                <a:close/>
+                <a:lnTo>
+                  <a:pt x="423632" y="838953"/>
+                </a:lnTo>
+                <a:close/>
+                <a:lnTo>
+                  <a:pt x="427449" y="835985"/>
+                </a:lnTo>
+                <a:close/>
+                <a:lnTo>
+                  <a:pt x="431265" y="833030"/>
+                </a:lnTo>
+                <a:close/>
+                <a:lnTo>
+                  <a:pt x="435080" y="830087"/>
+                </a:lnTo>
+                <a:close/>
+                <a:lnTo>
+                  <a:pt x="438894" y="827157"/>
+                </a:lnTo>
+                <a:close/>
+                <a:lnTo>
+                  <a:pt x="442709" y="824239"/>
+                </a:lnTo>
+                <a:close/>
+                <a:lnTo>
+                  <a:pt x="446522" y="821334"/>
+                </a:lnTo>
+                <a:close/>
+                <a:lnTo>
+                  <a:pt x="450336" y="818442"/>
+                </a:lnTo>
+                <a:close/>
+                <a:lnTo>
+                  <a:pt x="454149" y="815562"/>
+                </a:lnTo>
+                <a:close/>
+                <a:lnTo>
+                  <a:pt x="457963" y="812694"/>
+                </a:lnTo>
+                <a:close/>
+                <a:lnTo>
+                  <a:pt x="461776" y="809839"/>
+                </a:lnTo>
+                <a:close/>
+                <a:lnTo>
+                  <a:pt x="465589" y="806996"/>
+                </a:lnTo>
+                <a:close/>
+                <a:lnTo>
+                  <a:pt x="469403" y="804166"/>
+                </a:lnTo>
+                <a:close/>
+                <a:lnTo>
+                  <a:pt x="473217" y="801348"/>
+                </a:lnTo>
+                <a:close/>
+                <a:lnTo>
+                  <a:pt x="477031" y="798542"/>
+                </a:lnTo>
+                <a:close/>
+                <a:lnTo>
+                  <a:pt x="480846" y="795748"/>
+                </a:lnTo>
+                <a:close/>
+                <a:lnTo>
+                  <a:pt x="484662" y="792966"/>
+                </a:lnTo>
+                <a:close/>
+                <a:lnTo>
+                  <a:pt x="488478" y="790196"/>
+                </a:lnTo>
+                <a:close/>
+                <a:lnTo>
+                  <a:pt x="492294" y="787438"/>
+                </a:lnTo>
+                <a:close/>
+                <a:lnTo>
+                  <a:pt x="496112" y="784692"/>
+                </a:lnTo>
+                <a:close/>
+                <a:lnTo>
+                  <a:pt x="499930" y="781959"/>
+                </a:lnTo>
+                <a:close/>
+                <a:lnTo>
+                  <a:pt x="503750" y="779237"/>
+                </a:lnTo>
+                <a:close/>
+                <a:lnTo>
+                  <a:pt x="507569" y="776526"/>
+                </a:lnTo>
+                <a:close/>
+                <a:lnTo>
+                  <a:pt x="511389" y="773828"/>
+                </a:lnTo>
+                <a:close/>
+                <a:lnTo>
+                  <a:pt x="515210" y="771141"/>
+                </a:lnTo>
+                <a:close/>
+                <a:lnTo>
+                  <a:pt x="519030" y="768466"/>
+                </a:lnTo>
+                <a:close/>
+                <a:lnTo>
+                  <a:pt x="522850" y="765803"/>
+                </a:lnTo>
+                <a:close/>
+                <a:lnTo>
+                  <a:pt x="526669" y="763151"/>
+                </a:lnTo>
+                <a:close/>
+                <a:lnTo>
+                  <a:pt x="530488" y="760511"/>
+                </a:lnTo>
+                <a:close/>
+                <a:lnTo>
+                  <a:pt x="534306" y="757882"/>
+                </a:lnTo>
+                <a:close/>
+                <a:lnTo>
+                  <a:pt x="538123" y="755265"/>
+                </a:lnTo>
+                <a:close/>
+                <a:lnTo>
+                  <a:pt x="541940" y="752658"/>
+                </a:lnTo>
+                <a:close/>
+                <a:lnTo>
+                  <a:pt x="545755" y="750062"/>
+                </a:lnTo>
+                <a:close/>
+                <a:lnTo>
+                  <a:pt x="549571" y="747477"/>
+                </a:lnTo>
+                <a:close/>
+                <a:lnTo>
+                  <a:pt x="553385" y="744902"/>
+                </a:lnTo>
+                <a:close/>
+                <a:lnTo>
+                  <a:pt x="557199" y="742337"/>
+                </a:lnTo>
+                <a:close/>
+                <a:lnTo>
+                  <a:pt x="561013" y="739781"/>
+                </a:lnTo>
+                <a:close/>
+                <a:lnTo>
+                  <a:pt x="564827" y="737235"/>
+                </a:lnTo>
+                <a:close/>
+                <a:lnTo>
+                  <a:pt x="568640" y="734697"/>
+                </a:lnTo>
+                <a:close/>
+                <a:lnTo>
+                  <a:pt x="572453" y="732168"/>
+                </a:lnTo>
+                <a:close/>
+                <a:lnTo>
+                  <a:pt x="576267" y="729648"/>
+                </a:lnTo>
+                <a:close/>
+                <a:lnTo>
+                  <a:pt x="580080" y="727136"/>
+                </a:lnTo>
+                <a:close/>
+                <a:lnTo>
+                  <a:pt x="583894" y="724632"/>
+                </a:lnTo>
+                <a:close/>
+                <a:lnTo>
+                  <a:pt x="587708" y="722135"/>
+                </a:lnTo>
+                <a:close/>
+                <a:lnTo>
+                  <a:pt x="591522" y="719647"/>
+                </a:lnTo>
+                <a:close/>
+                <a:lnTo>
+                  <a:pt x="595337" y="717167"/>
+                </a:lnTo>
+                <a:close/>
+                <a:lnTo>
+                  <a:pt x="599152" y="714694"/>
+                </a:lnTo>
+                <a:close/>
+                <a:lnTo>
+                  <a:pt x="602968" y="712229"/>
+                </a:lnTo>
+                <a:close/>
+                <a:lnTo>
+                  <a:pt x="606785" y="709771"/>
+                </a:lnTo>
+                <a:close/>
+                <a:lnTo>
+                  <a:pt x="610603" y="707321"/>
+                </a:lnTo>
+                <a:close/>
+                <a:lnTo>
+                  <a:pt x="614421" y="704878"/>
+                </a:lnTo>
+                <a:close/>
+                <a:lnTo>
+                  <a:pt x="618241" y="702443"/>
+                </a:lnTo>
+                <a:close/>
+                <a:lnTo>
+                  <a:pt x="622060" y="700016"/>
+                </a:lnTo>
+                <a:close/>
+                <a:lnTo>
+                  <a:pt x="625880" y="697599"/>
+                </a:lnTo>
+                <a:close/>
+                <a:lnTo>
+                  <a:pt x="629701" y="695190"/>
+                </a:lnTo>
+                <a:close/>
+                <a:lnTo>
+                  <a:pt x="633521" y="692792"/>
+                </a:lnTo>
+                <a:close/>
+                <a:lnTo>
+                  <a:pt x="637341" y="690403"/>
+                </a:lnTo>
+                <a:close/>
+                <a:lnTo>
+                  <a:pt x="641160" y="688026"/>
+                </a:lnTo>
+                <a:close/>
+                <a:lnTo>
+                  <a:pt x="644979" y="685659"/>
+                </a:lnTo>
+                <a:close/>
+                <a:lnTo>
+                  <a:pt x="648797" y="683305"/>
+                </a:lnTo>
+                <a:close/>
+                <a:lnTo>
+                  <a:pt x="652614" y="680962"/>
+                </a:lnTo>
+                <a:close/>
+                <a:lnTo>
+                  <a:pt x="656431" y="678632"/>
+                </a:lnTo>
+                <a:close/>
+                <a:lnTo>
+                  <a:pt x="660246" y="676312"/>
+                </a:lnTo>
+                <a:close/>
+                <a:lnTo>
+                  <a:pt x="664061" y="674002"/>
+                </a:lnTo>
+                <a:close/>
+                <a:lnTo>
+                  <a:pt x="667876" y="671703"/>
+                </a:lnTo>
+                <a:close/>
+                <a:lnTo>
+                  <a:pt x="671690" y="669414"/>
+                </a:lnTo>
+                <a:close/>
+                <a:lnTo>
+                  <a:pt x="675504" y="667134"/>
+                </a:lnTo>
+                <a:close/>
+                <a:lnTo>
+                  <a:pt x="679317" y="664862"/>
+                </a:lnTo>
+                <a:close/>
+                <a:lnTo>
+                  <a:pt x="683131" y="662599"/>
+                </a:lnTo>
+                <a:close/>
+                <a:lnTo>
+                  <a:pt x="686944" y="660344"/>
+                </a:lnTo>
+                <a:close/>
+                <a:lnTo>
+                  <a:pt x="690757" y="658096"/>
+                </a:lnTo>
+                <a:close/>
+                <a:lnTo>
+                  <a:pt x="694571" y="655855"/>
+                </a:lnTo>
+                <a:close/>
+                <a:lnTo>
+                  <a:pt x="698384" y="653622"/>
+                </a:lnTo>
+                <a:close/>
+                <a:lnTo>
+                  <a:pt x="702198" y="651397"/>
+                </a:lnTo>
+                <a:close/>
+                <a:lnTo>
+                  <a:pt x="706013" y="649179"/>
+                </a:lnTo>
+                <a:close/>
+                <a:lnTo>
+                  <a:pt x="709828" y="646968"/>
+                </a:lnTo>
+                <a:close/>
+                <a:lnTo>
+                  <a:pt x="713643" y="644765"/>
+                </a:lnTo>
+                <a:close/>
+                <a:lnTo>
+                  <a:pt x="717459" y="642570"/>
+                </a:lnTo>
+                <a:close/>
+                <a:lnTo>
+                  <a:pt x="721276" y="640382"/>
+                </a:lnTo>
+                <a:close/>
+                <a:lnTo>
+                  <a:pt x="725094" y="638201"/>
+                </a:lnTo>
+                <a:close/>
+                <a:lnTo>
+                  <a:pt x="728912" y="636028"/>
+                </a:lnTo>
+                <a:close/>
+                <a:lnTo>
+                  <a:pt x="732732" y="633862"/>
+                </a:lnTo>
+                <a:close/>
+                <a:lnTo>
+                  <a:pt x="736551" y="631704"/>
+                </a:lnTo>
+                <a:close/>
+                <a:lnTo>
+                  <a:pt x="740371" y="629552"/>
+                </a:lnTo>
+                <a:close/>
+                <a:lnTo>
+                  <a:pt x="744192" y="627408"/>
+                </a:lnTo>
+                <a:close/>
+                <a:lnTo>
+                  <a:pt x="748012" y="625271"/>
+                </a:lnTo>
+                <a:close/>
+                <a:lnTo>
+                  <a:pt x="751832" y="623141"/>
+                </a:lnTo>
+                <a:close/>
+                <a:lnTo>
+                  <a:pt x="755651" y="621018"/>
+                </a:lnTo>
+                <a:close/>
+                <a:lnTo>
+                  <a:pt x="759470" y="618901"/>
+                </a:lnTo>
+                <a:close/>
+                <a:lnTo>
+                  <a:pt x="763288" y="616791"/>
+                </a:lnTo>
+                <a:close/>
+                <a:lnTo>
+                  <a:pt x="767105" y="614688"/>
+                </a:lnTo>
+                <a:close/>
+                <a:lnTo>
+                  <a:pt x="770921" y="612592"/>
+                </a:lnTo>
+                <a:close/>
+                <a:lnTo>
+                  <a:pt x="774737" y="610502"/>
+                </a:lnTo>
+                <a:close/>
+                <a:lnTo>
+                  <a:pt x="778552" y="608420"/>
+                </a:lnTo>
+                <a:close/>
+                <a:lnTo>
+                  <a:pt x="782367" y="606344"/>
+                </a:lnTo>
+                <a:close/>
+                <a:lnTo>
+                  <a:pt x="786181" y="604275"/>
+                </a:lnTo>
+                <a:close/>
+                <a:lnTo>
+                  <a:pt x="789994" y="602213"/>
+                </a:lnTo>
+                <a:close/>
+                <a:lnTo>
+                  <a:pt x="793808" y="600158"/>
+                </a:lnTo>
+                <a:close/>
+                <a:lnTo>
+                  <a:pt x="797621" y="598110"/>
+                </a:lnTo>
+                <a:close/>
+                <a:lnTo>
+                  <a:pt x="801435" y="596069"/>
+                </a:lnTo>
+                <a:close/>
+                <a:lnTo>
+                  <a:pt x="805248" y="594036"/>
+                </a:lnTo>
+                <a:close/>
+                <a:lnTo>
+                  <a:pt x="809061" y="592009"/>
+                </a:lnTo>
+                <a:close/>
+                <a:lnTo>
+                  <a:pt x="812875" y="589990"/>
+                </a:lnTo>
+                <a:close/>
+                <a:lnTo>
+                  <a:pt x="816689" y="587977"/>
+                </a:lnTo>
+                <a:close/>
+                <a:lnTo>
+                  <a:pt x="820504" y="585970"/>
+                </a:lnTo>
+                <a:close/>
+                <a:lnTo>
+                  <a:pt x="824318" y="583971"/>
+                </a:lnTo>
+                <a:close/>
+                <a:lnTo>
+                  <a:pt x="828134" y="581977"/>
+                </a:lnTo>
+                <a:close/>
+                <a:lnTo>
+                  <a:pt x="831950" y="579990"/>
+                </a:lnTo>
+                <a:close/>
+                <a:lnTo>
+                  <a:pt x="835767" y="578009"/>
+                </a:lnTo>
+                <a:close/>
+                <a:lnTo>
+                  <a:pt x="839585" y="576034"/>
+                </a:lnTo>
+                <a:close/>
+                <a:lnTo>
+                  <a:pt x="843403" y="574065"/>
+                </a:lnTo>
+                <a:close/>
+                <a:lnTo>
+                  <a:pt x="847223" y="572101"/>
+                </a:lnTo>
+                <a:close/>
+                <a:lnTo>
+                  <a:pt x="851042" y="570144"/>
+                </a:lnTo>
+                <a:close/>
+                <a:lnTo>
+                  <a:pt x="854862" y="568191"/>
+                </a:lnTo>
+                <a:close/>
+                <a:lnTo>
+                  <a:pt x="858683" y="566245"/>
+                </a:lnTo>
+                <a:close/>
+                <a:lnTo>
+                  <a:pt x="862503" y="564304"/>
+                </a:lnTo>
+                <a:close/>
+                <a:lnTo>
+                  <a:pt x="866323" y="562368"/>
+                </a:lnTo>
+                <a:close/>
+                <a:lnTo>
+                  <a:pt x="870142" y="560437"/>
+                </a:lnTo>
+                <a:close/>
+                <a:lnTo>
+                  <a:pt x="873961" y="558511"/>
+                </a:lnTo>
+                <a:close/>
+                <a:lnTo>
+                  <a:pt x="877779" y="556591"/>
+                </a:lnTo>
+                <a:close/>
+                <a:lnTo>
+                  <a:pt x="881596" y="554675"/>
+                </a:lnTo>
+                <a:close/>
+                <a:lnTo>
+                  <a:pt x="885412" y="552765"/>
+                </a:lnTo>
+                <a:close/>
+                <a:lnTo>
+                  <a:pt x="889228" y="550859"/>
+                </a:lnTo>
+                <a:close/>
+                <a:lnTo>
+                  <a:pt x="893043" y="548958"/>
+                </a:lnTo>
+                <a:close/>
+                <a:lnTo>
+                  <a:pt x="896857" y="547062"/>
+                </a:lnTo>
+                <a:close/>
+                <a:lnTo>
+                  <a:pt x="900671" y="545170"/>
+                </a:lnTo>
+                <a:close/>
+                <a:lnTo>
+                  <a:pt x="904485" y="543283"/>
+                </a:lnTo>
+                <a:close/>
+                <a:lnTo>
+                  <a:pt x="908299" y="541401"/>
+                </a:lnTo>
+                <a:close/>
+                <a:lnTo>
+                  <a:pt x="912112" y="539523"/>
+                </a:lnTo>
+                <a:close/>
+                <a:lnTo>
+                  <a:pt x="915925" y="537650"/>
+                </a:lnTo>
+                <a:close/>
+                <a:lnTo>
+                  <a:pt x="919739" y="535781"/>
+                </a:lnTo>
+                <a:close/>
+                <a:lnTo>
+                  <a:pt x="923552" y="533916"/>
+                </a:lnTo>
+                <a:close/>
+                <a:lnTo>
+                  <a:pt x="927366" y="532056"/>
+                </a:lnTo>
+                <a:close/>
+                <a:lnTo>
+                  <a:pt x="931180" y="530201"/>
+                </a:lnTo>
+                <a:close/>
+                <a:lnTo>
+                  <a:pt x="934994" y="528350"/>
+                </a:lnTo>
+                <a:close/>
+                <a:lnTo>
+                  <a:pt x="938809" y="526504"/>
+                </a:lnTo>
+                <a:close/>
+                <a:lnTo>
+                  <a:pt x="942625" y="524663"/>
+                </a:lnTo>
+                <a:close/>
+                <a:lnTo>
+                  <a:pt x="946441" y="522826"/>
+                </a:lnTo>
+                <a:close/>
+                <a:lnTo>
+                  <a:pt x="950258" y="520994"/>
+                </a:lnTo>
+                <a:close/>
+                <a:lnTo>
+                  <a:pt x="954076" y="519167"/>
+                </a:lnTo>
+                <a:close/>
+                <a:lnTo>
+                  <a:pt x="957894" y="517344"/>
+                </a:lnTo>
+                <a:close/>
+                <a:lnTo>
+                  <a:pt x="961714" y="515526"/>
+                </a:lnTo>
+                <a:close/>
+                <a:lnTo>
+                  <a:pt x="965533" y="513713"/>
+                </a:lnTo>
+                <a:close/>
+                <a:lnTo>
+                  <a:pt x="969353" y="511904"/>
+                </a:lnTo>
+                <a:close/>
+                <a:lnTo>
+                  <a:pt x="973174" y="510100"/>
+                </a:lnTo>
+                <a:close/>
+                <a:lnTo>
+                  <a:pt x="976994" y="508300"/>
+                </a:lnTo>
+                <a:close/>
+                <a:lnTo>
+                  <a:pt x="980813" y="506504"/>
+                </a:lnTo>
+                <a:close/>
+                <a:lnTo>
+                  <a:pt x="984633" y="504713"/>
+                </a:lnTo>
+                <a:close/>
+                <a:lnTo>
+                  <a:pt x="988452" y="502925"/>
+                </a:lnTo>
+                <a:close/>
+                <a:lnTo>
+                  <a:pt x="992270" y="501141"/>
+                </a:lnTo>
+                <a:close/>
+                <a:lnTo>
+                  <a:pt x="996087" y="499362"/>
+                </a:lnTo>
+                <a:close/>
+                <a:lnTo>
+                  <a:pt x="999903" y="497586"/>
+                </a:lnTo>
+                <a:close/>
+                <a:lnTo>
+                  <a:pt x="1003719" y="495814"/>
+                </a:lnTo>
+                <a:close/>
+                <a:lnTo>
+                  <a:pt x="1007534" y="494047"/>
+                </a:lnTo>
+                <a:close/>
+                <a:lnTo>
+                  <a:pt x="1011348" y="492283"/>
+                </a:lnTo>
+                <a:close/>
+                <a:lnTo>
+                  <a:pt x="1015162" y="490524"/>
+                </a:lnTo>
+                <a:close/>
+                <a:lnTo>
+                  <a:pt x="1018976" y="488768"/>
+                </a:lnTo>
+                <a:close/>
+                <a:lnTo>
+                  <a:pt x="1022789" y="487017"/>
+                </a:lnTo>
+                <a:close/>
+                <a:lnTo>
+                  <a:pt x="1026603" y="485271"/>
+                </a:lnTo>
+                <a:close/>
+                <a:lnTo>
+                  <a:pt x="1030416" y="483528"/>
+                </a:lnTo>
+                <a:close/>
+                <a:lnTo>
+                  <a:pt x="1034229" y="481790"/>
+                </a:lnTo>
+                <a:close/>
+                <a:lnTo>
+                  <a:pt x="1038043" y="480055"/>
+                </a:lnTo>
+                <a:close/>
+                <a:lnTo>
+                  <a:pt x="1041857" y="478325"/>
+                </a:lnTo>
+                <a:close/>
+                <a:lnTo>
+                  <a:pt x="1045671" y="476600"/>
+                </a:lnTo>
+                <a:close/>
+                <a:lnTo>
+                  <a:pt x="1049485" y="474878"/>
+                </a:lnTo>
+                <a:close/>
+                <a:lnTo>
+                  <a:pt x="1053300" y="473160"/>
+                </a:lnTo>
+                <a:close/>
+                <a:lnTo>
+                  <a:pt x="1057115" y="471446"/>
+                </a:lnTo>
+                <a:close/>
+                <a:lnTo>
+                  <a:pt x="1060932" y="469736"/>
+                </a:lnTo>
+                <a:close/>
+                <a:lnTo>
+                  <a:pt x="1064749" y="468029"/>
+                </a:lnTo>
+                <a:close/>
+                <a:lnTo>
+                  <a:pt x="1068567" y="466327"/>
+                </a:lnTo>
+                <a:close/>
+                <a:lnTo>
+                  <a:pt x="1072385" y="464628"/>
+                </a:lnTo>
+                <a:close/>
+                <a:lnTo>
+                  <a:pt x="1076205" y="462933"/>
+                </a:lnTo>
+                <a:close/>
+                <a:lnTo>
+                  <a:pt x="1080024" y="461241"/>
+                </a:lnTo>
+                <a:close/>
+                <a:lnTo>
+                  <a:pt x="1083844" y="459553"/>
+                </a:lnTo>
+                <a:close/>
+                <a:lnTo>
+                  <a:pt x="1087665" y="457868"/>
+                </a:lnTo>
+                <a:close/>
+                <a:lnTo>
+                  <a:pt x="1091485" y="456186"/>
+                </a:lnTo>
+                <a:close/>
+                <a:lnTo>
+                  <a:pt x="1095304" y="454507"/>
+                </a:lnTo>
+                <a:close/>
+                <a:lnTo>
+                  <a:pt x="1099124" y="452832"/>
+                </a:lnTo>
+                <a:close/>
+                <a:lnTo>
+                  <a:pt x="1102943" y="451159"/>
+                </a:lnTo>
+                <a:close/>
+                <a:lnTo>
+                  <a:pt x="1106760" y="449489"/>
+                </a:lnTo>
+                <a:close/>
+                <a:lnTo>
+                  <a:pt x="1110577" y="447822"/>
+                </a:lnTo>
+                <a:close/>
+                <a:lnTo>
+                  <a:pt x="1114394" y="446159"/>
+                </a:lnTo>
+                <a:close/>
+                <a:lnTo>
+                  <a:pt x="1118209" y="444498"/>
+                </a:lnTo>
+                <a:close/>
+                <a:lnTo>
+                  <a:pt x="1122024" y="442841"/>
+                </a:lnTo>
+                <a:close/>
+                <a:lnTo>
+                  <a:pt x="1125839" y="441187"/>
+                </a:lnTo>
+                <a:close/>
+                <a:lnTo>
+                  <a:pt x="1129653" y="439537"/>
+                </a:lnTo>
+                <a:close/>
+                <a:lnTo>
+                  <a:pt x="1133466" y="437890"/>
+                </a:lnTo>
+                <a:close/>
+                <a:lnTo>
+                  <a:pt x="1137280" y="436248"/>
+                </a:lnTo>
+                <a:close/>
+                <a:lnTo>
+                  <a:pt x="1141093" y="434609"/>
+                </a:lnTo>
+                <a:close/>
+                <a:lnTo>
+                  <a:pt x="1144907" y="432974"/>
+                </a:lnTo>
+                <a:close/>
+                <a:lnTo>
+                  <a:pt x="1148720" y="431344"/>
+                </a:lnTo>
+                <a:close/>
+                <a:lnTo>
+                  <a:pt x="1152534" y="429716"/>
+                </a:lnTo>
+                <a:close/>
+                <a:lnTo>
+                  <a:pt x="1156347" y="428092"/>
+                </a:lnTo>
+                <a:close/>
+                <a:lnTo>
+                  <a:pt x="1160161" y="426471"/>
+                </a:lnTo>
+                <a:close/>
+                <a:lnTo>
+                  <a:pt x="1163976" y="424851"/>
+                </a:lnTo>
+                <a:close/>
+                <a:lnTo>
+                  <a:pt x="1167791" y="423234"/>
+                </a:lnTo>
+                <a:close/>
+                <a:lnTo>
+                  <a:pt x="1171606" y="421617"/>
+                </a:lnTo>
+                <a:close/>
+                <a:lnTo>
+                  <a:pt x="1175423" y="420002"/>
+                </a:lnTo>
+                <a:close/>
+                <a:lnTo>
+                  <a:pt x="1179240" y="418387"/>
+                </a:lnTo>
+                <a:close/>
+                <a:lnTo>
+                  <a:pt x="1183057" y="416772"/>
+                </a:lnTo>
+                <a:close/>
+                <a:lnTo>
+                  <a:pt x="1186876" y="415157"/>
+                </a:lnTo>
+                <a:close/>
+                <a:lnTo>
+                  <a:pt x="1190696" y="413545"/>
+                </a:lnTo>
+                <a:close/>
+                <a:lnTo>
+                  <a:pt x="1194515" y="411936"/>
+                </a:lnTo>
+                <a:close/>
+                <a:lnTo>
+                  <a:pt x="1198335" y="410333"/>
+                </a:lnTo>
+                <a:close/>
+                <a:lnTo>
+                  <a:pt x="1202156" y="408737"/>
+                </a:lnTo>
+                <a:close/>
+                <a:lnTo>
+                  <a:pt x="1205976" y="407150"/>
+                </a:lnTo>
+                <a:close/>
+                <a:lnTo>
+                  <a:pt x="1209795" y="405574"/>
+                </a:lnTo>
+                <a:close/>
+                <a:lnTo>
+                  <a:pt x="1213615" y="404010"/>
+                </a:lnTo>
+                <a:close/>
+                <a:lnTo>
+                  <a:pt x="1217433" y="402460"/>
+                </a:lnTo>
+                <a:close/>
+                <a:lnTo>
+                  <a:pt x="1221251" y="400925"/>
+                </a:lnTo>
+                <a:close/>
+                <a:lnTo>
+                  <a:pt x="1225068" y="399402"/>
+                </a:lnTo>
+                <a:close/>
+                <a:lnTo>
+                  <a:pt x="1228885" y="397887"/>
+                </a:lnTo>
+                <a:close/>
+                <a:lnTo>
+                  <a:pt x="1232700" y="396372"/>
+                </a:lnTo>
+                <a:close/>
+                <a:lnTo>
+                  <a:pt x="1236515" y="394852"/>
+                </a:lnTo>
+                <a:close/>
+                <a:lnTo>
+                  <a:pt x="1240329" y="393319"/>
+                </a:lnTo>
+                <a:close/>
+                <a:lnTo>
+                  <a:pt x="1244143" y="391769"/>
+                </a:lnTo>
+                <a:close/>
+                <a:lnTo>
+                  <a:pt x="1247957" y="390195"/>
+                </a:lnTo>
+                <a:close/>
+                <a:lnTo>
+                  <a:pt x="1251771" y="388590"/>
+                </a:lnTo>
+                <a:close/>
+                <a:lnTo>
+                  <a:pt x="1255584" y="386949"/>
+                </a:lnTo>
+                <a:close/>
+                <a:lnTo>
+                  <a:pt x="1259397" y="385265"/>
+                </a:lnTo>
+                <a:close/>
+                <a:lnTo>
+                  <a:pt x="1263211" y="383550"/>
+                </a:lnTo>
+                <a:close/>
+                <a:lnTo>
+                  <a:pt x="1267024" y="381824"/>
+                </a:lnTo>
+                <a:close/>
+                <a:lnTo>
+                  <a:pt x="1270838" y="380110"/>
+                </a:lnTo>
+                <a:close/>
+                <a:lnTo>
+                  <a:pt x="1274652" y="378433"/>
+                </a:lnTo>
+                <a:close/>
+                <a:lnTo>
+                  <a:pt x="1278466" y="376813"/>
+                </a:lnTo>
+                <a:close/>
+                <a:lnTo>
+                  <a:pt x="1282281" y="375275"/>
+                </a:lnTo>
+                <a:close/>
+                <a:lnTo>
+                  <a:pt x="1286097" y="373841"/>
+                </a:lnTo>
+                <a:close/>
+                <a:lnTo>
+                  <a:pt x="1289913" y="372533"/>
+                </a:lnTo>
+                <a:close/>
+                <a:lnTo>
+                  <a:pt x="1293730" y="371375"/>
+                </a:lnTo>
+                <a:close/>
+                <a:lnTo>
+                  <a:pt x="1297548" y="370387"/>
+                </a:lnTo>
+                <a:close/>
+                <a:lnTo>
+                  <a:pt x="1301367" y="369532"/>
+                </a:lnTo>
+                <a:close/>
+                <a:lnTo>
+                  <a:pt x="1305187" y="368727"/>
+                </a:lnTo>
+                <a:close/>
+                <a:lnTo>
+                  <a:pt x="1309006" y="367888"/>
+                </a:lnTo>
+                <a:close/>
+                <a:lnTo>
+                  <a:pt x="1312826" y="366930"/>
+                </a:lnTo>
+                <a:close/>
+                <a:lnTo>
+                  <a:pt x="1316647" y="365770"/>
+                </a:lnTo>
+                <a:close/>
+                <a:lnTo>
+                  <a:pt x="1320467" y="364324"/>
+                </a:lnTo>
+                <a:close/>
+                <a:lnTo>
+                  <a:pt x="1324286" y="362506"/>
+                </a:lnTo>
+                <a:close/>
+                <a:lnTo>
+                  <a:pt x="1328106" y="360232"/>
+                </a:lnTo>
+                <a:close/>
+                <a:lnTo>
+                  <a:pt x="1331924" y="357419"/>
+                </a:lnTo>
+                <a:close/>
+                <a:lnTo>
+                  <a:pt x="1335742" y="353988"/>
+                </a:lnTo>
+                <a:close/>
+                <a:lnTo>
+                  <a:pt x="1339559" y="349978"/>
+                </a:lnTo>
+                <a:close/>
+                <a:lnTo>
+                  <a:pt x="1343375" y="345515"/>
+                </a:lnTo>
+                <a:close/>
+                <a:lnTo>
+                  <a:pt x="1347191" y="340732"/>
+                </a:lnTo>
+                <a:close/>
+                <a:lnTo>
+                  <a:pt x="1351006" y="335759"/>
+                </a:lnTo>
+                <a:close/>
+                <a:lnTo>
+                  <a:pt x="1354820" y="330728"/>
+                </a:lnTo>
+                <a:close/>
+                <a:lnTo>
+                  <a:pt x="1358634" y="325769"/>
+                </a:lnTo>
+                <a:close/>
+                <a:lnTo>
+                  <a:pt x="1362448" y="321014"/>
+                </a:lnTo>
+                <a:close/>
+                <a:lnTo>
+                  <a:pt x="1366261" y="316593"/>
+                </a:lnTo>
+                <a:close/>
+                <a:lnTo>
+                  <a:pt x="1370075" y="312638"/>
+                </a:lnTo>
+                <a:close/>
+                <a:lnTo>
+                  <a:pt x="1373888" y="309272"/>
+                </a:lnTo>
+                <a:close/>
+                <a:lnTo>
+                  <a:pt x="1377701" y="306504"/>
+                </a:lnTo>
+                <a:close/>
+                <a:lnTo>
+                  <a:pt x="1381515" y="304253"/>
+                </a:lnTo>
+                <a:close/>
+                <a:lnTo>
+                  <a:pt x="1385329" y="302438"/>
+                </a:lnTo>
+                <a:close/>
+                <a:lnTo>
+                  <a:pt x="1389143" y="300977"/>
+                </a:lnTo>
+                <a:close/>
+                <a:lnTo>
+                  <a:pt x="1392957" y="299787"/>
+                </a:lnTo>
+                <a:close/>
+                <a:lnTo>
+                  <a:pt x="1396772" y="298787"/>
+                </a:lnTo>
+                <a:close/>
+                <a:lnTo>
+                  <a:pt x="1400588" y="297894"/>
+                </a:lnTo>
+                <a:close/>
+                <a:lnTo>
+                  <a:pt x="1404404" y="297027"/>
+                </a:lnTo>
+                <a:close/>
+                <a:lnTo>
+                  <a:pt x="1408221" y="296103"/>
+                </a:lnTo>
+                <a:close/>
+                <a:lnTo>
+                  <a:pt x="1412039" y="295044"/>
+                </a:lnTo>
+                <a:close/>
+                <a:lnTo>
+                  <a:pt x="1415858" y="293830"/>
+                </a:lnTo>
+                <a:close/>
+                <a:lnTo>
+                  <a:pt x="1419677" y="292481"/>
+                </a:lnTo>
+                <a:close/>
+                <a:lnTo>
+                  <a:pt x="1423497" y="291018"/>
+                </a:lnTo>
+                <a:close/>
+                <a:lnTo>
+                  <a:pt x="1427317" y="289465"/>
+                </a:lnTo>
+                <a:close/>
+                <a:lnTo>
+                  <a:pt x="1431138" y="287842"/>
+                </a:lnTo>
+                <a:close/>
+                <a:lnTo>
+                  <a:pt x="1434958" y="286173"/>
+                </a:lnTo>
+                <a:close/>
+                <a:lnTo>
+                  <a:pt x="1438777" y="284478"/>
+                </a:lnTo>
+                <a:close/>
+                <a:lnTo>
+                  <a:pt x="1442597" y="282779"/>
+                </a:lnTo>
+                <a:close/>
+                <a:lnTo>
+                  <a:pt x="1446415" y="281099"/>
+                </a:lnTo>
+                <a:close/>
+                <a:lnTo>
+                  <a:pt x="1450233" y="279458"/>
+                </a:lnTo>
+                <a:close/>
+                <a:lnTo>
+                  <a:pt x="1454050" y="277862"/>
+                </a:lnTo>
+                <a:close/>
+                <a:lnTo>
+                  <a:pt x="1457866" y="276304"/>
+                </a:lnTo>
+                <a:close/>
+                <a:lnTo>
+                  <a:pt x="1461682" y="274780"/>
+                </a:lnTo>
+                <a:close/>
+                <a:lnTo>
+                  <a:pt x="1465496" y="273283"/>
+                </a:lnTo>
+                <a:close/>
+                <a:lnTo>
+                  <a:pt x="1469311" y="271807"/>
+                </a:lnTo>
+                <a:close/>
+                <a:lnTo>
+                  <a:pt x="1473125" y="270347"/>
+                </a:lnTo>
+                <a:close/>
+                <a:lnTo>
+                  <a:pt x="1476939" y="268897"/>
+                </a:lnTo>
+                <a:close/>
+                <a:lnTo>
+                  <a:pt x="1480752" y="267451"/>
+                </a:lnTo>
+                <a:close/>
+                <a:lnTo>
+                  <a:pt x="1484565" y="266004"/>
+                </a:lnTo>
+                <a:close/>
+                <a:lnTo>
+                  <a:pt x="1488379" y="264549"/>
+                </a:lnTo>
+                <a:close/>
+                <a:lnTo>
+                  <a:pt x="1492192" y="263086"/>
+                </a:lnTo>
+                <a:close/>
+                <a:lnTo>
+                  <a:pt x="1496006" y="261616"/>
+                </a:lnTo>
+                <a:close/>
+                <a:lnTo>
+                  <a:pt x="1499819" y="260141"/>
+                </a:lnTo>
+                <a:close/>
+                <a:lnTo>
+                  <a:pt x="1503633" y="258661"/>
+                </a:lnTo>
+                <a:close/>
+                <a:lnTo>
+                  <a:pt x="1507448" y="257180"/>
+                </a:lnTo>
+                <a:close/>
+                <a:lnTo>
+                  <a:pt x="1511263" y="255698"/>
+                </a:lnTo>
+                <a:close/>
+                <a:lnTo>
+                  <a:pt x="1515079" y="254217"/>
+                </a:lnTo>
+                <a:close/>
+                <a:lnTo>
+                  <a:pt x="1518895" y="252739"/>
+                </a:lnTo>
+                <a:close/>
+                <a:lnTo>
+                  <a:pt x="1522712" y="251264"/>
+                </a:lnTo>
+                <a:close/>
+                <a:lnTo>
+                  <a:pt x="1526530" y="249795"/>
+                </a:lnTo>
+                <a:close/>
+                <a:lnTo>
+                  <a:pt x="1530349" y="248332"/>
+                </a:lnTo>
+                <a:close/>
+                <a:lnTo>
+                  <a:pt x="1534168" y="246875"/>
+                </a:lnTo>
+                <a:close/>
+                <a:lnTo>
+                  <a:pt x="1537988" y="245422"/>
+                </a:lnTo>
+                <a:close/>
+                <a:lnTo>
+                  <a:pt x="1541808" y="243974"/>
+                </a:lnTo>
+                <a:close/>
+                <a:lnTo>
+                  <a:pt x="1545629" y="242529"/>
+                </a:lnTo>
+                <a:close/>
+                <a:lnTo>
+                  <a:pt x="1549449" y="241088"/>
+                </a:lnTo>
+                <a:close/>
+                <a:lnTo>
+                  <a:pt x="1553268" y="239650"/>
+                </a:lnTo>
+                <a:close/>
+                <a:lnTo>
+                  <a:pt x="1557088" y="238214"/>
+                </a:lnTo>
+                <a:close/>
+                <a:lnTo>
+                  <a:pt x="1560906" y="236780"/>
+                </a:lnTo>
+                <a:close/>
+                <a:lnTo>
+                  <a:pt x="1564724" y="235348"/>
+                </a:lnTo>
+                <a:close/>
+                <a:lnTo>
+                  <a:pt x="1568541" y="233916"/>
+                </a:lnTo>
+                <a:close/>
+                <a:lnTo>
+                  <a:pt x="1572357" y="232487"/>
+                </a:lnTo>
+                <a:close/>
+                <a:lnTo>
+                  <a:pt x="1576172" y="231059"/>
+                </a:lnTo>
+                <a:close/>
+                <a:lnTo>
+                  <a:pt x="1579987" y="229632"/>
+                </a:lnTo>
+                <a:close/>
+                <a:lnTo>
+                  <a:pt x="1583802" y="228208"/>
+                </a:lnTo>
+                <a:close/>
+                <a:lnTo>
+                  <a:pt x="1587616" y="226786"/>
+                </a:lnTo>
+                <a:close/>
+                <a:lnTo>
+                  <a:pt x="1591429" y="225365"/>
+                </a:lnTo>
+                <a:close/>
+                <a:lnTo>
+                  <a:pt x="1595243" y="223947"/>
+                </a:lnTo>
+                <a:close/>
+                <a:lnTo>
+                  <a:pt x="1599056" y="222532"/>
+                </a:lnTo>
+                <a:close/>
+                <a:lnTo>
+                  <a:pt x="1602869" y="221119"/>
+                </a:lnTo>
+                <a:close/>
+                <a:lnTo>
+                  <a:pt x="1606683" y="219708"/>
+                </a:lnTo>
+                <a:close/>
+                <a:lnTo>
+                  <a:pt x="1610496" y="218300"/>
+                </a:lnTo>
+                <a:close/>
+                <a:lnTo>
+                  <a:pt x="1614310" y="216895"/>
+                </a:lnTo>
+                <a:close/>
+                <a:lnTo>
+                  <a:pt x="1618124" y="215491"/>
+                </a:lnTo>
+                <a:close/>
+                <a:lnTo>
+                  <a:pt x="1621939" y="214091"/>
+                </a:lnTo>
+                <a:close/>
+                <a:lnTo>
+                  <a:pt x="1625754" y="212692"/>
+                </a:lnTo>
+                <a:close/>
+                <a:lnTo>
+                  <a:pt x="1629569" y="211296"/>
+                </a:lnTo>
+                <a:close/>
+                <a:lnTo>
+                  <a:pt x="1633386" y="209903"/>
+                </a:lnTo>
+                <a:close/>
+                <a:lnTo>
+                  <a:pt x="1637203" y="208511"/>
+                </a:lnTo>
+                <a:close/>
+                <a:lnTo>
+                  <a:pt x="1641021" y="207122"/>
+                </a:lnTo>
+                <a:close/>
+                <a:lnTo>
+                  <a:pt x="1644840" y="205734"/>
+                </a:lnTo>
+                <a:close/>
+                <a:lnTo>
+                  <a:pt x="1648659" y="204349"/>
+                </a:lnTo>
+                <a:close/>
+                <a:lnTo>
+                  <a:pt x="1652479" y="202967"/>
+                </a:lnTo>
+                <a:close/>
+                <a:lnTo>
+                  <a:pt x="1656299" y="201586"/>
+                </a:lnTo>
+                <a:close/>
+                <a:lnTo>
+                  <a:pt x="1660120" y="200208"/>
+                </a:lnTo>
+                <a:close/>
+                <a:lnTo>
+                  <a:pt x="1663940" y="198832"/>
+                </a:lnTo>
+                <a:close/>
+                <a:lnTo>
+                  <a:pt x="1667759" y="197459"/>
+                </a:lnTo>
+                <a:close/>
+                <a:lnTo>
+                  <a:pt x="1671579" y="196088"/>
+                </a:lnTo>
+                <a:close/>
+                <a:lnTo>
+                  <a:pt x="1675397" y="194720"/>
+                </a:lnTo>
+                <a:close/>
+                <a:lnTo>
+                  <a:pt x="1679215" y="193354"/>
+                </a:lnTo>
+                <a:close/>
+                <a:lnTo>
+                  <a:pt x="1683032" y="191991"/>
+                </a:lnTo>
+                <a:close/>
+                <a:lnTo>
+                  <a:pt x="1686848" y="190630"/>
+                </a:lnTo>
+                <a:close/>
+                <a:lnTo>
+                  <a:pt x="1690663" y="189271"/>
+                </a:lnTo>
+                <a:close/>
+                <a:lnTo>
+                  <a:pt x="1694478" y="187914"/>
+                </a:lnTo>
+                <a:close/>
+                <a:lnTo>
+                  <a:pt x="1698292" y="186559"/>
+                </a:lnTo>
+                <a:close/>
+                <a:lnTo>
+                  <a:pt x="1702106" y="185207"/>
+                </a:lnTo>
+                <a:close/>
+                <a:lnTo>
+                  <a:pt x="1705920" y="183856"/>
+                </a:lnTo>
+                <a:close/>
+                <a:lnTo>
+                  <a:pt x="1709733" y="182507"/>
+                </a:lnTo>
+                <a:close/>
+                <a:lnTo>
+                  <a:pt x="1713547" y="181159"/>
+                </a:lnTo>
+                <a:close/>
+                <a:lnTo>
+                  <a:pt x="1717360" y="179813"/>
+                </a:lnTo>
+                <a:close/>
+                <a:lnTo>
+                  <a:pt x="1721173" y="178468"/>
+                </a:lnTo>
+                <a:close/>
+                <a:lnTo>
+                  <a:pt x="1724987" y="177125"/>
+                </a:lnTo>
+                <a:close/>
+                <a:lnTo>
+                  <a:pt x="1728801" y="175784"/>
+                </a:lnTo>
+                <a:close/>
+                <a:lnTo>
+                  <a:pt x="1732615" y="174445"/>
+                </a:lnTo>
+                <a:close/>
+                <a:lnTo>
+                  <a:pt x="1736429" y="173108"/>
+                </a:lnTo>
+                <a:close/>
+                <a:lnTo>
+                  <a:pt x="1740245" y="171772"/>
+                </a:lnTo>
+                <a:close/>
+                <a:lnTo>
+                  <a:pt x="1744060" y="170440"/>
+                </a:lnTo>
+                <a:close/>
+                <a:lnTo>
+                  <a:pt x="1747877" y="169109"/>
+                </a:lnTo>
+                <a:close/>
+                <a:lnTo>
+                  <a:pt x="1751694" y="167781"/>
+                </a:lnTo>
+                <a:close/>
+                <a:lnTo>
+                  <a:pt x="1755512" y="166456"/>
+                </a:lnTo>
+                <a:close/>
+                <a:lnTo>
+                  <a:pt x="1759331" y="165134"/>
+                </a:lnTo>
+                <a:close/>
+                <a:lnTo>
+                  <a:pt x="1763150" y="163813"/>
+                </a:lnTo>
+                <a:close/>
+                <a:lnTo>
+                  <a:pt x="1766970" y="162496"/>
+                </a:lnTo>
+                <a:close/>
+                <a:lnTo>
+                  <a:pt x="1770790" y="161180"/>
+                </a:lnTo>
+                <a:close/>
+                <a:lnTo>
+                  <a:pt x="1774611" y="159867"/>
+                </a:lnTo>
+                <a:close/>
+                <a:lnTo>
+                  <a:pt x="1778431" y="158556"/>
+                </a:lnTo>
+                <a:close/>
+                <a:lnTo>
+                  <a:pt x="1782250" y="157246"/>
+                </a:lnTo>
+                <a:close/>
+                <a:lnTo>
+                  <a:pt x="1786070" y="155939"/>
+                </a:lnTo>
+                <a:close/>
+                <a:lnTo>
+                  <a:pt x="1789888" y="154633"/>
+                </a:lnTo>
+                <a:close/>
+                <a:lnTo>
+                  <a:pt x="1793706" y="153329"/>
+                </a:lnTo>
+                <a:close/>
+                <a:lnTo>
+                  <a:pt x="1797522" y="152026"/>
+                </a:lnTo>
+                <a:close/>
+                <a:lnTo>
+                  <a:pt x="1801338" y="150726"/>
+                </a:lnTo>
+                <a:close/>
+                <a:lnTo>
+                  <a:pt x="1805154" y="149427"/>
+                </a:lnTo>
+                <a:close/>
+                <a:lnTo>
+                  <a:pt x="1808969" y="148129"/>
+                </a:lnTo>
+                <a:close/>
+                <a:lnTo>
+                  <a:pt x="1812783" y="146834"/>
+                </a:lnTo>
+                <a:close/>
+                <a:lnTo>
+                  <a:pt x="1816597" y="145540"/>
+                </a:lnTo>
+                <a:close/>
+                <a:lnTo>
+                  <a:pt x="1820411" y="144248"/>
+                </a:lnTo>
+                <a:close/>
+                <a:lnTo>
+                  <a:pt x="1824224" y="142957"/>
+                </a:lnTo>
+                <a:close/>
+                <a:lnTo>
+                  <a:pt x="1828037" y="141669"/>
+                </a:lnTo>
+                <a:close/>
+                <a:lnTo>
+                  <a:pt x="1831851" y="140383"/>
+                </a:lnTo>
+                <a:close/>
+                <a:lnTo>
+                  <a:pt x="1835664" y="139098"/>
+                </a:lnTo>
+                <a:close/>
+                <a:lnTo>
+                  <a:pt x="1839478" y="137815"/>
+                </a:lnTo>
+                <a:close/>
+                <a:lnTo>
+                  <a:pt x="1843291" y="136535"/>
+                </a:lnTo>
+                <a:close/>
+                <a:lnTo>
+                  <a:pt x="1847106" y="135256"/>
+                </a:lnTo>
+                <a:close/>
+                <a:lnTo>
+                  <a:pt x="1850920" y="133979"/>
+                </a:lnTo>
+                <a:close/>
+                <a:lnTo>
+                  <a:pt x="1854735" y="132703"/>
+                </a:lnTo>
+                <a:close/>
+                <a:lnTo>
+                  <a:pt x="1858551" y="131430"/>
+                </a:lnTo>
+                <a:close/>
+                <a:lnTo>
+                  <a:pt x="1862368" y="130158"/>
+                </a:lnTo>
+                <a:close/>
+                <a:lnTo>
+                  <a:pt x="1866185" y="128888"/>
+                </a:lnTo>
+                <a:close/>
+                <a:lnTo>
+                  <a:pt x="1870003" y="127620"/>
+                </a:lnTo>
+                <a:close/>
+                <a:lnTo>
+                  <a:pt x="1873822" y="126354"/>
+                </a:lnTo>
+                <a:close/>
+                <a:lnTo>
+                  <a:pt x="1877641" y="125089"/>
+                </a:lnTo>
+                <a:close/>
+                <a:lnTo>
+                  <a:pt x="1881461" y="123827"/>
+                </a:lnTo>
+                <a:close/>
+                <a:lnTo>
+                  <a:pt x="1885281" y="122566"/>
+                </a:lnTo>
+                <a:close/>
+                <a:lnTo>
+                  <a:pt x="1889102" y="121307"/>
+                </a:lnTo>
+                <a:close/>
+                <a:lnTo>
+                  <a:pt x="1892922" y="120050"/>
+                </a:lnTo>
+                <a:close/>
+                <a:lnTo>
+                  <a:pt x="1896741" y="118795"/>
+                </a:lnTo>
+                <a:close/>
+                <a:lnTo>
+                  <a:pt x="1900560" y="117542"/>
+                </a:lnTo>
+                <a:close/>
+                <a:lnTo>
+                  <a:pt x="1904379" y="116291"/>
+                </a:lnTo>
+                <a:close/>
+                <a:lnTo>
+                  <a:pt x="1908197" y="115042"/>
+                </a:lnTo>
+                <a:close/>
+                <a:lnTo>
+                  <a:pt x="1912013" y="113795"/>
+                </a:lnTo>
+                <a:close/>
+                <a:lnTo>
+                  <a:pt x="1915829" y="112550"/>
+                </a:lnTo>
+                <a:close/>
+                <a:lnTo>
+                  <a:pt x="1919645" y="111306"/>
+                </a:lnTo>
+                <a:close/>
+                <a:lnTo>
+                  <a:pt x="1923459" y="110065"/>
+                </a:lnTo>
+                <a:close/>
+                <a:lnTo>
+                  <a:pt x="1927274" y="108824"/>
+                </a:lnTo>
+                <a:close/>
+                <a:lnTo>
+                  <a:pt x="1931088" y="107586"/>
+                </a:lnTo>
+                <a:close/>
+                <a:lnTo>
+                  <a:pt x="1934901" y="106348"/>
+                </a:lnTo>
+                <a:close/>
+                <a:lnTo>
+                  <a:pt x="1938715" y="105112"/>
+                </a:lnTo>
+                <a:close/>
+                <a:lnTo>
+                  <a:pt x="1942528" y="103878"/>
+                </a:lnTo>
+                <a:close/>
+                <a:lnTo>
+                  <a:pt x="1946341" y="102644"/>
+                </a:lnTo>
+                <a:close/>
+                <a:lnTo>
+                  <a:pt x="1950155" y="101412"/>
+                </a:lnTo>
+                <a:close/>
+                <a:lnTo>
+                  <a:pt x="1953968" y="100180"/>
+                </a:lnTo>
+                <a:close/>
+                <a:lnTo>
+                  <a:pt x="1957782" y="98950"/>
+                </a:lnTo>
+                <a:close/>
+                <a:lnTo>
+                  <a:pt x="1961596" y="97722"/>
+                </a:lnTo>
+                <a:close/>
+                <a:lnTo>
+                  <a:pt x="1965411" y="96495"/>
+                </a:lnTo>
+                <a:close/>
+                <a:lnTo>
+                  <a:pt x="1969226" y="95269"/>
+                </a:lnTo>
+                <a:close/>
+                <a:lnTo>
+                  <a:pt x="1973042" y="94045"/>
+                </a:lnTo>
+                <a:close/>
+                <a:lnTo>
+                  <a:pt x="1976858" y="92823"/>
+                </a:lnTo>
+                <a:close/>
+                <a:lnTo>
+                  <a:pt x="1980676" y="91602"/>
+                </a:lnTo>
+                <a:close/>
+                <a:lnTo>
+                  <a:pt x="1984494" y="90384"/>
+                </a:lnTo>
+                <a:close/>
+                <a:lnTo>
+                  <a:pt x="1988313" y="89167"/>
+                </a:lnTo>
+                <a:close/>
+                <a:lnTo>
+                  <a:pt x="1992132" y="87952"/>
+                </a:lnTo>
+                <a:close/>
+                <a:lnTo>
+                  <a:pt x="1995952" y="86739"/>
+                </a:lnTo>
+                <a:close/>
+                <a:lnTo>
+                  <a:pt x="1999772" y="85528"/>
+                </a:lnTo>
+                <a:close/>
+                <a:lnTo>
+                  <a:pt x="2003593" y="84320"/>
+                </a:lnTo>
+                <a:close/>
+                <a:lnTo>
+                  <a:pt x="2007413" y="83114"/>
+                </a:lnTo>
+                <a:close/>
+                <a:lnTo>
+                  <a:pt x="2011232" y="81910"/>
+                </a:lnTo>
+                <a:close/>
+                <a:lnTo>
+                  <a:pt x="2015051" y="80708"/>
+                </a:lnTo>
+                <a:close/>
+                <a:lnTo>
+                  <a:pt x="2018870" y="79509"/>
+                </a:lnTo>
+                <a:close/>
+                <a:lnTo>
+                  <a:pt x="2022687" y="78313"/>
+                </a:lnTo>
+                <a:close/>
+                <a:lnTo>
+                  <a:pt x="2026504" y="77119"/>
+                </a:lnTo>
+                <a:close/>
+                <a:lnTo>
+                  <a:pt x="2030320" y="75927"/>
+                </a:lnTo>
+                <a:close/>
+                <a:lnTo>
+                  <a:pt x="2034135" y="74738"/>
+                </a:lnTo>
+                <a:close/>
+                <a:lnTo>
+                  <a:pt x="2037950" y="73551"/>
+                </a:lnTo>
+                <a:close/>
+                <a:lnTo>
+                  <a:pt x="2041764" y="72366"/>
+                </a:lnTo>
+                <a:close/>
+                <a:lnTo>
+                  <a:pt x="2045578" y="71183"/>
+                </a:lnTo>
+                <a:close/>
+                <a:lnTo>
+                  <a:pt x="2049392" y="70002"/>
+                </a:lnTo>
+                <a:close/>
+                <a:lnTo>
+                  <a:pt x="2053205" y="68823"/>
+                </a:lnTo>
+                <a:close/>
+                <a:lnTo>
+                  <a:pt x="2057019" y="67646"/>
+                </a:lnTo>
+                <a:close/>
+                <a:lnTo>
+                  <a:pt x="2060832" y="66470"/>
+                </a:lnTo>
+                <a:close/>
+                <a:lnTo>
+                  <a:pt x="2064645" y="65296"/>
+                </a:lnTo>
+                <a:close/>
+                <a:lnTo>
+                  <a:pt x="2068459" y="64123"/>
+                </a:lnTo>
+                <a:close/>
+                <a:lnTo>
+                  <a:pt x="2072273" y="62952"/>
+                </a:lnTo>
+                <a:close/>
+                <a:lnTo>
+                  <a:pt x="2076087" y="61783"/>
+                </a:lnTo>
+                <a:close/>
+                <a:lnTo>
+                  <a:pt x="2079902" y="60616"/>
+                </a:lnTo>
+                <a:close/>
+                <a:lnTo>
+                  <a:pt x="2083717" y="59451"/>
+                </a:lnTo>
+                <a:close/>
+                <a:lnTo>
+                  <a:pt x="2087533" y="58287"/>
+                </a:lnTo>
+                <a:close/>
+                <a:lnTo>
+                  <a:pt x="2091349" y="57126"/>
+                </a:lnTo>
+                <a:close/>
+                <a:lnTo>
+                  <a:pt x="2095167" y="55966"/>
+                </a:lnTo>
+                <a:close/>
+                <a:lnTo>
+                  <a:pt x="2098985" y="54809"/>
+                </a:lnTo>
+                <a:close/>
+                <a:lnTo>
+                  <a:pt x="2102804" y="53653"/>
+                </a:lnTo>
+                <a:close/>
+                <a:lnTo>
+                  <a:pt x="2106623" y="52499"/>
+                </a:lnTo>
+                <a:close/>
+                <a:lnTo>
+                  <a:pt x="2110443" y="51347"/>
+                </a:lnTo>
+                <a:close/>
+                <a:lnTo>
+                  <a:pt x="2114264" y="50197"/>
+                </a:lnTo>
+                <a:close/>
+                <a:lnTo>
+                  <a:pt x="2118084" y="49049"/>
+                </a:lnTo>
+                <a:close/>
+                <a:lnTo>
+                  <a:pt x="2121904" y="47902"/>
+                </a:lnTo>
+                <a:close/>
+                <a:lnTo>
+                  <a:pt x="2125723" y="46757"/>
+                </a:lnTo>
+                <a:close/>
+                <a:lnTo>
+                  <a:pt x="2129542" y="45613"/>
+                </a:lnTo>
+                <a:close/>
+                <a:lnTo>
+                  <a:pt x="2133361" y="44470"/>
+                </a:lnTo>
+                <a:close/>
+                <a:lnTo>
+                  <a:pt x="2137178" y="43328"/>
+                </a:lnTo>
+                <a:close/>
+                <a:lnTo>
+                  <a:pt x="2140995" y="42188"/>
+                </a:lnTo>
+                <a:close/>
+                <a:lnTo>
+                  <a:pt x="2144811" y="41049"/>
+                </a:lnTo>
+                <a:close/>
+                <a:lnTo>
+                  <a:pt x="2148626" y="39912"/>
+                </a:lnTo>
+                <a:close/>
+                <a:lnTo>
+                  <a:pt x="2152441" y="38775"/>
+                </a:lnTo>
+                <a:close/>
+                <a:lnTo>
+                  <a:pt x="2156255" y="37640"/>
+                </a:lnTo>
+                <a:close/>
+                <a:lnTo>
+                  <a:pt x="2160069" y="36506"/>
+                </a:lnTo>
+                <a:close/>
+                <a:lnTo>
+                  <a:pt x="2163882" y="35373"/>
+                </a:lnTo>
+                <a:close/>
+                <a:lnTo>
+                  <a:pt x="2167696" y="34242"/>
+                </a:lnTo>
+                <a:close/>
+                <a:lnTo>
+                  <a:pt x="2171509" y="33112"/>
+                </a:lnTo>
+                <a:close/>
+                <a:lnTo>
+                  <a:pt x="2175323" y="31983"/>
+                </a:lnTo>
+                <a:close/>
+                <a:lnTo>
+                  <a:pt x="2179136" y="30855"/>
+                </a:lnTo>
+                <a:close/>
+                <a:lnTo>
+                  <a:pt x="2182950" y="29729"/>
+                </a:lnTo>
+                <a:close/>
+                <a:lnTo>
+                  <a:pt x="2186764" y="28604"/>
+                </a:lnTo>
+                <a:close/>
+                <a:lnTo>
+                  <a:pt x="2190578" y="27481"/>
+                </a:lnTo>
+                <a:close/>
+                <a:lnTo>
+                  <a:pt x="2194393" y="26360"/>
+                </a:lnTo>
+                <a:close/>
+                <a:lnTo>
+                  <a:pt x="2198208" y="25240"/>
+                </a:lnTo>
+                <a:close/>
+                <a:lnTo>
+                  <a:pt x="2202024" y="24122"/>
+                </a:lnTo>
+                <a:close/>
+                <a:lnTo>
+                  <a:pt x="2205840" y="23005"/>
+                </a:lnTo>
+                <a:close/>
+                <a:lnTo>
+                  <a:pt x="2209658" y="21891"/>
+                </a:lnTo>
+                <a:close/>
+                <a:lnTo>
+                  <a:pt x="2213475" y="20779"/>
+                </a:lnTo>
+                <a:close/>
+                <a:lnTo>
+                  <a:pt x="2217294" y="19668"/>
+                </a:lnTo>
+                <a:close/>
+                <a:lnTo>
+                  <a:pt x="2221113" y="18560"/>
+                </a:lnTo>
+                <a:close/>
+                <a:lnTo>
+                  <a:pt x="2224933" y="17453"/>
+                </a:lnTo>
+                <a:close/>
+                <a:lnTo>
+                  <a:pt x="2228752" y="16348"/>
+                </a:lnTo>
+                <a:close/>
+                <a:lnTo>
+                  <a:pt x="2232572" y="15246"/>
+                </a:lnTo>
+                <a:close/>
+                <a:lnTo>
+                  <a:pt x="2236392" y="14145"/>
+                </a:lnTo>
+                <a:close/>
+                <a:lnTo>
+                  <a:pt x="2240212" y="13046"/>
+                </a:lnTo>
+                <a:close/>
+                <a:lnTo>
+                  <a:pt x="2244032" y="11949"/>
+                </a:lnTo>
+                <a:close/>
+                <a:lnTo>
+                  <a:pt x="2247852" y="10854"/>
+                </a:lnTo>
+                <a:close/>
+                <a:lnTo>
+                  <a:pt x="2251671" y="9760"/>
+                </a:lnTo>
+                <a:close/>
+                <a:lnTo>
+                  <a:pt x="2255489" y="8669"/>
+                </a:lnTo>
+                <a:close/>
+                <a:lnTo>
+                  <a:pt x="2259307" y="7579"/>
+                </a:lnTo>
+                <a:close/>
+                <a:lnTo>
+                  <a:pt x="2263123" y="6491"/>
+                </a:lnTo>
+                <a:close/>
+                <a:lnTo>
+                  <a:pt x="2266939" y="5405"/>
+                </a:lnTo>
+                <a:close/>
+                <a:lnTo>
+                  <a:pt x="2270754" y="4320"/>
+                </a:lnTo>
+                <a:close/>
+                <a:lnTo>
+                  <a:pt x="2274568" y="3237"/>
+                </a:lnTo>
+                <a:close/>
+                <a:lnTo>
+                  <a:pt x="2278380" y="2156"/>
+                </a:lnTo>
+                <a:close/>
+                <a:lnTo>
+                  <a:pt x="2282191" y="1077"/>
                 </a:lnTo>
                 <a:close/>
                 <a:lnTo>
@@ -4387,7 +5587,7 @@
               </a:path>
             </a:pathLst>
           </a:custGeom>
-          <a:ln w="31750">
+          <a:ln w="38100">
             <a:solidFill>
               <a:srgbClr val="000000"/>
             </a:solidFill>
@@ -4423,8 +5623,8 @@
         </p:nvCxnSpPr>
         <p:spPr>
           <a:xfrm flipV="1">
-            <a:off x="5715000.0" y="1657350.0"/>
-            <a:ext cx="0.0" cy="914400.0"/>
+            <a:off x="5943600.0" y="1383898.68"/>
+            <a:ext cx="0.0" cy="1187851.32"/>
           </a:xfrm>
           <a:prstGeom prst="line">
             <a:avLst/>
@@ -4459,8 +5659,8 @@
         </p:nvSpPr>
         <p:spPr>
           <a:xfrm>
-            <a:off x="5638800" y="1581150"/>
-            <a:ext cx="152400" cy="152400"/>
+            <a:off x="5854700" y="1294998"/>
+            <a:ext cx="177800" cy="177800"/>
           </a:xfrm>
           <a:prstGeom prst="ellipse">
             <a:avLst/>
@@ -4468,500 +5668,6 @@
           <a:solidFill>
             <a:srgbClr val="000000"/>
           </a:solidFill>
-          <a:ln w="12700">
-            <a:solidFill>
-              <a:srgbClr val="FFFFFF"/>
-            </a:solidFill>
-          </a:ln>
-        </p:spPr>
-        <p:style>
-          <a:lnRef idx="1">
-            <a:schemeClr val="accent1"/>
-          </a:lnRef>
-          <a:fillRef idx="3">
-            <a:schemeClr val="accent1"/>
-          </a:fillRef>
-          <a:effectRef idx="2">
-            <a:schemeClr val="accent1"/>
-          </a:effectRef>
-          <a:fontRef idx="minor">
-            <a:schemeClr val="lt1"/>
-          </a:fontRef>
-        </p:style>
-        <p:txBody>
-          <a:bodyPr rtlCol="0" anchor="ctr"/>
-          <a:lstStyle/>
-          <a:p>
-            <a:pPr algn="ctr"/>
-          </a:p>
-        </p:txBody>
-      </p:sp>
-      <p:sp>
-        <p:nvSpPr>
-          <p:cNvPr id="7" name="Oval 6"/>
-          <p:cNvSpPr/>
-          <p:nvPr/>
-        </p:nvSpPr>
-        <p:spPr>
-          <a:xfrm>
-            <a:off x="5638800" y="1946910"/>
-            <a:ext cx="152400" cy="152400"/>
-          </a:xfrm>
-          <a:prstGeom prst="ellipse">
-            <a:avLst/>
-          </a:prstGeom>
-          <a:solidFill>
-            <a:srgbClr val="FFFFFF"/>
-          </a:solidFill>
-          <a:ln w="12700">
-            <a:solidFill>
-              <a:srgbClr val="FFFFFF"/>
-            </a:solidFill>
-          </a:ln>
-        </p:spPr>
-        <p:style>
-          <a:lnRef idx="1">
-            <a:schemeClr val="accent1"/>
-          </a:lnRef>
-          <a:fillRef idx="3">
-            <a:schemeClr val="accent1"/>
-          </a:fillRef>
-          <a:effectRef idx="2">
-            <a:schemeClr val="accent1"/>
-          </a:effectRef>
-          <a:fontRef idx="minor">
-            <a:schemeClr val="lt1"/>
-          </a:fontRef>
-        </p:style>
-        <p:txBody>
-          <a:bodyPr rtlCol="0" anchor="ctr"/>
-          <a:lstStyle/>
-          <a:p>
-            <a:pPr algn="ctr"/>
-          </a:p>
-        </p:txBody>
-      </p:sp>
-      <p:sp>
-        <p:nvSpPr>
-          <p:cNvPr id="8" name="Freeform 7"/>
-          <p:cNvSpPr/>
-          <p:nvPr/>
-        </p:nvSpPr>
-        <p:spPr>
-          <a:xfrm>
-            <a:off x="5394960" y="1695755"/>
-            <a:ext cx="228600" cy="100127"/>
-          </a:xfrm>
-          <a:custGeom>
-            <a:avLst/>
-            <a:gdLst/>
-            <a:ahLst/>
-            <a:cxnLst/>
-            <a:rect l="l" t="t" r="r" b="b"/>
-            <a:pathLst>
-              <a:path w="228600" h="100127">
-                <a:moveTo>
-                  <a:pt x="0" y="100127"/>
-                </a:moveTo>
-                <a:lnTo>
-                  <a:pt x="2309" y="99086"/>
-                </a:lnTo>
-                <a:close/>
-                <a:lnTo>
-                  <a:pt x="4618" y="98042"/>
-                </a:lnTo>
-                <a:close/>
-                <a:lnTo>
-                  <a:pt x="6927" y="96994"/>
-                </a:lnTo>
-                <a:close/>
-                <a:lnTo>
-                  <a:pt x="9236" y="95944"/>
-                </a:lnTo>
-                <a:close/>
-                <a:lnTo>
-                  <a:pt x="11545" y="94891"/>
-                </a:lnTo>
-                <a:close/>
-                <a:lnTo>
-                  <a:pt x="13855" y="93835"/>
-                </a:lnTo>
-                <a:close/>
-                <a:lnTo>
-                  <a:pt x="16164" y="92777"/>
-                </a:lnTo>
-                <a:close/>
-                <a:lnTo>
-                  <a:pt x="18473" y="91717"/>
-                </a:lnTo>
-                <a:close/>
-                <a:lnTo>
-                  <a:pt x="20782" y="90655"/>
-                </a:lnTo>
-                <a:close/>
-                <a:lnTo>
-                  <a:pt x="23091" y="89590"/>
-                </a:lnTo>
-                <a:close/>
-                <a:lnTo>
-                  <a:pt x="25400" y="88524"/>
-                </a:lnTo>
-                <a:close/>
-                <a:lnTo>
-                  <a:pt x="27709" y="87456"/>
-                </a:lnTo>
-                <a:close/>
-                <a:lnTo>
-                  <a:pt x="30018" y="86387"/>
-                </a:lnTo>
-                <a:close/>
-                <a:lnTo>
-                  <a:pt x="32327" y="85317"/>
-                </a:lnTo>
-                <a:close/>
-                <a:lnTo>
-                  <a:pt x="34636" y="84246"/>
-                </a:lnTo>
-                <a:close/>
-                <a:lnTo>
-                  <a:pt x="36945" y="83174"/>
-                </a:lnTo>
-                <a:close/>
-                <a:lnTo>
-                  <a:pt x="39255" y="82101"/>
-                </a:lnTo>
-                <a:close/>
-                <a:lnTo>
-                  <a:pt x="41564" y="81028"/>
-                </a:lnTo>
-                <a:close/>
-                <a:lnTo>
-                  <a:pt x="43873" y="79954"/>
-                </a:lnTo>
-                <a:close/>
-                <a:lnTo>
-                  <a:pt x="46182" y="78881"/>
-                </a:lnTo>
-                <a:close/>
-                <a:lnTo>
-                  <a:pt x="48491" y="77807"/>
-                </a:lnTo>
-                <a:close/>
-                <a:lnTo>
-                  <a:pt x="50800" y="76734"/>
-                </a:lnTo>
-                <a:close/>
-                <a:lnTo>
-                  <a:pt x="53109" y="75660"/>
-                </a:lnTo>
-                <a:close/>
-                <a:lnTo>
-                  <a:pt x="55418" y="74588"/>
-                </a:lnTo>
-                <a:close/>
-                <a:lnTo>
-                  <a:pt x="57727" y="73516"/>
-                </a:lnTo>
-                <a:close/>
-                <a:lnTo>
-                  <a:pt x="60036" y="72445"/>
-                </a:lnTo>
-                <a:close/>
-                <a:lnTo>
-                  <a:pt x="62345" y="71376"/>
-                </a:lnTo>
-                <a:close/>
-                <a:lnTo>
-                  <a:pt x="64655" y="70307"/>
-                </a:lnTo>
-                <a:close/>
-                <a:lnTo>
-                  <a:pt x="66964" y="69240"/>
-                </a:lnTo>
-                <a:close/>
-                <a:lnTo>
-                  <a:pt x="69273" y="68175"/>
-                </a:lnTo>
-                <a:close/>
-                <a:lnTo>
-                  <a:pt x="71582" y="67111"/>
-                </a:lnTo>
-                <a:close/>
-                <a:lnTo>
-                  <a:pt x="73891" y="66049"/>
-                </a:lnTo>
-                <a:close/>
-                <a:lnTo>
-                  <a:pt x="76200" y="64990"/>
-                </a:lnTo>
-                <a:close/>
-                <a:lnTo>
-                  <a:pt x="78509" y="63933"/>
-                </a:lnTo>
-                <a:close/>
-                <a:lnTo>
-                  <a:pt x="80818" y="62878"/>
-                </a:lnTo>
-                <a:close/>
-                <a:lnTo>
-                  <a:pt x="83127" y="61826"/>
-                </a:lnTo>
-                <a:close/>
-                <a:lnTo>
-                  <a:pt x="85436" y="60777"/>
-                </a:lnTo>
-                <a:close/>
-                <a:lnTo>
-                  <a:pt x="87745" y="59731"/>
-                </a:lnTo>
-                <a:close/>
-                <a:lnTo>
-                  <a:pt x="90055" y="58688"/>
-                </a:lnTo>
-                <a:close/>
-                <a:lnTo>
-                  <a:pt x="92364" y="57649"/>
-                </a:lnTo>
-                <a:close/>
-                <a:lnTo>
-                  <a:pt x="94673" y="56613"/>
-                </a:lnTo>
-                <a:close/>
-                <a:lnTo>
-                  <a:pt x="96982" y="55580"/>
-                </a:lnTo>
-                <a:close/>
-                <a:lnTo>
-                  <a:pt x="99291" y="54550"/>
-                </a:lnTo>
-                <a:close/>
-                <a:lnTo>
-                  <a:pt x="101600" y="53524"/>
-                </a:lnTo>
-                <a:close/>
-                <a:lnTo>
-                  <a:pt x="103909" y="52499"/>
-                </a:lnTo>
-                <a:close/>
-                <a:lnTo>
-                  <a:pt x="106218" y="51478"/>
-                </a:lnTo>
-                <a:close/>
-                <a:lnTo>
-                  <a:pt x="108527" y="50459"/>
-                </a:lnTo>
-                <a:close/>
-                <a:lnTo>
-                  <a:pt x="110836" y="49442"/>
-                </a:lnTo>
-                <a:close/>
-                <a:lnTo>
-                  <a:pt x="113145" y="48427"/>
-                </a:lnTo>
-                <a:close/>
-                <a:lnTo>
-                  <a:pt x="115455" y="47414"/>
-                </a:lnTo>
-                <a:close/>
-                <a:lnTo>
-                  <a:pt x="117764" y="46402"/>
-                </a:lnTo>
-                <a:close/>
-                <a:lnTo>
-                  <a:pt x="120073" y="45392"/>
-                </a:lnTo>
-                <a:close/>
-                <a:lnTo>
-                  <a:pt x="122382" y="44384"/>
-                </a:lnTo>
-                <a:close/>
-                <a:lnTo>
-                  <a:pt x="124691" y="43376"/>
-                </a:lnTo>
-                <a:close/>
-                <a:lnTo>
-                  <a:pt x="127000" y="42370"/>
-                </a:lnTo>
-                <a:close/>
-                <a:lnTo>
-                  <a:pt x="129309" y="41364"/>
-                </a:lnTo>
-                <a:close/>
-                <a:lnTo>
-                  <a:pt x="131618" y="40358"/>
-                </a:lnTo>
-                <a:close/>
-                <a:lnTo>
-                  <a:pt x="133927" y="39354"/>
-                </a:lnTo>
-                <a:close/>
-                <a:lnTo>
-                  <a:pt x="136236" y="38349"/>
-                </a:lnTo>
-                <a:close/>
-                <a:lnTo>
-                  <a:pt x="138545" y="37345"/>
-                </a:lnTo>
-                <a:close/>
-                <a:lnTo>
-                  <a:pt x="140855" y="36340"/>
-                </a:lnTo>
-                <a:close/>
-                <a:lnTo>
-                  <a:pt x="143164" y="35336"/>
-                </a:lnTo>
-                <a:close/>
-                <a:lnTo>
-                  <a:pt x="145473" y="34333"/>
-                </a:lnTo>
-                <a:close/>
-                <a:lnTo>
-                  <a:pt x="147782" y="33330"/>
-                </a:lnTo>
-                <a:close/>
-                <a:lnTo>
-                  <a:pt x="150091" y="32328"/>
-                </a:lnTo>
-                <a:close/>
-                <a:lnTo>
-                  <a:pt x="152400" y="31326"/>
-                </a:lnTo>
-                <a:close/>
-                <a:lnTo>
-                  <a:pt x="154709" y="30326"/>
-                </a:lnTo>
-                <a:close/>
-                <a:lnTo>
-                  <a:pt x="157018" y="29328"/>
-                </a:lnTo>
-                <a:close/>
-                <a:lnTo>
-                  <a:pt x="159327" y="28331"/>
-                </a:lnTo>
-                <a:close/>
-                <a:lnTo>
-                  <a:pt x="161636" y="27335"/>
-                </a:lnTo>
-                <a:close/>
-                <a:lnTo>
-                  <a:pt x="163945" y="26342"/>
-                </a:lnTo>
-                <a:close/>
-                <a:lnTo>
-                  <a:pt x="166255" y="25350"/>
-                </a:lnTo>
-                <a:close/>
-                <a:lnTo>
-                  <a:pt x="168564" y="24361"/>
-                </a:lnTo>
-                <a:close/>
-                <a:lnTo>
-                  <a:pt x="170873" y="23374"/>
-                </a:lnTo>
-                <a:close/>
-                <a:lnTo>
-                  <a:pt x="173182" y="22390"/>
-                </a:lnTo>
-                <a:close/>
-                <a:lnTo>
-                  <a:pt x="175491" y="21408"/>
-                </a:lnTo>
-                <a:close/>
-                <a:lnTo>
-                  <a:pt x="177800" y="20430"/>
-                </a:lnTo>
-                <a:close/>
-                <a:lnTo>
-                  <a:pt x="180109" y="19454"/>
-                </a:lnTo>
-                <a:close/>
-                <a:lnTo>
-                  <a:pt x="182418" y="18482"/>
-                </a:lnTo>
-                <a:close/>
-                <a:lnTo>
-                  <a:pt x="184727" y="17513"/>
-                </a:lnTo>
-                <a:close/>
-                <a:lnTo>
-                  <a:pt x="187036" y="16548"/>
-                </a:lnTo>
-                <a:close/>
-                <a:lnTo>
-                  <a:pt x="189345" y="15587"/>
-                </a:lnTo>
-                <a:close/>
-                <a:lnTo>
-                  <a:pt x="191655" y="14629"/>
-                </a:lnTo>
-                <a:close/>
-                <a:lnTo>
-                  <a:pt x="193964" y="13676"/>
-                </a:lnTo>
-                <a:close/>
-                <a:lnTo>
-                  <a:pt x="196273" y="12727"/>
-                </a:lnTo>
-                <a:close/>
-                <a:lnTo>
-                  <a:pt x="198582" y="11783"/>
-                </a:lnTo>
-                <a:close/>
-                <a:lnTo>
-                  <a:pt x="200891" y="10844"/>
-                </a:lnTo>
-                <a:close/>
-                <a:lnTo>
-                  <a:pt x="203200" y="9909"/>
-                </a:lnTo>
-                <a:close/>
-                <a:lnTo>
-                  <a:pt x="205509" y="8979"/>
-                </a:lnTo>
-                <a:close/>
-                <a:lnTo>
-                  <a:pt x="207818" y="8055"/>
-                </a:lnTo>
-                <a:close/>
-                <a:lnTo>
-                  <a:pt x="210127" y="7136"/>
-                </a:lnTo>
-                <a:close/>
-                <a:lnTo>
-                  <a:pt x="212436" y="6222"/>
-                </a:lnTo>
-                <a:close/>
-                <a:lnTo>
-                  <a:pt x="214745" y="5315"/>
-                </a:lnTo>
-                <a:close/>
-                <a:lnTo>
-                  <a:pt x="217055" y="4413"/>
-                </a:lnTo>
-                <a:close/>
-                <a:lnTo>
-                  <a:pt x="219364" y="3518"/>
-                </a:lnTo>
-                <a:close/>
-                <a:lnTo>
-                  <a:pt x="221673" y="2628"/>
-                </a:lnTo>
-                <a:close/>
-                <a:lnTo>
-                  <a:pt x="223982" y="1745"/>
-                </a:lnTo>
-                <a:close/>
-                <a:lnTo>
-                  <a:pt x="226291" y="869"/>
-                </a:lnTo>
-                <a:close/>
-                <a:lnTo>
-                  <a:pt x="228600" y="0"/>
-                </a:lnTo>
-                <a:close/>
-              </a:path>
-            </a:pathLst>
-          </a:custGeom>
           <a:ln w="19050">
             <a:solidFill>
               <a:srgbClr val="FFFFFF"/>
@@ -4992,425 +5698,21 @@
       </p:sp>
       <p:sp>
         <p:nvSpPr>
-          <p:cNvPr id="9" name="Freeform 8"/>
+          <p:cNvPr id="7" name="Oval 6"/>
           <p:cNvSpPr/>
           <p:nvPr/>
         </p:nvSpPr>
         <p:spPr>
           <a:xfrm>
-            <a:off x="5806440" y="1537106"/>
-            <a:ext cx="228600" cy="84582"/>
+            <a:off x="5854700" y="1797050"/>
+            <a:ext cx="177800" cy="177800"/>
           </a:xfrm>
-          <a:custGeom>
+          <a:prstGeom prst="ellipse">
             <a:avLst/>
-            <a:gdLst/>
-            <a:ahLst/>
-            <a:cxnLst/>
-            <a:rect l="l" t="t" r="r" b="b"/>
-            <a:pathLst>
-              <a:path w="228600" h="84582">
-                <a:moveTo>
-                  <a:pt x="228600" y="0"/>
-                </a:moveTo>
-                <a:lnTo>
-                  <a:pt x="226291" y="844"/>
-                </a:lnTo>
-                <a:close/>
-                <a:lnTo>
-                  <a:pt x="223982" y="1686"/>
-                </a:lnTo>
-                <a:close/>
-                <a:lnTo>
-                  <a:pt x="221673" y="2526"/>
-                </a:lnTo>
-                <a:close/>
-                <a:lnTo>
-                  <a:pt x="219364" y="3364"/>
-                </a:lnTo>
-                <a:close/>
-                <a:lnTo>
-                  <a:pt x="217055" y="4200"/>
-                </a:lnTo>
-                <a:close/>
-                <a:lnTo>
-                  <a:pt x="214745" y="5035"/>
-                </a:lnTo>
-                <a:close/>
-                <a:lnTo>
-                  <a:pt x="212436" y="5869"/>
-                </a:lnTo>
-                <a:close/>
-                <a:lnTo>
-                  <a:pt x="210127" y="6701"/>
-                </a:lnTo>
-                <a:close/>
-                <a:lnTo>
-                  <a:pt x="207818" y="7532"/>
-                </a:lnTo>
-                <a:close/>
-                <a:lnTo>
-                  <a:pt x="205509" y="8362"/>
-                </a:lnTo>
-                <a:close/>
-                <a:lnTo>
-                  <a:pt x="203200" y="9192"/>
-                </a:lnTo>
-                <a:close/>
-                <a:lnTo>
-                  <a:pt x="200891" y="10020"/>
-                </a:lnTo>
-                <a:close/>
-                <a:lnTo>
-                  <a:pt x="198582" y="10847"/>
-                </a:lnTo>
-                <a:close/>
-                <a:lnTo>
-                  <a:pt x="196273" y="11674"/>
-                </a:lnTo>
-                <a:close/>
-                <a:lnTo>
-                  <a:pt x="193964" y="12500"/>
-                </a:lnTo>
-                <a:close/>
-                <a:lnTo>
-                  <a:pt x="191655" y="13325"/>
-                </a:lnTo>
-                <a:close/>
-                <a:lnTo>
-                  <a:pt x="189345" y="14150"/>
-                </a:lnTo>
-                <a:close/>
-                <a:lnTo>
-                  <a:pt x="187036" y="14975"/>
-                </a:lnTo>
-                <a:close/>
-                <a:lnTo>
-                  <a:pt x="184727" y="15800"/>
-                </a:lnTo>
-                <a:close/>
-                <a:lnTo>
-                  <a:pt x="182418" y="16625"/>
-                </a:lnTo>
-                <a:close/>
-                <a:lnTo>
-                  <a:pt x="180109" y="17449"/>
-                </a:lnTo>
-                <a:close/>
-                <a:lnTo>
-                  <a:pt x="177800" y="18274"/>
-                </a:lnTo>
-                <a:close/>
-                <a:lnTo>
-                  <a:pt x="175491" y="19099"/>
-                </a:lnTo>
-                <a:close/>
-                <a:lnTo>
-                  <a:pt x="173182" y="19924"/>
-                </a:lnTo>
-                <a:close/>
-                <a:lnTo>
-                  <a:pt x="170873" y="20750"/>
-                </a:lnTo>
-                <a:close/>
-                <a:lnTo>
-                  <a:pt x="168564" y="21576"/>
-                </a:lnTo>
-                <a:close/>
-                <a:lnTo>
-                  <a:pt x="166255" y="22403"/>
-                </a:lnTo>
-                <a:close/>
-                <a:lnTo>
-                  <a:pt x="163945" y="23231"/>
-                </a:lnTo>
-                <a:close/>
-                <a:lnTo>
-                  <a:pt x="161636" y="24059"/>
-                </a:lnTo>
-                <a:close/>
-                <a:lnTo>
-                  <a:pt x="159327" y="24889"/>
-                </a:lnTo>
-                <a:close/>
-                <a:lnTo>
-                  <a:pt x="157018" y="25719"/>
-                </a:lnTo>
-                <a:close/>
-                <a:lnTo>
-                  <a:pt x="154709" y="26551"/>
-                </a:lnTo>
-                <a:close/>
-                <a:lnTo>
-                  <a:pt x="152400" y="27383"/>
-                </a:lnTo>
-                <a:close/>
-                <a:lnTo>
-                  <a:pt x="150091" y="28218"/>
-                </a:lnTo>
-                <a:close/>
-                <a:lnTo>
-                  <a:pt x="147782" y="29053"/>
-                </a:lnTo>
-                <a:close/>
-                <a:lnTo>
-                  <a:pt x="145473" y="29890"/>
-                </a:lnTo>
-                <a:close/>
-                <a:lnTo>
-                  <a:pt x="143164" y="30729"/>
-                </a:lnTo>
-                <a:close/>
-                <a:lnTo>
-                  <a:pt x="140855" y="31570"/>
-                </a:lnTo>
-                <a:close/>
-                <a:lnTo>
-                  <a:pt x="138545" y="32412"/>
-                </a:lnTo>
-                <a:close/>
-                <a:lnTo>
-                  <a:pt x="136236" y="33257"/>
-                </a:lnTo>
-                <a:close/>
-                <a:lnTo>
-                  <a:pt x="133927" y="34103"/>
-                </a:lnTo>
-                <a:close/>
-                <a:lnTo>
-                  <a:pt x="131618" y="34951"/>
-                </a:lnTo>
-                <a:close/>
-                <a:lnTo>
-                  <a:pt x="129309" y="35801"/>
-                </a:lnTo>
-                <a:close/>
-                <a:lnTo>
-                  <a:pt x="127000" y="36652"/>
-                </a:lnTo>
-                <a:close/>
-                <a:lnTo>
-                  <a:pt x="124691" y="37505"/>
-                </a:lnTo>
-                <a:close/>
-                <a:lnTo>
-                  <a:pt x="122382" y="38359"/>
-                </a:lnTo>
-                <a:close/>
-                <a:lnTo>
-                  <a:pt x="120073" y="39214"/>
-                </a:lnTo>
-                <a:close/>
-                <a:lnTo>
-                  <a:pt x="117764" y="40069"/>
-                </a:lnTo>
-                <a:close/>
-                <a:lnTo>
-                  <a:pt x="115455" y="40926"/>
-                </a:lnTo>
-                <a:close/>
-                <a:lnTo>
-                  <a:pt x="113145" y="41783"/>
-                </a:lnTo>
-                <a:close/>
-                <a:lnTo>
-                  <a:pt x="110836" y="42640"/>
-                </a:lnTo>
-                <a:close/>
-                <a:lnTo>
-                  <a:pt x="108527" y="43498"/>
-                </a:lnTo>
-                <a:close/>
-                <a:lnTo>
-                  <a:pt x="106218" y="44355"/>
-                </a:lnTo>
-                <a:close/>
-                <a:lnTo>
-                  <a:pt x="103909" y="45213"/>
-                </a:lnTo>
-                <a:close/>
-                <a:lnTo>
-                  <a:pt x="101600" y="46070"/>
-                </a:lnTo>
-                <a:close/>
-                <a:lnTo>
-                  <a:pt x="99291" y="46927"/>
-                </a:lnTo>
-                <a:close/>
-                <a:lnTo>
-                  <a:pt x="96982" y="47783"/>
-                </a:lnTo>
-                <a:close/>
-                <a:lnTo>
-                  <a:pt x="94673" y="48639"/>
-                </a:lnTo>
-                <a:close/>
-                <a:lnTo>
-                  <a:pt x="92364" y="49494"/>
-                </a:lnTo>
-                <a:close/>
-                <a:lnTo>
-                  <a:pt x="90055" y="50347"/>
-                </a:lnTo>
-                <a:close/>
-                <a:lnTo>
-                  <a:pt x="87745" y="51200"/>
-                </a:lnTo>
-                <a:close/>
-                <a:lnTo>
-                  <a:pt x="85436" y="52052"/>
-                </a:lnTo>
-                <a:close/>
-                <a:lnTo>
-                  <a:pt x="83127" y="52903"/>
-                </a:lnTo>
-                <a:close/>
-                <a:lnTo>
-                  <a:pt x="80818" y="53754"/>
-                </a:lnTo>
-                <a:close/>
-                <a:lnTo>
-                  <a:pt x="78509" y="54605"/>
-                </a:lnTo>
-                <a:close/>
-                <a:lnTo>
-                  <a:pt x="76200" y="55455"/>
-                </a:lnTo>
-                <a:close/>
-                <a:lnTo>
-                  <a:pt x="73891" y="56306"/>
-                </a:lnTo>
-                <a:close/>
-                <a:lnTo>
-                  <a:pt x="71582" y="57156"/>
-                </a:lnTo>
-                <a:close/>
-                <a:lnTo>
-                  <a:pt x="69273" y="58007"/>
-                </a:lnTo>
-                <a:close/>
-                <a:lnTo>
-                  <a:pt x="66964" y="58859"/>
-                </a:lnTo>
-                <a:close/>
-                <a:lnTo>
-                  <a:pt x="64655" y="59712"/>
-                </a:lnTo>
-                <a:close/>
-                <a:lnTo>
-                  <a:pt x="62345" y="60565"/>
-                </a:lnTo>
-                <a:close/>
-                <a:lnTo>
-                  <a:pt x="60036" y="61419"/>
-                </a:lnTo>
-                <a:close/>
-                <a:lnTo>
-                  <a:pt x="57727" y="62275"/>
-                </a:lnTo>
-                <a:close/>
-                <a:lnTo>
-                  <a:pt x="55418" y="63132"/>
-                </a:lnTo>
-                <a:close/>
-                <a:lnTo>
-                  <a:pt x="53109" y="63991"/>
-                </a:lnTo>
-                <a:close/>
-                <a:lnTo>
-                  <a:pt x="50800" y="64851"/>
-                </a:lnTo>
-                <a:close/>
-                <a:lnTo>
-                  <a:pt x="48491" y="65714"/>
-                </a:lnTo>
-                <a:close/>
-                <a:lnTo>
-                  <a:pt x="46182" y="66578"/>
-                </a:lnTo>
-                <a:close/>
-                <a:lnTo>
-                  <a:pt x="43873" y="67445"/>
-                </a:lnTo>
-                <a:close/>
-                <a:lnTo>
-                  <a:pt x="41564" y="68315"/>
-                </a:lnTo>
-                <a:close/>
-                <a:lnTo>
-                  <a:pt x="39255" y="69187"/>
-                </a:lnTo>
-                <a:close/>
-                <a:lnTo>
-                  <a:pt x="36945" y="70061"/>
-                </a:lnTo>
-                <a:close/>
-                <a:lnTo>
-                  <a:pt x="34636" y="70939"/>
-                </a:lnTo>
-                <a:close/>
-                <a:lnTo>
-                  <a:pt x="32327" y="71820"/>
-                </a:lnTo>
-                <a:close/>
-                <a:lnTo>
-                  <a:pt x="30018" y="72705"/>
-                </a:lnTo>
-                <a:close/>
-                <a:lnTo>
-                  <a:pt x="27709" y="73592"/>
-                </a:lnTo>
-                <a:close/>
-                <a:lnTo>
-                  <a:pt x="25400" y="74484"/>
-                </a:lnTo>
-                <a:close/>
-                <a:lnTo>
-                  <a:pt x="23091" y="75379"/>
-                </a:lnTo>
-                <a:close/>
-                <a:lnTo>
-                  <a:pt x="20782" y="76278"/>
-                </a:lnTo>
-                <a:close/>
-                <a:lnTo>
-                  <a:pt x="18473" y="77182"/>
-                </a:lnTo>
-                <a:close/>
-                <a:lnTo>
-                  <a:pt x="16164" y="78090"/>
-                </a:lnTo>
-                <a:close/>
-                <a:lnTo>
-                  <a:pt x="13855" y="79002"/>
-                </a:lnTo>
-                <a:close/>
-                <a:lnTo>
-                  <a:pt x="11545" y="79920"/>
-                </a:lnTo>
-                <a:close/>
-                <a:lnTo>
-                  <a:pt x="9236" y="80842"/>
-                </a:lnTo>
-                <a:close/>
-                <a:lnTo>
-                  <a:pt x="6927" y="81769"/>
-                </a:lnTo>
-                <a:close/>
-                <a:lnTo>
-                  <a:pt x="4618" y="82701"/>
-                </a:lnTo>
-                <a:close/>
-                <a:lnTo>
-                  <a:pt x="2309" y="83639"/>
-                </a:lnTo>
-                <a:close/>
-                <a:lnTo>
-                  <a:pt x="0" y="84582"/>
-                </a:lnTo>
-                <a:close/>
-              </a:path>
-            </a:pathLst>
-          </a:custGeom>
+          </a:prstGeom>
+          <a:solidFill>
+            <a:srgbClr val="FFFFFF"/>
+          </a:solidFill>
           <a:ln w="19050">
             <a:solidFill>
               <a:srgbClr val="FFFFFF"/>
@@ -5439,6 +5741,76 @@
           </a:p>
         </p:txBody>
       </p:sp>
+      <p:cxnSp>
+        <p:nvCxnSpPr>
+          <p:cNvPr id="8" name="Connector 7"/>
+          <p:cNvCxnSpPr/>
+          <p:nvPr/>
+        </p:nvCxnSpPr>
+        <p:spPr>
+          <a:xfrm flipV="1">
+            <a:off x="5623560.0" y="1424178.0"/>
+            <a:ext cx="228600.0" cy="107487.71999999997"/>
+          </a:xfrm>
+          <a:prstGeom prst="line">
+            <a:avLst/>
+          </a:prstGeom>
+          <a:ln w="15240">
+            <a:solidFill>
+              <a:srgbClr val="FFFFFF"/>
+            </a:solidFill>
+          </a:ln>
+        </p:spPr>
+        <p:style>
+          <a:lnRef idx="2">
+            <a:schemeClr val="accent1"/>
+          </a:lnRef>
+          <a:fillRef idx="0">
+            <a:schemeClr val="accent1"/>
+          </a:fillRef>
+          <a:effectRef idx="1">
+            <a:schemeClr val="accent1"/>
+          </a:effectRef>
+          <a:fontRef idx="minor">
+            <a:schemeClr val="tx1"/>
+          </a:fontRef>
+        </p:style>
+      </p:cxnSp>
+      <p:cxnSp>
+        <p:nvCxnSpPr>
+          <p:cNvPr id="9" name="Connector 8"/>
+          <p:cNvCxnSpPr/>
+          <p:nvPr/>
+        </p:nvCxnSpPr>
+        <p:spPr>
+          <a:xfrm flipH="1">
+            <a:off x="6035040.0" y="1235262.96"/>
+            <a:ext cx="274320.0" cy="109682.28000000003"/>
+          </a:xfrm>
+          <a:prstGeom prst="line">
+            <a:avLst/>
+          </a:prstGeom>
+          <a:ln w="15240">
+            <a:solidFill>
+              <a:srgbClr val="FFFFFF"/>
+            </a:solidFill>
+          </a:ln>
+        </p:spPr>
+        <p:style>
+          <a:lnRef idx="2">
+            <a:schemeClr val="accent1"/>
+          </a:lnRef>
+          <a:fillRef idx="0">
+            <a:schemeClr val="accent1"/>
+          </a:fillRef>
+          <a:effectRef idx="1">
+            <a:schemeClr val="accent1"/>
+          </a:effectRef>
+          <a:fontRef idx="minor">
+            <a:schemeClr val="tx1"/>
+          </a:fontRef>
+        </p:style>
+      </p:cxnSp>
       <p:sp>
         <p:nvSpPr>
           <p:cNvPr id="10" name="TextBox 9"/>
@@ -5447,7 +5819,7 @@
         </p:nvSpPr>
         <p:spPr>
           <a:xfrm>
-            <a:off x="5461000" y="2368550"/>
+            <a:off x="5689600" y="425450"/>
             <a:ext cx="1524000" cy="508000"/>
           </a:xfrm>
           <a:prstGeom prst="rect">
@@ -5462,15 +5834,87 @@
           <a:lstStyle/>
           <a:p>
             <a:pPr>
-              <a:defRPr sz="1800" b="1">
+              <a:defRPr sz="2200" b="1">
                 <a:solidFill>
                   <a:srgbClr val="FFFFFF"/>
                 </a:solidFill>
-                <a:latin typeface="Inter"/>
+                <a:latin typeface="Arial"/>
               </a:defRPr>
             </a:pPr>
             <a:r>
+              <a:t>y=f(x)</a:t>
+            </a:r>
+          </a:p>
+        </p:txBody>
+      </p:sp>
+      <p:sp>
+        <p:nvSpPr>
+          <p:cNvPr id="11" name="TextBox 10"/>
+          <p:cNvSpPr txBox="1"/>
+          <p:nvPr/>
+        </p:nvSpPr>
+        <p:spPr>
+          <a:xfrm>
+            <a:off x="5689600" y="2391410"/>
+            <a:ext cx="1524000" cy="508000"/>
+          </a:xfrm>
+          <a:prstGeom prst="rect">
+            <a:avLst/>
+          </a:prstGeom>
+          <a:noFill/>
+        </p:spPr>
+        <p:txBody>
+          <a:bodyPr wrap="none">
+            <a:spAutoFit/>
+          </a:bodyPr>
+          <a:lstStyle/>
+          <a:p>
+            <a:pPr>
+              <a:defRPr sz="2200" b="1">
+                <a:solidFill>
+                  <a:srgbClr val="FFFFFF"/>
+                </a:solidFill>
+                <a:latin typeface="Arial"/>
+              </a:defRPr>
+            </a:pPr>
+            <a:r>
               <a:t>a</a:t>
+            </a:r>
+          </a:p>
+        </p:txBody>
+      </p:sp>
+      <p:sp>
+        <p:nvSpPr>
+          <p:cNvPr id="12" name="TextBox 11"/>
+          <p:cNvSpPr txBox="1"/>
+          <p:nvPr/>
+        </p:nvSpPr>
+        <p:spPr>
+          <a:xfrm>
+            <a:off x="4180840" y="2391410"/>
+            <a:ext cx="1524000" cy="508000"/>
+          </a:xfrm>
+          <a:prstGeom prst="rect">
+            <a:avLst/>
+          </a:prstGeom>
+          <a:noFill/>
+        </p:spPr>
+        <p:txBody>
+          <a:bodyPr wrap="none">
+            <a:spAutoFit/>
+          </a:bodyPr>
+          <a:lstStyle/>
+          <a:p>
+            <a:pPr>
+              <a:defRPr sz="2200" b="1">
+                <a:solidFill>
+                  <a:srgbClr val="FFFFFF"/>
+                </a:solidFill>
+                <a:latin typeface="Arial"/>
+              </a:defRPr>
+            </a:pPr>
+            <a:r>
+              <a:t>O</a:t>
             </a:r>
           </a:p>
         </p:txBody>

--- a/output/6.pptx
+++ b/output/6.pptx
@@ -3105,7 +3105,7 @@
         <p:spPr>
           <a:xfrm>
             <a:off x="4114800.0" y="2571750.0"/>
-            <a:ext cx="2971800.0" cy="0.0"/>
+            <a:ext cx="3429000.0" cy="0.0"/>
           </a:xfrm>
           <a:prstGeom prst="line">
             <a:avLst/>
@@ -3139,8 +3139,8 @@
         </p:nvCxnSpPr>
         <p:spPr>
           <a:xfrm flipV="1">
-            <a:off x="4572000.0" y="514350.0"/>
-            <a:ext cx="0.0" cy="2514600.0"/>
+            <a:off x="4572000.0" y="971550.0"/>
+            <a:ext cx="0.0" cy="2057400.0"/>
           </a:xfrm>
           <a:prstGeom prst="line">
             <a:avLst/>
@@ -3174,8 +3174,8 @@
         </p:nvSpPr>
         <p:spPr>
           <a:xfrm>
-            <a:off x="4572000" y="1072683"/>
-            <a:ext cx="2286000" cy="1499067"/>
+            <a:off x="4572000" y="1406347"/>
+            <a:ext cx="2971800" cy="1165403"/>
           </a:xfrm>
           <a:custGeom>
             <a:avLst/>
@@ -3184,2404 +3184,2404 @@
             <a:cxnLst/>
             <a:rect l="l" t="t" r="r" b="b"/>
             <a:pathLst>
-              <a:path w="2286000" h="1499067">
+              <a:path w="2971800" h="1165403">
                 <a:moveTo>
-                  <a:pt x="0" y="1499067"/>
+                  <a:pt x="0" y="1165403"/>
                 </a:moveTo>
                 <a:lnTo>
-                  <a:pt x="3809" y="1470580"/>
-                </a:lnTo>
-                <a:close/>
-                <a:lnTo>
-                  <a:pt x="7620" y="1444342"/>
-                </a:lnTo>
-                <a:close/>
-                <a:lnTo>
-                  <a:pt x="11432" y="1420232"/>
-                </a:lnTo>
-                <a:close/>
-                <a:lnTo>
-                  <a:pt x="15246" y="1398129"/>
-                </a:lnTo>
-                <a:close/>
-                <a:lnTo>
-                  <a:pt x="19061" y="1377913"/>
-                </a:lnTo>
-                <a:close/>
-                <a:lnTo>
-                  <a:pt x="22877" y="1359462"/>
-                </a:lnTo>
-                <a:close/>
-                <a:lnTo>
-                  <a:pt x="26693" y="1342657"/>
-                </a:lnTo>
-                <a:close/>
-                <a:lnTo>
-                  <a:pt x="30511" y="1327375"/>
-                </a:lnTo>
-                <a:close/>
-                <a:lnTo>
-                  <a:pt x="34329" y="1313496"/>
-                </a:lnTo>
-                <a:close/>
-                <a:lnTo>
-                  <a:pt x="38148" y="1300899"/>
-                </a:lnTo>
-                <a:close/>
-                <a:lnTo>
-                  <a:pt x="41968" y="1289464"/>
-                </a:lnTo>
-                <a:close/>
-                <a:lnTo>
-                  <a:pt x="45788" y="1279069"/>
-                </a:lnTo>
-                <a:close/>
-                <a:lnTo>
-                  <a:pt x="49608" y="1269594"/>
-                </a:lnTo>
-                <a:close/>
-                <a:lnTo>
-                  <a:pt x="53428" y="1260917"/>
-                </a:lnTo>
-                <a:close/>
-                <a:lnTo>
-                  <a:pt x="57248" y="1252919"/>
-                </a:lnTo>
-                <a:close/>
-                <a:lnTo>
-                  <a:pt x="61067" y="1245477"/>
-                </a:lnTo>
-                <a:close/>
-                <a:lnTo>
-                  <a:pt x="64887" y="1238472"/>
-                </a:lnTo>
-                <a:close/>
-                <a:lnTo>
-                  <a:pt x="68706" y="1231782"/>
-                </a:lnTo>
-                <a:close/>
-                <a:lnTo>
-                  <a:pt x="72525" y="1225286"/>
-                </a:lnTo>
-                <a:close/>
-                <a:lnTo>
-                  <a:pt x="76342" y="1218864"/>
-                </a:lnTo>
-                <a:close/>
-                <a:lnTo>
-                  <a:pt x="80160" y="1212420"/>
-                </a:lnTo>
-                <a:close/>
-                <a:lnTo>
-                  <a:pt x="83976" y="1205954"/>
-                </a:lnTo>
-                <a:close/>
-                <a:lnTo>
-                  <a:pt x="87792" y="1199487"/>
-                </a:lnTo>
-                <a:close/>
-                <a:lnTo>
-                  <a:pt x="91607" y="1193038"/>
-                </a:lnTo>
-                <a:close/>
-                <a:lnTo>
-                  <a:pt x="95422" y="1186628"/>
-                </a:lnTo>
-                <a:close/>
-                <a:lnTo>
-                  <a:pt x="99236" y="1180277"/>
-                </a:lnTo>
-                <a:close/>
-                <a:lnTo>
-                  <a:pt x="103050" y="1174006"/>
-                </a:lnTo>
-                <a:close/>
-                <a:lnTo>
-                  <a:pt x="106864" y="1167835"/>
-                </a:lnTo>
-                <a:close/>
-                <a:lnTo>
-                  <a:pt x="110677" y="1161785"/>
-                </a:lnTo>
-                <a:close/>
-                <a:lnTo>
-                  <a:pt x="114491" y="1155875"/>
-                </a:lnTo>
-                <a:close/>
-                <a:lnTo>
-                  <a:pt x="118304" y="1150120"/>
-                </a:lnTo>
-                <a:close/>
-                <a:lnTo>
-                  <a:pt x="122118" y="1144508"/>
-                </a:lnTo>
-                <a:close/>
-                <a:lnTo>
-                  <a:pt x="125931" y="1139022"/>
-                </a:lnTo>
-                <a:close/>
-                <a:lnTo>
-                  <a:pt x="129745" y="1133647"/>
-                </a:lnTo>
-                <a:close/>
-                <a:lnTo>
-                  <a:pt x="133559" y="1128365"/>
-                </a:lnTo>
-                <a:close/>
-                <a:lnTo>
-                  <a:pt x="137374" y="1123162"/>
-                </a:lnTo>
-                <a:close/>
-                <a:lnTo>
-                  <a:pt x="141189" y="1118019"/>
-                </a:lnTo>
-                <a:close/>
-                <a:lnTo>
-                  <a:pt x="145005" y="1112921"/>
-                </a:lnTo>
-                <a:close/>
-                <a:lnTo>
-                  <a:pt x="148822" y="1107852"/>
-                </a:lnTo>
-                <a:close/>
-                <a:lnTo>
-                  <a:pt x="152639" y="1102795"/>
-                </a:lnTo>
-                <a:close/>
-                <a:lnTo>
-                  <a:pt x="156458" y="1097739"/>
-                </a:lnTo>
-                <a:close/>
-                <a:lnTo>
-                  <a:pt x="160277" y="1092694"/>
-                </a:lnTo>
-                <a:close/>
-                <a:lnTo>
-                  <a:pt x="164096" y="1087672"/>
-                </a:lnTo>
-                <a:close/>
-                <a:lnTo>
-                  <a:pt x="167916" y="1082686"/>
-                </a:lnTo>
-                <a:close/>
-                <a:lnTo>
-                  <a:pt x="171736" y="1077750"/>
-                </a:lnTo>
-                <a:close/>
-                <a:lnTo>
-                  <a:pt x="175557" y="1072875"/>
-                </a:lnTo>
-                <a:close/>
-                <a:lnTo>
-                  <a:pt x="179377" y="1068075"/>
-                </a:lnTo>
-                <a:close/>
-                <a:lnTo>
-                  <a:pt x="183196" y="1063363"/>
-                </a:lnTo>
-                <a:close/>
-                <a:lnTo>
-                  <a:pt x="187015" y="1058751"/>
-                </a:lnTo>
-                <a:close/>
-                <a:lnTo>
-                  <a:pt x="190833" y="1054253"/>
-                </a:lnTo>
-                <a:close/>
-                <a:lnTo>
-                  <a:pt x="194651" y="1049875"/>
-                </a:lnTo>
-                <a:close/>
-                <a:lnTo>
-                  <a:pt x="198467" y="1045607"/>
-                </a:lnTo>
-                <a:close/>
-                <a:lnTo>
-                  <a:pt x="202283" y="1041434"/>
-                </a:lnTo>
-                <a:close/>
-                <a:lnTo>
-                  <a:pt x="206098" y="1037344"/>
-                </a:lnTo>
-                <a:close/>
-                <a:lnTo>
-                  <a:pt x="209913" y="1033320"/>
-                </a:lnTo>
-                <a:close/>
-                <a:lnTo>
-                  <a:pt x="213727" y="1029351"/>
-                </a:lnTo>
-                <a:close/>
-                <a:lnTo>
-                  <a:pt x="217541" y="1025420"/>
-                </a:lnTo>
-                <a:close/>
-                <a:lnTo>
-                  <a:pt x="221355" y="1021515"/>
-                </a:lnTo>
-                <a:close/>
-                <a:lnTo>
-                  <a:pt x="225168" y="1017622"/>
-                </a:lnTo>
-                <a:close/>
-                <a:lnTo>
-                  <a:pt x="228981" y="1013725"/>
-                </a:lnTo>
-                <a:close/>
-                <a:lnTo>
-                  <a:pt x="232795" y="1009815"/>
-                </a:lnTo>
-                <a:close/>
-                <a:lnTo>
-                  <a:pt x="236608" y="1005896"/>
-                </a:lnTo>
-                <a:close/>
-                <a:lnTo>
-                  <a:pt x="240422" y="1001973"/>
-                </a:lnTo>
-                <a:close/>
-                <a:lnTo>
-                  <a:pt x="244236" y="998051"/>
-                </a:lnTo>
-                <a:close/>
-                <a:lnTo>
-                  <a:pt x="248050" y="994136"/>
-                </a:lnTo>
-                <a:close/>
-                <a:lnTo>
-                  <a:pt x="251865" y="990234"/>
-                </a:lnTo>
-                <a:close/>
-                <a:lnTo>
-                  <a:pt x="255680" y="986349"/>
-                </a:lnTo>
-                <a:close/>
-                <a:lnTo>
-                  <a:pt x="259496" y="982488"/>
-                </a:lnTo>
-                <a:close/>
-                <a:lnTo>
-                  <a:pt x="263313" y="978656"/>
-                </a:lnTo>
-                <a:close/>
-                <a:lnTo>
-                  <a:pt x="267130" y="974858"/>
-                </a:lnTo>
-                <a:close/>
-                <a:lnTo>
-                  <a:pt x="270949" y="971097"/>
-                </a:lnTo>
-                <a:close/>
-                <a:lnTo>
-                  <a:pt x="274768" y="967374"/>
-                </a:lnTo>
-                <a:close/>
-                <a:lnTo>
-                  <a:pt x="278587" y="963686"/>
-                </a:lnTo>
-                <a:close/>
-                <a:lnTo>
-                  <a:pt x="282407" y="960030"/>
-                </a:lnTo>
-                <a:close/>
-                <a:lnTo>
-                  <a:pt x="286228" y="956405"/>
-                </a:lnTo>
-                <a:close/>
-                <a:lnTo>
-                  <a:pt x="290048" y="952809"/>
-                </a:lnTo>
-                <a:close/>
-                <a:lnTo>
-                  <a:pt x="293868" y="949239"/>
-                </a:lnTo>
-                <a:close/>
-                <a:lnTo>
-                  <a:pt x="297687" y="945694"/>
-                </a:lnTo>
-                <a:close/>
-                <a:lnTo>
-                  <a:pt x="301506" y="942171"/>
-                </a:lnTo>
-                <a:close/>
-                <a:lnTo>
-                  <a:pt x="305324" y="938668"/>
-                </a:lnTo>
-                <a:close/>
-                <a:lnTo>
-                  <a:pt x="309142" y="935184"/>
-                </a:lnTo>
-                <a:close/>
-                <a:lnTo>
-                  <a:pt x="312958" y="931719"/>
-                </a:lnTo>
-                <a:close/>
-                <a:lnTo>
-                  <a:pt x="316774" y="928272"/>
-                </a:lnTo>
-                <a:close/>
-                <a:lnTo>
-                  <a:pt x="320589" y="924844"/>
-                </a:lnTo>
-                <a:close/>
-                <a:lnTo>
-                  <a:pt x="324404" y="921435"/>
-                </a:lnTo>
-                <a:close/>
-                <a:lnTo>
-                  <a:pt x="328218" y="918044"/>
-                </a:lnTo>
-                <a:close/>
-                <a:lnTo>
-                  <a:pt x="332032" y="914672"/>
-                </a:lnTo>
-                <a:close/>
-                <a:lnTo>
-                  <a:pt x="335845" y="911318"/>
-                </a:lnTo>
-                <a:close/>
-                <a:lnTo>
-                  <a:pt x="339659" y="907984"/>
-                </a:lnTo>
-                <a:close/>
-                <a:lnTo>
-                  <a:pt x="343472" y="904668"/>
-                </a:lnTo>
-                <a:close/>
-                <a:lnTo>
-                  <a:pt x="347285" y="901371"/>
-                </a:lnTo>
-                <a:close/>
-                <a:lnTo>
-                  <a:pt x="351099" y="898093"/>
-                </a:lnTo>
-                <a:close/>
-                <a:lnTo>
-                  <a:pt x="354912" y="894833"/>
-                </a:lnTo>
-                <a:close/>
-                <a:lnTo>
-                  <a:pt x="358726" y="891591"/>
-                </a:lnTo>
-                <a:close/>
-                <a:lnTo>
-                  <a:pt x="362541" y="888366"/>
-                </a:lnTo>
-                <a:close/>
-                <a:lnTo>
-                  <a:pt x="366355" y="885159"/>
-                </a:lnTo>
-                <a:close/>
-                <a:lnTo>
-                  <a:pt x="370171" y="881970"/>
-                </a:lnTo>
-                <a:close/>
-                <a:lnTo>
-                  <a:pt x="373987" y="878797"/>
-                </a:lnTo>
-                <a:close/>
-                <a:lnTo>
-                  <a:pt x="377803" y="875641"/>
-                </a:lnTo>
-                <a:close/>
-                <a:lnTo>
-                  <a:pt x="381621" y="872501"/>
-                </a:lnTo>
-                <a:close/>
-                <a:lnTo>
-                  <a:pt x="385440" y="869377"/>
-                </a:lnTo>
-                <a:close/>
-                <a:lnTo>
-                  <a:pt x="389259" y="866269"/>
-                </a:lnTo>
-                <a:close/>
-                <a:lnTo>
-                  <a:pt x="393078" y="863177"/>
-                </a:lnTo>
-                <a:close/>
-                <a:lnTo>
-                  <a:pt x="396898" y="860100"/>
-                </a:lnTo>
-                <a:close/>
-                <a:lnTo>
-                  <a:pt x="400719" y="857037"/>
-                </a:lnTo>
-                <a:close/>
-                <a:lnTo>
-                  <a:pt x="404539" y="853989"/>
-                </a:lnTo>
-                <a:close/>
-                <a:lnTo>
-                  <a:pt x="408359" y="850955"/>
-                </a:lnTo>
-                <a:close/>
-                <a:lnTo>
-                  <a:pt x="412178" y="847935"/>
-                </a:lnTo>
-                <a:close/>
-                <a:lnTo>
-                  <a:pt x="415997" y="844928"/>
-                </a:lnTo>
-                <a:close/>
-                <a:lnTo>
-                  <a:pt x="419815" y="841934"/>
-                </a:lnTo>
-                <a:close/>
-                <a:lnTo>
-                  <a:pt x="423632" y="838953"/>
-                </a:lnTo>
-                <a:close/>
-                <a:lnTo>
-                  <a:pt x="427449" y="835985"/>
-                </a:lnTo>
-                <a:close/>
-                <a:lnTo>
-                  <a:pt x="431265" y="833030"/>
-                </a:lnTo>
-                <a:close/>
-                <a:lnTo>
-                  <a:pt x="435080" y="830087"/>
-                </a:lnTo>
-                <a:close/>
-                <a:lnTo>
-                  <a:pt x="438894" y="827157"/>
-                </a:lnTo>
-                <a:close/>
-                <a:lnTo>
-                  <a:pt x="442709" y="824239"/>
-                </a:lnTo>
-                <a:close/>
-                <a:lnTo>
-                  <a:pt x="446522" y="821334"/>
-                </a:lnTo>
-                <a:close/>
-                <a:lnTo>
-                  <a:pt x="450336" y="818442"/>
-                </a:lnTo>
-                <a:close/>
-                <a:lnTo>
-                  <a:pt x="454149" y="815562"/>
-                </a:lnTo>
-                <a:close/>
-                <a:lnTo>
-                  <a:pt x="457963" y="812694"/>
-                </a:lnTo>
-                <a:close/>
-                <a:lnTo>
-                  <a:pt x="461776" y="809839"/>
-                </a:lnTo>
-                <a:close/>
-                <a:lnTo>
-                  <a:pt x="465589" y="806996"/>
-                </a:lnTo>
-                <a:close/>
-                <a:lnTo>
-                  <a:pt x="469403" y="804166"/>
-                </a:lnTo>
-                <a:close/>
-                <a:lnTo>
-                  <a:pt x="473217" y="801348"/>
-                </a:lnTo>
-                <a:close/>
-                <a:lnTo>
-                  <a:pt x="477031" y="798542"/>
-                </a:lnTo>
-                <a:close/>
-                <a:lnTo>
-                  <a:pt x="480846" y="795748"/>
-                </a:lnTo>
-                <a:close/>
-                <a:lnTo>
-                  <a:pt x="484662" y="792966"/>
-                </a:lnTo>
-                <a:close/>
-                <a:lnTo>
-                  <a:pt x="488478" y="790196"/>
-                </a:lnTo>
-                <a:close/>
-                <a:lnTo>
-                  <a:pt x="492294" y="787438"/>
-                </a:lnTo>
-                <a:close/>
-                <a:lnTo>
-                  <a:pt x="496112" y="784692"/>
-                </a:lnTo>
-                <a:close/>
-                <a:lnTo>
-                  <a:pt x="499930" y="781959"/>
-                </a:lnTo>
-                <a:close/>
-                <a:lnTo>
-                  <a:pt x="503750" y="779237"/>
-                </a:lnTo>
-                <a:close/>
-                <a:lnTo>
-                  <a:pt x="507569" y="776526"/>
-                </a:lnTo>
-                <a:close/>
-                <a:lnTo>
-                  <a:pt x="511389" y="773828"/>
-                </a:lnTo>
-                <a:close/>
-                <a:lnTo>
-                  <a:pt x="515210" y="771141"/>
-                </a:lnTo>
-                <a:close/>
-                <a:lnTo>
-                  <a:pt x="519030" y="768466"/>
-                </a:lnTo>
-                <a:close/>
-                <a:lnTo>
-                  <a:pt x="522850" y="765803"/>
-                </a:lnTo>
-                <a:close/>
-                <a:lnTo>
-                  <a:pt x="526669" y="763151"/>
-                </a:lnTo>
-                <a:close/>
-                <a:lnTo>
-                  <a:pt x="530488" y="760511"/>
-                </a:lnTo>
-                <a:close/>
-                <a:lnTo>
-                  <a:pt x="534306" y="757882"/>
-                </a:lnTo>
-                <a:close/>
-                <a:lnTo>
-                  <a:pt x="538123" y="755265"/>
-                </a:lnTo>
-                <a:close/>
-                <a:lnTo>
-                  <a:pt x="541940" y="752658"/>
-                </a:lnTo>
-                <a:close/>
-                <a:lnTo>
-                  <a:pt x="545755" y="750062"/>
-                </a:lnTo>
-                <a:close/>
-                <a:lnTo>
-                  <a:pt x="549571" y="747477"/>
-                </a:lnTo>
-                <a:close/>
-                <a:lnTo>
-                  <a:pt x="553385" y="744902"/>
-                </a:lnTo>
-                <a:close/>
-                <a:lnTo>
-                  <a:pt x="557199" y="742337"/>
-                </a:lnTo>
-                <a:close/>
-                <a:lnTo>
-                  <a:pt x="561013" y="739781"/>
-                </a:lnTo>
-                <a:close/>
-                <a:lnTo>
-                  <a:pt x="564827" y="737235"/>
-                </a:lnTo>
-                <a:close/>
-                <a:lnTo>
-                  <a:pt x="568640" y="734697"/>
-                </a:lnTo>
-                <a:close/>
-                <a:lnTo>
-                  <a:pt x="572453" y="732168"/>
-                </a:lnTo>
-                <a:close/>
-                <a:lnTo>
-                  <a:pt x="576267" y="729648"/>
-                </a:lnTo>
-                <a:close/>
-                <a:lnTo>
-                  <a:pt x="580080" y="727136"/>
-                </a:lnTo>
-                <a:close/>
-                <a:lnTo>
-                  <a:pt x="583894" y="724632"/>
-                </a:lnTo>
-                <a:close/>
-                <a:lnTo>
-                  <a:pt x="587708" y="722135"/>
-                </a:lnTo>
-                <a:close/>
-                <a:lnTo>
-                  <a:pt x="591522" y="719647"/>
-                </a:lnTo>
-                <a:close/>
-                <a:lnTo>
-                  <a:pt x="595337" y="717167"/>
-                </a:lnTo>
-                <a:close/>
-                <a:lnTo>
-                  <a:pt x="599152" y="714694"/>
-                </a:lnTo>
-                <a:close/>
-                <a:lnTo>
-                  <a:pt x="602968" y="712229"/>
-                </a:lnTo>
-                <a:close/>
-                <a:lnTo>
-                  <a:pt x="606785" y="709771"/>
-                </a:lnTo>
-                <a:close/>
-                <a:lnTo>
-                  <a:pt x="610603" y="707321"/>
-                </a:lnTo>
-                <a:close/>
-                <a:lnTo>
-                  <a:pt x="614421" y="704878"/>
-                </a:lnTo>
-                <a:close/>
-                <a:lnTo>
-                  <a:pt x="618241" y="702443"/>
-                </a:lnTo>
-                <a:close/>
-                <a:lnTo>
-                  <a:pt x="622060" y="700016"/>
-                </a:lnTo>
-                <a:close/>
-                <a:lnTo>
-                  <a:pt x="625880" y="697599"/>
-                </a:lnTo>
-                <a:close/>
-                <a:lnTo>
-                  <a:pt x="629701" y="695190"/>
-                </a:lnTo>
-                <a:close/>
-                <a:lnTo>
-                  <a:pt x="633521" y="692792"/>
-                </a:lnTo>
-                <a:close/>
-                <a:lnTo>
-                  <a:pt x="637341" y="690403"/>
-                </a:lnTo>
-                <a:close/>
-                <a:lnTo>
-                  <a:pt x="641160" y="688026"/>
-                </a:lnTo>
-                <a:close/>
-                <a:lnTo>
-                  <a:pt x="644979" y="685659"/>
-                </a:lnTo>
-                <a:close/>
-                <a:lnTo>
-                  <a:pt x="648797" y="683305"/>
-                </a:lnTo>
-                <a:close/>
-                <a:lnTo>
-                  <a:pt x="652614" y="680962"/>
-                </a:lnTo>
-                <a:close/>
-                <a:lnTo>
-                  <a:pt x="656431" y="678632"/>
-                </a:lnTo>
-                <a:close/>
-                <a:lnTo>
-                  <a:pt x="660246" y="676312"/>
-                </a:lnTo>
-                <a:close/>
-                <a:lnTo>
-                  <a:pt x="664061" y="674002"/>
-                </a:lnTo>
-                <a:close/>
-                <a:lnTo>
-                  <a:pt x="667876" y="671703"/>
-                </a:lnTo>
-                <a:close/>
-                <a:lnTo>
-                  <a:pt x="671690" y="669414"/>
-                </a:lnTo>
-                <a:close/>
-                <a:lnTo>
-                  <a:pt x="675504" y="667134"/>
-                </a:lnTo>
-                <a:close/>
-                <a:lnTo>
-                  <a:pt x="679317" y="664862"/>
-                </a:lnTo>
-                <a:close/>
-                <a:lnTo>
-                  <a:pt x="683131" y="662599"/>
-                </a:lnTo>
-                <a:close/>
-                <a:lnTo>
-                  <a:pt x="686944" y="660344"/>
-                </a:lnTo>
-                <a:close/>
-                <a:lnTo>
-                  <a:pt x="690757" y="658096"/>
-                </a:lnTo>
-                <a:close/>
-                <a:lnTo>
-                  <a:pt x="694571" y="655855"/>
-                </a:lnTo>
-                <a:close/>
-                <a:lnTo>
-                  <a:pt x="698384" y="653622"/>
-                </a:lnTo>
-                <a:close/>
-                <a:lnTo>
-                  <a:pt x="702198" y="651397"/>
-                </a:lnTo>
-                <a:close/>
-                <a:lnTo>
-                  <a:pt x="706013" y="649179"/>
-                </a:lnTo>
-                <a:close/>
-                <a:lnTo>
-                  <a:pt x="709828" y="646968"/>
-                </a:lnTo>
-                <a:close/>
-                <a:lnTo>
-                  <a:pt x="713643" y="644765"/>
-                </a:lnTo>
-                <a:close/>
-                <a:lnTo>
-                  <a:pt x="717459" y="642570"/>
-                </a:lnTo>
-                <a:close/>
-                <a:lnTo>
-                  <a:pt x="721276" y="640382"/>
-                </a:lnTo>
-                <a:close/>
-                <a:lnTo>
-                  <a:pt x="725094" y="638201"/>
-                </a:lnTo>
-                <a:close/>
-                <a:lnTo>
-                  <a:pt x="728912" y="636028"/>
-                </a:lnTo>
-                <a:close/>
-                <a:lnTo>
-                  <a:pt x="732732" y="633862"/>
-                </a:lnTo>
-                <a:close/>
-                <a:lnTo>
-                  <a:pt x="736551" y="631704"/>
-                </a:lnTo>
-                <a:close/>
-                <a:lnTo>
-                  <a:pt x="740371" y="629552"/>
-                </a:lnTo>
-                <a:close/>
-                <a:lnTo>
-                  <a:pt x="744192" y="627408"/>
-                </a:lnTo>
-                <a:close/>
-                <a:lnTo>
-                  <a:pt x="748012" y="625271"/>
-                </a:lnTo>
-                <a:close/>
-                <a:lnTo>
-                  <a:pt x="751832" y="623141"/>
-                </a:lnTo>
-                <a:close/>
-                <a:lnTo>
-                  <a:pt x="755651" y="621018"/>
-                </a:lnTo>
-                <a:close/>
-                <a:lnTo>
-                  <a:pt x="759470" y="618901"/>
-                </a:lnTo>
-                <a:close/>
-                <a:lnTo>
-                  <a:pt x="763288" y="616791"/>
-                </a:lnTo>
-                <a:close/>
-                <a:lnTo>
-                  <a:pt x="767105" y="614688"/>
-                </a:lnTo>
-                <a:close/>
-                <a:lnTo>
-                  <a:pt x="770921" y="612592"/>
-                </a:lnTo>
-                <a:close/>
-                <a:lnTo>
-                  <a:pt x="774737" y="610502"/>
-                </a:lnTo>
-                <a:close/>
-                <a:lnTo>
-                  <a:pt x="778552" y="608420"/>
-                </a:lnTo>
-                <a:close/>
-                <a:lnTo>
-                  <a:pt x="782367" y="606344"/>
-                </a:lnTo>
-                <a:close/>
-                <a:lnTo>
-                  <a:pt x="786181" y="604275"/>
-                </a:lnTo>
-                <a:close/>
-                <a:lnTo>
-                  <a:pt x="789994" y="602213"/>
-                </a:lnTo>
-                <a:close/>
-                <a:lnTo>
-                  <a:pt x="793808" y="600158"/>
-                </a:lnTo>
-                <a:close/>
-                <a:lnTo>
-                  <a:pt x="797621" y="598110"/>
-                </a:lnTo>
-                <a:close/>
-                <a:lnTo>
-                  <a:pt x="801435" y="596069"/>
-                </a:lnTo>
-                <a:close/>
-                <a:lnTo>
-                  <a:pt x="805248" y="594036"/>
-                </a:lnTo>
-                <a:close/>
-                <a:lnTo>
-                  <a:pt x="809061" y="592009"/>
-                </a:lnTo>
-                <a:close/>
-                <a:lnTo>
-                  <a:pt x="812875" y="589990"/>
-                </a:lnTo>
-                <a:close/>
-                <a:lnTo>
-                  <a:pt x="816689" y="587977"/>
-                </a:lnTo>
-                <a:close/>
-                <a:lnTo>
-                  <a:pt x="820504" y="585970"/>
-                </a:lnTo>
-                <a:close/>
-                <a:lnTo>
-                  <a:pt x="824318" y="583971"/>
-                </a:lnTo>
-                <a:close/>
-                <a:lnTo>
-                  <a:pt x="828134" y="581977"/>
-                </a:lnTo>
-                <a:close/>
-                <a:lnTo>
-                  <a:pt x="831950" y="579990"/>
-                </a:lnTo>
-                <a:close/>
-                <a:lnTo>
-                  <a:pt x="835767" y="578009"/>
-                </a:lnTo>
-                <a:close/>
-                <a:lnTo>
-                  <a:pt x="839585" y="576034"/>
-                </a:lnTo>
-                <a:close/>
-                <a:lnTo>
-                  <a:pt x="843403" y="574065"/>
-                </a:lnTo>
-                <a:close/>
-                <a:lnTo>
-                  <a:pt x="847223" y="572101"/>
-                </a:lnTo>
-                <a:close/>
-                <a:lnTo>
-                  <a:pt x="851042" y="570144"/>
-                </a:lnTo>
-                <a:close/>
-                <a:lnTo>
-                  <a:pt x="854862" y="568191"/>
-                </a:lnTo>
-                <a:close/>
-                <a:lnTo>
-                  <a:pt x="858683" y="566245"/>
-                </a:lnTo>
-                <a:close/>
-                <a:lnTo>
-                  <a:pt x="862503" y="564304"/>
-                </a:lnTo>
-                <a:close/>
-                <a:lnTo>
-                  <a:pt x="866323" y="562368"/>
-                </a:lnTo>
-                <a:close/>
-                <a:lnTo>
-                  <a:pt x="870142" y="560437"/>
-                </a:lnTo>
-                <a:close/>
-                <a:lnTo>
-                  <a:pt x="873961" y="558511"/>
-                </a:lnTo>
-                <a:close/>
-                <a:lnTo>
-                  <a:pt x="877779" y="556591"/>
-                </a:lnTo>
-                <a:close/>
-                <a:lnTo>
-                  <a:pt x="881596" y="554675"/>
-                </a:lnTo>
-                <a:close/>
-                <a:lnTo>
-                  <a:pt x="885412" y="552765"/>
-                </a:lnTo>
-                <a:close/>
-                <a:lnTo>
-                  <a:pt x="889228" y="550859"/>
-                </a:lnTo>
-                <a:close/>
-                <a:lnTo>
-                  <a:pt x="893043" y="548958"/>
-                </a:lnTo>
-                <a:close/>
-                <a:lnTo>
-                  <a:pt x="896857" y="547062"/>
-                </a:lnTo>
-                <a:close/>
-                <a:lnTo>
-                  <a:pt x="900671" y="545170"/>
-                </a:lnTo>
-                <a:close/>
-                <a:lnTo>
-                  <a:pt x="904485" y="543283"/>
-                </a:lnTo>
-                <a:close/>
-                <a:lnTo>
-                  <a:pt x="908299" y="541401"/>
-                </a:lnTo>
-                <a:close/>
-                <a:lnTo>
-                  <a:pt x="912112" y="539523"/>
-                </a:lnTo>
-                <a:close/>
-                <a:lnTo>
-                  <a:pt x="915925" y="537650"/>
-                </a:lnTo>
-                <a:close/>
-                <a:lnTo>
-                  <a:pt x="919739" y="535781"/>
-                </a:lnTo>
-                <a:close/>
-                <a:lnTo>
-                  <a:pt x="923552" y="533916"/>
-                </a:lnTo>
-                <a:close/>
-                <a:lnTo>
-                  <a:pt x="927366" y="532056"/>
-                </a:lnTo>
-                <a:close/>
-                <a:lnTo>
-                  <a:pt x="931180" y="530201"/>
-                </a:lnTo>
-                <a:close/>
-                <a:lnTo>
-                  <a:pt x="934994" y="528350"/>
-                </a:lnTo>
-                <a:close/>
-                <a:lnTo>
-                  <a:pt x="938809" y="526504"/>
-                </a:lnTo>
-                <a:close/>
-                <a:lnTo>
-                  <a:pt x="942625" y="524663"/>
-                </a:lnTo>
-                <a:close/>
-                <a:lnTo>
-                  <a:pt x="946441" y="522826"/>
-                </a:lnTo>
-                <a:close/>
-                <a:lnTo>
-                  <a:pt x="950258" y="520994"/>
-                </a:lnTo>
-                <a:close/>
-                <a:lnTo>
-                  <a:pt x="954076" y="519167"/>
-                </a:lnTo>
-                <a:close/>
-                <a:lnTo>
-                  <a:pt x="957894" y="517344"/>
-                </a:lnTo>
-                <a:close/>
-                <a:lnTo>
-                  <a:pt x="961714" y="515526"/>
-                </a:lnTo>
-                <a:close/>
-                <a:lnTo>
-                  <a:pt x="965533" y="513713"/>
-                </a:lnTo>
-                <a:close/>
-                <a:lnTo>
-                  <a:pt x="969353" y="511904"/>
-                </a:lnTo>
-                <a:close/>
-                <a:lnTo>
-                  <a:pt x="973174" y="510100"/>
-                </a:lnTo>
-                <a:close/>
-                <a:lnTo>
-                  <a:pt x="976994" y="508300"/>
-                </a:lnTo>
-                <a:close/>
-                <a:lnTo>
-                  <a:pt x="980813" y="506504"/>
-                </a:lnTo>
-                <a:close/>
-                <a:lnTo>
-                  <a:pt x="984633" y="504713"/>
-                </a:lnTo>
-                <a:close/>
-                <a:lnTo>
-                  <a:pt x="988452" y="502925"/>
-                </a:lnTo>
-                <a:close/>
-                <a:lnTo>
-                  <a:pt x="992270" y="501141"/>
-                </a:lnTo>
-                <a:close/>
-                <a:lnTo>
-                  <a:pt x="996087" y="499362"/>
-                </a:lnTo>
-                <a:close/>
-                <a:lnTo>
-                  <a:pt x="999903" y="497586"/>
-                </a:lnTo>
-                <a:close/>
-                <a:lnTo>
-                  <a:pt x="1003719" y="495814"/>
-                </a:lnTo>
-                <a:close/>
-                <a:lnTo>
-                  <a:pt x="1007534" y="494047"/>
-                </a:lnTo>
-                <a:close/>
-                <a:lnTo>
-                  <a:pt x="1011348" y="492283"/>
-                </a:lnTo>
-                <a:close/>
-                <a:lnTo>
-                  <a:pt x="1015162" y="490524"/>
-                </a:lnTo>
-                <a:close/>
-                <a:lnTo>
-                  <a:pt x="1018976" y="488768"/>
-                </a:lnTo>
-                <a:close/>
-                <a:lnTo>
-                  <a:pt x="1022789" y="487017"/>
-                </a:lnTo>
-                <a:close/>
-                <a:lnTo>
-                  <a:pt x="1026603" y="485271"/>
-                </a:lnTo>
-                <a:close/>
-                <a:lnTo>
-                  <a:pt x="1030416" y="483528"/>
-                </a:lnTo>
-                <a:close/>
-                <a:lnTo>
-                  <a:pt x="1034229" y="481790"/>
-                </a:lnTo>
-                <a:close/>
-                <a:lnTo>
-                  <a:pt x="1038043" y="480055"/>
-                </a:lnTo>
-                <a:close/>
-                <a:lnTo>
-                  <a:pt x="1041857" y="478325"/>
-                </a:lnTo>
-                <a:close/>
-                <a:lnTo>
-                  <a:pt x="1045671" y="476600"/>
-                </a:lnTo>
-                <a:close/>
-                <a:lnTo>
-                  <a:pt x="1049485" y="474878"/>
-                </a:lnTo>
-                <a:close/>
-                <a:lnTo>
-                  <a:pt x="1053300" y="473160"/>
-                </a:lnTo>
-                <a:close/>
-                <a:lnTo>
-                  <a:pt x="1057115" y="471446"/>
-                </a:lnTo>
-                <a:close/>
-                <a:lnTo>
-                  <a:pt x="1060932" y="469736"/>
-                </a:lnTo>
-                <a:close/>
-                <a:lnTo>
-                  <a:pt x="1064749" y="468029"/>
-                </a:lnTo>
-                <a:close/>
-                <a:lnTo>
-                  <a:pt x="1068567" y="466327"/>
-                </a:lnTo>
-                <a:close/>
-                <a:lnTo>
-                  <a:pt x="1072385" y="464628"/>
-                </a:lnTo>
-                <a:close/>
-                <a:lnTo>
-                  <a:pt x="1076205" y="462933"/>
-                </a:lnTo>
-                <a:close/>
-                <a:lnTo>
-                  <a:pt x="1080024" y="461241"/>
-                </a:lnTo>
-                <a:close/>
-                <a:lnTo>
-                  <a:pt x="1083844" y="459553"/>
-                </a:lnTo>
-                <a:close/>
-                <a:lnTo>
-                  <a:pt x="1087665" y="457868"/>
-                </a:lnTo>
-                <a:close/>
-                <a:lnTo>
-                  <a:pt x="1091485" y="456186"/>
-                </a:lnTo>
-                <a:close/>
-                <a:lnTo>
-                  <a:pt x="1095304" y="454507"/>
-                </a:lnTo>
-                <a:close/>
-                <a:lnTo>
-                  <a:pt x="1099124" y="452832"/>
-                </a:lnTo>
-                <a:close/>
-                <a:lnTo>
-                  <a:pt x="1102943" y="451159"/>
-                </a:lnTo>
-                <a:close/>
-                <a:lnTo>
-                  <a:pt x="1106760" y="449489"/>
-                </a:lnTo>
-                <a:close/>
-                <a:lnTo>
-                  <a:pt x="1110577" y="447822"/>
-                </a:lnTo>
-                <a:close/>
-                <a:lnTo>
-                  <a:pt x="1114394" y="446159"/>
-                </a:lnTo>
-                <a:close/>
-                <a:lnTo>
-                  <a:pt x="1118209" y="444498"/>
-                </a:lnTo>
-                <a:close/>
-                <a:lnTo>
-                  <a:pt x="1122024" y="442841"/>
-                </a:lnTo>
-                <a:close/>
-                <a:lnTo>
-                  <a:pt x="1125839" y="441187"/>
-                </a:lnTo>
-                <a:close/>
-                <a:lnTo>
-                  <a:pt x="1129653" y="439537"/>
-                </a:lnTo>
-                <a:close/>
-                <a:lnTo>
-                  <a:pt x="1133466" y="437890"/>
-                </a:lnTo>
-                <a:close/>
-                <a:lnTo>
-                  <a:pt x="1137280" y="436248"/>
-                </a:lnTo>
-                <a:close/>
-                <a:lnTo>
-                  <a:pt x="1141093" y="434609"/>
-                </a:lnTo>
-                <a:close/>
-                <a:lnTo>
-                  <a:pt x="1144907" y="432974"/>
-                </a:lnTo>
-                <a:close/>
-                <a:lnTo>
-                  <a:pt x="1148720" y="431344"/>
-                </a:lnTo>
-                <a:close/>
-                <a:lnTo>
-                  <a:pt x="1152534" y="429716"/>
-                </a:lnTo>
-                <a:close/>
-                <a:lnTo>
-                  <a:pt x="1156347" y="428092"/>
-                </a:lnTo>
-                <a:close/>
-                <a:lnTo>
-                  <a:pt x="1160161" y="426471"/>
-                </a:lnTo>
-                <a:close/>
-                <a:lnTo>
-                  <a:pt x="1163976" y="424851"/>
-                </a:lnTo>
-                <a:close/>
-                <a:lnTo>
-                  <a:pt x="1167791" y="423234"/>
-                </a:lnTo>
-                <a:close/>
-                <a:lnTo>
-                  <a:pt x="1171606" y="421617"/>
-                </a:lnTo>
-                <a:close/>
-                <a:lnTo>
-                  <a:pt x="1175423" y="420002"/>
-                </a:lnTo>
-                <a:close/>
-                <a:lnTo>
-                  <a:pt x="1179240" y="418387"/>
-                </a:lnTo>
-                <a:close/>
-                <a:lnTo>
-                  <a:pt x="1183057" y="416772"/>
-                </a:lnTo>
-                <a:close/>
-                <a:lnTo>
-                  <a:pt x="1186876" y="415157"/>
-                </a:lnTo>
-                <a:close/>
-                <a:lnTo>
-                  <a:pt x="1190696" y="413545"/>
-                </a:lnTo>
-                <a:close/>
-                <a:lnTo>
-                  <a:pt x="1194515" y="411936"/>
-                </a:lnTo>
-                <a:close/>
-                <a:lnTo>
-                  <a:pt x="1198335" y="410333"/>
-                </a:lnTo>
-                <a:close/>
-                <a:lnTo>
-                  <a:pt x="1202156" y="408737"/>
-                </a:lnTo>
-                <a:close/>
-                <a:lnTo>
-                  <a:pt x="1205976" y="407150"/>
-                </a:lnTo>
-                <a:close/>
-                <a:lnTo>
-                  <a:pt x="1209795" y="405574"/>
-                </a:lnTo>
-                <a:close/>
-                <a:lnTo>
-                  <a:pt x="1213615" y="404010"/>
-                </a:lnTo>
-                <a:close/>
-                <a:lnTo>
-                  <a:pt x="1217433" y="402460"/>
-                </a:lnTo>
-                <a:close/>
-                <a:lnTo>
-                  <a:pt x="1221251" y="400925"/>
-                </a:lnTo>
-                <a:close/>
-                <a:lnTo>
-                  <a:pt x="1225068" y="399402"/>
-                </a:lnTo>
-                <a:close/>
-                <a:lnTo>
-                  <a:pt x="1228885" y="397887"/>
-                </a:lnTo>
-                <a:close/>
-                <a:lnTo>
-                  <a:pt x="1232700" y="396372"/>
-                </a:lnTo>
-                <a:close/>
-                <a:lnTo>
-                  <a:pt x="1236515" y="394852"/>
-                </a:lnTo>
-                <a:close/>
-                <a:lnTo>
-                  <a:pt x="1240329" y="393319"/>
-                </a:lnTo>
-                <a:close/>
-                <a:lnTo>
-                  <a:pt x="1244143" y="391769"/>
-                </a:lnTo>
-                <a:close/>
-                <a:lnTo>
-                  <a:pt x="1247957" y="390195"/>
-                </a:lnTo>
-                <a:close/>
-                <a:lnTo>
-                  <a:pt x="1251771" y="388590"/>
-                </a:lnTo>
-                <a:close/>
-                <a:lnTo>
-                  <a:pt x="1255584" y="386949"/>
-                </a:lnTo>
-                <a:close/>
-                <a:lnTo>
-                  <a:pt x="1259397" y="385265"/>
-                </a:lnTo>
-                <a:close/>
-                <a:lnTo>
-                  <a:pt x="1263211" y="383550"/>
-                </a:lnTo>
-                <a:close/>
-                <a:lnTo>
-                  <a:pt x="1267024" y="381824"/>
-                </a:lnTo>
-                <a:close/>
-                <a:lnTo>
-                  <a:pt x="1270838" y="380110"/>
-                </a:lnTo>
-                <a:close/>
-                <a:lnTo>
-                  <a:pt x="1274652" y="378433"/>
-                </a:lnTo>
-                <a:close/>
-                <a:lnTo>
-                  <a:pt x="1278466" y="376813"/>
-                </a:lnTo>
-                <a:close/>
-                <a:lnTo>
-                  <a:pt x="1282281" y="375275"/>
-                </a:lnTo>
-                <a:close/>
-                <a:lnTo>
-                  <a:pt x="1286097" y="373841"/>
-                </a:lnTo>
-                <a:close/>
-                <a:lnTo>
-                  <a:pt x="1289913" y="372533"/>
-                </a:lnTo>
-                <a:close/>
-                <a:lnTo>
-                  <a:pt x="1293730" y="371375"/>
-                </a:lnTo>
-                <a:close/>
-                <a:lnTo>
-                  <a:pt x="1297548" y="370387"/>
-                </a:lnTo>
-                <a:close/>
-                <a:lnTo>
-                  <a:pt x="1301367" y="369532"/>
-                </a:lnTo>
-                <a:close/>
-                <a:lnTo>
-                  <a:pt x="1305187" y="368727"/>
-                </a:lnTo>
-                <a:close/>
-                <a:lnTo>
-                  <a:pt x="1309006" y="367888"/>
-                </a:lnTo>
-                <a:close/>
-                <a:lnTo>
-                  <a:pt x="1312826" y="366930"/>
-                </a:lnTo>
-                <a:close/>
-                <a:lnTo>
-                  <a:pt x="1316647" y="365770"/>
-                </a:lnTo>
-                <a:close/>
-                <a:lnTo>
-                  <a:pt x="1320467" y="364324"/>
-                </a:lnTo>
-                <a:close/>
-                <a:lnTo>
-                  <a:pt x="1324286" y="362506"/>
-                </a:lnTo>
-                <a:close/>
-                <a:lnTo>
-                  <a:pt x="1328106" y="360232"/>
-                </a:lnTo>
-                <a:close/>
-                <a:lnTo>
-                  <a:pt x="1331924" y="357419"/>
-                </a:lnTo>
-                <a:close/>
-                <a:lnTo>
-                  <a:pt x="1335742" y="353988"/>
-                </a:lnTo>
-                <a:close/>
-                <a:lnTo>
-                  <a:pt x="1339559" y="349978"/>
-                </a:lnTo>
-                <a:close/>
-                <a:lnTo>
-                  <a:pt x="1343375" y="345515"/>
-                </a:lnTo>
-                <a:close/>
-                <a:lnTo>
-                  <a:pt x="1347191" y="340732"/>
-                </a:lnTo>
-                <a:close/>
-                <a:lnTo>
-                  <a:pt x="1351006" y="335759"/>
-                </a:lnTo>
-                <a:close/>
-                <a:lnTo>
-                  <a:pt x="1354820" y="330728"/>
-                </a:lnTo>
-                <a:close/>
-                <a:lnTo>
-                  <a:pt x="1358634" y="325769"/>
-                </a:lnTo>
-                <a:close/>
-                <a:lnTo>
-                  <a:pt x="1362448" y="321014"/>
-                </a:lnTo>
-                <a:close/>
-                <a:lnTo>
-                  <a:pt x="1366261" y="316593"/>
-                </a:lnTo>
-                <a:close/>
-                <a:lnTo>
-                  <a:pt x="1370075" y="312638"/>
-                </a:lnTo>
-                <a:close/>
-                <a:lnTo>
-                  <a:pt x="1373888" y="309272"/>
-                </a:lnTo>
-                <a:close/>
-                <a:lnTo>
-                  <a:pt x="1377701" y="306504"/>
-                </a:lnTo>
-                <a:close/>
-                <a:lnTo>
-                  <a:pt x="1381515" y="304253"/>
-                </a:lnTo>
-                <a:close/>
-                <a:lnTo>
-                  <a:pt x="1385329" y="302438"/>
-                </a:lnTo>
-                <a:close/>
-                <a:lnTo>
-                  <a:pt x="1389143" y="300977"/>
-                </a:lnTo>
-                <a:close/>
-                <a:lnTo>
-                  <a:pt x="1392957" y="299787"/>
-                </a:lnTo>
-                <a:close/>
-                <a:lnTo>
-                  <a:pt x="1396772" y="298787"/>
-                </a:lnTo>
-                <a:close/>
-                <a:lnTo>
-                  <a:pt x="1400588" y="297894"/>
-                </a:lnTo>
-                <a:close/>
-                <a:lnTo>
-                  <a:pt x="1404404" y="297027"/>
-                </a:lnTo>
-                <a:close/>
-                <a:lnTo>
-                  <a:pt x="1408221" y="296103"/>
-                </a:lnTo>
-                <a:close/>
-                <a:lnTo>
-                  <a:pt x="1412039" y="295044"/>
-                </a:lnTo>
-                <a:close/>
-                <a:lnTo>
-                  <a:pt x="1415858" y="293830"/>
-                </a:lnTo>
-                <a:close/>
-                <a:lnTo>
-                  <a:pt x="1419677" y="292481"/>
-                </a:lnTo>
-                <a:close/>
-                <a:lnTo>
-                  <a:pt x="1423497" y="291018"/>
-                </a:lnTo>
-                <a:close/>
-                <a:lnTo>
-                  <a:pt x="1427317" y="289465"/>
-                </a:lnTo>
-                <a:close/>
-                <a:lnTo>
-                  <a:pt x="1431138" y="287842"/>
-                </a:lnTo>
-                <a:close/>
-                <a:lnTo>
-                  <a:pt x="1434958" y="286173"/>
-                </a:lnTo>
-                <a:close/>
-                <a:lnTo>
-                  <a:pt x="1438777" y="284478"/>
-                </a:lnTo>
-                <a:close/>
-                <a:lnTo>
-                  <a:pt x="1442597" y="282779"/>
-                </a:lnTo>
-                <a:close/>
-                <a:lnTo>
-                  <a:pt x="1446415" y="281099"/>
-                </a:lnTo>
-                <a:close/>
-                <a:lnTo>
-                  <a:pt x="1450233" y="279458"/>
-                </a:lnTo>
-                <a:close/>
-                <a:lnTo>
-                  <a:pt x="1454050" y="277862"/>
-                </a:lnTo>
-                <a:close/>
-                <a:lnTo>
-                  <a:pt x="1457866" y="276304"/>
-                </a:lnTo>
-                <a:close/>
-                <a:lnTo>
-                  <a:pt x="1461682" y="274780"/>
-                </a:lnTo>
-                <a:close/>
-                <a:lnTo>
-                  <a:pt x="1465496" y="273283"/>
-                </a:lnTo>
-                <a:close/>
-                <a:lnTo>
-                  <a:pt x="1469311" y="271807"/>
-                </a:lnTo>
-                <a:close/>
-                <a:lnTo>
-                  <a:pt x="1473125" y="270347"/>
-                </a:lnTo>
-                <a:close/>
-                <a:lnTo>
-                  <a:pt x="1476939" y="268897"/>
-                </a:lnTo>
-                <a:close/>
-                <a:lnTo>
-                  <a:pt x="1480752" y="267451"/>
-                </a:lnTo>
-                <a:close/>
-                <a:lnTo>
-                  <a:pt x="1484565" y="266004"/>
-                </a:lnTo>
-                <a:close/>
-                <a:lnTo>
-                  <a:pt x="1488379" y="264549"/>
-                </a:lnTo>
-                <a:close/>
-                <a:lnTo>
-                  <a:pt x="1492192" y="263086"/>
-                </a:lnTo>
-                <a:close/>
-                <a:lnTo>
-                  <a:pt x="1496006" y="261616"/>
-                </a:lnTo>
-                <a:close/>
-                <a:lnTo>
-                  <a:pt x="1499819" y="260141"/>
-                </a:lnTo>
-                <a:close/>
-                <a:lnTo>
-                  <a:pt x="1503633" y="258661"/>
-                </a:lnTo>
-                <a:close/>
-                <a:lnTo>
-                  <a:pt x="1507448" y="257180"/>
-                </a:lnTo>
-                <a:close/>
-                <a:lnTo>
-                  <a:pt x="1511263" y="255698"/>
-                </a:lnTo>
-                <a:close/>
-                <a:lnTo>
-                  <a:pt x="1515079" y="254217"/>
-                </a:lnTo>
-                <a:close/>
-                <a:lnTo>
-                  <a:pt x="1518895" y="252739"/>
-                </a:lnTo>
-                <a:close/>
-                <a:lnTo>
-                  <a:pt x="1522712" y="251264"/>
-                </a:lnTo>
-                <a:close/>
-                <a:lnTo>
-                  <a:pt x="1526530" y="249795"/>
-                </a:lnTo>
-                <a:close/>
-                <a:lnTo>
-                  <a:pt x="1530349" y="248332"/>
-                </a:lnTo>
-                <a:close/>
-                <a:lnTo>
-                  <a:pt x="1534168" y="246875"/>
-                </a:lnTo>
-                <a:close/>
-                <a:lnTo>
-                  <a:pt x="1537988" y="245422"/>
-                </a:lnTo>
-                <a:close/>
-                <a:lnTo>
-                  <a:pt x="1541808" y="243974"/>
-                </a:lnTo>
-                <a:close/>
-                <a:lnTo>
-                  <a:pt x="1545629" y="242529"/>
-                </a:lnTo>
-                <a:close/>
-                <a:lnTo>
-                  <a:pt x="1549449" y="241088"/>
-                </a:lnTo>
-                <a:close/>
-                <a:lnTo>
-                  <a:pt x="1553268" y="239650"/>
-                </a:lnTo>
-                <a:close/>
-                <a:lnTo>
-                  <a:pt x="1557088" y="238214"/>
-                </a:lnTo>
-                <a:close/>
-                <a:lnTo>
-                  <a:pt x="1560906" y="236780"/>
-                </a:lnTo>
-                <a:close/>
-                <a:lnTo>
-                  <a:pt x="1564724" y="235348"/>
-                </a:lnTo>
-                <a:close/>
-                <a:lnTo>
-                  <a:pt x="1568541" y="233916"/>
-                </a:lnTo>
-                <a:close/>
-                <a:lnTo>
-                  <a:pt x="1572357" y="232487"/>
-                </a:lnTo>
-                <a:close/>
-                <a:lnTo>
-                  <a:pt x="1576172" y="231059"/>
-                </a:lnTo>
-                <a:close/>
-                <a:lnTo>
-                  <a:pt x="1579987" y="229632"/>
-                </a:lnTo>
-                <a:close/>
-                <a:lnTo>
-                  <a:pt x="1583802" y="228208"/>
-                </a:lnTo>
-                <a:close/>
-                <a:lnTo>
-                  <a:pt x="1587616" y="226786"/>
-                </a:lnTo>
-                <a:close/>
-                <a:lnTo>
-                  <a:pt x="1591429" y="225365"/>
-                </a:lnTo>
-                <a:close/>
-                <a:lnTo>
-                  <a:pt x="1595243" y="223947"/>
-                </a:lnTo>
-                <a:close/>
-                <a:lnTo>
-                  <a:pt x="1599056" y="222532"/>
-                </a:lnTo>
-                <a:close/>
-                <a:lnTo>
-                  <a:pt x="1602869" y="221119"/>
-                </a:lnTo>
-                <a:close/>
-                <a:lnTo>
-                  <a:pt x="1606683" y="219708"/>
-                </a:lnTo>
-                <a:close/>
-                <a:lnTo>
-                  <a:pt x="1610496" y="218300"/>
-                </a:lnTo>
-                <a:close/>
-                <a:lnTo>
-                  <a:pt x="1614310" y="216895"/>
-                </a:lnTo>
-                <a:close/>
-                <a:lnTo>
-                  <a:pt x="1618124" y="215491"/>
-                </a:lnTo>
-                <a:close/>
-                <a:lnTo>
-                  <a:pt x="1621939" y="214091"/>
-                </a:lnTo>
-                <a:close/>
-                <a:lnTo>
-                  <a:pt x="1625754" y="212692"/>
-                </a:lnTo>
-                <a:close/>
-                <a:lnTo>
-                  <a:pt x="1629569" y="211296"/>
-                </a:lnTo>
-                <a:close/>
-                <a:lnTo>
-                  <a:pt x="1633386" y="209903"/>
-                </a:lnTo>
-                <a:close/>
-                <a:lnTo>
-                  <a:pt x="1637203" y="208511"/>
-                </a:lnTo>
-                <a:close/>
-                <a:lnTo>
-                  <a:pt x="1641021" y="207122"/>
-                </a:lnTo>
-                <a:close/>
-                <a:lnTo>
-                  <a:pt x="1644840" y="205734"/>
-                </a:lnTo>
-                <a:close/>
-                <a:lnTo>
-                  <a:pt x="1648659" y="204349"/>
-                </a:lnTo>
-                <a:close/>
-                <a:lnTo>
-                  <a:pt x="1652479" y="202967"/>
-                </a:lnTo>
-                <a:close/>
-                <a:lnTo>
-                  <a:pt x="1656299" y="201586"/>
-                </a:lnTo>
-                <a:close/>
-                <a:lnTo>
-                  <a:pt x="1660120" y="200208"/>
-                </a:lnTo>
-                <a:close/>
-                <a:lnTo>
-                  <a:pt x="1663940" y="198832"/>
-                </a:lnTo>
-                <a:close/>
-                <a:lnTo>
-                  <a:pt x="1667759" y="197459"/>
-                </a:lnTo>
-                <a:close/>
-                <a:lnTo>
-                  <a:pt x="1671579" y="196088"/>
-                </a:lnTo>
-                <a:close/>
-                <a:lnTo>
-                  <a:pt x="1675397" y="194720"/>
-                </a:lnTo>
-                <a:close/>
-                <a:lnTo>
-                  <a:pt x="1679215" y="193354"/>
-                </a:lnTo>
-                <a:close/>
-                <a:lnTo>
-                  <a:pt x="1683032" y="191991"/>
-                </a:lnTo>
-                <a:close/>
-                <a:lnTo>
-                  <a:pt x="1686848" y="190630"/>
-                </a:lnTo>
-                <a:close/>
-                <a:lnTo>
-                  <a:pt x="1690663" y="189271"/>
-                </a:lnTo>
-                <a:close/>
-                <a:lnTo>
-                  <a:pt x="1694478" y="187914"/>
-                </a:lnTo>
-                <a:close/>
-                <a:lnTo>
-                  <a:pt x="1698292" y="186559"/>
-                </a:lnTo>
-                <a:close/>
-                <a:lnTo>
-                  <a:pt x="1702106" y="185207"/>
-                </a:lnTo>
-                <a:close/>
-                <a:lnTo>
-                  <a:pt x="1705920" y="183856"/>
-                </a:lnTo>
-                <a:close/>
-                <a:lnTo>
-                  <a:pt x="1709733" y="182507"/>
-                </a:lnTo>
-                <a:close/>
-                <a:lnTo>
-                  <a:pt x="1713547" y="181159"/>
-                </a:lnTo>
-                <a:close/>
-                <a:lnTo>
-                  <a:pt x="1717360" y="179813"/>
-                </a:lnTo>
-                <a:close/>
-                <a:lnTo>
-                  <a:pt x="1721173" y="178468"/>
-                </a:lnTo>
-                <a:close/>
-                <a:lnTo>
-                  <a:pt x="1724987" y="177125"/>
-                </a:lnTo>
-                <a:close/>
-                <a:lnTo>
-                  <a:pt x="1728801" y="175784"/>
-                </a:lnTo>
-                <a:close/>
-                <a:lnTo>
-                  <a:pt x="1732615" y="174445"/>
-                </a:lnTo>
-                <a:close/>
-                <a:lnTo>
-                  <a:pt x="1736429" y="173108"/>
-                </a:lnTo>
-                <a:close/>
-                <a:lnTo>
-                  <a:pt x="1740245" y="171772"/>
-                </a:lnTo>
-                <a:close/>
-                <a:lnTo>
-                  <a:pt x="1744060" y="170440"/>
-                </a:lnTo>
-                <a:close/>
-                <a:lnTo>
-                  <a:pt x="1747877" y="169109"/>
-                </a:lnTo>
-                <a:close/>
-                <a:lnTo>
-                  <a:pt x="1751694" y="167781"/>
-                </a:lnTo>
-                <a:close/>
-                <a:lnTo>
-                  <a:pt x="1755512" y="166456"/>
-                </a:lnTo>
-                <a:close/>
-                <a:lnTo>
-                  <a:pt x="1759331" y="165134"/>
-                </a:lnTo>
-                <a:close/>
-                <a:lnTo>
-                  <a:pt x="1763150" y="163813"/>
-                </a:lnTo>
-                <a:close/>
-                <a:lnTo>
-                  <a:pt x="1766970" y="162496"/>
-                </a:lnTo>
-                <a:close/>
-                <a:lnTo>
-                  <a:pt x="1770790" y="161180"/>
-                </a:lnTo>
-                <a:close/>
-                <a:lnTo>
-                  <a:pt x="1774611" y="159867"/>
-                </a:lnTo>
-                <a:close/>
-                <a:lnTo>
-                  <a:pt x="1778431" y="158556"/>
-                </a:lnTo>
-                <a:close/>
-                <a:lnTo>
-                  <a:pt x="1782250" y="157246"/>
-                </a:lnTo>
-                <a:close/>
-                <a:lnTo>
-                  <a:pt x="1786070" y="155939"/>
-                </a:lnTo>
-                <a:close/>
-                <a:lnTo>
-                  <a:pt x="1789888" y="154633"/>
-                </a:lnTo>
-                <a:close/>
-                <a:lnTo>
-                  <a:pt x="1793706" y="153329"/>
-                </a:lnTo>
-                <a:close/>
-                <a:lnTo>
-                  <a:pt x="1797522" y="152026"/>
-                </a:lnTo>
-                <a:close/>
-                <a:lnTo>
-                  <a:pt x="1801338" y="150726"/>
-                </a:lnTo>
-                <a:close/>
-                <a:lnTo>
-                  <a:pt x="1805154" y="149427"/>
-                </a:lnTo>
-                <a:close/>
-                <a:lnTo>
-                  <a:pt x="1808969" y="148129"/>
-                </a:lnTo>
-                <a:close/>
-                <a:lnTo>
-                  <a:pt x="1812783" y="146834"/>
-                </a:lnTo>
-                <a:close/>
-                <a:lnTo>
-                  <a:pt x="1816597" y="145540"/>
-                </a:lnTo>
-                <a:close/>
-                <a:lnTo>
-                  <a:pt x="1820411" y="144248"/>
-                </a:lnTo>
-                <a:close/>
-                <a:lnTo>
-                  <a:pt x="1824224" y="142957"/>
-                </a:lnTo>
-                <a:close/>
-                <a:lnTo>
-                  <a:pt x="1828037" y="141669"/>
-                </a:lnTo>
-                <a:close/>
-                <a:lnTo>
-                  <a:pt x="1831851" y="140383"/>
-                </a:lnTo>
-                <a:close/>
-                <a:lnTo>
-                  <a:pt x="1835664" y="139098"/>
-                </a:lnTo>
-                <a:close/>
-                <a:lnTo>
-                  <a:pt x="1839478" y="137815"/>
-                </a:lnTo>
-                <a:close/>
-                <a:lnTo>
-                  <a:pt x="1843291" y="136535"/>
-                </a:lnTo>
-                <a:close/>
-                <a:lnTo>
-                  <a:pt x="1847106" y="135256"/>
-                </a:lnTo>
-                <a:close/>
-                <a:lnTo>
-                  <a:pt x="1850920" y="133979"/>
-                </a:lnTo>
-                <a:close/>
-                <a:lnTo>
-                  <a:pt x="1854735" y="132703"/>
-                </a:lnTo>
-                <a:close/>
-                <a:lnTo>
-                  <a:pt x="1858551" y="131430"/>
-                </a:lnTo>
-                <a:close/>
-                <a:lnTo>
-                  <a:pt x="1862368" y="130158"/>
-                </a:lnTo>
-                <a:close/>
-                <a:lnTo>
-                  <a:pt x="1866185" y="128888"/>
-                </a:lnTo>
-                <a:close/>
-                <a:lnTo>
-                  <a:pt x="1870003" y="127620"/>
-                </a:lnTo>
-                <a:close/>
-                <a:lnTo>
-                  <a:pt x="1873822" y="126354"/>
-                </a:lnTo>
-                <a:close/>
-                <a:lnTo>
-                  <a:pt x="1877641" y="125089"/>
-                </a:lnTo>
-                <a:close/>
-                <a:lnTo>
-                  <a:pt x="1881461" y="123827"/>
-                </a:lnTo>
-                <a:close/>
-                <a:lnTo>
-                  <a:pt x="1885281" y="122566"/>
-                </a:lnTo>
-                <a:close/>
-                <a:lnTo>
-                  <a:pt x="1889102" y="121307"/>
-                </a:lnTo>
-                <a:close/>
-                <a:lnTo>
-                  <a:pt x="1892922" y="120050"/>
-                </a:lnTo>
-                <a:close/>
-                <a:lnTo>
-                  <a:pt x="1896741" y="118795"/>
-                </a:lnTo>
-                <a:close/>
-                <a:lnTo>
-                  <a:pt x="1900560" y="117542"/>
-                </a:lnTo>
-                <a:close/>
-                <a:lnTo>
-                  <a:pt x="1904379" y="116291"/>
-                </a:lnTo>
-                <a:close/>
-                <a:lnTo>
-                  <a:pt x="1908197" y="115042"/>
-                </a:lnTo>
-                <a:close/>
-                <a:lnTo>
-                  <a:pt x="1912013" y="113795"/>
-                </a:lnTo>
-                <a:close/>
-                <a:lnTo>
-                  <a:pt x="1915829" y="112550"/>
-                </a:lnTo>
-                <a:close/>
-                <a:lnTo>
-                  <a:pt x="1919645" y="111306"/>
-                </a:lnTo>
-                <a:close/>
-                <a:lnTo>
-                  <a:pt x="1923459" y="110065"/>
-                </a:lnTo>
-                <a:close/>
-                <a:lnTo>
-                  <a:pt x="1927274" y="108824"/>
-                </a:lnTo>
-                <a:close/>
-                <a:lnTo>
-                  <a:pt x="1931088" y="107586"/>
-                </a:lnTo>
-                <a:close/>
-                <a:lnTo>
-                  <a:pt x="1934901" y="106348"/>
-                </a:lnTo>
-                <a:close/>
-                <a:lnTo>
-                  <a:pt x="1938715" y="105112"/>
-                </a:lnTo>
-                <a:close/>
-                <a:lnTo>
-                  <a:pt x="1942528" y="103878"/>
-                </a:lnTo>
-                <a:close/>
-                <a:lnTo>
-                  <a:pt x="1946341" y="102644"/>
-                </a:lnTo>
-                <a:close/>
-                <a:lnTo>
-                  <a:pt x="1950155" y="101412"/>
-                </a:lnTo>
-                <a:close/>
-                <a:lnTo>
-                  <a:pt x="1953968" y="100180"/>
-                </a:lnTo>
-                <a:close/>
-                <a:lnTo>
-                  <a:pt x="1957782" y="98950"/>
-                </a:lnTo>
-                <a:close/>
-                <a:lnTo>
-                  <a:pt x="1961596" y="97722"/>
-                </a:lnTo>
-                <a:close/>
-                <a:lnTo>
-                  <a:pt x="1965411" y="96495"/>
-                </a:lnTo>
-                <a:close/>
-                <a:lnTo>
-                  <a:pt x="1969226" y="95269"/>
-                </a:lnTo>
-                <a:close/>
-                <a:lnTo>
-                  <a:pt x="1973042" y="94045"/>
-                </a:lnTo>
-                <a:close/>
-                <a:lnTo>
-                  <a:pt x="1976858" y="92823"/>
-                </a:lnTo>
-                <a:close/>
-                <a:lnTo>
-                  <a:pt x="1980676" y="91602"/>
-                </a:lnTo>
-                <a:close/>
-                <a:lnTo>
-                  <a:pt x="1984494" y="90384"/>
-                </a:lnTo>
-                <a:close/>
-                <a:lnTo>
-                  <a:pt x="1988313" y="89167"/>
-                </a:lnTo>
-                <a:close/>
-                <a:lnTo>
-                  <a:pt x="1992132" y="87952"/>
-                </a:lnTo>
-                <a:close/>
-                <a:lnTo>
-                  <a:pt x="1995952" y="86739"/>
-                </a:lnTo>
-                <a:close/>
-                <a:lnTo>
-                  <a:pt x="1999772" y="85528"/>
-                </a:lnTo>
-                <a:close/>
-                <a:lnTo>
-                  <a:pt x="2003593" y="84320"/>
-                </a:lnTo>
-                <a:close/>
-                <a:lnTo>
-                  <a:pt x="2007413" y="83114"/>
-                </a:lnTo>
-                <a:close/>
-                <a:lnTo>
-                  <a:pt x="2011232" y="81910"/>
-                </a:lnTo>
-                <a:close/>
-                <a:lnTo>
-                  <a:pt x="2015051" y="80708"/>
-                </a:lnTo>
-                <a:close/>
-                <a:lnTo>
-                  <a:pt x="2018870" y="79509"/>
-                </a:lnTo>
-                <a:close/>
-                <a:lnTo>
-                  <a:pt x="2022687" y="78313"/>
-                </a:lnTo>
-                <a:close/>
-                <a:lnTo>
-                  <a:pt x="2026504" y="77119"/>
-                </a:lnTo>
-                <a:close/>
-                <a:lnTo>
-                  <a:pt x="2030320" y="75927"/>
-                </a:lnTo>
-                <a:close/>
-                <a:lnTo>
-                  <a:pt x="2034135" y="74738"/>
-                </a:lnTo>
-                <a:close/>
-                <a:lnTo>
-                  <a:pt x="2037950" y="73551"/>
-                </a:lnTo>
-                <a:close/>
-                <a:lnTo>
-                  <a:pt x="2041764" y="72366"/>
-                </a:lnTo>
-                <a:close/>
-                <a:lnTo>
-                  <a:pt x="2045578" y="71183"/>
-                </a:lnTo>
-                <a:close/>
-                <a:lnTo>
-                  <a:pt x="2049392" y="70002"/>
-                </a:lnTo>
-                <a:close/>
-                <a:lnTo>
-                  <a:pt x="2053205" y="68823"/>
-                </a:lnTo>
-                <a:close/>
-                <a:lnTo>
-                  <a:pt x="2057019" y="67646"/>
-                </a:lnTo>
-                <a:close/>
-                <a:lnTo>
-                  <a:pt x="2060832" y="66470"/>
-                </a:lnTo>
-                <a:close/>
-                <a:lnTo>
-                  <a:pt x="2064645" y="65296"/>
-                </a:lnTo>
-                <a:close/>
-                <a:lnTo>
-                  <a:pt x="2068459" y="64123"/>
-                </a:lnTo>
-                <a:close/>
-                <a:lnTo>
-                  <a:pt x="2072273" y="62952"/>
-                </a:lnTo>
-                <a:close/>
-                <a:lnTo>
-                  <a:pt x="2076087" y="61783"/>
-                </a:lnTo>
-                <a:close/>
-                <a:lnTo>
-                  <a:pt x="2079902" y="60616"/>
-                </a:lnTo>
-                <a:close/>
-                <a:lnTo>
-                  <a:pt x="2083717" y="59451"/>
-                </a:lnTo>
-                <a:close/>
-                <a:lnTo>
-                  <a:pt x="2087533" y="58287"/>
-                </a:lnTo>
-                <a:close/>
-                <a:lnTo>
-                  <a:pt x="2091349" y="57126"/>
-                </a:lnTo>
-                <a:close/>
-                <a:lnTo>
-                  <a:pt x="2095167" y="55966"/>
-                </a:lnTo>
-                <a:close/>
-                <a:lnTo>
-                  <a:pt x="2098985" y="54809"/>
-                </a:lnTo>
-                <a:close/>
-                <a:lnTo>
-                  <a:pt x="2102804" y="53653"/>
-                </a:lnTo>
-                <a:close/>
-                <a:lnTo>
-                  <a:pt x="2106623" y="52499"/>
-                </a:lnTo>
-                <a:close/>
-                <a:lnTo>
-                  <a:pt x="2110443" y="51347"/>
-                </a:lnTo>
-                <a:close/>
-                <a:lnTo>
-                  <a:pt x="2114264" y="50197"/>
-                </a:lnTo>
-                <a:close/>
-                <a:lnTo>
-                  <a:pt x="2118084" y="49049"/>
-                </a:lnTo>
-                <a:close/>
-                <a:lnTo>
-                  <a:pt x="2121904" y="47902"/>
-                </a:lnTo>
-                <a:close/>
-                <a:lnTo>
-                  <a:pt x="2125723" y="46757"/>
-                </a:lnTo>
-                <a:close/>
-                <a:lnTo>
-                  <a:pt x="2129542" y="45613"/>
-                </a:lnTo>
-                <a:close/>
-                <a:lnTo>
-                  <a:pt x="2133361" y="44470"/>
-                </a:lnTo>
-                <a:close/>
-                <a:lnTo>
-                  <a:pt x="2137178" y="43328"/>
-                </a:lnTo>
-                <a:close/>
-                <a:lnTo>
-                  <a:pt x="2140995" y="42188"/>
-                </a:lnTo>
-                <a:close/>
-                <a:lnTo>
-                  <a:pt x="2144811" y="41049"/>
-                </a:lnTo>
-                <a:close/>
-                <a:lnTo>
-                  <a:pt x="2148626" y="39912"/>
-                </a:lnTo>
-                <a:close/>
-                <a:lnTo>
-                  <a:pt x="2152441" y="38775"/>
-                </a:lnTo>
-                <a:close/>
-                <a:lnTo>
-                  <a:pt x="2156255" y="37640"/>
-                </a:lnTo>
-                <a:close/>
-                <a:lnTo>
-                  <a:pt x="2160069" y="36506"/>
-                </a:lnTo>
-                <a:close/>
-                <a:lnTo>
-                  <a:pt x="2163882" y="35373"/>
-                </a:lnTo>
-                <a:close/>
-                <a:lnTo>
-                  <a:pt x="2167696" y="34242"/>
-                </a:lnTo>
-                <a:close/>
-                <a:lnTo>
-                  <a:pt x="2171509" y="33112"/>
-                </a:lnTo>
-                <a:close/>
-                <a:lnTo>
-                  <a:pt x="2175323" y="31983"/>
-                </a:lnTo>
-                <a:close/>
-                <a:lnTo>
-                  <a:pt x="2179136" y="30855"/>
-                </a:lnTo>
-                <a:close/>
-                <a:lnTo>
-                  <a:pt x="2182950" y="29729"/>
-                </a:lnTo>
-                <a:close/>
-                <a:lnTo>
-                  <a:pt x="2186764" y="28604"/>
-                </a:lnTo>
-                <a:close/>
-                <a:lnTo>
-                  <a:pt x="2190578" y="27481"/>
-                </a:lnTo>
-                <a:close/>
-                <a:lnTo>
-                  <a:pt x="2194393" y="26360"/>
-                </a:lnTo>
-                <a:close/>
-                <a:lnTo>
-                  <a:pt x="2198208" y="25240"/>
-                </a:lnTo>
-                <a:close/>
-                <a:lnTo>
-                  <a:pt x="2202024" y="24122"/>
-                </a:lnTo>
-                <a:close/>
-                <a:lnTo>
-                  <a:pt x="2205840" y="23005"/>
-                </a:lnTo>
-                <a:close/>
-                <a:lnTo>
-                  <a:pt x="2209658" y="21891"/>
-                </a:lnTo>
-                <a:close/>
-                <a:lnTo>
-                  <a:pt x="2213475" y="20779"/>
-                </a:lnTo>
-                <a:close/>
-                <a:lnTo>
-                  <a:pt x="2217294" y="19668"/>
-                </a:lnTo>
-                <a:close/>
-                <a:lnTo>
-                  <a:pt x="2221113" y="18560"/>
-                </a:lnTo>
-                <a:close/>
-                <a:lnTo>
-                  <a:pt x="2224933" y="17453"/>
-                </a:lnTo>
-                <a:close/>
-                <a:lnTo>
-                  <a:pt x="2228752" y="16348"/>
-                </a:lnTo>
-                <a:close/>
-                <a:lnTo>
-                  <a:pt x="2232572" y="15246"/>
-                </a:lnTo>
-                <a:close/>
-                <a:lnTo>
-                  <a:pt x="2236392" y="14145"/>
-                </a:lnTo>
-                <a:close/>
-                <a:lnTo>
-                  <a:pt x="2240212" y="13046"/>
-                </a:lnTo>
-                <a:close/>
-                <a:lnTo>
-                  <a:pt x="2244032" y="11949"/>
-                </a:lnTo>
-                <a:close/>
-                <a:lnTo>
-                  <a:pt x="2247852" y="10854"/>
-                </a:lnTo>
-                <a:close/>
-                <a:lnTo>
-                  <a:pt x="2251671" y="9760"/>
-                </a:lnTo>
-                <a:close/>
-                <a:lnTo>
-                  <a:pt x="2255489" y="8669"/>
-                </a:lnTo>
-                <a:close/>
-                <a:lnTo>
-                  <a:pt x="2259307" y="7579"/>
-                </a:lnTo>
-                <a:close/>
-                <a:lnTo>
-                  <a:pt x="2263123" y="6491"/>
-                </a:lnTo>
-                <a:close/>
-                <a:lnTo>
-                  <a:pt x="2266939" y="5405"/>
-                </a:lnTo>
-                <a:close/>
-                <a:lnTo>
-                  <a:pt x="2270754" y="4320"/>
-                </a:lnTo>
-                <a:close/>
-                <a:lnTo>
-                  <a:pt x="2274568" y="3237"/>
-                </a:lnTo>
-                <a:close/>
-                <a:lnTo>
-                  <a:pt x="2278380" y="2156"/>
-                </a:lnTo>
-                <a:close/>
-                <a:lnTo>
-                  <a:pt x="2282191" y="1077"/>
-                </a:lnTo>
-                <a:close/>
-                <a:lnTo>
-                  <a:pt x="2286000" y="0"/>
+                  <a:pt x="4871" y="1140881"/>
+                </a:lnTo>
+                <a:close/>
+                <a:lnTo>
+                  <a:pt x="9770" y="1118889"/>
+                </a:lnTo>
+                <a:close/>
+                <a:lnTo>
+                  <a:pt x="14694" y="1099246"/>
+                </a:lnTo>
+                <a:close/>
+                <a:lnTo>
+                  <a:pt x="19639" y="1081771"/>
+                </a:lnTo>
+                <a:close/>
+                <a:lnTo>
+                  <a:pt x="24604" y="1066281"/>
+                </a:lnTo>
+                <a:close/>
+                <a:lnTo>
+                  <a:pt x="29585" y="1052596"/>
+                </a:lnTo>
+                <a:close/>
+                <a:lnTo>
+                  <a:pt x="34578" y="1040534"/>
+                </a:lnTo>
+                <a:close/>
+                <a:lnTo>
+                  <a:pt x="39581" y="1029914"/>
+                </a:lnTo>
+                <a:close/>
+                <a:lnTo>
+                  <a:pt x="44591" y="1020554"/>
+                </a:lnTo>
+                <a:close/>
+                <a:lnTo>
+                  <a:pt x="49605" y="1012273"/>
+                </a:lnTo>
+                <a:close/>
+                <a:lnTo>
+                  <a:pt x="54618" y="1004889"/>
+                </a:lnTo>
+                <a:close/>
+                <a:lnTo>
+                  <a:pt x="59630" y="998221"/>
+                </a:lnTo>
+                <a:close/>
+                <a:lnTo>
+                  <a:pt x="64636" y="992088"/>
+                </a:lnTo>
+                <a:close/>
+                <a:lnTo>
+                  <a:pt x="69633" y="986308"/>
+                </a:lnTo>
+                <a:close/>
+                <a:lnTo>
+                  <a:pt x="74619" y="980699"/>
+                </a:lnTo>
+                <a:close/>
+                <a:lnTo>
+                  <a:pt x="79590" y="975100"/>
+                </a:lnTo>
+                <a:close/>
+                <a:lnTo>
+                  <a:pt x="84549" y="969484"/>
+                </a:lnTo>
+                <a:close/>
+                <a:lnTo>
+                  <a:pt x="89497" y="963877"/>
+                </a:lnTo>
+                <a:close/>
+                <a:lnTo>
+                  <a:pt x="94438" y="958304"/>
+                </a:lnTo>
+                <a:close/>
+                <a:lnTo>
+                  <a:pt x="99374" y="952791"/>
+                </a:lnTo>
+                <a:close/>
+                <a:lnTo>
+                  <a:pt x="104307" y="947366"/>
+                </a:lnTo>
+                <a:close/>
+                <a:lnTo>
+                  <a:pt x="109241" y="942053"/>
+                </a:lnTo>
+                <a:close/>
+                <a:lnTo>
+                  <a:pt x="114179" y="936879"/>
+                </a:lnTo>
+                <a:close/>
+                <a:lnTo>
+                  <a:pt x="119121" y="931859"/>
+                </a:lnTo>
+                <a:close/>
+                <a:lnTo>
+                  <a:pt x="124066" y="926983"/>
+                </a:lnTo>
+                <a:close/>
+                <a:lnTo>
+                  <a:pt x="129013" y="922241"/>
+                </a:lnTo>
+                <a:close/>
+                <a:lnTo>
+                  <a:pt x="133961" y="917620"/>
+                </a:lnTo>
+                <a:close/>
+                <a:lnTo>
+                  <a:pt x="138908" y="913110"/>
+                </a:lnTo>
+                <a:close/>
+                <a:lnTo>
+                  <a:pt x="143853" y="908699"/>
+                </a:lnTo>
+                <a:close/>
+                <a:lnTo>
+                  <a:pt x="148794" y="904376"/>
+                </a:lnTo>
+                <a:close/>
+                <a:lnTo>
+                  <a:pt x="153730" y="900129"/>
+                </a:lnTo>
+                <a:close/>
+                <a:lnTo>
+                  <a:pt x="158662" y="895952"/>
+                </a:lnTo>
+                <a:close/>
+                <a:lnTo>
+                  <a:pt x="163594" y="891837"/>
+                </a:lnTo>
+                <a:close/>
+                <a:lnTo>
+                  <a:pt x="168528" y="887779"/>
+                </a:lnTo>
+                <a:close/>
+                <a:lnTo>
+                  <a:pt x="173468" y="883772"/>
+                </a:lnTo>
+                <a:close/>
+                <a:lnTo>
+                  <a:pt x="178416" y="879809"/>
+                </a:lnTo>
+                <a:close/>
+                <a:lnTo>
+                  <a:pt x="183376" y="875885"/>
+                </a:lnTo>
+                <a:close/>
+                <a:lnTo>
+                  <a:pt x="188351" y="871994"/>
+                </a:lnTo>
+                <a:close/>
+                <a:lnTo>
+                  <a:pt x="193341" y="868132"/>
+                </a:lnTo>
+                <a:close/>
+                <a:lnTo>
+                  <a:pt x="198344" y="864301"/>
+                </a:lnTo>
+                <a:close/>
+                <a:lnTo>
+                  <a:pt x="203356" y="860506"/>
+                </a:lnTo>
+                <a:close/>
+                <a:lnTo>
+                  <a:pt x="208371" y="856750"/>
+                </a:lnTo>
+                <a:close/>
+                <a:lnTo>
+                  <a:pt x="213385" y="853037"/>
+                </a:lnTo>
+                <a:close/>
+                <a:lnTo>
+                  <a:pt x="218394" y="849371"/>
+                </a:lnTo>
+                <a:close/>
+                <a:lnTo>
+                  <a:pt x="223394" y="845756"/>
+                </a:lnTo>
+                <a:close/>
+                <a:lnTo>
+                  <a:pt x="228379" y="842196"/>
+                </a:lnTo>
+                <a:close/>
+                <a:lnTo>
+                  <a:pt x="233350" y="838690"/>
+                </a:lnTo>
+                <a:close/>
+                <a:lnTo>
+                  <a:pt x="238307" y="835236"/>
+                </a:lnTo>
+                <a:close/>
+                <a:lnTo>
+                  <a:pt x="243253" y="831831"/>
+                </a:lnTo>
+                <a:close/>
+                <a:lnTo>
+                  <a:pt x="248191" y="828472"/>
+                </a:lnTo>
+                <a:close/>
+                <a:lnTo>
+                  <a:pt x="253122" y="825154"/>
+                </a:lnTo>
+                <a:close/>
+                <a:lnTo>
+                  <a:pt x="258049" y="821876"/>
+                </a:lnTo>
+                <a:close/>
+                <a:lnTo>
+                  <a:pt x="262973" y="818633"/>
+                </a:lnTo>
+                <a:close/>
+                <a:lnTo>
+                  <a:pt x="267897" y="815423"/>
+                </a:lnTo>
+                <a:close/>
+                <a:lnTo>
+                  <a:pt x="272824" y="812242"/>
+                </a:lnTo>
+                <a:close/>
+                <a:lnTo>
+                  <a:pt x="277754" y="809086"/>
+                </a:lnTo>
+                <a:close/>
+                <a:lnTo>
+                  <a:pt x="282690" y="805952"/>
+                </a:lnTo>
+                <a:close/>
+                <a:lnTo>
+                  <a:pt x="287635" y="802836"/>
+                </a:lnTo>
+                <a:close/>
+                <a:lnTo>
+                  <a:pt x="292591" y="799734"/>
+                </a:lnTo>
+                <a:close/>
+                <a:lnTo>
+                  <a:pt x="297559" y="796644"/>
+                </a:lnTo>
+                <a:close/>
+                <a:lnTo>
+                  <a:pt x="302542" y="793561"/>
+                </a:lnTo>
+                <a:close/>
+                <a:lnTo>
+                  <a:pt x="307540" y="790485"/>
+                </a:lnTo>
+                <a:close/>
+                <a:lnTo>
+                  <a:pt x="312548" y="787421"/>
+                </a:lnTo>
+                <a:close/>
+                <a:lnTo>
+                  <a:pt x="317562" y="784373"/>
+                </a:lnTo>
+                <a:close/>
+                <a:lnTo>
+                  <a:pt x="322577" y="781348"/>
+                </a:lnTo>
+                <a:close/>
+                <a:lnTo>
+                  <a:pt x="327589" y="778349"/>
+                </a:lnTo>
+                <a:close/>
+                <a:lnTo>
+                  <a:pt x="332594" y="775382"/>
+                </a:lnTo>
+                <a:close/>
+                <a:lnTo>
+                  <a:pt x="337587" y="772452"/>
+                </a:lnTo>
+                <a:close/>
+                <a:lnTo>
+                  <a:pt x="342564" y="769564"/>
+                </a:lnTo>
+                <a:close/>
+                <a:lnTo>
+                  <a:pt x="347525" y="766715"/>
+                </a:lnTo>
+                <a:close/>
+                <a:lnTo>
+                  <a:pt x="352475" y="763903"/>
+                </a:lnTo>
+                <a:close/>
+                <a:lnTo>
+                  <a:pt x="357416" y="761123"/>
+                </a:lnTo>
+                <a:close/>
+                <a:lnTo>
+                  <a:pt x="362351" y="758372"/>
+                </a:lnTo>
+                <a:close/>
+                <a:lnTo>
+                  <a:pt x="367283" y="755644"/>
+                </a:lnTo>
+                <a:close/>
+                <a:lnTo>
+                  <a:pt x="372215" y="752937"/>
+                </a:lnTo>
+                <a:close/>
+                <a:lnTo>
+                  <a:pt x="377151" y="750247"/>
+                </a:lnTo>
+                <a:close/>
+                <a:lnTo>
+                  <a:pt x="382091" y="747569"/>
+                </a:lnTo>
+                <a:close/>
+                <a:lnTo>
+                  <a:pt x="387036" y="744903"/>
+                </a:lnTo>
+                <a:close/>
+                <a:lnTo>
+                  <a:pt x="391983" y="742245"/>
+                </a:lnTo>
+                <a:close/>
+                <a:lnTo>
+                  <a:pt x="396931" y="739596"/>
+                </a:lnTo>
+                <a:close/>
+                <a:lnTo>
+                  <a:pt x="401879" y="736952"/>
+                </a:lnTo>
+                <a:close/>
+                <a:lnTo>
+                  <a:pt x="406824" y="734312"/>
+                </a:lnTo>
+                <a:close/>
+                <a:lnTo>
+                  <a:pt x="411766" y="731674"/>
+                </a:lnTo>
+                <a:close/>
+                <a:lnTo>
+                  <a:pt x="416702" y="729037"/>
+                </a:lnTo>
+                <a:close/>
+                <a:lnTo>
+                  <a:pt x="421635" y="726403"/>
+                </a:lnTo>
+                <a:close/>
+                <a:lnTo>
+                  <a:pt x="426566" y="723776"/>
+                </a:lnTo>
+                <a:close/>
+                <a:lnTo>
+                  <a:pt x="431500" y="721161"/>
+                </a:lnTo>
+                <a:close/>
+                <a:lnTo>
+                  <a:pt x="436439" y="718563"/>
+                </a:lnTo>
+                <a:close/>
+                <a:lnTo>
+                  <a:pt x="441386" y="715986"/>
+                </a:lnTo>
+                <a:close/>
+                <a:lnTo>
+                  <a:pt x="446346" y="713435"/>
+                </a:lnTo>
+                <a:close/>
+                <a:lnTo>
+                  <a:pt x="451319" y="710915"/>
+                </a:lnTo>
+                <a:close/>
+                <a:lnTo>
+                  <a:pt x="456310" y="708428"/>
+                </a:lnTo>
+                <a:close/>
+                <a:lnTo>
+                  <a:pt x="461314" y="705973"/>
+                </a:lnTo>
+                <a:close/>
+                <a:lnTo>
+                  <a:pt x="466326" y="703544"/>
+                </a:lnTo>
+                <a:close/>
+                <a:lnTo>
+                  <a:pt x="471341" y="701137"/>
+                </a:lnTo>
+                <a:close/>
+                <a:lnTo>
+                  <a:pt x="476356" y="698748"/>
+                </a:lnTo>
+                <a:close/>
+                <a:lnTo>
+                  <a:pt x="481365" y="696372"/>
+                </a:lnTo>
+                <a:close/>
+                <a:lnTo>
+                  <a:pt x="486363" y="694004"/>
+                </a:lnTo>
+                <a:close/>
+                <a:lnTo>
+                  <a:pt x="491347" y="691642"/>
+                </a:lnTo>
+                <a:close/>
+                <a:lnTo>
+                  <a:pt x="496314" y="689281"/>
+                </a:lnTo>
+                <a:close/>
+                <a:lnTo>
+                  <a:pt x="501267" y="686923"/>
+                </a:lnTo>
+                <a:close/>
+                <a:lnTo>
+                  <a:pt x="506211" y="684567"/>
+                </a:lnTo>
+                <a:close/>
+                <a:lnTo>
+                  <a:pt x="511147" y="682215"/>
+                </a:lnTo>
+                <a:close/>
+                <a:lnTo>
+                  <a:pt x="516079" y="679867"/>
+                </a:lnTo>
+                <a:close/>
+                <a:lnTo>
+                  <a:pt x="521011" y="677522"/>
+                </a:lnTo>
+                <a:close/>
+                <a:lnTo>
+                  <a:pt x="525945" y="675182"/>
+                </a:lnTo>
+                <a:close/>
+                <a:lnTo>
+                  <a:pt x="530883" y="672848"/>
+                </a:lnTo>
+                <a:close/>
+                <a:lnTo>
+                  <a:pt x="535827" y="670521"/>
+                </a:lnTo>
+                <a:close/>
+                <a:lnTo>
+                  <a:pt x="540773" y="668203"/>
+                </a:lnTo>
+                <a:close/>
+                <a:lnTo>
+                  <a:pt x="545721" y="665899"/>
+                </a:lnTo>
+                <a:close/>
+                <a:lnTo>
+                  <a:pt x="550669" y="663610"/>
+                </a:lnTo>
+                <a:close/>
+                <a:lnTo>
+                  <a:pt x="555615" y="661340"/>
+                </a:lnTo>
+                <a:close/>
+                <a:lnTo>
+                  <a:pt x="560559" y="659090"/>
+                </a:lnTo>
+                <a:close/>
+                <a:lnTo>
+                  <a:pt x="565497" y="656865"/>
+                </a:lnTo>
+                <a:close/>
+                <a:lnTo>
+                  <a:pt x="570431" y="654663"/>
+                </a:lnTo>
+                <a:close/>
+                <a:lnTo>
+                  <a:pt x="575363" y="652480"/>
+                </a:lnTo>
+                <a:close/>
+                <a:lnTo>
+                  <a:pt x="580295" y="650312"/>
+                </a:lnTo>
+                <a:close/>
+                <a:lnTo>
+                  <a:pt x="585233" y="648153"/>
+                </a:lnTo>
+                <a:close/>
+                <a:lnTo>
+                  <a:pt x="590177" y="645998"/>
+                </a:lnTo>
+                <a:close/>
+                <a:lnTo>
+                  <a:pt x="595132" y="643843"/>
+                </a:lnTo>
+                <a:close/>
+                <a:lnTo>
+                  <a:pt x="600100" y="641681"/>
+                </a:lnTo>
+                <a:close/>
+                <a:lnTo>
+                  <a:pt x="605084" y="639508"/>
+                </a:lnTo>
+                <a:close/>
+                <a:lnTo>
+                  <a:pt x="610083" y="637327"/>
+                </a:lnTo>
+                <a:close/>
+                <a:lnTo>
+                  <a:pt x="615091" y="635141"/>
+                </a:lnTo>
+                <a:close/>
+                <a:lnTo>
+                  <a:pt x="620105" y="632955"/>
+                </a:lnTo>
+                <a:close/>
+                <a:lnTo>
+                  <a:pt x="625120" y="630776"/>
+                </a:lnTo>
+                <a:close/>
+                <a:lnTo>
+                  <a:pt x="630132" y="628607"/>
+                </a:lnTo>
+                <a:close/>
+                <a:lnTo>
+                  <a:pt x="635136" y="626453"/>
+                </a:lnTo>
+                <a:close/>
+                <a:lnTo>
+                  <a:pt x="640128" y="624320"/>
+                </a:lnTo>
+                <a:close/>
+                <a:lnTo>
+                  <a:pt x="645104" y="622212"/>
+                </a:lnTo>
+                <a:close/>
+                <a:lnTo>
+                  <a:pt x="650066" y="620125"/>
+                </a:lnTo>
+                <a:close/>
+                <a:lnTo>
+                  <a:pt x="655017" y="618059"/>
+                </a:lnTo>
+                <a:close/>
+                <a:lnTo>
+                  <a:pt x="659958" y="616011"/>
+                </a:lnTo>
+                <a:close/>
+                <a:lnTo>
+                  <a:pt x="664892" y="613979"/>
+                </a:lnTo>
+                <a:close/>
+                <a:lnTo>
+                  <a:pt x="669820" y="611960"/>
+                </a:lnTo>
+                <a:close/>
+                <a:lnTo>
+                  <a:pt x="674745" y="609953"/>
+                </a:lnTo>
+                <a:close/>
+                <a:lnTo>
+                  <a:pt x="679669" y="607954"/>
+                </a:lnTo>
+                <a:close/>
+                <a:lnTo>
+                  <a:pt x="684594" y="605963"/>
+                </a:lnTo>
+                <a:close/>
+                <a:lnTo>
+                  <a:pt x="689522" y="603975"/>
+                </a:lnTo>
+                <a:close/>
+                <a:lnTo>
+                  <a:pt x="694456" y="601990"/>
+                </a:lnTo>
+                <a:close/>
+                <a:lnTo>
+                  <a:pt x="699397" y="600006"/>
+                </a:lnTo>
+                <a:close/>
+                <a:lnTo>
+                  <a:pt x="704348" y="598019"/>
+                </a:lnTo>
+                <a:close/>
+                <a:lnTo>
+                  <a:pt x="709311" y="596027"/>
+                </a:lnTo>
+                <a:close/>
+                <a:lnTo>
+                  <a:pt x="714288" y="594030"/>
+                </a:lnTo>
+                <a:close/>
+                <a:lnTo>
+                  <a:pt x="719280" y="592024"/>
+                </a:lnTo>
+                <a:close/>
+                <a:lnTo>
+                  <a:pt x="724285" y="590015"/>
+                </a:lnTo>
+                <a:close/>
+                <a:lnTo>
+                  <a:pt x="729296" y="588005"/>
+                </a:lnTo>
+                <a:close/>
+                <a:lnTo>
+                  <a:pt x="734312" y="586001"/>
+                </a:lnTo>
+                <a:close/>
+                <a:lnTo>
+                  <a:pt x="739326" y="584007"/>
+                </a:lnTo>
+                <a:close/>
+                <a:lnTo>
+                  <a:pt x="744334" y="582028"/>
+                </a:lnTo>
+                <a:close/>
+                <a:lnTo>
+                  <a:pt x="749332" y="580068"/>
+                </a:lnTo>
+                <a:close/>
+                <a:lnTo>
+                  <a:pt x="754316" y="578132"/>
+                </a:lnTo>
+                <a:close/>
+                <a:lnTo>
+                  <a:pt x="759283" y="576223"/>
+                </a:lnTo>
+                <a:close/>
+                <a:lnTo>
+                  <a:pt x="764237" y="574334"/>
+                </a:lnTo>
+                <a:close/>
+                <a:lnTo>
+                  <a:pt x="769182" y="572463"/>
+                </a:lnTo>
+                <a:close/>
+                <a:lnTo>
+                  <a:pt x="774118" y="570605"/>
+                </a:lnTo>
+                <a:close/>
+                <a:lnTo>
+                  <a:pt x="779051" y="568755"/>
+                </a:lnTo>
+                <a:close/>
+                <a:lnTo>
+                  <a:pt x="783983" y="566909"/>
+                </a:lnTo>
+                <a:close/>
+                <a:lnTo>
+                  <a:pt x="788917" y="565063"/>
+                </a:lnTo>
+                <a:close/>
+                <a:lnTo>
+                  <a:pt x="793855" y="563213"/>
+                </a:lnTo>
+                <a:close/>
+                <a:lnTo>
+                  <a:pt x="798799" y="561358"/>
+                </a:lnTo>
+                <a:close/>
+                <a:lnTo>
+                  <a:pt x="803745" y="559497"/>
+                </a:lnTo>
+                <a:close/>
+                <a:lnTo>
+                  <a:pt x="808693" y="557630"/>
+                </a:lnTo>
+                <a:close/>
+                <a:lnTo>
+                  <a:pt x="813641" y="555758"/>
+                </a:lnTo>
+                <a:close/>
+                <a:lnTo>
+                  <a:pt x="818587" y="553881"/>
+                </a:lnTo>
+                <a:close/>
+                <a:lnTo>
+                  <a:pt x="823531" y="551998"/>
+                </a:lnTo>
+                <a:close/>
+                <a:lnTo>
+                  <a:pt x="828469" y="550110"/>
+                </a:lnTo>
+                <a:close/>
+                <a:lnTo>
+                  <a:pt x="833403" y="548218"/>
+                </a:lnTo>
+                <a:close/>
+                <a:lnTo>
+                  <a:pt x="838335" y="546325"/>
+                </a:lnTo>
+                <a:close/>
+                <a:lnTo>
+                  <a:pt x="843268" y="544437"/>
+                </a:lnTo>
+                <a:close/>
+                <a:lnTo>
+                  <a:pt x="848204" y="542557"/>
+                </a:lnTo>
+                <a:close/>
+                <a:lnTo>
+                  <a:pt x="853148" y="540689"/>
+                </a:lnTo>
+                <a:close/>
+                <a:lnTo>
+                  <a:pt x="858102" y="538838"/>
+                </a:lnTo>
+                <a:close/>
+                <a:lnTo>
+                  <a:pt x="863069" y="537007"/>
+                </a:lnTo>
+                <a:close/>
+                <a:lnTo>
+                  <a:pt x="868052" y="535202"/>
+                </a:lnTo>
+                <a:close/>
+                <a:lnTo>
+                  <a:pt x="873050" y="533421"/>
+                </a:lnTo>
+                <a:close/>
+                <a:lnTo>
+                  <a:pt x="878058" y="531659"/>
+                </a:lnTo>
+                <a:close/>
+                <a:lnTo>
+                  <a:pt x="883071" y="529913"/>
+                </a:lnTo>
+                <a:close/>
+                <a:lnTo>
+                  <a:pt x="888087" y="528177"/>
+                </a:lnTo>
+                <a:close/>
+                <a:lnTo>
+                  <a:pt x="893099" y="526449"/>
+                </a:lnTo>
+                <a:close/>
+                <a:lnTo>
+                  <a:pt x="898104" y="524722"/>
+                </a:lnTo>
+                <a:close/>
+                <a:lnTo>
+                  <a:pt x="903096" y="522993"/>
+                </a:lnTo>
+                <a:close/>
+                <a:lnTo>
+                  <a:pt x="908074" y="521259"/>
+                </a:lnTo>
+                <a:close/>
+                <a:lnTo>
+                  <a:pt x="913037" y="519518"/>
+                </a:lnTo>
+                <a:close/>
+                <a:lnTo>
+                  <a:pt x="917989" y="517773"/>
+                </a:lnTo>
+                <a:close/>
+                <a:lnTo>
+                  <a:pt x="922930" y="516024"/>
+                </a:lnTo>
+                <a:close/>
+                <a:lnTo>
+                  <a:pt x="927864" y="514271"/>
+                </a:lnTo>
+                <a:close/>
+                <a:lnTo>
+                  <a:pt x="932793" y="512515"/>
+                </a:lnTo>
+                <a:close/>
+                <a:lnTo>
+                  <a:pt x="937718" y="510758"/>
+                </a:lnTo>
+                <a:close/>
+                <a:lnTo>
+                  <a:pt x="942642" y="508999"/>
+                </a:lnTo>
+                <a:close/>
+                <a:lnTo>
+                  <a:pt x="947567" y="507240"/>
+                </a:lnTo>
+                <a:close/>
+                <a:lnTo>
+                  <a:pt x="952495" y="505483"/>
+                </a:lnTo>
+                <a:close/>
+                <a:lnTo>
+                  <a:pt x="957428" y="503728"/>
+                </a:lnTo>
+                <a:close/>
+                <a:lnTo>
+                  <a:pt x="962369" y="501977"/>
+                </a:lnTo>
+                <a:close/>
+                <a:lnTo>
+                  <a:pt x="967319" y="500231"/>
+                </a:lnTo>
+                <a:close/>
+                <a:lnTo>
+                  <a:pt x="972281" y="498491"/>
+                </a:lnTo>
+                <a:close/>
+                <a:lnTo>
+                  <a:pt x="977257" y="496760"/>
+                </a:lnTo>
+                <a:close/>
+                <a:lnTo>
+                  <a:pt x="982248" y="495037"/>
+                </a:lnTo>
+                <a:close/>
+                <a:lnTo>
+                  <a:pt x="987251" y="493324"/>
+                </a:lnTo>
+                <a:close/>
+                <a:lnTo>
+                  <a:pt x="992263" y="491621"/>
+                </a:lnTo>
+                <a:close/>
+                <a:lnTo>
+                  <a:pt x="997278" y="489927"/>
+                </a:lnTo>
+                <a:close/>
+                <a:lnTo>
+                  <a:pt x="1002292" y="488244"/>
+                </a:lnTo>
+                <a:close/>
+                <a:lnTo>
+                  <a:pt x="1007301" y="486572"/>
+                </a:lnTo>
+                <a:close/>
+                <a:lnTo>
+                  <a:pt x="1012300" y="484910"/>
+                </a:lnTo>
+                <a:close/>
+                <a:lnTo>
+                  <a:pt x="1017285" y="483259"/>
+                </a:lnTo>
+                <a:close/>
+                <a:lnTo>
+                  <a:pt x="1022254" y="481619"/>
+                </a:lnTo>
+                <a:close/>
+                <a:lnTo>
+                  <a:pt x="1027209" y="479987"/>
+                </a:lnTo>
+                <a:close/>
+                <a:lnTo>
+                  <a:pt x="1032153" y="478360"/>
+                </a:lnTo>
+                <a:close/>
+                <a:lnTo>
+                  <a:pt x="1037091" y="476738"/>
+                </a:lnTo>
+                <a:close/>
+                <a:lnTo>
+                  <a:pt x="1042024" y="475116"/>
+                </a:lnTo>
+                <a:close/>
+                <a:lnTo>
+                  <a:pt x="1046956" y="473494"/>
+                </a:lnTo>
+                <a:close/>
+                <a:lnTo>
+                  <a:pt x="1051889" y="471868"/>
+                </a:lnTo>
+                <a:close/>
+                <a:lnTo>
+                  <a:pt x="1056827" y="470237"/>
+                </a:lnTo>
+                <a:close/>
+                <a:lnTo>
+                  <a:pt x="1061770" y="468602"/>
+                </a:lnTo>
+                <a:close/>
+                <a:lnTo>
+                  <a:pt x="1066717" y="466964"/>
+                </a:lnTo>
+                <a:close/>
+                <a:lnTo>
+                  <a:pt x="1071665" y="465328"/>
+                </a:lnTo>
+                <a:close/>
+                <a:lnTo>
+                  <a:pt x="1076613" y="463695"/>
+                </a:lnTo>
+                <a:close/>
+                <a:lnTo>
+                  <a:pt x="1081559" y="462069"/>
+                </a:lnTo>
+                <a:close/>
+                <a:lnTo>
+                  <a:pt x="1086503" y="460452"/>
+                </a:lnTo>
+                <a:close/>
+                <a:lnTo>
+                  <a:pt x="1091442" y="458847"/>
+                </a:lnTo>
+                <a:close/>
+                <a:lnTo>
+                  <a:pt x="1096376" y="457255"/>
+                </a:lnTo>
+                <a:close/>
+                <a:lnTo>
+                  <a:pt x="1101307" y="455675"/>
+                </a:lnTo>
+                <a:close/>
+                <a:lnTo>
+                  <a:pt x="1106239" y="454104"/>
+                </a:lnTo>
+                <a:close/>
+                <a:lnTo>
+                  <a:pt x="1111175" y="452540"/>
+                </a:lnTo>
+                <a:close/>
+                <a:lnTo>
+                  <a:pt x="1116118" y="450982"/>
+                </a:lnTo>
+                <a:close/>
+                <a:lnTo>
+                  <a:pt x="1121072" y="449426"/>
+                </a:lnTo>
+                <a:close/>
+                <a:lnTo>
+                  <a:pt x="1126038" y="447871"/>
+                </a:lnTo>
+                <a:close/>
+                <a:lnTo>
+                  <a:pt x="1131021" y="446314"/>
+                </a:lnTo>
+                <a:close/>
+                <a:lnTo>
+                  <a:pt x="1136019" y="444754"/>
+                </a:lnTo>
+                <a:close/>
+                <a:lnTo>
+                  <a:pt x="1141027" y="443191"/>
+                </a:lnTo>
+                <a:close/>
+                <a:lnTo>
+                  <a:pt x="1146042" y="441626"/>
+                </a:lnTo>
+                <a:close/>
+                <a:lnTo>
+                  <a:pt x="1151058" y="440057"/>
+                </a:lnTo>
+                <a:close/>
+                <a:lnTo>
+                  <a:pt x="1156070" y="438486"/>
+                </a:lnTo>
+                <a:close/>
+                <a:lnTo>
+                  <a:pt x="1161074" y="436912"/>
+                </a:lnTo>
+                <a:close/>
+                <a:lnTo>
+                  <a:pt x="1166065" y="435335"/>
+                </a:lnTo>
+                <a:close/>
+                <a:lnTo>
+                  <a:pt x="1171040" y="433755"/>
+                </a:lnTo>
+                <a:close/>
+                <a:lnTo>
+                  <a:pt x="1175999" y="432174"/>
+                </a:lnTo>
+                <a:close/>
+                <a:lnTo>
+                  <a:pt x="1180947" y="430596"/>
+                </a:lnTo>
+                <a:close/>
+                <a:lnTo>
+                  <a:pt x="1185886" y="429021"/>
+                </a:lnTo>
+                <a:close/>
+                <a:lnTo>
+                  <a:pt x="1190820" y="427452"/>
+                </a:lnTo>
+                <a:close/>
+                <a:lnTo>
+                  <a:pt x="1195752" y="425891"/>
+                </a:lnTo>
+                <a:close/>
+                <a:lnTo>
+                  <a:pt x="1200684" y="424342"/>
+                </a:lnTo>
+                <a:close/>
+                <a:lnTo>
+                  <a:pt x="1205620" y="422805"/>
+                </a:lnTo>
+                <a:close/>
+                <a:lnTo>
+                  <a:pt x="1210562" y="421281"/>
+                </a:lnTo>
+                <a:close/>
+                <a:lnTo>
+                  <a:pt x="1215507" y="419768"/>
+                </a:lnTo>
+                <a:close/>
+                <a:lnTo>
+                  <a:pt x="1220454" y="418263"/>
+                </a:lnTo>
+                <a:close/>
+                <a:lnTo>
+                  <a:pt x="1225402" y="416763"/>
+                </a:lnTo>
+                <a:close/>
+                <a:lnTo>
+                  <a:pt x="1230350" y="415264"/>
+                </a:lnTo>
+                <a:close/>
+                <a:lnTo>
+                  <a:pt x="1235295" y="413765"/>
+                </a:lnTo>
+                <a:close/>
+                <a:lnTo>
+                  <a:pt x="1240235" y="412262"/>
+                </a:lnTo>
+                <a:close/>
+                <a:lnTo>
+                  <a:pt x="1245171" y="410752"/>
+                </a:lnTo>
+                <a:close/>
+                <a:lnTo>
+                  <a:pt x="1250104" y="409238"/>
+                </a:lnTo>
+                <a:close/>
+                <a:lnTo>
+                  <a:pt x="1255036" y="407722"/>
+                </a:lnTo>
+                <a:close/>
+                <a:lnTo>
+                  <a:pt x="1259970" y="406206"/>
+                </a:lnTo>
+                <a:close/>
+                <a:lnTo>
+                  <a:pt x="1264911" y="404694"/>
+                </a:lnTo>
+                <a:close/>
+                <a:lnTo>
+                  <a:pt x="1269860" y="403188"/>
+                </a:lnTo>
+                <a:close/>
+                <a:lnTo>
+                  <a:pt x="1274821" y="401692"/>
+                </a:lnTo>
+                <a:close/>
+                <a:lnTo>
+                  <a:pt x="1279798" y="400208"/>
+                </a:lnTo>
+                <a:close/>
+                <a:lnTo>
+                  <a:pt x="1284790" y="398737"/>
+                </a:lnTo>
+                <a:close/>
+                <a:lnTo>
+                  <a:pt x="1289794" y="397279"/>
+                </a:lnTo>
+                <a:close/>
+                <a:lnTo>
+                  <a:pt x="1294806" y="395829"/>
+                </a:lnTo>
+                <a:close/>
+                <a:lnTo>
+                  <a:pt x="1299821" y="394387"/>
+                </a:lnTo>
+                <a:close/>
+                <a:lnTo>
+                  <a:pt x="1304835" y="392950"/>
+                </a:lnTo>
+                <a:close/>
+                <a:lnTo>
+                  <a:pt x="1309843" y="391515"/>
+                </a:lnTo>
+                <a:close/>
+                <a:lnTo>
+                  <a:pt x="1314842" y="390080"/>
+                </a:lnTo>
+                <a:close/>
+                <a:lnTo>
+                  <a:pt x="1319825" y="388643"/>
+                </a:lnTo>
+                <a:close/>
+                <a:lnTo>
+                  <a:pt x="1324794" y="387204"/>
+                </a:lnTo>
+                <a:close/>
+                <a:lnTo>
+                  <a:pt x="1329750" y="385761"/>
+                </a:lnTo>
+                <a:close/>
+                <a:lnTo>
+                  <a:pt x="1334696" y="384316"/>
+                </a:lnTo>
+                <a:close/>
+                <a:lnTo>
+                  <a:pt x="1339632" y="382867"/>
+                </a:lnTo>
+                <a:close/>
+                <a:lnTo>
+                  <a:pt x="1344563" y="381416"/>
+                </a:lnTo>
+                <a:close/>
+                <a:lnTo>
+                  <a:pt x="1349489" y="379963"/>
+                </a:lnTo>
+                <a:close/>
+                <a:lnTo>
+                  <a:pt x="1354413" y="378506"/>
+                </a:lnTo>
+                <a:close/>
+                <a:lnTo>
+                  <a:pt x="1359338" y="377048"/>
+                </a:lnTo>
+                <a:close/>
+                <a:lnTo>
+                  <a:pt x="1364264" y="375589"/>
+                </a:lnTo>
+                <a:close/>
+                <a:lnTo>
+                  <a:pt x="1369195" y="374131"/>
+                </a:lnTo>
+                <a:close/>
+                <a:lnTo>
+                  <a:pt x="1374133" y="372678"/>
+                </a:lnTo>
+                <a:close/>
+                <a:lnTo>
+                  <a:pt x="1379079" y="371230"/>
+                </a:lnTo>
+                <a:close/>
+                <a:lnTo>
+                  <a:pt x="1384036" y="369791"/>
+                </a:lnTo>
+                <a:close/>
+                <a:lnTo>
+                  <a:pt x="1389005" y="368362"/>
+                </a:lnTo>
+                <a:close/>
+                <a:lnTo>
+                  <a:pt x="1393990" y="366945"/>
+                </a:lnTo>
+                <a:close/>
+                <a:lnTo>
+                  <a:pt x="1398989" y="365541"/>
+                </a:lnTo>
+                <a:close/>
+                <a:lnTo>
+                  <a:pt x="1403998" y="364146"/>
+                </a:lnTo>
+                <a:close/>
+                <a:lnTo>
+                  <a:pt x="1409012" y="362760"/>
+                </a:lnTo>
+                <a:close/>
+                <a:lnTo>
+                  <a:pt x="1414027" y="361379"/>
+                </a:lnTo>
+                <a:close/>
+                <a:lnTo>
+                  <a:pt x="1419039" y="360002"/>
+                </a:lnTo>
+                <a:close/>
+                <a:lnTo>
+                  <a:pt x="1424043" y="358626"/>
+                </a:lnTo>
+                <a:close/>
+                <a:lnTo>
+                  <a:pt x="1429034" y="357248"/>
+                </a:lnTo>
+                <a:close/>
+                <a:lnTo>
+                  <a:pt x="1434009" y="355867"/>
+                </a:lnTo>
+                <a:close/>
+                <a:lnTo>
+                  <a:pt x="1438969" y="354483"/>
+                </a:lnTo>
+                <a:close/>
+                <a:lnTo>
+                  <a:pt x="1443918" y="353096"/>
+                </a:lnTo>
+                <a:close/>
+                <a:lnTo>
+                  <a:pt x="1448858" y="351708"/>
+                </a:lnTo>
+                <a:close/>
+                <a:lnTo>
+                  <a:pt x="1453792" y="350319"/>
+                </a:lnTo>
+                <a:close/>
+                <a:lnTo>
+                  <a:pt x="1458724" y="348930"/>
+                </a:lnTo>
+                <a:close/>
+                <a:lnTo>
+                  <a:pt x="1463656" y="347541"/>
+                </a:lnTo>
+                <a:close/>
+                <a:lnTo>
+                  <a:pt x="1468592" y="346154"/>
+                </a:lnTo>
+                <a:close/>
+                <a:lnTo>
+                  <a:pt x="1473534" y="344769"/>
+                </a:lnTo>
+                <a:close/>
+                <a:lnTo>
+                  <a:pt x="1478479" y="343384"/>
+                </a:lnTo>
+                <a:close/>
+                <a:lnTo>
+                  <a:pt x="1483426" y="341999"/>
+                </a:lnTo>
+                <a:close/>
+                <a:lnTo>
+                  <a:pt x="1488374" y="340614"/>
+                </a:lnTo>
+                <a:close/>
+                <a:lnTo>
+                  <a:pt x="1493321" y="339228"/>
+                </a:lnTo>
+                <a:close/>
+                <a:lnTo>
+                  <a:pt x="1498266" y="337839"/>
+                </a:lnTo>
+                <a:close/>
+                <a:lnTo>
+                  <a:pt x="1503208" y="336448"/>
+                </a:lnTo>
+                <a:close/>
+                <a:lnTo>
+                  <a:pt x="1508144" y="335053"/>
+                </a:lnTo>
+                <a:close/>
+                <a:lnTo>
+                  <a:pt x="1513076" y="333656"/>
+                </a:lnTo>
+                <a:close/>
+                <a:lnTo>
+                  <a:pt x="1518008" y="332259"/>
+                </a:lnTo>
+                <a:close/>
+                <a:lnTo>
+                  <a:pt x="1522942" y="330864"/>
+                </a:lnTo>
+                <a:close/>
+                <a:lnTo>
+                  <a:pt x="1527882" y="329474"/>
+                </a:lnTo>
+                <a:close/>
+                <a:lnTo>
+                  <a:pt x="1532831" y="328091"/>
+                </a:lnTo>
+                <a:close/>
+                <a:lnTo>
+                  <a:pt x="1537791" y="326717"/>
+                </a:lnTo>
+                <a:close/>
+                <a:lnTo>
+                  <a:pt x="1542766" y="325355"/>
+                </a:lnTo>
+                <a:close/>
+                <a:lnTo>
+                  <a:pt x="1547757" y="324005"/>
+                </a:lnTo>
+                <a:close/>
+                <a:lnTo>
+                  <a:pt x="1552761" y="322667"/>
+                </a:lnTo>
+                <a:close/>
+                <a:lnTo>
+                  <a:pt x="1557773" y="321338"/>
+                </a:lnTo>
+                <a:close/>
+                <a:lnTo>
+                  <a:pt x="1562788" y="320015"/>
+                </a:lnTo>
+                <a:close/>
+                <a:lnTo>
+                  <a:pt x="1567802" y="318698"/>
+                </a:lnTo>
+                <a:close/>
+                <a:lnTo>
+                  <a:pt x="1572811" y="317383"/>
+                </a:lnTo>
+                <a:close/>
+                <a:lnTo>
+                  <a:pt x="1577810" y="316068"/>
+                </a:lnTo>
+                <a:close/>
+                <a:lnTo>
+                  <a:pt x="1582795" y="314751"/>
+                </a:lnTo>
+                <a:close/>
+                <a:lnTo>
+                  <a:pt x="1587764" y="313432"/>
+                </a:lnTo>
+                <a:close/>
+                <a:lnTo>
+                  <a:pt x="1592721" y="312110"/>
+                </a:lnTo>
+                <a:close/>
+                <a:lnTo>
+                  <a:pt x="1597667" y="310786"/>
+                </a:lnTo>
+                <a:close/>
+                <a:lnTo>
+                  <a:pt x="1602605" y="309459"/>
+                </a:lnTo>
+                <a:close/>
+                <a:lnTo>
+                  <a:pt x="1607536" y="308129"/>
+                </a:lnTo>
+                <a:close/>
+                <a:lnTo>
+                  <a:pt x="1612462" y="306796"/>
+                </a:lnTo>
+                <a:close/>
+                <a:lnTo>
+                  <a:pt x="1617387" y="305461"/>
+                </a:lnTo>
+                <a:close/>
+                <a:lnTo>
+                  <a:pt x="1622311" y="304123"/>
+                </a:lnTo>
+                <a:close/>
+                <a:lnTo>
+                  <a:pt x="1627237" y="302784"/>
+                </a:lnTo>
+                <a:close/>
+                <a:lnTo>
+                  <a:pt x="1632168" y="301448"/>
+                </a:lnTo>
+                <a:close/>
+                <a:lnTo>
+                  <a:pt x="1637104" y="300114"/>
+                </a:lnTo>
+                <a:close/>
+                <a:lnTo>
+                  <a:pt x="1642050" y="298787"/>
+                </a:lnTo>
+                <a:close/>
+                <a:lnTo>
+                  <a:pt x="1647006" y="297467"/>
+                </a:lnTo>
+                <a:close/>
+                <a:lnTo>
+                  <a:pt x="1651975" y="296158"/>
+                </a:lnTo>
+                <a:close/>
+                <a:lnTo>
+                  <a:pt x="1656958" y="294860"/>
+                </a:lnTo>
+                <a:close/>
+                <a:lnTo>
+                  <a:pt x="1661957" y="293575"/>
+                </a:lnTo>
+                <a:close/>
+                <a:lnTo>
+                  <a:pt x="1666965" y="292301"/>
+                </a:lnTo>
+                <a:close/>
+                <a:lnTo>
+                  <a:pt x="1671979" y="291034"/>
+                </a:lnTo>
+                <a:close/>
+                <a:lnTo>
+                  <a:pt x="1676994" y="289774"/>
+                </a:lnTo>
+                <a:close/>
+                <a:lnTo>
+                  <a:pt x="1682006" y="288517"/>
+                </a:lnTo>
+                <a:close/>
+                <a:lnTo>
+                  <a:pt x="1687010" y="287261"/>
+                </a:lnTo>
+                <a:close/>
+                <a:lnTo>
+                  <a:pt x="1692002" y="286005"/>
+                </a:lnTo>
+                <a:close/>
+                <a:lnTo>
+                  <a:pt x="1696979" y="284746"/>
+                </a:lnTo>
+                <a:close/>
+                <a:lnTo>
+                  <a:pt x="1701940" y="283483"/>
+                </a:lnTo>
+                <a:close/>
+                <a:lnTo>
+                  <a:pt x="1706889" y="282219"/>
+                </a:lnTo>
+                <a:close/>
+                <a:lnTo>
+                  <a:pt x="1711830" y="280952"/>
+                </a:lnTo>
+                <a:close/>
+                <a:lnTo>
+                  <a:pt x="1716764" y="279684"/>
+                </a:lnTo>
+                <a:close/>
+                <a:lnTo>
+                  <a:pt x="1721696" y="278414"/>
+                </a:lnTo>
+                <a:close/>
+                <a:lnTo>
+                  <a:pt x="1726629" y="277145"/>
+                </a:lnTo>
+                <a:close/>
+                <a:lnTo>
+                  <a:pt x="1731565" y="275876"/>
+                </a:lnTo>
+                <a:close/>
+                <a:lnTo>
+                  <a:pt x="1736505" y="274607"/>
+                </a:lnTo>
+                <a:close/>
+                <a:lnTo>
+                  <a:pt x="1741450" y="273340"/>
+                </a:lnTo>
+                <a:close/>
+                <a:lnTo>
+                  <a:pt x="1746398" y="272073"/>
+                </a:lnTo>
+                <a:close/>
+                <a:lnTo>
+                  <a:pt x="1751346" y="270806"/>
+                </a:lnTo>
+                <a:close/>
+                <a:lnTo>
+                  <a:pt x="1756293" y="269541"/>
+                </a:lnTo>
+                <a:close/>
+                <a:lnTo>
+                  <a:pt x="1761238" y="268276"/>
+                </a:lnTo>
+                <a:close/>
+                <a:lnTo>
+                  <a:pt x="1766180" y="267012"/>
+                </a:lnTo>
+                <a:close/>
+                <a:lnTo>
+                  <a:pt x="1771116" y="265748"/>
+                </a:lnTo>
+                <a:close/>
+                <a:lnTo>
+                  <a:pt x="1776048" y="264485"/>
+                </a:lnTo>
+                <a:close/>
+                <a:lnTo>
+                  <a:pt x="1780980" y="263222"/>
+                </a:lnTo>
+                <a:close/>
+                <a:lnTo>
+                  <a:pt x="1785914" y="261958"/>
+                </a:lnTo>
+                <a:close/>
+                <a:lnTo>
+                  <a:pt x="1790853" y="260692"/>
+                </a:lnTo>
+                <a:close/>
+                <a:lnTo>
+                  <a:pt x="1795801" y="259425"/>
+                </a:lnTo>
+                <a:close/>
+                <a:lnTo>
+                  <a:pt x="1800760" y="258155"/>
+                </a:lnTo>
+                <a:close/>
+                <a:lnTo>
+                  <a:pt x="1805735" y="256882"/>
+                </a:lnTo>
+                <a:close/>
+                <a:lnTo>
+                  <a:pt x="1810726" y="255606"/>
+                </a:lnTo>
+                <a:close/>
+                <a:lnTo>
+                  <a:pt x="1815730" y="254329"/>
+                </a:lnTo>
+                <a:close/>
+                <a:lnTo>
+                  <a:pt x="1820742" y="253053"/>
+                </a:lnTo>
+                <a:close/>
+                <a:lnTo>
+                  <a:pt x="1825758" y="251780"/>
+                </a:lnTo>
+                <a:close/>
+                <a:lnTo>
+                  <a:pt x="1830773" y="250513"/>
+                </a:lnTo>
+                <a:close/>
+                <a:lnTo>
+                  <a:pt x="1835781" y="249253"/>
+                </a:lnTo>
+                <a:close/>
+                <a:lnTo>
+                  <a:pt x="1840779" y="248004"/>
+                </a:lnTo>
+                <a:close/>
+                <a:lnTo>
+                  <a:pt x="1845762" y="246768"/>
+                </a:lnTo>
+                <a:close/>
+                <a:lnTo>
+                  <a:pt x="1850728" y="245544"/>
+                </a:lnTo>
+                <a:close/>
+                <a:lnTo>
+                  <a:pt x="1855682" y="244330"/>
+                </a:lnTo>
+                <a:close/>
+                <a:lnTo>
+                  <a:pt x="1860625" y="243125"/>
+                </a:lnTo>
+                <a:close/>
+                <a:lnTo>
+                  <a:pt x="1865561" y="241925"/>
+                </a:lnTo>
+                <a:close/>
+                <a:lnTo>
+                  <a:pt x="1870493" y="240729"/>
+                </a:lnTo>
+                <a:close/>
+                <a:lnTo>
+                  <a:pt x="1875424" y="239534"/>
+                </a:lnTo>
+                <a:close/>
+                <a:lnTo>
+                  <a:pt x="1880358" y="238338"/>
+                </a:lnTo>
+                <a:close/>
+                <a:lnTo>
+                  <a:pt x="1885297" y="237139"/>
+                </a:lnTo>
+                <a:close/>
+                <a:lnTo>
+                  <a:pt x="1890241" y="235937"/>
+                </a:lnTo>
+                <a:close/>
+                <a:lnTo>
+                  <a:pt x="1895187" y="234732"/>
+                </a:lnTo>
+                <a:close/>
+                <a:lnTo>
+                  <a:pt x="1900135" y="233525"/>
+                </a:lnTo>
+                <a:close/>
+                <a:lnTo>
+                  <a:pt x="1905083" y="232317"/>
+                </a:lnTo>
+                <a:close/>
+                <a:lnTo>
+                  <a:pt x="1910030" y="231108"/>
+                </a:lnTo>
+                <a:close/>
+                <a:lnTo>
+                  <a:pt x="1914973" y="229899"/>
+                </a:lnTo>
+                <a:close/>
+                <a:lnTo>
+                  <a:pt x="1919911" y="228690"/>
+                </a:lnTo>
+                <a:close/>
+                <a:lnTo>
+                  <a:pt x="1924844" y="227482"/>
+                </a:lnTo>
+                <a:close/>
+                <a:lnTo>
+                  <a:pt x="1929776" y="226275"/>
+                </a:lnTo>
+                <a:close/>
+                <a:lnTo>
+                  <a:pt x="1934709" y="225068"/>
+                </a:lnTo>
+                <a:close/>
+                <a:lnTo>
+                  <a:pt x="1939647" y="223862"/>
+                </a:lnTo>
+                <a:close/>
+                <a:lnTo>
+                  <a:pt x="1944591" y="222657"/>
+                </a:lnTo>
+                <a:close/>
+                <a:lnTo>
+                  <a:pt x="1949546" y="221453"/>
+                </a:lnTo>
+                <a:close/>
+                <a:lnTo>
+                  <a:pt x="1954515" y="220249"/>
+                </a:lnTo>
+                <a:close/>
+                <a:lnTo>
+                  <a:pt x="1959500" y="219045"/>
+                </a:lnTo>
+                <a:close/>
+                <a:lnTo>
+                  <a:pt x="1964499" y="217842"/>
+                </a:lnTo>
+                <a:close/>
+                <a:lnTo>
+                  <a:pt x="1969508" y="216639"/>
+                </a:lnTo>
+                <a:close/>
+                <a:lnTo>
+                  <a:pt x="1974522" y="215435"/>
+                </a:lnTo>
+                <a:close/>
+                <a:lnTo>
+                  <a:pt x="1979537" y="214229"/>
+                </a:lnTo>
+                <a:close/>
+                <a:lnTo>
+                  <a:pt x="1984549" y="213022"/>
+                </a:lnTo>
+                <a:close/>
+                <a:lnTo>
+                  <a:pt x="1989552" y="211813"/>
+                </a:lnTo>
+                <a:close/>
+                <a:lnTo>
+                  <a:pt x="1994543" y="210600"/>
+                </a:lnTo>
+                <a:close/>
+                <a:lnTo>
+                  <a:pt x="1999519" y="209386"/>
+                </a:lnTo>
+                <a:close/>
+                <a:lnTo>
+                  <a:pt x="2004481" y="208170"/>
+                </a:lnTo>
+                <a:close/>
+                <a:lnTo>
+                  <a:pt x="2009431" y="206955"/>
+                </a:lnTo>
+                <a:close/>
+                <a:lnTo>
+                  <a:pt x="2014372" y="205744"/>
+                </a:lnTo>
+                <a:close/>
+                <a:lnTo>
+                  <a:pt x="2019305" y="204538"/>
+                </a:lnTo>
+                <a:close/>
+                <a:lnTo>
+                  <a:pt x="2024233" y="203339"/>
+                </a:lnTo>
+                <a:close/>
+                <a:lnTo>
+                  <a:pt x="2029158" y="202149"/>
+                </a:lnTo>
+                <a:close/>
+                <a:lnTo>
+                  <a:pt x="2034082" y="200970"/>
+                </a:lnTo>
+                <a:close/>
+                <a:lnTo>
+                  <a:pt x="2039007" y="199803"/>
+                </a:lnTo>
+                <a:close/>
+                <a:lnTo>
+                  <a:pt x="2043936" y="198646"/>
+                </a:lnTo>
+                <a:close/>
+                <a:lnTo>
+                  <a:pt x="2048870" y="197498"/>
+                </a:lnTo>
+                <a:close/>
+                <a:lnTo>
+                  <a:pt x="2053811" y="196357"/>
+                </a:lnTo>
+                <a:close/>
+                <a:lnTo>
+                  <a:pt x="2058763" y="195223"/>
+                </a:lnTo>
+                <a:close/>
+                <a:lnTo>
+                  <a:pt x="2063726" y="194093"/>
+                </a:lnTo>
+                <a:close/>
+                <a:lnTo>
+                  <a:pt x="2068704" y="192967"/>
+                </a:lnTo>
+                <a:close/>
+                <a:lnTo>
+                  <a:pt x="2073696" y="191843"/>
+                </a:lnTo>
+                <a:close/>
+                <a:lnTo>
+                  <a:pt x="2078701" y="190718"/>
+                </a:lnTo>
+                <a:close/>
+                <a:lnTo>
+                  <a:pt x="2083713" y="189589"/>
+                </a:lnTo>
+                <a:close/>
+                <a:lnTo>
+                  <a:pt x="2088729" y="188454"/>
+                </a:lnTo>
+                <a:close/>
+                <a:lnTo>
+                  <a:pt x="2093742" y="187308"/>
+                </a:lnTo>
+                <a:close/>
+                <a:lnTo>
+                  <a:pt x="2098750" y="186150"/>
+                </a:lnTo>
+                <a:close/>
+                <a:lnTo>
+                  <a:pt x="2103748" y="184975"/>
+                </a:lnTo>
+                <a:close/>
+                <a:lnTo>
+                  <a:pt x="2108731" y="183781"/>
+                </a:lnTo>
+                <a:close/>
+                <a:lnTo>
+                  <a:pt x="2113698" y="182569"/>
+                </a:lnTo>
+                <a:close/>
+                <a:lnTo>
+                  <a:pt x="2118652" y="181347"/>
+                </a:lnTo>
+                <a:close/>
+                <a:lnTo>
+                  <a:pt x="2123596" y="180120"/>
+                </a:lnTo>
+                <a:close/>
+                <a:lnTo>
+                  <a:pt x="2128532" y="178898"/>
+                </a:lnTo>
+                <a:close/>
+                <a:lnTo>
+                  <a:pt x="2133465" y="177687"/>
+                </a:lnTo>
+                <a:close/>
+                <a:lnTo>
+                  <a:pt x="2138397" y="176493"/>
+                </a:lnTo>
+                <a:close/>
+                <a:lnTo>
+                  <a:pt x="2143331" y="175326"/>
+                </a:lnTo>
+                <a:close/>
+                <a:lnTo>
+                  <a:pt x="2148269" y="174190"/>
+                </a:lnTo>
+                <a:close/>
+                <a:lnTo>
+                  <a:pt x="2153213" y="173083"/>
+                </a:lnTo>
+                <a:close/>
+                <a:lnTo>
+                  <a:pt x="2158159" y="171996"/>
+                </a:lnTo>
+                <a:close/>
+                <a:lnTo>
+                  <a:pt x="2163107" y="170924"/>
+                </a:lnTo>
+                <a:close/>
+                <a:lnTo>
+                  <a:pt x="2168055" y="169858"/>
+                </a:lnTo>
+                <a:close/>
+                <a:lnTo>
+                  <a:pt x="2173001" y="168792"/>
+                </a:lnTo>
+                <a:close/>
+                <a:lnTo>
+                  <a:pt x="2177945" y="167718"/>
+                </a:lnTo>
+                <a:close/>
+                <a:lnTo>
+                  <a:pt x="2182883" y="166628"/>
+                </a:lnTo>
+                <a:close/>
+                <a:lnTo>
+                  <a:pt x="2187817" y="165520"/>
+                </a:lnTo>
+                <a:close/>
+                <a:lnTo>
+                  <a:pt x="2192749" y="164394"/>
+                </a:lnTo>
+                <a:close/>
+                <a:lnTo>
+                  <a:pt x="2197682" y="163253"/>
+                </a:lnTo>
+                <a:close/>
+                <a:lnTo>
+                  <a:pt x="2202618" y="162102"/>
+                </a:lnTo>
+                <a:close/>
+                <a:lnTo>
+                  <a:pt x="2207563" y="160941"/>
+                </a:lnTo>
+                <a:close/>
+                <a:lnTo>
+                  <a:pt x="2212517" y="159775"/>
+                </a:lnTo>
+                <a:close/>
+                <a:lnTo>
+                  <a:pt x="2217484" y="158606"/>
+                </a:lnTo>
+                <a:close/>
+                <a:lnTo>
+                  <a:pt x="2222468" y="157437"/>
+                </a:lnTo>
+                <a:close/>
+                <a:lnTo>
+                  <a:pt x="2227466" y="156270"/>
+                </a:lnTo>
+                <a:close/>
+                <a:lnTo>
+                  <a:pt x="2232474" y="155107"/>
+                </a:lnTo>
+                <a:close/>
+                <a:lnTo>
+                  <a:pt x="2237488" y="153952"/>
+                </a:lnTo>
+                <a:close/>
+                <a:lnTo>
+                  <a:pt x="2242504" y="152804"/>
+                </a:lnTo>
+                <a:close/>
+                <a:lnTo>
+                  <a:pt x="2247515" y="151668"/>
+                </a:lnTo>
+                <a:close/>
+                <a:lnTo>
+                  <a:pt x="2252520" y="150544"/>
+                </a:lnTo>
+                <a:close/>
+                <a:lnTo>
+                  <a:pt x="2257512" y="149435"/>
+                </a:lnTo>
+                <a:close/>
+                <a:lnTo>
+                  <a:pt x="2262489" y="148342"/>
+                </a:lnTo>
+                <a:close/>
+                <a:lnTo>
+                  <a:pt x="2267452" y="147260"/>
+                </a:lnTo>
+                <a:close/>
+                <a:lnTo>
+                  <a:pt x="2272403" y="146185"/>
+                </a:lnTo>
+                <a:close/>
+                <a:lnTo>
+                  <a:pt x="2277344" y="145111"/>
+                </a:lnTo>
+                <a:close/>
+                <a:lnTo>
+                  <a:pt x="2282278" y="144034"/>
+                </a:lnTo>
+                <a:close/>
+                <a:lnTo>
+                  <a:pt x="2287206" y="142950"/>
+                </a:lnTo>
+                <a:close/>
+                <a:lnTo>
+                  <a:pt x="2292131" y="141852"/>
+                </a:lnTo>
+                <a:close/>
+                <a:lnTo>
+                  <a:pt x="2297055" y="140736"/>
+                </a:lnTo>
+                <a:close/>
+                <a:lnTo>
+                  <a:pt x="2301980" y="139602"/>
+                </a:lnTo>
+                <a:close/>
+                <a:lnTo>
+                  <a:pt x="2306908" y="138455"/>
+                </a:lnTo>
+                <a:close/>
+                <a:lnTo>
+                  <a:pt x="2311842" y="137300"/>
+                </a:lnTo>
+                <a:close/>
+                <a:lnTo>
+                  <a:pt x="2316783" y="136142"/>
+                </a:lnTo>
+                <a:close/>
+                <a:lnTo>
+                  <a:pt x="2321734" y="134987"/>
+                </a:lnTo>
+                <a:close/>
+                <a:lnTo>
+                  <a:pt x="2326696" y="133838"/>
+                </a:lnTo>
+                <a:close/>
+                <a:lnTo>
+                  <a:pt x="2331672" y="132702"/>
+                </a:lnTo>
+                <a:close/>
+                <a:lnTo>
+                  <a:pt x="2336664" y="131583"/>
+                </a:lnTo>
+                <a:close/>
+                <a:lnTo>
+                  <a:pt x="2341668" y="130479"/>
+                </a:lnTo>
+                <a:close/>
+                <a:lnTo>
+                  <a:pt x="2346680" y="129387"/>
+                </a:lnTo>
+                <a:close/>
+                <a:lnTo>
+                  <a:pt x="2351695" y="128306"/>
+                </a:lnTo>
+                <a:close/>
+                <a:lnTo>
+                  <a:pt x="2356709" y="127231"/>
+                </a:lnTo>
+                <a:close/>
+                <a:lnTo>
+                  <a:pt x="2361717" y="126160"/>
+                </a:lnTo>
+                <a:close/>
+                <a:lnTo>
+                  <a:pt x="2366716" y="125090"/>
+                </a:lnTo>
+                <a:close/>
+                <a:lnTo>
+                  <a:pt x="2371700" y="124019"/>
+                </a:lnTo>
+                <a:close/>
+                <a:lnTo>
+                  <a:pt x="2376668" y="122945"/>
+                </a:lnTo>
+                <a:close/>
+                <a:lnTo>
+                  <a:pt x="2381623" y="121867"/>
+                </a:lnTo>
+                <a:close/>
+                <a:lnTo>
+                  <a:pt x="2386567" y="120785"/>
+                </a:lnTo>
+                <a:close/>
+                <a:lnTo>
+                  <a:pt x="2391505" y="119699"/>
+                </a:lnTo>
+                <a:close/>
+                <a:lnTo>
+                  <a:pt x="2396437" y="118610"/>
+                </a:lnTo>
+                <a:close/>
+                <a:lnTo>
+                  <a:pt x="2401369" y="117518"/>
+                </a:lnTo>
+                <a:close/>
+                <a:lnTo>
+                  <a:pt x="2406303" y="116421"/>
+                </a:lnTo>
+                <a:close/>
+                <a:lnTo>
+                  <a:pt x="2411241" y="115321"/>
+                </a:lnTo>
+                <a:close/>
+                <a:lnTo>
+                  <a:pt x="2416185" y="114220"/>
+                </a:lnTo>
+                <a:close/>
+                <a:lnTo>
+                  <a:pt x="2421131" y="113119"/>
+                </a:lnTo>
+                <a:close/>
+                <a:lnTo>
+                  <a:pt x="2426079" y="112024"/>
+                </a:lnTo>
+                <a:close/>
+                <a:lnTo>
+                  <a:pt x="2431027" y="110935"/>
+                </a:lnTo>
+                <a:close/>
+                <a:lnTo>
+                  <a:pt x="2435973" y="109856"/>
+                </a:lnTo>
+                <a:close/>
+                <a:lnTo>
+                  <a:pt x="2440917" y="108791"/>
+                </a:lnTo>
+                <a:close/>
+                <a:lnTo>
+                  <a:pt x="2445855" y="107741"/>
+                </a:lnTo>
+                <a:close/>
+                <a:lnTo>
+                  <a:pt x="2450789" y="106708"/>
+                </a:lnTo>
+                <a:close/>
+                <a:lnTo>
+                  <a:pt x="2455721" y="105688"/>
+                </a:lnTo>
+                <a:close/>
+                <a:lnTo>
+                  <a:pt x="2460653" y="104674"/>
+                </a:lnTo>
+                <a:close/>
+                <a:lnTo>
+                  <a:pt x="2465589" y="103662"/>
+                </a:lnTo>
+                <a:close/>
+                <a:lnTo>
+                  <a:pt x="2470533" y="102646"/>
+                </a:lnTo>
+                <a:close/>
+                <a:lnTo>
+                  <a:pt x="2475486" y="101620"/>
+                </a:lnTo>
+                <a:close/>
+                <a:lnTo>
+                  <a:pt x="2480453" y="100580"/>
+                </a:lnTo>
+                <a:close/>
+                <a:lnTo>
+                  <a:pt x="2485437" y="99521"/>
+                </a:lnTo>
+                <a:close/>
+                <a:lnTo>
+                  <a:pt x="2490435" y="98442"/>
+                </a:lnTo>
+                <a:close/>
+                <a:lnTo>
+                  <a:pt x="2495444" y="97351"/>
+                </a:lnTo>
+                <a:close/>
+                <a:lnTo>
+                  <a:pt x="2500459" y="96253"/>
+                </a:lnTo>
+                <a:close/>
+                <a:lnTo>
+                  <a:pt x="2505474" y="95154"/>
+                </a:lnTo>
+                <a:close/>
+                <a:lnTo>
+                  <a:pt x="2510486" y="94060"/>
+                </a:lnTo>
+                <a:close/>
+                <a:lnTo>
+                  <a:pt x="2515490" y="92977"/>
+                </a:lnTo>
+                <a:close/>
+                <a:lnTo>
+                  <a:pt x="2520481" y="91911"/>
+                </a:lnTo>
+                <a:close/>
+                <a:lnTo>
+                  <a:pt x="2525454" y="90866"/>
+                </a:lnTo>
+                <a:close/>
+                <a:lnTo>
+                  <a:pt x="2530414" y="89838"/>
+                </a:lnTo>
+                <a:close/>
+                <a:lnTo>
+                  <a:pt x="2535361" y="88822"/>
+                </a:lnTo>
+                <a:close/>
+                <a:lnTo>
+                  <a:pt x="2540300" y="87810"/>
+                </a:lnTo>
+                <a:close/>
+                <a:lnTo>
+                  <a:pt x="2545234" y="86798"/>
+                </a:lnTo>
+                <a:close/>
+                <a:lnTo>
+                  <a:pt x="2550165" y="85779"/>
+                </a:lnTo>
+                <a:close/>
+                <a:lnTo>
+                  <a:pt x="2555098" y="84747"/>
+                </a:lnTo>
+                <a:close/>
+                <a:lnTo>
+                  <a:pt x="2560034" y="83697"/>
+                </a:lnTo>
+                <a:close/>
+                <a:lnTo>
+                  <a:pt x="2564976" y="82626"/>
+                </a:lnTo>
+                <a:close/>
+                <a:lnTo>
+                  <a:pt x="2569921" y="81541"/>
+                </a:lnTo>
+                <a:close/>
+                <a:lnTo>
+                  <a:pt x="2574869" y="80447"/>
+                </a:lnTo>
+                <a:close/>
+                <a:lnTo>
+                  <a:pt x="2579817" y="79348"/>
+                </a:lnTo>
+                <a:close/>
+                <a:lnTo>
+                  <a:pt x="2584764" y="78252"/>
+                </a:lnTo>
+                <a:close/>
+                <a:lnTo>
+                  <a:pt x="2589709" y="77162"/>
+                </a:lnTo>
+                <a:close/>
+                <a:lnTo>
+                  <a:pt x="2594649" y="76085"/>
+                </a:lnTo>
+                <a:close/>
+                <a:lnTo>
+                  <a:pt x="2599585" y="75024"/>
+                </a:lnTo>
+                <a:close/>
+                <a:lnTo>
+                  <a:pt x="2604517" y="73980"/>
+                </a:lnTo>
+                <a:close/>
+                <a:lnTo>
+                  <a:pt x="2609449" y="72950"/>
+                </a:lnTo>
+                <a:close/>
+                <a:lnTo>
+                  <a:pt x="2614384" y="71928"/>
+                </a:lnTo>
+                <a:close/>
+                <a:lnTo>
+                  <a:pt x="2619325" y="70914"/>
+                </a:lnTo>
+                <a:close/>
+                <a:lnTo>
+                  <a:pt x="2624275" y="69903"/>
+                </a:lnTo>
+                <a:close/>
+                <a:lnTo>
+                  <a:pt x="2629236" y="68892"/>
+                </a:lnTo>
+                <a:close/>
+                <a:lnTo>
+                  <a:pt x="2634213" y="67879"/>
+                </a:lnTo>
+                <a:close/>
+                <a:lnTo>
+                  <a:pt x="2639206" y="66860"/>
+                </a:lnTo>
+                <a:close/>
+                <a:lnTo>
+                  <a:pt x="2644211" y="65838"/>
+                </a:lnTo>
+                <a:close/>
+                <a:lnTo>
+                  <a:pt x="2649223" y="64812"/>
+                </a:lnTo>
+                <a:close/>
+                <a:lnTo>
+                  <a:pt x="2654238" y="63785"/>
+                </a:lnTo>
+                <a:close/>
+                <a:lnTo>
+                  <a:pt x="2659252" y="62757"/>
+                </a:lnTo>
+                <a:close/>
+                <a:lnTo>
+                  <a:pt x="2664260" y="61728"/>
+                </a:lnTo>
+                <a:close/>
+                <a:lnTo>
+                  <a:pt x="2669258" y="60701"/>
+                </a:lnTo>
+                <a:close/>
+                <a:lnTo>
+                  <a:pt x="2674241" y="59676"/>
+                </a:lnTo>
+                <a:close/>
+                <a:lnTo>
+                  <a:pt x="2679209" y="58653"/>
+                </a:lnTo>
+                <a:close/>
+                <a:lnTo>
+                  <a:pt x="2684165" y="57631"/>
+                </a:lnTo>
+                <a:close/>
+                <a:lnTo>
+                  <a:pt x="2689110" y="56609"/>
+                </a:lnTo>
+                <a:close/>
+                <a:lnTo>
+                  <a:pt x="2694046" y="55586"/>
+                </a:lnTo>
+                <a:close/>
+                <a:lnTo>
+                  <a:pt x="2698976" y="54560"/>
+                </a:lnTo>
+                <a:close/>
+                <a:lnTo>
+                  <a:pt x="2703903" y="53532"/>
+                </a:lnTo>
+                <a:close/>
+                <a:lnTo>
+                  <a:pt x="2708827" y="52500"/>
+                </a:lnTo>
+                <a:close/>
+                <a:lnTo>
+                  <a:pt x="2713751" y="51463"/>
+                </a:lnTo>
+                <a:close/>
+                <a:lnTo>
+                  <a:pt x="2718678" y="50425"/>
+                </a:lnTo>
+                <a:close/>
+                <a:lnTo>
+                  <a:pt x="2723609" y="49387"/>
+                </a:lnTo>
+                <a:close/>
+                <a:lnTo>
+                  <a:pt x="2728547" y="48354"/>
+                </a:lnTo>
+                <a:close/>
+                <a:lnTo>
+                  <a:pt x="2733493" y="47328"/>
+                </a:lnTo>
+                <a:close/>
+                <a:lnTo>
+                  <a:pt x="2738450" y="46311"/>
+                </a:lnTo>
+                <a:close/>
+                <a:lnTo>
+                  <a:pt x="2743421" y="45308"/>
+                </a:lnTo>
+                <a:close/>
+                <a:lnTo>
+                  <a:pt x="2748406" y="44320"/>
+                </a:lnTo>
+                <a:close/>
+                <a:lnTo>
+                  <a:pt x="2753406" y="43347"/>
+                </a:lnTo>
+                <a:close/>
+                <a:lnTo>
+                  <a:pt x="2758415" y="42385"/>
+                </a:lnTo>
+                <a:close/>
+                <a:lnTo>
+                  <a:pt x="2763429" y="41429"/>
+                </a:lnTo>
+                <a:close/>
+                <a:lnTo>
+                  <a:pt x="2768444" y="40475"/>
+                </a:lnTo>
+                <a:close/>
+                <a:lnTo>
+                  <a:pt x="2773456" y="39518"/>
+                </a:lnTo>
+                <a:close/>
+                <a:lnTo>
+                  <a:pt x="2778459" y="38554"/>
+                </a:lnTo>
+                <a:close/>
+                <a:lnTo>
+                  <a:pt x="2783449" y="37578"/>
+                </a:lnTo>
+                <a:close/>
+                <a:lnTo>
+                  <a:pt x="2788424" y="36587"/>
+                </a:lnTo>
+                <a:close/>
+                <a:lnTo>
+                  <a:pt x="2793384" y="35581"/>
+                </a:lnTo>
+                <a:close/>
+                <a:lnTo>
+                  <a:pt x="2798332" y="34563"/>
+                </a:lnTo>
+                <a:close/>
+                <a:lnTo>
+                  <a:pt x="2803272" y="33536"/>
+                </a:lnTo>
+                <a:close/>
+                <a:lnTo>
+                  <a:pt x="2808206" y="32501"/>
+                </a:lnTo>
+                <a:close/>
+                <a:lnTo>
+                  <a:pt x="2813138" y="31461"/>
+                </a:lnTo>
+                <a:close/>
+                <a:lnTo>
+                  <a:pt x="2818070" y="30418"/>
+                </a:lnTo>
+                <a:close/>
+                <a:lnTo>
+                  <a:pt x="2823006" y="29375"/>
+                </a:lnTo>
+                <a:close/>
+                <a:lnTo>
+                  <a:pt x="2827947" y="28333"/>
+                </a:lnTo>
+                <a:close/>
+                <a:lnTo>
+                  <a:pt x="2832892" y="27294"/>
+                </a:lnTo>
+                <a:close/>
+                <a:lnTo>
+                  <a:pt x="2837839" y="26260"/>
+                </a:lnTo>
+                <a:close/>
+                <a:lnTo>
+                  <a:pt x="2842787" y="25231"/>
+                </a:lnTo>
+                <a:close/>
+                <a:lnTo>
+                  <a:pt x="2847734" y="24210"/>
+                </a:lnTo>
+                <a:close/>
+                <a:lnTo>
+                  <a:pt x="2852679" y="23199"/>
+                </a:lnTo>
+                <a:close/>
+                <a:lnTo>
+                  <a:pt x="2857621" y="22197"/>
+                </a:lnTo>
+                <a:close/>
+                <a:lnTo>
+                  <a:pt x="2862559" y="21208"/>
+                </a:lnTo>
+                <a:close/>
+                <a:lnTo>
+                  <a:pt x="2867493" y="20230"/>
+                </a:lnTo>
+                <a:close/>
+                <a:lnTo>
+                  <a:pt x="2872426" y="19260"/>
+                </a:lnTo>
+                <a:close/>
+                <a:lnTo>
+                  <a:pt x="2877362" y="18297"/>
+                </a:lnTo>
+                <a:close/>
+                <a:lnTo>
+                  <a:pt x="2882303" y="17339"/>
+                </a:lnTo>
+                <a:close/>
+                <a:lnTo>
+                  <a:pt x="2887251" y="16384"/>
+                </a:lnTo>
+                <a:close/>
+                <a:lnTo>
+                  <a:pt x="2892210" y="15429"/>
+                </a:lnTo>
+                <a:close/>
+                <a:lnTo>
+                  <a:pt x="2897181" y="14473"/>
+                </a:lnTo>
+                <a:close/>
+                <a:lnTo>
+                  <a:pt x="2902167" y="13514"/>
+                </a:lnTo>
+                <a:close/>
+                <a:lnTo>
+                  <a:pt x="2907164" y="12553"/>
+                </a:lnTo>
+                <a:close/>
+                <a:lnTo>
+                  <a:pt x="2912170" y="11589"/>
+                </a:lnTo>
+                <a:close/>
+                <a:lnTo>
+                  <a:pt x="2917182" y="10623"/>
+                </a:lnTo>
+                <a:close/>
+                <a:lnTo>
+                  <a:pt x="2922195" y="9657"/>
+                </a:lnTo>
+                <a:close/>
+                <a:lnTo>
+                  <a:pt x="2927209" y="8689"/>
+                </a:lnTo>
+                <a:close/>
+                <a:lnTo>
+                  <a:pt x="2932219" y="7720"/>
+                </a:lnTo>
+                <a:close/>
+                <a:lnTo>
+                  <a:pt x="2937222" y="6751"/>
+                </a:lnTo>
+                <a:close/>
+                <a:lnTo>
+                  <a:pt x="2942215" y="5783"/>
+                </a:lnTo>
+                <a:close/>
+                <a:lnTo>
+                  <a:pt x="2947196" y="4815"/>
+                </a:lnTo>
+                <a:close/>
+                <a:lnTo>
+                  <a:pt x="2952161" y="3848"/>
+                </a:lnTo>
+                <a:close/>
+                <a:lnTo>
+                  <a:pt x="2957106" y="2883"/>
+                </a:lnTo>
+                <a:close/>
+                <a:lnTo>
+                  <a:pt x="2962030" y="1920"/>
+                </a:lnTo>
+                <a:close/>
+                <a:lnTo>
+                  <a:pt x="2966929" y="959"/>
+                </a:lnTo>
+                <a:close/>
+                <a:lnTo>
+                  <a:pt x="2971800" y="0"/>
                 </a:lnTo>
                 <a:close/>
               </a:path>
@@ -5623,8 +5623,8 @@
         </p:nvCxnSpPr>
         <p:spPr>
           <a:xfrm flipV="1">
-            <a:off x="5943600.0" y="1383898.68"/>
-            <a:ext cx="0.0" cy="1187851.32"/>
+            <a:off x="6400800.0" y="1657350.0"/>
+            <a:ext cx="0.0" cy="914400.0"/>
           </a:xfrm>
           <a:prstGeom prst="line">
             <a:avLst/>
@@ -5659,7 +5659,7 @@
         </p:nvSpPr>
         <p:spPr>
           <a:xfrm>
-            <a:off x="5854700" y="1294998"/>
+            <a:off x="6311900" y="1568450"/>
             <a:ext cx="177800" cy="177800"/>
           </a:xfrm>
           <a:prstGeom prst="ellipse">
@@ -5704,7 +5704,7 @@
         </p:nvSpPr>
         <p:spPr>
           <a:xfrm>
-            <a:off x="5854700" y="1797050"/>
+            <a:off x="6311900" y="1934210"/>
             <a:ext cx="177800" cy="177800"/>
           </a:xfrm>
           <a:prstGeom prst="ellipse">
@@ -5749,8 +5749,8 @@
         </p:nvCxnSpPr>
         <p:spPr>
           <a:xfrm flipV="1">
-            <a:off x="5623560.0" y="1424178.0"/>
-            <a:ext cx="228600.0" cy="107487.71999999997"/>
+            <a:off x="5852160.0" y="1741017.6"/>
+            <a:ext cx="228600.0" cy="65836.79999999981"/>
           </a:xfrm>
           <a:prstGeom prst="line">
             <a:avLst/>
@@ -5784,8 +5784,8 @@
         </p:nvCxnSpPr>
         <p:spPr>
           <a:xfrm flipH="1">
-            <a:off x="6035040.0" y="1235262.96"/>
-            <a:ext cx="274320.0" cy="109682.28000000003"/>
+            <a:off x="6629400.0" y="1549450.7999999998"/>
+            <a:ext cx="228600.0" cy="52578.00000000023"/>
           </a:xfrm>
           <a:prstGeom prst="line">
             <a:avLst/>
@@ -5819,7 +5819,7 @@
         </p:nvSpPr>
         <p:spPr>
           <a:xfrm>
-            <a:off x="5689600" y="425450"/>
+            <a:off x="5918200" y="974090"/>
             <a:ext cx="1524000" cy="508000"/>
           </a:xfrm>
           <a:prstGeom prst="rect">
@@ -5855,7 +5855,7 @@
         </p:nvSpPr>
         <p:spPr>
           <a:xfrm>
-            <a:off x="5689600" y="2391410"/>
+            <a:off x="6146800" y="2391410"/>
             <a:ext cx="1524000" cy="508000"/>
           </a:xfrm>
           <a:prstGeom prst="rect">
@@ -5891,7 +5891,7 @@
         </p:nvSpPr>
         <p:spPr>
           <a:xfrm>
-            <a:off x="4180840" y="2391410"/>
+            <a:off x="4157980" y="2391410"/>
             <a:ext cx="1524000" cy="508000"/>
           </a:xfrm>
           <a:prstGeom prst="rect">

--- a/output/6.pptx
+++ b/output/6.pptx
@@ -3104,8 +3104,8 @@
         </p:nvCxnSpPr>
         <p:spPr>
           <a:xfrm>
-            <a:off x="4114800.0" y="2571750.0"/>
-            <a:ext cx="3429000.0" cy="0.0"/>
+            <a:off x="2286000.0" y="2571750.0"/>
+            <a:ext cx="4572000.0" cy="0.0"/>
           </a:xfrm>
           <a:prstGeom prst="line">
             <a:avLst/>
@@ -3139,8 +3139,8 @@
         </p:nvCxnSpPr>
         <p:spPr>
           <a:xfrm flipV="1">
-            <a:off x="4572000.0" y="971550.0"/>
-            <a:ext cx="0.0" cy="2057400.0"/>
+            <a:off x="4572000.0" y="285750.0"/>
+            <a:ext cx="0.0" cy="4572000.0"/>
           </a:xfrm>
           <a:prstGeom prst="line">
             <a:avLst/>
@@ -3174,8 +3174,8 @@
         </p:nvSpPr>
         <p:spPr>
           <a:xfrm>
-            <a:off x="4572000" y="1406347"/>
-            <a:ext cx="2971800" cy="1165403"/>
+            <a:off x="4572000" y="582016"/>
+            <a:ext cx="3566160" cy="1989734"/>
           </a:xfrm>
           <a:custGeom>
             <a:avLst/>
@@ -3184,2404 +3184,2404 @@
             <a:cxnLst/>
             <a:rect l="l" t="t" r="r" b="b"/>
             <a:pathLst>
-              <a:path w="2971800" h="1165403">
+              <a:path w="3566160" h="1989734">
                 <a:moveTo>
-                  <a:pt x="0" y="1165403"/>
+                  <a:pt x="0" y="1989734"/>
                 </a:moveTo>
                 <a:lnTo>
-                  <a:pt x="4871" y="1140881"/>
-                </a:lnTo>
-                <a:close/>
-                <a:lnTo>
-                  <a:pt x="9770" y="1118889"/>
-                </a:lnTo>
-                <a:close/>
-                <a:lnTo>
-                  <a:pt x="14694" y="1099246"/>
-                </a:lnTo>
-                <a:close/>
-                <a:lnTo>
-                  <a:pt x="19639" y="1081771"/>
-                </a:lnTo>
-                <a:close/>
-                <a:lnTo>
-                  <a:pt x="24604" y="1066281"/>
-                </a:lnTo>
-                <a:close/>
-                <a:lnTo>
-                  <a:pt x="29585" y="1052596"/>
-                </a:lnTo>
-                <a:close/>
-                <a:lnTo>
-                  <a:pt x="34578" y="1040534"/>
-                </a:lnTo>
-                <a:close/>
-                <a:lnTo>
-                  <a:pt x="39581" y="1029914"/>
-                </a:lnTo>
-                <a:close/>
-                <a:lnTo>
-                  <a:pt x="44591" y="1020554"/>
-                </a:lnTo>
-                <a:close/>
-                <a:lnTo>
-                  <a:pt x="49605" y="1012273"/>
-                </a:lnTo>
-                <a:close/>
-                <a:lnTo>
-                  <a:pt x="54618" y="1004889"/>
-                </a:lnTo>
-                <a:close/>
-                <a:lnTo>
-                  <a:pt x="59630" y="998221"/>
-                </a:lnTo>
-                <a:close/>
-                <a:lnTo>
-                  <a:pt x="64636" y="992088"/>
-                </a:lnTo>
-                <a:close/>
-                <a:lnTo>
-                  <a:pt x="69633" y="986308"/>
-                </a:lnTo>
-                <a:close/>
-                <a:lnTo>
-                  <a:pt x="74619" y="980699"/>
-                </a:lnTo>
-                <a:close/>
-                <a:lnTo>
-                  <a:pt x="79590" y="975100"/>
-                </a:lnTo>
-                <a:close/>
-                <a:lnTo>
-                  <a:pt x="84549" y="969484"/>
-                </a:lnTo>
-                <a:close/>
-                <a:lnTo>
-                  <a:pt x="89497" y="963877"/>
-                </a:lnTo>
-                <a:close/>
-                <a:lnTo>
-                  <a:pt x="94438" y="958304"/>
-                </a:lnTo>
-                <a:close/>
-                <a:lnTo>
-                  <a:pt x="99374" y="952791"/>
-                </a:lnTo>
-                <a:close/>
-                <a:lnTo>
-                  <a:pt x="104307" y="947366"/>
-                </a:lnTo>
-                <a:close/>
-                <a:lnTo>
-                  <a:pt x="109241" y="942053"/>
-                </a:lnTo>
-                <a:close/>
-                <a:lnTo>
-                  <a:pt x="114179" y="936879"/>
-                </a:lnTo>
-                <a:close/>
-                <a:lnTo>
-                  <a:pt x="119121" y="931859"/>
-                </a:lnTo>
-                <a:close/>
-                <a:lnTo>
-                  <a:pt x="124066" y="926983"/>
-                </a:lnTo>
-                <a:close/>
-                <a:lnTo>
-                  <a:pt x="129013" y="922241"/>
-                </a:lnTo>
-                <a:close/>
-                <a:lnTo>
-                  <a:pt x="133961" y="917620"/>
-                </a:lnTo>
-                <a:close/>
-                <a:lnTo>
-                  <a:pt x="138908" y="913110"/>
-                </a:lnTo>
-                <a:close/>
-                <a:lnTo>
-                  <a:pt x="143853" y="908699"/>
-                </a:lnTo>
-                <a:close/>
-                <a:lnTo>
-                  <a:pt x="148794" y="904376"/>
-                </a:lnTo>
-                <a:close/>
-                <a:lnTo>
-                  <a:pt x="153730" y="900129"/>
-                </a:lnTo>
-                <a:close/>
-                <a:lnTo>
-                  <a:pt x="158662" y="895952"/>
-                </a:lnTo>
-                <a:close/>
-                <a:lnTo>
-                  <a:pt x="163594" y="891837"/>
-                </a:lnTo>
-                <a:close/>
-                <a:lnTo>
-                  <a:pt x="168528" y="887779"/>
-                </a:lnTo>
-                <a:close/>
-                <a:lnTo>
-                  <a:pt x="173468" y="883772"/>
-                </a:lnTo>
-                <a:close/>
-                <a:lnTo>
-                  <a:pt x="178416" y="879809"/>
-                </a:lnTo>
-                <a:close/>
-                <a:lnTo>
-                  <a:pt x="183376" y="875885"/>
-                </a:lnTo>
-                <a:close/>
-                <a:lnTo>
-                  <a:pt x="188351" y="871994"/>
-                </a:lnTo>
-                <a:close/>
-                <a:lnTo>
-                  <a:pt x="193341" y="868132"/>
-                </a:lnTo>
-                <a:close/>
-                <a:lnTo>
-                  <a:pt x="198344" y="864301"/>
-                </a:lnTo>
-                <a:close/>
-                <a:lnTo>
-                  <a:pt x="203356" y="860506"/>
-                </a:lnTo>
-                <a:close/>
-                <a:lnTo>
-                  <a:pt x="208371" y="856750"/>
-                </a:lnTo>
-                <a:close/>
-                <a:lnTo>
-                  <a:pt x="213385" y="853037"/>
-                </a:lnTo>
-                <a:close/>
-                <a:lnTo>
-                  <a:pt x="218394" y="849371"/>
-                </a:lnTo>
-                <a:close/>
-                <a:lnTo>
-                  <a:pt x="223394" y="845756"/>
-                </a:lnTo>
-                <a:close/>
-                <a:lnTo>
-                  <a:pt x="228379" y="842196"/>
-                </a:lnTo>
-                <a:close/>
-                <a:lnTo>
-                  <a:pt x="233350" y="838690"/>
-                </a:lnTo>
-                <a:close/>
-                <a:lnTo>
-                  <a:pt x="238307" y="835236"/>
-                </a:lnTo>
-                <a:close/>
-                <a:lnTo>
-                  <a:pt x="243253" y="831831"/>
-                </a:lnTo>
-                <a:close/>
-                <a:lnTo>
-                  <a:pt x="248191" y="828472"/>
-                </a:lnTo>
-                <a:close/>
-                <a:lnTo>
-                  <a:pt x="253122" y="825154"/>
-                </a:lnTo>
-                <a:close/>
-                <a:lnTo>
-                  <a:pt x="258049" y="821876"/>
-                </a:lnTo>
-                <a:close/>
-                <a:lnTo>
-                  <a:pt x="262973" y="818633"/>
-                </a:lnTo>
-                <a:close/>
-                <a:lnTo>
-                  <a:pt x="267897" y="815423"/>
-                </a:lnTo>
-                <a:close/>
-                <a:lnTo>
-                  <a:pt x="272824" y="812242"/>
-                </a:lnTo>
-                <a:close/>
-                <a:lnTo>
-                  <a:pt x="277754" y="809086"/>
-                </a:lnTo>
-                <a:close/>
-                <a:lnTo>
-                  <a:pt x="282690" y="805952"/>
-                </a:lnTo>
-                <a:close/>
-                <a:lnTo>
-                  <a:pt x="287635" y="802836"/>
-                </a:lnTo>
-                <a:close/>
-                <a:lnTo>
-                  <a:pt x="292591" y="799734"/>
-                </a:lnTo>
-                <a:close/>
-                <a:lnTo>
-                  <a:pt x="297559" y="796644"/>
-                </a:lnTo>
-                <a:close/>
-                <a:lnTo>
-                  <a:pt x="302542" y="793561"/>
-                </a:lnTo>
-                <a:close/>
-                <a:lnTo>
-                  <a:pt x="307540" y="790485"/>
-                </a:lnTo>
-                <a:close/>
-                <a:lnTo>
-                  <a:pt x="312548" y="787421"/>
-                </a:lnTo>
-                <a:close/>
-                <a:lnTo>
-                  <a:pt x="317562" y="784373"/>
-                </a:lnTo>
-                <a:close/>
-                <a:lnTo>
-                  <a:pt x="322577" y="781348"/>
-                </a:lnTo>
-                <a:close/>
-                <a:lnTo>
-                  <a:pt x="327589" y="778349"/>
-                </a:lnTo>
-                <a:close/>
-                <a:lnTo>
-                  <a:pt x="332594" y="775382"/>
-                </a:lnTo>
-                <a:close/>
-                <a:lnTo>
-                  <a:pt x="337587" y="772452"/>
-                </a:lnTo>
-                <a:close/>
-                <a:lnTo>
-                  <a:pt x="342564" y="769564"/>
-                </a:lnTo>
-                <a:close/>
-                <a:lnTo>
-                  <a:pt x="347525" y="766715"/>
-                </a:lnTo>
-                <a:close/>
-                <a:lnTo>
-                  <a:pt x="352475" y="763903"/>
-                </a:lnTo>
-                <a:close/>
-                <a:lnTo>
-                  <a:pt x="357416" y="761123"/>
-                </a:lnTo>
-                <a:close/>
-                <a:lnTo>
-                  <a:pt x="362351" y="758372"/>
-                </a:lnTo>
-                <a:close/>
-                <a:lnTo>
-                  <a:pt x="367283" y="755644"/>
-                </a:lnTo>
-                <a:close/>
-                <a:lnTo>
-                  <a:pt x="372215" y="752937"/>
-                </a:lnTo>
-                <a:close/>
-                <a:lnTo>
-                  <a:pt x="377151" y="750247"/>
-                </a:lnTo>
-                <a:close/>
-                <a:lnTo>
-                  <a:pt x="382091" y="747569"/>
-                </a:lnTo>
-                <a:close/>
-                <a:lnTo>
-                  <a:pt x="387036" y="744903"/>
-                </a:lnTo>
-                <a:close/>
-                <a:lnTo>
-                  <a:pt x="391983" y="742245"/>
-                </a:lnTo>
-                <a:close/>
-                <a:lnTo>
-                  <a:pt x="396931" y="739596"/>
-                </a:lnTo>
-                <a:close/>
-                <a:lnTo>
-                  <a:pt x="401879" y="736952"/>
-                </a:lnTo>
-                <a:close/>
-                <a:lnTo>
-                  <a:pt x="406824" y="734312"/>
-                </a:lnTo>
-                <a:close/>
-                <a:lnTo>
-                  <a:pt x="411766" y="731674"/>
-                </a:lnTo>
-                <a:close/>
-                <a:lnTo>
-                  <a:pt x="416702" y="729037"/>
-                </a:lnTo>
-                <a:close/>
-                <a:lnTo>
-                  <a:pt x="421635" y="726403"/>
-                </a:lnTo>
-                <a:close/>
-                <a:lnTo>
-                  <a:pt x="426566" y="723776"/>
-                </a:lnTo>
-                <a:close/>
-                <a:lnTo>
-                  <a:pt x="431500" y="721161"/>
-                </a:lnTo>
-                <a:close/>
-                <a:lnTo>
-                  <a:pt x="436439" y="718563"/>
-                </a:lnTo>
-                <a:close/>
-                <a:lnTo>
-                  <a:pt x="441386" y="715986"/>
-                </a:lnTo>
-                <a:close/>
-                <a:lnTo>
-                  <a:pt x="446346" y="713435"/>
-                </a:lnTo>
-                <a:close/>
-                <a:lnTo>
-                  <a:pt x="451319" y="710915"/>
-                </a:lnTo>
-                <a:close/>
-                <a:lnTo>
-                  <a:pt x="456310" y="708428"/>
-                </a:lnTo>
-                <a:close/>
-                <a:lnTo>
-                  <a:pt x="461314" y="705973"/>
-                </a:lnTo>
-                <a:close/>
-                <a:lnTo>
-                  <a:pt x="466326" y="703544"/>
-                </a:lnTo>
-                <a:close/>
-                <a:lnTo>
-                  <a:pt x="471341" y="701137"/>
-                </a:lnTo>
-                <a:close/>
-                <a:lnTo>
-                  <a:pt x="476356" y="698748"/>
-                </a:lnTo>
-                <a:close/>
-                <a:lnTo>
-                  <a:pt x="481365" y="696372"/>
-                </a:lnTo>
-                <a:close/>
-                <a:lnTo>
-                  <a:pt x="486363" y="694004"/>
-                </a:lnTo>
-                <a:close/>
-                <a:lnTo>
-                  <a:pt x="491347" y="691642"/>
-                </a:lnTo>
-                <a:close/>
-                <a:lnTo>
-                  <a:pt x="496314" y="689281"/>
-                </a:lnTo>
-                <a:close/>
-                <a:lnTo>
-                  <a:pt x="501267" y="686923"/>
-                </a:lnTo>
-                <a:close/>
-                <a:lnTo>
-                  <a:pt x="506211" y="684567"/>
-                </a:lnTo>
-                <a:close/>
-                <a:lnTo>
-                  <a:pt x="511147" y="682215"/>
-                </a:lnTo>
-                <a:close/>
-                <a:lnTo>
-                  <a:pt x="516079" y="679867"/>
-                </a:lnTo>
-                <a:close/>
-                <a:lnTo>
-                  <a:pt x="521011" y="677522"/>
-                </a:lnTo>
-                <a:close/>
-                <a:lnTo>
-                  <a:pt x="525945" y="675182"/>
-                </a:lnTo>
-                <a:close/>
-                <a:lnTo>
-                  <a:pt x="530883" y="672848"/>
-                </a:lnTo>
-                <a:close/>
-                <a:lnTo>
-                  <a:pt x="535827" y="670521"/>
-                </a:lnTo>
-                <a:close/>
-                <a:lnTo>
-                  <a:pt x="540773" y="668203"/>
-                </a:lnTo>
-                <a:close/>
-                <a:lnTo>
-                  <a:pt x="545721" y="665899"/>
-                </a:lnTo>
-                <a:close/>
-                <a:lnTo>
-                  <a:pt x="550669" y="663610"/>
-                </a:lnTo>
-                <a:close/>
-                <a:lnTo>
-                  <a:pt x="555615" y="661340"/>
-                </a:lnTo>
-                <a:close/>
-                <a:lnTo>
-                  <a:pt x="560559" y="659090"/>
-                </a:lnTo>
-                <a:close/>
-                <a:lnTo>
-                  <a:pt x="565497" y="656865"/>
-                </a:lnTo>
-                <a:close/>
-                <a:lnTo>
-                  <a:pt x="570431" y="654663"/>
-                </a:lnTo>
-                <a:close/>
-                <a:lnTo>
-                  <a:pt x="575363" y="652480"/>
-                </a:lnTo>
-                <a:close/>
-                <a:lnTo>
-                  <a:pt x="580295" y="650312"/>
-                </a:lnTo>
-                <a:close/>
-                <a:lnTo>
-                  <a:pt x="585233" y="648153"/>
-                </a:lnTo>
-                <a:close/>
-                <a:lnTo>
-                  <a:pt x="590177" y="645998"/>
-                </a:lnTo>
-                <a:close/>
-                <a:lnTo>
-                  <a:pt x="595132" y="643843"/>
-                </a:lnTo>
-                <a:close/>
-                <a:lnTo>
-                  <a:pt x="600100" y="641681"/>
-                </a:lnTo>
-                <a:close/>
-                <a:lnTo>
-                  <a:pt x="605084" y="639508"/>
-                </a:lnTo>
-                <a:close/>
-                <a:lnTo>
-                  <a:pt x="610083" y="637327"/>
-                </a:lnTo>
-                <a:close/>
-                <a:lnTo>
-                  <a:pt x="615091" y="635141"/>
-                </a:lnTo>
-                <a:close/>
-                <a:lnTo>
-                  <a:pt x="620105" y="632955"/>
-                </a:lnTo>
-                <a:close/>
-                <a:lnTo>
-                  <a:pt x="625120" y="630776"/>
-                </a:lnTo>
-                <a:close/>
-                <a:lnTo>
-                  <a:pt x="630132" y="628607"/>
-                </a:lnTo>
-                <a:close/>
-                <a:lnTo>
-                  <a:pt x="635136" y="626453"/>
-                </a:lnTo>
-                <a:close/>
-                <a:lnTo>
-                  <a:pt x="640128" y="624320"/>
-                </a:lnTo>
-                <a:close/>
-                <a:lnTo>
-                  <a:pt x="645104" y="622212"/>
-                </a:lnTo>
-                <a:close/>
-                <a:lnTo>
-                  <a:pt x="650066" y="620125"/>
-                </a:lnTo>
-                <a:close/>
-                <a:lnTo>
-                  <a:pt x="655017" y="618059"/>
-                </a:lnTo>
-                <a:close/>
-                <a:lnTo>
-                  <a:pt x="659958" y="616011"/>
-                </a:lnTo>
-                <a:close/>
-                <a:lnTo>
-                  <a:pt x="664892" y="613979"/>
-                </a:lnTo>
-                <a:close/>
-                <a:lnTo>
-                  <a:pt x="669820" y="611960"/>
-                </a:lnTo>
-                <a:close/>
-                <a:lnTo>
-                  <a:pt x="674745" y="609953"/>
-                </a:lnTo>
-                <a:close/>
-                <a:lnTo>
-                  <a:pt x="679669" y="607954"/>
-                </a:lnTo>
-                <a:close/>
-                <a:lnTo>
-                  <a:pt x="684594" y="605963"/>
-                </a:lnTo>
-                <a:close/>
-                <a:lnTo>
-                  <a:pt x="689522" y="603975"/>
-                </a:lnTo>
-                <a:close/>
-                <a:lnTo>
-                  <a:pt x="694456" y="601990"/>
-                </a:lnTo>
-                <a:close/>
-                <a:lnTo>
-                  <a:pt x="699397" y="600006"/>
-                </a:lnTo>
-                <a:close/>
-                <a:lnTo>
-                  <a:pt x="704348" y="598019"/>
-                </a:lnTo>
-                <a:close/>
-                <a:lnTo>
-                  <a:pt x="709311" y="596027"/>
-                </a:lnTo>
-                <a:close/>
-                <a:lnTo>
-                  <a:pt x="714288" y="594030"/>
-                </a:lnTo>
-                <a:close/>
-                <a:lnTo>
-                  <a:pt x="719280" y="592024"/>
-                </a:lnTo>
-                <a:close/>
-                <a:lnTo>
-                  <a:pt x="724285" y="590015"/>
-                </a:lnTo>
-                <a:close/>
-                <a:lnTo>
-                  <a:pt x="729296" y="588005"/>
-                </a:lnTo>
-                <a:close/>
-                <a:lnTo>
-                  <a:pt x="734312" y="586001"/>
-                </a:lnTo>
-                <a:close/>
-                <a:lnTo>
-                  <a:pt x="739326" y="584007"/>
-                </a:lnTo>
-                <a:close/>
-                <a:lnTo>
-                  <a:pt x="744334" y="582028"/>
-                </a:lnTo>
-                <a:close/>
-                <a:lnTo>
-                  <a:pt x="749332" y="580068"/>
-                </a:lnTo>
-                <a:close/>
-                <a:lnTo>
-                  <a:pt x="754316" y="578132"/>
-                </a:lnTo>
-                <a:close/>
-                <a:lnTo>
-                  <a:pt x="759283" y="576223"/>
-                </a:lnTo>
-                <a:close/>
-                <a:lnTo>
-                  <a:pt x="764237" y="574334"/>
-                </a:lnTo>
-                <a:close/>
-                <a:lnTo>
-                  <a:pt x="769182" y="572463"/>
-                </a:lnTo>
-                <a:close/>
-                <a:lnTo>
-                  <a:pt x="774118" y="570605"/>
-                </a:lnTo>
-                <a:close/>
-                <a:lnTo>
-                  <a:pt x="779051" y="568755"/>
-                </a:lnTo>
-                <a:close/>
-                <a:lnTo>
-                  <a:pt x="783983" y="566909"/>
-                </a:lnTo>
-                <a:close/>
-                <a:lnTo>
-                  <a:pt x="788917" y="565063"/>
-                </a:lnTo>
-                <a:close/>
-                <a:lnTo>
-                  <a:pt x="793855" y="563213"/>
-                </a:lnTo>
-                <a:close/>
-                <a:lnTo>
-                  <a:pt x="798799" y="561358"/>
-                </a:lnTo>
-                <a:close/>
-                <a:lnTo>
-                  <a:pt x="803745" y="559497"/>
-                </a:lnTo>
-                <a:close/>
-                <a:lnTo>
-                  <a:pt x="808693" y="557630"/>
-                </a:lnTo>
-                <a:close/>
-                <a:lnTo>
-                  <a:pt x="813641" y="555758"/>
-                </a:lnTo>
-                <a:close/>
-                <a:lnTo>
-                  <a:pt x="818587" y="553881"/>
-                </a:lnTo>
-                <a:close/>
-                <a:lnTo>
-                  <a:pt x="823531" y="551998"/>
-                </a:lnTo>
-                <a:close/>
-                <a:lnTo>
-                  <a:pt x="828469" y="550110"/>
-                </a:lnTo>
-                <a:close/>
-                <a:lnTo>
-                  <a:pt x="833403" y="548218"/>
-                </a:lnTo>
-                <a:close/>
-                <a:lnTo>
-                  <a:pt x="838335" y="546325"/>
-                </a:lnTo>
-                <a:close/>
-                <a:lnTo>
-                  <a:pt x="843268" y="544437"/>
-                </a:lnTo>
-                <a:close/>
-                <a:lnTo>
-                  <a:pt x="848204" y="542557"/>
-                </a:lnTo>
-                <a:close/>
-                <a:lnTo>
-                  <a:pt x="853148" y="540689"/>
-                </a:lnTo>
-                <a:close/>
-                <a:lnTo>
-                  <a:pt x="858102" y="538838"/>
-                </a:lnTo>
-                <a:close/>
-                <a:lnTo>
-                  <a:pt x="863069" y="537007"/>
-                </a:lnTo>
-                <a:close/>
-                <a:lnTo>
-                  <a:pt x="868052" y="535202"/>
-                </a:lnTo>
-                <a:close/>
-                <a:lnTo>
-                  <a:pt x="873050" y="533421"/>
-                </a:lnTo>
-                <a:close/>
-                <a:lnTo>
-                  <a:pt x="878058" y="531659"/>
-                </a:lnTo>
-                <a:close/>
-                <a:lnTo>
-                  <a:pt x="883071" y="529913"/>
-                </a:lnTo>
-                <a:close/>
-                <a:lnTo>
-                  <a:pt x="888087" y="528177"/>
-                </a:lnTo>
-                <a:close/>
-                <a:lnTo>
-                  <a:pt x="893099" y="526449"/>
-                </a:lnTo>
-                <a:close/>
-                <a:lnTo>
-                  <a:pt x="898104" y="524722"/>
-                </a:lnTo>
-                <a:close/>
-                <a:lnTo>
-                  <a:pt x="903096" y="522993"/>
-                </a:lnTo>
-                <a:close/>
-                <a:lnTo>
-                  <a:pt x="908074" y="521259"/>
-                </a:lnTo>
-                <a:close/>
-                <a:lnTo>
-                  <a:pt x="913037" y="519518"/>
-                </a:lnTo>
-                <a:close/>
-                <a:lnTo>
-                  <a:pt x="917989" y="517773"/>
-                </a:lnTo>
-                <a:close/>
-                <a:lnTo>
-                  <a:pt x="922930" y="516024"/>
-                </a:lnTo>
-                <a:close/>
-                <a:lnTo>
-                  <a:pt x="927864" y="514271"/>
-                </a:lnTo>
-                <a:close/>
-                <a:lnTo>
-                  <a:pt x="932793" y="512515"/>
-                </a:lnTo>
-                <a:close/>
-                <a:lnTo>
-                  <a:pt x="937718" y="510758"/>
-                </a:lnTo>
-                <a:close/>
-                <a:lnTo>
-                  <a:pt x="942642" y="508999"/>
-                </a:lnTo>
-                <a:close/>
-                <a:lnTo>
-                  <a:pt x="947567" y="507240"/>
-                </a:lnTo>
-                <a:close/>
-                <a:lnTo>
-                  <a:pt x="952495" y="505483"/>
-                </a:lnTo>
-                <a:close/>
-                <a:lnTo>
-                  <a:pt x="957428" y="503728"/>
-                </a:lnTo>
-                <a:close/>
-                <a:lnTo>
-                  <a:pt x="962369" y="501977"/>
-                </a:lnTo>
-                <a:close/>
-                <a:lnTo>
-                  <a:pt x="967319" y="500231"/>
-                </a:lnTo>
-                <a:close/>
-                <a:lnTo>
-                  <a:pt x="972281" y="498491"/>
-                </a:lnTo>
-                <a:close/>
-                <a:lnTo>
-                  <a:pt x="977257" y="496760"/>
-                </a:lnTo>
-                <a:close/>
-                <a:lnTo>
-                  <a:pt x="982248" y="495037"/>
-                </a:lnTo>
-                <a:close/>
-                <a:lnTo>
-                  <a:pt x="987251" y="493324"/>
-                </a:lnTo>
-                <a:close/>
-                <a:lnTo>
-                  <a:pt x="992263" y="491621"/>
-                </a:lnTo>
-                <a:close/>
-                <a:lnTo>
-                  <a:pt x="997278" y="489927"/>
-                </a:lnTo>
-                <a:close/>
-                <a:lnTo>
-                  <a:pt x="1002292" y="488244"/>
-                </a:lnTo>
-                <a:close/>
-                <a:lnTo>
-                  <a:pt x="1007301" y="486572"/>
-                </a:lnTo>
-                <a:close/>
-                <a:lnTo>
-                  <a:pt x="1012300" y="484910"/>
-                </a:lnTo>
-                <a:close/>
-                <a:lnTo>
-                  <a:pt x="1017285" y="483259"/>
-                </a:lnTo>
-                <a:close/>
-                <a:lnTo>
-                  <a:pt x="1022254" y="481619"/>
-                </a:lnTo>
-                <a:close/>
-                <a:lnTo>
-                  <a:pt x="1027209" y="479987"/>
-                </a:lnTo>
-                <a:close/>
-                <a:lnTo>
-                  <a:pt x="1032153" y="478360"/>
-                </a:lnTo>
-                <a:close/>
-                <a:lnTo>
-                  <a:pt x="1037091" y="476738"/>
-                </a:lnTo>
-                <a:close/>
-                <a:lnTo>
-                  <a:pt x="1042024" y="475116"/>
-                </a:lnTo>
-                <a:close/>
-                <a:lnTo>
-                  <a:pt x="1046956" y="473494"/>
-                </a:lnTo>
-                <a:close/>
-                <a:lnTo>
-                  <a:pt x="1051889" y="471868"/>
-                </a:lnTo>
-                <a:close/>
-                <a:lnTo>
-                  <a:pt x="1056827" y="470237"/>
-                </a:lnTo>
-                <a:close/>
-                <a:lnTo>
-                  <a:pt x="1061770" y="468602"/>
-                </a:lnTo>
-                <a:close/>
-                <a:lnTo>
-                  <a:pt x="1066717" y="466964"/>
-                </a:lnTo>
-                <a:close/>
-                <a:lnTo>
-                  <a:pt x="1071665" y="465328"/>
-                </a:lnTo>
-                <a:close/>
-                <a:lnTo>
-                  <a:pt x="1076613" y="463695"/>
-                </a:lnTo>
-                <a:close/>
-                <a:lnTo>
-                  <a:pt x="1081559" y="462069"/>
-                </a:lnTo>
-                <a:close/>
-                <a:lnTo>
-                  <a:pt x="1086503" y="460452"/>
-                </a:lnTo>
-                <a:close/>
-                <a:lnTo>
-                  <a:pt x="1091442" y="458847"/>
-                </a:lnTo>
-                <a:close/>
-                <a:lnTo>
-                  <a:pt x="1096376" y="457255"/>
-                </a:lnTo>
-                <a:close/>
-                <a:lnTo>
-                  <a:pt x="1101307" y="455675"/>
-                </a:lnTo>
-                <a:close/>
-                <a:lnTo>
-                  <a:pt x="1106239" y="454104"/>
-                </a:lnTo>
-                <a:close/>
-                <a:lnTo>
-                  <a:pt x="1111175" y="452540"/>
-                </a:lnTo>
-                <a:close/>
-                <a:lnTo>
-                  <a:pt x="1116118" y="450982"/>
-                </a:lnTo>
-                <a:close/>
-                <a:lnTo>
-                  <a:pt x="1121072" y="449426"/>
-                </a:lnTo>
-                <a:close/>
-                <a:lnTo>
-                  <a:pt x="1126038" y="447871"/>
-                </a:lnTo>
-                <a:close/>
-                <a:lnTo>
-                  <a:pt x="1131021" y="446314"/>
-                </a:lnTo>
-                <a:close/>
-                <a:lnTo>
-                  <a:pt x="1136019" y="444754"/>
-                </a:lnTo>
-                <a:close/>
-                <a:lnTo>
-                  <a:pt x="1141027" y="443191"/>
-                </a:lnTo>
-                <a:close/>
-                <a:lnTo>
-                  <a:pt x="1146042" y="441626"/>
-                </a:lnTo>
-                <a:close/>
-                <a:lnTo>
-                  <a:pt x="1151058" y="440057"/>
-                </a:lnTo>
-                <a:close/>
-                <a:lnTo>
-                  <a:pt x="1156070" y="438486"/>
-                </a:lnTo>
-                <a:close/>
-                <a:lnTo>
-                  <a:pt x="1161074" y="436912"/>
-                </a:lnTo>
-                <a:close/>
-                <a:lnTo>
-                  <a:pt x="1166065" y="435335"/>
-                </a:lnTo>
-                <a:close/>
-                <a:lnTo>
-                  <a:pt x="1171040" y="433755"/>
-                </a:lnTo>
-                <a:close/>
-                <a:lnTo>
-                  <a:pt x="1175999" y="432174"/>
-                </a:lnTo>
-                <a:close/>
-                <a:lnTo>
-                  <a:pt x="1180947" y="430596"/>
-                </a:lnTo>
-                <a:close/>
-                <a:lnTo>
-                  <a:pt x="1185886" y="429021"/>
-                </a:lnTo>
-                <a:close/>
-                <a:lnTo>
-                  <a:pt x="1190820" y="427452"/>
-                </a:lnTo>
-                <a:close/>
-                <a:lnTo>
-                  <a:pt x="1195752" y="425891"/>
-                </a:lnTo>
-                <a:close/>
-                <a:lnTo>
-                  <a:pt x="1200684" y="424342"/>
-                </a:lnTo>
-                <a:close/>
-                <a:lnTo>
-                  <a:pt x="1205620" y="422805"/>
-                </a:lnTo>
-                <a:close/>
-                <a:lnTo>
-                  <a:pt x="1210562" y="421281"/>
-                </a:lnTo>
-                <a:close/>
-                <a:lnTo>
-                  <a:pt x="1215507" y="419768"/>
-                </a:lnTo>
-                <a:close/>
-                <a:lnTo>
-                  <a:pt x="1220454" y="418263"/>
-                </a:lnTo>
-                <a:close/>
-                <a:lnTo>
-                  <a:pt x="1225402" y="416763"/>
-                </a:lnTo>
-                <a:close/>
-                <a:lnTo>
-                  <a:pt x="1230350" y="415264"/>
-                </a:lnTo>
-                <a:close/>
-                <a:lnTo>
-                  <a:pt x="1235295" y="413765"/>
-                </a:lnTo>
-                <a:close/>
-                <a:lnTo>
-                  <a:pt x="1240235" y="412262"/>
-                </a:lnTo>
-                <a:close/>
-                <a:lnTo>
-                  <a:pt x="1245171" y="410752"/>
-                </a:lnTo>
-                <a:close/>
-                <a:lnTo>
-                  <a:pt x="1250104" y="409238"/>
-                </a:lnTo>
-                <a:close/>
-                <a:lnTo>
-                  <a:pt x="1255036" y="407722"/>
-                </a:lnTo>
-                <a:close/>
-                <a:lnTo>
-                  <a:pt x="1259970" y="406206"/>
-                </a:lnTo>
-                <a:close/>
-                <a:lnTo>
-                  <a:pt x="1264911" y="404694"/>
-                </a:lnTo>
-                <a:close/>
-                <a:lnTo>
-                  <a:pt x="1269860" y="403188"/>
-                </a:lnTo>
-                <a:close/>
-                <a:lnTo>
-                  <a:pt x="1274821" y="401692"/>
-                </a:lnTo>
-                <a:close/>
-                <a:lnTo>
-                  <a:pt x="1279798" y="400208"/>
-                </a:lnTo>
-                <a:close/>
-                <a:lnTo>
-                  <a:pt x="1284790" y="398737"/>
-                </a:lnTo>
-                <a:close/>
-                <a:lnTo>
-                  <a:pt x="1289794" y="397279"/>
-                </a:lnTo>
-                <a:close/>
-                <a:lnTo>
-                  <a:pt x="1294806" y="395829"/>
-                </a:lnTo>
-                <a:close/>
-                <a:lnTo>
-                  <a:pt x="1299821" y="394387"/>
-                </a:lnTo>
-                <a:close/>
-                <a:lnTo>
-                  <a:pt x="1304835" y="392950"/>
-                </a:lnTo>
-                <a:close/>
-                <a:lnTo>
-                  <a:pt x="1309843" y="391515"/>
-                </a:lnTo>
-                <a:close/>
-                <a:lnTo>
-                  <a:pt x="1314842" y="390080"/>
-                </a:lnTo>
-                <a:close/>
-                <a:lnTo>
-                  <a:pt x="1319825" y="388643"/>
-                </a:lnTo>
-                <a:close/>
-                <a:lnTo>
-                  <a:pt x="1324794" y="387204"/>
-                </a:lnTo>
-                <a:close/>
-                <a:lnTo>
-                  <a:pt x="1329750" y="385761"/>
-                </a:lnTo>
-                <a:close/>
-                <a:lnTo>
-                  <a:pt x="1334696" y="384316"/>
-                </a:lnTo>
-                <a:close/>
-                <a:lnTo>
-                  <a:pt x="1339632" y="382867"/>
-                </a:lnTo>
-                <a:close/>
-                <a:lnTo>
-                  <a:pt x="1344563" y="381416"/>
-                </a:lnTo>
-                <a:close/>
-                <a:lnTo>
-                  <a:pt x="1349489" y="379963"/>
-                </a:lnTo>
-                <a:close/>
-                <a:lnTo>
-                  <a:pt x="1354413" y="378506"/>
-                </a:lnTo>
-                <a:close/>
-                <a:lnTo>
-                  <a:pt x="1359338" y="377048"/>
-                </a:lnTo>
-                <a:close/>
-                <a:lnTo>
-                  <a:pt x="1364264" y="375589"/>
-                </a:lnTo>
-                <a:close/>
-                <a:lnTo>
-                  <a:pt x="1369195" y="374131"/>
-                </a:lnTo>
-                <a:close/>
-                <a:lnTo>
-                  <a:pt x="1374133" y="372678"/>
-                </a:lnTo>
-                <a:close/>
-                <a:lnTo>
-                  <a:pt x="1379079" y="371230"/>
-                </a:lnTo>
-                <a:close/>
-                <a:lnTo>
-                  <a:pt x="1384036" y="369791"/>
-                </a:lnTo>
-                <a:close/>
-                <a:lnTo>
-                  <a:pt x="1389005" y="368362"/>
-                </a:lnTo>
-                <a:close/>
-                <a:lnTo>
-                  <a:pt x="1393990" y="366945"/>
-                </a:lnTo>
-                <a:close/>
-                <a:lnTo>
-                  <a:pt x="1398989" y="365541"/>
-                </a:lnTo>
-                <a:close/>
-                <a:lnTo>
-                  <a:pt x="1403998" y="364146"/>
-                </a:lnTo>
-                <a:close/>
-                <a:lnTo>
-                  <a:pt x="1409012" y="362760"/>
-                </a:lnTo>
-                <a:close/>
-                <a:lnTo>
-                  <a:pt x="1414027" y="361379"/>
-                </a:lnTo>
-                <a:close/>
-                <a:lnTo>
-                  <a:pt x="1419039" y="360002"/>
-                </a:lnTo>
-                <a:close/>
-                <a:lnTo>
-                  <a:pt x="1424043" y="358626"/>
-                </a:lnTo>
-                <a:close/>
-                <a:lnTo>
-                  <a:pt x="1429034" y="357248"/>
-                </a:lnTo>
-                <a:close/>
-                <a:lnTo>
-                  <a:pt x="1434009" y="355867"/>
-                </a:lnTo>
-                <a:close/>
-                <a:lnTo>
-                  <a:pt x="1438969" y="354483"/>
-                </a:lnTo>
-                <a:close/>
-                <a:lnTo>
-                  <a:pt x="1443918" y="353096"/>
-                </a:lnTo>
-                <a:close/>
-                <a:lnTo>
-                  <a:pt x="1448858" y="351708"/>
-                </a:lnTo>
-                <a:close/>
-                <a:lnTo>
-                  <a:pt x="1453792" y="350319"/>
-                </a:lnTo>
-                <a:close/>
-                <a:lnTo>
-                  <a:pt x="1458724" y="348930"/>
-                </a:lnTo>
-                <a:close/>
-                <a:lnTo>
-                  <a:pt x="1463656" y="347541"/>
-                </a:lnTo>
-                <a:close/>
-                <a:lnTo>
-                  <a:pt x="1468592" y="346154"/>
-                </a:lnTo>
-                <a:close/>
-                <a:lnTo>
-                  <a:pt x="1473534" y="344769"/>
-                </a:lnTo>
-                <a:close/>
-                <a:lnTo>
-                  <a:pt x="1478479" y="343384"/>
-                </a:lnTo>
-                <a:close/>
-                <a:lnTo>
-                  <a:pt x="1483426" y="341999"/>
-                </a:lnTo>
-                <a:close/>
-                <a:lnTo>
-                  <a:pt x="1488374" y="340614"/>
-                </a:lnTo>
-                <a:close/>
-                <a:lnTo>
-                  <a:pt x="1493321" y="339228"/>
-                </a:lnTo>
-                <a:close/>
-                <a:lnTo>
-                  <a:pt x="1498266" y="337839"/>
-                </a:lnTo>
-                <a:close/>
-                <a:lnTo>
-                  <a:pt x="1503208" y="336448"/>
-                </a:lnTo>
-                <a:close/>
-                <a:lnTo>
-                  <a:pt x="1508144" y="335053"/>
-                </a:lnTo>
-                <a:close/>
-                <a:lnTo>
-                  <a:pt x="1513076" y="333656"/>
-                </a:lnTo>
-                <a:close/>
-                <a:lnTo>
-                  <a:pt x="1518008" y="332259"/>
-                </a:lnTo>
-                <a:close/>
-                <a:lnTo>
-                  <a:pt x="1522942" y="330864"/>
-                </a:lnTo>
-                <a:close/>
-                <a:lnTo>
-                  <a:pt x="1527882" y="329474"/>
-                </a:lnTo>
-                <a:close/>
-                <a:lnTo>
-                  <a:pt x="1532831" y="328091"/>
-                </a:lnTo>
-                <a:close/>
-                <a:lnTo>
-                  <a:pt x="1537791" y="326717"/>
-                </a:lnTo>
-                <a:close/>
-                <a:lnTo>
-                  <a:pt x="1542766" y="325355"/>
-                </a:lnTo>
-                <a:close/>
-                <a:lnTo>
-                  <a:pt x="1547757" y="324005"/>
-                </a:lnTo>
-                <a:close/>
-                <a:lnTo>
-                  <a:pt x="1552761" y="322667"/>
-                </a:lnTo>
-                <a:close/>
-                <a:lnTo>
-                  <a:pt x="1557773" y="321338"/>
-                </a:lnTo>
-                <a:close/>
-                <a:lnTo>
-                  <a:pt x="1562788" y="320015"/>
-                </a:lnTo>
-                <a:close/>
-                <a:lnTo>
-                  <a:pt x="1567802" y="318698"/>
-                </a:lnTo>
-                <a:close/>
-                <a:lnTo>
-                  <a:pt x="1572811" y="317383"/>
-                </a:lnTo>
-                <a:close/>
-                <a:lnTo>
-                  <a:pt x="1577810" y="316068"/>
-                </a:lnTo>
-                <a:close/>
-                <a:lnTo>
-                  <a:pt x="1582795" y="314751"/>
-                </a:lnTo>
-                <a:close/>
-                <a:lnTo>
-                  <a:pt x="1587764" y="313432"/>
-                </a:lnTo>
-                <a:close/>
-                <a:lnTo>
-                  <a:pt x="1592721" y="312110"/>
-                </a:lnTo>
-                <a:close/>
-                <a:lnTo>
-                  <a:pt x="1597667" y="310786"/>
-                </a:lnTo>
-                <a:close/>
-                <a:lnTo>
-                  <a:pt x="1602605" y="309459"/>
-                </a:lnTo>
-                <a:close/>
-                <a:lnTo>
-                  <a:pt x="1607536" y="308129"/>
-                </a:lnTo>
-                <a:close/>
-                <a:lnTo>
-                  <a:pt x="1612462" y="306796"/>
-                </a:lnTo>
-                <a:close/>
-                <a:lnTo>
-                  <a:pt x="1617387" y="305461"/>
-                </a:lnTo>
-                <a:close/>
-                <a:lnTo>
-                  <a:pt x="1622311" y="304123"/>
-                </a:lnTo>
-                <a:close/>
-                <a:lnTo>
-                  <a:pt x="1627237" y="302784"/>
-                </a:lnTo>
-                <a:close/>
-                <a:lnTo>
-                  <a:pt x="1632168" y="301448"/>
-                </a:lnTo>
-                <a:close/>
-                <a:lnTo>
-                  <a:pt x="1637104" y="300114"/>
-                </a:lnTo>
-                <a:close/>
-                <a:lnTo>
-                  <a:pt x="1642050" y="298787"/>
-                </a:lnTo>
-                <a:close/>
-                <a:lnTo>
-                  <a:pt x="1647006" y="297467"/>
-                </a:lnTo>
-                <a:close/>
-                <a:lnTo>
-                  <a:pt x="1651975" y="296158"/>
-                </a:lnTo>
-                <a:close/>
-                <a:lnTo>
-                  <a:pt x="1656958" y="294860"/>
-                </a:lnTo>
-                <a:close/>
-                <a:lnTo>
-                  <a:pt x="1661957" y="293575"/>
-                </a:lnTo>
-                <a:close/>
-                <a:lnTo>
-                  <a:pt x="1666965" y="292301"/>
-                </a:lnTo>
-                <a:close/>
-                <a:lnTo>
-                  <a:pt x="1671979" y="291034"/>
-                </a:lnTo>
-                <a:close/>
-                <a:lnTo>
-                  <a:pt x="1676994" y="289774"/>
-                </a:lnTo>
-                <a:close/>
-                <a:lnTo>
-                  <a:pt x="1682006" y="288517"/>
-                </a:lnTo>
-                <a:close/>
-                <a:lnTo>
-                  <a:pt x="1687010" y="287261"/>
-                </a:lnTo>
-                <a:close/>
-                <a:lnTo>
-                  <a:pt x="1692002" y="286005"/>
-                </a:lnTo>
-                <a:close/>
-                <a:lnTo>
-                  <a:pt x="1696979" y="284746"/>
-                </a:lnTo>
-                <a:close/>
-                <a:lnTo>
-                  <a:pt x="1701940" y="283483"/>
-                </a:lnTo>
-                <a:close/>
-                <a:lnTo>
-                  <a:pt x="1706889" y="282219"/>
-                </a:lnTo>
-                <a:close/>
-                <a:lnTo>
-                  <a:pt x="1711830" y="280952"/>
-                </a:lnTo>
-                <a:close/>
-                <a:lnTo>
-                  <a:pt x="1716764" y="279684"/>
-                </a:lnTo>
-                <a:close/>
-                <a:lnTo>
-                  <a:pt x="1721696" y="278414"/>
-                </a:lnTo>
-                <a:close/>
-                <a:lnTo>
-                  <a:pt x="1726629" y="277145"/>
-                </a:lnTo>
-                <a:close/>
-                <a:lnTo>
-                  <a:pt x="1731565" y="275876"/>
-                </a:lnTo>
-                <a:close/>
-                <a:lnTo>
-                  <a:pt x="1736505" y="274607"/>
-                </a:lnTo>
-                <a:close/>
-                <a:lnTo>
-                  <a:pt x="1741450" y="273340"/>
-                </a:lnTo>
-                <a:close/>
-                <a:lnTo>
-                  <a:pt x="1746398" y="272073"/>
-                </a:lnTo>
-                <a:close/>
-                <a:lnTo>
-                  <a:pt x="1751346" y="270806"/>
-                </a:lnTo>
-                <a:close/>
-                <a:lnTo>
-                  <a:pt x="1756293" y="269541"/>
-                </a:lnTo>
-                <a:close/>
-                <a:lnTo>
-                  <a:pt x="1761238" y="268276"/>
-                </a:lnTo>
-                <a:close/>
-                <a:lnTo>
-                  <a:pt x="1766180" y="267012"/>
-                </a:lnTo>
-                <a:close/>
-                <a:lnTo>
-                  <a:pt x="1771116" y="265748"/>
-                </a:lnTo>
-                <a:close/>
-                <a:lnTo>
-                  <a:pt x="1776048" y="264485"/>
-                </a:lnTo>
-                <a:close/>
-                <a:lnTo>
-                  <a:pt x="1780980" y="263222"/>
-                </a:lnTo>
-                <a:close/>
-                <a:lnTo>
-                  <a:pt x="1785914" y="261958"/>
-                </a:lnTo>
-                <a:close/>
-                <a:lnTo>
-                  <a:pt x="1790853" y="260692"/>
-                </a:lnTo>
-                <a:close/>
-                <a:lnTo>
-                  <a:pt x="1795801" y="259425"/>
-                </a:lnTo>
-                <a:close/>
-                <a:lnTo>
-                  <a:pt x="1800760" y="258155"/>
-                </a:lnTo>
-                <a:close/>
-                <a:lnTo>
-                  <a:pt x="1805735" y="256882"/>
-                </a:lnTo>
-                <a:close/>
-                <a:lnTo>
-                  <a:pt x="1810726" y="255606"/>
-                </a:lnTo>
-                <a:close/>
-                <a:lnTo>
-                  <a:pt x="1815730" y="254329"/>
-                </a:lnTo>
-                <a:close/>
-                <a:lnTo>
-                  <a:pt x="1820742" y="253053"/>
-                </a:lnTo>
-                <a:close/>
-                <a:lnTo>
-                  <a:pt x="1825758" y="251780"/>
-                </a:lnTo>
-                <a:close/>
-                <a:lnTo>
-                  <a:pt x="1830773" y="250513"/>
-                </a:lnTo>
-                <a:close/>
-                <a:lnTo>
-                  <a:pt x="1835781" y="249253"/>
-                </a:lnTo>
-                <a:close/>
-                <a:lnTo>
-                  <a:pt x="1840779" y="248004"/>
-                </a:lnTo>
-                <a:close/>
-                <a:lnTo>
-                  <a:pt x="1845762" y="246768"/>
-                </a:lnTo>
-                <a:close/>
-                <a:lnTo>
-                  <a:pt x="1850728" y="245544"/>
-                </a:lnTo>
-                <a:close/>
-                <a:lnTo>
-                  <a:pt x="1855682" y="244330"/>
-                </a:lnTo>
-                <a:close/>
-                <a:lnTo>
-                  <a:pt x="1860625" y="243125"/>
-                </a:lnTo>
-                <a:close/>
-                <a:lnTo>
-                  <a:pt x="1865561" y="241925"/>
-                </a:lnTo>
-                <a:close/>
-                <a:lnTo>
-                  <a:pt x="1870493" y="240729"/>
-                </a:lnTo>
-                <a:close/>
-                <a:lnTo>
-                  <a:pt x="1875424" y="239534"/>
-                </a:lnTo>
-                <a:close/>
-                <a:lnTo>
-                  <a:pt x="1880358" y="238338"/>
-                </a:lnTo>
-                <a:close/>
-                <a:lnTo>
-                  <a:pt x="1885297" y="237139"/>
-                </a:lnTo>
-                <a:close/>
-                <a:lnTo>
-                  <a:pt x="1890241" y="235937"/>
-                </a:lnTo>
-                <a:close/>
-                <a:lnTo>
-                  <a:pt x="1895187" y="234732"/>
-                </a:lnTo>
-                <a:close/>
-                <a:lnTo>
-                  <a:pt x="1900135" y="233525"/>
-                </a:lnTo>
-                <a:close/>
-                <a:lnTo>
-                  <a:pt x="1905083" y="232317"/>
-                </a:lnTo>
-                <a:close/>
-                <a:lnTo>
-                  <a:pt x="1910030" y="231108"/>
-                </a:lnTo>
-                <a:close/>
-                <a:lnTo>
-                  <a:pt x="1914973" y="229899"/>
-                </a:lnTo>
-                <a:close/>
-                <a:lnTo>
-                  <a:pt x="1919911" y="228690"/>
-                </a:lnTo>
-                <a:close/>
-                <a:lnTo>
-                  <a:pt x="1924844" y="227482"/>
-                </a:lnTo>
-                <a:close/>
-                <a:lnTo>
-                  <a:pt x="1929776" y="226275"/>
-                </a:lnTo>
-                <a:close/>
-                <a:lnTo>
-                  <a:pt x="1934709" y="225068"/>
-                </a:lnTo>
-                <a:close/>
-                <a:lnTo>
-                  <a:pt x="1939647" y="223862"/>
-                </a:lnTo>
-                <a:close/>
-                <a:lnTo>
-                  <a:pt x="1944591" y="222657"/>
-                </a:lnTo>
-                <a:close/>
-                <a:lnTo>
-                  <a:pt x="1949546" y="221453"/>
-                </a:lnTo>
-                <a:close/>
-                <a:lnTo>
-                  <a:pt x="1954515" y="220249"/>
-                </a:lnTo>
-                <a:close/>
-                <a:lnTo>
-                  <a:pt x="1959500" y="219045"/>
-                </a:lnTo>
-                <a:close/>
-                <a:lnTo>
-                  <a:pt x="1964499" y="217842"/>
-                </a:lnTo>
-                <a:close/>
-                <a:lnTo>
-                  <a:pt x="1969508" y="216639"/>
-                </a:lnTo>
-                <a:close/>
-                <a:lnTo>
-                  <a:pt x="1974522" y="215435"/>
-                </a:lnTo>
-                <a:close/>
-                <a:lnTo>
-                  <a:pt x="1979537" y="214229"/>
-                </a:lnTo>
-                <a:close/>
-                <a:lnTo>
-                  <a:pt x="1984549" y="213022"/>
-                </a:lnTo>
-                <a:close/>
-                <a:lnTo>
-                  <a:pt x="1989552" y="211813"/>
-                </a:lnTo>
-                <a:close/>
-                <a:lnTo>
-                  <a:pt x="1994543" y="210600"/>
-                </a:lnTo>
-                <a:close/>
-                <a:lnTo>
-                  <a:pt x="1999519" y="209386"/>
-                </a:lnTo>
-                <a:close/>
-                <a:lnTo>
-                  <a:pt x="2004481" y="208170"/>
-                </a:lnTo>
-                <a:close/>
-                <a:lnTo>
-                  <a:pt x="2009431" y="206955"/>
-                </a:lnTo>
-                <a:close/>
-                <a:lnTo>
-                  <a:pt x="2014372" y="205744"/>
-                </a:lnTo>
-                <a:close/>
-                <a:lnTo>
-                  <a:pt x="2019305" y="204538"/>
-                </a:lnTo>
-                <a:close/>
-                <a:lnTo>
-                  <a:pt x="2024233" y="203339"/>
-                </a:lnTo>
-                <a:close/>
-                <a:lnTo>
-                  <a:pt x="2029158" y="202149"/>
-                </a:lnTo>
-                <a:close/>
-                <a:lnTo>
-                  <a:pt x="2034082" y="200970"/>
-                </a:lnTo>
-                <a:close/>
-                <a:lnTo>
-                  <a:pt x="2039007" y="199803"/>
-                </a:lnTo>
-                <a:close/>
-                <a:lnTo>
-                  <a:pt x="2043936" y="198646"/>
-                </a:lnTo>
-                <a:close/>
-                <a:lnTo>
-                  <a:pt x="2048870" y="197498"/>
-                </a:lnTo>
-                <a:close/>
-                <a:lnTo>
-                  <a:pt x="2053811" y="196357"/>
-                </a:lnTo>
-                <a:close/>
-                <a:lnTo>
-                  <a:pt x="2058763" y="195223"/>
-                </a:lnTo>
-                <a:close/>
-                <a:lnTo>
-                  <a:pt x="2063726" y="194093"/>
-                </a:lnTo>
-                <a:close/>
-                <a:lnTo>
-                  <a:pt x="2068704" y="192967"/>
-                </a:lnTo>
-                <a:close/>
-                <a:lnTo>
-                  <a:pt x="2073696" y="191843"/>
-                </a:lnTo>
-                <a:close/>
-                <a:lnTo>
-                  <a:pt x="2078701" y="190718"/>
-                </a:lnTo>
-                <a:close/>
-                <a:lnTo>
-                  <a:pt x="2083713" y="189589"/>
-                </a:lnTo>
-                <a:close/>
-                <a:lnTo>
-                  <a:pt x="2088729" y="188454"/>
-                </a:lnTo>
-                <a:close/>
-                <a:lnTo>
-                  <a:pt x="2093742" y="187308"/>
-                </a:lnTo>
-                <a:close/>
-                <a:lnTo>
-                  <a:pt x="2098750" y="186150"/>
-                </a:lnTo>
-                <a:close/>
-                <a:lnTo>
-                  <a:pt x="2103748" y="184975"/>
-                </a:lnTo>
-                <a:close/>
-                <a:lnTo>
-                  <a:pt x="2108731" y="183781"/>
-                </a:lnTo>
-                <a:close/>
-                <a:lnTo>
-                  <a:pt x="2113698" y="182569"/>
-                </a:lnTo>
-                <a:close/>
-                <a:lnTo>
-                  <a:pt x="2118652" y="181347"/>
-                </a:lnTo>
-                <a:close/>
-                <a:lnTo>
-                  <a:pt x="2123596" y="180120"/>
-                </a:lnTo>
-                <a:close/>
-                <a:lnTo>
-                  <a:pt x="2128532" y="178898"/>
-                </a:lnTo>
-                <a:close/>
-                <a:lnTo>
-                  <a:pt x="2133465" y="177687"/>
-                </a:lnTo>
-                <a:close/>
-                <a:lnTo>
-                  <a:pt x="2138397" y="176493"/>
-                </a:lnTo>
-                <a:close/>
-                <a:lnTo>
-                  <a:pt x="2143331" y="175326"/>
-                </a:lnTo>
-                <a:close/>
-                <a:lnTo>
-                  <a:pt x="2148269" y="174190"/>
-                </a:lnTo>
-                <a:close/>
-                <a:lnTo>
-                  <a:pt x="2153213" y="173083"/>
-                </a:lnTo>
-                <a:close/>
-                <a:lnTo>
-                  <a:pt x="2158159" y="171996"/>
-                </a:lnTo>
-                <a:close/>
-                <a:lnTo>
-                  <a:pt x="2163107" y="170924"/>
-                </a:lnTo>
-                <a:close/>
-                <a:lnTo>
-                  <a:pt x="2168055" y="169858"/>
-                </a:lnTo>
-                <a:close/>
-                <a:lnTo>
-                  <a:pt x="2173001" y="168792"/>
-                </a:lnTo>
-                <a:close/>
-                <a:lnTo>
-                  <a:pt x="2177945" y="167718"/>
-                </a:lnTo>
-                <a:close/>
-                <a:lnTo>
-                  <a:pt x="2182883" y="166628"/>
-                </a:lnTo>
-                <a:close/>
-                <a:lnTo>
-                  <a:pt x="2187817" y="165520"/>
-                </a:lnTo>
-                <a:close/>
-                <a:lnTo>
-                  <a:pt x="2192749" y="164394"/>
-                </a:lnTo>
-                <a:close/>
-                <a:lnTo>
-                  <a:pt x="2197682" y="163253"/>
-                </a:lnTo>
-                <a:close/>
-                <a:lnTo>
-                  <a:pt x="2202618" y="162102"/>
-                </a:lnTo>
-                <a:close/>
-                <a:lnTo>
-                  <a:pt x="2207563" y="160941"/>
-                </a:lnTo>
-                <a:close/>
-                <a:lnTo>
-                  <a:pt x="2212517" y="159775"/>
-                </a:lnTo>
-                <a:close/>
-                <a:lnTo>
-                  <a:pt x="2217484" y="158606"/>
-                </a:lnTo>
-                <a:close/>
-                <a:lnTo>
-                  <a:pt x="2222468" y="157437"/>
-                </a:lnTo>
-                <a:close/>
-                <a:lnTo>
-                  <a:pt x="2227466" y="156270"/>
-                </a:lnTo>
-                <a:close/>
-                <a:lnTo>
-                  <a:pt x="2232474" y="155107"/>
-                </a:lnTo>
-                <a:close/>
-                <a:lnTo>
-                  <a:pt x="2237488" y="153952"/>
-                </a:lnTo>
-                <a:close/>
-                <a:lnTo>
-                  <a:pt x="2242504" y="152804"/>
-                </a:lnTo>
-                <a:close/>
-                <a:lnTo>
-                  <a:pt x="2247515" y="151668"/>
-                </a:lnTo>
-                <a:close/>
-                <a:lnTo>
-                  <a:pt x="2252520" y="150544"/>
-                </a:lnTo>
-                <a:close/>
-                <a:lnTo>
-                  <a:pt x="2257512" y="149435"/>
-                </a:lnTo>
-                <a:close/>
-                <a:lnTo>
-                  <a:pt x="2262489" y="148342"/>
-                </a:lnTo>
-                <a:close/>
-                <a:lnTo>
-                  <a:pt x="2267452" y="147260"/>
-                </a:lnTo>
-                <a:close/>
-                <a:lnTo>
-                  <a:pt x="2272403" y="146185"/>
-                </a:lnTo>
-                <a:close/>
-                <a:lnTo>
-                  <a:pt x="2277344" y="145111"/>
-                </a:lnTo>
-                <a:close/>
-                <a:lnTo>
-                  <a:pt x="2282278" y="144034"/>
-                </a:lnTo>
-                <a:close/>
-                <a:lnTo>
-                  <a:pt x="2287206" y="142950"/>
-                </a:lnTo>
-                <a:close/>
-                <a:lnTo>
-                  <a:pt x="2292131" y="141852"/>
-                </a:lnTo>
-                <a:close/>
-                <a:lnTo>
-                  <a:pt x="2297055" y="140736"/>
-                </a:lnTo>
-                <a:close/>
-                <a:lnTo>
-                  <a:pt x="2301980" y="139602"/>
-                </a:lnTo>
-                <a:close/>
-                <a:lnTo>
-                  <a:pt x="2306908" y="138455"/>
-                </a:lnTo>
-                <a:close/>
-                <a:lnTo>
-                  <a:pt x="2311842" y="137300"/>
-                </a:lnTo>
-                <a:close/>
-                <a:lnTo>
-                  <a:pt x="2316783" y="136142"/>
-                </a:lnTo>
-                <a:close/>
-                <a:lnTo>
-                  <a:pt x="2321734" y="134987"/>
-                </a:lnTo>
-                <a:close/>
-                <a:lnTo>
-                  <a:pt x="2326696" y="133838"/>
-                </a:lnTo>
-                <a:close/>
-                <a:lnTo>
-                  <a:pt x="2331672" y="132702"/>
-                </a:lnTo>
-                <a:close/>
-                <a:lnTo>
-                  <a:pt x="2336664" y="131583"/>
-                </a:lnTo>
-                <a:close/>
-                <a:lnTo>
-                  <a:pt x="2341668" y="130479"/>
-                </a:lnTo>
-                <a:close/>
-                <a:lnTo>
-                  <a:pt x="2346680" y="129387"/>
-                </a:lnTo>
-                <a:close/>
-                <a:lnTo>
-                  <a:pt x="2351695" y="128306"/>
-                </a:lnTo>
-                <a:close/>
-                <a:lnTo>
-                  <a:pt x="2356709" y="127231"/>
-                </a:lnTo>
-                <a:close/>
-                <a:lnTo>
-                  <a:pt x="2361717" y="126160"/>
-                </a:lnTo>
-                <a:close/>
-                <a:lnTo>
-                  <a:pt x="2366716" y="125090"/>
-                </a:lnTo>
-                <a:close/>
-                <a:lnTo>
-                  <a:pt x="2371700" y="124019"/>
-                </a:lnTo>
-                <a:close/>
-                <a:lnTo>
-                  <a:pt x="2376668" y="122945"/>
-                </a:lnTo>
-                <a:close/>
-                <a:lnTo>
-                  <a:pt x="2381623" y="121867"/>
-                </a:lnTo>
-                <a:close/>
-                <a:lnTo>
-                  <a:pt x="2386567" y="120785"/>
-                </a:lnTo>
-                <a:close/>
-                <a:lnTo>
-                  <a:pt x="2391505" y="119699"/>
-                </a:lnTo>
-                <a:close/>
-                <a:lnTo>
-                  <a:pt x="2396437" y="118610"/>
-                </a:lnTo>
-                <a:close/>
-                <a:lnTo>
-                  <a:pt x="2401369" y="117518"/>
-                </a:lnTo>
-                <a:close/>
-                <a:lnTo>
-                  <a:pt x="2406303" y="116421"/>
-                </a:lnTo>
-                <a:close/>
-                <a:lnTo>
-                  <a:pt x="2411241" y="115321"/>
-                </a:lnTo>
-                <a:close/>
-                <a:lnTo>
-                  <a:pt x="2416185" y="114220"/>
-                </a:lnTo>
-                <a:close/>
-                <a:lnTo>
-                  <a:pt x="2421131" y="113119"/>
-                </a:lnTo>
-                <a:close/>
-                <a:lnTo>
-                  <a:pt x="2426079" y="112024"/>
-                </a:lnTo>
-                <a:close/>
-                <a:lnTo>
-                  <a:pt x="2431027" y="110935"/>
-                </a:lnTo>
-                <a:close/>
-                <a:lnTo>
-                  <a:pt x="2435973" y="109856"/>
-                </a:lnTo>
-                <a:close/>
-                <a:lnTo>
-                  <a:pt x="2440917" y="108791"/>
-                </a:lnTo>
-                <a:close/>
-                <a:lnTo>
-                  <a:pt x="2445855" y="107741"/>
-                </a:lnTo>
-                <a:close/>
-                <a:lnTo>
-                  <a:pt x="2450789" y="106708"/>
-                </a:lnTo>
-                <a:close/>
-                <a:lnTo>
-                  <a:pt x="2455721" y="105688"/>
-                </a:lnTo>
-                <a:close/>
-                <a:lnTo>
-                  <a:pt x="2460653" y="104674"/>
-                </a:lnTo>
-                <a:close/>
-                <a:lnTo>
-                  <a:pt x="2465589" y="103662"/>
-                </a:lnTo>
-                <a:close/>
-                <a:lnTo>
-                  <a:pt x="2470533" y="102646"/>
-                </a:lnTo>
-                <a:close/>
-                <a:lnTo>
-                  <a:pt x="2475486" y="101620"/>
-                </a:lnTo>
-                <a:close/>
-                <a:lnTo>
-                  <a:pt x="2480453" y="100580"/>
-                </a:lnTo>
-                <a:close/>
-                <a:lnTo>
-                  <a:pt x="2485437" y="99521"/>
-                </a:lnTo>
-                <a:close/>
-                <a:lnTo>
-                  <a:pt x="2490435" y="98442"/>
-                </a:lnTo>
-                <a:close/>
-                <a:lnTo>
-                  <a:pt x="2495444" y="97351"/>
-                </a:lnTo>
-                <a:close/>
-                <a:lnTo>
-                  <a:pt x="2500459" y="96253"/>
-                </a:lnTo>
-                <a:close/>
-                <a:lnTo>
-                  <a:pt x="2505474" y="95154"/>
-                </a:lnTo>
-                <a:close/>
-                <a:lnTo>
-                  <a:pt x="2510486" y="94060"/>
-                </a:lnTo>
-                <a:close/>
-                <a:lnTo>
-                  <a:pt x="2515490" y="92977"/>
-                </a:lnTo>
-                <a:close/>
-                <a:lnTo>
-                  <a:pt x="2520481" y="91911"/>
-                </a:lnTo>
-                <a:close/>
-                <a:lnTo>
-                  <a:pt x="2525454" y="90866"/>
-                </a:lnTo>
-                <a:close/>
-                <a:lnTo>
-                  <a:pt x="2530414" y="89838"/>
-                </a:lnTo>
-                <a:close/>
-                <a:lnTo>
-                  <a:pt x="2535361" y="88822"/>
-                </a:lnTo>
-                <a:close/>
-                <a:lnTo>
-                  <a:pt x="2540300" y="87810"/>
-                </a:lnTo>
-                <a:close/>
-                <a:lnTo>
-                  <a:pt x="2545234" y="86798"/>
-                </a:lnTo>
-                <a:close/>
-                <a:lnTo>
-                  <a:pt x="2550165" y="85779"/>
-                </a:lnTo>
-                <a:close/>
-                <a:lnTo>
-                  <a:pt x="2555098" y="84747"/>
-                </a:lnTo>
-                <a:close/>
-                <a:lnTo>
-                  <a:pt x="2560034" y="83697"/>
-                </a:lnTo>
-                <a:close/>
-                <a:lnTo>
-                  <a:pt x="2564976" y="82626"/>
-                </a:lnTo>
-                <a:close/>
-                <a:lnTo>
-                  <a:pt x="2569921" y="81541"/>
-                </a:lnTo>
-                <a:close/>
-                <a:lnTo>
-                  <a:pt x="2574869" y="80447"/>
-                </a:lnTo>
-                <a:close/>
-                <a:lnTo>
-                  <a:pt x="2579817" y="79348"/>
-                </a:lnTo>
-                <a:close/>
-                <a:lnTo>
-                  <a:pt x="2584764" y="78252"/>
-                </a:lnTo>
-                <a:close/>
-                <a:lnTo>
-                  <a:pt x="2589709" y="77162"/>
-                </a:lnTo>
-                <a:close/>
-                <a:lnTo>
-                  <a:pt x="2594649" y="76085"/>
-                </a:lnTo>
-                <a:close/>
-                <a:lnTo>
-                  <a:pt x="2599585" y="75024"/>
-                </a:lnTo>
-                <a:close/>
-                <a:lnTo>
-                  <a:pt x="2604517" y="73980"/>
-                </a:lnTo>
-                <a:close/>
-                <a:lnTo>
-                  <a:pt x="2609449" y="72950"/>
-                </a:lnTo>
-                <a:close/>
-                <a:lnTo>
-                  <a:pt x="2614384" y="71928"/>
-                </a:lnTo>
-                <a:close/>
-                <a:lnTo>
-                  <a:pt x="2619325" y="70914"/>
-                </a:lnTo>
-                <a:close/>
-                <a:lnTo>
-                  <a:pt x="2624275" y="69903"/>
-                </a:lnTo>
-                <a:close/>
-                <a:lnTo>
-                  <a:pt x="2629236" y="68892"/>
-                </a:lnTo>
-                <a:close/>
-                <a:lnTo>
-                  <a:pt x="2634213" y="67879"/>
-                </a:lnTo>
-                <a:close/>
-                <a:lnTo>
-                  <a:pt x="2639206" y="66860"/>
-                </a:lnTo>
-                <a:close/>
-                <a:lnTo>
-                  <a:pt x="2644211" y="65838"/>
-                </a:lnTo>
-                <a:close/>
-                <a:lnTo>
-                  <a:pt x="2649223" y="64812"/>
-                </a:lnTo>
-                <a:close/>
-                <a:lnTo>
-                  <a:pt x="2654238" y="63785"/>
-                </a:lnTo>
-                <a:close/>
-                <a:lnTo>
-                  <a:pt x="2659252" y="62757"/>
-                </a:lnTo>
-                <a:close/>
-                <a:lnTo>
-                  <a:pt x="2664260" y="61728"/>
-                </a:lnTo>
-                <a:close/>
-                <a:lnTo>
-                  <a:pt x="2669258" y="60701"/>
-                </a:lnTo>
-                <a:close/>
-                <a:lnTo>
-                  <a:pt x="2674241" y="59676"/>
-                </a:lnTo>
-                <a:close/>
-                <a:lnTo>
-                  <a:pt x="2679209" y="58653"/>
-                </a:lnTo>
-                <a:close/>
-                <a:lnTo>
-                  <a:pt x="2684165" y="57631"/>
-                </a:lnTo>
-                <a:close/>
-                <a:lnTo>
-                  <a:pt x="2689110" y="56609"/>
-                </a:lnTo>
-                <a:close/>
-                <a:lnTo>
-                  <a:pt x="2694046" y="55586"/>
-                </a:lnTo>
-                <a:close/>
-                <a:lnTo>
-                  <a:pt x="2698976" y="54560"/>
-                </a:lnTo>
-                <a:close/>
-                <a:lnTo>
-                  <a:pt x="2703903" y="53532"/>
-                </a:lnTo>
-                <a:close/>
-                <a:lnTo>
-                  <a:pt x="2708827" y="52500"/>
-                </a:lnTo>
-                <a:close/>
-                <a:lnTo>
-                  <a:pt x="2713751" y="51463"/>
-                </a:lnTo>
-                <a:close/>
-                <a:lnTo>
-                  <a:pt x="2718678" y="50425"/>
-                </a:lnTo>
-                <a:close/>
-                <a:lnTo>
-                  <a:pt x="2723609" y="49387"/>
-                </a:lnTo>
-                <a:close/>
-                <a:lnTo>
-                  <a:pt x="2728547" y="48354"/>
-                </a:lnTo>
-                <a:close/>
-                <a:lnTo>
-                  <a:pt x="2733493" y="47328"/>
-                </a:lnTo>
-                <a:close/>
-                <a:lnTo>
-                  <a:pt x="2738450" y="46311"/>
-                </a:lnTo>
-                <a:close/>
-                <a:lnTo>
-                  <a:pt x="2743421" y="45308"/>
-                </a:lnTo>
-                <a:close/>
-                <a:lnTo>
-                  <a:pt x="2748406" y="44320"/>
-                </a:lnTo>
-                <a:close/>
-                <a:lnTo>
-                  <a:pt x="2753406" y="43347"/>
-                </a:lnTo>
-                <a:close/>
-                <a:lnTo>
-                  <a:pt x="2758415" y="42385"/>
-                </a:lnTo>
-                <a:close/>
-                <a:lnTo>
-                  <a:pt x="2763429" y="41429"/>
-                </a:lnTo>
-                <a:close/>
-                <a:lnTo>
-                  <a:pt x="2768444" y="40475"/>
-                </a:lnTo>
-                <a:close/>
-                <a:lnTo>
-                  <a:pt x="2773456" y="39518"/>
-                </a:lnTo>
-                <a:close/>
-                <a:lnTo>
-                  <a:pt x="2778459" y="38554"/>
-                </a:lnTo>
-                <a:close/>
-                <a:lnTo>
-                  <a:pt x="2783449" y="37578"/>
-                </a:lnTo>
-                <a:close/>
-                <a:lnTo>
-                  <a:pt x="2788424" y="36587"/>
-                </a:lnTo>
-                <a:close/>
-                <a:lnTo>
-                  <a:pt x="2793384" y="35581"/>
-                </a:lnTo>
-                <a:close/>
-                <a:lnTo>
-                  <a:pt x="2798332" y="34563"/>
-                </a:lnTo>
-                <a:close/>
-                <a:lnTo>
-                  <a:pt x="2803272" y="33536"/>
-                </a:lnTo>
-                <a:close/>
-                <a:lnTo>
-                  <a:pt x="2808206" y="32501"/>
-                </a:lnTo>
-                <a:close/>
-                <a:lnTo>
-                  <a:pt x="2813138" y="31461"/>
-                </a:lnTo>
-                <a:close/>
-                <a:lnTo>
-                  <a:pt x="2818070" y="30418"/>
-                </a:lnTo>
-                <a:close/>
-                <a:lnTo>
-                  <a:pt x="2823006" y="29375"/>
-                </a:lnTo>
-                <a:close/>
-                <a:lnTo>
-                  <a:pt x="2827947" y="28333"/>
-                </a:lnTo>
-                <a:close/>
-                <a:lnTo>
-                  <a:pt x="2832892" y="27294"/>
-                </a:lnTo>
-                <a:close/>
-                <a:lnTo>
-                  <a:pt x="2837839" y="26260"/>
-                </a:lnTo>
-                <a:close/>
-                <a:lnTo>
-                  <a:pt x="2842787" y="25231"/>
-                </a:lnTo>
-                <a:close/>
-                <a:lnTo>
-                  <a:pt x="2847734" y="24210"/>
-                </a:lnTo>
-                <a:close/>
-                <a:lnTo>
-                  <a:pt x="2852679" y="23199"/>
-                </a:lnTo>
-                <a:close/>
-                <a:lnTo>
-                  <a:pt x="2857621" y="22197"/>
-                </a:lnTo>
-                <a:close/>
-                <a:lnTo>
-                  <a:pt x="2862559" y="21208"/>
-                </a:lnTo>
-                <a:close/>
-                <a:lnTo>
-                  <a:pt x="2867493" y="20230"/>
-                </a:lnTo>
-                <a:close/>
-                <a:lnTo>
-                  <a:pt x="2872426" y="19260"/>
-                </a:lnTo>
-                <a:close/>
-                <a:lnTo>
-                  <a:pt x="2877362" y="18297"/>
-                </a:lnTo>
-                <a:close/>
-                <a:lnTo>
-                  <a:pt x="2882303" y="17339"/>
-                </a:lnTo>
-                <a:close/>
-                <a:lnTo>
-                  <a:pt x="2887251" y="16384"/>
-                </a:lnTo>
-                <a:close/>
-                <a:lnTo>
-                  <a:pt x="2892210" y="15429"/>
-                </a:lnTo>
-                <a:close/>
-                <a:lnTo>
-                  <a:pt x="2897181" y="14473"/>
-                </a:lnTo>
-                <a:close/>
-                <a:lnTo>
-                  <a:pt x="2902167" y="13514"/>
-                </a:lnTo>
-                <a:close/>
-                <a:lnTo>
-                  <a:pt x="2907164" y="12553"/>
-                </a:lnTo>
-                <a:close/>
-                <a:lnTo>
-                  <a:pt x="2912170" y="11589"/>
-                </a:lnTo>
-                <a:close/>
-                <a:lnTo>
-                  <a:pt x="2917182" y="10623"/>
-                </a:lnTo>
-                <a:close/>
-                <a:lnTo>
-                  <a:pt x="2922195" y="9657"/>
-                </a:lnTo>
-                <a:close/>
-                <a:lnTo>
-                  <a:pt x="2927209" y="8689"/>
-                </a:lnTo>
-                <a:close/>
-                <a:lnTo>
-                  <a:pt x="2932219" y="7720"/>
-                </a:lnTo>
-                <a:close/>
-                <a:lnTo>
-                  <a:pt x="2937222" y="6751"/>
-                </a:lnTo>
-                <a:close/>
-                <a:lnTo>
-                  <a:pt x="2942215" y="5783"/>
-                </a:lnTo>
-                <a:close/>
-                <a:lnTo>
-                  <a:pt x="2947196" y="4815"/>
-                </a:lnTo>
-                <a:close/>
-                <a:lnTo>
-                  <a:pt x="2952161" y="3848"/>
-                </a:lnTo>
-                <a:close/>
-                <a:lnTo>
-                  <a:pt x="2957106" y="2883"/>
-                </a:lnTo>
-                <a:close/>
-                <a:lnTo>
-                  <a:pt x="2962030" y="1920"/>
-                </a:lnTo>
-                <a:close/>
-                <a:lnTo>
-                  <a:pt x="2966929" y="959"/>
-                </a:lnTo>
-                <a:close/>
-                <a:lnTo>
-                  <a:pt x="2971800" y="0"/>
+                  <a:pt x="3245" y="1957587"/>
+                </a:lnTo>
+                <a:close/>
+                <a:lnTo>
+                  <a:pt x="6492" y="1928849"/>
+                </a:lnTo>
+                <a:close/>
+                <a:lnTo>
+                  <a:pt x="9742" y="1903267"/>
+                </a:lnTo>
+                <a:close/>
+                <a:lnTo>
+                  <a:pt x="12995" y="1880590"/>
+                </a:lnTo>
+                <a:close/>
+                <a:lnTo>
+                  <a:pt x="16249" y="1860567"/>
+                </a:lnTo>
+                <a:close/>
+                <a:lnTo>
+                  <a:pt x="19505" y="1842944"/>
+                </a:lnTo>
+                <a:close/>
+                <a:lnTo>
+                  <a:pt x="22762" y="1827472"/>
+                </a:lnTo>
+                <a:close/>
+                <a:lnTo>
+                  <a:pt x="26020" y="1813897"/>
+                </a:lnTo>
+                <a:close/>
+                <a:lnTo>
+                  <a:pt x="29278" y="1801968"/>
+                </a:lnTo>
+                <a:close/>
+                <a:lnTo>
+                  <a:pt x="32537" y="1791433"/>
+                </a:lnTo>
+                <a:close/>
+                <a:lnTo>
+                  <a:pt x="35796" y="1782041"/>
+                </a:lnTo>
+                <a:close/>
+                <a:lnTo>
+                  <a:pt x="39055" y="1773539"/>
+                </a:lnTo>
+                <a:close/>
+                <a:lnTo>
+                  <a:pt x="42313" y="1765676"/>
+                </a:lnTo>
+                <a:close/>
+                <a:lnTo>
+                  <a:pt x="45570" y="1758200"/>
+                </a:lnTo>
+                <a:close/>
+                <a:lnTo>
+                  <a:pt x="48826" y="1750860"/>
+                </a:lnTo>
+                <a:close/>
+                <a:lnTo>
+                  <a:pt x="52081" y="1743489"/>
+                </a:lnTo>
+                <a:close/>
+                <a:lnTo>
+                  <a:pt x="55335" y="1736101"/>
+                </a:lnTo>
+                <a:close/>
+                <a:lnTo>
+                  <a:pt x="58587" y="1728736"/>
+                </a:lnTo>
+                <a:close/>
+                <a:lnTo>
+                  <a:pt x="61839" y="1721435"/>
+                </a:lnTo>
+                <a:close/>
+                <a:lnTo>
+                  <a:pt x="65089" y="1714234"/>
+                </a:lnTo>
+                <a:close/>
+                <a:lnTo>
+                  <a:pt x="68340" y="1707176"/>
+                </a:lnTo>
+                <a:close/>
+                <a:lnTo>
+                  <a:pt x="71590" y="1700297"/>
+                </a:lnTo>
+                <a:close/>
+                <a:lnTo>
+                  <a:pt x="74840" y="1693633"/>
+                </a:lnTo>
+                <a:close/>
+                <a:lnTo>
+                  <a:pt x="78090" y="1687179"/>
+                </a:lnTo>
+                <a:close/>
+                <a:lnTo>
+                  <a:pt x="81341" y="1680914"/>
+                </a:lnTo>
+                <a:close/>
+                <a:lnTo>
+                  <a:pt x="84592" y="1674818"/>
+                </a:lnTo>
+                <a:close/>
+                <a:lnTo>
+                  <a:pt x="87844" y="1668870"/>
+                </a:lnTo>
+                <a:close/>
+                <a:lnTo>
+                  <a:pt x="91097" y="1663048"/>
+                </a:lnTo>
+                <a:close/>
+                <a:lnTo>
+                  <a:pt x="94352" y="1657333"/>
+                </a:lnTo>
+                <a:close/>
+                <a:lnTo>
+                  <a:pt x="97607" y="1651704"/>
+                </a:lnTo>
+                <a:close/>
+                <a:lnTo>
+                  <a:pt x="100865" y="1646149"/>
+                </a:lnTo>
+                <a:close/>
+                <a:lnTo>
+                  <a:pt x="104123" y="1640668"/>
+                </a:lnTo>
+                <a:close/>
+                <a:lnTo>
+                  <a:pt x="107382" y="1635261"/>
+                </a:lnTo>
+                <a:close/>
+                <a:lnTo>
+                  <a:pt x="110642" y="1629929"/>
+                </a:lnTo>
+                <a:close/>
+                <a:lnTo>
+                  <a:pt x="113900" y="1624672"/>
+                </a:lnTo>
+                <a:close/>
+                <a:lnTo>
+                  <a:pt x="117159" y="1619490"/>
+                </a:lnTo>
+                <a:close/>
+                <a:lnTo>
+                  <a:pt x="120415" y="1614385"/>
+                </a:lnTo>
+                <a:close/>
+                <a:lnTo>
+                  <a:pt x="123671" y="1609355"/>
+                </a:lnTo>
+                <a:close/>
+                <a:lnTo>
+                  <a:pt x="126925" y="1604398"/>
+                </a:lnTo>
+                <a:close/>
+                <a:lnTo>
+                  <a:pt x="130177" y="1599511"/>
+                </a:lnTo>
+                <a:close/>
+                <a:lnTo>
+                  <a:pt x="133429" y="1594691"/>
+                </a:lnTo>
+                <a:close/>
+                <a:lnTo>
+                  <a:pt x="136680" y="1589934"/>
+                </a:lnTo>
+                <a:close/>
+                <a:lnTo>
+                  <a:pt x="139930" y="1585237"/>
+                </a:lnTo>
+                <a:close/>
+                <a:lnTo>
+                  <a:pt x="143180" y="1580598"/>
+                </a:lnTo>
+                <a:close/>
+                <a:lnTo>
+                  <a:pt x="146430" y="1576013"/>
+                </a:lnTo>
+                <a:close/>
+                <a:lnTo>
+                  <a:pt x="149680" y="1571481"/>
+                </a:lnTo>
+                <a:close/>
+                <a:lnTo>
+                  <a:pt x="152930" y="1566999"/>
+                </a:lnTo>
+                <a:close/>
+                <a:lnTo>
+                  <a:pt x="156182" y="1562566"/>
+                </a:lnTo>
+                <a:close/>
+                <a:lnTo>
+                  <a:pt x="159433" y="1558182"/>
+                </a:lnTo>
+                <a:close/>
+                <a:lnTo>
+                  <a:pt x="162686" y="1553844"/>
+                </a:lnTo>
+                <a:close/>
+                <a:lnTo>
+                  <a:pt x="165941" y="1549551"/>
+                </a:lnTo>
+                <a:close/>
+                <a:lnTo>
+                  <a:pt x="169196" y="1545303"/>
+                </a:lnTo>
+                <a:close/>
+                <a:lnTo>
+                  <a:pt x="172454" y="1541098"/>
+                </a:lnTo>
+                <a:close/>
+                <a:lnTo>
+                  <a:pt x="175712" y="1536934"/>
+                </a:lnTo>
+                <a:close/>
+                <a:lnTo>
+                  <a:pt x="178971" y="1532811"/>
+                </a:lnTo>
+                <a:close/>
+                <a:lnTo>
+                  <a:pt x="182230" y="1528728"/>
+                </a:lnTo>
+                <a:close/>
+                <a:lnTo>
+                  <a:pt x="185489" y="1524684"/>
+                </a:lnTo>
+                <a:close/>
+                <a:lnTo>
+                  <a:pt x="188748" y="1520678"/>
+                </a:lnTo>
+                <a:close/>
+                <a:lnTo>
+                  <a:pt x="192004" y="1516708"/>
+                </a:lnTo>
+                <a:close/>
+                <a:lnTo>
+                  <a:pt x="195260" y="1512775"/>
+                </a:lnTo>
+                <a:close/>
+                <a:lnTo>
+                  <a:pt x="198513" y="1508877"/>
+                </a:lnTo>
+                <a:close/>
+                <a:lnTo>
+                  <a:pt x="201766" y="1505012"/>
+                </a:lnTo>
+                <a:close/>
+                <a:lnTo>
+                  <a:pt x="205017" y="1501182"/>
+                </a:lnTo>
+                <a:close/>
+                <a:lnTo>
+                  <a:pt x="208268" y="1497384"/>
+                </a:lnTo>
+                <a:close/>
+                <a:lnTo>
+                  <a:pt x="211519" y="1493617"/>
+                </a:lnTo>
+                <a:close/>
+                <a:lnTo>
+                  <a:pt x="214769" y="1489882"/>
+                </a:lnTo>
+                <a:close/>
+                <a:lnTo>
+                  <a:pt x="218021" y="1486177"/>
+                </a:lnTo>
+                <a:close/>
+                <a:lnTo>
+                  <a:pt x="221272" y="1482501"/>
+                </a:lnTo>
+                <a:close/>
+                <a:lnTo>
+                  <a:pt x="224525" y="1478855"/>
+                </a:lnTo>
+                <a:close/>
+                <a:lnTo>
+                  <a:pt x="227777" y="1475237"/>
+                </a:lnTo>
+                <a:close/>
+                <a:lnTo>
+                  <a:pt x="231029" y="1471646"/>
+                </a:lnTo>
+                <a:close/>
+                <a:lnTo>
+                  <a:pt x="234281" y="1468084"/>
+                </a:lnTo>
+                <a:close/>
+                <a:lnTo>
+                  <a:pt x="237533" y="1464548"/>
+                </a:lnTo>
+                <a:close/>
+                <a:lnTo>
+                  <a:pt x="240785" y="1461038"/>
+                </a:lnTo>
+                <a:close/>
+                <a:lnTo>
+                  <a:pt x="244036" y="1457554"/>
+                </a:lnTo>
+                <a:close/>
+                <a:lnTo>
+                  <a:pt x="247287" y="1454096"/>
+                </a:lnTo>
+                <a:close/>
+                <a:lnTo>
+                  <a:pt x="250537" y="1450662"/>
+                </a:lnTo>
+                <a:close/>
+                <a:lnTo>
+                  <a:pt x="253789" y="1447253"/>
+                </a:lnTo>
+                <a:close/>
+                <a:lnTo>
+                  <a:pt x="257041" y="1443868"/>
+                </a:lnTo>
+                <a:close/>
+                <a:lnTo>
+                  <a:pt x="260293" y="1440507"/>
+                </a:lnTo>
+                <a:close/>
+                <a:lnTo>
+                  <a:pt x="263548" y="1437168"/>
+                </a:lnTo>
+                <a:close/>
+                <a:lnTo>
+                  <a:pt x="266804" y="1433852"/>
+                </a:lnTo>
+                <a:close/>
+                <a:lnTo>
+                  <a:pt x="270061" y="1430558"/>
+                </a:lnTo>
+                <a:close/>
+                <a:lnTo>
+                  <a:pt x="273320" y="1427286"/>
+                </a:lnTo>
+                <a:close/>
+                <a:lnTo>
+                  <a:pt x="276579" y="1424035"/>
+                </a:lnTo>
+                <a:close/>
+                <a:lnTo>
+                  <a:pt x="279838" y="1420806"/>
+                </a:lnTo>
+                <a:close/>
+                <a:lnTo>
+                  <a:pt x="283097" y="1417598"/>
+                </a:lnTo>
+                <a:close/>
+                <a:lnTo>
+                  <a:pt x="286355" y="1414410"/>
+                </a:lnTo>
+                <a:close/>
+                <a:lnTo>
+                  <a:pt x="289612" y="1411243"/>
+                </a:lnTo>
+                <a:close/>
+                <a:lnTo>
+                  <a:pt x="292867" y="1408095"/>
+                </a:lnTo>
+                <a:close/>
+                <a:lnTo>
+                  <a:pt x="296121" y="1404968"/>
+                </a:lnTo>
+                <a:close/>
+                <a:lnTo>
+                  <a:pt x="299373" y="1401859"/>
+                </a:lnTo>
+                <a:close/>
+                <a:lnTo>
+                  <a:pt x="302625" y="1398770"/>
+                </a:lnTo>
+                <a:close/>
+                <a:lnTo>
+                  <a:pt x="305876" y="1395699"/>
+                </a:lnTo>
+                <a:close/>
+                <a:lnTo>
+                  <a:pt x="309126" y="1392647"/>
+                </a:lnTo>
+                <a:close/>
+                <a:lnTo>
+                  <a:pt x="312375" y="1389613"/>
+                </a:lnTo>
+                <a:close/>
+                <a:lnTo>
+                  <a:pt x="315624" y="1386596"/>
+                </a:lnTo>
+                <a:close/>
+                <a:lnTo>
+                  <a:pt x="318873" y="1383596"/>
+                </a:lnTo>
+                <a:close/>
+                <a:lnTo>
+                  <a:pt x="322123" y="1380613"/>
+                </a:lnTo>
+                <a:close/>
+                <a:lnTo>
+                  <a:pt x="325373" y="1377647"/>
+                </a:lnTo>
+                <a:close/>
+                <a:lnTo>
+                  <a:pt x="328625" y="1374697"/>
+                </a:lnTo>
+                <a:close/>
+                <a:lnTo>
+                  <a:pt x="331879" y="1371763"/>
+                </a:lnTo>
+                <a:close/>
+                <a:lnTo>
+                  <a:pt x="335135" y="1368845"/>
+                </a:lnTo>
+                <a:close/>
+                <a:lnTo>
+                  <a:pt x="338394" y="1365942"/>
+                </a:lnTo>
+                <a:close/>
+                <a:lnTo>
+                  <a:pt x="341656" y="1363054"/>
+                </a:lnTo>
+                <a:close/>
+                <a:lnTo>
+                  <a:pt x="344918" y="1360181"/>
+                </a:lnTo>
+                <a:close/>
+                <a:lnTo>
+                  <a:pt x="348180" y="1357325"/>
+                </a:lnTo>
+                <a:close/>
+                <a:lnTo>
+                  <a:pt x="351441" y="1354484"/>
+                </a:lnTo>
+                <a:close/>
+                <a:lnTo>
+                  <a:pt x="354699" y="1351661"/>
+                </a:lnTo>
+                <a:close/>
+                <a:lnTo>
+                  <a:pt x="357952" y="1348854"/>
+                </a:lnTo>
+                <a:close/>
+                <a:lnTo>
+                  <a:pt x="361200" y="1346065"/>
+                </a:lnTo>
+                <a:close/>
+                <a:lnTo>
+                  <a:pt x="364442" y="1343293"/>
+                </a:lnTo>
+                <a:close/>
+                <a:lnTo>
+                  <a:pt x="367680" y="1340535"/>
+                </a:lnTo>
+                <a:close/>
+                <a:lnTo>
+                  <a:pt x="370919" y="1337791"/>
+                </a:lnTo>
+                <a:close/>
+                <a:lnTo>
+                  <a:pt x="374163" y="1335056"/>
+                </a:lnTo>
+                <a:close/>
+                <a:lnTo>
+                  <a:pt x="377414" y="1332330"/>
+                </a:lnTo>
+                <a:close/>
+                <a:lnTo>
+                  <a:pt x="380676" y="1329608"/>
+                </a:lnTo>
+                <a:close/>
+                <a:lnTo>
+                  <a:pt x="383953" y="1326889"/>
+                </a:lnTo>
+                <a:close/>
+                <a:lnTo>
+                  <a:pt x="387247" y="1324171"/>
+                </a:lnTo>
+                <a:close/>
+                <a:lnTo>
+                  <a:pt x="390552" y="1321459"/>
+                </a:lnTo>
+                <a:close/>
+                <a:lnTo>
+                  <a:pt x="393856" y="1318761"/>
+                </a:lnTo>
+                <a:close/>
+                <a:lnTo>
+                  <a:pt x="397147" y="1316086"/>
+                </a:lnTo>
+                <a:close/>
+                <a:lnTo>
+                  <a:pt x="400413" y="1313443"/>
+                </a:lnTo>
+                <a:close/>
+                <a:lnTo>
+                  <a:pt x="403641" y="1310840"/>
+                </a:lnTo>
+                <a:close/>
+                <a:lnTo>
+                  <a:pt x="406819" y="1308287"/>
+                </a:lnTo>
+                <a:close/>
+                <a:lnTo>
+                  <a:pt x="409935" y="1305792"/>
+                </a:lnTo>
+                <a:close/>
+                <a:lnTo>
+                  <a:pt x="412997" y="1303349"/>
+                </a:lnTo>
+                <a:close/>
+                <a:lnTo>
+                  <a:pt x="416046" y="1300927"/>
+                </a:lnTo>
+                <a:close/>
+                <a:lnTo>
+                  <a:pt x="419131" y="1298492"/>
+                </a:lnTo>
+                <a:close/>
+                <a:lnTo>
+                  <a:pt x="422295" y="1296009"/>
+                </a:lnTo>
+                <a:close/>
+                <a:lnTo>
+                  <a:pt x="425585" y="1293445"/>
+                </a:lnTo>
+                <a:close/>
+                <a:lnTo>
+                  <a:pt x="429047" y="1290766"/>
+                </a:lnTo>
+                <a:close/>
+                <a:lnTo>
+                  <a:pt x="432727" y="1287937"/>
+                </a:lnTo>
+                <a:close/>
+                <a:lnTo>
+                  <a:pt x="436645" y="1284944"/>
+                </a:lnTo>
+                <a:close/>
+                <a:lnTo>
+                  <a:pt x="440679" y="1281876"/>
+                </a:lnTo>
+                <a:close/>
+                <a:lnTo>
+                  <a:pt x="444655" y="1278862"/>
+                </a:lnTo>
+                <a:close/>
+                <a:lnTo>
+                  <a:pt x="448400" y="1276029"/>
+                </a:lnTo>
+                <a:close/>
+                <a:lnTo>
+                  <a:pt x="451741" y="1273504"/>
+                </a:lnTo>
+                <a:close/>
+                <a:lnTo>
+                  <a:pt x="454506" y="1271414"/>
+                </a:lnTo>
+                <a:close/>
+                <a:lnTo>
+                  <a:pt x="456521" y="1269887"/>
+                </a:lnTo>
+                <a:close/>
+                <a:lnTo>
+                  <a:pt x="457624" y="1269042"/>
+                </a:lnTo>
+                <a:close/>
+                <a:lnTo>
+                  <a:pt x="457905" y="1268796"/>
+                </a:lnTo>
+                <a:close/>
+                <a:lnTo>
+                  <a:pt x="457710" y="1268860"/>
+                </a:lnTo>
+                <a:close/>
+                <a:lnTo>
+                  <a:pt x="457397" y="1268935"/>
+                </a:lnTo>
+                <a:close/>
+                <a:lnTo>
+                  <a:pt x="457324" y="1268725"/>
+                </a:lnTo>
+                <a:close/>
+                <a:lnTo>
+                  <a:pt x="457847" y="1267932"/>
+                </a:lnTo>
+                <a:close/>
+                <a:lnTo>
+                  <a:pt x="459325" y="1266257"/>
+                </a:lnTo>
+                <a:close/>
+                <a:lnTo>
+                  <a:pt x="462116" y="1263403"/>
+                </a:lnTo>
+                <a:close/>
+                <a:lnTo>
+                  <a:pt x="466436" y="1259196"/>
+                </a:lnTo>
+                <a:close/>
+                <a:lnTo>
+                  <a:pt x="472083" y="1253828"/>
+                </a:lnTo>
+                <a:close/>
+                <a:lnTo>
+                  <a:pt x="478776" y="1247560"/>
+                </a:lnTo>
+                <a:close/>
+                <a:lnTo>
+                  <a:pt x="486236" y="1240651"/>
+                </a:lnTo>
+                <a:close/>
+                <a:lnTo>
+                  <a:pt x="494182" y="1233364"/>
+                </a:lnTo>
+                <a:close/>
+                <a:lnTo>
+                  <a:pt x="502334" y="1225959"/>
+                </a:lnTo>
+                <a:close/>
+                <a:lnTo>
+                  <a:pt x="510412" y="1218695"/>
+                </a:lnTo>
+                <a:close/>
+                <a:lnTo>
+                  <a:pt x="518156" y="1211816"/>
+                </a:lnTo>
+                <a:close/>
+                <a:lnTo>
+                  <a:pt x="525516" y="1205363"/>
+                </a:lnTo>
+                <a:close/>
+                <a:lnTo>
+                  <a:pt x="532566" y="1199268"/>
+                </a:lnTo>
+                <a:close/>
+                <a:lnTo>
+                  <a:pt x="539381" y="1193456"/>
+                </a:lnTo>
+                <a:close/>
+                <a:lnTo>
+                  <a:pt x="546035" y="1187855"/>
+                </a:lnTo>
+                <a:close/>
+                <a:lnTo>
+                  <a:pt x="552604" y="1182393"/>
+                </a:lnTo>
+                <a:close/>
+                <a:lnTo>
+                  <a:pt x="559161" y="1176997"/>
+                </a:lnTo>
+                <a:close/>
+                <a:lnTo>
+                  <a:pt x="565782" y="1171594"/>
+                </a:lnTo>
+                <a:close/>
+                <a:lnTo>
+                  <a:pt x="572507" y="1166145"/>
+                </a:lnTo>
+                <a:close/>
+                <a:lnTo>
+                  <a:pt x="579323" y="1160662"/>
+                </a:lnTo>
+                <a:close/>
+                <a:lnTo>
+                  <a:pt x="586208" y="1155163"/>
+                </a:lnTo>
+                <a:close/>
+                <a:lnTo>
+                  <a:pt x="593144" y="1149665"/>
+                </a:lnTo>
+                <a:close/>
+                <a:lnTo>
+                  <a:pt x="600111" y="1144187"/>
+                </a:lnTo>
+                <a:close/>
+                <a:lnTo>
+                  <a:pt x="607089" y="1138745"/>
+                </a:lnTo>
+                <a:close/>
+                <a:lnTo>
+                  <a:pt x="614058" y="1133358"/>
+                </a:lnTo>
+                <a:close/>
+                <a:lnTo>
+                  <a:pt x="621003" y="1128040"/>
+                </a:lnTo>
+                <a:close/>
+                <a:lnTo>
+                  <a:pt x="627923" y="1122789"/>
+                </a:lnTo>
+                <a:close/>
+                <a:lnTo>
+                  <a:pt x="634823" y="1117601"/>
+                </a:lnTo>
+                <a:close/>
+                <a:lnTo>
+                  <a:pt x="641708" y="1112469"/>
+                </a:lnTo>
+                <a:close/>
+                <a:lnTo>
+                  <a:pt x="648584" y="1107386"/>
+                </a:lnTo>
+                <a:close/>
+                <a:lnTo>
+                  <a:pt x="655455" y="1102346"/>
+                </a:lnTo>
+                <a:close/>
+                <a:lnTo>
+                  <a:pt x="662327" y="1097345"/>
+                </a:lnTo>
+                <a:close/>
+                <a:lnTo>
+                  <a:pt x="669205" y="1092374"/>
+                </a:lnTo>
+                <a:close/>
+                <a:lnTo>
+                  <a:pt x="676090" y="1087433"/>
+                </a:lnTo>
+                <a:close/>
+                <a:lnTo>
+                  <a:pt x="682981" y="1082521"/>
+                </a:lnTo>
+                <a:close/>
+                <a:lnTo>
+                  <a:pt x="689876" y="1077639"/>
+                </a:lnTo>
+                <a:close/>
+                <a:lnTo>
+                  <a:pt x="696774" y="1072788"/>
+                </a:lnTo>
+                <a:close/>
+                <a:lnTo>
+                  <a:pt x="703673" y="1067969"/>
+                </a:lnTo>
+                <a:close/>
+                <a:lnTo>
+                  <a:pt x="710571" y="1063181"/>
+                </a:lnTo>
+                <a:close/>
+                <a:lnTo>
+                  <a:pt x="717466" y="1058427"/>
+                </a:lnTo>
+                <a:close/>
+                <a:lnTo>
+                  <a:pt x="724358" y="1053706"/>
+                </a:lnTo>
+                <a:close/>
+                <a:lnTo>
+                  <a:pt x="731247" y="1049017"/>
+                </a:lnTo>
+                <a:close/>
+                <a:lnTo>
+                  <a:pt x="738134" y="1044360"/>
+                </a:lnTo>
+                <a:close/>
+                <a:lnTo>
+                  <a:pt x="745019" y="1039735"/>
+                </a:lnTo>
+                <a:close/>
+                <a:lnTo>
+                  <a:pt x="751904" y="1035140"/>
+                </a:lnTo>
+                <a:close/>
+                <a:lnTo>
+                  <a:pt x="758790" y="1030576"/>
+                </a:lnTo>
+                <a:close/>
+                <a:lnTo>
+                  <a:pt x="765677" y="1026040"/>
+                </a:lnTo>
+                <a:close/>
+                <a:lnTo>
+                  <a:pt x="772565" y="1021533"/>
+                </a:lnTo>
+                <a:close/>
+                <a:lnTo>
+                  <a:pt x="779457" y="1017055"/>
+                </a:lnTo>
+                <a:close/>
+                <a:lnTo>
+                  <a:pt x="786349" y="1012603"/>
+                </a:lnTo>
+                <a:close/>
+                <a:lnTo>
+                  <a:pt x="793243" y="1008178"/>
+                </a:lnTo>
+                <a:close/>
+                <a:lnTo>
+                  <a:pt x="800138" y="1003779"/>
+                </a:lnTo>
+                <a:close/>
+                <a:lnTo>
+                  <a:pt x="807033" y="999405"/>
+                </a:lnTo>
+                <a:close/>
+                <a:lnTo>
+                  <a:pt x="813929" y="995055"/>
+                </a:lnTo>
+                <a:close/>
+                <a:lnTo>
+                  <a:pt x="820823" y="990730"/>
+                </a:lnTo>
+                <a:close/>
+                <a:lnTo>
+                  <a:pt x="827717" y="986428"/>
+                </a:lnTo>
+                <a:close/>
+                <a:lnTo>
+                  <a:pt x="834611" y="982150"/>
+                </a:lnTo>
+                <a:close/>
+                <a:lnTo>
+                  <a:pt x="841504" y="977895"/>
+                </a:lnTo>
+                <a:close/>
+                <a:lnTo>
+                  <a:pt x="848397" y="973663"/>
+                </a:lnTo>
+                <a:close/>
+                <a:lnTo>
+                  <a:pt x="855290" y="969455"/>
+                </a:lnTo>
+                <a:close/>
+                <a:lnTo>
+                  <a:pt x="862184" y="965269"/>
+                </a:lnTo>
+                <a:close/>
+                <a:lnTo>
+                  <a:pt x="869077" y="961107"/>
+                </a:lnTo>
+                <a:close/>
+                <a:lnTo>
+                  <a:pt x="875972" y="956968"/>
+                </a:lnTo>
+                <a:close/>
+                <a:lnTo>
+                  <a:pt x="882867" y="952852"/>
+                </a:lnTo>
+                <a:close/>
+                <a:lnTo>
+                  <a:pt x="889761" y="948757"/>
+                </a:lnTo>
+                <a:close/>
+                <a:lnTo>
+                  <a:pt x="896656" y="944685"/>
+                </a:lnTo>
+                <a:close/>
+                <a:lnTo>
+                  <a:pt x="903549" y="940634"/>
+                </a:lnTo>
+                <a:close/>
+                <a:lnTo>
+                  <a:pt x="910442" y="936603"/>
+                </a:lnTo>
+                <a:close/>
+                <a:lnTo>
+                  <a:pt x="917333" y="932593"/>
+                </a:lnTo>
+                <a:close/>
+                <a:lnTo>
+                  <a:pt x="924223" y="928602"/>
+                </a:lnTo>
+                <a:close/>
+                <a:lnTo>
+                  <a:pt x="931111" y="924631"/>
+                </a:lnTo>
+                <a:close/>
+                <a:lnTo>
+                  <a:pt x="937998" y="920680"/>
+                </a:lnTo>
+                <a:close/>
+                <a:lnTo>
+                  <a:pt x="944884" y="916747"/>
+                </a:lnTo>
+                <a:close/>
+                <a:lnTo>
+                  <a:pt x="951770" y="912835"/>
+                </a:lnTo>
+                <a:close/>
+                <a:lnTo>
+                  <a:pt x="958657" y="908941"/>
+                </a:lnTo>
+                <a:close/>
+                <a:lnTo>
+                  <a:pt x="965545" y="905066"/>
+                </a:lnTo>
+                <a:close/>
+                <a:lnTo>
+                  <a:pt x="972434" y="901211"/>
+                </a:lnTo>
+                <a:close/>
+                <a:lnTo>
+                  <a:pt x="979324" y="897374"/>
+                </a:lnTo>
+                <a:close/>
+                <a:lnTo>
+                  <a:pt x="986217" y="893556"/>
+                </a:lnTo>
+                <a:close/>
+                <a:lnTo>
+                  <a:pt x="993110" y="889756"/>
+                </a:lnTo>
+                <a:close/>
+                <a:lnTo>
+                  <a:pt x="1000004" y="885972"/>
+                </a:lnTo>
+                <a:close/>
+                <a:lnTo>
+                  <a:pt x="1006899" y="882206"/>
+                </a:lnTo>
+                <a:close/>
+                <a:lnTo>
+                  <a:pt x="1013794" y="878455"/>
+                </a:lnTo>
+                <a:close/>
+                <a:lnTo>
+                  <a:pt x="1020688" y="874720"/>
+                </a:lnTo>
+                <a:close/>
+                <a:lnTo>
+                  <a:pt x="1027582" y="871000"/>
+                </a:lnTo>
+                <a:close/>
+                <a:lnTo>
+                  <a:pt x="1034476" y="867295"/>
+                </a:lnTo>
+                <a:close/>
+                <a:lnTo>
+                  <a:pt x="1041369" y="863606"/>
+                </a:lnTo>
+                <a:close/>
+                <a:lnTo>
+                  <a:pt x="1048262" y="859932"/>
+                </a:lnTo>
+                <a:close/>
+                <a:lnTo>
+                  <a:pt x="1055156" y="856274"/>
+                </a:lnTo>
+                <a:close/>
+                <a:lnTo>
+                  <a:pt x="1062049" y="852632"/>
+                </a:lnTo>
+                <a:close/>
+                <a:lnTo>
+                  <a:pt x="1068943" y="849007"/>
+                </a:lnTo>
+                <a:close/>
+                <a:lnTo>
+                  <a:pt x="1075837" y="845398"/>
+                </a:lnTo>
+                <a:close/>
+                <a:lnTo>
+                  <a:pt x="1082731" y="841807"/>
+                </a:lnTo>
+                <a:close/>
+                <a:lnTo>
+                  <a:pt x="1089626" y="838231"/>
+                </a:lnTo>
+                <a:close/>
+                <a:lnTo>
+                  <a:pt x="1096521" y="834672"/>
+                </a:lnTo>
+                <a:close/>
+                <a:lnTo>
+                  <a:pt x="1103415" y="831127"/>
+                </a:lnTo>
+                <a:close/>
+                <a:lnTo>
+                  <a:pt x="1110308" y="827596"/>
+                </a:lnTo>
+                <a:close/>
+                <a:lnTo>
+                  <a:pt x="1117200" y="824079"/>
+                </a:lnTo>
+                <a:close/>
+                <a:lnTo>
+                  <a:pt x="1124091" y="820575"/>
+                </a:lnTo>
+                <a:close/>
+                <a:lnTo>
+                  <a:pt x="1130980" y="817083"/>
+                </a:lnTo>
+                <a:close/>
+                <a:lnTo>
+                  <a:pt x="1137867" y="813603"/>
+                </a:lnTo>
+                <a:close/>
+                <a:lnTo>
+                  <a:pt x="1144754" y="810137"/>
+                </a:lnTo>
+                <a:close/>
+                <a:lnTo>
+                  <a:pt x="1151640" y="806683"/>
+                </a:lnTo>
+                <a:close/>
+                <a:lnTo>
+                  <a:pt x="1158526" y="803243"/>
+                </a:lnTo>
+                <a:close/>
+                <a:lnTo>
+                  <a:pt x="1165413" y="799817"/>
+                </a:lnTo>
+                <a:close/>
+                <a:lnTo>
+                  <a:pt x="1172301" y="796404"/>
+                </a:lnTo>
+                <a:close/>
+                <a:lnTo>
+                  <a:pt x="1179191" y="793005"/>
+                </a:lnTo>
+                <a:close/>
+                <a:lnTo>
+                  <a:pt x="1186083" y="789620"/>
+                </a:lnTo>
+                <a:close/>
+                <a:lnTo>
+                  <a:pt x="1192975" y="786248"/>
+                </a:lnTo>
+                <a:close/>
+                <a:lnTo>
+                  <a:pt x="1199869" y="782890"/>
+                </a:lnTo>
+                <a:close/>
+                <a:lnTo>
+                  <a:pt x="1206764" y="779545"/>
+                </a:lnTo>
+                <a:close/>
+                <a:lnTo>
+                  <a:pt x="1213658" y="776212"/>
+                </a:lnTo>
+                <a:close/>
+                <a:lnTo>
+                  <a:pt x="1220553" y="772891"/>
+                </a:lnTo>
+                <a:close/>
+                <a:lnTo>
+                  <a:pt x="1227448" y="769582"/>
+                </a:lnTo>
+                <a:close/>
+                <a:lnTo>
+                  <a:pt x="1234342" y="766284"/>
+                </a:lnTo>
+                <a:close/>
+                <a:lnTo>
+                  <a:pt x="1241235" y="762997"/>
+                </a:lnTo>
+                <a:close/>
+                <a:lnTo>
+                  <a:pt x="1248128" y="759722"/>
+                </a:lnTo>
+                <a:close/>
+                <a:lnTo>
+                  <a:pt x="1255021" y="756458"/>
+                </a:lnTo>
+                <a:close/>
+                <a:lnTo>
+                  <a:pt x="1261915" y="753204"/>
+                </a:lnTo>
+                <a:close/>
+                <a:lnTo>
+                  <a:pt x="1268808" y="749962"/>
+                </a:lnTo>
+                <a:close/>
+                <a:lnTo>
+                  <a:pt x="1275702" y="746730"/>
+                </a:lnTo>
+                <a:close/>
+                <a:lnTo>
+                  <a:pt x="1282596" y="743508"/>
+                </a:lnTo>
+                <a:close/>
+                <a:lnTo>
+                  <a:pt x="1289491" y="740298"/>
+                </a:lnTo>
+                <a:close/>
+                <a:lnTo>
+                  <a:pt x="1296386" y="737098"/>
+                </a:lnTo>
+                <a:close/>
+                <a:lnTo>
+                  <a:pt x="1303280" y="733909"/>
+                </a:lnTo>
+                <a:close/>
+                <a:lnTo>
+                  <a:pt x="1310174" y="730731"/>
+                </a:lnTo>
+                <a:close/>
+                <a:lnTo>
+                  <a:pt x="1317067" y="727564"/>
+                </a:lnTo>
+                <a:close/>
+                <a:lnTo>
+                  <a:pt x="1323959" y="724409"/>
+                </a:lnTo>
+                <a:close/>
+                <a:lnTo>
+                  <a:pt x="1330848" y="721265"/>
+                </a:lnTo>
+                <a:close/>
+                <a:lnTo>
+                  <a:pt x="1337737" y="718133"/>
+                </a:lnTo>
+                <a:close/>
+                <a:lnTo>
+                  <a:pt x="1344624" y="715011"/>
+                </a:lnTo>
+                <a:close/>
+                <a:lnTo>
+                  <a:pt x="1351510" y="711900"/>
+                </a:lnTo>
+                <a:close/>
+                <a:lnTo>
+                  <a:pt x="1358396" y="708799"/>
+                </a:lnTo>
+                <a:close/>
+                <a:lnTo>
+                  <a:pt x="1365283" y="705708"/>
+                </a:lnTo>
+                <a:close/>
+                <a:lnTo>
+                  <a:pt x="1372170" y="702626"/>
+                </a:lnTo>
+                <a:close/>
+                <a:lnTo>
+                  <a:pt x="1379059" y="699553"/>
+                </a:lnTo>
+                <a:close/>
+                <a:lnTo>
+                  <a:pt x="1385949" y="696490"/>
+                </a:lnTo>
+                <a:close/>
+                <a:lnTo>
+                  <a:pt x="1392841" y="693434"/>
+                </a:lnTo>
+                <a:close/>
+                <a:lnTo>
+                  <a:pt x="1399735" y="690388"/>
+                </a:lnTo>
+                <a:close/>
+                <a:lnTo>
+                  <a:pt x="1406629" y="687350"/>
+                </a:lnTo>
+                <a:close/>
+                <a:lnTo>
+                  <a:pt x="1413523" y="684321"/>
+                </a:lnTo>
+                <a:close/>
+                <a:lnTo>
+                  <a:pt x="1420418" y="681302"/>
+                </a:lnTo>
+                <a:close/>
+                <a:lnTo>
+                  <a:pt x="1427313" y="678291"/>
+                </a:lnTo>
+                <a:close/>
+                <a:lnTo>
+                  <a:pt x="1434207" y="675290"/>
+                </a:lnTo>
+                <a:close/>
+                <a:lnTo>
+                  <a:pt x="1441101" y="672297"/>
+                </a:lnTo>
+                <a:close/>
+                <a:lnTo>
+                  <a:pt x="1447994" y="669314"/>
+                </a:lnTo>
+                <a:close/>
+                <a:lnTo>
+                  <a:pt x="1454887" y="666341"/>
+                </a:lnTo>
+                <a:close/>
+                <a:lnTo>
+                  <a:pt x="1461780" y="663377"/>
+                </a:lnTo>
+                <a:close/>
+                <a:lnTo>
+                  <a:pt x="1468674" y="660422"/>
+                </a:lnTo>
+                <a:close/>
+                <a:lnTo>
+                  <a:pt x="1475567" y="657477"/>
+                </a:lnTo>
+                <a:close/>
+                <a:lnTo>
+                  <a:pt x="1482461" y="654543"/>
+                </a:lnTo>
+                <a:close/>
+                <a:lnTo>
+                  <a:pt x="1489356" y="651617"/>
+                </a:lnTo>
+                <a:close/>
+                <a:lnTo>
+                  <a:pt x="1496251" y="648701"/>
+                </a:lnTo>
+                <a:close/>
+                <a:lnTo>
+                  <a:pt x="1503145" y="645794"/>
+                </a:lnTo>
+                <a:close/>
+                <a:lnTo>
+                  <a:pt x="1510040" y="642896"/>
+                </a:lnTo>
+                <a:close/>
+                <a:lnTo>
+                  <a:pt x="1516933" y="640005"/>
+                </a:lnTo>
+                <a:close/>
+                <a:lnTo>
+                  <a:pt x="1523825" y="637122"/>
+                </a:lnTo>
+                <a:close/>
+                <a:lnTo>
+                  <a:pt x="1530716" y="634246"/>
+                </a:lnTo>
+                <a:close/>
+                <a:lnTo>
+                  <a:pt x="1537605" y="631377"/>
+                </a:lnTo>
+                <a:close/>
+                <a:lnTo>
+                  <a:pt x="1544493" y="628514"/>
+                </a:lnTo>
+                <a:close/>
+                <a:lnTo>
+                  <a:pt x="1551380" y="625659"/>
+                </a:lnTo>
+                <a:close/>
+                <a:lnTo>
+                  <a:pt x="1558266" y="622811"/>
+                </a:lnTo>
+                <a:close/>
+                <a:lnTo>
+                  <a:pt x="1565152" y="619971"/>
+                </a:lnTo>
+                <a:close/>
+                <a:lnTo>
+                  <a:pt x="1572039" y="617140"/>
+                </a:lnTo>
+                <a:close/>
+                <a:lnTo>
+                  <a:pt x="1578927" y="614316"/>
+                </a:lnTo>
+                <a:close/>
+                <a:lnTo>
+                  <a:pt x="1585816" y="611502"/>
+                </a:lnTo>
+                <a:close/>
+                <a:lnTo>
+                  <a:pt x="1592707" y="608697"/>
+                </a:lnTo>
+                <a:close/>
+                <a:lnTo>
+                  <a:pt x="1599600" y="605900"/>
+                </a:lnTo>
+                <a:close/>
+                <a:lnTo>
+                  <a:pt x="1606494" y="603112"/>
+                </a:lnTo>
+                <a:close/>
+                <a:lnTo>
+                  <a:pt x="1613388" y="600332"/>
+                </a:lnTo>
+                <a:close/>
+                <a:lnTo>
+                  <a:pt x="1620283" y="597560"/>
+                </a:lnTo>
+                <a:close/>
+                <a:lnTo>
+                  <a:pt x="1627178" y="594796"/>
+                </a:lnTo>
+                <a:close/>
+                <a:lnTo>
+                  <a:pt x="1634072" y="592040"/>
+                </a:lnTo>
+                <a:close/>
+                <a:lnTo>
+                  <a:pt x="1640966" y="589291"/>
+                </a:lnTo>
+                <a:close/>
+                <a:lnTo>
+                  <a:pt x="1647860" y="586549"/>
+                </a:lnTo>
+                <a:close/>
+                <a:lnTo>
+                  <a:pt x="1654753" y="583814"/>
+                </a:lnTo>
+                <a:close/>
+                <a:lnTo>
+                  <a:pt x="1661646" y="581087"/>
+                </a:lnTo>
+                <a:close/>
+                <a:lnTo>
+                  <a:pt x="1668539" y="578366"/>
+                </a:lnTo>
+                <a:close/>
+                <a:lnTo>
+                  <a:pt x="1675433" y="575652"/>
+                </a:lnTo>
+                <a:close/>
+                <a:lnTo>
+                  <a:pt x="1682326" y="572945"/>
+                </a:lnTo>
+                <a:close/>
+                <a:lnTo>
+                  <a:pt x="1689221" y="570245"/>
+                </a:lnTo>
+                <a:close/>
+                <a:lnTo>
+                  <a:pt x="1696115" y="567551"/>
+                </a:lnTo>
+                <a:close/>
+                <a:lnTo>
+                  <a:pt x="1703010" y="564863"/>
+                </a:lnTo>
+                <a:close/>
+                <a:lnTo>
+                  <a:pt x="1709905" y="562183"/>
+                </a:lnTo>
+                <a:close/>
+                <a:lnTo>
+                  <a:pt x="1716799" y="559508"/>
+                </a:lnTo>
+                <a:close/>
+                <a:lnTo>
+                  <a:pt x="1723692" y="556841"/>
+                </a:lnTo>
+                <a:close/>
+                <a:lnTo>
+                  <a:pt x="1730584" y="554179"/>
+                </a:lnTo>
+                <a:close/>
+                <a:lnTo>
+                  <a:pt x="1737474" y="551525"/>
+                </a:lnTo>
+                <a:close/>
+                <a:lnTo>
+                  <a:pt x="1744362" y="548877"/>
+                </a:lnTo>
+                <a:close/>
+                <a:lnTo>
+                  <a:pt x="1751249" y="546236"/>
+                </a:lnTo>
+                <a:close/>
+                <a:lnTo>
+                  <a:pt x="1758136" y="543602"/>
+                </a:lnTo>
+                <a:close/>
+                <a:lnTo>
+                  <a:pt x="1765022" y="540974"/>
+                </a:lnTo>
+                <a:close/>
+                <a:lnTo>
+                  <a:pt x="1771908" y="538354"/>
+                </a:lnTo>
+                <a:close/>
+                <a:lnTo>
+                  <a:pt x="1778795" y="535740"/>
+                </a:lnTo>
+                <a:close/>
+                <a:lnTo>
+                  <a:pt x="1785684" y="533133"/>
+                </a:lnTo>
+                <a:close/>
+                <a:lnTo>
+                  <a:pt x="1792574" y="530533"/>
+                </a:lnTo>
+                <a:close/>
+                <a:lnTo>
+                  <a:pt x="1799466" y="527940"/>
+                </a:lnTo>
+                <a:close/>
+                <a:lnTo>
+                  <a:pt x="1806359" y="525354"/>
+                </a:lnTo>
+                <a:close/>
+                <a:lnTo>
+                  <a:pt x="1813253" y="522774"/>
+                </a:lnTo>
+                <a:close/>
+                <a:lnTo>
+                  <a:pt x="1820148" y="520200"/>
+                </a:lnTo>
+                <a:close/>
+                <a:lnTo>
+                  <a:pt x="1827042" y="517633"/>
+                </a:lnTo>
+                <a:close/>
+                <a:lnTo>
+                  <a:pt x="1833937" y="515071"/>
+                </a:lnTo>
+                <a:close/>
+                <a:lnTo>
+                  <a:pt x="1840832" y="512514"/>
+                </a:lnTo>
+                <a:close/>
+                <a:lnTo>
+                  <a:pt x="1847725" y="509963"/>
+                </a:lnTo>
+                <a:close/>
+                <a:lnTo>
+                  <a:pt x="1854619" y="507418"/>
+                </a:lnTo>
+                <a:close/>
+                <a:lnTo>
+                  <a:pt x="1861512" y="504878"/>
+                </a:lnTo>
+                <a:close/>
+                <a:lnTo>
+                  <a:pt x="1868405" y="502345"/>
+                </a:lnTo>
+                <a:close/>
+                <a:lnTo>
+                  <a:pt x="1875298" y="499817"/>
+                </a:lnTo>
+                <a:close/>
+                <a:lnTo>
+                  <a:pt x="1882192" y="497295"/>
+                </a:lnTo>
+                <a:close/>
+                <a:lnTo>
+                  <a:pt x="1889086" y="494780"/>
+                </a:lnTo>
+                <a:close/>
+                <a:lnTo>
+                  <a:pt x="1895980" y="492271"/>
+                </a:lnTo>
+                <a:close/>
+                <a:lnTo>
+                  <a:pt x="1902875" y="489768"/>
+                </a:lnTo>
+                <a:close/>
+                <a:lnTo>
+                  <a:pt x="1909770" y="487271"/>
+                </a:lnTo>
+                <a:close/>
+                <a:lnTo>
+                  <a:pt x="1916664" y="484779"/>
+                </a:lnTo>
+                <a:close/>
+                <a:lnTo>
+                  <a:pt x="1923558" y="482292"/>
+                </a:lnTo>
+                <a:close/>
+                <a:lnTo>
+                  <a:pt x="1930450" y="479811"/>
+                </a:lnTo>
+                <a:close/>
+                <a:lnTo>
+                  <a:pt x="1937341" y="477334"/>
+                </a:lnTo>
+                <a:close/>
+                <a:lnTo>
+                  <a:pt x="1944231" y="474861"/>
+                </a:lnTo>
+                <a:close/>
+                <a:lnTo>
+                  <a:pt x="1951119" y="472392"/>
+                </a:lnTo>
+                <a:close/>
+                <a:lnTo>
+                  <a:pt x="1958005" y="469929"/>
+                </a:lnTo>
+                <a:close/>
+                <a:lnTo>
+                  <a:pt x="1964892" y="467471"/>
+                </a:lnTo>
+                <a:close/>
+                <a:lnTo>
+                  <a:pt x="1971778" y="465018"/>
+                </a:lnTo>
+                <a:close/>
+                <a:lnTo>
+                  <a:pt x="1978665" y="462571"/>
+                </a:lnTo>
+                <a:close/>
+                <a:lnTo>
+                  <a:pt x="1985552" y="460130"/>
+                </a:lnTo>
+                <a:close/>
+                <a:lnTo>
+                  <a:pt x="1992441" y="457697"/>
+                </a:lnTo>
+                <a:close/>
+                <a:lnTo>
+                  <a:pt x="1999332" y="455269"/>
+                </a:lnTo>
+                <a:close/>
+                <a:lnTo>
+                  <a:pt x="2006225" y="452849"/>
+                </a:lnTo>
+                <a:close/>
+                <a:lnTo>
+                  <a:pt x="2013118" y="450433"/>
+                </a:lnTo>
+                <a:close/>
+                <a:lnTo>
+                  <a:pt x="2020013" y="448024"/>
+                </a:lnTo>
+                <a:close/>
+                <a:lnTo>
+                  <a:pt x="2026907" y="445619"/>
+                </a:lnTo>
+                <a:close/>
+                <a:lnTo>
+                  <a:pt x="2033802" y="443218"/>
+                </a:lnTo>
+                <a:close/>
+                <a:lnTo>
+                  <a:pt x="2040697" y="440821"/>
+                </a:lnTo>
+                <a:close/>
+                <a:lnTo>
+                  <a:pt x="2047591" y="438427"/>
+                </a:lnTo>
+                <a:close/>
+                <a:lnTo>
+                  <a:pt x="2054484" y="436037"/>
+                </a:lnTo>
+                <a:close/>
+                <a:lnTo>
+                  <a:pt x="2061378" y="433651"/>
+                </a:lnTo>
+                <a:close/>
+                <a:lnTo>
+                  <a:pt x="2068271" y="431268"/>
+                </a:lnTo>
+                <a:close/>
+                <a:lnTo>
+                  <a:pt x="2075164" y="428890"/>
+                </a:lnTo>
+                <a:close/>
+                <a:lnTo>
+                  <a:pt x="2082057" y="426517"/>
+                </a:lnTo>
+                <a:close/>
+                <a:lnTo>
+                  <a:pt x="2088951" y="424148"/>
+                </a:lnTo>
+                <a:close/>
+                <a:lnTo>
+                  <a:pt x="2095845" y="421785"/>
+                </a:lnTo>
+                <a:close/>
+                <a:lnTo>
+                  <a:pt x="2102740" y="419427"/>
+                </a:lnTo>
+                <a:close/>
+                <a:lnTo>
+                  <a:pt x="2109635" y="417075"/>
+                </a:lnTo>
+                <a:close/>
+                <a:lnTo>
+                  <a:pt x="2116529" y="414728"/>
+                </a:lnTo>
+                <a:close/>
+                <a:lnTo>
+                  <a:pt x="2123423" y="412386"/>
+                </a:lnTo>
+                <a:close/>
+                <a:lnTo>
+                  <a:pt x="2130317" y="410050"/>
+                </a:lnTo>
+                <a:close/>
+                <a:lnTo>
+                  <a:pt x="2137209" y="407719"/>
+                </a:lnTo>
+                <a:close/>
+                <a:lnTo>
+                  <a:pt x="2144099" y="405393"/>
+                </a:lnTo>
+                <a:close/>
+                <a:lnTo>
+                  <a:pt x="2150988" y="403072"/>
+                </a:lnTo>
+                <a:close/>
+                <a:lnTo>
+                  <a:pt x="2157875" y="400756"/>
+                </a:lnTo>
+                <a:close/>
+                <a:lnTo>
+                  <a:pt x="2164761" y="398445"/>
+                </a:lnTo>
+                <a:close/>
+                <a:lnTo>
+                  <a:pt x="2171648" y="396139"/>
+                </a:lnTo>
+                <a:close/>
+                <a:lnTo>
+                  <a:pt x="2178534" y="393837"/>
+                </a:lnTo>
+                <a:close/>
+                <a:lnTo>
+                  <a:pt x="2185421" y="391539"/>
+                </a:lnTo>
+                <a:close/>
+                <a:lnTo>
+                  <a:pt x="2192309" y="389246"/>
+                </a:lnTo>
+                <a:close/>
+                <a:lnTo>
+                  <a:pt x="2199199" y="386957"/>
+                </a:lnTo>
+                <a:close/>
+                <a:lnTo>
+                  <a:pt x="2206091" y="384671"/>
+                </a:lnTo>
+                <a:close/>
+                <a:lnTo>
+                  <a:pt x="2212984" y="382390"/>
+                </a:lnTo>
+                <a:close/>
+                <a:lnTo>
+                  <a:pt x="2219878" y="380112"/>
+                </a:lnTo>
+                <a:close/>
+                <a:lnTo>
+                  <a:pt x="2226772" y="377839"/>
+                </a:lnTo>
+                <a:close/>
+                <a:lnTo>
+                  <a:pt x="2233667" y="375570"/>
+                </a:lnTo>
+                <a:close/>
+                <a:lnTo>
+                  <a:pt x="2240562" y="373305"/>
+                </a:lnTo>
+                <a:close/>
+                <a:lnTo>
+                  <a:pt x="2247456" y="371044"/>
+                </a:lnTo>
+                <a:close/>
+                <a:lnTo>
+                  <a:pt x="2254350" y="368787"/>
+                </a:lnTo>
+                <a:close/>
+                <a:lnTo>
+                  <a:pt x="2261243" y="366535"/>
+                </a:lnTo>
+                <a:close/>
+                <a:lnTo>
+                  <a:pt x="2268136" y="364287"/>
+                </a:lnTo>
+                <a:close/>
+                <a:lnTo>
+                  <a:pt x="2275030" y="362043"/>
+                </a:lnTo>
+                <a:close/>
+                <a:lnTo>
+                  <a:pt x="2281923" y="359803"/>
+                </a:lnTo>
+                <a:close/>
+                <a:lnTo>
+                  <a:pt x="2288816" y="357568"/>
+                </a:lnTo>
+                <a:close/>
+                <a:lnTo>
+                  <a:pt x="2295710" y="355336"/>
+                </a:lnTo>
+                <a:close/>
+                <a:lnTo>
+                  <a:pt x="2302605" y="353109"/>
+                </a:lnTo>
+                <a:close/>
+                <a:lnTo>
+                  <a:pt x="2309499" y="350886"/>
+                </a:lnTo>
+                <a:close/>
+                <a:lnTo>
+                  <a:pt x="2316394" y="348667"/>
+                </a:lnTo>
+                <a:close/>
+                <a:lnTo>
+                  <a:pt x="2323289" y="346453"/>
+                </a:lnTo>
+                <a:close/>
+                <a:lnTo>
+                  <a:pt x="2330182" y="344242"/>
+                </a:lnTo>
+                <a:close/>
+                <a:lnTo>
+                  <a:pt x="2337075" y="342036"/>
+                </a:lnTo>
+                <a:close/>
+                <a:lnTo>
+                  <a:pt x="2343966" y="339834"/>
+                </a:lnTo>
+                <a:close/>
+                <a:lnTo>
+                  <a:pt x="2350856" y="337636"/>
+                </a:lnTo>
+                <a:close/>
+                <a:lnTo>
+                  <a:pt x="2357744" y="335442"/>
+                </a:lnTo>
+                <a:close/>
+                <a:lnTo>
+                  <a:pt x="2364631" y="333252"/>
+                </a:lnTo>
+                <a:close/>
+                <a:lnTo>
+                  <a:pt x="2371517" y="331066"/>
+                </a:lnTo>
+                <a:close/>
+                <a:lnTo>
+                  <a:pt x="2378404" y="328885"/>
+                </a:lnTo>
+                <a:close/>
+                <a:lnTo>
+                  <a:pt x="2385290" y="326708"/>
+                </a:lnTo>
+                <a:close/>
+                <a:lnTo>
+                  <a:pt x="2392178" y="324535"/>
+                </a:lnTo>
+                <a:close/>
+                <a:lnTo>
+                  <a:pt x="2399067" y="322367"/>
+                </a:lnTo>
+                <a:close/>
+                <a:lnTo>
+                  <a:pt x="2405957" y="320203"/>
+                </a:lnTo>
+                <a:close/>
+                <a:lnTo>
+                  <a:pt x="2412849" y="318044"/>
+                </a:lnTo>
+                <a:close/>
+                <a:lnTo>
+                  <a:pt x="2419743" y="315888"/>
+                </a:lnTo>
+                <a:close/>
+                <a:lnTo>
+                  <a:pt x="2426637" y="313737"/>
+                </a:lnTo>
+                <a:close/>
+                <a:lnTo>
+                  <a:pt x="2433532" y="311589"/>
+                </a:lnTo>
+                <a:close/>
+                <a:lnTo>
+                  <a:pt x="2440426" y="309445"/>
+                </a:lnTo>
+                <a:close/>
+                <a:lnTo>
+                  <a:pt x="2447321" y="307304"/>
+                </a:lnTo>
+                <a:close/>
+                <a:lnTo>
+                  <a:pt x="2454215" y="305166"/>
+                </a:lnTo>
+                <a:close/>
+                <a:lnTo>
+                  <a:pt x="2461109" y="303032"/>
+                </a:lnTo>
+                <a:close/>
+                <a:lnTo>
+                  <a:pt x="2468002" y="300900"/>
+                </a:lnTo>
+                <a:close/>
+                <a:lnTo>
+                  <a:pt x="2474895" y="298772"/>
+                </a:lnTo>
+                <a:close/>
+                <a:lnTo>
+                  <a:pt x="2481788" y="296647"/>
+                </a:lnTo>
+                <a:close/>
+                <a:lnTo>
+                  <a:pt x="2488682" y="294524"/>
+                </a:lnTo>
+                <a:close/>
+                <a:lnTo>
+                  <a:pt x="2495575" y="292405"/>
+                </a:lnTo>
+                <a:close/>
+                <a:lnTo>
+                  <a:pt x="2502470" y="290289"/>
+                </a:lnTo>
+                <a:close/>
+                <a:lnTo>
+                  <a:pt x="2509364" y="288176"/>
+                </a:lnTo>
+                <a:close/>
+                <a:lnTo>
+                  <a:pt x="2516259" y="286067"/>
+                </a:lnTo>
+                <a:close/>
+                <a:lnTo>
+                  <a:pt x="2523154" y="283961"/>
+                </a:lnTo>
+                <a:close/>
+                <a:lnTo>
+                  <a:pt x="2530048" y="281859"/>
+                </a:lnTo>
+                <a:close/>
+                <a:lnTo>
+                  <a:pt x="2536941" y="279760"/>
+                </a:lnTo>
+                <a:close/>
+                <a:lnTo>
+                  <a:pt x="2543833" y="277667"/>
+                </a:lnTo>
+                <a:close/>
+                <a:lnTo>
+                  <a:pt x="2550724" y="275577"/>
+                </a:lnTo>
+                <a:close/>
+                <a:lnTo>
+                  <a:pt x="2557613" y="273493"/>
+                </a:lnTo>
+                <a:close/>
+                <a:lnTo>
+                  <a:pt x="2564501" y="271413"/>
+                </a:lnTo>
+                <a:close/>
+                <a:lnTo>
+                  <a:pt x="2571387" y="269337"/>
+                </a:lnTo>
+                <a:close/>
+                <a:lnTo>
+                  <a:pt x="2578273" y="267265"/>
+                </a:lnTo>
+                <a:close/>
+                <a:lnTo>
+                  <a:pt x="2585160" y="265197"/>
+                </a:lnTo>
+                <a:close/>
+                <a:lnTo>
+                  <a:pt x="2592047" y="263133"/>
+                </a:lnTo>
+                <a:close/>
+                <a:lnTo>
+                  <a:pt x="2598935" y="261072"/>
+                </a:lnTo>
+                <a:close/>
+                <a:lnTo>
+                  <a:pt x="2605824" y="259013"/>
+                </a:lnTo>
+                <a:close/>
+                <a:lnTo>
+                  <a:pt x="2612716" y="256958"/>
+                </a:lnTo>
+                <a:close/>
+                <a:lnTo>
+                  <a:pt x="2619608" y="254906"/>
+                </a:lnTo>
+                <a:close/>
+                <a:lnTo>
+                  <a:pt x="2626502" y="252857"/>
+                </a:lnTo>
+                <a:close/>
+                <a:lnTo>
+                  <a:pt x="2633396" y="250811"/>
+                </a:lnTo>
+                <a:close/>
+                <a:lnTo>
+                  <a:pt x="2640291" y="248769"/>
+                </a:lnTo>
+                <a:close/>
+                <a:lnTo>
+                  <a:pt x="2647186" y="246730"/>
+                </a:lnTo>
+                <a:close/>
+                <a:lnTo>
+                  <a:pt x="2654081" y="244696"/>
+                </a:lnTo>
+                <a:close/>
+                <a:lnTo>
+                  <a:pt x="2660974" y="242665"/>
+                </a:lnTo>
+                <a:close/>
+                <a:lnTo>
+                  <a:pt x="2667868" y="240638"/>
+                </a:lnTo>
+                <a:close/>
+                <a:lnTo>
+                  <a:pt x="2674761" y="238614"/>
+                </a:lnTo>
+                <a:close/>
+                <a:lnTo>
+                  <a:pt x="2681654" y="236593"/>
+                </a:lnTo>
+                <a:close/>
+                <a:lnTo>
+                  <a:pt x="2688547" y="234574"/>
+                </a:lnTo>
+                <a:close/>
+                <a:lnTo>
+                  <a:pt x="2695441" y="232558"/>
+                </a:lnTo>
+                <a:close/>
+                <a:lnTo>
+                  <a:pt x="2702335" y="230543"/>
+                </a:lnTo>
+                <a:close/>
+                <a:lnTo>
+                  <a:pt x="2709229" y="228530"/>
+                </a:lnTo>
+                <a:close/>
+                <a:lnTo>
+                  <a:pt x="2716124" y="226519"/>
+                </a:lnTo>
+                <a:close/>
+                <a:lnTo>
+                  <a:pt x="2723019" y="224510"/>
+                </a:lnTo>
+                <a:close/>
+                <a:lnTo>
+                  <a:pt x="2729913" y="222504"/>
+                </a:lnTo>
+                <a:close/>
+                <a:lnTo>
+                  <a:pt x="2736807" y="220501"/>
+                </a:lnTo>
+                <a:close/>
+                <a:lnTo>
+                  <a:pt x="2743700" y="218503"/>
+                </a:lnTo>
+                <a:close/>
+                <a:lnTo>
+                  <a:pt x="2750592" y="216509"/>
+                </a:lnTo>
+                <a:close/>
+                <a:lnTo>
+                  <a:pt x="2757481" y="214520"/>
+                </a:lnTo>
+                <a:close/>
+                <a:lnTo>
+                  <a:pt x="2764370" y="212537"/>
+                </a:lnTo>
+                <a:close/>
+                <a:lnTo>
+                  <a:pt x="2771257" y="210559"/>
+                </a:lnTo>
+                <a:close/>
+                <a:lnTo>
+                  <a:pt x="2778143" y="208584"/>
+                </a:lnTo>
+                <a:close/>
+                <a:lnTo>
+                  <a:pt x="2785029" y="206614"/>
+                </a:lnTo>
+                <a:close/>
+                <a:lnTo>
+                  <a:pt x="2791916" y="204646"/>
+                </a:lnTo>
+                <a:close/>
+                <a:lnTo>
+                  <a:pt x="2798803" y="202682"/>
+                </a:lnTo>
+                <a:close/>
+                <a:lnTo>
+                  <a:pt x="2805692" y="200719"/>
+                </a:lnTo>
+                <a:close/>
+                <a:lnTo>
+                  <a:pt x="2812582" y="198757"/>
+                </a:lnTo>
+                <a:close/>
+                <a:lnTo>
+                  <a:pt x="2819474" y="196797"/>
+                </a:lnTo>
+                <a:close/>
+                <a:lnTo>
+                  <a:pt x="2826367" y="194839"/>
+                </a:lnTo>
+                <a:close/>
+                <a:lnTo>
+                  <a:pt x="2833261" y="192884"/>
+                </a:lnTo>
+                <a:close/>
+                <a:lnTo>
+                  <a:pt x="2840156" y="190932"/>
+                </a:lnTo>
+                <a:close/>
+                <a:lnTo>
+                  <a:pt x="2847051" y="188982"/>
+                </a:lnTo>
+                <a:close/>
+                <a:lnTo>
+                  <a:pt x="2853946" y="187037"/>
+                </a:lnTo>
+                <a:close/>
+                <a:lnTo>
+                  <a:pt x="2860840" y="185096"/>
+                </a:lnTo>
+                <a:close/>
+                <a:lnTo>
+                  <a:pt x="2867734" y="183158"/>
+                </a:lnTo>
+                <a:close/>
+                <a:lnTo>
+                  <a:pt x="2874627" y="181225"/>
+                </a:lnTo>
+                <a:close/>
+                <a:lnTo>
+                  <a:pt x="2881520" y="179295"/>
+                </a:lnTo>
+                <a:close/>
+                <a:lnTo>
+                  <a:pt x="2888413" y="177367"/>
+                </a:lnTo>
+                <a:close/>
+                <a:lnTo>
+                  <a:pt x="2895306" y="175443"/>
+                </a:lnTo>
+                <a:close/>
+                <a:lnTo>
+                  <a:pt x="2902200" y="173521"/>
+                </a:lnTo>
+                <a:close/>
+                <a:lnTo>
+                  <a:pt x="2909094" y="171600"/>
+                </a:lnTo>
+                <a:close/>
+                <a:lnTo>
+                  <a:pt x="2915989" y="169682"/>
+                </a:lnTo>
+                <a:close/>
+                <a:lnTo>
+                  <a:pt x="2922883" y="167765"/>
+                </a:lnTo>
+                <a:close/>
+                <a:lnTo>
+                  <a:pt x="2929778" y="165851"/>
+                </a:lnTo>
+                <a:close/>
+                <a:lnTo>
+                  <a:pt x="2936672" y="163940"/>
+                </a:lnTo>
+                <a:close/>
+                <a:lnTo>
+                  <a:pt x="2943566" y="162032"/>
+                </a:lnTo>
+                <a:close/>
+                <a:lnTo>
+                  <a:pt x="2950458" y="160127"/>
+                </a:lnTo>
+                <a:close/>
+                <a:lnTo>
+                  <a:pt x="2957349" y="158226"/>
+                </a:lnTo>
+                <a:close/>
+                <a:lnTo>
+                  <a:pt x="2964239" y="156329"/>
+                </a:lnTo>
+                <a:close/>
+                <a:lnTo>
+                  <a:pt x="2971126" y="154436"/>
+                </a:lnTo>
+                <a:close/>
+                <a:lnTo>
+                  <a:pt x="2978013" y="152546"/>
+                </a:lnTo>
+                <a:close/>
+                <a:lnTo>
+                  <a:pt x="2984899" y="150660"/>
+                </a:lnTo>
+                <a:close/>
+                <a:lnTo>
+                  <a:pt x="2991785" y="148776"/>
+                </a:lnTo>
+                <a:close/>
+                <a:lnTo>
+                  <a:pt x="2998672" y="146896"/>
+                </a:lnTo>
+                <a:close/>
+                <a:lnTo>
+                  <a:pt x="3005560" y="145017"/>
+                </a:lnTo>
+                <a:close/>
+                <a:lnTo>
+                  <a:pt x="3012449" y="143140"/>
+                </a:lnTo>
+                <a:close/>
+                <a:lnTo>
+                  <a:pt x="3019340" y="141266"/>
+                </a:lnTo>
+                <a:close/>
+                <a:lnTo>
+                  <a:pt x="3026233" y="139393"/>
+                </a:lnTo>
+                <a:close/>
+                <a:lnTo>
+                  <a:pt x="3033127" y="137523"/>
+                </a:lnTo>
+                <a:close/>
+                <a:lnTo>
+                  <a:pt x="3040021" y="135656"/>
+                </a:lnTo>
+                <a:close/>
+                <a:lnTo>
+                  <a:pt x="3046916" y="133791"/>
+                </a:lnTo>
+                <a:close/>
+                <a:lnTo>
+                  <a:pt x="3053810" y="131930"/>
+                </a:lnTo>
+                <a:close/>
+                <a:lnTo>
+                  <a:pt x="3060705" y="130073"/>
+                </a:lnTo>
+                <a:close/>
+                <a:lnTo>
+                  <a:pt x="3067599" y="128220"/>
+                </a:lnTo>
+                <a:close/>
+                <a:lnTo>
+                  <a:pt x="3074493" y="126371"/>
+                </a:lnTo>
+                <a:close/>
+                <a:lnTo>
+                  <a:pt x="3081386" y="124525"/>
+                </a:lnTo>
+                <a:close/>
+                <a:lnTo>
+                  <a:pt x="3088279" y="122682"/>
+                </a:lnTo>
+                <a:close/>
+                <a:lnTo>
+                  <a:pt x="3095172" y="120843"/>
+                </a:lnTo>
+                <a:close/>
+                <a:lnTo>
+                  <a:pt x="3102065" y="119006"/>
+                </a:lnTo>
+                <a:close/>
+                <a:lnTo>
+                  <a:pt x="3108959" y="117172"/>
+                </a:lnTo>
+                <a:close/>
+                <a:lnTo>
+                  <a:pt x="3115853" y="115339"/>
+                </a:lnTo>
+                <a:close/>
+                <a:lnTo>
+                  <a:pt x="3122748" y="113509"/>
+                </a:lnTo>
+                <a:close/>
+                <a:lnTo>
+                  <a:pt x="3129643" y="111681"/>
+                </a:lnTo>
+                <a:close/>
+                <a:lnTo>
+                  <a:pt x="3136538" y="109856"/>
+                </a:lnTo>
+                <a:close/>
+                <a:lnTo>
+                  <a:pt x="3143432" y="108033"/>
+                </a:lnTo>
+                <a:close/>
+                <a:lnTo>
+                  <a:pt x="3150325" y="106212"/>
+                </a:lnTo>
+                <a:close/>
+                <a:lnTo>
+                  <a:pt x="3157217" y="104394"/>
+                </a:lnTo>
+                <a:close/>
+                <a:lnTo>
+                  <a:pt x="3164107" y="102578"/>
+                </a:lnTo>
+                <a:close/>
+                <a:lnTo>
+                  <a:pt x="3170995" y="100766"/>
+                </a:lnTo>
+                <a:close/>
+                <a:lnTo>
+                  <a:pt x="3177883" y="98956"/>
+                </a:lnTo>
+                <a:close/>
+                <a:lnTo>
+                  <a:pt x="3184769" y="97148"/>
+                </a:lnTo>
+                <a:close/>
+                <a:lnTo>
+                  <a:pt x="3191655" y="95343"/>
+                </a:lnTo>
+                <a:close/>
+                <a:lnTo>
+                  <a:pt x="3198542" y="93540"/>
+                </a:lnTo>
+                <a:close/>
+                <a:lnTo>
+                  <a:pt x="3205429" y="91739"/>
+                </a:lnTo>
+                <a:close/>
+                <a:lnTo>
+                  <a:pt x="3212317" y="89941"/>
+                </a:lnTo>
+                <a:close/>
+                <a:lnTo>
+                  <a:pt x="3219207" y="88144"/>
+                </a:lnTo>
+                <a:close/>
+                <a:lnTo>
+                  <a:pt x="3226099" y="86350"/>
+                </a:lnTo>
+                <a:close/>
+                <a:lnTo>
+                  <a:pt x="3232992" y="84558"/>
+                </a:lnTo>
+                <a:close/>
+                <a:lnTo>
+                  <a:pt x="3239886" y="82769"/>
+                </a:lnTo>
+                <a:close/>
+                <a:lnTo>
+                  <a:pt x="3246780" y="80984"/>
+                </a:lnTo>
+                <a:close/>
+                <a:lnTo>
+                  <a:pt x="3253675" y="79202"/>
+                </a:lnTo>
+                <a:close/>
+                <a:lnTo>
+                  <a:pt x="3260570" y="77424"/>
+                </a:lnTo>
+                <a:close/>
+                <a:lnTo>
+                  <a:pt x="3267464" y="75650"/>
+                </a:lnTo>
+                <a:close/>
+                <a:lnTo>
+                  <a:pt x="3274359" y="73880"/>
+                </a:lnTo>
+                <a:close/>
+                <a:lnTo>
+                  <a:pt x="3281252" y="72114"/>
+                </a:lnTo>
+                <a:close/>
+                <a:lnTo>
+                  <a:pt x="3288146" y="70351"/>
+                </a:lnTo>
+                <a:close/>
+                <a:lnTo>
+                  <a:pt x="3295039" y="68591"/>
+                </a:lnTo>
+                <a:close/>
+                <a:lnTo>
+                  <a:pt x="3301932" y="66833"/>
+                </a:lnTo>
+                <a:close/>
+                <a:lnTo>
+                  <a:pt x="3308825" y="65076"/>
+                </a:lnTo>
+                <a:close/>
+                <a:lnTo>
+                  <a:pt x="3315719" y="63319"/>
+                </a:lnTo>
+                <a:close/>
+                <a:lnTo>
+                  <a:pt x="3322612" y="61564"/>
+                </a:lnTo>
+                <a:close/>
+                <a:lnTo>
+                  <a:pt x="3329505" y="59809"/>
+                </a:lnTo>
+                <a:close/>
+                <a:lnTo>
+                  <a:pt x="3336399" y="58055"/>
+                </a:lnTo>
+                <a:close/>
+                <a:lnTo>
+                  <a:pt x="3343293" y="56303"/>
+                </a:lnTo>
+                <a:close/>
+                <a:lnTo>
+                  <a:pt x="3350186" y="54554"/>
+                </a:lnTo>
+                <a:close/>
+                <a:lnTo>
+                  <a:pt x="3357080" y="52809"/>
+                </a:lnTo>
+                <a:close/>
+                <a:lnTo>
+                  <a:pt x="3363973" y="51067"/>
+                </a:lnTo>
+                <a:close/>
+                <a:lnTo>
+                  <a:pt x="3370866" y="49330"/>
+                </a:lnTo>
+                <a:close/>
+                <a:lnTo>
+                  <a:pt x="3377759" y="47597"/>
+                </a:lnTo>
+                <a:close/>
+                <a:lnTo>
+                  <a:pt x="3384650" y="45869"/>
+                </a:lnTo>
+                <a:close/>
+                <a:lnTo>
+                  <a:pt x="3391540" y="44143"/>
+                </a:lnTo>
+                <a:close/>
+                <a:lnTo>
+                  <a:pt x="3398427" y="42421"/>
+                </a:lnTo>
+                <a:close/>
+                <a:lnTo>
+                  <a:pt x="3405312" y="40700"/>
+                </a:lnTo>
+                <a:close/>
+                <a:lnTo>
+                  <a:pt x="3412194" y="38981"/>
+                </a:lnTo>
+                <a:close/>
+                <a:lnTo>
+                  <a:pt x="3419072" y="37263"/>
+                </a:lnTo>
+                <a:close/>
+                <a:lnTo>
+                  <a:pt x="3425947" y="35546"/>
+                </a:lnTo>
+                <a:close/>
+                <a:lnTo>
+                  <a:pt x="3432822" y="33830"/>
+                </a:lnTo>
+                <a:close/>
+                <a:lnTo>
+                  <a:pt x="3439700" y="32115"/>
+                </a:lnTo>
+                <a:close/>
+                <a:lnTo>
+                  <a:pt x="3446586" y="30402"/>
+                </a:lnTo>
+                <a:close/>
+                <a:lnTo>
+                  <a:pt x="3453482" y="28690"/>
+                </a:lnTo>
+                <a:close/>
+                <a:lnTo>
+                  <a:pt x="3460392" y="26981"/>
+                </a:lnTo>
+                <a:close/>
+                <a:lnTo>
+                  <a:pt x="3467320" y="25275"/>
+                </a:lnTo>
+                <a:close/>
+                <a:lnTo>
+                  <a:pt x="3474267" y="23571"/>
+                </a:lnTo>
+                <a:close/>
+                <a:lnTo>
+                  <a:pt x="3481226" y="21870"/>
+                </a:lnTo>
+                <a:close/>
+                <a:lnTo>
+                  <a:pt x="3488180" y="20173"/>
+                </a:lnTo>
+                <a:close/>
+                <a:lnTo>
+                  <a:pt x="3495117" y="18478"/>
+                </a:lnTo>
+                <a:close/>
+                <a:lnTo>
+                  <a:pt x="3502022" y="16785"/>
+                </a:lnTo>
+                <a:close/>
+                <a:lnTo>
+                  <a:pt x="3508880" y="15096"/>
+                </a:lnTo>
+                <a:close/>
+                <a:lnTo>
+                  <a:pt x="3515678" y="13409"/>
+                </a:lnTo>
+                <a:close/>
+                <a:lnTo>
+                  <a:pt x="3522400" y="11725"/>
+                </a:lnTo>
+                <a:close/>
+                <a:lnTo>
+                  <a:pt x="3529033" y="10043"/>
+                </a:lnTo>
+                <a:close/>
+                <a:lnTo>
+                  <a:pt x="3535563" y="8363"/>
+                </a:lnTo>
+                <a:close/>
+                <a:lnTo>
+                  <a:pt x="3541975" y="6686"/>
+                </a:lnTo>
+                <a:close/>
+                <a:lnTo>
+                  <a:pt x="3548255" y="5011"/>
+                </a:lnTo>
+                <a:close/>
+                <a:lnTo>
+                  <a:pt x="3554389" y="3339"/>
+                </a:lnTo>
+                <a:close/>
+                <a:lnTo>
+                  <a:pt x="3560362" y="1668"/>
+                </a:lnTo>
+                <a:close/>
+                <a:lnTo>
+                  <a:pt x="3566160" y="0"/>
                 </a:lnTo>
                 <a:close/>
               </a:path>
@@ -5623,8 +5623,8 @@
         </p:nvCxnSpPr>
         <p:spPr>
           <a:xfrm flipV="1">
-            <a:off x="6400800.0" y="1657350.0"/>
-            <a:ext cx="0.0" cy="914400.0"/>
+            <a:off x="6400800.0" y="1108710.0"/>
+            <a:ext cx="0.0" cy="1463040.0"/>
           </a:xfrm>
           <a:prstGeom prst="line">
             <a:avLst/>
@@ -5659,7 +5659,7 @@
         </p:nvSpPr>
         <p:spPr>
           <a:xfrm>
-            <a:off x="6311900" y="1568450"/>
+            <a:off x="6311900" y="1019810"/>
             <a:ext cx="177800" cy="177800"/>
           </a:xfrm>
           <a:prstGeom prst="ellipse">
@@ -5704,7 +5704,7 @@
         </p:nvSpPr>
         <p:spPr>
           <a:xfrm>
-            <a:off x="6311900" y="1934210"/>
+            <a:off x="6311900" y="1614170"/>
             <a:ext cx="177800" cy="177800"/>
           </a:xfrm>
           <a:prstGeom prst="ellipse">
@@ -5749,8 +5749,8 @@
         </p:nvCxnSpPr>
         <p:spPr>
           <a:xfrm flipV="1">
-            <a:off x="5852160.0" y="1741017.6"/>
-            <a:ext cx="228600.0" cy="65836.79999999981"/>
+            <a:off x="6035040.0" y="1177290.0"/>
+            <a:ext cx="274320.0" cy="114300.0"/>
           </a:xfrm>
           <a:prstGeom prst="line">
             <a:avLst/>
@@ -5784,8 +5784,8 @@
         </p:nvCxnSpPr>
         <p:spPr>
           <a:xfrm flipH="1">
-            <a:off x="6629400.0" y="1549450.7999999998"/>
-            <a:ext cx="228600.0" cy="52578.00000000023"/>
+            <a:off x="6492240.0" y="1062990.0"/>
+            <a:ext cx="274320.0" cy="68580.0"/>
           </a:xfrm>
           <a:prstGeom prst="line">
             <a:avLst/>
@@ -5819,7 +5819,7 @@
         </p:nvSpPr>
         <p:spPr>
           <a:xfrm>
-            <a:off x="5918200" y="974090"/>
+            <a:off x="6375400" y="-31750"/>
             <a:ext cx="1524000" cy="508000"/>
           </a:xfrm>
           <a:prstGeom prst="rect">
@@ -5855,7 +5855,7 @@
         </p:nvSpPr>
         <p:spPr>
           <a:xfrm>
-            <a:off x="6146800" y="2391410"/>
+            <a:off x="6146800" y="2437130"/>
             <a:ext cx="1524000" cy="508000"/>
           </a:xfrm>
           <a:prstGeom prst="rect">
@@ -5891,7 +5891,7 @@
         </p:nvSpPr>
         <p:spPr>
           <a:xfrm>
-            <a:off x="4157980" y="2391410"/>
+            <a:off x="4180840" y="2391410"/>
             <a:ext cx="1524000" cy="508000"/>
           </a:xfrm>
           <a:prstGeom prst="rect">

--- a/output/6.pptx
+++ b/output/6.pptx
@@ -3104,7 +3104,7 @@
         </p:nvCxnSpPr>
         <p:spPr>
           <a:xfrm>
-            <a:off x="2286000.0" y="2571750.0"/>
+            <a:off x="3886200.0" y="2571750.0"/>
             <a:ext cx="4572000.0" cy="0.0"/>
           </a:xfrm>
           <a:prstGeom prst="line">
@@ -3139,8 +3139,8 @@
         </p:nvCxnSpPr>
         <p:spPr>
           <a:xfrm flipV="1">
-            <a:off x="4572000.0" y="285750.0"/>
-            <a:ext cx="0.0" cy="4572000.0"/>
+            <a:off x="4572000.0" y="-171450.0"/>
+            <a:ext cx="0.0" cy="3657600.0"/>
           </a:xfrm>
           <a:prstGeom prst="line">
             <a:avLst/>
@@ -3174,8 +3174,8 @@
         </p:nvSpPr>
         <p:spPr>
           <a:xfrm>
-            <a:off x="4572000" y="582016"/>
-            <a:ext cx="3566160" cy="1989734"/>
+            <a:off x="4572000" y="633222"/>
+            <a:ext cx="3657600" cy="1938528"/>
           </a:xfrm>
           <a:custGeom>
             <a:avLst/>
@@ -3184,2404 +3184,2404 @@
             <a:cxnLst/>
             <a:rect l="l" t="t" r="r" b="b"/>
             <a:pathLst>
-              <a:path w="3566160" h="1989734">
+              <a:path w="3657600" h="1938528">
                 <a:moveTo>
-                  <a:pt x="0" y="1989734"/>
+                  <a:pt x="0" y="1938528"/>
                 </a:moveTo>
                 <a:lnTo>
-                  <a:pt x="3245" y="1957587"/>
-                </a:lnTo>
-                <a:close/>
-                <a:lnTo>
-                  <a:pt x="6492" y="1928849"/>
-                </a:lnTo>
-                <a:close/>
-                <a:lnTo>
-                  <a:pt x="9742" y="1903267"/>
-                </a:lnTo>
-                <a:close/>
-                <a:lnTo>
-                  <a:pt x="12995" y="1880590"/>
-                </a:lnTo>
-                <a:close/>
-                <a:lnTo>
-                  <a:pt x="16249" y="1860567"/>
-                </a:lnTo>
-                <a:close/>
-                <a:lnTo>
-                  <a:pt x="19505" y="1842944"/>
-                </a:lnTo>
-                <a:close/>
-                <a:lnTo>
-                  <a:pt x="22762" y="1827472"/>
-                </a:lnTo>
-                <a:close/>
-                <a:lnTo>
-                  <a:pt x="26020" y="1813897"/>
-                </a:lnTo>
-                <a:close/>
-                <a:lnTo>
-                  <a:pt x="29278" y="1801968"/>
-                </a:lnTo>
-                <a:close/>
-                <a:lnTo>
-                  <a:pt x="32537" y="1791433"/>
-                </a:lnTo>
-                <a:close/>
-                <a:lnTo>
-                  <a:pt x="35796" y="1782041"/>
-                </a:lnTo>
-                <a:close/>
-                <a:lnTo>
-                  <a:pt x="39055" y="1773539"/>
-                </a:lnTo>
-                <a:close/>
-                <a:lnTo>
-                  <a:pt x="42313" y="1765676"/>
-                </a:lnTo>
-                <a:close/>
-                <a:lnTo>
-                  <a:pt x="45570" y="1758200"/>
-                </a:lnTo>
-                <a:close/>
-                <a:lnTo>
-                  <a:pt x="48826" y="1750860"/>
-                </a:lnTo>
-                <a:close/>
-                <a:lnTo>
-                  <a:pt x="52081" y="1743489"/>
-                </a:lnTo>
-                <a:close/>
-                <a:lnTo>
-                  <a:pt x="55335" y="1736101"/>
-                </a:lnTo>
-                <a:close/>
-                <a:lnTo>
-                  <a:pt x="58587" y="1728736"/>
-                </a:lnTo>
-                <a:close/>
-                <a:lnTo>
-                  <a:pt x="61839" y="1721435"/>
-                </a:lnTo>
-                <a:close/>
-                <a:lnTo>
-                  <a:pt x="65089" y="1714234"/>
-                </a:lnTo>
-                <a:close/>
-                <a:lnTo>
-                  <a:pt x="68340" y="1707176"/>
-                </a:lnTo>
-                <a:close/>
-                <a:lnTo>
-                  <a:pt x="71590" y="1700297"/>
-                </a:lnTo>
-                <a:close/>
-                <a:lnTo>
-                  <a:pt x="74840" y="1693633"/>
-                </a:lnTo>
-                <a:close/>
-                <a:lnTo>
-                  <a:pt x="78090" y="1687179"/>
-                </a:lnTo>
-                <a:close/>
-                <a:lnTo>
-                  <a:pt x="81341" y="1680914"/>
-                </a:lnTo>
-                <a:close/>
-                <a:lnTo>
-                  <a:pt x="84592" y="1674818"/>
-                </a:lnTo>
-                <a:close/>
-                <a:lnTo>
-                  <a:pt x="87844" y="1668870"/>
-                </a:lnTo>
-                <a:close/>
-                <a:lnTo>
-                  <a:pt x="91097" y="1663048"/>
-                </a:lnTo>
-                <a:close/>
-                <a:lnTo>
-                  <a:pt x="94352" y="1657333"/>
-                </a:lnTo>
-                <a:close/>
-                <a:lnTo>
-                  <a:pt x="97607" y="1651704"/>
-                </a:lnTo>
-                <a:close/>
-                <a:lnTo>
-                  <a:pt x="100865" y="1646149"/>
-                </a:lnTo>
-                <a:close/>
-                <a:lnTo>
-                  <a:pt x="104123" y="1640668"/>
-                </a:lnTo>
-                <a:close/>
-                <a:lnTo>
-                  <a:pt x="107382" y="1635261"/>
-                </a:lnTo>
-                <a:close/>
-                <a:lnTo>
-                  <a:pt x="110642" y="1629929"/>
-                </a:lnTo>
-                <a:close/>
-                <a:lnTo>
-                  <a:pt x="113900" y="1624672"/>
-                </a:lnTo>
-                <a:close/>
-                <a:lnTo>
-                  <a:pt x="117159" y="1619490"/>
-                </a:lnTo>
-                <a:close/>
-                <a:lnTo>
-                  <a:pt x="120415" y="1614385"/>
-                </a:lnTo>
-                <a:close/>
-                <a:lnTo>
-                  <a:pt x="123671" y="1609355"/>
-                </a:lnTo>
-                <a:close/>
-                <a:lnTo>
-                  <a:pt x="126925" y="1604398"/>
-                </a:lnTo>
-                <a:close/>
-                <a:lnTo>
-                  <a:pt x="130177" y="1599511"/>
-                </a:lnTo>
-                <a:close/>
-                <a:lnTo>
-                  <a:pt x="133429" y="1594691"/>
-                </a:lnTo>
-                <a:close/>
-                <a:lnTo>
-                  <a:pt x="136680" y="1589934"/>
-                </a:lnTo>
-                <a:close/>
-                <a:lnTo>
-                  <a:pt x="139930" y="1585237"/>
-                </a:lnTo>
-                <a:close/>
-                <a:lnTo>
-                  <a:pt x="143180" y="1580598"/>
-                </a:lnTo>
-                <a:close/>
-                <a:lnTo>
-                  <a:pt x="146430" y="1576013"/>
-                </a:lnTo>
-                <a:close/>
-                <a:lnTo>
-                  <a:pt x="149680" y="1571481"/>
-                </a:lnTo>
-                <a:close/>
-                <a:lnTo>
-                  <a:pt x="152930" y="1566999"/>
-                </a:lnTo>
-                <a:close/>
-                <a:lnTo>
-                  <a:pt x="156182" y="1562566"/>
-                </a:lnTo>
-                <a:close/>
-                <a:lnTo>
-                  <a:pt x="159433" y="1558182"/>
-                </a:lnTo>
-                <a:close/>
-                <a:lnTo>
-                  <a:pt x="162686" y="1553844"/>
-                </a:lnTo>
-                <a:close/>
-                <a:lnTo>
-                  <a:pt x="165941" y="1549551"/>
-                </a:lnTo>
-                <a:close/>
-                <a:lnTo>
-                  <a:pt x="169196" y="1545303"/>
-                </a:lnTo>
-                <a:close/>
-                <a:lnTo>
-                  <a:pt x="172454" y="1541098"/>
-                </a:lnTo>
-                <a:close/>
-                <a:lnTo>
-                  <a:pt x="175712" y="1536934"/>
-                </a:lnTo>
-                <a:close/>
-                <a:lnTo>
-                  <a:pt x="178971" y="1532811"/>
-                </a:lnTo>
-                <a:close/>
-                <a:lnTo>
-                  <a:pt x="182230" y="1528728"/>
-                </a:lnTo>
-                <a:close/>
-                <a:lnTo>
-                  <a:pt x="185489" y="1524684"/>
-                </a:lnTo>
-                <a:close/>
-                <a:lnTo>
-                  <a:pt x="188748" y="1520678"/>
-                </a:lnTo>
-                <a:close/>
-                <a:lnTo>
-                  <a:pt x="192004" y="1516708"/>
-                </a:lnTo>
-                <a:close/>
-                <a:lnTo>
-                  <a:pt x="195260" y="1512775"/>
-                </a:lnTo>
-                <a:close/>
-                <a:lnTo>
-                  <a:pt x="198513" y="1508877"/>
-                </a:lnTo>
-                <a:close/>
-                <a:lnTo>
-                  <a:pt x="201766" y="1505012"/>
-                </a:lnTo>
-                <a:close/>
-                <a:lnTo>
-                  <a:pt x="205017" y="1501182"/>
-                </a:lnTo>
-                <a:close/>
-                <a:lnTo>
-                  <a:pt x="208268" y="1497384"/>
-                </a:lnTo>
-                <a:close/>
-                <a:lnTo>
-                  <a:pt x="211519" y="1493617"/>
-                </a:lnTo>
-                <a:close/>
-                <a:lnTo>
-                  <a:pt x="214769" y="1489882"/>
-                </a:lnTo>
-                <a:close/>
-                <a:lnTo>
-                  <a:pt x="218021" y="1486177"/>
-                </a:lnTo>
-                <a:close/>
-                <a:lnTo>
-                  <a:pt x="221272" y="1482501"/>
-                </a:lnTo>
-                <a:close/>
-                <a:lnTo>
-                  <a:pt x="224525" y="1478855"/>
-                </a:lnTo>
-                <a:close/>
-                <a:lnTo>
-                  <a:pt x="227777" y="1475237"/>
-                </a:lnTo>
-                <a:close/>
-                <a:lnTo>
-                  <a:pt x="231029" y="1471646"/>
-                </a:lnTo>
-                <a:close/>
-                <a:lnTo>
-                  <a:pt x="234281" y="1468084"/>
-                </a:lnTo>
-                <a:close/>
-                <a:lnTo>
-                  <a:pt x="237533" y="1464548"/>
-                </a:lnTo>
-                <a:close/>
-                <a:lnTo>
-                  <a:pt x="240785" y="1461038"/>
-                </a:lnTo>
-                <a:close/>
-                <a:lnTo>
-                  <a:pt x="244036" y="1457554"/>
-                </a:lnTo>
-                <a:close/>
-                <a:lnTo>
-                  <a:pt x="247287" y="1454096"/>
-                </a:lnTo>
-                <a:close/>
-                <a:lnTo>
-                  <a:pt x="250537" y="1450662"/>
-                </a:lnTo>
-                <a:close/>
-                <a:lnTo>
-                  <a:pt x="253789" y="1447253"/>
-                </a:lnTo>
-                <a:close/>
-                <a:lnTo>
-                  <a:pt x="257041" y="1443868"/>
-                </a:lnTo>
-                <a:close/>
-                <a:lnTo>
-                  <a:pt x="260293" y="1440507"/>
-                </a:lnTo>
-                <a:close/>
-                <a:lnTo>
-                  <a:pt x="263548" y="1437168"/>
-                </a:lnTo>
-                <a:close/>
-                <a:lnTo>
-                  <a:pt x="266804" y="1433852"/>
-                </a:lnTo>
-                <a:close/>
-                <a:lnTo>
-                  <a:pt x="270061" y="1430558"/>
-                </a:lnTo>
-                <a:close/>
-                <a:lnTo>
-                  <a:pt x="273320" y="1427286"/>
-                </a:lnTo>
-                <a:close/>
-                <a:lnTo>
-                  <a:pt x="276579" y="1424035"/>
-                </a:lnTo>
-                <a:close/>
-                <a:lnTo>
-                  <a:pt x="279838" y="1420806"/>
-                </a:lnTo>
-                <a:close/>
-                <a:lnTo>
-                  <a:pt x="283097" y="1417598"/>
-                </a:lnTo>
-                <a:close/>
-                <a:lnTo>
-                  <a:pt x="286355" y="1414410"/>
-                </a:lnTo>
-                <a:close/>
-                <a:lnTo>
-                  <a:pt x="289612" y="1411243"/>
-                </a:lnTo>
-                <a:close/>
-                <a:lnTo>
-                  <a:pt x="292867" y="1408095"/>
-                </a:lnTo>
-                <a:close/>
-                <a:lnTo>
-                  <a:pt x="296121" y="1404968"/>
-                </a:lnTo>
-                <a:close/>
-                <a:lnTo>
-                  <a:pt x="299373" y="1401859"/>
-                </a:lnTo>
-                <a:close/>
-                <a:lnTo>
-                  <a:pt x="302625" y="1398770"/>
-                </a:lnTo>
-                <a:close/>
-                <a:lnTo>
-                  <a:pt x="305876" y="1395699"/>
-                </a:lnTo>
-                <a:close/>
-                <a:lnTo>
-                  <a:pt x="309126" y="1392647"/>
-                </a:lnTo>
-                <a:close/>
-                <a:lnTo>
-                  <a:pt x="312375" y="1389613"/>
-                </a:lnTo>
-                <a:close/>
-                <a:lnTo>
-                  <a:pt x="315624" y="1386596"/>
-                </a:lnTo>
-                <a:close/>
-                <a:lnTo>
-                  <a:pt x="318873" y="1383596"/>
-                </a:lnTo>
-                <a:close/>
-                <a:lnTo>
-                  <a:pt x="322123" y="1380613"/>
-                </a:lnTo>
-                <a:close/>
-                <a:lnTo>
-                  <a:pt x="325373" y="1377647"/>
-                </a:lnTo>
-                <a:close/>
-                <a:lnTo>
-                  <a:pt x="328625" y="1374697"/>
-                </a:lnTo>
-                <a:close/>
-                <a:lnTo>
-                  <a:pt x="331879" y="1371763"/>
-                </a:lnTo>
-                <a:close/>
-                <a:lnTo>
-                  <a:pt x="335135" y="1368845"/>
-                </a:lnTo>
-                <a:close/>
-                <a:lnTo>
-                  <a:pt x="338394" y="1365942"/>
-                </a:lnTo>
-                <a:close/>
-                <a:lnTo>
-                  <a:pt x="341656" y="1363054"/>
-                </a:lnTo>
-                <a:close/>
-                <a:lnTo>
-                  <a:pt x="344918" y="1360181"/>
-                </a:lnTo>
-                <a:close/>
-                <a:lnTo>
-                  <a:pt x="348180" y="1357325"/>
-                </a:lnTo>
-                <a:close/>
-                <a:lnTo>
-                  <a:pt x="351441" y="1354484"/>
-                </a:lnTo>
-                <a:close/>
-                <a:lnTo>
-                  <a:pt x="354699" y="1351661"/>
-                </a:lnTo>
-                <a:close/>
-                <a:lnTo>
-                  <a:pt x="357952" y="1348854"/>
-                </a:lnTo>
-                <a:close/>
-                <a:lnTo>
-                  <a:pt x="361200" y="1346065"/>
-                </a:lnTo>
-                <a:close/>
-                <a:lnTo>
-                  <a:pt x="364442" y="1343293"/>
-                </a:lnTo>
-                <a:close/>
-                <a:lnTo>
-                  <a:pt x="367680" y="1340535"/>
-                </a:lnTo>
-                <a:close/>
-                <a:lnTo>
-                  <a:pt x="370919" y="1337791"/>
-                </a:lnTo>
-                <a:close/>
-                <a:lnTo>
-                  <a:pt x="374163" y="1335056"/>
-                </a:lnTo>
-                <a:close/>
-                <a:lnTo>
-                  <a:pt x="377414" y="1332330"/>
-                </a:lnTo>
-                <a:close/>
-                <a:lnTo>
-                  <a:pt x="380676" y="1329608"/>
-                </a:lnTo>
-                <a:close/>
-                <a:lnTo>
-                  <a:pt x="383953" y="1326889"/>
-                </a:lnTo>
-                <a:close/>
-                <a:lnTo>
-                  <a:pt x="387247" y="1324171"/>
-                </a:lnTo>
-                <a:close/>
-                <a:lnTo>
-                  <a:pt x="390552" y="1321459"/>
-                </a:lnTo>
-                <a:close/>
-                <a:lnTo>
-                  <a:pt x="393856" y="1318761"/>
-                </a:lnTo>
-                <a:close/>
-                <a:lnTo>
-                  <a:pt x="397147" y="1316086"/>
-                </a:lnTo>
-                <a:close/>
-                <a:lnTo>
-                  <a:pt x="400413" y="1313443"/>
-                </a:lnTo>
-                <a:close/>
-                <a:lnTo>
-                  <a:pt x="403641" y="1310840"/>
-                </a:lnTo>
-                <a:close/>
-                <a:lnTo>
-                  <a:pt x="406819" y="1308287"/>
-                </a:lnTo>
-                <a:close/>
-                <a:lnTo>
-                  <a:pt x="409935" y="1305792"/>
-                </a:lnTo>
-                <a:close/>
-                <a:lnTo>
-                  <a:pt x="412997" y="1303349"/>
-                </a:lnTo>
-                <a:close/>
-                <a:lnTo>
-                  <a:pt x="416046" y="1300927"/>
-                </a:lnTo>
-                <a:close/>
-                <a:lnTo>
-                  <a:pt x="419131" y="1298492"/>
-                </a:lnTo>
-                <a:close/>
-                <a:lnTo>
-                  <a:pt x="422295" y="1296009"/>
-                </a:lnTo>
-                <a:close/>
-                <a:lnTo>
-                  <a:pt x="425585" y="1293445"/>
-                </a:lnTo>
-                <a:close/>
-                <a:lnTo>
-                  <a:pt x="429047" y="1290766"/>
-                </a:lnTo>
-                <a:close/>
-                <a:lnTo>
-                  <a:pt x="432727" y="1287937"/>
-                </a:lnTo>
-                <a:close/>
-                <a:lnTo>
-                  <a:pt x="436645" y="1284944"/>
-                </a:lnTo>
-                <a:close/>
-                <a:lnTo>
-                  <a:pt x="440679" y="1281876"/>
-                </a:lnTo>
-                <a:close/>
-                <a:lnTo>
-                  <a:pt x="444655" y="1278862"/>
-                </a:lnTo>
-                <a:close/>
-                <a:lnTo>
-                  <a:pt x="448400" y="1276029"/>
-                </a:lnTo>
-                <a:close/>
-                <a:lnTo>
-                  <a:pt x="451741" y="1273504"/>
-                </a:lnTo>
-                <a:close/>
-                <a:lnTo>
-                  <a:pt x="454506" y="1271414"/>
-                </a:lnTo>
-                <a:close/>
-                <a:lnTo>
-                  <a:pt x="456521" y="1269887"/>
-                </a:lnTo>
-                <a:close/>
-                <a:lnTo>
-                  <a:pt x="457624" y="1269042"/>
-                </a:lnTo>
-                <a:close/>
-                <a:lnTo>
-                  <a:pt x="457905" y="1268796"/>
-                </a:lnTo>
-                <a:close/>
-                <a:lnTo>
-                  <a:pt x="457710" y="1268860"/>
-                </a:lnTo>
-                <a:close/>
-                <a:lnTo>
-                  <a:pt x="457397" y="1268935"/>
-                </a:lnTo>
-                <a:close/>
-                <a:lnTo>
-                  <a:pt x="457324" y="1268725"/>
-                </a:lnTo>
-                <a:close/>
-                <a:lnTo>
-                  <a:pt x="457847" y="1267932"/>
-                </a:lnTo>
-                <a:close/>
-                <a:lnTo>
-                  <a:pt x="459325" y="1266257"/>
-                </a:lnTo>
-                <a:close/>
-                <a:lnTo>
-                  <a:pt x="462116" y="1263403"/>
-                </a:lnTo>
-                <a:close/>
-                <a:lnTo>
-                  <a:pt x="466436" y="1259196"/>
-                </a:lnTo>
-                <a:close/>
-                <a:lnTo>
-                  <a:pt x="472083" y="1253828"/>
-                </a:lnTo>
-                <a:close/>
-                <a:lnTo>
-                  <a:pt x="478776" y="1247560"/>
-                </a:lnTo>
-                <a:close/>
-                <a:lnTo>
-                  <a:pt x="486236" y="1240651"/>
-                </a:lnTo>
-                <a:close/>
-                <a:lnTo>
-                  <a:pt x="494182" y="1233364"/>
-                </a:lnTo>
-                <a:close/>
-                <a:lnTo>
-                  <a:pt x="502334" y="1225959"/>
-                </a:lnTo>
-                <a:close/>
-                <a:lnTo>
-                  <a:pt x="510412" y="1218695"/>
-                </a:lnTo>
-                <a:close/>
-                <a:lnTo>
-                  <a:pt x="518156" y="1211816"/>
-                </a:lnTo>
-                <a:close/>
-                <a:lnTo>
-                  <a:pt x="525516" y="1205363"/>
-                </a:lnTo>
-                <a:close/>
-                <a:lnTo>
-                  <a:pt x="532566" y="1199268"/>
-                </a:lnTo>
-                <a:close/>
-                <a:lnTo>
-                  <a:pt x="539381" y="1193456"/>
-                </a:lnTo>
-                <a:close/>
-                <a:lnTo>
-                  <a:pt x="546035" y="1187855"/>
-                </a:lnTo>
-                <a:close/>
-                <a:lnTo>
-                  <a:pt x="552604" y="1182393"/>
-                </a:lnTo>
-                <a:close/>
-                <a:lnTo>
-                  <a:pt x="559161" y="1176997"/>
-                </a:lnTo>
-                <a:close/>
-                <a:lnTo>
-                  <a:pt x="565782" y="1171594"/>
-                </a:lnTo>
-                <a:close/>
-                <a:lnTo>
-                  <a:pt x="572507" y="1166145"/>
-                </a:lnTo>
-                <a:close/>
-                <a:lnTo>
-                  <a:pt x="579323" y="1160662"/>
-                </a:lnTo>
-                <a:close/>
-                <a:lnTo>
-                  <a:pt x="586208" y="1155163"/>
-                </a:lnTo>
-                <a:close/>
-                <a:lnTo>
-                  <a:pt x="593144" y="1149665"/>
-                </a:lnTo>
-                <a:close/>
-                <a:lnTo>
-                  <a:pt x="600111" y="1144187"/>
-                </a:lnTo>
-                <a:close/>
-                <a:lnTo>
-                  <a:pt x="607089" y="1138745"/>
-                </a:lnTo>
-                <a:close/>
-                <a:lnTo>
-                  <a:pt x="614058" y="1133358"/>
-                </a:lnTo>
-                <a:close/>
-                <a:lnTo>
-                  <a:pt x="621003" y="1128040"/>
-                </a:lnTo>
-                <a:close/>
-                <a:lnTo>
-                  <a:pt x="627923" y="1122789"/>
-                </a:lnTo>
-                <a:close/>
-                <a:lnTo>
-                  <a:pt x="634823" y="1117601"/>
-                </a:lnTo>
-                <a:close/>
-                <a:lnTo>
-                  <a:pt x="641708" y="1112469"/>
-                </a:lnTo>
-                <a:close/>
-                <a:lnTo>
-                  <a:pt x="648584" y="1107386"/>
-                </a:lnTo>
-                <a:close/>
-                <a:lnTo>
-                  <a:pt x="655455" y="1102346"/>
-                </a:lnTo>
-                <a:close/>
-                <a:lnTo>
-                  <a:pt x="662327" y="1097345"/>
-                </a:lnTo>
-                <a:close/>
-                <a:lnTo>
-                  <a:pt x="669205" y="1092374"/>
-                </a:lnTo>
-                <a:close/>
-                <a:lnTo>
-                  <a:pt x="676090" y="1087433"/>
-                </a:lnTo>
-                <a:close/>
-                <a:lnTo>
-                  <a:pt x="682981" y="1082521"/>
-                </a:lnTo>
-                <a:close/>
-                <a:lnTo>
-                  <a:pt x="689876" y="1077639"/>
-                </a:lnTo>
-                <a:close/>
-                <a:lnTo>
-                  <a:pt x="696774" y="1072788"/>
-                </a:lnTo>
-                <a:close/>
-                <a:lnTo>
-                  <a:pt x="703673" y="1067969"/>
-                </a:lnTo>
-                <a:close/>
-                <a:lnTo>
-                  <a:pt x="710571" y="1063181"/>
-                </a:lnTo>
-                <a:close/>
-                <a:lnTo>
-                  <a:pt x="717466" y="1058427"/>
-                </a:lnTo>
-                <a:close/>
-                <a:lnTo>
-                  <a:pt x="724358" y="1053706"/>
-                </a:lnTo>
-                <a:close/>
-                <a:lnTo>
-                  <a:pt x="731247" y="1049017"/>
-                </a:lnTo>
-                <a:close/>
-                <a:lnTo>
-                  <a:pt x="738134" y="1044360"/>
-                </a:lnTo>
-                <a:close/>
-                <a:lnTo>
-                  <a:pt x="745019" y="1039735"/>
-                </a:lnTo>
-                <a:close/>
-                <a:lnTo>
-                  <a:pt x="751904" y="1035140"/>
-                </a:lnTo>
-                <a:close/>
-                <a:lnTo>
-                  <a:pt x="758790" y="1030576"/>
-                </a:lnTo>
-                <a:close/>
-                <a:lnTo>
-                  <a:pt x="765677" y="1026040"/>
-                </a:lnTo>
-                <a:close/>
-                <a:lnTo>
-                  <a:pt x="772565" y="1021533"/>
-                </a:lnTo>
-                <a:close/>
-                <a:lnTo>
-                  <a:pt x="779457" y="1017055"/>
-                </a:lnTo>
-                <a:close/>
-                <a:lnTo>
-                  <a:pt x="786349" y="1012603"/>
-                </a:lnTo>
-                <a:close/>
-                <a:lnTo>
-                  <a:pt x="793243" y="1008178"/>
-                </a:lnTo>
-                <a:close/>
-                <a:lnTo>
-                  <a:pt x="800138" y="1003779"/>
-                </a:lnTo>
-                <a:close/>
-                <a:lnTo>
-                  <a:pt x="807033" y="999405"/>
-                </a:lnTo>
-                <a:close/>
-                <a:lnTo>
-                  <a:pt x="813929" y="995055"/>
-                </a:lnTo>
-                <a:close/>
-                <a:lnTo>
-                  <a:pt x="820823" y="990730"/>
-                </a:lnTo>
-                <a:close/>
-                <a:lnTo>
-                  <a:pt x="827717" y="986428"/>
-                </a:lnTo>
-                <a:close/>
-                <a:lnTo>
-                  <a:pt x="834611" y="982150"/>
-                </a:lnTo>
-                <a:close/>
-                <a:lnTo>
-                  <a:pt x="841504" y="977895"/>
-                </a:lnTo>
-                <a:close/>
-                <a:lnTo>
-                  <a:pt x="848397" y="973663"/>
-                </a:lnTo>
-                <a:close/>
-                <a:lnTo>
-                  <a:pt x="855290" y="969455"/>
-                </a:lnTo>
-                <a:close/>
-                <a:lnTo>
-                  <a:pt x="862184" y="965269"/>
-                </a:lnTo>
-                <a:close/>
-                <a:lnTo>
-                  <a:pt x="869077" y="961107"/>
-                </a:lnTo>
-                <a:close/>
-                <a:lnTo>
-                  <a:pt x="875972" y="956968"/>
-                </a:lnTo>
-                <a:close/>
-                <a:lnTo>
-                  <a:pt x="882867" y="952852"/>
-                </a:lnTo>
-                <a:close/>
-                <a:lnTo>
-                  <a:pt x="889761" y="948757"/>
-                </a:lnTo>
-                <a:close/>
-                <a:lnTo>
-                  <a:pt x="896656" y="944685"/>
-                </a:lnTo>
-                <a:close/>
-                <a:lnTo>
-                  <a:pt x="903549" y="940634"/>
-                </a:lnTo>
-                <a:close/>
-                <a:lnTo>
-                  <a:pt x="910442" y="936603"/>
-                </a:lnTo>
-                <a:close/>
-                <a:lnTo>
-                  <a:pt x="917333" y="932593"/>
-                </a:lnTo>
-                <a:close/>
-                <a:lnTo>
-                  <a:pt x="924223" y="928602"/>
-                </a:lnTo>
-                <a:close/>
-                <a:lnTo>
-                  <a:pt x="931111" y="924631"/>
-                </a:lnTo>
-                <a:close/>
-                <a:lnTo>
-                  <a:pt x="937998" y="920680"/>
-                </a:lnTo>
-                <a:close/>
-                <a:lnTo>
-                  <a:pt x="944884" y="916747"/>
-                </a:lnTo>
-                <a:close/>
-                <a:lnTo>
-                  <a:pt x="951770" y="912835"/>
-                </a:lnTo>
-                <a:close/>
-                <a:lnTo>
-                  <a:pt x="958657" y="908941"/>
-                </a:lnTo>
-                <a:close/>
-                <a:lnTo>
-                  <a:pt x="965545" y="905066"/>
-                </a:lnTo>
-                <a:close/>
-                <a:lnTo>
-                  <a:pt x="972434" y="901211"/>
-                </a:lnTo>
-                <a:close/>
-                <a:lnTo>
-                  <a:pt x="979324" y="897374"/>
-                </a:lnTo>
-                <a:close/>
-                <a:lnTo>
-                  <a:pt x="986217" y="893556"/>
-                </a:lnTo>
-                <a:close/>
-                <a:lnTo>
-                  <a:pt x="993110" y="889756"/>
-                </a:lnTo>
-                <a:close/>
-                <a:lnTo>
-                  <a:pt x="1000004" y="885972"/>
-                </a:lnTo>
-                <a:close/>
-                <a:lnTo>
-                  <a:pt x="1006899" y="882206"/>
-                </a:lnTo>
-                <a:close/>
-                <a:lnTo>
-                  <a:pt x="1013794" y="878455"/>
-                </a:lnTo>
-                <a:close/>
-                <a:lnTo>
-                  <a:pt x="1020688" y="874720"/>
-                </a:lnTo>
-                <a:close/>
-                <a:lnTo>
-                  <a:pt x="1027582" y="871000"/>
-                </a:lnTo>
-                <a:close/>
-                <a:lnTo>
-                  <a:pt x="1034476" y="867295"/>
-                </a:lnTo>
-                <a:close/>
-                <a:lnTo>
-                  <a:pt x="1041369" y="863606"/>
-                </a:lnTo>
-                <a:close/>
-                <a:lnTo>
-                  <a:pt x="1048262" y="859932"/>
-                </a:lnTo>
-                <a:close/>
-                <a:lnTo>
-                  <a:pt x="1055156" y="856274"/>
-                </a:lnTo>
-                <a:close/>
-                <a:lnTo>
-                  <a:pt x="1062049" y="852632"/>
-                </a:lnTo>
-                <a:close/>
-                <a:lnTo>
-                  <a:pt x="1068943" y="849007"/>
-                </a:lnTo>
-                <a:close/>
-                <a:lnTo>
-                  <a:pt x="1075837" y="845398"/>
-                </a:lnTo>
-                <a:close/>
-                <a:lnTo>
-                  <a:pt x="1082731" y="841807"/>
-                </a:lnTo>
-                <a:close/>
-                <a:lnTo>
-                  <a:pt x="1089626" y="838231"/>
-                </a:lnTo>
-                <a:close/>
-                <a:lnTo>
-                  <a:pt x="1096521" y="834672"/>
-                </a:lnTo>
-                <a:close/>
-                <a:lnTo>
-                  <a:pt x="1103415" y="831127"/>
-                </a:lnTo>
-                <a:close/>
-                <a:lnTo>
-                  <a:pt x="1110308" y="827596"/>
-                </a:lnTo>
-                <a:close/>
-                <a:lnTo>
-                  <a:pt x="1117200" y="824079"/>
-                </a:lnTo>
-                <a:close/>
-                <a:lnTo>
-                  <a:pt x="1124091" y="820575"/>
-                </a:lnTo>
-                <a:close/>
-                <a:lnTo>
-                  <a:pt x="1130980" y="817083"/>
-                </a:lnTo>
-                <a:close/>
-                <a:lnTo>
-                  <a:pt x="1137867" y="813603"/>
-                </a:lnTo>
-                <a:close/>
-                <a:lnTo>
-                  <a:pt x="1144754" y="810137"/>
-                </a:lnTo>
-                <a:close/>
-                <a:lnTo>
-                  <a:pt x="1151640" y="806683"/>
-                </a:lnTo>
-                <a:close/>
-                <a:lnTo>
-                  <a:pt x="1158526" y="803243"/>
-                </a:lnTo>
-                <a:close/>
-                <a:lnTo>
-                  <a:pt x="1165413" y="799817"/>
-                </a:lnTo>
-                <a:close/>
-                <a:lnTo>
-                  <a:pt x="1172301" y="796404"/>
-                </a:lnTo>
-                <a:close/>
-                <a:lnTo>
-                  <a:pt x="1179191" y="793005"/>
-                </a:lnTo>
-                <a:close/>
-                <a:lnTo>
-                  <a:pt x="1186083" y="789620"/>
-                </a:lnTo>
-                <a:close/>
-                <a:lnTo>
-                  <a:pt x="1192975" y="786248"/>
-                </a:lnTo>
-                <a:close/>
-                <a:lnTo>
-                  <a:pt x="1199869" y="782890"/>
-                </a:lnTo>
-                <a:close/>
-                <a:lnTo>
-                  <a:pt x="1206764" y="779545"/>
-                </a:lnTo>
-                <a:close/>
-                <a:lnTo>
-                  <a:pt x="1213658" y="776212"/>
-                </a:lnTo>
-                <a:close/>
-                <a:lnTo>
-                  <a:pt x="1220553" y="772891"/>
-                </a:lnTo>
-                <a:close/>
-                <a:lnTo>
-                  <a:pt x="1227448" y="769582"/>
-                </a:lnTo>
-                <a:close/>
-                <a:lnTo>
-                  <a:pt x="1234342" y="766284"/>
-                </a:lnTo>
-                <a:close/>
-                <a:lnTo>
-                  <a:pt x="1241235" y="762997"/>
-                </a:lnTo>
-                <a:close/>
-                <a:lnTo>
-                  <a:pt x="1248128" y="759722"/>
-                </a:lnTo>
-                <a:close/>
-                <a:lnTo>
-                  <a:pt x="1255021" y="756458"/>
-                </a:lnTo>
-                <a:close/>
-                <a:lnTo>
-                  <a:pt x="1261915" y="753204"/>
-                </a:lnTo>
-                <a:close/>
-                <a:lnTo>
-                  <a:pt x="1268808" y="749962"/>
-                </a:lnTo>
-                <a:close/>
-                <a:lnTo>
-                  <a:pt x="1275702" y="746730"/>
-                </a:lnTo>
-                <a:close/>
-                <a:lnTo>
-                  <a:pt x="1282596" y="743508"/>
-                </a:lnTo>
-                <a:close/>
-                <a:lnTo>
-                  <a:pt x="1289491" y="740298"/>
-                </a:lnTo>
-                <a:close/>
-                <a:lnTo>
-                  <a:pt x="1296386" y="737098"/>
-                </a:lnTo>
-                <a:close/>
-                <a:lnTo>
-                  <a:pt x="1303280" y="733909"/>
-                </a:lnTo>
-                <a:close/>
-                <a:lnTo>
-                  <a:pt x="1310174" y="730731"/>
-                </a:lnTo>
-                <a:close/>
-                <a:lnTo>
-                  <a:pt x="1317067" y="727564"/>
-                </a:lnTo>
-                <a:close/>
-                <a:lnTo>
-                  <a:pt x="1323959" y="724409"/>
-                </a:lnTo>
-                <a:close/>
-                <a:lnTo>
-                  <a:pt x="1330848" y="721265"/>
-                </a:lnTo>
-                <a:close/>
-                <a:lnTo>
-                  <a:pt x="1337737" y="718133"/>
-                </a:lnTo>
-                <a:close/>
-                <a:lnTo>
-                  <a:pt x="1344624" y="715011"/>
-                </a:lnTo>
-                <a:close/>
-                <a:lnTo>
-                  <a:pt x="1351510" y="711900"/>
-                </a:lnTo>
-                <a:close/>
-                <a:lnTo>
-                  <a:pt x="1358396" y="708799"/>
-                </a:lnTo>
-                <a:close/>
-                <a:lnTo>
-                  <a:pt x="1365283" y="705708"/>
-                </a:lnTo>
-                <a:close/>
-                <a:lnTo>
-                  <a:pt x="1372170" y="702626"/>
-                </a:lnTo>
-                <a:close/>
-                <a:lnTo>
-                  <a:pt x="1379059" y="699553"/>
-                </a:lnTo>
-                <a:close/>
-                <a:lnTo>
-                  <a:pt x="1385949" y="696490"/>
-                </a:lnTo>
-                <a:close/>
-                <a:lnTo>
-                  <a:pt x="1392841" y="693434"/>
-                </a:lnTo>
-                <a:close/>
-                <a:lnTo>
-                  <a:pt x="1399735" y="690388"/>
-                </a:lnTo>
-                <a:close/>
-                <a:lnTo>
-                  <a:pt x="1406629" y="687350"/>
-                </a:lnTo>
-                <a:close/>
-                <a:lnTo>
-                  <a:pt x="1413523" y="684321"/>
-                </a:lnTo>
-                <a:close/>
-                <a:lnTo>
-                  <a:pt x="1420418" y="681302"/>
-                </a:lnTo>
-                <a:close/>
-                <a:lnTo>
-                  <a:pt x="1427313" y="678291"/>
-                </a:lnTo>
-                <a:close/>
-                <a:lnTo>
-                  <a:pt x="1434207" y="675290"/>
-                </a:lnTo>
-                <a:close/>
-                <a:lnTo>
-                  <a:pt x="1441101" y="672297"/>
-                </a:lnTo>
-                <a:close/>
-                <a:lnTo>
-                  <a:pt x="1447994" y="669314"/>
-                </a:lnTo>
-                <a:close/>
-                <a:lnTo>
-                  <a:pt x="1454887" y="666341"/>
-                </a:lnTo>
-                <a:close/>
-                <a:lnTo>
-                  <a:pt x="1461780" y="663377"/>
-                </a:lnTo>
-                <a:close/>
-                <a:lnTo>
-                  <a:pt x="1468674" y="660422"/>
-                </a:lnTo>
-                <a:close/>
-                <a:lnTo>
-                  <a:pt x="1475567" y="657477"/>
-                </a:lnTo>
-                <a:close/>
-                <a:lnTo>
-                  <a:pt x="1482461" y="654543"/>
-                </a:lnTo>
-                <a:close/>
-                <a:lnTo>
-                  <a:pt x="1489356" y="651617"/>
-                </a:lnTo>
-                <a:close/>
-                <a:lnTo>
-                  <a:pt x="1496251" y="648701"/>
-                </a:lnTo>
-                <a:close/>
-                <a:lnTo>
-                  <a:pt x="1503145" y="645794"/>
-                </a:lnTo>
-                <a:close/>
-                <a:lnTo>
-                  <a:pt x="1510040" y="642896"/>
-                </a:lnTo>
-                <a:close/>
-                <a:lnTo>
-                  <a:pt x="1516933" y="640005"/>
-                </a:lnTo>
-                <a:close/>
-                <a:lnTo>
-                  <a:pt x="1523825" y="637122"/>
-                </a:lnTo>
-                <a:close/>
-                <a:lnTo>
-                  <a:pt x="1530716" y="634246"/>
-                </a:lnTo>
-                <a:close/>
-                <a:lnTo>
-                  <a:pt x="1537605" y="631377"/>
-                </a:lnTo>
-                <a:close/>
-                <a:lnTo>
-                  <a:pt x="1544493" y="628514"/>
-                </a:lnTo>
-                <a:close/>
-                <a:lnTo>
-                  <a:pt x="1551380" y="625659"/>
-                </a:lnTo>
-                <a:close/>
-                <a:lnTo>
-                  <a:pt x="1558266" y="622811"/>
-                </a:lnTo>
-                <a:close/>
-                <a:lnTo>
-                  <a:pt x="1565152" y="619971"/>
-                </a:lnTo>
-                <a:close/>
-                <a:lnTo>
-                  <a:pt x="1572039" y="617140"/>
-                </a:lnTo>
-                <a:close/>
-                <a:lnTo>
-                  <a:pt x="1578927" y="614316"/>
-                </a:lnTo>
-                <a:close/>
-                <a:lnTo>
-                  <a:pt x="1585816" y="611502"/>
-                </a:lnTo>
-                <a:close/>
-                <a:lnTo>
-                  <a:pt x="1592707" y="608697"/>
-                </a:lnTo>
-                <a:close/>
-                <a:lnTo>
-                  <a:pt x="1599600" y="605900"/>
-                </a:lnTo>
-                <a:close/>
-                <a:lnTo>
-                  <a:pt x="1606494" y="603112"/>
-                </a:lnTo>
-                <a:close/>
-                <a:lnTo>
-                  <a:pt x="1613388" y="600332"/>
-                </a:lnTo>
-                <a:close/>
-                <a:lnTo>
-                  <a:pt x="1620283" y="597560"/>
-                </a:lnTo>
-                <a:close/>
-                <a:lnTo>
-                  <a:pt x="1627178" y="594796"/>
-                </a:lnTo>
-                <a:close/>
-                <a:lnTo>
-                  <a:pt x="1634072" y="592040"/>
-                </a:lnTo>
-                <a:close/>
-                <a:lnTo>
-                  <a:pt x="1640966" y="589291"/>
-                </a:lnTo>
-                <a:close/>
-                <a:lnTo>
-                  <a:pt x="1647860" y="586549"/>
-                </a:lnTo>
-                <a:close/>
-                <a:lnTo>
-                  <a:pt x="1654753" y="583814"/>
-                </a:lnTo>
-                <a:close/>
-                <a:lnTo>
-                  <a:pt x="1661646" y="581087"/>
-                </a:lnTo>
-                <a:close/>
-                <a:lnTo>
-                  <a:pt x="1668539" y="578366"/>
-                </a:lnTo>
-                <a:close/>
-                <a:lnTo>
-                  <a:pt x="1675433" y="575652"/>
-                </a:lnTo>
-                <a:close/>
-                <a:lnTo>
-                  <a:pt x="1682326" y="572945"/>
-                </a:lnTo>
-                <a:close/>
-                <a:lnTo>
-                  <a:pt x="1689221" y="570245"/>
-                </a:lnTo>
-                <a:close/>
-                <a:lnTo>
-                  <a:pt x="1696115" y="567551"/>
-                </a:lnTo>
-                <a:close/>
-                <a:lnTo>
-                  <a:pt x="1703010" y="564863"/>
-                </a:lnTo>
-                <a:close/>
-                <a:lnTo>
-                  <a:pt x="1709905" y="562183"/>
-                </a:lnTo>
-                <a:close/>
-                <a:lnTo>
-                  <a:pt x="1716799" y="559508"/>
-                </a:lnTo>
-                <a:close/>
-                <a:lnTo>
-                  <a:pt x="1723692" y="556841"/>
-                </a:lnTo>
-                <a:close/>
-                <a:lnTo>
-                  <a:pt x="1730584" y="554179"/>
-                </a:lnTo>
-                <a:close/>
-                <a:lnTo>
-                  <a:pt x="1737474" y="551525"/>
-                </a:lnTo>
-                <a:close/>
-                <a:lnTo>
-                  <a:pt x="1744362" y="548877"/>
-                </a:lnTo>
-                <a:close/>
-                <a:lnTo>
-                  <a:pt x="1751249" y="546236"/>
-                </a:lnTo>
-                <a:close/>
-                <a:lnTo>
-                  <a:pt x="1758136" y="543602"/>
-                </a:lnTo>
-                <a:close/>
-                <a:lnTo>
-                  <a:pt x="1765022" y="540974"/>
-                </a:lnTo>
-                <a:close/>
-                <a:lnTo>
-                  <a:pt x="1771908" y="538354"/>
-                </a:lnTo>
-                <a:close/>
-                <a:lnTo>
-                  <a:pt x="1778795" y="535740"/>
-                </a:lnTo>
-                <a:close/>
-                <a:lnTo>
-                  <a:pt x="1785684" y="533133"/>
-                </a:lnTo>
-                <a:close/>
-                <a:lnTo>
-                  <a:pt x="1792574" y="530533"/>
-                </a:lnTo>
-                <a:close/>
-                <a:lnTo>
-                  <a:pt x="1799466" y="527940"/>
-                </a:lnTo>
-                <a:close/>
-                <a:lnTo>
-                  <a:pt x="1806359" y="525354"/>
-                </a:lnTo>
-                <a:close/>
-                <a:lnTo>
-                  <a:pt x="1813253" y="522774"/>
-                </a:lnTo>
-                <a:close/>
-                <a:lnTo>
-                  <a:pt x="1820148" y="520200"/>
-                </a:lnTo>
-                <a:close/>
-                <a:lnTo>
-                  <a:pt x="1827042" y="517633"/>
-                </a:lnTo>
-                <a:close/>
-                <a:lnTo>
-                  <a:pt x="1833937" y="515071"/>
-                </a:lnTo>
-                <a:close/>
-                <a:lnTo>
-                  <a:pt x="1840832" y="512514"/>
-                </a:lnTo>
-                <a:close/>
-                <a:lnTo>
-                  <a:pt x="1847725" y="509963"/>
-                </a:lnTo>
-                <a:close/>
-                <a:lnTo>
-                  <a:pt x="1854619" y="507418"/>
-                </a:lnTo>
-                <a:close/>
-                <a:lnTo>
-                  <a:pt x="1861512" y="504878"/>
-                </a:lnTo>
-                <a:close/>
-                <a:lnTo>
-                  <a:pt x="1868405" y="502345"/>
-                </a:lnTo>
-                <a:close/>
-                <a:lnTo>
-                  <a:pt x="1875298" y="499817"/>
-                </a:lnTo>
-                <a:close/>
-                <a:lnTo>
-                  <a:pt x="1882192" y="497295"/>
-                </a:lnTo>
-                <a:close/>
-                <a:lnTo>
-                  <a:pt x="1889086" y="494780"/>
-                </a:lnTo>
-                <a:close/>
-                <a:lnTo>
-                  <a:pt x="1895980" y="492271"/>
-                </a:lnTo>
-                <a:close/>
-                <a:lnTo>
-                  <a:pt x="1902875" y="489768"/>
-                </a:lnTo>
-                <a:close/>
-                <a:lnTo>
-                  <a:pt x="1909770" y="487271"/>
-                </a:lnTo>
-                <a:close/>
-                <a:lnTo>
-                  <a:pt x="1916664" y="484779"/>
-                </a:lnTo>
-                <a:close/>
-                <a:lnTo>
-                  <a:pt x="1923558" y="482292"/>
-                </a:lnTo>
-                <a:close/>
-                <a:lnTo>
-                  <a:pt x="1930450" y="479811"/>
-                </a:lnTo>
-                <a:close/>
-                <a:lnTo>
-                  <a:pt x="1937341" y="477334"/>
-                </a:lnTo>
-                <a:close/>
-                <a:lnTo>
-                  <a:pt x="1944231" y="474861"/>
-                </a:lnTo>
-                <a:close/>
-                <a:lnTo>
-                  <a:pt x="1951119" y="472392"/>
-                </a:lnTo>
-                <a:close/>
-                <a:lnTo>
-                  <a:pt x="1958005" y="469929"/>
-                </a:lnTo>
-                <a:close/>
-                <a:lnTo>
-                  <a:pt x="1964892" y="467471"/>
-                </a:lnTo>
-                <a:close/>
-                <a:lnTo>
-                  <a:pt x="1971778" y="465018"/>
-                </a:lnTo>
-                <a:close/>
-                <a:lnTo>
-                  <a:pt x="1978665" y="462571"/>
-                </a:lnTo>
-                <a:close/>
-                <a:lnTo>
-                  <a:pt x="1985552" y="460130"/>
-                </a:lnTo>
-                <a:close/>
-                <a:lnTo>
-                  <a:pt x="1992441" y="457697"/>
-                </a:lnTo>
-                <a:close/>
-                <a:lnTo>
-                  <a:pt x="1999332" y="455269"/>
-                </a:lnTo>
-                <a:close/>
-                <a:lnTo>
-                  <a:pt x="2006225" y="452849"/>
-                </a:lnTo>
-                <a:close/>
-                <a:lnTo>
-                  <a:pt x="2013118" y="450433"/>
-                </a:lnTo>
-                <a:close/>
-                <a:lnTo>
-                  <a:pt x="2020013" y="448024"/>
-                </a:lnTo>
-                <a:close/>
-                <a:lnTo>
-                  <a:pt x="2026907" y="445619"/>
-                </a:lnTo>
-                <a:close/>
-                <a:lnTo>
-                  <a:pt x="2033802" y="443218"/>
-                </a:lnTo>
-                <a:close/>
-                <a:lnTo>
-                  <a:pt x="2040697" y="440821"/>
-                </a:lnTo>
-                <a:close/>
-                <a:lnTo>
-                  <a:pt x="2047591" y="438427"/>
-                </a:lnTo>
-                <a:close/>
-                <a:lnTo>
-                  <a:pt x="2054484" y="436037"/>
-                </a:lnTo>
-                <a:close/>
-                <a:lnTo>
-                  <a:pt x="2061378" y="433651"/>
-                </a:lnTo>
-                <a:close/>
-                <a:lnTo>
-                  <a:pt x="2068271" y="431268"/>
-                </a:lnTo>
-                <a:close/>
-                <a:lnTo>
-                  <a:pt x="2075164" y="428890"/>
-                </a:lnTo>
-                <a:close/>
-                <a:lnTo>
-                  <a:pt x="2082057" y="426517"/>
-                </a:lnTo>
-                <a:close/>
-                <a:lnTo>
-                  <a:pt x="2088951" y="424148"/>
-                </a:lnTo>
-                <a:close/>
-                <a:lnTo>
-                  <a:pt x="2095845" y="421785"/>
-                </a:lnTo>
-                <a:close/>
-                <a:lnTo>
-                  <a:pt x="2102740" y="419427"/>
-                </a:lnTo>
-                <a:close/>
-                <a:lnTo>
-                  <a:pt x="2109635" y="417075"/>
-                </a:lnTo>
-                <a:close/>
-                <a:lnTo>
-                  <a:pt x="2116529" y="414728"/>
-                </a:lnTo>
-                <a:close/>
-                <a:lnTo>
-                  <a:pt x="2123423" y="412386"/>
-                </a:lnTo>
-                <a:close/>
-                <a:lnTo>
-                  <a:pt x="2130317" y="410050"/>
-                </a:lnTo>
-                <a:close/>
-                <a:lnTo>
-                  <a:pt x="2137209" y="407719"/>
-                </a:lnTo>
-                <a:close/>
-                <a:lnTo>
-                  <a:pt x="2144099" y="405393"/>
-                </a:lnTo>
-                <a:close/>
-                <a:lnTo>
-                  <a:pt x="2150988" y="403072"/>
-                </a:lnTo>
-                <a:close/>
-                <a:lnTo>
-                  <a:pt x="2157875" y="400756"/>
-                </a:lnTo>
-                <a:close/>
-                <a:lnTo>
-                  <a:pt x="2164761" y="398445"/>
-                </a:lnTo>
-                <a:close/>
-                <a:lnTo>
-                  <a:pt x="2171648" y="396139"/>
-                </a:lnTo>
-                <a:close/>
-                <a:lnTo>
-                  <a:pt x="2178534" y="393837"/>
-                </a:lnTo>
-                <a:close/>
-                <a:lnTo>
-                  <a:pt x="2185421" y="391539"/>
-                </a:lnTo>
-                <a:close/>
-                <a:lnTo>
-                  <a:pt x="2192309" y="389246"/>
-                </a:lnTo>
-                <a:close/>
-                <a:lnTo>
-                  <a:pt x="2199199" y="386957"/>
-                </a:lnTo>
-                <a:close/>
-                <a:lnTo>
-                  <a:pt x="2206091" y="384671"/>
-                </a:lnTo>
-                <a:close/>
-                <a:lnTo>
-                  <a:pt x="2212984" y="382390"/>
-                </a:lnTo>
-                <a:close/>
-                <a:lnTo>
-                  <a:pt x="2219878" y="380112"/>
-                </a:lnTo>
-                <a:close/>
-                <a:lnTo>
-                  <a:pt x="2226772" y="377839"/>
-                </a:lnTo>
-                <a:close/>
-                <a:lnTo>
-                  <a:pt x="2233667" y="375570"/>
-                </a:lnTo>
-                <a:close/>
-                <a:lnTo>
-                  <a:pt x="2240562" y="373305"/>
-                </a:lnTo>
-                <a:close/>
-                <a:lnTo>
-                  <a:pt x="2247456" y="371044"/>
-                </a:lnTo>
-                <a:close/>
-                <a:lnTo>
-                  <a:pt x="2254350" y="368787"/>
-                </a:lnTo>
-                <a:close/>
-                <a:lnTo>
-                  <a:pt x="2261243" y="366535"/>
-                </a:lnTo>
-                <a:close/>
-                <a:lnTo>
-                  <a:pt x="2268136" y="364287"/>
-                </a:lnTo>
-                <a:close/>
-                <a:lnTo>
-                  <a:pt x="2275030" y="362043"/>
-                </a:lnTo>
-                <a:close/>
-                <a:lnTo>
-                  <a:pt x="2281923" y="359803"/>
-                </a:lnTo>
-                <a:close/>
-                <a:lnTo>
-                  <a:pt x="2288816" y="357568"/>
-                </a:lnTo>
-                <a:close/>
-                <a:lnTo>
-                  <a:pt x="2295710" y="355336"/>
-                </a:lnTo>
-                <a:close/>
-                <a:lnTo>
-                  <a:pt x="2302605" y="353109"/>
-                </a:lnTo>
-                <a:close/>
-                <a:lnTo>
-                  <a:pt x="2309499" y="350886"/>
-                </a:lnTo>
-                <a:close/>
-                <a:lnTo>
-                  <a:pt x="2316394" y="348667"/>
-                </a:lnTo>
-                <a:close/>
-                <a:lnTo>
-                  <a:pt x="2323289" y="346453"/>
-                </a:lnTo>
-                <a:close/>
-                <a:lnTo>
-                  <a:pt x="2330182" y="344242"/>
-                </a:lnTo>
-                <a:close/>
-                <a:lnTo>
-                  <a:pt x="2337075" y="342036"/>
-                </a:lnTo>
-                <a:close/>
-                <a:lnTo>
-                  <a:pt x="2343966" y="339834"/>
-                </a:lnTo>
-                <a:close/>
-                <a:lnTo>
-                  <a:pt x="2350856" y="337636"/>
-                </a:lnTo>
-                <a:close/>
-                <a:lnTo>
-                  <a:pt x="2357744" y="335442"/>
-                </a:lnTo>
-                <a:close/>
-                <a:lnTo>
-                  <a:pt x="2364631" y="333252"/>
-                </a:lnTo>
-                <a:close/>
-                <a:lnTo>
-                  <a:pt x="2371517" y="331066"/>
-                </a:lnTo>
-                <a:close/>
-                <a:lnTo>
-                  <a:pt x="2378404" y="328885"/>
-                </a:lnTo>
-                <a:close/>
-                <a:lnTo>
-                  <a:pt x="2385290" y="326708"/>
-                </a:lnTo>
-                <a:close/>
-                <a:lnTo>
-                  <a:pt x="2392178" y="324535"/>
-                </a:lnTo>
-                <a:close/>
-                <a:lnTo>
-                  <a:pt x="2399067" y="322367"/>
-                </a:lnTo>
-                <a:close/>
-                <a:lnTo>
-                  <a:pt x="2405957" y="320203"/>
-                </a:lnTo>
-                <a:close/>
-                <a:lnTo>
-                  <a:pt x="2412849" y="318044"/>
-                </a:lnTo>
-                <a:close/>
-                <a:lnTo>
-                  <a:pt x="2419743" y="315888"/>
-                </a:lnTo>
-                <a:close/>
-                <a:lnTo>
-                  <a:pt x="2426637" y="313737"/>
-                </a:lnTo>
-                <a:close/>
-                <a:lnTo>
-                  <a:pt x="2433532" y="311589"/>
-                </a:lnTo>
-                <a:close/>
-                <a:lnTo>
-                  <a:pt x="2440426" y="309445"/>
-                </a:lnTo>
-                <a:close/>
-                <a:lnTo>
-                  <a:pt x="2447321" y="307304"/>
-                </a:lnTo>
-                <a:close/>
-                <a:lnTo>
-                  <a:pt x="2454215" y="305166"/>
-                </a:lnTo>
-                <a:close/>
-                <a:lnTo>
-                  <a:pt x="2461109" y="303032"/>
-                </a:lnTo>
-                <a:close/>
-                <a:lnTo>
-                  <a:pt x="2468002" y="300900"/>
-                </a:lnTo>
-                <a:close/>
-                <a:lnTo>
-                  <a:pt x="2474895" y="298772"/>
-                </a:lnTo>
-                <a:close/>
-                <a:lnTo>
-                  <a:pt x="2481788" y="296647"/>
-                </a:lnTo>
-                <a:close/>
-                <a:lnTo>
-                  <a:pt x="2488682" y="294524"/>
-                </a:lnTo>
-                <a:close/>
-                <a:lnTo>
-                  <a:pt x="2495575" y="292405"/>
-                </a:lnTo>
-                <a:close/>
-                <a:lnTo>
-                  <a:pt x="2502470" y="290289"/>
-                </a:lnTo>
-                <a:close/>
-                <a:lnTo>
-                  <a:pt x="2509364" y="288176"/>
-                </a:lnTo>
-                <a:close/>
-                <a:lnTo>
-                  <a:pt x="2516259" y="286067"/>
-                </a:lnTo>
-                <a:close/>
-                <a:lnTo>
-                  <a:pt x="2523154" y="283961"/>
-                </a:lnTo>
-                <a:close/>
-                <a:lnTo>
-                  <a:pt x="2530048" y="281859"/>
-                </a:lnTo>
-                <a:close/>
-                <a:lnTo>
-                  <a:pt x="2536941" y="279760"/>
-                </a:lnTo>
-                <a:close/>
-                <a:lnTo>
-                  <a:pt x="2543833" y="277667"/>
-                </a:lnTo>
-                <a:close/>
-                <a:lnTo>
-                  <a:pt x="2550724" y="275577"/>
-                </a:lnTo>
-                <a:close/>
-                <a:lnTo>
-                  <a:pt x="2557613" y="273493"/>
-                </a:lnTo>
-                <a:close/>
-                <a:lnTo>
-                  <a:pt x="2564501" y="271413"/>
-                </a:lnTo>
-                <a:close/>
-                <a:lnTo>
-                  <a:pt x="2571387" y="269337"/>
-                </a:lnTo>
-                <a:close/>
-                <a:lnTo>
-                  <a:pt x="2578273" y="267265"/>
-                </a:lnTo>
-                <a:close/>
-                <a:lnTo>
-                  <a:pt x="2585160" y="265197"/>
-                </a:lnTo>
-                <a:close/>
-                <a:lnTo>
-                  <a:pt x="2592047" y="263133"/>
-                </a:lnTo>
-                <a:close/>
-                <a:lnTo>
-                  <a:pt x="2598935" y="261072"/>
-                </a:lnTo>
-                <a:close/>
-                <a:lnTo>
-                  <a:pt x="2605824" y="259013"/>
-                </a:lnTo>
-                <a:close/>
-                <a:lnTo>
-                  <a:pt x="2612716" y="256958"/>
-                </a:lnTo>
-                <a:close/>
-                <a:lnTo>
-                  <a:pt x="2619608" y="254906"/>
-                </a:lnTo>
-                <a:close/>
-                <a:lnTo>
-                  <a:pt x="2626502" y="252857"/>
-                </a:lnTo>
-                <a:close/>
-                <a:lnTo>
-                  <a:pt x="2633396" y="250811"/>
-                </a:lnTo>
-                <a:close/>
-                <a:lnTo>
-                  <a:pt x="2640291" y="248769"/>
-                </a:lnTo>
-                <a:close/>
-                <a:lnTo>
-                  <a:pt x="2647186" y="246730"/>
-                </a:lnTo>
-                <a:close/>
-                <a:lnTo>
-                  <a:pt x="2654081" y="244696"/>
-                </a:lnTo>
-                <a:close/>
-                <a:lnTo>
-                  <a:pt x="2660974" y="242665"/>
-                </a:lnTo>
-                <a:close/>
-                <a:lnTo>
-                  <a:pt x="2667868" y="240638"/>
-                </a:lnTo>
-                <a:close/>
-                <a:lnTo>
-                  <a:pt x="2674761" y="238614"/>
-                </a:lnTo>
-                <a:close/>
-                <a:lnTo>
-                  <a:pt x="2681654" y="236593"/>
-                </a:lnTo>
-                <a:close/>
-                <a:lnTo>
-                  <a:pt x="2688547" y="234574"/>
-                </a:lnTo>
-                <a:close/>
-                <a:lnTo>
-                  <a:pt x="2695441" y="232558"/>
-                </a:lnTo>
-                <a:close/>
-                <a:lnTo>
-                  <a:pt x="2702335" y="230543"/>
-                </a:lnTo>
-                <a:close/>
-                <a:lnTo>
-                  <a:pt x="2709229" y="228530"/>
-                </a:lnTo>
-                <a:close/>
-                <a:lnTo>
-                  <a:pt x="2716124" y="226519"/>
-                </a:lnTo>
-                <a:close/>
-                <a:lnTo>
-                  <a:pt x="2723019" y="224510"/>
-                </a:lnTo>
-                <a:close/>
-                <a:lnTo>
-                  <a:pt x="2729913" y="222504"/>
-                </a:lnTo>
-                <a:close/>
-                <a:lnTo>
-                  <a:pt x="2736807" y="220501"/>
-                </a:lnTo>
-                <a:close/>
-                <a:lnTo>
-                  <a:pt x="2743700" y="218503"/>
-                </a:lnTo>
-                <a:close/>
-                <a:lnTo>
-                  <a:pt x="2750592" y="216509"/>
-                </a:lnTo>
-                <a:close/>
-                <a:lnTo>
-                  <a:pt x="2757481" y="214520"/>
-                </a:lnTo>
-                <a:close/>
-                <a:lnTo>
-                  <a:pt x="2764370" y="212537"/>
-                </a:lnTo>
-                <a:close/>
-                <a:lnTo>
-                  <a:pt x="2771257" y="210559"/>
-                </a:lnTo>
-                <a:close/>
-                <a:lnTo>
-                  <a:pt x="2778143" y="208584"/>
-                </a:lnTo>
-                <a:close/>
-                <a:lnTo>
-                  <a:pt x="2785029" y="206614"/>
-                </a:lnTo>
-                <a:close/>
-                <a:lnTo>
-                  <a:pt x="2791916" y="204646"/>
-                </a:lnTo>
-                <a:close/>
-                <a:lnTo>
-                  <a:pt x="2798803" y="202682"/>
-                </a:lnTo>
-                <a:close/>
-                <a:lnTo>
-                  <a:pt x="2805692" y="200719"/>
-                </a:lnTo>
-                <a:close/>
-                <a:lnTo>
-                  <a:pt x="2812582" y="198757"/>
-                </a:lnTo>
-                <a:close/>
-                <a:lnTo>
-                  <a:pt x="2819474" y="196797"/>
-                </a:lnTo>
-                <a:close/>
-                <a:lnTo>
-                  <a:pt x="2826367" y="194839"/>
-                </a:lnTo>
-                <a:close/>
-                <a:lnTo>
-                  <a:pt x="2833261" y="192884"/>
-                </a:lnTo>
-                <a:close/>
-                <a:lnTo>
-                  <a:pt x="2840156" y="190932"/>
-                </a:lnTo>
-                <a:close/>
-                <a:lnTo>
-                  <a:pt x="2847051" y="188982"/>
-                </a:lnTo>
-                <a:close/>
-                <a:lnTo>
-                  <a:pt x="2853946" y="187037"/>
-                </a:lnTo>
-                <a:close/>
-                <a:lnTo>
-                  <a:pt x="2860840" y="185096"/>
-                </a:lnTo>
-                <a:close/>
-                <a:lnTo>
-                  <a:pt x="2867734" y="183158"/>
-                </a:lnTo>
-                <a:close/>
-                <a:lnTo>
-                  <a:pt x="2874627" y="181225"/>
-                </a:lnTo>
-                <a:close/>
-                <a:lnTo>
-                  <a:pt x="2881520" y="179295"/>
-                </a:lnTo>
-                <a:close/>
-                <a:lnTo>
-                  <a:pt x="2888413" y="177367"/>
-                </a:lnTo>
-                <a:close/>
-                <a:lnTo>
-                  <a:pt x="2895306" y="175443"/>
-                </a:lnTo>
-                <a:close/>
-                <a:lnTo>
-                  <a:pt x="2902200" y="173521"/>
-                </a:lnTo>
-                <a:close/>
-                <a:lnTo>
-                  <a:pt x="2909094" y="171600"/>
-                </a:lnTo>
-                <a:close/>
-                <a:lnTo>
-                  <a:pt x="2915989" y="169682"/>
-                </a:lnTo>
-                <a:close/>
-                <a:lnTo>
-                  <a:pt x="2922883" y="167765"/>
-                </a:lnTo>
-                <a:close/>
-                <a:lnTo>
-                  <a:pt x="2929778" y="165851"/>
-                </a:lnTo>
-                <a:close/>
-                <a:lnTo>
-                  <a:pt x="2936672" y="163940"/>
-                </a:lnTo>
-                <a:close/>
-                <a:lnTo>
-                  <a:pt x="2943566" y="162032"/>
-                </a:lnTo>
-                <a:close/>
-                <a:lnTo>
-                  <a:pt x="2950458" y="160127"/>
-                </a:lnTo>
-                <a:close/>
-                <a:lnTo>
-                  <a:pt x="2957349" y="158226"/>
-                </a:lnTo>
-                <a:close/>
-                <a:lnTo>
-                  <a:pt x="2964239" y="156329"/>
-                </a:lnTo>
-                <a:close/>
-                <a:lnTo>
-                  <a:pt x="2971126" y="154436"/>
-                </a:lnTo>
-                <a:close/>
-                <a:lnTo>
-                  <a:pt x="2978013" y="152546"/>
-                </a:lnTo>
-                <a:close/>
-                <a:lnTo>
-                  <a:pt x="2984899" y="150660"/>
-                </a:lnTo>
-                <a:close/>
-                <a:lnTo>
-                  <a:pt x="2991785" y="148776"/>
-                </a:lnTo>
-                <a:close/>
-                <a:lnTo>
-                  <a:pt x="2998672" y="146896"/>
-                </a:lnTo>
-                <a:close/>
-                <a:lnTo>
-                  <a:pt x="3005560" y="145017"/>
-                </a:lnTo>
-                <a:close/>
-                <a:lnTo>
-                  <a:pt x="3012449" y="143140"/>
-                </a:lnTo>
-                <a:close/>
-                <a:lnTo>
-                  <a:pt x="3019340" y="141266"/>
-                </a:lnTo>
-                <a:close/>
-                <a:lnTo>
-                  <a:pt x="3026233" y="139393"/>
-                </a:lnTo>
-                <a:close/>
-                <a:lnTo>
-                  <a:pt x="3033127" y="137523"/>
-                </a:lnTo>
-                <a:close/>
-                <a:lnTo>
-                  <a:pt x="3040021" y="135656"/>
-                </a:lnTo>
-                <a:close/>
-                <a:lnTo>
-                  <a:pt x="3046916" y="133791"/>
-                </a:lnTo>
-                <a:close/>
-                <a:lnTo>
-                  <a:pt x="3053810" y="131930"/>
-                </a:lnTo>
-                <a:close/>
-                <a:lnTo>
-                  <a:pt x="3060705" y="130073"/>
-                </a:lnTo>
-                <a:close/>
-                <a:lnTo>
-                  <a:pt x="3067599" y="128220"/>
-                </a:lnTo>
-                <a:close/>
-                <a:lnTo>
-                  <a:pt x="3074493" y="126371"/>
-                </a:lnTo>
-                <a:close/>
-                <a:lnTo>
-                  <a:pt x="3081386" y="124525"/>
-                </a:lnTo>
-                <a:close/>
-                <a:lnTo>
-                  <a:pt x="3088279" y="122682"/>
-                </a:lnTo>
-                <a:close/>
-                <a:lnTo>
-                  <a:pt x="3095172" y="120843"/>
-                </a:lnTo>
-                <a:close/>
-                <a:lnTo>
-                  <a:pt x="3102065" y="119006"/>
-                </a:lnTo>
-                <a:close/>
-                <a:lnTo>
-                  <a:pt x="3108959" y="117172"/>
-                </a:lnTo>
-                <a:close/>
-                <a:lnTo>
-                  <a:pt x="3115853" y="115339"/>
-                </a:lnTo>
-                <a:close/>
-                <a:lnTo>
-                  <a:pt x="3122748" y="113509"/>
-                </a:lnTo>
-                <a:close/>
-                <a:lnTo>
-                  <a:pt x="3129643" y="111681"/>
-                </a:lnTo>
-                <a:close/>
-                <a:lnTo>
-                  <a:pt x="3136538" y="109856"/>
-                </a:lnTo>
-                <a:close/>
-                <a:lnTo>
-                  <a:pt x="3143432" y="108033"/>
-                </a:lnTo>
-                <a:close/>
-                <a:lnTo>
-                  <a:pt x="3150325" y="106212"/>
-                </a:lnTo>
-                <a:close/>
-                <a:lnTo>
-                  <a:pt x="3157217" y="104394"/>
-                </a:lnTo>
-                <a:close/>
-                <a:lnTo>
-                  <a:pt x="3164107" y="102578"/>
-                </a:lnTo>
-                <a:close/>
-                <a:lnTo>
-                  <a:pt x="3170995" y="100766"/>
-                </a:lnTo>
-                <a:close/>
-                <a:lnTo>
-                  <a:pt x="3177883" y="98956"/>
-                </a:lnTo>
-                <a:close/>
-                <a:lnTo>
-                  <a:pt x="3184769" y="97148"/>
-                </a:lnTo>
-                <a:close/>
-                <a:lnTo>
-                  <a:pt x="3191655" y="95343"/>
-                </a:lnTo>
-                <a:close/>
-                <a:lnTo>
-                  <a:pt x="3198542" y="93540"/>
-                </a:lnTo>
-                <a:close/>
-                <a:lnTo>
-                  <a:pt x="3205429" y="91739"/>
-                </a:lnTo>
-                <a:close/>
-                <a:lnTo>
-                  <a:pt x="3212317" y="89941"/>
-                </a:lnTo>
-                <a:close/>
-                <a:lnTo>
-                  <a:pt x="3219207" y="88144"/>
-                </a:lnTo>
-                <a:close/>
-                <a:lnTo>
-                  <a:pt x="3226099" y="86350"/>
-                </a:lnTo>
-                <a:close/>
-                <a:lnTo>
-                  <a:pt x="3232992" y="84558"/>
-                </a:lnTo>
-                <a:close/>
-                <a:lnTo>
-                  <a:pt x="3239886" y="82769"/>
-                </a:lnTo>
-                <a:close/>
-                <a:lnTo>
-                  <a:pt x="3246780" y="80984"/>
-                </a:lnTo>
-                <a:close/>
-                <a:lnTo>
-                  <a:pt x="3253675" y="79202"/>
-                </a:lnTo>
-                <a:close/>
-                <a:lnTo>
-                  <a:pt x="3260570" y="77424"/>
-                </a:lnTo>
-                <a:close/>
-                <a:lnTo>
-                  <a:pt x="3267464" y="75650"/>
-                </a:lnTo>
-                <a:close/>
-                <a:lnTo>
-                  <a:pt x="3274359" y="73880"/>
-                </a:lnTo>
-                <a:close/>
-                <a:lnTo>
-                  <a:pt x="3281252" y="72114"/>
-                </a:lnTo>
-                <a:close/>
-                <a:lnTo>
-                  <a:pt x="3288146" y="70351"/>
-                </a:lnTo>
-                <a:close/>
-                <a:lnTo>
-                  <a:pt x="3295039" y="68591"/>
-                </a:lnTo>
-                <a:close/>
-                <a:lnTo>
-                  <a:pt x="3301932" y="66833"/>
-                </a:lnTo>
-                <a:close/>
-                <a:lnTo>
-                  <a:pt x="3308825" y="65076"/>
-                </a:lnTo>
-                <a:close/>
-                <a:lnTo>
-                  <a:pt x="3315719" y="63319"/>
-                </a:lnTo>
-                <a:close/>
-                <a:lnTo>
-                  <a:pt x="3322612" y="61564"/>
-                </a:lnTo>
-                <a:close/>
-                <a:lnTo>
-                  <a:pt x="3329505" y="59809"/>
-                </a:lnTo>
-                <a:close/>
-                <a:lnTo>
-                  <a:pt x="3336399" y="58055"/>
-                </a:lnTo>
-                <a:close/>
-                <a:lnTo>
-                  <a:pt x="3343293" y="56303"/>
-                </a:lnTo>
-                <a:close/>
-                <a:lnTo>
-                  <a:pt x="3350186" y="54554"/>
-                </a:lnTo>
-                <a:close/>
-                <a:lnTo>
-                  <a:pt x="3357080" y="52809"/>
-                </a:lnTo>
-                <a:close/>
-                <a:lnTo>
-                  <a:pt x="3363973" y="51067"/>
-                </a:lnTo>
-                <a:close/>
-                <a:lnTo>
-                  <a:pt x="3370866" y="49330"/>
-                </a:lnTo>
-                <a:close/>
-                <a:lnTo>
-                  <a:pt x="3377759" y="47597"/>
-                </a:lnTo>
-                <a:close/>
-                <a:lnTo>
-                  <a:pt x="3384650" y="45869"/>
-                </a:lnTo>
-                <a:close/>
-                <a:lnTo>
-                  <a:pt x="3391540" y="44143"/>
-                </a:lnTo>
-                <a:close/>
-                <a:lnTo>
-                  <a:pt x="3398427" y="42421"/>
-                </a:lnTo>
-                <a:close/>
-                <a:lnTo>
-                  <a:pt x="3405312" y="40700"/>
-                </a:lnTo>
-                <a:close/>
-                <a:lnTo>
-                  <a:pt x="3412194" y="38981"/>
-                </a:lnTo>
-                <a:close/>
-                <a:lnTo>
-                  <a:pt x="3419072" y="37263"/>
-                </a:lnTo>
-                <a:close/>
-                <a:lnTo>
-                  <a:pt x="3425947" y="35546"/>
-                </a:lnTo>
-                <a:close/>
-                <a:lnTo>
-                  <a:pt x="3432822" y="33830"/>
-                </a:lnTo>
-                <a:close/>
-                <a:lnTo>
-                  <a:pt x="3439700" y="32115"/>
-                </a:lnTo>
-                <a:close/>
-                <a:lnTo>
-                  <a:pt x="3446586" y="30402"/>
-                </a:lnTo>
-                <a:close/>
-                <a:lnTo>
-                  <a:pt x="3453482" y="28690"/>
-                </a:lnTo>
-                <a:close/>
-                <a:lnTo>
-                  <a:pt x="3460392" y="26981"/>
-                </a:lnTo>
-                <a:close/>
-                <a:lnTo>
-                  <a:pt x="3467320" y="25275"/>
-                </a:lnTo>
-                <a:close/>
-                <a:lnTo>
-                  <a:pt x="3474267" y="23571"/>
-                </a:lnTo>
-                <a:close/>
-                <a:lnTo>
-                  <a:pt x="3481226" y="21870"/>
-                </a:lnTo>
-                <a:close/>
-                <a:lnTo>
-                  <a:pt x="3488180" y="20173"/>
-                </a:lnTo>
-                <a:close/>
-                <a:lnTo>
-                  <a:pt x="3495117" y="18478"/>
-                </a:lnTo>
-                <a:close/>
-                <a:lnTo>
-                  <a:pt x="3502022" y="16785"/>
-                </a:lnTo>
-                <a:close/>
-                <a:lnTo>
-                  <a:pt x="3508880" y="15096"/>
-                </a:lnTo>
-                <a:close/>
-                <a:lnTo>
-                  <a:pt x="3515678" y="13409"/>
-                </a:lnTo>
-                <a:close/>
-                <a:lnTo>
-                  <a:pt x="3522400" y="11725"/>
-                </a:lnTo>
-                <a:close/>
-                <a:lnTo>
-                  <a:pt x="3529033" y="10043"/>
-                </a:lnTo>
-                <a:close/>
-                <a:lnTo>
-                  <a:pt x="3535563" y="8363"/>
-                </a:lnTo>
-                <a:close/>
-                <a:lnTo>
-                  <a:pt x="3541975" y="6686"/>
-                </a:lnTo>
-                <a:close/>
-                <a:lnTo>
-                  <a:pt x="3548255" y="5011"/>
-                </a:lnTo>
-                <a:close/>
-                <a:lnTo>
-                  <a:pt x="3554389" y="3339"/>
-                </a:lnTo>
-                <a:close/>
-                <a:lnTo>
-                  <a:pt x="3560362" y="1668"/>
-                </a:lnTo>
-                <a:close/>
-                <a:lnTo>
-                  <a:pt x="3566160" y="0"/>
+                  <a:pt x="5826" y="1929118"/>
+                </a:lnTo>
+                <a:close/>
+                <a:lnTo>
+                  <a:pt x="11602" y="1919787"/>
+                </a:lnTo>
+                <a:close/>
+                <a:lnTo>
+                  <a:pt x="17328" y="1910535"/>
+                </a:lnTo>
+                <a:close/>
+                <a:lnTo>
+                  <a:pt x="23004" y="1901360"/>
+                </a:lnTo>
+                <a:close/>
+                <a:lnTo>
+                  <a:pt x="28631" y="1892263"/>
+                </a:lnTo>
+                <a:close/>
+                <a:lnTo>
+                  <a:pt x="34208" y="1883243"/>
+                </a:lnTo>
+                <a:close/>
+                <a:lnTo>
+                  <a:pt x="39738" y="1874300"/>
+                </a:lnTo>
+                <a:close/>
+                <a:lnTo>
+                  <a:pt x="45219" y="1865433"/>
+                </a:lnTo>
+                <a:close/>
+                <a:lnTo>
+                  <a:pt x="50653" y="1856642"/>
+                </a:lnTo>
+                <a:close/>
+                <a:lnTo>
+                  <a:pt x="56040" y="1847927"/>
+                </a:lnTo>
+                <a:close/>
+                <a:lnTo>
+                  <a:pt x="61380" y="1839286"/>
+                </a:lnTo>
+                <a:close/>
+                <a:lnTo>
+                  <a:pt x="66674" y="1830720"/>
+                </a:lnTo>
+                <a:close/>
+                <a:lnTo>
+                  <a:pt x="71922" y="1822228"/>
+                </a:lnTo>
+                <a:close/>
+                <a:lnTo>
+                  <a:pt x="77124" y="1813809"/>
+                </a:lnTo>
+                <a:close/>
+                <a:lnTo>
+                  <a:pt x="82282" y="1805464"/>
+                </a:lnTo>
+                <a:close/>
+                <a:lnTo>
+                  <a:pt x="87394" y="1797192"/>
+                </a:lnTo>
+                <a:close/>
+                <a:lnTo>
+                  <a:pt x="92463" y="1788992"/>
+                </a:lnTo>
+                <a:close/>
+                <a:lnTo>
+                  <a:pt x="97488" y="1780865"/>
+                </a:lnTo>
+                <a:close/>
+                <a:lnTo>
+                  <a:pt x="102470" y="1772808"/>
+                </a:lnTo>
+                <a:close/>
+                <a:lnTo>
+                  <a:pt x="107408" y="1764823"/>
+                </a:lnTo>
+                <a:close/>
+                <a:lnTo>
+                  <a:pt x="112305" y="1756909"/>
+                </a:lnTo>
+                <a:close/>
+                <a:lnTo>
+                  <a:pt x="117159" y="1749065"/>
+                </a:lnTo>
+                <a:close/>
+                <a:lnTo>
+                  <a:pt x="121972" y="1741291"/>
+                </a:lnTo>
+                <a:close/>
+                <a:lnTo>
+                  <a:pt x="126743" y="1733586"/>
+                </a:lnTo>
+                <a:close/>
+                <a:lnTo>
+                  <a:pt x="131474" y="1725950"/>
+                </a:lnTo>
+                <a:close/>
+                <a:lnTo>
+                  <a:pt x="136164" y="1718383"/>
+                </a:lnTo>
+                <a:close/>
+                <a:lnTo>
+                  <a:pt x="140815" y="1710884"/>
+                </a:lnTo>
+                <a:close/>
+                <a:lnTo>
+                  <a:pt x="145426" y="1703452"/>
+                </a:lnTo>
+                <a:close/>
+                <a:lnTo>
+                  <a:pt x="149997" y="1696088"/>
+                </a:lnTo>
+                <a:close/>
+                <a:lnTo>
+                  <a:pt x="154531" y="1688791"/>
+                </a:lnTo>
+                <a:close/>
+                <a:lnTo>
+                  <a:pt x="159026" y="1681560"/>
+                </a:lnTo>
+                <a:close/>
+                <a:lnTo>
+                  <a:pt x="163483" y="1674395"/>
+                </a:lnTo>
+                <a:close/>
+                <a:lnTo>
+                  <a:pt x="167903" y="1667296"/>
+                </a:lnTo>
+                <a:close/>
+                <a:lnTo>
+                  <a:pt x="172286" y="1660262"/>
+                </a:lnTo>
+                <a:close/>
+                <a:lnTo>
+                  <a:pt x="176633" y="1653292"/>
+                </a:lnTo>
+                <a:close/>
+                <a:lnTo>
+                  <a:pt x="180943" y="1646387"/>
+                </a:lnTo>
+                <a:close/>
+                <a:lnTo>
+                  <a:pt x="185218" y="1639546"/>
+                </a:lnTo>
+                <a:close/>
+                <a:lnTo>
+                  <a:pt x="189457" y="1632768"/>
+                </a:lnTo>
+                <a:close/>
+                <a:lnTo>
+                  <a:pt x="193662" y="1626053"/>
+                </a:lnTo>
+                <a:close/>
+                <a:lnTo>
+                  <a:pt x="197833" y="1619401"/>
+                </a:lnTo>
+                <a:close/>
+                <a:lnTo>
+                  <a:pt x="201969" y="1612811"/>
+                </a:lnTo>
+                <a:close/>
+                <a:lnTo>
+                  <a:pt x="206072" y="1606283"/>
+                </a:lnTo>
+                <a:close/>
+                <a:lnTo>
+                  <a:pt x="210142" y="1599816"/>
+                </a:lnTo>
+                <a:close/>
+                <a:lnTo>
+                  <a:pt x="214179" y="1593410"/>
+                </a:lnTo>
+                <a:close/>
+                <a:lnTo>
+                  <a:pt x="218184" y="1587064"/>
+                </a:lnTo>
+                <a:close/>
+                <a:lnTo>
+                  <a:pt x="222157" y="1580778"/>
+                </a:lnTo>
+                <a:close/>
+                <a:lnTo>
+                  <a:pt x="226098" y="1574552"/>
+                </a:lnTo>
+                <a:close/>
+                <a:lnTo>
+                  <a:pt x="230009" y="1568385"/>
+                </a:lnTo>
+                <a:close/>
+                <a:lnTo>
+                  <a:pt x="233889" y="1562277"/>
+                </a:lnTo>
+                <a:close/>
+                <a:lnTo>
+                  <a:pt x="237739" y="1556227"/>
+                </a:lnTo>
+                <a:close/>
+                <a:lnTo>
+                  <a:pt x="241559" y="1550235"/>
+                </a:lnTo>
+                <a:close/>
+                <a:lnTo>
+                  <a:pt x="245350" y="1544300"/>
+                </a:lnTo>
+                <a:close/>
+                <a:lnTo>
+                  <a:pt x="249113" y="1538423"/>
+                </a:lnTo>
+                <a:close/>
+                <a:lnTo>
+                  <a:pt x="252846" y="1532602"/>
+                </a:lnTo>
+                <a:close/>
+                <a:lnTo>
+                  <a:pt x="256552" y="1526837"/>
+                </a:lnTo>
+                <a:close/>
+                <a:lnTo>
+                  <a:pt x="260230" y="1521128"/>
+                </a:lnTo>
+                <a:close/>
+                <a:lnTo>
+                  <a:pt x="263881" y="1515474"/>
+                </a:lnTo>
+                <a:close/>
+                <a:lnTo>
+                  <a:pt x="267506" y="1509876"/>
+                </a:lnTo>
+                <a:close/>
+                <a:lnTo>
+                  <a:pt x="271104" y="1504331"/>
+                </a:lnTo>
+                <a:close/>
+                <a:lnTo>
+                  <a:pt x="274676" y="1498841"/>
+                </a:lnTo>
+                <a:close/>
+                <a:lnTo>
+                  <a:pt x="278223" y="1493404"/>
+                </a:lnTo>
+                <a:close/>
+                <a:lnTo>
+                  <a:pt x="281745" y="1488020"/>
+                </a:lnTo>
+                <a:close/>
+                <a:lnTo>
+                  <a:pt x="285242" y="1482690"/>
+                </a:lnTo>
+                <a:close/>
+                <a:lnTo>
+                  <a:pt x="288715" y="1477411"/>
+                </a:lnTo>
+                <a:close/>
+                <a:lnTo>
+                  <a:pt x="292164" y="1472185"/>
+                </a:lnTo>
+                <a:close/>
+                <a:lnTo>
+                  <a:pt x="295590" y="1467009"/>
+                </a:lnTo>
+                <a:close/>
+                <a:lnTo>
+                  <a:pt x="298993" y="1461885"/>
+                </a:lnTo>
+                <a:close/>
+                <a:lnTo>
+                  <a:pt x="302373" y="1456812"/>
+                </a:lnTo>
+                <a:close/>
+                <a:lnTo>
+                  <a:pt x="305732" y="1451788"/>
+                </a:lnTo>
+                <a:close/>
+                <a:lnTo>
+                  <a:pt x="309069" y="1446815"/>
+                </a:lnTo>
+                <a:close/>
+                <a:lnTo>
+                  <a:pt x="312384" y="1441891"/>
+                </a:lnTo>
+                <a:close/>
+                <a:lnTo>
+                  <a:pt x="315679" y="1437015"/>
+                </a:lnTo>
+                <a:close/>
+                <a:lnTo>
+                  <a:pt x="318954" y="1432188"/>
+                </a:lnTo>
+                <a:close/>
+                <a:lnTo>
+                  <a:pt x="322209" y="1427410"/>
+                </a:lnTo>
+                <a:close/>
+                <a:lnTo>
+                  <a:pt x="325444" y="1422678"/>
+                </a:lnTo>
+                <a:close/>
+                <a:lnTo>
+                  <a:pt x="328660" y="1417994"/>
+                </a:lnTo>
+                <a:close/>
+                <a:lnTo>
+                  <a:pt x="331858" y="1413357"/>
+                </a:lnTo>
+                <a:close/>
+                <a:lnTo>
+                  <a:pt x="335037" y="1408766"/>
+                </a:lnTo>
+                <a:close/>
+                <a:lnTo>
+                  <a:pt x="338199" y="1404221"/>
+                </a:lnTo>
+                <a:close/>
+                <a:lnTo>
+                  <a:pt x="341343" y="1399722"/>
+                </a:lnTo>
+                <a:close/>
+                <a:lnTo>
+                  <a:pt x="344470" y="1395267"/>
+                </a:lnTo>
+                <a:close/>
+                <a:lnTo>
+                  <a:pt x="347581" y="1390857"/>
+                </a:lnTo>
+                <a:close/>
+                <a:lnTo>
+                  <a:pt x="350675" y="1386492"/>
+                </a:lnTo>
+                <a:close/>
+                <a:lnTo>
+                  <a:pt x="353754" y="1382170"/>
+                </a:lnTo>
+                <a:close/>
+                <a:lnTo>
+                  <a:pt x="356818" y="1377891"/>
+                </a:lnTo>
+                <a:close/>
+                <a:lnTo>
+                  <a:pt x="359867" y="1373655"/>
+                </a:lnTo>
+                <a:close/>
+                <a:lnTo>
+                  <a:pt x="362902" y="1369462"/>
+                </a:lnTo>
+                <a:close/>
+                <a:lnTo>
+                  <a:pt x="365922" y="1365311"/>
+                </a:lnTo>
+                <a:close/>
+                <a:lnTo>
+                  <a:pt x="368929" y="1361202"/>
+                </a:lnTo>
+                <a:close/>
+                <a:lnTo>
+                  <a:pt x="371923" y="1357133"/>
+                </a:lnTo>
+                <a:close/>
+                <a:lnTo>
+                  <a:pt x="374905" y="1353106"/>
+                </a:lnTo>
+                <a:close/>
+                <a:lnTo>
+                  <a:pt x="377874" y="1349119"/>
+                </a:lnTo>
+                <a:close/>
+                <a:lnTo>
+                  <a:pt x="380831" y="1345172"/>
+                </a:lnTo>
+                <a:close/>
+                <a:lnTo>
+                  <a:pt x="383777" y="1341264"/>
+                </a:lnTo>
+                <a:close/>
+                <a:lnTo>
+                  <a:pt x="386712" y="1337395"/>
+                </a:lnTo>
+                <a:close/>
+                <a:lnTo>
+                  <a:pt x="389636" y="1333565"/>
+                </a:lnTo>
+                <a:close/>
+                <a:lnTo>
+                  <a:pt x="392550" y="1329773"/>
+                </a:lnTo>
+                <a:close/>
+                <a:lnTo>
+                  <a:pt x="395454" y="1326019"/>
+                </a:lnTo>
+                <a:close/>
+                <a:lnTo>
+                  <a:pt x="398350" y="1322303"/>
+                </a:lnTo>
+                <a:close/>
+                <a:lnTo>
+                  <a:pt x="401236" y="1318623"/>
+                </a:lnTo>
+                <a:close/>
+                <a:lnTo>
+                  <a:pt x="404114" y="1314980"/>
+                </a:lnTo>
+                <a:close/>
+                <a:lnTo>
+                  <a:pt x="406984" y="1311372"/>
+                </a:lnTo>
+                <a:close/>
+                <a:lnTo>
+                  <a:pt x="409846" y="1307801"/>
+                </a:lnTo>
+                <a:close/>
+                <a:lnTo>
+                  <a:pt x="412701" y="1304265"/>
+                </a:lnTo>
+                <a:close/>
+                <a:lnTo>
+                  <a:pt x="415550" y="1300763"/>
+                </a:lnTo>
+                <a:close/>
+                <a:lnTo>
+                  <a:pt x="418392" y="1297296"/>
+                </a:lnTo>
+                <a:close/>
+                <a:lnTo>
+                  <a:pt x="421228" y="1293863"/>
+                </a:lnTo>
+                <a:close/>
+                <a:lnTo>
+                  <a:pt x="424059" y="1290463"/>
+                </a:lnTo>
+                <a:close/>
+                <a:lnTo>
+                  <a:pt x="426885" y="1287096"/>
+                </a:lnTo>
+                <a:close/>
+                <a:lnTo>
+                  <a:pt x="429706" y="1283762"/>
+                </a:lnTo>
+                <a:close/>
+                <a:lnTo>
+                  <a:pt x="432523" y="1280461"/>
+                </a:lnTo>
+                <a:close/>
+                <a:lnTo>
+                  <a:pt x="435337" y="1277191"/>
+                </a:lnTo>
+                <a:close/>
+                <a:lnTo>
+                  <a:pt x="438147" y="1273952"/>
+                </a:lnTo>
+                <a:close/>
+                <a:lnTo>
+                  <a:pt x="440954" y="1270744"/>
+                </a:lnTo>
+                <a:close/>
+                <a:lnTo>
+                  <a:pt x="443759" y="1267567"/>
+                </a:lnTo>
+                <a:close/>
+                <a:lnTo>
+                  <a:pt x="446561" y="1264420"/>
+                </a:lnTo>
+                <a:close/>
+                <a:lnTo>
+                  <a:pt x="449362" y="1261303"/>
+                </a:lnTo>
+                <a:close/>
+                <a:lnTo>
+                  <a:pt x="452162" y="1258214"/>
+                </a:lnTo>
+                <a:close/>
+                <a:lnTo>
+                  <a:pt x="454961" y="1255155"/>
+                </a:lnTo>
+                <a:close/>
+                <a:lnTo>
+                  <a:pt x="457760" y="1252124"/>
+                </a:lnTo>
+                <a:close/>
+                <a:lnTo>
+                  <a:pt x="460559" y="1249121"/>
+                </a:lnTo>
+                <a:close/>
+                <a:lnTo>
+                  <a:pt x="463358" y="1246145"/>
+                </a:lnTo>
+                <a:close/>
+                <a:lnTo>
+                  <a:pt x="466158" y="1243197"/>
+                </a:lnTo>
+                <a:close/>
+                <a:lnTo>
+                  <a:pt x="468960" y="1240275"/>
+                </a:lnTo>
+                <a:close/>
+                <a:lnTo>
+                  <a:pt x="471763" y="1237380"/>
+                </a:lnTo>
+                <a:close/>
+                <a:lnTo>
+                  <a:pt x="474569" y="1234510"/>
+                </a:lnTo>
+                <a:close/>
+                <a:lnTo>
+                  <a:pt x="477377" y="1231666"/>
+                </a:lnTo>
+                <a:close/>
+                <a:lnTo>
+                  <a:pt x="480188" y="1228846"/>
+                </a:lnTo>
+                <a:close/>
+                <a:lnTo>
+                  <a:pt x="483003" y="1226051"/>
+                </a:lnTo>
+                <a:close/>
+                <a:lnTo>
+                  <a:pt x="485822" y="1223281"/>
+                </a:lnTo>
+                <a:close/>
+                <a:lnTo>
+                  <a:pt x="488645" y="1220533"/>
+                </a:lnTo>
+                <a:close/>
+                <a:lnTo>
+                  <a:pt x="491472" y="1217810"/>
+                </a:lnTo>
+                <a:close/>
+                <a:lnTo>
+                  <a:pt x="494305" y="1215109"/>
+                </a:lnTo>
+                <a:close/>
+                <a:lnTo>
+                  <a:pt x="497144" y="1212430"/>
+                </a:lnTo>
+                <a:close/>
+                <a:lnTo>
+                  <a:pt x="499989" y="1209773"/>
+                </a:lnTo>
+                <a:close/>
+                <a:lnTo>
+                  <a:pt x="502840" y="1207138"/>
+                </a:lnTo>
+                <a:close/>
+                <a:lnTo>
+                  <a:pt x="505698" y="1204524"/>
+                </a:lnTo>
+                <a:close/>
+                <a:lnTo>
+                  <a:pt x="508563" y="1201931"/>
+                </a:lnTo>
+                <a:close/>
+                <a:lnTo>
+                  <a:pt x="511436" y="1199358"/>
+                </a:lnTo>
+                <a:close/>
+                <a:lnTo>
+                  <a:pt x="514317" y="1196804"/>
+                </a:lnTo>
+                <a:close/>
+                <a:lnTo>
+                  <a:pt x="517207" y="1194270"/>
+                </a:lnTo>
+                <a:close/>
+                <a:lnTo>
+                  <a:pt x="520106" y="1191756"/>
+                </a:lnTo>
+                <a:close/>
+                <a:lnTo>
+                  <a:pt x="523014" y="1189259"/>
+                </a:lnTo>
+                <a:close/>
+                <a:lnTo>
+                  <a:pt x="525933" y="1186781"/>
+                </a:lnTo>
+                <a:close/>
+                <a:lnTo>
+                  <a:pt x="528861" y="1184320"/>
+                </a:lnTo>
+                <a:close/>
+                <a:lnTo>
+                  <a:pt x="531800" y="1181877"/>
+                </a:lnTo>
+                <a:close/>
+                <a:lnTo>
+                  <a:pt x="534751" y="1179450"/>
+                </a:lnTo>
+                <a:close/>
+                <a:lnTo>
+                  <a:pt x="537713" y="1177040"/>
+                </a:lnTo>
+                <a:close/>
+                <a:lnTo>
+                  <a:pt x="540686" y="1174646"/>
+                </a:lnTo>
+                <a:close/>
+                <a:lnTo>
+                  <a:pt x="543673" y="1172268"/>
+                </a:lnTo>
+                <a:close/>
+                <a:lnTo>
+                  <a:pt x="546672" y="1169904"/>
+                </a:lnTo>
+                <a:close/>
+                <a:lnTo>
+                  <a:pt x="549684" y="1167555"/>
+                </a:lnTo>
+                <a:close/>
+                <a:lnTo>
+                  <a:pt x="552711" y="1165221"/>
+                </a:lnTo>
+                <a:close/>
+                <a:lnTo>
+                  <a:pt x="555751" y="1162900"/>
+                </a:lnTo>
+                <a:close/>
+                <a:lnTo>
+                  <a:pt x="558806" y="1160593"/>
+                </a:lnTo>
+                <a:close/>
+                <a:lnTo>
+                  <a:pt x="561875" y="1158299"/>
+                </a:lnTo>
+                <a:close/>
+                <a:lnTo>
+                  <a:pt x="564961" y="1156017"/>
+                </a:lnTo>
+                <a:close/>
+                <a:lnTo>
+                  <a:pt x="568062" y="1153748"/>
+                </a:lnTo>
+                <a:close/>
+                <a:lnTo>
+                  <a:pt x="571179" y="1151490"/>
+                </a:lnTo>
+                <a:close/>
+                <a:lnTo>
+                  <a:pt x="574313" y="1149243"/>
+                </a:lnTo>
+                <a:close/>
+                <a:lnTo>
+                  <a:pt x="577464" y="1147007"/>
+                </a:lnTo>
+                <a:close/>
+                <a:lnTo>
+                  <a:pt x="580633" y="1144782"/>
+                </a:lnTo>
+                <a:close/>
+                <a:lnTo>
+                  <a:pt x="583819" y="1142567"/>
+                </a:lnTo>
+                <a:close/>
+                <a:lnTo>
+                  <a:pt x="587024" y="1140361"/>
+                </a:lnTo>
+                <a:close/>
+                <a:lnTo>
+                  <a:pt x="590248" y="1138164"/>
+                </a:lnTo>
+                <a:close/>
+                <a:lnTo>
+                  <a:pt x="593491" y="1135976"/>
+                </a:lnTo>
+                <a:close/>
+                <a:lnTo>
+                  <a:pt x="596753" y="1133797"/>
+                </a:lnTo>
+                <a:close/>
+                <a:lnTo>
+                  <a:pt x="600036" y="1131625"/>
+                </a:lnTo>
+                <a:close/>
+                <a:lnTo>
+                  <a:pt x="603339" y="1129460"/>
+                </a:lnTo>
+                <a:close/>
+                <a:lnTo>
+                  <a:pt x="606663" y="1127303"/>
+                </a:lnTo>
+                <a:close/>
+                <a:lnTo>
+                  <a:pt x="610009" y="1125152"/>
+                </a:lnTo>
+                <a:close/>
+                <a:lnTo>
+                  <a:pt x="613376" y="1123007"/>
+                </a:lnTo>
+                <a:close/>
+                <a:lnTo>
+                  <a:pt x="616766" y="1120868"/>
+                </a:lnTo>
+                <a:close/>
+                <a:lnTo>
+                  <a:pt x="620178" y="1118735"/>
+                </a:lnTo>
+                <a:close/>
+                <a:lnTo>
+                  <a:pt x="623613" y="1116606"/>
+                </a:lnTo>
+                <a:close/>
+                <a:lnTo>
+                  <a:pt x="627072" y="1114481"/>
+                </a:lnTo>
+                <a:close/>
+                <a:lnTo>
+                  <a:pt x="630554" y="1112361"/>
+                </a:lnTo>
+                <a:close/>
+                <a:lnTo>
+                  <a:pt x="634061" y="1110244"/>
+                </a:lnTo>
+                <a:close/>
+                <a:lnTo>
+                  <a:pt x="637593" y="1108131"/>
+                </a:lnTo>
+                <a:close/>
+                <a:lnTo>
+                  <a:pt x="641150" y="1106020"/>
+                </a:lnTo>
+                <a:close/>
+                <a:lnTo>
+                  <a:pt x="644732" y="1103911"/>
+                </a:lnTo>
+                <a:close/>
+                <a:lnTo>
+                  <a:pt x="648341" y="1101804"/>
+                </a:lnTo>
+                <a:close/>
+                <a:lnTo>
+                  <a:pt x="651976" y="1099699"/>
+                </a:lnTo>
+                <a:close/>
+                <a:lnTo>
+                  <a:pt x="655638" y="1097594"/>
+                </a:lnTo>
+                <a:close/>
+                <a:lnTo>
+                  <a:pt x="659327" y="1095491"/>
+                </a:lnTo>
+                <a:close/>
+                <a:lnTo>
+                  <a:pt x="663044" y="1093387"/>
+                </a:lnTo>
+                <a:close/>
+                <a:lnTo>
+                  <a:pt x="666789" y="1091283"/>
+                </a:lnTo>
+                <a:close/>
+                <a:lnTo>
+                  <a:pt x="670562" y="1089179"/>
+                </a:lnTo>
+                <a:close/>
+                <a:lnTo>
+                  <a:pt x="674365" y="1087073"/>
+                </a:lnTo>
+                <a:close/>
+                <a:lnTo>
+                  <a:pt x="678197" y="1084966"/>
+                </a:lnTo>
+                <a:close/>
+                <a:lnTo>
+                  <a:pt x="682059" y="1082856"/>
+                </a:lnTo>
+                <a:close/>
+                <a:lnTo>
+                  <a:pt x="685952" y="1080745"/>
+                </a:lnTo>
+                <a:close/>
+                <a:lnTo>
+                  <a:pt x="689875" y="1078630"/>
+                </a:lnTo>
+                <a:close/>
+                <a:lnTo>
+                  <a:pt x="693829" y="1076512"/>
+                </a:lnTo>
+                <a:close/>
+                <a:lnTo>
+                  <a:pt x="697814" y="1074391"/>
+                </a:lnTo>
+                <a:close/>
+                <a:lnTo>
+                  <a:pt x="701832" y="1072265"/>
+                </a:lnTo>
+                <a:close/>
+                <a:lnTo>
+                  <a:pt x="705882" y="1070135"/>
+                </a:lnTo>
+                <a:close/>
+                <a:lnTo>
+                  <a:pt x="709965" y="1068000"/>
+                </a:lnTo>
+                <a:close/>
+                <a:lnTo>
+                  <a:pt x="714082" y="1065860"/>
+                </a:lnTo>
+                <a:close/>
+                <a:lnTo>
+                  <a:pt x="718232" y="1063713"/>
+                </a:lnTo>
+                <a:close/>
+                <a:lnTo>
+                  <a:pt x="722416" y="1061561"/>
+                </a:lnTo>
+                <a:close/>
+                <a:lnTo>
+                  <a:pt x="726634" y="1059401"/>
+                </a:lnTo>
+                <a:close/>
+                <a:lnTo>
+                  <a:pt x="730888" y="1057235"/>
+                </a:lnTo>
+                <a:close/>
+                <a:lnTo>
+                  <a:pt x="735177" y="1055061"/>
+                </a:lnTo>
+                <a:close/>
+                <a:lnTo>
+                  <a:pt x="739502" y="1052879"/>
+                </a:lnTo>
+                <a:close/>
+                <a:lnTo>
+                  <a:pt x="743863" y="1050689"/>
+                </a:lnTo>
+                <a:close/>
+                <a:lnTo>
+                  <a:pt x="748260" y="1048490"/>
+                </a:lnTo>
+                <a:close/>
+                <a:lnTo>
+                  <a:pt x="752695" y="1046281"/>
+                </a:lnTo>
+                <a:close/>
+                <a:lnTo>
+                  <a:pt x="757168" y="1044063"/>
+                </a:lnTo>
+                <a:close/>
+                <a:lnTo>
+                  <a:pt x="761678" y="1041835"/>
+                </a:lnTo>
+                <a:close/>
+                <a:lnTo>
+                  <a:pt x="766227" y="1039596"/>
+                </a:lnTo>
+                <a:close/>
+                <a:lnTo>
+                  <a:pt x="770814" y="1037347"/>
+                </a:lnTo>
+                <a:close/>
+                <a:lnTo>
+                  <a:pt x="775441" y="1035086"/>
+                </a:lnTo>
+                <a:close/>
+                <a:lnTo>
+                  <a:pt x="780107" y="1032813"/>
+                </a:lnTo>
+                <a:close/>
+                <a:lnTo>
+                  <a:pt x="784814" y="1030528"/>
+                </a:lnTo>
+                <a:close/>
+                <a:lnTo>
+                  <a:pt x="789561" y="1028230"/>
+                </a:lnTo>
+                <a:close/>
+                <a:lnTo>
+                  <a:pt x="794349" y="1025919"/>
+                </a:lnTo>
+                <a:close/>
+                <a:lnTo>
+                  <a:pt x="799178" y="1023594"/>
+                </a:lnTo>
+                <a:close/>
+                <a:lnTo>
+                  <a:pt x="804049" y="1021256"/>
+                </a:lnTo>
+                <a:close/>
+                <a:lnTo>
+                  <a:pt x="808962" y="1018903"/>
+                </a:lnTo>
+                <a:close/>
+                <a:lnTo>
+                  <a:pt x="813918" y="1016536"/>
+                </a:lnTo>
+                <a:close/>
+                <a:lnTo>
+                  <a:pt x="818917" y="1014153"/>
+                </a:lnTo>
+                <a:close/>
+                <a:lnTo>
+                  <a:pt x="823959" y="1011754"/>
+                </a:lnTo>
+                <a:close/>
+                <a:lnTo>
+                  <a:pt x="829045" y="1009340"/>
+                </a:lnTo>
+                <a:close/>
+                <a:lnTo>
+                  <a:pt x="834176" y="1006909"/>
+                </a:lnTo>
+                <a:close/>
+                <a:lnTo>
+                  <a:pt x="839351" y="1004461"/>
+                </a:lnTo>
+                <a:close/>
+                <a:lnTo>
+                  <a:pt x="844572" y="1001995"/>
+                </a:lnTo>
+                <a:close/>
+                <a:lnTo>
+                  <a:pt x="849838" y="999512"/>
+                </a:lnTo>
+                <a:close/>
+                <a:lnTo>
+                  <a:pt x="855150" y="997011"/>
+                </a:lnTo>
+                <a:close/>
+                <a:lnTo>
+                  <a:pt x="860509" y="994491"/>
+                </a:lnTo>
+                <a:close/>
+                <a:lnTo>
+                  <a:pt x="865915" y="991951"/>
+                </a:lnTo>
+                <a:close/>
+                <a:lnTo>
+                  <a:pt x="871368" y="989393"/>
+                </a:lnTo>
+                <a:close/>
+                <a:lnTo>
+                  <a:pt x="876868" y="986814"/>
+                </a:lnTo>
+                <a:close/>
+                <a:lnTo>
+                  <a:pt x="882417" y="984215"/>
+                </a:lnTo>
+                <a:close/>
+                <a:lnTo>
+                  <a:pt x="888014" y="981595"/>
+                </a:lnTo>
+                <a:close/>
+                <a:lnTo>
+                  <a:pt x="893661" y="978954"/>
+                </a:lnTo>
+                <a:close/>
+                <a:lnTo>
+                  <a:pt x="899356" y="976291"/>
+                </a:lnTo>
+                <a:close/>
+                <a:lnTo>
+                  <a:pt x="905102" y="973607"/>
+                </a:lnTo>
+                <a:close/>
+                <a:lnTo>
+                  <a:pt x="910898" y="970899"/>
+                </a:lnTo>
+                <a:close/>
+                <a:lnTo>
+                  <a:pt x="916745" y="968169"/>
+                </a:lnTo>
+                <a:close/>
+                <a:lnTo>
+                  <a:pt x="922642" y="965416"/>
+                </a:lnTo>
+                <a:close/>
+                <a:lnTo>
+                  <a:pt x="928590" y="962640"/>
+                </a:lnTo>
+                <a:close/>
+                <a:lnTo>
+                  <a:pt x="934587" y="959841"/>
+                </a:lnTo>
+                <a:close/>
+                <a:lnTo>
+                  <a:pt x="940634" y="957021"/>
+                </a:lnTo>
+                <a:close/>
+                <a:lnTo>
+                  <a:pt x="946729" y="954179"/>
+                </a:lnTo>
+                <a:close/>
+                <a:lnTo>
+                  <a:pt x="952872" y="951315"/>
+                </a:lnTo>
+                <a:close/>
+                <a:lnTo>
+                  <a:pt x="959063" y="948430"/>
+                </a:lnTo>
+                <a:close/>
+                <a:lnTo>
+                  <a:pt x="965300" y="945524"/>
+                </a:lnTo>
+                <a:close/>
+                <a:lnTo>
+                  <a:pt x="971585" y="942598"/>
+                </a:lnTo>
+                <a:close/>
+                <a:lnTo>
+                  <a:pt x="977915" y="939651"/>
+                </a:lnTo>
+                <a:close/>
+                <a:lnTo>
+                  <a:pt x="984291" y="936685"/>
+                </a:lnTo>
+                <a:close/>
+                <a:lnTo>
+                  <a:pt x="990711" y="933699"/>
+                </a:lnTo>
+                <a:close/>
+                <a:lnTo>
+                  <a:pt x="997176" y="930694"/>
+                </a:lnTo>
+                <a:close/>
+                <a:lnTo>
+                  <a:pt x="1003685" y="927670"/>
+                </a:lnTo>
+                <a:close/>
+                <a:lnTo>
+                  <a:pt x="1010237" y="924627"/>
+                </a:lnTo>
+                <a:close/>
+                <a:lnTo>
+                  <a:pt x="1016832" y="921567"/>
+                </a:lnTo>
+                <a:close/>
+                <a:lnTo>
+                  <a:pt x="1023469" y="918488"/>
+                </a:lnTo>
+                <a:close/>
+                <a:lnTo>
+                  <a:pt x="1030148" y="915391"/>
+                </a:lnTo>
+                <a:close/>
+                <a:lnTo>
+                  <a:pt x="1036868" y="912277"/>
+                </a:lnTo>
+                <a:close/>
+                <a:lnTo>
+                  <a:pt x="1043629" y="909147"/>
+                </a:lnTo>
+                <a:close/>
+                <a:lnTo>
+                  <a:pt x="1050430" y="905999"/>
+                </a:lnTo>
+                <a:close/>
+                <a:lnTo>
+                  <a:pt x="1057270" y="902835"/>
+                </a:lnTo>
+                <a:close/>
+                <a:lnTo>
+                  <a:pt x="1064150" y="899655"/>
+                </a:lnTo>
+                <a:close/>
+                <a:lnTo>
+                  <a:pt x="1071068" y="896460"/>
+                </a:lnTo>
+                <a:close/>
+                <a:lnTo>
+                  <a:pt x="1078024" y="893249"/>
+                </a:lnTo>
+                <a:close/>
+                <a:lnTo>
+                  <a:pt x="1085017" y="890022"/>
+                </a:lnTo>
+                <a:close/>
+                <a:lnTo>
+                  <a:pt x="1092048" y="886782"/>
+                </a:lnTo>
+                <a:close/>
+                <a:lnTo>
+                  <a:pt x="1099115" y="883526"/>
+                </a:lnTo>
+                <a:close/>
+                <a:lnTo>
+                  <a:pt x="1106217" y="880257"/>
+                </a:lnTo>
+                <a:close/>
+                <a:lnTo>
+                  <a:pt x="1113355" y="876973"/>
+                </a:lnTo>
+                <a:close/>
+                <a:lnTo>
+                  <a:pt x="1120528" y="873677"/>
+                </a:lnTo>
+                <a:close/>
+                <a:lnTo>
+                  <a:pt x="1127735" y="870367"/>
+                </a:lnTo>
+                <a:close/>
+                <a:lnTo>
+                  <a:pt x="1134976" y="867044"/>
+                </a:lnTo>
+                <a:close/>
+                <a:lnTo>
+                  <a:pt x="1142250" y="863709"/>
+                </a:lnTo>
+                <a:close/>
+                <a:lnTo>
+                  <a:pt x="1149557" y="860361"/>
+                </a:lnTo>
+                <a:close/>
+                <a:lnTo>
+                  <a:pt x="1156895" y="857002"/>
+                </a:lnTo>
+                <a:close/>
+                <a:lnTo>
+                  <a:pt x="1164266" y="853631"/>
+                </a:lnTo>
+                <a:close/>
+                <a:lnTo>
+                  <a:pt x="1171667" y="850248"/>
+                </a:lnTo>
+                <a:close/>
+                <a:lnTo>
+                  <a:pt x="1179099" y="846855"/>
+                </a:lnTo>
+                <a:close/>
+                <a:lnTo>
+                  <a:pt x="1186562" y="843451"/>
+                </a:lnTo>
+                <a:close/>
+                <a:lnTo>
+                  <a:pt x="1194053" y="840037"/>
+                </a:lnTo>
+                <a:close/>
+                <a:lnTo>
+                  <a:pt x="1201574" y="836613"/>
+                </a:lnTo>
+                <a:close/>
+                <a:lnTo>
+                  <a:pt x="1209123" y="833179"/>
+                </a:lnTo>
+                <a:close/>
+                <a:lnTo>
+                  <a:pt x="1216699" y="829736"/>
+                </a:lnTo>
+                <a:close/>
+                <a:lnTo>
+                  <a:pt x="1224304" y="826284"/>
+                </a:lnTo>
+                <a:close/>
+                <a:lnTo>
+                  <a:pt x="1231935" y="822823"/>
+                </a:lnTo>
+                <a:close/>
+                <a:lnTo>
+                  <a:pt x="1239592" y="819354"/>
+                </a:lnTo>
+                <a:close/>
+                <a:lnTo>
+                  <a:pt x="1247275" y="815877"/>
+                </a:lnTo>
+                <a:close/>
+                <a:lnTo>
+                  <a:pt x="1254983" y="812392"/>
+                </a:lnTo>
+                <a:close/>
+                <a:lnTo>
+                  <a:pt x="1262716" y="808899"/>
+                </a:lnTo>
+                <a:close/>
+                <a:lnTo>
+                  <a:pt x="1270474" y="805400"/>
+                </a:lnTo>
+                <a:close/>
+                <a:lnTo>
+                  <a:pt x="1278254" y="801893"/>
+                </a:lnTo>
+                <a:close/>
+                <a:lnTo>
+                  <a:pt x="1286058" y="798380"/>
+                </a:lnTo>
+                <a:close/>
+                <a:lnTo>
+                  <a:pt x="1293885" y="794861"/>
+                </a:lnTo>
+                <a:close/>
+                <a:lnTo>
+                  <a:pt x="1301733" y="791337"/>
+                </a:lnTo>
+                <a:close/>
+                <a:lnTo>
+                  <a:pt x="1309603" y="787806"/>
+                </a:lnTo>
+                <a:close/>
+                <a:lnTo>
+                  <a:pt x="1317494" y="784271"/>
+                </a:lnTo>
+                <a:close/>
+                <a:lnTo>
+                  <a:pt x="1325406" y="780730"/>
+                </a:lnTo>
+                <a:close/>
+                <a:lnTo>
+                  <a:pt x="1333337" y="777185"/>
+                </a:lnTo>
+                <a:close/>
+                <a:lnTo>
+                  <a:pt x="1341288" y="773636"/>
+                </a:lnTo>
+                <a:close/>
+                <a:lnTo>
+                  <a:pt x="1349257" y="770083"/>
+                </a:lnTo>
+                <a:close/>
+                <a:lnTo>
+                  <a:pt x="1357245" y="766526"/>
+                </a:lnTo>
+                <a:close/>
+                <a:lnTo>
+                  <a:pt x="1365251" y="762966"/>
+                </a:lnTo>
+                <a:close/>
+                <a:lnTo>
+                  <a:pt x="1373274" y="759403"/>
+                </a:lnTo>
+                <a:close/>
+                <a:lnTo>
+                  <a:pt x="1381313" y="755838"/>
+                </a:lnTo>
+                <a:close/>
+                <a:lnTo>
+                  <a:pt x="1389369" y="752270"/>
+                </a:lnTo>
+                <a:close/>
+                <a:lnTo>
+                  <a:pt x="1397441" y="748700"/>
+                </a:lnTo>
+                <a:close/>
+                <a:lnTo>
+                  <a:pt x="1405527" y="745128"/>
+                </a:lnTo>
+                <a:close/>
+                <a:lnTo>
+                  <a:pt x="1413629" y="741555"/>
+                </a:lnTo>
+                <a:close/>
+                <a:lnTo>
+                  <a:pt x="1421744" y="737981"/>
+                </a:lnTo>
+                <a:close/>
+                <a:lnTo>
+                  <a:pt x="1429873" y="734406"/>
+                </a:lnTo>
+                <a:close/>
+                <a:lnTo>
+                  <a:pt x="1438015" y="730831"/>
+                </a:lnTo>
+                <a:close/>
+                <a:lnTo>
+                  <a:pt x="1446169" y="727256"/>
+                </a:lnTo>
+                <a:close/>
+                <a:lnTo>
+                  <a:pt x="1454335" y="723681"/>
+                </a:lnTo>
+                <a:close/>
+                <a:lnTo>
+                  <a:pt x="1462513" y="720107"/>
+                </a:lnTo>
+                <a:close/>
+                <a:lnTo>
+                  <a:pt x="1470701" y="716533"/>
+                </a:lnTo>
+                <a:close/>
+                <a:lnTo>
+                  <a:pt x="1478900" y="712961"/>
+                </a:lnTo>
+                <a:close/>
+                <a:lnTo>
+                  <a:pt x="1487109" y="709390"/>
+                </a:lnTo>
+                <a:close/>
+                <a:lnTo>
+                  <a:pt x="1495326" y="705821"/>
+                </a:lnTo>
+                <a:close/>
+                <a:lnTo>
+                  <a:pt x="1503553" y="702254"/>
+                </a:lnTo>
+                <a:close/>
+                <a:lnTo>
+                  <a:pt x="1511788" y="698689"/>
+                </a:lnTo>
+                <a:close/>
+                <a:lnTo>
+                  <a:pt x="1520030" y="695127"/>
+                </a:lnTo>
+                <a:close/>
+                <a:lnTo>
+                  <a:pt x="1528280" y="691569"/>
+                </a:lnTo>
+                <a:close/>
+                <a:lnTo>
+                  <a:pt x="1536536" y="688014"/>
+                </a:lnTo>
+                <a:close/>
+                <a:lnTo>
+                  <a:pt x="1544799" y="684462"/>
+                </a:lnTo>
+                <a:close/>
+                <a:lnTo>
+                  <a:pt x="1553067" y="680915"/>
+                </a:lnTo>
+                <a:close/>
+                <a:lnTo>
+                  <a:pt x="1561340" y="677372"/>
+                </a:lnTo>
+                <a:close/>
+                <a:lnTo>
+                  <a:pt x="1569617" y="673834"/>
+                </a:lnTo>
+                <a:close/>
+                <a:lnTo>
+                  <a:pt x="1577898" y="670300"/>
+                </a:lnTo>
+                <a:close/>
+                <a:lnTo>
+                  <a:pt x="1586183" y="666772"/>
+                </a:lnTo>
+                <a:close/>
+                <a:lnTo>
+                  <a:pt x="1594471" y="663250"/>
+                </a:lnTo>
+                <a:close/>
+                <a:lnTo>
+                  <a:pt x="1602761" y="659734"/>
+                </a:lnTo>
+                <a:close/>
+                <a:lnTo>
+                  <a:pt x="1611053" y="656224"/>
+                </a:lnTo>
+                <a:close/>
+                <a:lnTo>
+                  <a:pt x="1619346" y="652720"/>
+                </a:lnTo>
+                <a:close/>
+                <a:lnTo>
+                  <a:pt x="1627640" y="649224"/>
+                </a:lnTo>
+                <a:close/>
+                <a:lnTo>
+                  <a:pt x="1635934" y="645735"/>
+                </a:lnTo>
+                <a:close/>
+                <a:lnTo>
+                  <a:pt x="1644228" y="642253"/>
+                </a:lnTo>
+                <a:close/>
+                <a:lnTo>
+                  <a:pt x="1652521" y="638779"/>
+                </a:lnTo>
+                <a:close/>
+                <a:lnTo>
+                  <a:pt x="1660813" y="635314"/>
+                </a:lnTo>
+                <a:close/>
+                <a:lnTo>
+                  <a:pt x="1669103" y="631857"/>
+                </a:lnTo>
+                <a:close/>
+                <a:lnTo>
+                  <a:pt x="1677390" y="628409"/>
+                </a:lnTo>
+                <a:close/>
+                <a:lnTo>
+                  <a:pt x="1685675" y="624970"/>
+                </a:lnTo>
+                <a:close/>
+                <a:lnTo>
+                  <a:pt x="1693956" y="621540"/>
+                </a:lnTo>
+                <a:close/>
+                <a:lnTo>
+                  <a:pt x="1702233" y="618120"/>
+                </a:lnTo>
+                <a:close/>
+                <a:lnTo>
+                  <a:pt x="1710505" y="614711"/>
+                </a:lnTo>
+                <a:close/>
+                <a:lnTo>
+                  <a:pt x="1718772" y="611311"/>
+                </a:lnTo>
+                <a:close/>
+                <a:lnTo>
+                  <a:pt x="1727034" y="607923"/>
+                </a:lnTo>
+                <a:close/>
+                <a:lnTo>
+                  <a:pt x="1735289" y="604546"/>
+                </a:lnTo>
+                <a:close/>
+                <a:lnTo>
+                  <a:pt x="1743538" y="601180"/>
+                </a:lnTo>
+                <a:close/>
+                <a:lnTo>
+                  <a:pt x="1751780" y="597826"/>
+                </a:lnTo>
+                <a:close/>
+                <a:lnTo>
+                  <a:pt x="1760014" y="594483"/>
+                </a:lnTo>
+                <a:close/>
+                <a:lnTo>
+                  <a:pt x="1768239" y="591154"/>
+                </a:lnTo>
+                <a:close/>
+                <a:lnTo>
+                  <a:pt x="1776456" y="587836"/>
+                </a:lnTo>
+                <a:close/>
+                <a:lnTo>
+                  <a:pt x="1784664" y="584532"/>
+                </a:lnTo>
+                <a:close/>
+                <a:lnTo>
+                  <a:pt x="1792861" y="581241"/>
+                </a:lnTo>
+                <a:close/>
+                <a:lnTo>
+                  <a:pt x="1801048" y="577964"/>
+                </a:lnTo>
+                <a:close/>
+                <a:lnTo>
+                  <a:pt x="1809225" y="574701"/>
+                </a:lnTo>
+                <a:close/>
+                <a:lnTo>
+                  <a:pt x="1817390" y="571452"/>
+                </a:lnTo>
+                <a:close/>
+                <a:lnTo>
+                  <a:pt x="1825542" y="568218"/>
+                </a:lnTo>
+                <a:close/>
+                <a:lnTo>
+                  <a:pt x="1833683" y="564998"/>
+                </a:lnTo>
+                <a:close/>
+                <a:lnTo>
+                  <a:pt x="1841810" y="561794"/>
+                </a:lnTo>
+                <a:close/>
+                <a:lnTo>
+                  <a:pt x="1849925" y="558604"/>
+                </a:lnTo>
+                <a:close/>
+                <a:lnTo>
+                  <a:pt x="1858028" y="555429"/>
+                </a:lnTo>
+                <a:close/>
+                <a:lnTo>
+                  <a:pt x="1866118" y="552269"/>
+                </a:lnTo>
+                <a:close/>
+                <a:lnTo>
+                  <a:pt x="1874196" y="549123"/>
+                </a:lnTo>
+                <a:close/>
+                <a:lnTo>
+                  <a:pt x="1882262" y="545992"/>
+                </a:lnTo>
+                <a:close/>
+                <a:lnTo>
+                  <a:pt x="1890316" y="542875"/>
+                </a:lnTo>
+                <a:close/>
+                <a:lnTo>
+                  <a:pt x="1898358" y="539773"/>
+                </a:lnTo>
+                <a:close/>
+                <a:lnTo>
+                  <a:pt x="1906388" y="536685"/>
+                </a:lnTo>
+                <a:close/>
+                <a:lnTo>
+                  <a:pt x="1914406" y="533610"/>
+                </a:lnTo>
+                <a:close/>
+                <a:lnTo>
+                  <a:pt x="1922413" y="530550"/>
+                </a:lnTo>
+                <a:close/>
+                <a:lnTo>
+                  <a:pt x="1930408" y="527504"/>
+                </a:lnTo>
+                <a:close/>
+                <a:lnTo>
+                  <a:pt x="1938392" y="524471"/>
+                </a:lnTo>
+                <a:close/>
+                <a:lnTo>
+                  <a:pt x="1946364" y="521453"/>
+                </a:lnTo>
+                <a:close/>
+                <a:lnTo>
+                  <a:pt x="1954325" y="518447"/>
+                </a:lnTo>
+                <a:close/>
+                <a:lnTo>
+                  <a:pt x="1962275" y="515456"/>
+                </a:lnTo>
+                <a:close/>
+                <a:lnTo>
+                  <a:pt x="1970215" y="512477"/>
+                </a:lnTo>
+                <a:close/>
+                <a:lnTo>
+                  <a:pt x="1978143" y="509512"/>
+                </a:lnTo>
+                <a:close/>
+                <a:lnTo>
+                  <a:pt x="1986061" y="506560"/>
+                </a:lnTo>
+                <a:close/>
+                <a:lnTo>
+                  <a:pt x="1993968" y="503621"/>
+                </a:lnTo>
+                <a:close/>
+                <a:lnTo>
+                  <a:pt x="2001864" y="500696"/>
+                </a:lnTo>
+                <a:close/>
+                <a:lnTo>
+                  <a:pt x="2009750" y="497783"/>
+                </a:lnTo>
+                <a:close/>
+                <a:lnTo>
+                  <a:pt x="2017626" y="494883"/>
+                </a:lnTo>
+                <a:close/>
+                <a:lnTo>
+                  <a:pt x="2025491" y="491995"/>
+                </a:lnTo>
+                <a:close/>
+                <a:lnTo>
+                  <a:pt x="2033346" y="489121"/>
+                </a:lnTo>
+                <a:close/>
+                <a:lnTo>
+                  <a:pt x="2041191" y="486258"/>
+                </a:lnTo>
+                <a:close/>
+                <a:lnTo>
+                  <a:pt x="2049027" y="483408"/>
+                </a:lnTo>
+                <a:close/>
+                <a:lnTo>
+                  <a:pt x="2056852" y="480571"/>
+                </a:lnTo>
+                <a:close/>
+                <a:lnTo>
+                  <a:pt x="2064668" y="477746"/>
+                </a:lnTo>
+                <a:close/>
+                <a:lnTo>
+                  <a:pt x="2072474" y="474932"/>
+                </a:lnTo>
+                <a:close/>
+                <a:lnTo>
+                  <a:pt x="2080271" y="472131"/>
+                </a:lnTo>
+                <a:close/>
+                <a:lnTo>
+                  <a:pt x="2088058" y="469342"/>
+                </a:lnTo>
+                <a:close/>
+                <a:lnTo>
+                  <a:pt x="2095836" y="466564"/>
+                </a:lnTo>
+                <a:close/>
+                <a:lnTo>
+                  <a:pt x="2103605" y="463799"/>
+                </a:lnTo>
+                <a:close/>
+                <a:lnTo>
+                  <a:pt x="2111365" y="461044"/>
+                </a:lnTo>
+                <a:close/>
+                <a:lnTo>
+                  <a:pt x="2119116" y="458302"/>
+                </a:lnTo>
+                <a:close/>
+                <a:lnTo>
+                  <a:pt x="2126858" y="455570"/>
+                </a:lnTo>
+                <a:close/>
+                <a:lnTo>
+                  <a:pt x="2134591" y="452850"/>
+                </a:lnTo>
+                <a:close/>
+                <a:lnTo>
+                  <a:pt x="2142316" y="450142"/>
+                </a:lnTo>
+                <a:close/>
+                <a:lnTo>
+                  <a:pt x="2150032" y="447444"/>
+                </a:lnTo>
+                <a:close/>
+                <a:lnTo>
+                  <a:pt x="2157740" y="444758"/>
+                </a:lnTo>
+                <a:close/>
+                <a:lnTo>
+                  <a:pt x="2165439" y="442082"/>
+                </a:lnTo>
+                <a:close/>
+                <a:lnTo>
+                  <a:pt x="2173130" y="439417"/>
+                </a:lnTo>
+                <a:close/>
+                <a:lnTo>
+                  <a:pt x="2180813" y="436763"/>
+                </a:lnTo>
+                <a:close/>
+                <a:lnTo>
+                  <a:pt x="2188488" y="434120"/>
+                </a:lnTo>
+                <a:close/>
+                <a:lnTo>
+                  <a:pt x="2196156" y="431487"/>
+                </a:lnTo>
+                <a:close/>
+                <a:lnTo>
+                  <a:pt x="2203815" y="428864"/>
+                </a:lnTo>
+                <a:close/>
+                <a:lnTo>
+                  <a:pt x="2211467" y="426252"/>
+                </a:lnTo>
+                <a:close/>
+                <a:lnTo>
+                  <a:pt x="2219111" y="423650"/>
+                </a:lnTo>
+                <a:close/>
+                <a:lnTo>
+                  <a:pt x="2226747" y="421058"/>
+                </a:lnTo>
+                <a:close/>
+                <a:lnTo>
+                  <a:pt x="2234377" y="418476"/>
+                </a:lnTo>
+                <a:close/>
+                <a:lnTo>
+                  <a:pt x="2241999" y="415904"/>
+                </a:lnTo>
+                <a:close/>
+                <a:lnTo>
+                  <a:pt x="2249614" y="413342"/>
+                </a:lnTo>
+                <a:close/>
+                <a:lnTo>
+                  <a:pt x="2257222" y="410790"/>
+                </a:lnTo>
+                <a:close/>
+                <a:lnTo>
+                  <a:pt x="2264822" y="408247"/>
+                </a:lnTo>
+                <a:close/>
+                <a:lnTo>
+                  <a:pt x="2272417" y="405714"/>
+                </a:lnTo>
+                <a:close/>
+                <a:lnTo>
+                  <a:pt x="2280004" y="403190"/>
+                </a:lnTo>
+                <a:close/>
+                <a:lnTo>
+                  <a:pt x="2287585" y="400676"/>
+                </a:lnTo>
+                <a:close/>
+                <a:lnTo>
+                  <a:pt x="2295159" y="398171"/>
+                </a:lnTo>
+                <a:close/>
+                <a:lnTo>
+                  <a:pt x="2302727" y="395675"/>
+                </a:lnTo>
+                <a:close/>
+                <a:lnTo>
+                  <a:pt x="2310288" y="393188"/>
+                </a:lnTo>
+                <a:close/>
+                <a:lnTo>
+                  <a:pt x="2317844" y="390710"/>
+                </a:lnTo>
+                <a:close/>
+                <a:lnTo>
+                  <a:pt x="2325393" y="388241"/>
+                </a:lnTo>
+                <a:close/>
+                <a:lnTo>
+                  <a:pt x="2332936" y="385780"/>
+                </a:lnTo>
+                <a:close/>
+                <a:lnTo>
+                  <a:pt x="2340474" y="383329"/>
+                </a:lnTo>
+                <a:close/>
+                <a:lnTo>
+                  <a:pt x="2348005" y="380885"/>
+                </a:lnTo>
+                <a:close/>
+                <a:lnTo>
+                  <a:pt x="2355531" y="378451"/>
+                </a:lnTo>
+                <a:close/>
+                <a:lnTo>
+                  <a:pt x="2363052" y="376024"/>
+                </a:lnTo>
+                <a:close/>
+                <a:lnTo>
+                  <a:pt x="2370567" y="373606"/>
+                </a:lnTo>
+                <a:close/>
+                <a:lnTo>
+                  <a:pt x="2378077" y="371196"/>
+                </a:lnTo>
+                <a:close/>
+                <a:lnTo>
+                  <a:pt x="2385581" y="368794"/>
+                </a:lnTo>
+                <a:close/>
+                <a:lnTo>
+                  <a:pt x="2393080" y="366400"/>
+                </a:lnTo>
+                <a:close/>
+                <a:lnTo>
+                  <a:pt x="2400575" y="364014"/>
+                </a:lnTo>
+                <a:close/>
+                <a:lnTo>
+                  <a:pt x="2408064" y="361635"/>
+                </a:lnTo>
+                <a:close/>
+                <a:lnTo>
+                  <a:pt x="2415548" y="359265"/>
+                </a:lnTo>
+                <a:close/>
+                <a:lnTo>
+                  <a:pt x="2423028" y="356901"/>
+                </a:lnTo>
+                <a:close/>
+                <a:lnTo>
+                  <a:pt x="2430504" y="354546"/>
+                </a:lnTo>
+                <a:close/>
+                <a:lnTo>
+                  <a:pt x="2437974" y="352197"/>
+                </a:lnTo>
+                <a:close/>
+                <a:lnTo>
+                  <a:pt x="2445441" y="349856"/>
+                </a:lnTo>
+                <a:close/>
+                <a:lnTo>
+                  <a:pt x="2452903" y="347522"/>
+                </a:lnTo>
+                <a:close/>
+                <a:lnTo>
+                  <a:pt x="2460361" y="345195"/>
+                </a:lnTo>
+                <a:close/>
+                <a:lnTo>
+                  <a:pt x="2467815" y="342875"/>
+                </a:lnTo>
+                <a:close/>
+                <a:lnTo>
+                  <a:pt x="2475265" y="340562"/>
+                </a:lnTo>
+                <a:close/>
+                <a:lnTo>
+                  <a:pt x="2482711" y="338256"/>
+                </a:lnTo>
+                <a:close/>
+                <a:lnTo>
+                  <a:pt x="2490153" y="335956"/>
+                </a:lnTo>
+                <a:close/>
+                <a:lnTo>
+                  <a:pt x="2497592" y="333663"/>
+                </a:lnTo>
+                <a:close/>
+                <a:lnTo>
+                  <a:pt x="2505027" y="331377"/>
+                </a:lnTo>
+                <a:close/>
+                <a:lnTo>
+                  <a:pt x="2512459" y="329097"/>
+                </a:lnTo>
+                <a:close/>
+                <a:lnTo>
+                  <a:pt x="2519887" y="326823"/>
+                </a:lnTo>
+                <a:close/>
+                <a:lnTo>
+                  <a:pt x="2527312" y="324555"/>
+                </a:lnTo>
+                <a:close/>
+                <a:lnTo>
+                  <a:pt x="2534734" y="322293"/>
+                </a:lnTo>
+                <a:close/>
+                <a:lnTo>
+                  <a:pt x="2542154" y="320037"/>
+                </a:lnTo>
+                <a:close/>
+                <a:lnTo>
+                  <a:pt x="2549570" y="317788"/>
+                </a:lnTo>
+                <a:close/>
+                <a:lnTo>
+                  <a:pt x="2556983" y="315543"/>
+                </a:lnTo>
+                <a:close/>
+                <a:lnTo>
+                  <a:pt x="2564394" y="313305"/>
+                </a:lnTo>
+                <a:close/>
+                <a:lnTo>
+                  <a:pt x="2571802" y="311072"/>
+                </a:lnTo>
+                <a:close/>
+                <a:lnTo>
+                  <a:pt x="2579208" y="308845"/>
+                </a:lnTo>
+                <a:close/>
+                <a:lnTo>
+                  <a:pt x="2586611" y="306623"/>
+                </a:lnTo>
+                <a:close/>
+                <a:lnTo>
+                  <a:pt x="2594012" y="304406"/>
+                </a:lnTo>
+                <a:close/>
+                <a:lnTo>
+                  <a:pt x="2601411" y="302195"/>
+                </a:lnTo>
+                <a:close/>
+                <a:lnTo>
+                  <a:pt x="2608808" y="299988"/>
+                </a:lnTo>
+                <a:close/>
+                <a:lnTo>
+                  <a:pt x="2616203" y="297787"/>
+                </a:lnTo>
+                <a:close/>
+                <a:lnTo>
+                  <a:pt x="2623596" y="295590"/>
+                </a:lnTo>
+                <a:close/>
+                <a:lnTo>
+                  <a:pt x="2630988" y="293399"/>
+                </a:lnTo>
+                <a:close/>
+                <a:lnTo>
+                  <a:pt x="2638377" y="291212"/>
+                </a:lnTo>
+                <a:close/>
+                <a:lnTo>
+                  <a:pt x="2645766" y="289029"/>
+                </a:lnTo>
+                <a:close/>
+                <a:lnTo>
+                  <a:pt x="2653153" y="286851"/>
+                </a:lnTo>
+                <a:close/>
+                <a:lnTo>
+                  <a:pt x="2660538" y="284678"/>
+                </a:lnTo>
+                <a:close/>
+                <a:lnTo>
+                  <a:pt x="2667923" y="282508"/>
+                </a:lnTo>
+                <a:close/>
+                <a:lnTo>
+                  <a:pt x="2675306" y="280343"/>
+                </a:lnTo>
+                <a:close/>
+                <a:lnTo>
+                  <a:pt x="2682688" y="278182"/>
+                </a:lnTo>
+                <a:close/>
+                <a:lnTo>
+                  <a:pt x="2690070" y="276025"/>
+                </a:lnTo>
+                <a:close/>
+                <a:lnTo>
+                  <a:pt x="2697450" y="273872"/>
+                </a:lnTo>
+                <a:close/>
+                <a:lnTo>
+                  <a:pt x="2704830" y="271723"/>
+                </a:lnTo>
+                <a:close/>
+                <a:lnTo>
+                  <a:pt x="2712210" y="269577"/>
+                </a:lnTo>
+                <a:close/>
+                <a:lnTo>
+                  <a:pt x="2719589" y="267435"/>
+                </a:lnTo>
+                <a:close/>
+                <a:lnTo>
+                  <a:pt x="2726968" y="265297"/>
+                </a:lnTo>
+                <a:close/>
+                <a:lnTo>
+                  <a:pt x="2734346" y="263162"/>
+                </a:lnTo>
+                <a:close/>
+                <a:lnTo>
+                  <a:pt x="2741724" y="261030"/>
+                </a:lnTo>
+                <a:close/>
+                <a:lnTo>
+                  <a:pt x="2749103" y="258901"/>
+                </a:lnTo>
+                <a:close/>
+                <a:lnTo>
+                  <a:pt x="2756481" y="256776"/>
+                </a:lnTo>
+                <a:close/>
+                <a:lnTo>
+                  <a:pt x="2763860" y="254653"/>
+                </a:lnTo>
+                <a:close/>
+                <a:lnTo>
+                  <a:pt x="2771239" y="252534"/>
+                </a:lnTo>
+                <a:close/>
+                <a:lnTo>
+                  <a:pt x="2778618" y="250417"/>
+                </a:lnTo>
+                <a:close/>
+                <a:lnTo>
+                  <a:pt x="2785998" y="248303"/>
+                </a:lnTo>
+                <a:close/>
+                <a:lnTo>
+                  <a:pt x="2793378" y="246192"/>
+                </a:lnTo>
+                <a:close/>
+                <a:lnTo>
+                  <a:pt x="2800759" y="244083"/>
+                </a:lnTo>
+                <a:close/>
+                <a:lnTo>
+                  <a:pt x="2808141" y="241976"/>
+                </a:lnTo>
+                <a:close/>
+                <a:lnTo>
+                  <a:pt x="2815524" y="239872"/>
+                </a:lnTo>
+                <a:close/>
+                <a:lnTo>
+                  <a:pt x="2822908" y="237770"/>
+                </a:lnTo>
+                <a:close/>
+                <a:lnTo>
+                  <a:pt x="2830293" y="235670"/>
+                </a:lnTo>
+                <a:close/>
+                <a:lnTo>
+                  <a:pt x="2837679" y="233572"/>
+                </a:lnTo>
+                <a:close/>
+                <a:lnTo>
+                  <a:pt x="2845067" y="231477"/>
+                </a:lnTo>
+                <a:close/>
+                <a:lnTo>
+                  <a:pt x="2852456" y="229382"/>
+                </a:lnTo>
+                <a:close/>
+                <a:lnTo>
+                  <a:pt x="2859847" y="227290"/>
+                </a:lnTo>
+                <a:close/>
+                <a:lnTo>
+                  <a:pt x="2867239" y="225199"/>
+                </a:lnTo>
+                <a:close/>
+                <a:lnTo>
+                  <a:pt x="2874634" y="223110"/>
+                </a:lnTo>
+                <a:close/>
+                <a:lnTo>
+                  <a:pt x="2882030" y="221022"/>
+                </a:lnTo>
+                <a:close/>
+                <a:lnTo>
+                  <a:pt x="2889428" y="218936"/>
+                </a:lnTo>
+                <a:close/>
+                <a:lnTo>
+                  <a:pt x="2896828" y="216851"/>
+                </a:lnTo>
+                <a:close/>
+                <a:lnTo>
+                  <a:pt x="2904231" y="214766"/>
+                </a:lnTo>
+                <a:close/>
+                <a:lnTo>
+                  <a:pt x="2911635" y="212683"/>
+                </a:lnTo>
+                <a:close/>
+                <a:lnTo>
+                  <a:pt x="2919042" y="210601"/>
+                </a:lnTo>
+                <a:close/>
+                <a:lnTo>
+                  <a:pt x="2926452" y="208520"/>
+                </a:lnTo>
+                <a:close/>
+                <a:lnTo>
+                  <a:pt x="2933865" y="206439"/>
+                </a:lnTo>
+                <a:close/>
+                <a:lnTo>
+                  <a:pt x="2941280" y="204359"/>
+                </a:lnTo>
+                <a:close/>
+                <a:lnTo>
+                  <a:pt x="2948698" y="202280"/>
+                </a:lnTo>
+                <a:close/>
+                <a:lnTo>
+                  <a:pt x="2956118" y="200201"/>
+                </a:lnTo>
+                <a:close/>
+                <a:lnTo>
+                  <a:pt x="2963542" y="198122"/>
+                </a:lnTo>
+                <a:close/>
+                <a:lnTo>
+                  <a:pt x="2970970" y="196044"/>
+                </a:lnTo>
+                <a:close/>
+                <a:lnTo>
+                  <a:pt x="2978400" y="193966"/>
+                </a:lnTo>
+                <a:close/>
+                <a:lnTo>
+                  <a:pt x="2985834" y="191887"/>
+                </a:lnTo>
+                <a:close/>
+                <a:lnTo>
+                  <a:pt x="2993271" y="189809"/>
+                </a:lnTo>
+                <a:close/>
+                <a:lnTo>
+                  <a:pt x="3000712" y="187731"/>
+                </a:lnTo>
+                <a:close/>
+                <a:lnTo>
+                  <a:pt x="3008156" y="185652"/>
+                </a:lnTo>
+                <a:close/>
+                <a:lnTo>
+                  <a:pt x="3015605" y="183573"/>
+                </a:lnTo>
+                <a:close/>
+                <a:lnTo>
+                  <a:pt x="3023057" y="181493"/>
+                </a:lnTo>
+                <a:close/>
+                <a:lnTo>
+                  <a:pt x="3030513" y="179413"/>
+                </a:lnTo>
+                <a:close/>
+                <a:lnTo>
+                  <a:pt x="3037974" y="177332"/>
+                </a:lnTo>
+                <a:close/>
+                <a:lnTo>
+                  <a:pt x="3045439" y="175251"/>
+                </a:lnTo>
+                <a:close/>
+                <a:lnTo>
+                  <a:pt x="3052908" y="173169"/>
+                </a:lnTo>
+                <a:close/>
+                <a:lnTo>
+                  <a:pt x="3060381" y="171085"/>
+                </a:lnTo>
+                <a:close/>
+                <a:lnTo>
+                  <a:pt x="3067859" y="169001"/>
+                </a:lnTo>
+                <a:close/>
+                <a:lnTo>
+                  <a:pt x="3075342" y="166916"/>
+                </a:lnTo>
+                <a:close/>
+                <a:lnTo>
+                  <a:pt x="3082829" y="164829"/>
+                </a:lnTo>
+                <a:close/>
+                <a:lnTo>
+                  <a:pt x="3090321" y="162741"/>
+                </a:lnTo>
+                <a:close/>
+                <a:lnTo>
+                  <a:pt x="3097819" y="160651"/>
+                </a:lnTo>
+                <a:close/>
+                <a:lnTo>
+                  <a:pt x="3105321" y="158560"/>
+                </a:lnTo>
+                <a:close/>
+                <a:lnTo>
+                  <a:pt x="3112829" y="156467"/>
+                </a:lnTo>
+                <a:close/>
+                <a:lnTo>
+                  <a:pt x="3120341" y="154373"/>
+                </a:lnTo>
+                <a:close/>
+                <a:lnTo>
+                  <a:pt x="3127860" y="152277"/>
+                </a:lnTo>
+                <a:close/>
+                <a:lnTo>
+                  <a:pt x="3135384" y="150179"/>
+                </a:lnTo>
+                <a:close/>
+                <a:lnTo>
+                  <a:pt x="3142913" y="148078"/>
+                </a:lnTo>
+                <a:close/>
+                <a:lnTo>
+                  <a:pt x="3150448" y="145976"/>
+                </a:lnTo>
+                <a:close/>
+                <a:lnTo>
+                  <a:pt x="3157989" y="143871"/>
+                </a:lnTo>
+                <a:close/>
+                <a:lnTo>
+                  <a:pt x="3165536" y="141764"/>
+                </a:lnTo>
+                <a:close/>
+                <a:lnTo>
+                  <a:pt x="3173089" y="139655"/>
+                </a:lnTo>
+                <a:close/>
+                <a:lnTo>
+                  <a:pt x="3180648" y="137543"/>
+                </a:lnTo>
+                <a:close/>
+                <a:lnTo>
+                  <a:pt x="3188213" y="135429"/>
+                </a:lnTo>
+                <a:close/>
+                <a:lnTo>
+                  <a:pt x="3195785" y="133311"/>
+                </a:lnTo>
+                <a:close/>
+                <a:lnTo>
+                  <a:pt x="3203363" y="131191"/>
+                </a:lnTo>
+                <a:close/>
+                <a:lnTo>
+                  <a:pt x="3210948" y="129068"/>
+                </a:lnTo>
+                <a:close/>
+                <a:lnTo>
+                  <a:pt x="3218539" y="126942"/>
+                </a:lnTo>
+                <a:close/>
+                <a:lnTo>
+                  <a:pt x="3226137" y="124813"/>
+                </a:lnTo>
+                <a:close/>
+                <a:lnTo>
+                  <a:pt x="3233742" y="122680"/>
+                </a:lnTo>
+                <a:close/>
+                <a:lnTo>
+                  <a:pt x="3241354" y="120545"/>
+                </a:lnTo>
+                <a:close/>
+                <a:lnTo>
+                  <a:pt x="3248974" y="118406"/>
+                </a:lnTo>
+                <a:close/>
+                <a:lnTo>
+                  <a:pt x="3256600" y="116263"/>
+                </a:lnTo>
+                <a:close/>
+                <a:lnTo>
+                  <a:pt x="3264234" y="114117"/>
+                </a:lnTo>
+                <a:close/>
+                <a:lnTo>
+                  <a:pt x="3271875" y="111967"/>
+                </a:lnTo>
+                <a:close/>
+                <a:lnTo>
+                  <a:pt x="3279523" y="109813"/>
+                </a:lnTo>
+                <a:close/>
+                <a:lnTo>
+                  <a:pt x="3287180" y="107655"/>
+                </a:lnTo>
+                <a:close/>
+                <a:lnTo>
+                  <a:pt x="3294844" y="105493"/>
+                </a:lnTo>
+                <a:close/>
+                <a:lnTo>
+                  <a:pt x="3302516" y="103327"/>
+                </a:lnTo>
+                <a:close/>
+                <a:lnTo>
+                  <a:pt x="3310196" y="101157"/>
+                </a:lnTo>
+                <a:close/>
+                <a:lnTo>
+                  <a:pt x="3317883" y="98983"/>
+                </a:lnTo>
+                <a:close/>
+                <a:lnTo>
+                  <a:pt x="3325580" y="96804"/>
+                </a:lnTo>
+                <a:close/>
+                <a:lnTo>
+                  <a:pt x="3333284" y="94621"/>
+                </a:lnTo>
+                <a:close/>
+                <a:lnTo>
+                  <a:pt x="3340997" y="92433"/>
+                </a:lnTo>
+                <a:close/>
+                <a:lnTo>
+                  <a:pt x="3348718" y="90240"/>
+                </a:lnTo>
+                <a:close/>
+                <a:lnTo>
+                  <a:pt x="3356448" y="88043"/>
+                </a:lnTo>
+                <a:close/>
+                <a:lnTo>
+                  <a:pt x="3364186" y="85840"/>
+                </a:lnTo>
+                <a:close/>
+                <a:lnTo>
+                  <a:pt x="3371934" y="83633"/>
+                </a:lnTo>
+                <a:close/>
+                <a:lnTo>
+                  <a:pt x="3379690" y="81420"/>
+                </a:lnTo>
+                <a:close/>
+                <a:lnTo>
+                  <a:pt x="3387455" y="79203"/>
+                </a:lnTo>
+                <a:close/>
+                <a:lnTo>
+                  <a:pt x="3395229" y="76980"/>
+                </a:lnTo>
+                <a:close/>
+                <a:lnTo>
+                  <a:pt x="3403013" y="74751"/>
+                </a:lnTo>
+                <a:close/>
+                <a:lnTo>
+                  <a:pt x="3410806" y="72518"/>
+                </a:lnTo>
+                <a:close/>
+                <a:lnTo>
+                  <a:pt x="3418608" y="70278"/>
+                </a:lnTo>
+                <a:close/>
+                <a:lnTo>
+                  <a:pt x="3426420" y="68033"/>
+                </a:lnTo>
+                <a:close/>
+                <a:lnTo>
+                  <a:pt x="3434242" y="65782"/>
+                </a:lnTo>
+                <a:close/>
+                <a:lnTo>
+                  <a:pt x="3442073" y="63525"/>
+                </a:lnTo>
+                <a:close/>
+                <a:lnTo>
+                  <a:pt x="3449915" y="61262"/>
+                </a:lnTo>
+                <a:close/>
+                <a:lnTo>
+                  <a:pt x="3457766" y="58993"/>
+                </a:lnTo>
+                <a:close/>
+                <a:lnTo>
+                  <a:pt x="3465627" y="56718"/>
+                </a:lnTo>
+                <a:close/>
+                <a:lnTo>
+                  <a:pt x="3473499" y="54437"/>
+                </a:lnTo>
+                <a:close/>
+                <a:lnTo>
+                  <a:pt x="3481380" y="52149"/>
+                </a:lnTo>
+                <a:close/>
+                <a:lnTo>
+                  <a:pt x="3489273" y="49855"/>
+                </a:lnTo>
+                <a:close/>
+                <a:lnTo>
+                  <a:pt x="3497175" y="47554"/>
+                </a:lnTo>
+                <a:close/>
+                <a:lnTo>
+                  <a:pt x="3505089" y="45246"/>
+                </a:lnTo>
+                <a:close/>
+                <a:lnTo>
+                  <a:pt x="3513013" y="42932"/>
+                </a:lnTo>
+                <a:close/>
+                <a:lnTo>
+                  <a:pt x="3520948" y="40610"/>
+                </a:lnTo>
+                <a:close/>
+                <a:lnTo>
+                  <a:pt x="3528893" y="38282"/>
+                </a:lnTo>
+                <a:close/>
+                <a:lnTo>
+                  <a:pt x="3536850" y="35947"/>
+                </a:lnTo>
+                <a:close/>
+                <a:lnTo>
+                  <a:pt x="3544818" y="33604"/>
+                </a:lnTo>
+                <a:close/>
+                <a:lnTo>
+                  <a:pt x="3552797" y="31255"/>
+                </a:lnTo>
+                <a:close/>
+                <a:lnTo>
+                  <a:pt x="3560788" y="28897"/>
+                </a:lnTo>
+                <a:close/>
+                <a:lnTo>
+                  <a:pt x="3568790" y="26533"/>
+                </a:lnTo>
+                <a:close/>
+                <a:lnTo>
+                  <a:pt x="3576804" y="24161"/>
+                </a:lnTo>
+                <a:close/>
+                <a:lnTo>
+                  <a:pt x="3584829" y="21781"/>
+                </a:lnTo>
+                <a:close/>
+                <a:lnTo>
+                  <a:pt x="3592866" y="19393"/>
+                </a:lnTo>
+                <a:close/>
+                <a:lnTo>
+                  <a:pt x="3600915" y="16998"/>
+                </a:lnTo>
+                <a:close/>
+                <a:lnTo>
+                  <a:pt x="3608976" y="14594"/>
+                </a:lnTo>
+                <a:close/>
+                <a:lnTo>
+                  <a:pt x="3617049" y="12182"/>
+                </a:lnTo>
+                <a:close/>
+                <a:lnTo>
+                  <a:pt x="3625135" y="9763"/>
+                </a:lnTo>
+                <a:close/>
+                <a:lnTo>
+                  <a:pt x="3633232" y="7335"/>
+                </a:lnTo>
+                <a:close/>
+                <a:lnTo>
+                  <a:pt x="3641342" y="4898"/>
+                </a:lnTo>
+                <a:close/>
+                <a:lnTo>
+                  <a:pt x="3649465" y="2453"/>
+                </a:lnTo>
+                <a:close/>
+                <a:lnTo>
+                  <a:pt x="3657600" y="0"/>
                 </a:lnTo>
                 <a:close/>
               </a:path>
@@ -5623,8 +5623,8 @@
         </p:nvCxnSpPr>
         <p:spPr>
           <a:xfrm flipV="1">
-            <a:off x="6400800.0" y="1108710.0"/>
-            <a:ext cx="0.0" cy="1463040.0"/>
+            <a:off x="6400800.0" y="1200150.0"/>
+            <a:ext cx="0.0" cy="1371600.0"/>
           </a:xfrm>
           <a:prstGeom prst="line">
             <a:avLst/>
@@ -5659,7 +5659,7 @@
         </p:nvSpPr>
         <p:spPr>
           <a:xfrm>
-            <a:off x="6311900" y="1019810"/>
+            <a:off x="6311900" y="1111250"/>
             <a:ext cx="177800" cy="177800"/>
           </a:xfrm>
           <a:prstGeom prst="ellipse">
@@ -5704,7 +5704,7 @@
         </p:nvSpPr>
         <p:spPr>
           <a:xfrm>
-            <a:off x="6311900" y="1614170"/>
+            <a:off x="6311900" y="1797050"/>
             <a:ext cx="177800" cy="177800"/>
           </a:xfrm>
           <a:prstGeom prst="ellipse">
@@ -5749,8 +5749,8 @@
         </p:nvCxnSpPr>
         <p:spPr>
           <a:xfrm flipV="1">
-            <a:off x="6035040.0" y="1177290.0"/>
-            <a:ext cx="274320.0" cy="114300.0"/>
+            <a:off x="5852160.0" y="1383030.0"/>
+            <a:ext cx="320040.0" cy="91440.0"/>
           </a:xfrm>
           <a:prstGeom prst="line">
             <a:avLst/>
@@ -5784,8 +5784,8 @@
         </p:nvCxnSpPr>
         <p:spPr>
           <a:xfrm flipH="1">
-            <a:off x="6492240.0" y="1062990.0"/>
-            <a:ext cx="274320.0" cy="68580.0"/>
+            <a:off x="6629400.0" y="1245870.0"/>
+            <a:ext cx="320040.0" cy="45720.0"/>
           </a:xfrm>
           <a:prstGeom prst="line">
             <a:avLst/>
@@ -5855,7 +5855,7 @@
         </p:nvSpPr>
         <p:spPr>
           <a:xfrm>
-            <a:off x="6146800" y="2437130"/>
+            <a:off x="6146800" y="2528570"/>
             <a:ext cx="1524000" cy="508000"/>
           </a:xfrm>
           <a:prstGeom prst="rect">
@@ -5891,7 +5891,7 @@
         </p:nvSpPr>
         <p:spPr>
           <a:xfrm>
-            <a:off x="4180840" y="2391410"/>
+            <a:off x="4135120" y="2437130"/>
             <a:ext cx="1524000" cy="508000"/>
           </a:xfrm>
           <a:prstGeom prst="rect">
